--- a/blocks/F_integration/M22_final_project/M22_Final_Project_가상_AGV_자율_미션.pptx
+++ b/blocks/F_integration/M22_final_project/M22_Final_Project_가상_AGV_자율_미션.pptx
@@ -48,6 +48,8 @@
     <p:sldId id="296" r:id="rId48"/>
     <p:sldId id="297" r:id="rId49"/>
     <p:sldId id="298" r:id="rId50"/>
+    <p:sldId id="299" r:id="rId51"/>
+    <p:sldId id="300" r:id="rId52"/>
   </p:sldIdLst>
   <p:sldSz cx="12191999" cy="6858000" type="screen4x3"/>
   <p:notesSz cx="6858000" cy="9144000"/>
@@ -994,7 +996,7 @@
           <a:lstStyle/>
           <a:p>
             <a:r>
-              <a:t>[설명] ~/agv_ws/src/agv_gazebo/worlds/warehouse.sdf의 전체 파일을 1/10 구간으로 작성한다.</a:t>
+              <a:t>[설명] ~/agv_ws/src/agv_gazebo/worlds/warehouse.sdf의 전체 파일을 1/11 구간으로 작성한다.</a:t>
             </a:r>
           </a:p>
           <a:p>
@@ -1084,7 +1086,7 @@
           <a:lstStyle/>
           <a:p>
             <a:r>
-              <a:t>[설명] ~/agv_ws/src/agv_gazebo/worlds/warehouse.sdf의 전체 파일을 2/10 구간으로 작성한다.</a:t>
+              <a:t>[설명] ~/agv_ws/src/agv_gazebo/worlds/warehouse.sdf의 전체 파일을 2/11 구간으로 작성한다.</a:t>
             </a:r>
           </a:p>
           <a:p>
@@ -1174,7 +1176,7 @@
           <a:lstStyle/>
           <a:p>
             <a:r>
-              <a:t>[설명] ~/agv_ws/src/agv_gazebo/worlds/warehouse.sdf의 전체 파일을 3/10 구간으로 작성한다.</a:t>
+              <a:t>[설명] ~/agv_ws/src/agv_gazebo/worlds/warehouse.sdf의 전체 파일을 3/11 구간으로 작성한다.</a:t>
             </a:r>
           </a:p>
           <a:p>
@@ -1264,7 +1266,7 @@
           <a:lstStyle/>
           <a:p>
             <a:r>
-              <a:t>[설명] ~/agv_ws/src/agv_gazebo/worlds/warehouse.sdf의 전체 파일을 4/10 구간으로 작성한다.</a:t>
+              <a:t>[설명] ~/agv_ws/src/agv_gazebo/worlds/warehouse.sdf의 전체 파일을 4/11 구간으로 작성한다.</a:t>
             </a:r>
           </a:p>
           <a:p>
@@ -1354,7 +1356,7 @@
           <a:lstStyle/>
           <a:p>
             <a:r>
-              <a:t>[설명] ~/agv_ws/src/agv_gazebo/worlds/warehouse.sdf의 전체 파일을 5/10 구간으로 작성한다.</a:t>
+              <a:t>[설명] ~/agv_ws/src/agv_gazebo/worlds/warehouse.sdf의 전체 파일을 5/11 구간으로 작성한다.</a:t>
             </a:r>
           </a:p>
           <a:p>
@@ -1444,7 +1446,7 @@
           <a:lstStyle/>
           <a:p>
             <a:r>
-              <a:t>[설명] ~/agv_ws/src/agv_gazebo/worlds/warehouse.sdf의 전체 파일을 6/10 구간으로 작성한다.</a:t>
+              <a:t>[설명] ~/agv_ws/src/agv_gazebo/worlds/warehouse.sdf의 전체 파일을 6/11 구간으로 작성한다.</a:t>
             </a:r>
           </a:p>
           <a:p>
@@ -1624,7 +1626,7 @@
           <a:lstStyle/>
           <a:p>
             <a:r>
-              <a:t>[설명] ~/agv_ws/src/agv_gazebo/worlds/warehouse.sdf의 전체 파일을 7/10 구간으로 작성한다.</a:t>
+              <a:t>[설명] ~/agv_ws/src/agv_gazebo/worlds/warehouse.sdf의 전체 파일을 7/11 구간으로 작성한다.</a:t>
             </a:r>
           </a:p>
           <a:p>
@@ -1714,7 +1716,7 @@
           <a:lstStyle/>
           <a:p>
             <a:r>
-              <a:t>[설명] ~/agv_ws/src/agv_gazebo/worlds/warehouse.sdf의 전체 파일을 8/10 구간으로 작성한다.</a:t>
+              <a:t>[설명] ~/agv_ws/src/agv_gazebo/worlds/warehouse.sdf의 전체 파일을 8/11 구간으로 작성한다.</a:t>
             </a:r>
           </a:p>
           <a:p>
@@ -1804,7 +1806,7 @@
           <a:lstStyle/>
           <a:p>
             <a:r>
-              <a:t>[설명] ~/agv_ws/src/agv_gazebo/worlds/warehouse.sdf의 전체 파일을 9/10 구간으로 작성한다.</a:t>
+              <a:t>[설명] ~/agv_ws/src/agv_gazebo/worlds/warehouse.sdf의 전체 파일을 9/11 구간으로 작성한다.</a:t>
             </a:r>
           </a:p>
           <a:p>
@@ -1894,7 +1896,7 @@
           <a:lstStyle/>
           <a:p>
             <a:r>
-              <a:t>[설명] ~/agv_ws/src/agv_gazebo/worlds/warehouse.sdf의 전체 파일을 10/10 구간으로 작성한다.</a:t>
+              <a:t>[설명] ~/agv_ws/src/agv_gazebo/worlds/warehouse.sdf의 전체 파일을 10/11 구간으로 작성한다.</a:t>
             </a:r>
           </a:p>
           <a:p>
@@ -1984,12 +1986,12 @@
           <a:lstStyle/>
           <a:p>
             <a:r>
-              <a:t>[설명] ~/agv_ws/src/agv_mission/agv_mission/mission_manager.py의 전체 파일을 1/5 구간으로 작성한다.</a:t>
-            </a:r>
-          </a:p>
-          <a:p>
-            <a:r>
-              <a:t>[실행] nano ~/agv_ws/src/agv_mission/agv_mission/mission_manager.py</a:t>
+              <a:t>[설명] ~/agv_ws/src/agv_gazebo/worlds/warehouse.sdf의 전체 파일을 11/11 구간으로 작성한다.</a:t>
+            </a:r>
+          </a:p>
+          <a:p>
+            <a:r>
+              <a:t>[실행] nano ~/agv_ws/src/agv_gazebo/worlds/warehouse.sdf</a:t>
             </a:r>
           </a:p>
           <a:p>
@@ -2074,7 +2076,7 @@
           <a:lstStyle/>
           <a:p>
             <a:r>
-              <a:t>[설명] ~/agv_ws/src/agv_mission/agv_mission/mission_manager.py의 전체 파일을 2/5 구간으로 작성한다.</a:t>
+              <a:t>[설명] ~/agv_ws/src/agv_mission/agv_mission/mission_manager.py의 전체 파일을 1/6 구간으로 작성한다.</a:t>
             </a:r>
           </a:p>
           <a:p>
@@ -2164,7 +2166,7 @@
           <a:lstStyle/>
           <a:p>
             <a:r>
-              <a:t>[설명] ~/agv_ws/src/agv_mission/agv_mission/mission_manager.py의 전체 파일을 3/5 구간으로 작성한다.</a:t>
+              <a:t>[설명] ~/agv_ws/src/agv_mission/agv_mission/mission_manager.py의 전체 파일을 2/6 구간으로 작성한다.</a:t>
             </a:r>
           </a:p>
           <a:p>
@@ -2254,7 +2256,7 @@
           <a:lstStyle/>
           <a:p>
             <a:r>
-              <a:t>[설명] ~/agv_ws/src/agv_mission/agv_mission/mission_manager.py의 전체 파일을 4/5 구간으로 작성한다.</a:t>
+              <a:t>[설명] ~/agv_ws/src/agv_mission/agv_mission/mission_manager.py의 전체 파일을 3/6 구간으로 작성한다.</a:t>
             </a:r>
           </a:p>
           <a:p>
@@ -2344,7 +2346,7 @@
           <a:lstStyle/>
           <a:p>
             <a:r>
-              <a:t>[설명] ~/agv_ws/src/agv_mission/agv_mission/mission_manager.py의 전체 파일을 5/5 구간으로 작성한다.</a:t>
+              <a:t>[설명] ~/agv_ws/src/agv_mission/agv_mission/mission_manager.py의 전체 파일을 4/6 구간으로 작성한다.</a:t>
             </a:r>
           </a:p>
           <a:p>
@@ -2434,12 +2436,12 @@
           <a:lstStyle/>
           <a:p>
             <a:r>
-              <a:t>[설명] ~/agv_ws/src/agv_control/agv_control/safety_controller.py의 전체 파일을 1/4 구간으로 작성한다.</a:t>
-            </a:r>
-          </a:p>
-          <a:p>
-            <a:r>
-              <a:t>[실행] nano ~/agv_ws/src/agv_control/agv_control/safety_controller.py</a:t>
+              <a:t>[설명] ~/agv_ws/src/agv_mission/agv_mission/mission_manager.py의 전체 파일을 5/6 구간으로 작성한다.</a:t>
+            </a:r>
+          </a:p>
+          <a:p>
+            <a:r>
+              <a:t>[실행] nano ~/agv_ws/src/agv_mission/agv_mission/mission_manager.py</a:t>
             </a:r>
           </a:p>
           <a:p>
@@ -2614,12 +2616,12 @@
           <a:lstStyle/>
           <a:p>
             <a:r>
-              <a:t>[설명] ~/agv_ws/src/agv_control/agv_control/safety_controller.py의 전체 파일을 2/4 구간으로 작성한다.</a:t>
-            </a:r>
-          </a:p>
-          <a:p>
-            <a:r>
-              <a:t>[실행] nano ~/agv_ws/src/agv_control/agv_control/safety_controller.py</a:t>
+              <a:t>[설명] ~/agv_ws/src/agv_mission/agv_mission/mission_manager.py의 전체 파일을 6/6 구간으로 작성한다.</a:t>
+            </a:r>
+          </a:p>
+          <a:p>
+            <a:r>
+              <a:t>[실행] nano ~/agv_ws/src/agv_mission/agv_mission/mission_manager.py</a:t>
             </a:r>
           </a:p>
           <a:p>
@@ -2704,7 +2706,7 @@
           <a:lstStyle/>
           <a:p>
             <a:r>
-              <a:t>[설명] ~/agv_ws/src/agv_control/agv_control/safety_controller.py의 전체 파일을 3/4 구간으로 작성한다.</a:t>
+              <a:t>[설명] ~/agv_ws/src/agv_control/agv_control/safety_controller.py의 전체 파일을 1/4 구간으로 작성한다.</a:t>
             </a:r>
           </a:p>
           <a:p>
@@ -2794,7 +2796,7 @@
           <a:lstStyle/>
           <a:p>
             <a:r>
-              <a:t>[설명] ~/agv_ws/src/agv_control/agv_control/safety_controller.py의 전체 파일을 4/4 구간으로 작성한다.</a:t>
+              <a:t>[설명] ~/agv_ws/src/agv_control/agv_control/safety_controller.py의 전체 파일을 2/4 구간으로 작성한다.</a:t>
             </a:r>
           </a:p>
           <a:p>
@@ -2884,22 +2886,17 @@
           <a:lstStyle/>
           <a:p>
             <a:r>
-              <a:t>[설명] build/source/run을 생략 없이 실행한다.</a:t>
-            </a:r>
-          </a:p>
-          <a:p>
-            <a:r>
-              <a:t>[실행] cd ~/agv_ws &amp;&amp; source install/setup.bash</a:t>
-            </a:r>
-          </a:p>
-          <a:p>
-            <a:r>
-              <a:t>ros2 launch agv_bringup agv_sim.launch.py</a:t>
-            </a:r>
-          </a:p>
-          <a:p>
-            <a:r>
-              <a:t>[확인] 한 launch 실행, RViz/Gazebo 확인, mission log, rosbag 기록을 제출 체크리스트로 남긴다.</a:t>
+              <a:t>[설명] ~/agv_ws/src/agv_control/agv_control/safety_controller.py의 전체 파일을 3/4 구간으로 작성한다.</a:t>
+            </a:r>
+          </a:p>
+          <a:p>
+            <a:r>
+              <a:t>[실행] nano ~/agv_ws/src/agv_control/agv_control/safety_controller.py</a:t>
+            </a:r>
+          </a:p>
+          <a:p>
+            <a:r>
+              <a:t>[확인] 코드를 저장하고 다음 코드 슬라이드 또는 build 단계로 이동한다.</a:t>
             </a:r>
           </a:p>
           <a:p>
@@ -2909,7 +2906,7 @@
           </a:p>
           <a:p>
             <a:r>
-              <a:t>[오류] 오류가 나면 현재 폴더, source, 파일 경로를 먼저 확인한다.</a:t>
+              <a:t>[오류] 들여쓰기·XML 태그·따옴표가 슬라이드와 정확히 같은지 확인한다.</a:t>
             </a:r>
           </a:p>
         </p:txBody>
@@ -2979,17 +2976,17 @@
           <a:lstStyle/>
           <a:p>
             <a:r>
-              <a:t>[설명] 실제 Ubuntu/ROS 2 환경에서 생성한 검증 화면이다.</a:t>
-            </a:r>
-          </a:p>
-          <a:p>
-            <a:r>
-              <a:t>[실행] 슬라이드의 명령 또는 파일 작성 단계를 진행한다.</a:t>
-            </a:r>
-          </a:p>
-          <a:p>
-            <a:r>
-              <a:t>[확인] 캡처의 명령과 다음 슬라이드의 검증 명령을 비교한다.</a:t>
+              <a:t>[설명] ~/agv_ws/src/agv_control/agv_control/safety_controller.py의 전체 파일을 4/4 구간으로 작성한다.</a:t>
+            </a:r>
+          </a:p>
+          <a:p>
+            <a:r>
+              <a:t>[실행] nano ~/agv_ws/src/agv_control/agv_control/safety_controller.py</a:t>
+            </a:r>
+          </a:p>
+          <a:p>
+            <a:r>
+              <a:t>[확인] 코드를 저장하고 다음 코드 슬라이드 또는 build 단계로 이동한다.</a:t>
             </a:r>
           </a:p>
           <a:p>
@@ -2999,7 +2996,7 @@
           </a:p>
           <a:p>
             <a:r>
-              <a:t>[오류] 오류가 나면 현재 폴더, source, 파일 경로를 먼저 확인한다.</a:t>
+              <a:t>[오류] 들여쓰기·XML 태그·따옴표가 슬라이드와 정확히 같은지 확인한다.</a:t>
             </a:r>
           </a:p>
         </p:txBody>
@@ -3069,22 +3066,17 @@
           <a:lstStyle/>
           <a:p>
             <a:r>
-              <a:t>[설명] 검증 명령은 GUI 결과와 별도로 실행해 재현 가능한 완료 기준을 만든다.</a:t>
-            </a:r>
-          </a:p>
-          <a:p>
-            <a:r>
-              <a:t>[실행] ros2 launch agv_bringup agv_sim.launch.py --show-args</a:t>
-            </a:r>
-          </a:p>
-          <a:p>
-            <a:r>
-              <a:t>ros2 node list</a:t>
-            </a:r>
-          </a:p>
-          <a:p>
-            <a:r>
-              <a:t>ros2 topic list | rg '/scan|/imu/data|/odom|/camera/image_raw|/cmd_vel'</a:t>
+              <a:t>[설명] build/source/run을 생략 없이 실행한다.</a:t>
+            </a:r>
+          </a:p>
+          <a:p>
+            <a:r>
+              <a:t>[실행] cd ~/agv_ws &amp;&amp; source install/setup.bash</a:t>
+            </a:r>
+          </a:p>
+          <a:p>
+            <a:r>
+              <a:t>ros2 launch agv_bringup agv_sim.launch.py</a:t>
             </a:r>
           </a:p>
           <a:p>
@@ -3169,7 +3161,7 @@
           <a:lstStyle/>
           <a:p>
             <a:r>
-              <a:t>[설명] 오류를 대신 해결하지 말고 증상부터 우선 확인 순서대로 교육생이 실행하게 한다.</a:t>
+              <a:t>[설명] 실제 Ubuntu/ROS 2 환경에서 생성한 검증 화면이다.</a:t>
             </a:r>
           </a:p>
           <a:p>
@@ -3179,7 +3171,7 @@
           </a:p>
           <a:p>
             <a:r>
-              <a:t>[확인] 수정 뒤 첫 검증 명령을 다시 실행한다.</a:t>
+              <a:t>[확인] 캡처의 명령과 다음 슬라이드의 검증 명령을 비교한다.</a:t>
             </a:r>
           </a:p>
           <a:p>
@@ -3189,7 +3181,7 @@
           </a:p>
           <a:p>
             <a:r>
-              <a:t>[오류] 슬라이드의 두 대표 오류를 먼저 사용한다.</a:t>
+              <a:t>[오류] 오류가 나면 현재 폴더, source, 파일 경로를 먼저 확인한다.</a:t>
             </a:r>
           </a:p>
         </p:txBody>
@@ -3259,17 +3251,27 @@
           <a:lstStyle/>
           <a:p>
             <a:r>
-              <a:t>[설명] 교육생이 직접 한 값만 바꿔 원인과 결과를 연결하게 한다.</a:t>
-            </a:r>
-          </a:p>
-          <a:p>
-            <a:r>
-              <a:t>[실행] 슬라이드의 명령 또는 파일 작성 단계를 진행한다.</a:t>
-            </a:r>
-          </a:p>
-          <a:p>
-            <a:r>
-              <a:t>[확인] 원래 값과 변경 값을 모두 기록한다.</a:t>
+              <a:t>[설명] 검증 명령은 GUI 결과와 별도로 실행해 재현 가능한 완료 기준을 만든다.</a:t>
+            </a:r>
+          </a:p>
+          <a:p>
+            <a:r>
+              <a:t>[실행] ros2 launch agv_bringup agv_sim.launch.py --show-args</a:t>
+            </a:r>
+          </a:p>
+          <a:p>
+            <a:r>
+              <a:t>ros2 node list</a:t>
+            </a:r>
+          </a:p>
+          <a:p>
+            <a:r>
+              <a:t>ros2 topic list | rg '/scan|/imu/data|/odom|/camera/image_raw|/cmd_vel'</a:t>
+            </a:r>
+          </a:p>
+          <a:p>
+            <a:r>
+              <a:t>[확인] 한 launch 실행, RViz/Gazebo 확인, mission log, rosbag 기록을 제출 체크리스트로 남긴다.</a:t>
             </a:r>
           </a:p>
           <a:p>
@@ -3349,7 +3351,7 @@
           <a:lstStyle/>
           <a:p>
             <a:r>
-              <a:t>[설명] 최종 미션 시나리오</a:t>
+              <a:t>[설명] 오류를 대신 해결하지 말고 증상부터 우선 확인 순서대로 교육생이 실행하게 한다.</a:t>
             </a:r>
           </a:p>
           <a:p>
@@ -3359,7 +3361,7 @@
           </a:p>
           <a:p>
             <a:r>
-              <a:t>[확인] 각 항목이 현재 시스템의 어느 package/topic/file과 연결되는지 확인한다.</a:t>
+              <a:t>[확인] 수정 뒤 첫 검증 명령을 다시 실행한다.</a:t>
             </a:r>
           </a:p>
           <a:p>
@@ -3369,7 +3371,7 @@
           </a:p>
           <a:p>
             <a:r>
-              <a:t>[오류] 오류가 나면 현재 폴더, source, 파일 경로를 먼저 확인한다.</a:t>
+              <a:t>[오류] 슬라이드의 두 대표 오류를 먼저 사용한다.</a:t>
             </a:r>
           </a:p>
         </p:txBody>
@@ -3439,7 +3441,7 @@
           <a:lstStyle/>
           <a:p>
             <a:r>
-              <a:t>[설명] 최종 기능 체크표</a:t>
+              <a:t>[설명] 교육생이 직접 한 값만 바꿔 원인과 결과를 연결하게 한다.</a:t>
             </a:r>
           </a:p>
           <a:p>
@@ -3449,7 +3451,7 @@
           </a:p>
           <a:p>
             <a:r>
-              <a:t>[확인] 각 항목이 현재 시스템의 어느 package/topic/file과 연결되는지 확인한다.</a:t>
+              <a:t>[확인] 원래 값과 변경 값을 모두 기록한다.</a:t>
             </a:r>
           </a:p>
           <a:p>
@@ -3619,7 +3621,7 @@
           <a:lstStyle/>
           <a:p>
             <a:r>
-              <a:t>[설명] Milestone 1~8 제출 증거</a:t>
+              <a:t>[설명] 최종 미션 시나리오</a:t>
             </a:r>
           </a:p>
           <a:p>
@@ -3709,7 +3711,7 @@
           <a:lstStyle/>
           <a:p>
             <a:r>
-              <a:t>[설명] 실패를 재현 가능하게 기록한다</a:t>
+              <a:t>[설명] 최종 기능 체크표</a:t>
             </a:r>
           </a:p>
           <a:p>
@@ -3799,7 +3801,7 @@
           <a:lstStyle/>
           <a:p>
             <a:r>
-              <a:t>[설명] 교육생이 Complete·캡처·로그를 저장했는지 확인하고 다음 모듈의 시작 상태를 읽는다.</a:t>
+              <a:t>[설명] Milestone 1~8 제출 증거</a:t>
             </a:r>
           </a:p>
           <a:p>
@@ -3809,7 +3811,7 @@
           </a:p>
           <a:p>
             <a:r>
-              <a:t>[확인] 핵심 과정 완료 → SLAM/Nav2 확장 시작 조건을 말할 수 있다.</a:t>
+              <a:t>[확인] 각 항목이 현재 시스템의 어느 package/topic/file과 연결되는지 확인한다.</a:t>
             </a:r>
           </a:p>
           <a:p>
@@ -3845,6 +3847,186 @@
 </file>
 
 <file path=ppt/notesSlides/notesSlide43.xml><?xml version="1.0" encoding="utf-8"?>
+<p:notes xmlns:a="http://schemas.openxmlformats.org/drawingml/2006/main" xmlns:p="http://schemas.openxmlformats.org/presentationml/2006/main" xmlns:r="http://schemas.openxmlformats.org/officeDocument/2006/relationships">
+  <p:cSld>
+    <p:spTree>
+      <p:nvGrpSpPr>
+        <p:cNvPr id="1" name=""/>
+        <p:cNvGrpSpPr/>
+        <p:nvPr/>
+      </p:nvGrpSpPr>
+      <p:grpSpPr>
+        <a:xfrm>
+          <a:off x="0" y="0"/>
+          <a:ext cx="0" cy="0"/>
+          <a:chOff x="0" y="0"/>
+          <a:chExt cx="0" cy="0"/>
+        </a:xfrm>
+      </p:grpSpPr>
+      <p:sp>
+        <p:nvSpPr>
+          <p:cNvPr id="2" name="Slide Image Placeholder 1"/>
+          <p:cNvSpPr>
+            <a:spLocks noGrp="1"/>
+          </p:cNvSpPr>
+          <p:nvPr>
+            <p:ph type="sldImg" idx="2"/>
+          </p:nvPr>
+        </p:nvSpPr>
+        <p:spPr/>
+      </p:sp>
+      <p:sp>
+        <p:nvSpPr>
+          <p:cNvPr id="3" name="Notes Placeholder 2"/>
+          <p:cNvSpPr>
+            <a:spLocks noGrp="1"/>
+          </p:cNvSpPr>
+          <p:nvPr>
+            <p:ph type="body" idx="3" sz="quarter"/>
+          </p:nvPr>
+        </p:nvSpPr>
+        <p:spPr/>
+        <p:txBody>
+          <a:bodyPr/>
+          <a:lstStyle/>
+          <a:p>
+            <a:r>
+              <a:t>[설명] 실패를 재현 가능하게 기록한다</a:t>
+            </a:r>
+          </a:p>
+          <a:p>
+            <a:r>
+              <a:t>[실행] 슬라이드의 명령 또는 파일 작성 단계를 진행한다.</a:t>
+            </a:r>
+          </a:p>
+          <a:p>
+            <a:r>
+              <a:t>[확인] 각 항목이 현재 시스템의 어느 package/topic/file과 연결되는지 확인한다.</a:t>
+            </a:r>
+          </a:p>
+          <a:p>
+            <a:r>
+              <a:t>[멈춤] 교육생이 현재 체크포인트를 통과할 때까지 기다린다.</a:t>
+            </a:r>
+          </a:p>
+          <a:p>
+            <a:r>
+              <a:t>[오류] 오류가 나면 현재 폴더, source, 파일 경로를 먼저 확인한다.</a:t>
+            </a:r>
+          </a:p>
+        </p:txBody>
+      </p:sp>
+      <p:sp>
+        <p:nvSpPr>
+          <p:cNvPr id="4" name="Slide Number Placeholder 3"/>
+          <p:cNvSpPr>
+            <a:spLocks noGrp="1"/>
+          </p:cNvSpPr>
+          <p:nvPr>
+            <p:ph type="sldNum" idx="5" sz="quarter"/>
+          </p:nvPr>
+        </p:nvSpPr>
+        <p:spPr/>
+      </p:sp>
+    </p:spTree>
+  </p:cSld>
+  <p:clrMapOvr>
+    <a:masterClrMapping/>
+  </p:clrMapOvr>
+</p:notes>
+</file>
+
+<file path=ppt/notesSlides/notesSlide44.xml><?xml version="1.0" encoding="utf-8"?>
+<p:notes xmlns:a="http://schemas.openxmlformats.org/drawingml/2006/main" xmlns:p="http://schemas.openxmlformats.org/presentationml/2006/main" xmlns:r="http://schemas.openxmlformats.org/officeDocument/2006/relationships">
+  <p:cSld>
+    <p:spTree>
+      <p:nvGrpSpPr>
+        <p:cNvPr id="1" name=""/>
+        <p:cNvGrpSpPr/>
+        <p:nvPr/>
+      </p:nvGrpSpPr>
+      <p:grpSpPr>
+        <a:xfrm>
+          <a:off x="0" y="0"/>
+          <a:ext cx="0" cy="0"/>
+          <a:chOff x="0" y="0"/>
+          <a:chExt cx="0" cy="0"/>
+        </a:xfrm>
+      </p:grpSpPr>
+      <p:sp>
+        <p:nvSpPr>
+          <p:cNvPr id="2" name="Slide Image Placeholder 1"/>
+          <p:cNvSpPr>
+            <a:spLocks noGrp="1"/>
+          </p:cNvSpPr>
+          <p:nvPr>
+            <p:ph type="sldImg" idx="2"/>
+          </p:nvPr>
+        </p:nvSpPr>
+        <p:spPr/>
+      </p:sp>
+      <p:sp>
+        <p:nvSpPr>
+          <p:cNvPr id="3" name="Notes Placeholder 2"/>
+          <p:cNvSpPr>
+            <a:spLocks noGrp="1"/>
+          </p:cNvSpPr>
+          <p:nvPr>
+            <p:ph type="body" idx="3" sz="quarter"/>
+          </p:nvPr>
+        </p:nvSpPr>
+        <p:spPr/>
+        <p:txBody>
+          <a:bodyPr/>
+          <a:lstStyle/>
+          <a:p>
+            <a:r>
+              <a:t>[설명] 교육생이 Complete·캡처·로그를 저장했는지 확인하고 다음 모듈의 시작 상태를 읽는다.</a:t>
+            </a:r>
+          </a:p>
+          <a:p>
+            <a:r>
+              <a:t>[실행] 슬라이드의 명령 또는 파일 작성 단계를 진행한다.</a:t>
+            </a:r>
+          </a:p>
+          <a:p>
+            <a:r>
+              <a:t>[확인] 핵심 과정 완료 → SLAM/Nav2 확장 시작 조건을 말할 수 있다.</a:t>
+            </a:r>
+          </a:p>
+          <a:p>
+            <a:r>
+              <a:t>[멈춤] 교육생이 현재 체크포인트를 통과할 때까지 기다린다.</a:t>
+            </a:r>
+          </a:p>
+          <a:p>
+            <a:r>
+              <a:t>[오류] 오류가 나면 현재 폴더, source, 파일 경로를 먼저 확인한다.</a:t>
+            </a:r>
+          </a:p>
+        </p:txBody>
+      </p:sp>
+      <p:sp>
+        <p:nvSpPr>
+          <p:cNvPr id="4" name="Slide Number Placeholder 3"/>
+          <p:cNvSpPr>
+            <a:spLocks noGrp="1"/>
+          </p:cNvSpPr>
+          <p:nvPr>
+            <p:ph type="sldNum" idx="5" sz="quarter"/>
+          </p:nvPr>
+        </p:nvSpPr>
+        <p:spPr/>
+      </p:sp>
+    </p:spTree>
+  </p:cSld>
+  <p:clrMapOvr>
+    <a:masterClrMapping/>
+  </p:clrMapOvr>
+</p:notes>
+</file>
+
+<file path=ppt/notesSlides/notesSlide45.xml><?xml version="1.0" encoding="utf-8"?>
 <p:notes xmlns:a="http://schemas.openxmlformats.org/drawingml/2006/main" xmlns:p="http://schemas.openxmlformats.org/presentationml/2006/main" xmlns:r="http://schemas.openxmlformats.org/officeDocument/2006/relationships">
   <p:cSld>
     <p:spTree>
@@ -7945,8 +8127,8 @@
         </p:nvSpPr>
         <p:spPr>
           <a:xfrm>
-            <a:off x="658368" y="1682496"/>
-            <a:ext cx="10972800" cy="347472"/>
+            <a:off x="658368" y="1627632"/>
+            <a:ext cx="10972800" cy="256032"/>
           </a:xfrm>
           <a:prstGeom prst="rect">
             <a:avLst/>
@@ -7963,7 +8145,7 @@
               <a:spcAft>
                 <a:spcPts val="0"/>
               </a:spcAft>
-              <a:defRPr sz="1700" b="1">
+              <a:defRPr sz="1500" b="1">
                 <a:solidFill>
                   <a:srgbClr val="122C4E"/>
                 </a:solidFill>
@@ -7984,8 +8166,8 @@
         </p:nvSpPr>
         <p:spPr>
           <a:xfrm>
-            <a:off x="658368" y="2103120"/>
-            <a:ext cx="10972800" cy="493776"/>
+            <a:off x="658368" y="1956816"/>
+            <a:ext cx="10972800" cy="603504"/>
           </a:xfrm>
           <a:prstGeom prst="rect">
             <a:avLst/>
@@ -8029,7 +8211,11 @@
               </a:defRPr>
             </a:pPr>
             <a:r>
-              <a:t>파일 생성/열기: mkdir -p ~/agv_ws/src/agv_bringup/launch    &amp;&amp;    nano ~/agv_ws/src/agv_bringup/launch/agv_sim.launch.py</a:t>
+              <a:t>파일 생성: mkdir -p ~/agv_ws/src/agv_bringup/launch</a:t>
+            </a:r>
+            <a:br/>
+            <a:r>
+              <a:t>파일 열기: nano ~/agv_ws/src/agv_bringup/launch/agv_sim.launch.py</a:t>
             </a:r>
           </a:p>
         </p:txBody>
@@ -8042,8 +8228,8 @@
         </p:nvSpPr>
         <p:spPr>
           <a:xfrm>
-            <a:off x="658368" y="2761488"/>
-            <a:ext cx="10972800" cy="3383280"/>
+            <a:off x="658368" y="2706624"/>
+            <a:ext cx="10972800" cy="3364992"/>
           </a:xfrm>
           <a:prstGeom prst="rect">
             <a:avLst/>
@@ -8130,14 +8316,6 @@
             <a:r>
               <a:t>    bringup = get_package_share_directory('agv_bringup')</a:t>
             </a:r>
-            <a:br/>
-            <a:r>
-              <a:t>    description = get_package_share_directory('agv_description')</a:t>
-            </a:r>
-            <a:br/>
-            <a:r>
-              <a:t>    gazebo = get_package_share_directory('agv_gazebo')</a:t>
-            </a:r>
           </a:p>
         </p:txBody>
       </p:sp>
@@ -8149,7 +8327,7 @@
         </p:nvSpPr>
         <p:spPr>
           <a:xfrm>
-            <a:off x="749808" y="6199632"/>
+            <a:off x="749808" y="6181344"/>
             <a:ext cx="10789920" cy="201168"/>
           </a:xfrm>
           <a:prstGeom prst="rect">
@@ -8420,8 +8598,8 @@
         </p:nvSpPr>
         <p:spPr>
           <a:xfrm>
-            <a:off x="658368" y="1682496"/>
-            <a:ext cx="10972800" cy="347472"/>
+            <a:off x="658368" y="1627632"/>
+            <a:ext cx="10972800" cy="256032"/>
           </a:xfrm>
           <a:prstGeom prst="rect">
             <a:avLst/>
@@ -8438,7 +8616,7 @@
               <a:spcAft>
                 <a:spcPts val="0"/>
               </a:spcAft>
-              <a:defRPr sz="1700" b="1">
+              <a:defRPr sz="1500" b="1">
                 <a:solidFill>
                   <a:srgbClr val="122C4E"/>
                 </a:solidFill>
@@ -8459,8 +8637,8 @@
         </p:nvSpPr>
         <p:spPr>
           <a:xfrm>
-            <a:off x="658368" y="2103120"/>
-            <a:ext cx="10972800" cy="493776"/>
+            <a:off x="658368" y="1956816"/>
+            <a:ext cx="10972800" cy="603504"/>
           </a:xfrm>
           <a:prstGeom prst="rect">
             <a:avLst/>
@@ -8504,7 +8682,11 @@
               </a:defRPr>
             </a:pPr>
             <a:r>
-              <a:t>파일 생성/열기: mkdir -p ~/agv_ws/src/agv_bringup/launch    &amp;&amp;    nano ~/agv_ws/src/agv_bringup/launch/agv_sim.launch.py</a:t>
+              <a:t>파일 생성: mkdir -p ~/agv_ws/src/agv_bringup/launch</a:t>
+            </a:r>
+            <a:br/>
+            <a:r>
+              <a:t>파일 열기: nano ~/agv_ws/src/agv_bringup/launch/agv_sim.launch.py</a:t>
             </a:r>
           </a:p>
         </p:txBody>
@@ -8517,8 +8699,8 @@
         </p:nvSpPr>
         <p:spPr>
           <a:xfrm>
-            <a:off x="658368" y="2761488"/>
-            <a:ext cx="10972800" cy="3383280"/>
+            <a:off x="658368" y="2706624"/>
+            <a:ext cx="10972800" cy="3364992"/>
           </a:xfrm>
           <a:prstGeom prst="rect">
             <a:avLst/>
@@ -8562,6 +8744,14 @@
               </a:defRPr>
             </a:pPr>
             <a:r>
+              <a:t>    description = get_package_share_directory('agv_description')</a:t>
+            </a:r>
+            <a:br/>
+            <a:r>
+              <a:t>    gazebo = get_package_share_directory('agv_gazebo')</a:t>
+            </a:r>
+            <a:br/>
+            <a:r>
               <a:t>    xacro_file = os.path.join(description, 'urdf', 'agv.urdf.xacro')</a:t>
             </a:r>
             <a:br/>
@@ -8599,22 +8789,6 @@
             <a:br/>
             <a:r>
               <a:t>        'sensors.yaml')]), Node(package='agv_sensors', executable='imu_monitor',</a:t>
-            </a:r>
-            <a:br/>
-            <a:r>
-              <a:t>        parameters=[os.path.join(bringup, 'config', 'sensors.yaml')]), Node(package='agv_vision',</a:t>
-            </a:r>
-            <a:br/>
-            <a:r>
-              <a:t>         executable='yolo_node', parameters=[os.path.join(bringup, 'config',</a:t>
-            </a:r>
-            <a:br/>
-            <a:r>
-              <a:t>        'vision.yaml')]), Node(package='agv_mission', executable='mission_manager',</a:t>
-            </a:r>
-            <a:br/>
-            <a:r>
-              <a:t>        parameters=[os.path.join(bringup, 'config', 'mission.yaml')]), Node(package='agv_control',</a:t>
             </a:r>
           </a:p>
         </p:txBody>
@@ -8627,7 +8801,7 @@
         </p:nvSpPr>
         <p:spPr>
           <a:xfrm>
-            <a:off x="749808" y="6199632"/>
+            <a:off x="749808" y="6181344"/>
             <a:ext cx="10789920" cy="201168"/>
           </a:xfrm>
           <a:prstGeom prst="rect">
@@ -8898,8 +9072,8 @@
         </p:nvSpPr>
         <p:spPr>
           <a:xfrm>
-            <a:off x="658368" y="1682496"/>
-            <a:ext cx="10972800" cy="347472"/>
+            <a:off x="658368" y="1627632"/>
+            <a:ext cx="10972800" cy="256032"/>
           </a:xfrm>
           <a:prstGeom prst="rect">
             <a:avLst/>
@@ -8916,7 +9090,7 @@
               <a:spcAft>
                 <a:spcPts val="0"/>
               </a:spcAft>
-              <a:defRPr sz="1700" b="1">
+              <a:defRPr sz="1500" b="1">
                 <a:solidFill>
                   <a:srgbClr val="122C4E"/>
                 </a:solidFill>
@@ -8937,8 +9111,8 @@
         </p:nvSpPr>
         <p:spPr>
           <a:xfrm>
-            <a:off x="658368" y="2103120"/>
-            <a:ext cx="10972800" cy="493776"/>
+            <a:off x="658368" y="1956816"/>
+            <a:ext cx="10972800" cy="603504"/>
           </a:xfrm>
           <a:prstGeom prst="rect">
             <a:avLst/>
@@ -8982,7 +9156,11 @@
               </a:defRPr>
             </a:pPr>
             <a:r>
-              <a:t>파일 생성/열기: mkdir -p ~/agv_ws/src/agv_bringup/launch    &amp;&amp;    nano ~/agv_ws/src/agv_bringup/launch/agv_sim.launch.py</a:t>
+              <a:t>파일 생성: mkdir -p ~/agv_ws/src/agv_bringup/launch</a:t>
+            </a:r>
+            <a:br/>
+            <a:r>
+              <a:t>파일 열기: nano ~/agv_ws/src/agv_bringup/launch/agv_sim.launch.py</a:t>
             </a:r>
           </a:p>
         </p:txBody>
@@ -8995,8 +9173,8 @@
         </p:nvSpPr>
         <p:spPr>
           <a:xfrm>
-            <a:off x="658368" y="2761488"/>
-            <a:ext cx="10972800" cy="3383280"/>
+            <a:off x="658368" y="2706624"/>
+            <a:ext cx="10972800" cy="3364992"/>
           </a:xfrm>
           <a:prstGeom prst="rect">
             <a:avLst/>
@@ -9040,6 +9218,22 @@
               </a:defRPr>
             </a:pPr>
             <a:r>
+              <a:t>        parameters=[os.path.join(bringup, 'config', 'sensors.yaml')]), Node(package='agv_vision',</a:t>
+            </a:r>
+            <a:br/>
+            <a:r>
+              <a:t>         executable='yolo_node', parameters=[os.path.join(bringup, 'config',</a:t>
+            </a:r>
+            <a:br/>
+            <a:r>
+              <a:t>        'vision.yaml')]), Node(package='agv_mission', executable='mission_manager',</a:t>
+            </a:r>
+            <a:br/>
+            <a:r>
+              <a:t>        parameters=[os.path.join(bringup, 'config', 'mission.yaml')]), Node(package='agv_control',</a:t>
+            </a:r>
+            <a:br/>
+            <a:r>
               <a:t>         executable='safety_controller', parameters=[os.path.join(bringup, 'config',</a:t>
             </a:r>
             <a:br/>
@@ -9065,7 +9259,7 @@
         </p:nvSpPr>
         <p:spPr>
           <a:xfrm>
-            <a:off x="749808" y="6199632"/>
+            <a:off x="749808" y="6181344"/>
             <a:ext cx="10789920" cy="201168"/>
           </a:xfrm>
           <a:prstGeom prst="rect">
@@ -9336,8 +9530,8 @@
         </p:nvSpPr>
         <p:spPr>
           <a:xfrm>
-            <a:off x="658368" y="1682496"/>
-            <a:ext cx="10972800" cy="347472"/>
+            <a:off x="658368" y="1627632"/>
+            <a:ext cx="10972800" cy="256032"/>
           </a:xfrm>
           <a:prstGeom prst="rect">
             <a:avLst/>
@@ -9354,7 +9548,7 @@
               <a:spcAft>
                 <a:spcPts val="0"/>
               </a:spcAft>
-              <a:defRPr sz="1700" b="1">
+              <a:defRPr sz="1500" b="1">
                 <a:solidFill>
                   <a:srgbClr val="122C4E"/>
                 </a:solidFill>
@@ -9375,8 +9569,8 @@
         </p:nvSpPr>
         <p:spPr>
           <a:xfrm>
-            <a:off x="658368" y="2103120"/>
-            <a:ext cx="10972800" cy="493776"/>
+            <a:off x="658368" y="1956816"/>
+            <a:ext cx="10972800" cy="603504"/>
           </a:xfrm>
           <a:prstGeom prst="rect">
             <a:avLst/>
@@ -9420,7 +9614,11 @@
               </a:defRPr>
             </a:pPr>
             <a:r>
-              <a:t>파일 생성/열기: mkdir -p ~/agv_ws/src/agv_bringup/config    &amp;&amp;    nano ~/agv_ws/src/agv_bringup/config/mission.yaml</a:t>
+              <a:t>파일 생성: mkdir -p ~/agv_ws/src/agv_bringup/config</a:t>
+            </a:r>
+            <a:br/>
+            <a:r>
+              <a:t>파일 열기: nano ~/agv_ws/src/agv_bringup/config/mission.yaml</a:t>
             </a:r>
           </a:p>
         </p:txBody>
@@ -9433,8 +9631,8 @@
         </p:nvSpPr>
         <p:spPr>
           <a:xfrm>
-            <a:off x="658368" y="2761488"/>
-            <a:ext cx="10972800" cy="3383280"/>
+            <a:off x="658368" y="2706624"/>
+            <a:ext cx="10972800" cy="3364992"/>
           </a:xfrm>
           <a:prstGeom prst="rect">
             <a:avLst/>
@@ -9535,7 +9733,7 @@
         </p:nvSpPr>
         <p:spPr>
           <a:xfrm>
-            <a:off x="749808" y="6199632"/>
+            <a:off x="749808" y="6181344"/>
             <a:ext cx="10789920" cy="201168"/>
           </a:xfrm>
           <a:prstGeom prst="rect">
@@ -9618,7 +9816,7 @@
               </a:defRPr>
             </a:pPr>
             <a:r>
-              <a:t>파일을 새로 만들고 저장한다 (1/10)</a:t>
+              <a:t>파일을 새로 만들고 저장한다 (1/11)</a:t>
             </a:r>
           </a:p>
         </p:txBody>
@@ -9793,7 +9991,7 @@
               </a:defRPr>
             </a:pPr>
             <a:r>
-              <a:t>현재 단계 8/18    |    현재 폴더 ~/agv_ws    |    현재 터미널</a:t>
+              <a:t>현재 단계 8/19    |    현재 폴더 ~/agv_ws    |    현재 터미널</a:t>
             </a:r>
           </a:p>
         </p:txBody>
@@ -9806,8 +10004,8 @@
         </p:nvSpPr>
         <p:spPr>
           <a:xfrm>
-            <a:off x="658368" y="1682496"/>
-            <a:ext cx="10972800" cy="347472"/>
+            <a:off x="658368" y="1627632"/>
+            <a:ext cx="10972800" cy="256032"/>
           </a:xfrm>
           <a:prstGeom prst="rect">
             <a:avLst/>
@@ -9824,7 +10022,7 @@
               <a:spcAft>
                 <a:spcPts val="0"/>
               </a:spcAft>
-              <a:defRPr sz="1700" b="1">
+              <a:defRPr sz="1500" b="1">
                 <a:solidFill>
                   <a:srgbClr val="122C4E"/>
                 </a:solidFill>
@@ -9845,8 +10043,8 @@
         </p:nvSpPr>
         <p:spPr>
           <a:xfrm>
-            <a:off x="658368" y="2103120"/>
-            <a:ext cx="10972800" cy="493776"/>
+            <a:off x="658368" y="1956816"/>
+            <a:ext cx="10972800" cy="603504"/>
           </a:xfrm>
           <a:prstGeom prst="rect">
             <a:avLst/>
@@ -9890,7 +10088,11 @@
               </a:defRPr>
             </a:pPr>
             <a:r>
-              <a:t>파일 생성/열기: mkdir -p ~/agv_ws/src/agv_gazebo/worlds    &amp;&amp;    nano ~/agv_ws/src/agv_gazebo/worlds/warehouse.sdf</a:t>
+              <a:t>파일 생성: mkdir -p ~/agv_ws/src/agv_gazebo/worlds</a:t>
+            </a:r>
+            <a:br/>
+            <a:r>
+              <a:t>파일 열기: nano ~/agv_ws/src/agv_gazebo/worlds/warehouse.sdf</a:t>
             </a:r>
           </a:p>
         </p:txBody>
@@ -9903,8 +10105,8 @@
         </p:nvSpPr>
         <p:spPr>
           <a:xfrm>
-            <a:off x="658368" y="2761488"/>
-            <a:ext cx="10972800" cy="3383280"/>
+            <a:off x="658368" y="2706624"/>
+            <a:ext cx="10972800" cy="3364992"/>
           </a:xfrm>
           <a:prstGeom prst="rect">
             <a:avLst/>
@@ -9994,14 +10196,6 @@
             <a:r>
               <a:t>    &lt;plugin filename="gz-sim-scene-broadcaster-system"</a:t>
             </a:r>
-            <a:br/>
-            <a:r>
-              <a:t>      name="gz::sim::systems::SceneBroadcaster"/&gt;</a:t>
-            </a:r>
-            <a:br/>
-            <a:r>
-              <a:t>    &lt;plugin filename="gz-sim-sensors-system" name="gz::sim::systems::Sensors"/&gt;</a:t>
-            </a:r>
           </a:p>
         </p:txBody>
       </p:sp>
@@ -10013,7 +10207,7 @@
         </p:nvSpPr>
         <p:spPr>
           <a:xfrm>
-            <a:off x="749808" y="6199632"/>
+            <a:off x="749808" y="6181344"/>
             <a:ext cx="10789920" cy="201168"/>
           </a:xfrm>
           <a:prstGeom prst="rect">
@@ -10039,7 +10233,7 @@
               </a:defRPr>
             </a:pPr>
             <a:r>
-              <a:t>파일 전체 1/10 · 이 슬라이드 다음에 같은 파일의 나머지 줄이 이어집니다.</a:t>
+              <a:t>파일 전체 1/11 · 이 슬라이드 다음에 같은 파일의 나머지 줄이 이어집니다.</a:t>
             </a:r>
           </a:p>
         </p:txBody>
@@ -10096,7 +10290,7 @@
               </a:defRPr>
             </a:pPr>
             <a:r>
-              <a:t>파일을 계속 작성하고 저장한다 (2/10)</a:t>
+              <a:t>파일을 계속 작성하고 저장한다 (2/11)</a:t>
             </a:r>
           </a:p>
         </p:txBody>
@@ -10271,7 +10465,7 @@
               </a:defRPr>
             </a:pPr>
             <a:r>
-              <a:t>현재 단계 9/18    |    현재 폴더 ~/agv_ws    |    현재 터미널</a:t>
+              <a:t>현재 단계 9/19    |    현재 폴더 ~/agv_ws    |    현재 터미널</a:t>
             </a:r>
           </a:p>
         </p:txBody>
@@ -10284,8 +10478,8 @@
         </p:nvSpPr>
         <p:spPr>
           <a:xfrm>
-            <a:off x="658368" y="1682496"/>
-            <a:ext cx="10972800" cy="347472"/>
+            <a:off x="658368" y="1627632"/>
+            <a:ext cx="10972800" cy="256032"/>
           </a:xfrm>
           <a:prstGeom prst="rect">
             <a:avLst/>
@@ -10302,7 +10496,7 @@
               <a:spcAft>
                 <a:spcPts val="0"/>
               </a:spcAft>
-              <a:defRPr sz="1700" b="1">
+              <a:defRPr sz="1500" b="1">
                 <a:solidFill>
                   <a:srgbClr val="122C4E"/>
                 </a:solidFill>
@@ -10323,8 +10517,8 @@
         </p:nvSpPr>
         <p:spPr>
           <a:xfrm>
-            <a:off x="658368" y="2103120"/>
-            <a:ext cx="10972800" cy="493776"/>
+            <a:off x="658368" y="1956816"/>
+            <a:ext cx="10972800" cy="603504"/>
           </a:xfrm>
           <a:prstGeom prst="rect">
             <a:avLst/>
@@ -10368,7 +10562,11 @@
               </a:defRPr>
             </a:pPr>
             <a:r>
-              <a:t>파일 생성/열기: mkdir -p ~/agv_ws/src/agv_gazebo/worlds    &amp;&amp;    nano ~/agv_ws/src/agv_gazebo/worlds/warehouse.sdf</a:t>
+              <a:t>파일 생성: mkdir -p ~/agv_ws/src/agv_gazebo/worlds</a:t>
+            </a:r>
+            <a:br/>
+            <a:r>
+              <a:t>파일 열기: nano ~/agv_ws/src/agv_gazebo/worlds/warehouse.sdf</a:t>
             </a:r>
           </a:p>
         </p:txBody>
@@ -10381,8 +10579,8 @@
         </p:nvSpPr>
         <p:spPr>
           <a:xfrm>
-            <a:off x="658368" y="2761488"/>
-            <a:ext cx="10972800" cy="3383280"/>
+            <a:off x="658368" y="2706624"/>
+            <a:ext cx="10972800" cy="3364992"/>
           </a:xfrm>
           <a:prstGeom prst="rect">
             <a:avLst/>
@@ -10426,6 +10624,14 @@
               </a:defRPr>
             </a:pPr>
             <a:r>
+              <a:t>      name="gz::sim::systems::SceneBroadcaster"/&gt;</a:t>
+            </a:r>
+            <a:br/>
+            <a:r>
+              <a:t>    &lt;plugin filename="gz-sim-sensors-system" name="gz::sim::systems::Sensors"/&gt;</a:t>
+            </a:r>
+            <a:br/>
+            <a:r>
               <a:t>    </a:t>
             </a:r>
             <a:br/>
@@ -10463,22 +10669,6 @@
             <a:br/>
             <a:r>
               <a:t>    &lt;model name="ground"&gt;</a:t>
-            </a:r>
-            <a:br/>
-            <a:r>
-              <a:t>      &lt;static&gt;true&lt;/static&gt;</a:t>
-            </a:r>
-            <a:br/>
-            <a:r>
-              <a:t>      &lt;link name="link"&gt;</a:t>
-            </a:r>
-            <a:br/>
-            <a:r>
-              <a:t>        &lt;collision name="collision"&gt;</a:t>
-            </a:r>
-            <a:br/>
-            <a:r>
-              <a:t>          &lt;geometry&gt;</a:t>
             </a:r>
           </a:p>
         </p:txBody>
@@ -10491,7 +10681,7 @@
         </p:nvSpPr>
         <p:spPr>
           <a:xfrm>
-            <a:off x="749808" y="6199632"/>
+            <a:off x="749808" y="6181344"/>
             <a:ext cx="10789920" cy="201168"/>
           </a:xfrm>
           <a:prstGeom prst="rect">
@@ -10517,7 +10707,7 @@
               </a:defRPr>
             </a:pPr>
             <a:r>
-              <a:t>파일 전체 2/10 · 이 슬라이드 다음에 같은 파일의 나머지 줄이 이어집니다.</a:t>
+              <a:t>파일 전체 2/11 · 이 슬라이드 다음에 같은 파일의 나머지 줄이 이어집니다.</a:t>
             </a:r>
           </a:p>
         </p:txBody>
@@ -10574,7 +10764,7 @@
               </a:defRPr>
             </a:pPr>
             <a:r>
-              <a:t>파일을 계속 작성하고 저장한다 (3/10)</a:t>
+              <a:t>파일을 계속 작성하고 저장한다 (3/11)</a:t>
             </a:r>
           </a:p>
         </p:txBody>
@@ -10749,7 +10939,7 @@
               </a:defRPr>
             </a:pPr>
             <a:r>
-              <a:t>현재 단계 10/18    |    현재 폴더 ~/agv_ws    |    현재 터미널</a:t>
+              <a:t>현재 단계 10/19    |    현재 폴더 ~/agv_ws    |    현재 터미널</a:t>
             </a:r>
           </a:p>
         </p:txBody>
@@ -10762,8 +10952,8 @@
         </p:nvSpPr>
         <p:spPr>
           <a:xfrm>
-            <a:off x="658368" y="1682496"/>
-            <a:ext cx="10972800" cy="347472"/>
+            <a:off x="658368" y="1627632"/>
+            <a:ext cx="10972800" cy="256032"/>
           </a:xfrm>
           <a:prstGeom prst="rect">
             <a:avLst/>
@@ -10780,7 +10970,7 @@
               <a:spcAft>
                 <a:spcPts val="0"/>
               </a:spcAft>
-              <a:defRPr sz="1700" b="1">
+              <a:defRPr sz="1500" b="1">
                 <a:solidFill>
                   <a:srgbClr val="122C4E"/>
                 </a:solidFill>
@@ -10801,8 +10991,8 @@
         </p:nvSpPr>
         <p:spPr>
           <a:xfrm>
-            <a:off x="658368" y="2103120"/>
-            <a:ext cx="10972800" cy="493776"/>
+            <a:off x="658368" y="1956816"/>
+            <a:ext cx="10972800" cy="603504"/>
           </a:xfrm>
           <a:prstGeom prst="rect">
             <a:avLst/>
@@ -10846,7 +11036,11 @@
               </a:defRPr>
             </a:pPr>
             <a:r>
-              <a:t>파일 생성/열기: mkdir -p ~/agv_ws/src/agv_gazebo/worlds    &amp;&amp;    nano ~/agv_ws/src/agv_gazebo/worlds/warehouse.sdf</a:t>
+              <a:t>파일 생성: mkdir -p ~/agv_ws/src/agv_gazebo/worlds</a:t>
+            </a:r>
+            <a:br/>
+            <a:r>
+              <a:t>파일 열기: nano ~/agv_ws/src/agv_gazebo/worlds/warehouse.sdf</a:t>
             </a:r>
           </a:p>
         </p:txBody>
@@ -10859,8 +11053,8 @@
         </p:nvSpPr>
         <p:spPr>
           <a:xfrm>
-            <a:off x="658368" y="2761488"/>
-            <a:ext cx="10972800" cy="3383280"/>
+            <a:off x="658368" y="2706624"/>
+            <a:ext cx="10972800" cy="3364992"/>
           </a:xfrm>
           <a:prstGeom prst="rect">
             <a:avLst/>
@@ -10904,6 +11098,22 @@
               </a:defRPr>
             </a:pPr>
             <a:r>
+              <a:t>      &lt;static&gt;true&lt;/static&gt;</a:t>
+            </a:r>
+            <a:br/>
+            <a:r>
+              <a:t>      &lt;link name="link"&gt;</a:t>
+            </a:r>
+            <a:br/>
+            <a:r>
+              <a:t>        &lt;collision name="collision"&gt;</a:t>
+            </a:r>
+            <a:br/>
+            <a:r>
+              <a:t>          &lt;geometry&gt;</a:t>
+            </a:r>
+            <a:br/>
+            <a:r>
               <a:t>            &lt;plane&gt;</a:t>
             </a:r>
             <a:br/>
@@ -10933,30 +11143,6 @@
             <a:br/>
             <a:r>
               <a:t>          &lt;geometry&gt;</a:t>
-            </a:r>
-            <a:br/>
-            <a:r>
-              <a:t>            &lt;plane&gt;</a:t>
-            </a:r>
-            <a:br/>
-            <a:r>
-              <a:t>              &lt;normal&gt;0 0 1&lt;/normal&gt;</a:t>
-            </a:r>
-            <a:br/>
-            <a:r>
-              <a:t>              &lt;size&gt;30 30&lt;/size&gt;</a:t>
-            </a:r>
-            <a:br/>
-            <a:r>
-              <a:t>            &lt;/plane&gt;</a:t>
-            </a:r>
-            <a:br/>
-            <a:r>
-              <a:t>          &lt;/geometry&gt;</a:t>
-            </a:r>
-            <a:br/>
-            <a:r>
-              <a:t>          &lt;material&gt;</a:t>
             </a:r>
           </a:p>
         </p:txBody>
@@ -10969,7 +11155,7 @@
         </p:nvSpPr>
         <p:spPr>
           <a:xfrm>
-            <a:off x="749808" y="6199632"/>
+            <a:off x="749808" y="6181344"/>
             <a:ext cx="10789920" cy="201168"/>
           </a:xfrm>
           <a:prstGeom prst="rect">
@@ -10995,7 +11181,7 @@
               </a:defRPr>
             </a:pPr>
             <a:r>
-              <a:t>파일 전체 3/10 · 이 슬라이드 다음에 같은 파일의 나머지 줄이 이어집니다.</a:t>
+              <a:t>파일 전체 3/11 · 이 슬라이드 다음에 같은 파일의 나머지 줄이 이어집니다.</a:t>
             </a:r>
           </a:p>
         </p:txBody>
@@ -11052,7 +11238,7 @@
               </a:defRPr>
             </a:pPr>
             <a:r>
-              <a:t>파일을 계속 작성하고 저장한다 (4/10)</a:t>
+              <a:t>파일을 계속 작성하고 저장한다 (4/11)</a:t>
             </a:r>
           </a:p>
         </p:txBody>
@@ -11227,7 +11413,7 @@
               </a:defRPr>
             </a:pPr>
             <a:r>
-              <a:t>현재 단계 11/18    |    현재 폴더 ~/agv_ws    |    현재 터미널</a:t>
+              <a:t>현재 단계 11/19    |    현재 폴더 ~/agv_ws    |    현재 터미널</a:t>
             </a:r>
           </a:p>
         </p:txBody>
@@ -11240,8 +11426,8 @@
         </p:nvSpPr>
         <p:spPr>
           <a:xfrm>
-            <a:off x="658368" y="1682496"/>
-            <a:ext cx="10972800" cy="347472"/>
+            <a:off x="658368" y="1627632"/>
+            <a:ext cx="10972800" cy="256032"/>
           </a:xfrm>
           <a:prstGeom prst="rect">
             <a:avLst/>
@@ -11258,7 +11444,7 @@
               <a:spcAft>
                 <a:spcPts val="0"/>
               </a:spcAft>
-              <a:defRPr sz="1700" b="1">
+              <a:defRPr sz="1500" b="1">
                 <a:solidFill>
                   <a:srgbClr val="122C4E"/>
                 </a:solidFill>
@@ -11279,8 +11465,8 @@
         </p:nvSpPr>
         <p:spPr>
           <a:xfrm>
-            <a:off x="658368" y="2103120"/>
-            <a:ext cx="10972800" cy="493776"/>
+            <a:off x="658368" y="1956816"/>
+            <a:ext cx="10972800" cy="603504"/>
           </a:xfrm>
           <a:prstGeom prst="rect">
             <a:avLst/>
@@ -11324,7 +11510,11 @@
               </a:defRPr>
             </a:pPr>
             <a:r>
-              <a:t>파일 생성/열기: mkdir -p ~/agv_ws/src/agv_gazebo/worlds    &amp;&amp;    nano ~/agv_ws/src/agv_gazebo/worlds/warehouse.sdf</a:t>
+              <a:t>파일 생성: mkdir -p ~/agv_ws/src/agv_gazebo/worlds</a:t>
+            </a:r>
+            <a:br/>
+            <a:r>
+              <a:t>파일 열기: nano ~/agv_ws/src/agv_gazebo/worlds/warehouse.sdf</a:t>
             </a:r>
           </a:p>
         </p:txBody>
@@ -11337,8 +11527,8 @@
         </p:nvSpPr>
         <p:spPr>
           <a:xfrm>
-            <a:off x="658368" y="2761488"/>
-            <a:ext cx="10972800" cy="3383280"/>
+            <a:off x="658368" y="2706624"/>
+            <a:ext cx="10972800" cy="3364992"/>
           </a:xfrm>
           <a:prstGeom prst="rect">
             <a:avLst/>
@@ -11382,6 +11572,30 @@
               </a:defRPr>
             </a:pPr>
             <a:r>
+              <a:t>            &lt;plane&gt;</a:t>
+            </a:r>
+            <a:br/>
+            <a:r>
+              <a:t>              &lt;normal&gt;0 0 1&lt;/normal&gt;</a:t>
+            </a:r>
+            <a:br/>
+            <a:r>
+              <a:t>              &lt;size&gt;30 30&lt;/size&gt;</a:t>
+            </a:r>
+            <a:br/>
+            <a:r>
+              <a:t>            &lt;/plane&gt;</a:t>
+            </a:r>
+            <a:br/>
+            <a:r>
+              <a:t>          &lt;/geometry&gt;</a:t>
+            </a:r>
+            <a:br/>
+            <a:r>
+              <a:t>          &lt;material&gt;</a:t>
+            </a:r>
+            <a:br/>
+            <a:r>
               <a:t>            &lt;diffuse&gt;0.65 0.65 0.65 1&lt;/diffuse&gt;</a:t>
             </a:r>
             <a:br/>
@@ -11403,38 +11617,6 @@
             <a:br/>
             <a:r>
               <a:t>    </a:t>
-            </a:r>
-            <a:br/>
-            <a:r>
-              <a:t>  </a:t>
-            </a:r>
-            <a:br/>
-            <a:r>
-              <a:t>    &lt;model name="wall_north"&gt;</a:t>
-            </a:r>
-            <a:br/>
-            <a:r>
-              <a:t>      &lt;static&gt;true&lt;/static&gt;</a:t>
-            </a:r>
-            <a:br/>
-            <a:r>
-              <a:t>      &lt;pose&gt;0 4 1 0 0 0&lt;/pose&gt;</a:t>
-            </a:r>
-            <a:br/>
-            <a:r>
-              <a:t>      &lt;link name="link"&gt;</a:t>
-            </a:r>
-            <a:br/>
-            <a:r>
-              <a:t>        &lt;collision name="c"&gt;</a:t>
-            </a:r>
-            <a:br/>
-            <a:r>
-              <a:t>          &lt;geometry&gt;</a:t>
-            </a:r>
-            <a:br/>
-            <a:r>
-              <a:t>            &lt;box&gt;</a:t>
             </a:r>
           </a:p>
         </p:txBody>
@@ -11447,7 +11629,7 @@
         </p:nvSpPr>
         <p:spPr>
           <a:xfrm>
-            <a:off x="749808" y="6199632"/>
+            <a:off x="749808" y="6181344"/>
             <a:ext cx="10789920" cy="201168"/>
           </a:xfrm>
           <a:prstGeom prst="rect">
@@ -11473,7 +11655,7 @@
               </a:defRPr>
             </a:pPr>
             <a:r>
-              <a:t>파일 전체 4/10 · 이 슬라이드 다음에 같은 파일의 나머지 줄이 이어집니다.</a:t>
+              <a:t>파일 전체 4/11 · 이 슬라이드 다음에 같은 파일의 나머지 줄이 이어집니다.</a:t>
             </a:r>
           </a:p>
         </p:txBody>
@@ -11530,7 +11712,7 @@
               </a:defRPr>
             </a:pPr>
             <a:r>
-              <a:t>파일을 계속 작성하고 저장한다 (5/10)</a:t>
+              <a:t>파일을 계속 작성하고 저장한다 (5/11)</a:t>
             </a:r>
           </a:p>
         </p:txBody>
@@ -11705,7 +11887,7 @@
               </a:defRPr>
             </a:pPr>
             <a:r>
-              <a:t>현재 단계 12/18    |    현재 폴더 ~/agv_ws    |    현재 터미널</a:t>
+              <a:t>현재 단계 12/19    |    현재 폴더 ~/agv_ws    |    현재 터미널</a:t>
             </a:r>
           </a:p>
         </p:txBody>
@@ -11718,8 +11900,8 @@
         </p:nvSpPr>
         <p:spPr>
           <a:xfrm>
-            <a:off x="658368" y="1682496"/>
-            <a:ext cx="10972800" cy="347472"/>
+            <a:off x="658368" y="1627632"/>
+            <a:ext cx="10972800" cy="256032"/>
           </a:xfrm>
           <a:prstGeom prst="rect">
             <a:avLst/>
@@ -11736,7 +11918,7 @@
               <a:spcAft>
                 <a:spcPts val="0"/>
               </a:spcAft>
-              <a:defRPr sz="1700" b="1">
+              <a:defRPr sz="1500" b="1">
                 <a:solidFill>
                   <a:srgbClr val="122C4E"/>
                 </a:solidFill>
@@ -11757,8 +11939,8 @@
         </p:nvSpPr>
         <p:spPr>
           <a:xfrm>
-            <a:off x="658368" y="2103120"/>
-            <a:ext cx="10972800" cy="493776"/>
+            <a:off x="658368" y="1956816"/>
+            <a:ext cx="10972800" cy="603504"/>
           </a:xfrm>
           <a:prstGeom prst="rect">
             <a:avLst/>
@@ -11802,7 +11984,11 @@
               </a:defRPr>
             </a:pPr>
             <a:r>
-              <a:t>파일 생성/열기: mkdir -p ~/agv_ws/src/agv_gazebo/worlds    &amp;&amp;    nano ~/agv_ws/src/agv_gazebo/worlds/warehouse.sdf</a:t>
+              <a:t>파일 생성: mkdir -p ~/agv_ws/src/agv_gazebo/worlds</a:t>
+            </a:r>
+            <a:br/>
+            <a:r>
+              <a:t>파일 열기: nano ~/agv_ws/src/agv_gazebo/worlds/warehouse.sdf</a:t>
             </a:r>
           </a:p>
         </p:txBody>
@@ -11815,8 +12001,8 @@
         </p:nvSpPr>
         <p:spPr>
           <a:xfrm>
-            <a:off x="658368" y="2761488"/>
-            <a:ext cx="10972800" cy="3383280"/>
+            <a:off x="658368" y="2706624"/>
+            <a:ext cx="10972800" cy="3364992"/>
           </a:xfrm>
           <a:prstGeom prst="rect">
             <a:avLst/>
@@ -11860,6 +12046,38 @@
               </a:defRPr>
             </a:pPr>
             <a:r>
+              <a:t>  </a:t>
+            </a:r>
+            <a:br/>
+            <a:r>
+              <a:t>    &lt;model name="wall_north"&gt;</a:t>
+            </a:r>
+            <a:br/>
+            <a:r>
+              <a:t>      &lt;static&gt;true&lt;/static&gt;</a:t>
+            </a:r>
+            <a:br/>
+            <a:r>
+              <a:t>      &lt;pose&gt;0 4 1 0 0 0&lt;/pose&gt;</a:t>
+            </a:r>
+            <a:br/>
+            <a:r>
+              <a:t>      &lt;link name="link"&gt;</a:t>
+            </a:r>
+            <a:br/>
+            <a:r>
+              <a:t>        &lt;collision name="c"&gt;</a:t>
+            </a:r>
+            <a:br/>
+            <a:r>
+              <a:t>          &lt;geometry&gt;</a:t>
+            </a:r>
+            <a:br/>
+            <a:r>
+              <a:t>            &lt;box&gt;</a:t>
+            </a:r>
+            <a:br/>
+            <a:r>
               <a:t>              &lt;size&gt;8 0.15 2&lt;/size&gt;</a:t>
             </a:r>
             <a:br/>
@@ -11873,46 +12091,6 @@
             <a:br/>
             <a:r>
               <a:t>        &lt;/collision&gt;</a:t>
-            </a:r>
-            <a:br/>
-            <a:r>
-              <a:t>        &lt;visual name="v"&gt;</a:t>
-            </a:r>
-            <a:br/>
-            <a:r>
-              <a:t>          &lt;geometry&gt;</a:t>
-            </a:r>
-            <a:br/>
-            <a:r>
-              <a:t>            &lt;box&gt;</a:t>
-            </a:r>
-            <a:br/>
-            <a:r>
-              <a:t>              &lt;size&gt;8 0.15 2&lt;/size&gt;</a:t>
-            </a:r>
-            <a:br/>
-            <a:r>
-              <a:t>            &lt;/box&gt;</a:t>
-            </a:r>
-            <a:br/>
-            <a:r>
-              <a:t>          &lt;/geometry&gt;</a:t>
-            </a:r>
-            <a:br/>
-            <a:r>
-              <a:t>        &lt;/visual&gt;</a:t>
-            </a:r>
-            <a:br/>
-            <a:r>
-              <a:t>      &lt;/link&gt;</a:t>
-            </a:r>
-            <a:br/>
-            <a:r>
-              <a:t>    &lt;/model&gt;</a:t>
-            </a:r>
-            <a:br/>
-            <a:r>
-              <a:t>    </a:t>
             </a:r>
           </a:p>
         </p:txBody>
@@ -11925,7 +12103,7 @@
         </p:nvSpPr>
         <p:spPr>
           <a:xfrm>
-            <a:off x="749808" y="6199632"/>
+            <a:off x="749808" y="6181344"/>
             <a:ext cx="10789920" cy="201168"/>
           </a:xfrm>
           <a:prstGeom prst="rect">
@@ -11951,7 +12129,7 @@
               </a:defRPr>
             </a:pPr>
             <a:r>
-              <a:t>파일 전체 5/10 · 이 슬라이드 다음에 같은 파일의 나머지 줄이 이어집니다.</a:t>
+              <a:t>파일 전체 5/11 · 이 슬라이드 다음에 같은 파일의 나머지 줄이 이어집니다.</a:t>
             </a:r>
           </a:p>
         </p:txBody>
@@ -12008,7 +12186,7 @@
               </a:defRPr>
             </a:pPr>
             <a:r>
-              <a:t>파일을 계속 작성하고 저장한다 (6/10)</a:t>
+              <a:t>파일을 계속 작성하고 저장한다 (6/11)</a:t>
             </a:r>
           </a:p>
         </p:txBody>
@@ -12183,7 +12361,7 @@
               </a:defRPr>
             </a:pPr>
             <a:r>
-              <a:t>현재 단계 13/18    |    현재 폴더 ~/agv_ws    |    현재 터미널</a:t>
+              <a:t>현재 단계 13/19    |    현재 폴더 ~/agv_ws    |    현재 터미널</a:t>
             </a:r>
           </a:p>
         </p:txBody>
@@ -12196,8 +12374,8 @@
         </p:nvSpPr>
         <p:spPr>
           <a:xfrm>
-            <a:off x="658368" y="1682496"/>
-            <a:ext cx="10972800" cy="347472"/>
+            <a:off x="658368" y="1627632"/>
+            <a:ext cx="10972800" cy="256032"/>
           </a:xfrm>
           <a:prstGeom prst="rect">
             <a:avLst/>
@@ -12214,7 +12392,7 @@
               <a:spcAft>
                 <a:spcPts val="0"/>
               </a:spcAft>
-              <a:defRPr sz="1700" b="1">
+              <a:defRPr sz="1500" b="1">
                 <a:solidFill>
                   <a:srgbClr val="122C4E"/>
                 </a:solidFill>
@@ -12235,8 +12413,8 @@
         </p:nvSpPr>
         <p:spPr>
           <a:xfrm>
-            <a:off x="658368" y="2103120"/>
-            <a:ext cx="10972800" cy="493776"/>
+            <a:off x="658368" y="1956816"/>
+            <a:ext cx="10972800" cy="603504"/>
           </a:xfrm>
           <a:prstGeom prst="rect">
             <a:avLst/>
@@ -12280,7 +12458,11 @@
               </a:defRPr>
             </a:pPr>
             <a:r>
-              <a:t>파일 생성/열기: mkdir -p ~/agv_ws/src/agv_gazebo/worlds    &amp;&amp;    nano ~/agv_ws/src/agv_gazebo/worlds/warehouse.sdf</a:t>
+              <a:t>파일 생성: mkdir -p ~/agv_ws/src/agv_gazebo/worlds</a:t>
+            </a:r>
+            <a:br/>
+            <a:r>
+              <a:t>파일 열기: nano ~/agv_ws/src/agv_gazebo/worlds/warehouse.sdf</a:t>
             </a:r>
           </a:p>
         </p:txBody>
@@ -12293,8 +12475,8 @@
         </p:nvSpPr>
         <p:spPr>
           <a:xfrm>
-            <a:off x="658368" y="2761488"/>
-            <a:ext cx="10972800" cy="3383280"/>
+            <a:off x="658368" y="2706624"/>
+            <a:ext cx="10972800" cy="3364992"/>
           </a:xfrm>
           <a:prstGeom prst="rect">
             <a:avLst/>
@@ -12338,59 +12520,51 @@
               </a:defRPr>
             </a:pPr>
             <a:r>
+              <a:t>        &lt;visual name="v"&gt;</a:t>
+            </a:r>
+            <a:br/>
+            <a:r>
+              <a:t>          &lt;geometry&gt;</a:t>
+            </a:r>
+            <a:br/>
+            <a:r>
+              <a:t>            &lt;box&gt;</a:t>
+            </a:r>
+            <a:br/>
+            <a:r>
+              <a:t>              &lt;size&gt;8 0.15 2&lt;/size&gt;</a:t>
+            </a:r>
+            <a:br/>
+            <a:r>
+              <a:t>            &lt;/box&gt;</a:t>
+            </a:r>
+            <a:br/>
+            <a:r>
+              <a:t>          &lt;/geometry&gt;</a:t>
+            </a:r>
+            <a:br/>
+            <a:r>
+              <a:t>        &lt;/visual&gt;</a:t>
+            </a:r>
+            <a:br/>
+            <a:r>
+              <a:t>      &lt;/link&gt;</a:t>
+            </a:r>
+            <a:br/>
+            <a:r>
+              <a:t>    &lt;/model&gt;</a:t>
+            </a:r>
+            <a:br/>
+            <a:r>
+              <a:t>    </a:t>
+            </a:r>
+            <a:br/>
+            <a:r>
               <a:t>  </a:t>
             </a:r>
             <a:br/>
             <a:r>
               <a:t>    &lt;model name="obstacle"&gt;</a:t>
-            </a:r>
-            <a:br/>
-            <a:r>
-              <a:t>      &lt;static&gt;true&lt;/static&gt;</a:t>
-            </a:r>
-            <a:br/>
-            <a:r>
-              <a:t>      &lt;pose&gt;1.5 0 0.4 0 0 0&lt;/pose&gt;</a:t>
-            </a:r>
-            <a:br/>
-            <a:r>
-              <a:t>      &lt;link name="link"&gt;</a:t>
-            </a:r>
-            <a:br/>
-            <a:r>
-              <a:t>        &lt;collision name="c"&gt;</a:t>
-            </a:r>
-            <a:br/>
-            <a:r>
-              <a:t>          &lt;geometry&gt;</a:t>
-            </a:r>
-            <a:br/>
-            <a:r>
-              <a:t>            &lt;box&gt;</a:t>
-            </a:r>
-            <a:br/>
-            <a:r>
-              <a:t>              &lt;size&gt;0.5 0.5 0.8&lt;/size&gt;</a:t>
-            </a:r>
-            <a:br/>
-            <a:r>
-              <a:t>            &lt;/box&gt;</a:t>
-            </a:r>
-            <a:br/>
-            <a:r>
-              <a:t>          &lt;/geometry&gt;</a:t>
-            </a:r>
-            <a:br/>
-            <a:r>
-              <a:t>        &lt;/collision&gt;</a:t>
-            </a:r>
-            <a:br/>
-            <a:r>
-              <a:t>        &lt;visual name="v"&gt;</a:t>
-            </a:r>
-            <a:br/>
-            <a:r>
-              <a:t>          &lt;geometry&gt;</a:t>
             </a:r>
           </a:p>
         </p:txBody>
@@ -12403,7 +12577,7 @@
         </p:nvSpPr>
         <p:spPr>
           <a:xfrm>
-            <a:off x="749808" y="6199632"/>
+            <a:off x="749808" y="6181344"/>
             <a:ext cx="10789920" cy="201168"/>
           </a:xfrm>
           <a:prstGeom prst="rect">
@@ -12429,7 +12603,7 @@
               </a:defRPr>
             </a:pPr>
             <a:r>
-              <a:t>파일 전체 6/10 · 이 슬라이드 다음에 같은 파일의 나머지 줄이 이어집니다.</a:t>
+              <a:t>파일 전체 6/11 · 이 슬라이드 다음에 같은 파일의 나머지 줄이 이어집니다.</a:t>
             </a:r>
           </a:p>
         </p:txBody>
@@ -12947,7 +13121,7 @@
               </a:defRPr>
             </a:pPr>
             <a:r>
-              <a:t>파일을 계속 작성하고 저장한다 (7/10)</a:t>
+              <a:t>파일을 계속 작성하고 저장한다 (7/11)</a:t>
             </a:r>
           </a:p>
         </p:txBody>
@@ -13122,7 +13296,7 @@
               </a:defRPr>
             </a:pPr>
             <a:r>
-              <a:t>현재 단계 14/18    |    현재 폴더 ~/agv_ws    |    현재 터미널</a:t>
+              <a:t>현재 단계 14/19    |    현재 폴더 ~/agv_ws    |    현재 터미널</a:t>
             </a:r>
           </a:p>
         </p:txBody>
@@ -13135,8 +13309,8 @@
         </p:nvSpPr>
         <p:spPr>
           <a:xfrm>
-            <a:off x="658368" y="1682496"/>
-            <a:ext cx="10972800" cy="347472"/>
+            <a:off x="658368" y="1627632"/>
+            <a:ext cx="10972800" cy="256032"/>
           </a:xfrm>
           <a:prstGeom prst="rect">
             <a:avLst/>
@@ -13153,7 +13327,7 @@
               <a:spcAft>
                 <a:spcPts val="0"/>
               </a:spcAft>
-              <a:defRPr sz="1700" b="1">
+              <a:defRPr sz="1500" b="1">
                 <a:solidFill>
                   <a:srgbClr val="122C4E"/>
                 </a:solidFill>
@@ -13174,8 +13348,8 @@
         </p:nvSpPr>
         <p:spPr>
           <a:xfrm>
-            <a:off x="658368" y="2103120"/>
-            <a:ext cx="10972800" cy="493776"/>
+            <a:off x="658368" y="1956816"/>
+            <a:ext cx="10972800" cy="603504"/>
           </a:xfrm>
           <a:prstGeom prst="rect">
             <a:avLst/>
@@ -13219,7 +13393,11 @@
               </a:defRPr>
             </a:pPr>
             <a:r>
-              <a:t>파일 생성/열기: mkdir -p ~/agv_ws/src/agv_gazebo/worlds    &amp;&amp;    nano ~/agv_ws/src/agv_gazebo/worlds/warehouse.sdf</a:t>
+              <a:t>파일 생성: mkdir -p ~/agv_ws/src/agv_gazebo/worlds</a:t>
+            </a:r>
+            <a:br/>
+            <a:r>
+              <a:t>파일 열기: nano ~/agv_ws/src/agv_gazebo/worlds/warehouse.sdf</a:t>
             </a:r>
           </a:p>
         </p:txBody>
@@ -13232,8 +13410,8 @@
         </p:nvSpPr>
         <p:spPr>
           <a:xfrm>
-            <a:off x="658368" y="2761488"/>
-            <a:ext cx="10972800" cy="3383280"/>
+            <a:off x="658368" y="2706624"/>
+            <a:ext cx="10972800" cy="3364992"/>
           </a:xfrm>
           <a:prstGeom prst="rect">
             <a:avLst/>
@@ -13277,6 +13455,26 @@
               </a:defRPr>
             </a:pPr>
             <a:r>
+              <a:t>      &lt;static&gt;true&lt;/static&gt;</a:t>
+            </a:r>
+            <a:br/>
+            <a:r>
+              <a:t>      &lt;pose&gt;1.5 0 0.4 0 0 0&lt;/pose&gt;</a:t>
+            </a:r>
+            <a:br/>
+            <a:r>
+              <a:t>      &lt;link name="link"&gt;</a:t>
+            </a:r>
+            <a:br/>
+            <a:r>
+              <a:t>        &lt;collision name="c"&gt;</a:t>
+            </a:r>
+            <a:br/>
+            <a:r>
+              <a:t>          &lt;geometry&gt;</a:t>
+            </a:r>
+            <a:br/>
+            <a:r>
               <a:t>            &lt;box&gt;</a:t>
             </a:r>
             <a:br/>
@@ -13293,43 +13491,15 @@
             </a:r>
             <a:br/>
             <a:r>
-              <a:t>          &lt;material&gt;</a:t>
-            </a:r>
-            <a:br/>
-            <a:r>
-              <a:t>            &lt;diffuse&gt;0.9 0.7 0.1 1&lt;/diffuse&gt;</a:t>
-            </a:r>
-            <a:br/>
-            <a:r>
-              <a:t>          &lt;/material&gt;</a:t>
-            </a:r>
-            <a:br/>
-            <a:r>
-              <a:t>        &lt;/visual&gt;</a:t>
-            </a:r>
-            <a:br/>
-            <a:r>
-              <a:t>      &lt;/link&gt;</a:t>
-            </a:r>
-            <a:br/>
-            <a:r>
-              <a:t>    &lt;/model&gt;</a:t>
-            </a:r>
-            <a:br/>
-            <a:r>
-              <a:t>    </a:t>
-            </a:r>
-            <a:br/>
-            <a:r>
-              <a:t>  </a:t>
-            </a:r>
-            <a:br/>
-            <a:r>
-              <a:t>    &lt;model name="target"&gt;</a:t>
-            </a:r>
-            <a:br/>
-            <a:r>
-              <a:t>      &lt;static&gt;true&lt;/static&gt;</a:t>
+              <a:t>        &lt;/collision&gt;</a:t>
+            </a:r>
+            <a:br/>
+            <a:r>
+              <a:t>        &lt;visual name="v"&gt;</a:t>
+            </a:r>
+            <a:br/>
+            <a:r>
+              <a:t>          &lt;geometry&gt;</a:t>
             </a:r>
           </a:p>
         </p:txBody>
@@ -13342,7 +13512,7 @@
         </p:nvSpPr>
         <p:spPr>
           <a:xfrm>
-            <a:off x="749808" y="6199632"/>
+            <a:off x="749808" y="6181344"/>
             <a:ext cx="10789920" cy="201168"/>
           </a:xfrm>
           <a:prstGeom prst="rect">
@@ -13368,7 +13538,7 @@
               </a:defRPr>
             </a:pPr>
             <a:r>
-              <a:t>파일 전체 7/10 · 이 슬라이드 다음에 같은 파일의 나머지 줄이 이어집니다.</a:t>
+              <a:t>파일 전체 7/11 · 이 슬라이드 다음에 같은 파일의 나머지 줄이 이어집니다.</a:t>
             </a:r>
           </a:p>
         </p:txBody>
@@ -13425,7 +13595,7 @@
               </a:defRPr>
             </a:pPr>
             <a:r>
-              <a:t>파일을 계속 작성하고 저장한다 (8/10)</a:t>
+              <a:t>파일을 계속 작성하고 저장한다 (8/11)</a:t>
             </a:r>
           </a:p>
         </p:txBody>
@@ -13600,7 +13770,7 @@
               </a:defRPr>
             </a:pPr>
             <a:r>
-              <a:t>현재 단계 15/18    |    현재 폴더 ~/agv_ws    |    현재 터미널</a:t>
+              <a:t>현재 단계 15/19    |    현재 폴더 ~/agv_ws    |    현재 터미널</a:t>
             </a:r>
           </a:p>
         </p:txBody>
@@ -13613,8 +13783,8 @@
         </p:nvSpPr>
         <p:spPr>
           <a:xfrm>
-            <a:off x="658368" y="1682496"/>
-            <a:ext cx="10972800" cy="347472"/>
+            <a:off x="658368" y="1627632"/>
+            <a:ext cx="10972800" cy="256032"/>
           </a:xfrm>
           <a:prstGeom prst="rect">
             <a:avLst/>
@@ -13631,7 +13801,7 @@
               <a:spcAft>
                 <a:spcPts val="0"/>
               </a:spcAft>
-              <a:defRPr sz="1700" b="1">
+              <a:defRPr sz="1500" b="1">
                 <a:solidFill>
                   <a:srgbClr val="122C4E"/>
                 </a:solidFill>
@@ -13652,8 +13822,8 @@
         </p:nvSpPr>
         <p:spPr>
           <a:xfrm>
-            <a:off x="658368" y="2103120"/>
-            <a:ext cx="10972800" cy="493776"/>
+            <a:off x="658368" y="1956816"/>
+            <a:ext cx="10972800" cy="603504"/>
           </a:xfrm>
           <a:prstGeom prst="rect">
             <a:avLst/>
@@ -13697,7 +13867,11 @@
               </a:defRPr>
             </a:pPr>
             <a:r>
-              <a:t>파일 생성/열기: mkdir -p ~/agv_ws/src/agv_gazebo/worlds    &amp;&amp;    nano ~/agv_ws/src/agv_gazebo/worlds/warehouse.sdf</a:t>
+              <a:t>파일 생성: mkdir -p ~/agv_ws/src/agv_gazebo/worlds</a:t>
+            </a:r>
+            <a:br/>
+            <a:r>
+              <a:t>파일 열기: nano ~/agv_ws/src/agv_gazebo/worlds/warehouse.sdf</a:t>
             </a:r>
           </a:p>
         </p:txBody>
@@ -13710,8 +13884,8 @@
         </p:nvSpPr>
         <p:spPr>
           <a:xfrm>
-            <a:off x="658368" y="2761488"/>
-            <a:ext cx="10972800" cy="3383280"/>
+            <a:off x="658368" y="2706624"/>
+            <a:ext cx="10972800" cy="3364992"/>
           </a:xfrm>
           <a:prstGeom prst="rect">
             <a:avLst/>
@@ -13755,27 +13929,11 @@
               </a:defRPr>
             </a:pPr>
             <a:r>
-              <a:t>      &lt;pose&gt;3 1 0.5 0 0 0&lt;/pose&gt;</a:t>
-            </a:r>
-            <a:br/>
-            <a:r>
-              <a:t>      &lt;link name="link"&gt;</a:t>
-            </a:r>
-            <a:br/>
-            <a:r>
-              <a:t>        &lt;collision name="c"&gt;</a:t>
-            </a:r>
-            <a:br/>
-            <a:r>
-              <a:t>          &lt;geometry&gt;</a:t>
-            </a:r>
-            <a:br/>
-            <a:r>
               <a:t>            &lt;box&gt;</a:t>
             </a:r>
             <a:br/>
             <a:r>
-              <a:t>              &lt;size&gt;0.25 0.25 1&lt;/size&gt;</a:t>
+              <a:t>              &lt;size&gt;0.5 0.5 0.8&lt;/size&gt;</a:t>
             </a:r>
             <a:br/>
             <a:r>
@@ -13787,27 +13945,35 @@
             </a:r>
             <a:br/>
             <a:r>
-              <a:t>        &lt;/collision&gt;</a:t>
-            </a:r>
-            <a:br/>
-            <a:r>
-              <a:t>        &lt;visual name="v"&gt;</a:t>
-            </a:r>
-            <a:br/>
-            <a:r>
-              <a:t>          &lt;geometry&gt;</a:t>
-            </a:r>
-            <a:br/>
-            <a:r>
-              <a:t>            &lt;box&gt;</a:t>
-            </a:r>
-            <a:br/>
-            <a:r>
-              <a:t>              &lt;size&gt;0.25 0.25 1&lt;/size&gt;</a:t>
-            </a:r>
-            <a:br/>
-            <a:r>
-              <a:t>            &lt;/box&gt;</a:t>
+              <a:t>          &lt;material&gt;</a:t>
+            </a:r>
+            <a:br/>
+            <a:r>
+              <a:t>            &lt;diffuse&gt;0.9 0.7 0.1 1&lt;/diffuse&gt;</a:t>
+            </a:r>
+            <a:br/>
+            <a:r>
+              <a:t>          &lt;/material&gt;</a:t>
+            </a:r>
+            <a:br/>
+            <a:r>
+              <a:t>        &lt;/visual&gt;</a:t>
+            </a:r>
+            <a:br/>
+            <a:r>
+              <a:t>      &lt;/link&gt;</a:t>
+            </a:r>
+            <a:br/>
+            <a:r>
+              <a:t>    &lt;/model&gt;</a:t>
+            </a:r>
+            <a:br/>
+            <a:r>
+              <a:t>    </a:t>
+            </a:r>
+            <a:br/>
+            <a:r>
+              <a:t>  </a:t>
             </a:r>
           </a:p>
         </p:txBody>
@@ -13820,7 +13986,7 @@
         </p:nvSpPr>
         <p:spPr>
           <a:xfrm>
-            <a:off x="749808" y="6199632"/>
+            <a:off x="749808" y="6181344"/>
             <a:ext cx="10789920" cy="201168"/>
           </a:xfrm>
           <a:prstGeom prst="rect">
@@ -13846,7 +14012,7 @@
               </a:defRPr>
             </a:pPr>
             <a:r>
-              <a:t>파일 전체 8/10 · 이 슬라이드 다음에 같은 파일의 나머지 줄이 이어집니다.</a:t>
+              <a:t>파일 전체 8/11 · 이 슬라이드 다음에 같은 파일의 나머지 줄이 이어집니다.</a:t>
             </a:r>
           </a:p>
         </p:txBody>
@@ -13903,7 +14069,7 @@
               </a:defRPr>
             </a:pPr>
             <a:r>
-              <a:t>파일을 계속 작성하고 저장한다 (9/10)</a:t>
+              <a:t>파일을 계속 작성하고 저장한다 (9/11)</a:t>
             </a:r>
           </a:p>
         </p:txBody>
@@ -14078,7 +14244,7 @@
               </a:defRPr>
             </a:pPr>
             <a:r>
-              <a:t>현재 단계 16/18    |    현재 폴더 ~/agv_ws    |    현재 터미널</a:t>
+              <a:t>현재 단계 16/19    |    현재 폴더 ~/agv_ws    |    현재 터미널</a:t>
             </a:r>
           </a:p>
         </p:txBody>
@@ -14091,8 +14257,8 @@
         </p:nvSpPr>
         <p:spPr>
           <a:xfrm>
-            <a:off x="658368" y="1682496"/>
-            <a:ext cx="10972800" cy="347472"/>
+            <a:off x="658368" y="1627632"/>
+            <a:ext cx="10972800" cy="256032"/>
           </a:xfrm>
           <a:prstGeom prst="rect">
             <a:avLst/>
@@ -14109,7 +14275,7 @@
               <a:spcAft>
                 <a:spcPts val="0"/>
               </a:spcAft>
-              <a:defRPr sz="1700" b="1">
+              <a:defRPr sz="1500" b="1">
                 <a:solidFill>
                   <a:srgbClr val="122C4E"/>
                 </a:solidFill>
@@ -14130,8 +14296,8 @@
         </p:nvSpPr>
         <p:spPr>
           <a:xfrm>
-            <a:off x="658368" y="2103120"/>
-            <a:ext cx="10972800" cy="493776"/>
+            <a:off x="658368" y="1956816"/>
+            <a:ext cx="10972800" cy="603504"/>
           </a:xfrm>
           <a:prstGeom prst="rect">
             <a:avLst/>
@@ -14175,7 +14341,11 @@
               </a:defRPr>
             </a:pPr>
             <a:r>
-              <a:t>파일 생성/열기: mkdir -p ~/agv_ws/src/agv_gazebo/worlds    &amp;&amp;    nano ~/agv_ws/src/agv_gazebo/worlds/warehouse.sdf</a:t>
+              <a:t>파일 생성: mkdir -p ~/agv_ws/src/agv_gazebo/worlds</a:t>
+            </a:r>
+            <a:br/>
+            <a:r>
+              <a:t>파일 열기: nano ~/agv_ws/src/agv_gazebo/worlds/warehouse.sdf</a:t>
             </a:r>
           </a:p>
         </p:txBody>
@@ -14188,8 +14358,8 @@
         </p:nvSpPr>
         <p:spPr>
           <a:xfrm>
-            <a:off x="658368" y="2761488"/>
-            <a:ext cx="10972800" cy="3383280"/>
+            <a:off x="658368" y="2706624"/>
+            <a:ext cx="10972800" cy="3364992"/>
           </a:xfrm>
           <a:prstGeom prst="rect">
             <a:avLst/>
@@ -14233,59 +14403,51 @@
               </a:defRPr>
             </a:pPr>
             <a:r>
+              <a:t>    &lt;model name="target"&gt;</a:t>
+            </a:r>
+            <a:br/>
+            <a:r>
+              <a:t>      &lt;static&gt;true&lt;/static&gt;</a:t>
+            </a:r>
+            <a:br/>
+            <a:r>
+              <a:t>      &lt;pose&gt;3 1 0.5 0 0 0&lt;/pose&gt;</a:t>
+            </a:r>
+            <a:br/>
+            <a:r>
+              <a:t>      &lt;link name="link"&gt;</a:t>
+            </a:r>
+            <a:br/>
+            <a:r>
+              <a:t>        &lt;collision name="c"&gt;</a:t>
+            </a:r>
+            <a:br/>
+            <a:r>
+              <a:t>          &lt;geometry&gt;</a:t>
+            </a:r>
+            <a:br/>
+            <a:r>
+              <a:t>            &lt;box&gt;</a:t>
+            </a:r>
+            <a:br/>
+            <a:r>
+              <a:t>              &lt;size&gt;0.25 0.25 1&lt;/size&gt;</a:t>
+            </a:r>
+            <a:br/>
+            <a:r>
+              <a:t>            &lt;/box&gt;</a:t>
+            </a:r>
+            <a:br/>
+            <a:r>
               <a:t>          &lt;/geometry&gt;</a:t>
             </a:r>
             <a:br/>
             <a:r>
-              <a:t>          &lt;material&gt;</a:t>
-            </a:r>
-            <a:br/>
-            <a:r>
-              <a:t>            &lt;diffuse&gt;0.9 0.05 0.05 1&lt;/diffuse&gt;</a:t>
-            </a:r>
-            <a:br/>
-            <a:r>
-              <a:t>          &lt;/material&gt;</a:t>
-            </a:r>
-            <a:br/>
-            <a:r>
-              <a:t>        &lt;/visual&gt;</a:t>
-            </a:r>
-            <a:br/>
-            <a:r>
-              <a:t>      &lt;/link&gt;</a:t>
-            </a:r>
-            <a:br/>
-            <a:r>
-              <a:t>    &lt;/model&gt;</a:t>
-            </a:r>
-            <a:br/>
-            <a:r>
-              <a:t>    </a:t>
-            </a:r>
-            <a:br/>
-            <a:r>
-              <a:t>  </a:t>
-            </a:r>
-            <a:br/>
-            <a:r>
-              <a:t>    &lt;include&gt;</a:t>
-            </a:r>
-            <a:br/>
-            <a:r>
-              <a:t>      &lt;uri&gt;model://agv&lt;/uri&gt;</a:t>
-            </a:r>
-            <a:br/>
-            <a:r>
-              <a:t>      &lt;name&gt;agv&lt;/name&gt;</a:t>
-            </a:r>
-            <a:br/>
-            <a:r>
-              <a:t>      &lt;pose&gt;0 0 0.08 0 0 0&lt;/pose&gt;</a:t>
-            </a:r>
-            <a:br/>
-            <a:r>
-              <a:t>    &lt;/include&gt;</a:t>
+              <a:t>        &lt;/collision&gt;</a:t>
+            </a:r>
+            <a:br/>
+            <a:r>
+              <a:t>        &lt;visual name="v"&gt;</a:t>
             </a:r>
           </a:p>
         </p:txBody>
@@ -14298,7 +14460,7 @@
         </p:nvSpPr>
         <p:spPr>
           <a:xfrm>
-            <a:off x="749808" y="6199632"/>
+            <a:off x="749808" y="6181344"/>
             <a:ext cx="10789920" cy="201168"/>
           </a:xfrm>
           <a:prstGeom prst="rect">
@@ -14324,7 +14486,7 @@
               </a:defRPr>
             </a:pPr>
             <a:r>
-              <a:t>파일 전체 9/10 · 이 슬라이드 다음에 같은 파일의 나머지 줄이 이어집니다.</a:t>
+              <a:t>파일 전체 9/11 · 이 슬라이드 다음에 같은 파일의 나머지 줄이 이어집니다.</a:t>
             </a:r>
           </a:p>
         </p:txBody>
@@ -14381,7 +14543,7 @@
               </a:defRPr>
             </a:pPr>
             <a:r>
-              <a:t>파일을 계속 작성하고 저장한다 (10/10)</a:t>
+              <a:t>파일을 계속 작성하고 저장한다 (10/11)</a:t>
             </a:r>
           </a:p>
         </p:txBody>
@@ -14556,7 +14718,7 @@
               </a:defRPr>
             </a:pPr>
             <a:r>
-              <a:t>현재 단계 17/18    |    현재 폴더 ~/agv_ws    |    현재 터미널</a:t>
+              <a:t>현재 단계 17/19    |    현재 폴더 ~/agv_ws    |    현재 터미널</a:t>
             </a:r>
           </a:p>
         </p:txBody>
@@ -14569,8 +14731,8 @@
         </p:nvSpPr>
         <p:spPr>
           <a:xfrm>
-            <a:off x="658368" y="1682496"/>
-            <a:ext cx="10972800" cy="347472"/>
+            <a:off x="658368" y="1627632"/>
+            <a:ext cx="10972800" cy="256032"/>
           </a:xfrm>
           <a:prstGeom prst="rect">
             <a:avLst/>
@@ -14587,7 +14749,7 @@
               <a:spcAft>
                 <a:spcPts val="0"/>
               </a:spcAft>
-              <a:defRPr sz="1700" b="1">
+              <a:defRPr sz="1500" b="1">
                 <a:solidFill>
                   <a:srgbClr val="122C4E"/>
                 </a:solidFill>
@@ -14608,8 +14770,8 @@
         </p:nvSpPr>
         <p:spPr>
           <a:xfrm>
-            <a:off x="658368" y="2103120"/>
-            <a:ext cx="10972800" cy="493776"/>
+            <a:off x="658368" y="1956816"/>
+            <a:ext cx="10972800" cy="603504"/>
           </a:xfrm>
           <a:prstGeom prst="rect">
             <a:avLst/>
@@ -14653,7 +14815,11 @@
               </a:defRPr>
             </a:pPr>
             <a:r>
-              <a:t>파일 생성/열기: mkdir -p ~/agv_ws/src/agv_gazebo/worlds    &amp;&amp;    nano ~/agv_ws/src/agv_gazebo/worlds/warehouse.sdf</a:t>
+              <a:t>파일 생성: mkdir -p ~/agv_ws/src/agv_gazebo/worlds</a:t>
+            </a:r>
+            <a:br/>
+            <a:r>
+              <a:t>파일 열기: nano ~/agv_ws/src/agv_gazebo/worlds/warehouse.sdf</a:t>
             </a:r>
           </a:p>
         </p:txBody>
@@ -14666,8 +14832,8 @@
         </p:nvSpPr>
         <p:spPr>
           <a:xfrm>
-            <a:off x="658368" y="2761488"/>
-            <a:ext cx="10972800" cy="3383280"/>
+            <a:off x="658368" y="2706624"/>
+            <a:ext cx="10972800" cy="3364992"/>
           </a:xfrm>
           <a:prstGeom prst="rect">
             <a:avLst/>
@@ -14711,16 +14877,51 @@
               </a:defRPr>
             </a:pPr>
             <a:r>
+              <a:t>          &lt;geometry&gt;</a:t>
+            </a:r>
+            <a:br/>
+            <a:r>
+              <a:t>            &lt;box&gt;</a:t>
+            </a:r>
+            <a:br/>
+            <a:r>
+              <a:t>              &lt;size&gt;0.25 0.25 1&lt;/size&gt;</a:t>
+            </a:r>
+            <a:br/>
+            <a:r>
+              <a:t>            &lt;/box&gt;</a:t>
+            </a:r>
+            <a:br/>
+            <a:r>
+              <a:t>          &lt;/geometry&gt;</a:t>
+            </a:r>
+            <a:br/>
+            <a:r>
+              <a:t>          &lt;material&gt;</a:t>
+            </a:r>
+            <a:br/>
+            <a:r>
+              <a:t>            &lt;diffuse&gt;0.9 0.05 0.05 1&lt;/diffuse&gt;</a:t>
+            </a:r>
+            <a:br/>
+            <a:r>
+              <a:t>          &lt;/material&gt;</a:t>
+            </a:r>
+            <a:br/>
+            <a:r>
+              <a:t>        &lt;/visual&gt;</a:t>
+            </a:r>
+            <a:br/>
+            <a:r>
+              <a:t>      &lt;/link&gt;</a:t>
+            </a:r>
+            <a:br/>
+            <a:r>
+              <a:t>    &lt;/model&gt;</a:t>
+            </a:r>
+            <a:br/>
+            <a:r>
               <a:t>    </a:t>
-            </a:r>
-            <a:br/>
-            <a:br/>
-            <a:r>
-              <a:t>  &lt;/world&gt;</a:t>
-            </a:r>
-            <a:br/>
-            <a:r>
-              <a:t>&lt;/sdf&gt;</a:t>
             </a:r>
           </a:p>
         </p:txBody>
@@ -14733,7 +14934,7 @@
         </p:nvSpPr>
         <p:spPr>
           <a:xfrm>
-            <a:off x="749808" y="6199632"/>
+            <a:off x="749808" y="6181344"/>
             <a:ext cx="10789920" cy="201168"/>
           </a:xfrm>
           <a:prstGeom prst="rect">
@@ -14759,7 +14960,7 @@
               </a:defRPr>
             </a:pPr>
             <a:r>
-              <a:t>파일 전체 10/10 · 이 슬라이드 다음에 같은 파일의 나머지 줄이 이어집니다.</a:t>
+              <a:t>파일 전체 10/11 · 이 슬라이드 다음에 같은 파일의 나머지 줄이 이어집니다.</a:t>
             </a:r>
           </a:p>
         </p:txBody>
@@ -14816,7 +15017,7 @@
               </a:defRPr>
             </a:pPr>
             <a:r>
-              <a:t>파일을 새로 만들고 저장한다 (1/5)</a:t>
+              <a:t>파일을 계속 작성하고 저장한다 (11/11)</a:t>
             </a:r>
           </a:p>
         </p:txBody>
@@ -14855,7 +15056,7 @@
               </a:defRPr>
             </a:pPr>
             <a:r>
-              <a:t>~/agv_ws/src/agv_mission/agv_mission/mission_manager.py</a:t>
+              <a:t>~/agv_ws/src/agv_gazebo/worlds/warehouse.sdf</a:t>
             </a:r>
           </a:p>
         </p:txBody>
@@ -14991,7 +15192,7 @@
               </a:defRPr>
             </a:pPr>
             <a:r>
-              <a:t>현재 단계 18/23    |    현재 폴더 ~/agv_ws    |    현재 터미널</a:t>
+              <a:t>현재 단계 18/19    |    현재 폴더 ~/agv_ws    |    현재 터미널</a:t>
             </a:r>
           </a:p>
         </p:txBody>
@@ -15004,8 +15205,8 @@
         </p:nvSpPr>
         <p:spPr>
           <a:xfrm>
-            <a:off x="658368" y="1682496"/>
-            <a:ext cx="10972800" cy="347472"/>
+            <a:off x="658368" y="1627632"/>
+            <a:ext cx="10972800" cy="256032"/>
           </a:xfrm>
           <a:prstGeom prst="rect">
             <a:avLst/>
@@ -15022,7 +15223,7 @@
               <a:spcAft>
                 <a:spcPts val="0"/>
               </a:spcAft>
-              <a:defRPr sz="1700" b="1">
+              <a:defRPr sz="1500" b="1">
                 <a:solidFill>
                   <a:srgbClr val="122C4E"/>
                 </a:solidFill>
@@ -15043,8 +15244,8 @@
         </p:nvSpPr>
         <p:spPr>
           <a:xfrm>
-            <a:off x="658368" y="2103120"/>
-            <a:ext cx="10972800" cy="493776"/>
+            <a:off x="658368" y="1956816"/>
+            <a:ext cx="10972800" cy="603504"/>
           </a:xfrm>
           <a:prstGeom prst="rect">
             <a:avLst/>
@@ -15088,7 +15289,11 @@
               </a:defRPr>
             </a:pPr>
             <a:r>
-              <a:t>파일 생성/열기: mkdir -p ~/agv_ws/src/agv_mission/agv_mission    &amp;&amp;    nano ~/agv_ws/src/agv_mission/agv_mission/mission_manager.py</a:t>
+              <a:t>파일 생성: mkdir -p ~/agv_ws/src/agv_gazebo/worlds</a:t>
+            </a:r>
+            <a:br/>
+            <a:r>
+              <a:t>파일 열기: nano ~/agv_ws/src/agv_gazebo/worlds/warehouse.sdf</a:t>
             </a:r>
           </a:p>
         </p:txBody>
@@ -15101,8 +15306,8 @@
         </p:nvSpPr>
         <p:spPr>
           <a:xfrm>
-            <a:off x="658368" y="2761488"/>
-            <a:ext cx="10972800" cy="3383280"/>
+            <a:off x="658368" y="2706624"/>
+            <a:ext cx="10972800" cy="3364992"/>
           </a:xfrm>
           <a:prstGeom prst="rect">
             <a:avLst/>
@@ -15146,53 +15351,40 @@
               </a:defRPr>
             </a:pPr>
             <a:r>
-              <a:t>import math</a:t>
-            </a:r>
-            <a:br/>
-            <a:r>
-              <a:t>import rclpy</a:t>
-            </a:r>
-            <a:br/>
-            <a:r>
-              <a:t>from rclpy.node import Node</a:t>
-            </a:r>
-            <a:br/>
-            <a:r>
-              <a:t>from geometry_msgs.msg import Twist</a:t>
-            </a:r>
-            <a:br/>
-            <a:r>
-              <a:t>from std_msgs.msg import Float32, String</a:t>
-            </a:r>
-            <a:br/>
-            <a:r>
-              <a:t>from agv_interfaces.msg import DetectionArray</a:t>
-            </a:r>
-            <a:br/>
-            <a:br/>
-            <a:r>
-              <a:t>class MissionManager(Node):</a:t>
-            </a:r>
-            <a:br/>
-            <a:br/>
-            <a:r>
-              <a:t>    def __init__(self):</a:t>
-            </a:r>
-            <a:br/>
-            <a:r>
-              <a:t>        super().__init__('mission_manager')</a:t>
-            </a:r>
-            <a:br/>
-            <a:r>
-              <a:t>        self.declare_parameter('stop_distance', 0.5)</a:t>
-            </a:r>
-            <a:br/>
-            <a:r>
-              <a:t>        self.declare_parameter('search_speed', 0.25)</a:t>
-            </a:r>
-            <a:br/>
-            <a:r>
-              <a:t>        self.declare_parameter('approach_speed', 0.15)</a:t>
+              <a:t>  </a:t>
+            </a:r>
+            <a:br/>
+            <a:r>
+              <a:t>    &lt;include&gt;</a:t>
+            </a:r>
+            <a:br/>
+            <a:r>
+              <a:t>      &lt;uri&gt;model://agv&lt;/uri&gt;</a:t>
+            </a:r>
+            <a:br/>
+            <a:r>
+              <a:t>      &lt;name&gt;agv&lt;/name&gt;</a:t>
+            </a:r>
+            <a:br/>
+            <a:r>
+              <a:t>      &lt;pose&gt;0 0 0.08 0 0 0&lt;/pose&gt;</a:t>
+            </a:r>
+            <a:br/>
+            <a:r>
+              <a:t>    &lt;/include&gt;</a:t>
+            </a:r>
+            <a:br/>
+            <a:r>
+              <a:t>    </a:t>
+            </a:r>
+            <a:br/>
+            <a:br/>
+            <a:r>
+              <a:t>  &lt;/world&gt;</a:t>
+            </a:r>
+            <a:br/>
+            <a:r>
+              <a:t>&lt;/sdf&gt;</a:t>
             </a:r>
           </a:p>
         </p:txBody>
@@ -15205,7 +15397,7 @@
         </p:nvSpPr>
         <p:spPr>
           <a:xfrm>
-            <a:off x="749808" y="6199632"/>
+            <a:off x="749808" y="6181344"/>
             <a:ext cx="10789920" cy="201168"/>
           </a:xfrm>
           <a:prstGeom prst="rect">
@@ -15231,7 +15423,7 @@
               </a:defRPr>
             </a:pPr>
             <a:r>
-              <a:t>파일 전체 1/5 · 이 슬라이드 다음에 같은 파일의 나머지 줄이 이어집니다.</a:t>
+              <a:t>파일 전체 11/11 · 이 슬라이드 다음에 같은 파일의 나머지 줄이 이어집니다.</a:t>
             </a:r>
           </a:p>
         </p:txBody>
@@ -15288,7 +15480,7 @@
               </a:defRPr>
             </a:pPr>
             <a:r>
-              <a:t>파일을 계속 작성하고 저장한다 (2/5)</a:t>
+              <a:t>파일을 새로 만들고 저장한다 (1/6)</a:t>
             </a:r>
           </a:p>
         </p:txBody>
@@ -15463,7 +15655,7 @@
               </a:defRPr>
             </a:pPr>
             <a:r>
-              <a:t>현재 단계 19/23    |    현재 폴더 ~/agv_ws    |    현재 터미널</a:t>
+              <a:t>현재 단계 19/25    |    현재 폴더 ~/agv_ws    |    현재 터미널</a:t>
             </a:r>
           </a:p>
         </p:txBody>
@@ -15476,8 +15668,8 @@
         </p:nvSpPr>
         <p:spPr>
           <a:xfrm>
-            <a:off x="658368" y="1682496"/>
-            <a:ext cx="10972800" cy="347472"/>
+            <a:off x="658368" y="1627632"/>
+            <a:ext cx="10972800" cy="256032"/>
           </a:xfrm>
           <a:prstGeom prst="rect">
             <a:avLst/>
@@ -15494,7 +15686,7 @@
               <a:spcAft>
                 <a:spcPts val="0"/>
               </a:spcAft>
-              <a:defRPr sz="1700" b="1">
+              <a:defRPr sz="1500" b="1">
                 <a:solidFill>
                   <a:srgbClr val="122C4E"/>
                 </a:solidFill>
@@ -15515,8 +15707,8 @@
         </p:nvSpPr>
         <p:spPr>
           <a:xfrm>
-            <a:off x="658368" y="2103120"/>
-            <a:ext cx="10972800" cy="493776"/>
+            <a:off x="658368" y="1956816"/>
+            <a:ext cx="10972800" cy="603504"/>
           </a:xfrm>
           <a:prstGeom prst="rect">
             <a:avLst/>
@@ -15560,7 +15752,11 @@
               </a:defRPr>
             </a:pPr>
             <a:r>
-              <a:t>파일 생성/열기: mkdir -p ~/agv_ws/src/agv_mission/agv_mission    &amp;&amp;    nano ~/agv_ws/src/agv_mission/agv_mission/mission_manager.py</a:t>
+              <a:t>파일 생성: mkdir -p ~/agv_ws/src/agv_mission/agv_mission</a:t>
+            </a:r>
+            <a:br/>
+            <a:r>
+              <a:t>파일 열기: nano ~/agv_ws/src/agv_mission/agv_mission/mission_manager.py</a:t>
             </a:r>
           </a:p>
         </p:txBody>
@@ -15573,8 +15769,8 @@
         </p:nvSpPr>
         <p:spPr>
           <a:xfrm>
-            <a:off x="658368" y="2761488"/>
-            <a:ext cx="10972800" cy="3383280"/>
+            <a:off x="658368" y="2706624"/>
+            <a:ext cx="10972800" cy="3364992"/>
           </a:xfrm>
           <a:prstGeom prst="rect">
             <a:avLst/>
@@ -15618,56 +15814,45 @@
               </a:defRPr>
             </a:pPr>
             <a:r>
-              <a:t>        self.declare_parameter('image_center_x', 320)</a:t>
-            </a:r>
-            <a:br/>
-            <a:r>
-              <a:t>        self.state = 'IDLE'</a:t>
-            </a:r>
-            <a:br/>
-            <a:r>
-              <a:t>        self.obstacle_distance = math.inf</a:t>
-            </a:r>
-            <a:br/>
-            <a:r>
-              <a:t>        self.target = None</a:t>
-            </a:r>
-            <a:br/>
-            <a:r>
-              <a:t>        self.create_subscription(Float32, '/obstacle_distance', self.obstacle_callback,</a:t>
-            </a:r>
-            <a:br/>
-            <a:r>
-              <a:t>            10)</a:t>
-            </a:r>
-            <a:br/>
-            <a:r>
-              <a:t>        self.create_subscription(DetectionArray, '/detections', self.detections_callback,</a:t>
-            </a:r>
-            <a:br/>
-            <a:r>
-              <a:t>             10)</a:t>
-            </a:r>
-            <a:br/>
-            <a:r>
-              <a:t>        self.command_publisher = self.create_publisher(Twist, '/cmd_vel_raw', 10)</a:t>
-            </a:r>
-            <a:br/>
-            <a:r>
-              <a:t>        self.state_publisher = self.create_publisher(String, '/mission_state', 10)</a:t>
-            </a:r>
-            <a:br/>
-            <a:r>
-              <a:t>        self.create_timer(0.1, self.tick)</a:t>
-            </a:r>
-            <a:br/>
-            <a:br/>
-            <a:r>
-              <a:t>    def obstacle_callback(self, message):</a:t>
-            </a:r>
-            <a:br/>
-            <a:r>
-              <a:t>        self.obstacle_distance = message.data</a:t>
+              <a:t>import math</a:t>
+            </a:r>
+            <a:br/>
+            <a:r>
+              <a:t>import rclpy</a:t>
+            </a:r>
+            <a:br/>
+            <a:r>
+              <a:t>from rclpy.node import Node</a:t>
+            </a:r>
+            <a:br/>
+            <a:r>
+              <a:t>from geometry_msgs.msg import Twist</a:t>
+            </a:r>
+            <a:br/>
+            <a:r>
+              <a:t>from std_msgs.msg import Float32, String</a:t>
+            </a:r>
+            <a:br/>
+            <a:r>
+              <a:t>from agv_interfaces.msg import DetectionArray</a:t>
+            </a:r>
+            <a:br/>
+            <a:br/>
+            <a:r>
+              <a:t>class MissionManager(Node):</a:t>
+            </a:r>
+            <a:br/>
+            <a:br/>
+            <a:r>
+              <a:t>    def __init__(self):</a:t>
+            </a:r>
+            <a:br/>
+            <a:r>
+              <a:t>        super().__init__('mission_manager')</a:t>
+            </a:r>
+            <a:br/>
+            <a:r>
+              <a:t>        self.declare_parameter('stop_distance', 0.5)</a:t>
             </a:r>
           </a:p>
         </p:txBody>
@@ -15680,7 +15865,7 @@
         </p:nvSpPr>
         <p:spPr>
           <a:xfrm>
-            <a:off x="749808" y="6199632"/>
+            <a:off x="749808" y="6181344"/>
             <a:ext cx="10789920" cy="201168"/>
           </a:xfrm>
           <a:prstGeom prst="rect">
@@ -15706,7 +15891,7 @@
               </a:defRPr>
             </a:pPr>
             <a:r>
-              <a:t>파일 전체 2/5 · 이 슬라이드 다음에 같은 파일의 나머지 줄이 이어집니다.</a:t>
+              <a:t>파일 전체 1/6 · 이 슬라이드 다음에 같은 파일의 나머지 줄이 이어집니다.</a:t>
             </a:r>
           </a:p>
         </p:txBody>
@@ -15763,7 +15948,7 @@
               </a:defRPr>
             </a:pPr>
             <a:r>
-              <a:t>파일을 계속 작성하고 저장한다 (3/5)</a:t>
+              <a:t>파일을 계속 작성하고 저장한다 (2/6)</a:t>
             </a:r>
           </a:p>
         </p:txBody>
@@ -15938,7 +16123,7 @@
               </a:defRPr>
             </a:pPr>
             <a:r>
-              <a:t>현재 단계 20/23    |    현재 폴더 ~/agv_ws    |    현재 터미널</a:t>
+              <a:t>현재 단계 20/25    |    현재 폴더 ~/agv_ws    |    현재 터미널</a:t>
             </a:r>
           </a:p>
         </p:txBody>
@@ -15951,8 +16136,8 @@
         </p:nvSpPr>
         <p:spPr>
           <a:xfrm>
-            <a:off x="658368" y="1682496"/>
-            <a:ext cx="10972800" cy="347472"/>
+            <a:off x="658368" y="1627632"/>
+            <a:ext cx="10972800" cy="256032"/>
           </a:xfrm>
           <a:prstGeom prst="rect">
             <a:avLst/>
@@ -15969,7 +16154,7 @@
               <a:spcAft>
                 <a:spcPts val="0"/>
               </a:spcAft>
-              <a:defRPr sz="1700" b="1">
+              <a:defRPr sz="1500" b="1">
                 <a:solidFill>
                   <a:srgbClr val="122C4E"/>
                 </a:solidFill>
@@ -15990,8 +16175,8 @@
         </p:nvSpPr>
         <p:spPr>
           <a:xfrm>
-            <a:off x="658368" y="2103120"/>
-            <a:ext cx="10972800" cy="493776"/>
+            <a:off x="658368" y="1956816"/>
+            <a:ext cx="10972800" cy="603504"/>
           </a:xfrm>
           <a:prstGeom prst="rect">
             <a:avLst/>
@@ -16035,7 +16220,11 @@
               </a:defRPr>
             </a:pPr>
             <a:r>
-              <a:t>파일 생성/열기: mkdir -p ~/agv_ws/src/agv_mission/agv_mission    &amp;&amp;    nano ~/agv_ws/src/agv_mission/agv_mission/mission_manager.py</a:t>
+              <a:t>파일 생성: mkdir -p ~/agv_ws/src/agv_mission/agv_mission</a:t>
+            </a:r>
+            <a:br/>
+            <a:r>
+              <a:t>파일 열기: nano ~/agv_ws/src/agv_mission/agv_mission/mission_manager.py</a:t>
             </a:r>
           </a:p>
         </p:txBody>
@@ -16048,8 +16237,8 @@
         </p:nvSpPr>
         <p:spPr>
           <a:xfrm>
-            <a:off x="658368" y="2761488"/>
-            <a:ext cx="10972800" cy="3383280"/>
+            <a:off x="658368" y="2706624"/>
+            <a:ext cx="10972800" cy="3364992"/>
           </a:xfrm>
           <a:prstGeom prst="rect">
             <a:avLst/>
@@ -16092,51 +16281,52 @@
                 <a:latin typeface="DejaVu Sans Mono"/>
               </a:defRPr>
             </a:pPr>
-            <a:br/>
-            <a:r>
-              <a:t>    def detections_callback(self, message):</a:t>
-            </a:r>
-            <a:br/>
-            <a:r>
-              <a:t>        self.target = message.detections[0] if message.detections else None</a:t>
-            </a:r>
-            <a:br/>
-            <a:br/>
-            <a:r>
-              <a:t>    def set_state(self, state):</a:t>
-            </a:r>
-            <a:br/>
-            <a:r>
-              <a:t>        if state != self.state:</a:t>
-            </a:r>
-            <a:br/>
-            <a:r>
-              <a:t>            self.state = state</a:t>
-            </a:r>
-            <a:br/>
-            <a:r>
-              <a:t>            self.get_logger().info('mission state -&gt; ' + state)</a:t>
-            </a:r>
-            <a:br/>
-            <a:r>
-              <a:t>        self.state_publisher.publish(String(data=self.state))</a:t>
-            </a:r>
-            <a:br/>
-            <a:br/>
-            <a:r>
-              <a:t>    def tick(self):</a:t>
-            </a:r>
-            <a:br/>
-            <a:r>
-              <a:t>        command = Twist()</a:t>
-            </a:r>
-            <a:br/>
-            <a:r>
-              <a:t>        if self.obstacle_distance &lt; self.get_parameter('stop_distance').value:</a:t>
-            </a:r>
-            <a:br/>
-            <a:r>
-              <a:t>            self.set_state('AVOID')</a:t>
+            <a:r>
+              <a:t>        self.declare_parameter('search_speed', 0.25)</a:t>
+            </a:r>
+            <a:br/>
+            <a:r>
+              <a:t>        self.declare_parameter('approach_speed', 0.15)</a:t>
+            </a:r>
+            <a:br/>
+            <a:r>
+              <a:t>        self.declare_parameter('image_center_x', 320)</a:t>
+            </a:r>
+            <a:br/>
+            <a:r>
+              <a:t>        self.state = 'IDLE'</a:t>
+            </a:r>
+            <a:br/>
+            <a:r>
+              <a:t>        self.obstacle_distance = math.inf</a:t>
+            </a:r>
+            <a:br/>
+            <a:r>
+              <a:t>        self.target = None</a:t>
+            </a:r>
+            <a:br/>
+            <a:r>
+              <a:t>        self.create_subscription(Float32, '/obstacle_distance', self.obstacle_callback,</a:t>
+            </a:r>
+            <a:br/>
+            <a:r>
+              <a:t>            10)</a:t>
+            </a:r>
+            <a:br/>
+            <a:r>
+              <a:t>        self.create_subscription(DetectionArray, '/detections', self.detections_callback,</a:t>
+            </a:r>
+            <a:br/>
+            <a:r>
+              <a:t>             10)</a:t>
+            </a:r>
+            <a:br/>
+            <a:r>
+              <a:t>        self.command_publisher = self.create_publisher(Twist, '/cmd_vel_raw', 10)</a:t>
+            </a:r>
+            <a:br/>
+            <a:r>
+              <a:t>        self.state_publisher = self.create_publisher(String, '/mission_state', 10)</a:t>
             </a:r>
           </a:p>
         </p:txBody>
@@ -16149,7 +16339,7 @@
         </p:nvSpPr>
         <p:spPr>
           <a:xfrm>
-            <a:off x="749808" y="6199632"/>
+            <a:off x="749808" y="6181344"/>
             <a:ext cx="10789920" cy="201168"/>
           </a:xfrm>
           <a:prstGeom prst="rect">
@@ -16175,7 +16365,7 @@
               </a:defRPr>
             </a:pPr>
             <a:r>
-              <a:t>파일 전체 3/5 · 이 슬라이드 다음에 같은 파일의 나머지 줄이 이어집니다.</a:t>
+              <a:t>파일 전체 2/6 · 이 슬라이드 다음에 같은 파일의 나머지 줄이 이어집니다.</a:t>
             </a:r>
           </a:p>
         </p:txBody>
@@ -16232,7 +16422,7 @@
               </a:defRPr>
             </a:pPr>
             <a:r>
-              <a:t>파일을 계속 작성하고 저장한다 (4/5)</a:t>
+              <a:t>파일을 계속 작성하고 저장한다 (3/6)</a:t>
             </a:r>
           </a:p>
         </p:txBody>
@@ -16407,7 +16597,7 @@
               </a:defRPr>
             </a:pPr>
             <a:r>
-              <a:t>현재 단계 21/23    |    현재 폴더 ~/agv_ws    |    현재 터미널</a:t>
+              <a:t>현재 단계 21/25    |    현재 폴더 ~/agv_ws    |    현재 터미널</a:t>
             </a:r>
           </a:p>
         </p:txBody>
@@ -16420,8 +16610,8 @@
         </p:nvSpPr>
         <p:spPr>
           <a:xfrm>
-            <a:off x="658368" y="1682496"/>
-            <a:ext cx="10972800" cy="347472"/>
+            <a:off x="658368" y="1627632"/>
+            <a:ext cx="10972800" cy="256032"/>
           </a:xfrm>
           <a:prstGeom prst="rect">
             <a:avLst/>
@@ -16438,7 +16628,7 @@
               <a:spcAft>
                 <a:spcPts val="0"/>
               </a:spcAft>
-              <a:defRPr sz="1700" b="1">
+              <a:defRPr sz="1500" b="1">
                 <a:solidFill>
                   <a:srgbClr val="122C4E"/>
                 </a:solidFill>
@@ -16459,8 +16649,8 @@
         </p:nvSpPr>
         <p:spPr>
           <a:xfrm>
-            <a:off x="658368" y="2103120"/>
-            <a:ext cx="10972800" cy="493776"/>
+            <a:off x="658368" y="1956816"/>
+            <a:ext cx="10972800" cy="603504"/>
           </a:xfrm>
           <a:prstGeom prst="rect">
             <a:avLst/>
@@ -16504,7 +16694,11 @@
               </a:defRPr>
             </a:pPr>
             <a:r>
-              <a:t>파일 생성/열기: mkdir -p ~/agv_ws/src/agv_mission/agv_mission    &amp;&amp;    nano ~/agv_ws/src/agv_mission/agv_mission/mission_manager.py</a:t>
+              <a:t>파일 생성: mkdir -p ~/agv_ws/src/agv_mission/agv_mission</a:t>
+            </a:r>
+            <a:br/>
+            <a:r>
+              <a:t>파일 열기: nano ~/agv_ws/src/agv_mission/agv_mission/mission_manager.py</a:t>
             </a:r>
           </a:p>
         </p:txBody>
@@ -16517,8 +16711,8 @@
         </p:nvSpPr>
         <p:spPr>
           <a:xfrm>
-            <a:off x="658368" y="2761488"/>
-            <a:ext cx="10972800" cy="3383280"/>
+            <a:off x="658368" y="2706624"/>
+            <a:ext cx="10972800" cy="3364992"/>
           </a:xfrm>
           <a:prstGeom prst="rect">
             <a:avLst/>
@@ -16562,56 +16756,42 @@
               </a:defRPr>
             </a:pPr>
             <a:r>
-              <a:t>            command.angular.z = self.get_parameter('search_speed').value</a:t>
-            </a:r>
-            <a:br/>
-            <a:r>
-              <a:t>        elif self.target is None:</a:t>
-            </a:r>
-            <a:br/>
-            <a:r>
-              <a:t>            self.set_state('SEARCH')</a:t>
-            </a:r>
-            <a:br/>
-            <a:r>
-              <a:t>            command.angular.z = self.get_parameter('search_speed').value</a:t>
-            </a:r>
-            <a:br/>
-            <a:r>
-              <a:t>        elif self.target.estimated_distance &gt; 0.0 and self.target.estimated_distance &lt; self.get_parameter('stop_distance').value:</a:t>
-            </a:r>
-            <a:br/>
-            <a:r>
-              <a:t>            self.set_state('GOAL')</a:t>
-            </a:r>
-            <a:br/>
-            <a:r>
-              <a:t>        else:</a:t>
-            </a:r>
-            <a:br/>
-            <a:r>
-              <a:t>            self.set_state('APPROACH')</a:t>
-            </a:r>
-            <a:br/>
-            <a:r>
-              <a:t>            command.linear.x = self.get_parameter('approach_speed').value</a:t>
-            </a:r>
-            <a:br/>
-            <a:r>
-              <a:t>            error = self.target.center_x - self.get_parameter('image_center_x').value</a:t>
-            </a:r>
-            <a:br/>
-            <a:r>
-              <a:t>            command.angular.z = max(min(-0.004 * error, 0.6), -0.6)</a:t>
-            </a:r>
-            <a:br/>
-            <a:r>
-              <a:t>        self.command_publisher.publish(command)</a:t>
-            </a:r>
-            <a:br/>
-            <a:br/>
-            <a:r>
-              <a:t>def main():</a:t>
+              <a:t>        self.create_timer(0.1, self.tick)</a:t>
+            </a:r>
+            <a:br/>
+            <a:br/>
+            <a:r>
+              <a:t>    def obstacle_callback(self, message):</a:t>
+            </a:r>
+            <a:br/>
+            <a:r>
+              <a:t>        self.obstacle_distance = message.data</a:t>
+            </a:r>
+            <a:br/>
+            <a:br/>
+            <a:r>
+              <a:t>    def detections_callback(self, message):</a:t>
+            </a:r>
+            <a:br/>
+            <a:r>
+              <a:t>        self.target = message.detections[0] if message.detections else None</a:t>
+            </a:r>
+            <a:br/>
+            <a:br/>
+            <a:r>
+              <a:t>    def set_state(self, state):</a:t>
+            </a:r>
+            <a:br/>
+            <a:r>
+              <a:t>        if state != self.state:</a:t>
+            </a:r>
+            <a:br/>
+            <a:r>
+              <a:t>            self.state = state</a:t>
+            </a:r>
+            <a:br/>
+            <a:r>
+              <a:t>            self.get_logger().info('mission state -&gt; ' + state)</a:t>
             </a:r>
           </a:p>
         </p:txBody>
@@ -16624,7 +16804,7 @@
         </p:nvSpPr>
         <p:spPr>
           <a:xfrm>
-            <a:off x="749808" y="6199632"/>
+            <a:off x="749808" y="6181344"/>
             <a:ext cx="10789920" cy="201168"/>
           </a:xfrm>
           <a:prstGeom prst="rect">
@@ -16650,7 +16830,7 @@
               </a:defRPr>
             </a:pPr>
             <a:r>
-              <a:t>파일 전체 4/5 · 이 슬라이드 다음에 같은 파일의 나머지 줄이 이어집니다.</a:t>
+              <a:t>파일 전체 3/6 · 이 슬라이드 다음에 같은 파일의 나머지 줄이 이어집니다.</a:t>
             </a:r>
           </a:p>
         </p:txBody>
@@ -16707,7 +16887,7 @@
               </a:defRPr>
             </a:pPr>
             <a:r>
-              <a:t>파일을 계속 작성하고 저장한다 (5/5)</a:t>
+              <a:t>파일을 계속 작성하고 저장한다 (4/6)</a:t>
             </a:r>
           </a:p>
         </p:txBody>
@@ -16882,7 +17062,7 @@
               </a:defRPr>
             </a:pPr>
             <a:r>
-              <a:t>현재 단계 22/23    |    현재 폴더 ~/agv_ws    |    현재 터미널</a:t>
+              <a:t>현재 단계 22/25    |    현재 폴더 ~/agv_ws    |    현재 터미널</a:t>
             </a:r>
           </a:p>
         </p:txBody>
@@ -16895,8 +17075,8 @@
         </p:nvSpPr>
         <p:spPr>
           <a:xfrm>
-            <a:off x="658368" y="1682496"/>
-            <a:ext cx="10972800" cy="347472"/>
+            <a:off x="658368" y="1627632"/>
+            <a:ext cx="10972800" cy="256032"/>
           </a:xfrm>
           <a:prstGeom prst="rect">
             <a:avLst/>
@@ -16913,7 +17093,7 @@
               <a:spcAft>
                 <a:spcPts val="0"/>
               </a:spcAft>
-              <a:defRPr sz="1700" b="1">
+              <a:defRPr sz="1500" b="1">
                 <a:solidFill>
                   <a:srgbClr val="122C4E"/>
                 </a:solidFill>
@@ -16934,8 +17114,8 @@
         </p:nvSpPr>
         <p:spPr>
           <a:xfrm>
-            <a:off x="658368" y="2103120"/>
-            <a:ext cx="10972800" cy="493776"/>
+            <a:off x="658368" y="1956816"/>
+            <a:ext cx="10972800" cy="603504"/>
           </a:xfrm>
           <a:prstGeom prst="rect">
             <a:avLst/>
@@ -16979,7 +17159,11 @@
               </a:defRPr>
             </a:pPr>
             <a:r>
-              <a:t>파일 생성/열기: mkdir -p ~/agv_ws/src/agv_mission/agv_mission    &amp;&amp;    nano ~/agv_ws/src/agv_mission/agv_mission/mission_manager.py</a:t>
+              <a:t>파일 생성: mkdir -p ~/agv_ws/src/agv_mission/agv_mission</a:t>
+            </a:r>
+            <a:br/>
+            <a:r>
+              <a:t>파일 열기: nano ~/agv_ws/src/agv_mission/agv_mission/mission_manager.py</a:t>
             </a:r>
           </a:p>
         </p:txBody>
@@ -16992,8 +17176,8 @@
         </p:nvSpPr>
         <p:spPr>
           <a:xfrm>
-            <a:off x="658368" y="2761488"/>
-            <a:ext cx="10972800" cy="3383280"/>
+            <a:off x="658368" y="2706624"/>
+            <a:ext cx="10972800" cy="3364992"/>
           </a:xfrm>
           <a:prstGeom prst="rect">
             <a:avLst/>
@@ -17037,43 +17221,48 @@
               </a:defRPr>
             </a:pPr>
             <a:r>
-              <a:t>    rclpy.init()</a:t>
-            </a:r>
-            <a:br/>
-            <a:r>
-              <a:t>    node = MissionManager()</a:t>
-            </a:r>
-            <a:br/>
-            <a:r>
-              <a:t>    try:</a:t>
-            </a:r>
-            <a:br/>
-            <a:r>
-              <a:t>        rclpy.spin(node)</a:t>
-            </a:r>
-            <a:br/>
-            <a:r>
-              <a:t>    except KeyboardInterrupt:</a:t>
-            </a:r>
-            <a:br/>
-            <a:r>
-              <a:t>        pass</a:t>
-            </a:r>
-            <a:br/>
-            <a:r>
-              <a:t>    finally:</a:t>
-            </a:r>
-            <a:br/>
-            <a:r>
-              <a:t>        node.destroy_node()</a:t>
-            </a:r>
-            <a:br/>
-            <a:r>
-              <a:t>        if rclpy.ok():</a:t>
-            </a:r>
-            <a:br/>
-            <a:r>
-              <a:t>            rclpy.shutdown()</a:t>
+              <a:t>        self.state_publisher.publish(String(data=self.state))</a:t>
+            </a:r>
+            <a:br/>
+            <a:br/>
+            <a:r>
+              <a:t>    def tick(self):</a:t>
+            </a:r>
+            <a:br/>
+            <a:r>
+              <a:t>        command = Twist()</a:t>
+            </a:r>
+            <a:br/>
+            <a:r>
+              <a:t>        if self.obstacle_distance &lt; self.get_parameter('stop_distance').value:</a:t>
+            </a:r>
+            <a:br/>
+            <a:r>
+              <a:t>            self.set_state('AVOID')</a:t>
+            </a:r>
+            <a:br/>
+            <a:r>
+              <a:t>            command.angular.z = self.get_parameter('search_speed').value</a:t>
+            </a:r>
+            <a:br/>
+            <a:r>
+              <a:t>        elif self.target is None:</a:t>
+            </a:r>
+            <a:br/>
+            <a:r>
+              <a:t>            self.set_state('SEARCH')</a:t>
+            </a:r>
+            <a:br/>
+            <a:r>
+              <a:t>            command.angular.z = self.get_parameter('search_speed').value</a:t>
+            </a:r>
+            <a:br/>
+            <a:r>
+              <a:t>        elif self.target.estimated_distance &gt; 0.0 and self.target.estimated_distance &lt; self.get_parameter('stop_distance').value:</a:t>
+            </a:r>
+            <a:br/>
+            <a:r>
+              <a:t>            self.set_state('GOAL')</a:t>
             </a:r>
           </a:p>
         </p:txBody>
@@ -17086,7 +17275,7 @@
         </p:nvSpPr>
         <p:spPr>
           <a:xfrm>
-            <a:off x="749808" y="6199632"/>
+            <a:off x="749808" y="6181344"/>
             <a:ext cx="10789920" cy="201168"/>
           </a:xfrm>
           <a:prstGeom prst="rect">
@@ -17112,7 +17301,7 @@
               </a:defRPr>
             </a:pPr>
             <a:r>
-              <a:t>파일 전체 5/5 · 이 슬라이드 다음에 같은 파일의 나머지 줄이 이어집니다.</a:t>
+              <a:t>파일 전체 4/6 · 이 슬라이드 다음에 같은 파일의 나머지 줄이 이어집니다.</a:t>
             </a:r>
           </a:p>
         </p:txBody>
@@ -17169,7 +17358,7 @@
               </a:defRPr>
             </a:pPr>
             <a:r>
-              <a:t>파일을 새로 만들고 저장한다 (1/4)</a:t>
+              <a:t>파일을 계속 작성하고 저장한다 (5/6)</a:t>
             </a:r>
           </a:p>
         </p:txBody>
@@ -17208,7 +17397,7 @@
               </a:defRPr>
             </a:pPr>
             <a:r>
-              <a:t>~/agv_ws/src/agv_control/agv_control/safety_controller.py</a:t>
+              <a:t>~/agv_ws/src/agv_mission/agv_mission/mission_manager.py</a:t>
             </a:r>
           </a:p>
         </p:txBody>
@@ -17344,7 +17533,7 @@
               </a:defRPr>
             </a:pPr>
             <a:r>
-              <a:t>현재 단계 23/27    |    현재 폴더 ~/agv_ws    |    현재 터미널</a:t>
+              <a:t>현재 단계 23/25    |    현재 폴더 ~/agv_ws    |    현재 터미널</a:t>
             </a:r>
           </a:p>
         </p:txBody>
@@ -17357,8 +17546,8 @@
         </p:nvSpPr>
         <p:spPr>
           <a:xfrm>
-            <a:off x="658368" y="1682496"/>
-            <a:ext cx="10972800" cy="347472"/>
+            <a:off x="658368" y="1627632"/>
+            <a:ext cx="10972800" cy="256032"/>
           </a:xfrm>
           <a:prstGeom prst="rect">
             <a:avLst/>
@@ -17375,7 +17564,7 @@
               <a:spcAft>
                 <a:spcPts val="0"/>
               </a:spcAft>
-              <a:defRPr sz="1700" b="1">
+              <a:defRPr sz="1500" b="1">
                 <a:solidFill>
                   <a:srgbClr val="122C4E"/>
                 </a:solidFill>
@@ -17396,8 +17585,8 @@
         </p:nvSpPr>
         <p:spPr>
           <a:xfrm>
-            <a:off x="658368" y="2103120"/>
-            <a:ext cx="10972800" cy="493776"/>
+            <a:off x="658368" y="1956816"/>
+            <a:ext cx="10972800" cy="603504"/>
           </a:xfrm>
           <a:prstGeom prst="rect">
             <a:avLst/>
@@ -17441,7 +17630,11 @@
               </a:defRPr>
             </a:pPr>
             <a:r>
-              <a:t>파일 생성/열기: mkdir -p ~/agv_ws/src/agv_control/agv_control    &amp;&amp;    nano ~/agv_ws/src/agv_control/agv_control/safety_controller.py</a:t>
+              <a:t>파일 생성: mkdir -p ~/agv_ws/src/agv_mission/agv_mission</a:t>
+            </a:r>
+            <a:br/>
+            <a:r>
+              <a:t>파일 열기: nano ~/agv_ws/src/agv_mission/agv_mission/mission_manager.py</a:t>
             </a:r>
           </a:p>
         </p:txBody>
@@ -17454,8 +17647,8 @@
         </p:nvSpPr>
         <p:spPr>
           <a:xfrm>
-            <a:off x="658368" y="2761488"/>
-            <a:ext cx="10972800" cy="3383280"/>
+            <a:off x="658368" y="2706624"/>
+            <a:ext cx="10972800" cy="3364992"/>
           </a:xfrm>
           <a:prstGeom prst="rect">
             <a:avLst/>
@@ -17499,53 +17692,48 @@
               </a:defRPr>
             </a:pPr>
             <a:r>
-              <a:t>import math</a:t>
-            </a:r>
-            <a:br/>
-            <a:r>
-              <a:t>import rclpy</a:t>
-            </a:r>
-            <a:br/>
-            <a:r>
-              <a:t>from rclpy.node import Node</a:t>
-            </a:r>
-            <a:br/>
-            <a:r>
-              <a:t>from geometry_msgs.msg import Twist</a:t>
-            </a:r>
-            <a:br/>
-            <a:r>
-              <a:t>from sensor_msgs.msg import LaserScan</a:t>
-            </a:r>
-            <a:br/>
-            <a:br/>
-            <a:r>
-              <a:t>class SafetyController(Node):</a:t>
-            </a:r>
-            <a:br/>
-            <a:r>
-              <a:t>    """Pass a desired command through unless an obstacle is within stop_distance."""</a:t>
-            </a:r>
-            <a:br/>
-            <a:br/>
-            <a:r>
-              <a:t>    def __init__(self):</a:t>
-            </a:r>
-            <a:br/>
-            <a:r>
-              <a:t>        super().__init__('safety_controller')</a:t>
-            </a:r>
-            <a:br/>
-            <a:r>
-              <a:t>        self.declare_parameter('stop_distance', 0.5)</a:t>
-            </a:r>
-            <a:br/>
-            <a:r>
-              <a:t>        self.declare_parameter('front_half_angle_deg', 15.0)</a:t>
-            </a:r>
-            <a:br/>
-            <a:r>
-              <a:t>        self.obstacle_distance = math.inf</a:t>
+              <a:t>        else:</a:t>
+            </a:r>
+            <a:br/>
+            <a:r>
+              <a:t>            self.set_state('APPROACH')</a:t>
+            </a:r>
+            <a:br/>
+            <a:r>
+              <a:t>            command.linear.x = self.get_parameter('approach_speed').value</a:t>
+            </a:r>
+            <a:br/>
+            <a:r>
+              <a:t>            error = self.target.center_x - self.get_parameter('image_center_x').value</a:t>
+            </a:r>
+            <a:br/>
+            <a:r>
+              <a:t>            command.angular.z = max(min(-0.004 * error, 0.6), -0.6)</a:t>
+            </a:r>
+            <a:br/>
+            <a:r>
+              <a:t>        self.command_publisher.publish(command)</a:t>
+            </a:r>
+            <a:br/>
+            <a:br/>
+            <a:r>
+              <a:t>def main():</a:t>
+            </a:r>
+            <a:br/>
+            <a:r>
+              <a:t>    rclpy.init()</a:t>
+            </a:r>
+            <a:br/>
+            <a:r>
+              <a:t>    node = MissionManager()</a:t>
+            </a:r>
+            <a:br/>
+            <a:r>
+              <a:t>    try:</a:t>
+            </a:r>
+            <a:br/>
+            <a:r>
+              <a:t>        rclpy.spin(node)</a:t>
             </a:r>
           </a:p>
         </p:txBody>
@@ -17558,7 +17746,7 @@
         </p:nvSpPr>
         <p:spPr>
           <a:xfrm>
-            <a:off x="749808" y="6199632"/>
+            <a:off x="749808" y="6181344"/>
             <a:ext cx="10789920" cy="201168"/>
           </a:xfrm>
           <a:prstGeom prst="rect">
@@ -17584,7 +17772,7 @@
               </a:defRPr>
             </a:pPr>
             <a:r>
-              <a:t>파일 전체 1/4 · 이 슬라이드 다음에 같은 파일의 나머지 줄이 이어집니다.</a:t>
+              <a:t>파일 전체 5/6 · 이 슬라이드 다음에 같은 파일의 나머지 줄이 이어집니다.</a:t>
             </a:r>
           </a:p>
         </p:txBody>
@@ -18060,7 +18248,7 @@
               </a:defRPr>
             </a:pPr>
             <a:r>
-              <a:t>파일을 계속 작성하고 저장한다 (2/4)</a:t>
+              <a:t>파일을 계속 작성하고 저장한다 (6/6)</a:t>
             </a:r>
           </a:p>
         </p:txBody>
@@ -18099,7 +18287,7 @@
               </a:defRPr>
             </a:pPr>
             <a:r>
-              <a:t>~/agv_ws/src/agv_control/agv_control/safety_controller.py</a:t>
+              <a:t>~/agv_ws/src/agv_mission/agv_mission/mission_manager.py</a:t>
             </a:r>
           </a:p>
         </p:txBody>
@@ -18235,7 +18423,7 @@
               </a:defRPr>
             </a:pPr>
             <a:r>
-              <a:t>현재 단계 24/27    |    현재 폴더 ~/agv_ws    |    현재 터미널</a:t>
+              <a:t>현재 단계 24/25    |    현재 폴더 ~/agv_ws    |    현재 터미널</a:t>
             </a:r>
           </a:p>
         </p:txBody>
@@ -18248,8 +18436,8 @@
         </p:nvSpPr>
         <p:spPr>
           <a:xfrm>
-            <a:off x="658368" y="1682496"/>
-            <a:ext cx="10972800" cy="347472"/>
+            <a:off x="658368" y="1627632"/>
+            <a:ext cx="10972800" cy="256032"/>
           </a:xfrm>
           <a:prstGeom prst="rect">
             <a:avLst/>
@@ -18266,7 +18454,7 @@
               <a:spcAft>
                 <a:spcPts val="0"/>
               </a:spcAft>
-              <a:defRPr sz="1700" b="1">
+              <a:defRPr sz="1500" b="1">
                 <a:solidFill>
                   <a:srgbClr val="122C4E"/>
                 </a:solidFill>
@@ -18287,8 +18475,8 @@
         </p:nvSpPr>
         <p:spPr>
           <a:xfrm>
-            <a:off x="658368" y="2103120"/>
-            <a:ext cx="10972800" cy="493776"/>
+            <a:off x="658368" y="1956816"/>
+            <a:ext cx="10972800" cy="603504"/>
           </a:xfrm>
           <a:prstGeom prst="rect">
             <a:avLst/>
@@ -18332,7 +18520,11 @@
               </a:defRPr>
             </a:pPr>
             <a:r>
-              <a:t>파일 생성/열기: mkdir -p ~/agv_ws/src/agv_control/agv_control    &amp;&amp;    nano ~/agv_ws/src/agv_control/agv_control/safety_controller.py</a:t>
+              <a:t>파일 생성: mkdir -p ~/agv_ws/src/agv_mission/agv_mission</a:t>
+            </a:r>
+            <a:br/>
+            <a:r>
+              <a:t>파일 열기: nano ~/agv_ws/src/agv_mission/agv_mission/mission_manager.py</a:t>
             </a:r>
           </a:p>
         </p:txBody>
@@ -18345,8 +18537,8 @@
         </p:nvSpPr>
         <p:spPr>
           <a:xfrm>
-            <a:off x="658368" y="2761488"/>
-            <a:ext cx="10972800" cy="3383280"/>
+            <a:off x="658368" y="2706624"/>
+            <a:ext cx="10972800" cy="3364992"/>
           </a:xfrm>
           <a:prstGeom prst="rect">
             <a:avLst/>
@@ -18390,53 +18582,27 @@
               </a:defRPr>
             </a:pPr>
             <a:r>
-              <a:t>        self.create_subscription(LaserScan, '/scan', self.scan_callback, 10)</a:t>
-            </a:r>
-            <a:br/>
-            <a:r>
-              <a:t>        self.create_subscription(Twist, '/cmd_vel_raw', self.command_callback, 10)</a:t>
-            </a:r>
-            <a:br/>
-            <a:r>
-              <a:t>        self.publisher = self.create_publisher(Twist, '/cmd_vel', 10)</a:t>
-            </a:r>
-            <a:br/>
-            <a:br/>
-            <a:r>
-              <a:t>    def scan_callback(self, scan):</a:t>
-            </a:r>
-            <a:br/>
-            <a:r>
-              <a:t>        limit = math.radians(self.get_parameter('front_half_angle_deg').value)</a:t>
-            </a:r>
-            <a:br/>
-            <a:r>
-              <a:t>        readings = [value for index,</a:t>
-            </a:r>
-            <a:br/>
-            <a:r>
-              <a:t>            value in enumerate(scan.ranges) if abs(scan.angle_min + index * scan.angle_increment) &lt;= limit and math.isfinite(value)]</a:t>
-            </a:r>
-            <a:br/>
-            <a:r>
-              <a:t>        self.obstacle_distance = min(readings) if readings else math.inf</a:t>
-            </a:r>
-            <a:br/>
-            <a:br/>
-            <a:r>
-              <a:t>    def command_callback(self, command):</a:t>
-            </a:r>
-            <a:br/>
-            <a:r>
-              <a:t>        safe = Twist()</a:t>
-            </a:r>
-            <a:br/>
-            <a:r>
-              <a:t>        if self.obstacle_distance &gt;= self.get_parameter('stop_distance').value or command.linear.x &lt;= 0.0:</a:t>
-            </a:r>
-            <a:br/>
-            <a:r>
-              <a:t>            safe = command</a:t>
+              <a:t>    except KeyboardInterrupt:</a:t>
+            </a:r>
+            <a:br/>
+            <a:r>
+              <a:t>        pass</a:t>
+            </a:r>
+            <a:br/>
+            <a:r>
+              <a:t>    finally:</a:t>
+            </a:r>
+            <a:br/>
+            <a:r>
+              <a:t>        node.destroy_node()</a:t>
+            </a:r>
+            <a:br/>
+            <a:r>
+              <a:t>        if rclpy.ok():</a:t>
+            </a:r>
+            <a:br/>
+            <a:r>
+              <a:t>            rclpy.shutdown()</a:t>
             </a:r>
           </a:p>
         </p:txBody>
@@ -18449,7 +18615,7 @@
         </p:nvSpPr>
         <p:spPr>
           <a:xfrm>
-            <a:off x="749808" y="6199632"/>
+            <a:off x="749808" y="6181344"/>
             <a:ext cx="10789920" cy="201168"/>
           </a:xfrm>
           <a:prstGeom prst="rect">
@@ -18475,7 +18641,7 @@
               </a:defRPr>
             </a:pPr>
             <a:r>
-              <a:t>파일 전체 2/4 · 이 슬라이드 다음에 같은 파일의 나머지 줄이 이어집니다.</a:t>
+              <a:t>파일 전체 6/6 · 이 슬라이드 다음에 같은 파일의 나머지 줄이 이어집니다.</a:t>
             </a:r>
           </a:p>
         </p:txBody>
@@ -18532,7 +18698,7 @@
               </a:defRPr>
             </a:pPr>
             <a:r>
-              <a:t>파일을 계속 작성하고 저장한다 (3/4)</a:t>
+              <a:t>파일을 새로 만들고 저장한다 (1/4)</a:t>
             </a:r>
           </a:p>
         </p:txBody>
@@ -18707,7 +18873,7 @@
               </a:defRPr>
             </a:pPr>
             <a:r>
-              <a:t>현재 단계 25/27    |    현재 폴더 ~/agv_ws    |    현재 터미널</a:t>
+              <a:t>현재 단계 25/29    |    현재 폴더 ~/agv_ws    |    현재 터미널</a:t>
             </a:r>
           </a:p>
         </p:txBody>
@@ -18720,8 +18886,8 @@
         </p:nvSpPr>
         <p:spPr>
           <a:xfrm>
-            <a:off x="658368" y="1682496"/>
-            <a:ext cx="10972800" cy="347472"/>
+            <a:off x="658368" y="1627632"/>
+            <a:ext cx="10972800" cy="256032"/>
           </a:xfrm>
           <a:prstGeom prst="rect">
             <a:avLst/>
@@ -18738,7 +18904,7 @@
               <a:spcAft>
                 <a:spcPts val="0"/>
               </a:spcAft>
-              <a:defRPr sz="1700" b="1">
+              <a:defRPr sz="1500" b="1">
                 <a:solidFill>
                   <a:srgbClr val="122C4E"/>
                 </a:solidFill>
@@ -18759,8 +18925,8 @@
         </p:nvSpPr>
         <p:spPr>
           <a:xfrm>
-            <a:off x="658368" y="2103120"/>
-            <a:ext cx="10972800" cy="493776"/>
+            <a:off x="658368" y="1956816"/>
+            <a:ext cx="10972800" cy="603504"/>
           </a:xfrm>
           <a:prstGeom prst="rect">
             <a:avLst/>
@@ -18804,7 +18970,11 @@
               </a:defRPr>
             </a:pPr>
             <a:r>
-              <a:t>파일 생성/열기: mkdir -p ~/agv_ws/src/agv_control/agv_control    &amp;&amp;    nano ~/agv_ws/src/agv_control/agv_control/safety_controller.py</a:t>
+              <a:t>파일 생성: mkdir -p ~/agv_ws/src/agv_control/agv_control</a:t>
+            </a:r>
+            <a:br/>
+            <a:r>
+              <a:t>파일 열기: nano ~/agv_ws/src/agv_control/agv_control/safety_controller.py</a:t>
             </a:r>
           </a:p>
         </p:txBody>
@@ -18817,8 +18987,8 @@
         </p:nvSpPr>
         <p:spPr>
           <a:xfrm>
-            <a:off x="658368" y="2761488"/>
-            <a:ext cx="10972800" cy="3383280"/>
+            <a:off x="658368" y="2706624"/>
+            <a:ext cx="10972800" cy="3364992"/>
           </a:xfrm>
           <a:prstGeom prst="rect">
             <a:avLst/>
@@ -18862,56 +19032,45 @@
               </a:defRPr>
             </a:pPr>
             <a:r>
-              <a:t>        else:</a:t>
-            </a:r>
-            <a:br/>
-            <a:r>
-              <a:t>            self.get_logger().warn('obstacle at %.2f m: stopping forward command' % self.obstacle_distance)</a:t>
-            </a:r>
-            <a:br/>
-            <a:r>
-              <a:t>        self.publisher.publish(safe)</a:t>
-            </a:r>
-            <a:br/>
-            <a:br/>
-            <a:r>
-              <a:t>def main():</a:t>
-            </a:r>
-            <a:br/>
-            <a:r>
-              <a:t>    rclpy.init()</a:t>
-            </a:r>
-            <a:br/>
-            <a:r>
-              <a:t>    node = SafetyController()</a:t>
-            </a:r>
-            <a:br/>
-            <a:r>
-              <a:t>    try:</a:t>
-            </a:r>
-            <a:br/>
-            <a:r>
-              <a:t>        rclpy.spin(node)</a:t>
-            </a:r>
-            <a:br/>
-            <a:r>
-              <a:t>    except KeyboardInterrupt:</a:t>
-            </a:r>
-            <a:br/>
-            <a:r>
-              <a:t>        pass</a:t>
-            </a:r>
-            <a:br/>
-            <a:r>
-              <a:t>    finally:</a:t>
-            </a:r>
-            <a:br/>
-            <a:r>
-              <a:t>        node.destroy_node()</a:t>
-            </a:r>
-            <a:br/>
-            <a:r>
-              <a:t>        if rclpy.ok():</a:t>
+              <a:t>import math</a:t>
+            </a:r>
+            <a:br/>
+            <a:r>
+              <a:t>import rclpy</a:t>
+            </a:r>
+            <a:br/>
+            <a:r>
+              <a:t>from rclpy.node import Node</a:t>
+            </a:r>
+            <a:br/>
+            <a:r>
+              <a:t>from geometry_msgs.msg import Twist</a:t>
+            </a:r>
+            <a:br/>
+            <a:r>
+              <a:t>from sensor_msgs.msg import LaserScan</a:t>
+            </a:r>
+            <a:br/>
+            <a:br/>
+            <a:r>
+              <a:t>class SafetyController(Node):</a:t>
+            </a:r>
+            <a:br/>
+            <a:r>
+              <a:t>    """Pass a desired command through unless an obstacle is within stop_distance."""</a:t>
+            </a:r>
+            <a:br/>
+            <a:br/>
+            <a:r>
+              <a:t>    def __init__(self):</a:t>
+            </a:r>
+            <a:br/>
+            <a:r>
+              <a:t>        super().__init__('safety_controller')</a:t>
+            </a:r>
+            <a:br/>
+            <a:r>
+              <a:t>        self.declare_parameter('stop_distance', 0.5)</a:t>
             </a:r>
           </a:p>
         </p:txBody>
@@ -18924,7 +19083,7 @@
         </p:nvSpPr>
         <p:spPr>
           <a:xfrm>
-            <a:off x="749808" y="6199632"/>
+            <a:off x="749808" y="6181344"/>
             <a:ext cx="10789920" cy="201168"/>
           </a:xfrm>
           <a:prstGeom prst="rect">
@@ -18950,7 +19109,7 @@
               </a:defRPr>
             </a:pPr>
             <a:r>
-              <a:t>파일 전체 3/4 · 이 슬라이드 다음에 같은 파일의 나머지 줄이 이어집니다.</a:t>
+              <a:t>파일 전체 1/4 · 이 슬라이드 다음에 같은 파일의 나머지 줄이 이어집니다.</a:t>
             </a:r>
           </a:p>
         </p:txBody>
@@ -19007,7 +19166,7 @@
               </a:defRPr>
             </a:pPr>
             <a:r>
-              <a:t>파일을 계속 작성하고 저장한다 (4/4)</a:t>
+              <a:t>파일을 계속 작성하고 저장한다 (2/4)</a:t>
             </a:r>
           </a:p>
         </p:txBody>
@@ -19182,7 +19341,7 @@
               </a:defRPr>
             </a:pPr>
             <a:r>
-              <a:t>현재 단계 26/27    |    현재 폴더 ~/agv_ws    |    현재 터미널</a:t>
+              <a:t>현재 단계 26/29    |    현재 폴더 ~/agv_ws    |    현재 터미널</a:t>
             </a:r>
           </a:p>
         </p:txBody>
@@ -19195,8 +19354,8 @@
         </p:nvSpPr>
         <p:spPr>
           <a:xfrm>
-            <a:off x="658368" y="1682496"/>
-            <a:ext cx="10972800" cy="347472"/>
+            <a:off x="658368" y="1627632"/>
+            <a:ext cx="10972800" cy="256032"/>
           </a:xfrm>
           <a:prstGeom prst="rect">
             <a:avLst/>
@@ -19213,7 +19372,7 @@
               <a:spcAft>
                 <a:spcPts val="0"/>
               </a:spcAft>
-              <a:defRPr sz="1700" b="1">
+              <a:defRPr sz="1500" b="1">
                 <a:solidFill>
                   <a:srgbClr val="122C4E"/>
                 </a:solidFill>
@@ -19234,8 +19393,8 @@
         </p:nvSpPr>
         <p:spPr>
           <a:xfrm>
-            <a:off x="658368" y="2103120"/>
-            <a:ext cx="10972800" cy="493776"/>
+            <a:off x="658368" y="1956816"/>
+            <a:ext cx="10972800" cy="603504"/>
           </a:xfrm>
           <a:prstGeom prst="rect">
             <a:avLst/>
@@ -19279,7 +19438,11 @@
               </a:defRPr>
             </a:pPr>
             <a:r>
-              <a:t>파일 생성/열기: mkdir -p ~/agv_ws/src/agv_control/agv_control    &amp;&amp;    nano ~/agv_ws/src/agv_control/agv_control/safety_controller.py</a:t>
+              <a:t>파일 생성: mkdir -p ~/agv_ws/src/agv_control/agv_control</a:t>
+            </a:r>
+            <a:br/>
+            <a:r>
+              <a:t>파일 열기: nano ~/agv_ws/src/agv_control/agv_control/safety_controller.py</a:t>
             </a:r>
           </a:p>
         </p:txBody>
@@ -19292,8 +19455,8 @@
         </p:nvSpPr>
         <p:spPr>
           <a:xfrm>
-            <a:off x="658368" y="2761488"/>
-            <a:ext cx="10972800" cy="3383280"/>
+            <a:off x="658368" y="2706624"/>
+            <a:ext cx="10972800" cy="3364992"/>
           </a:xfrm>
           <a:prstGeom prst="rect">
             <a:avLst/>
@@ -19337,8 +19500,46 @@
               </a:defRPr>
             </a:pPr>
             <a:r>
-              <a:t>            rclpy.shutdown()</a:t>
-            </a:r>
+              <a:t>        self.declare_parameter('front_half_angle_deg', 15.0)</a:t>
+            </a:r>
+            <a:br/>
+            <a:r>
+              <a:t>        self.obstacle_distance = math.inf</a:t>
+            </a:r>
+            <a:br/>
+            <a:r>
+              <a:t>        self.create_subscription(LaserScan, '/scan', self.scan_callback, 10)</a:t>
+            </a:r>
+            <a:br/>
+            <a:r>
+              <a:t>        self.create_subscription(Twist, '/cmd_vel_raw', self.command_callback, 10)</a:t>
+            </a:r>
+            <a:br/>
+            <a:r>
+              <a:t>        self.publisher = self.create_publisher(Twist, '/cmd_vel', 10)</a:t>
+            </a:r>
+            <a:br/>
+            <a:br/>
+            <a:r>
+              <a:t>    def scan_callback(self, scan):</a:t>
+            </a:r>
+            <a:br/>
+            <a:r>
+              <a:t>        limit = math.radians(self.get_parameter('front_half_angle_deg').value)</a:t>
+            </a:r>
+            <a:br/>
+            <a:r>
+              <a:t>        readings = [value for index,</a:t>
+            </a:r>
+            <a:br/>
+            <a:r>
+              <a:t>            value in enumerate(scan.ranges) if abs(scan.angle_min + index * scan.angle_increment) &lt;= limit and math.isfinite(value)]</a:t>
+            </a:r>
+            <a:br/>
+            <a:r>
+              <a:t>        self.obstacle_distance = min(readings) if readings else math.inf</a:t>
+            </a:r>
+            <a:br/>
           </a:p>
         </p:txBody>
       </p:sp>
@@ -19350,7 +19551,7 @@
         </p:nvSpPr>
         <p:spPr>
           <a:xfrm>
-            <a:off x="749808" y="6199632"/>
+            <a:off x="749808" y="6181344"/>
             <a:ext cx="10789920" cy="201168"/>
           </a:xfrm>
           <a:prstGeom prst="rect">
@@ -19376,7 +19577,7 @@
               </a:defRPr>
             </a:pPr>
             <a:r>
-              <a:t>파일 전체 4/4 · 이 슬라이드 다음에 같은 파일의 나머지 줄이 이어집니다.</a:t>
+              <a:t>파일 전체 2/4 · 이 슬라이드 다음에 같은 파일의 나머지 줄이 이어집니다.</a:t>
             </a:r>
           </a:p>
         </p:txBody>
@@ -19433,7 +19634,7 @@
               </a:defRPr>
             </a:pPr>
             <a:r>
-              <a:t>build → source → run 순서로 실행한다</a:t>
+              <a:t>파일을 계속 작성하고 저장한다 (3/4)</a:t>
             </a:r>
           </a:p>
         </p:txBody>
@@ -19472,7 +19673,7 @@
               </a:defRPr>
             </a:pPr>
             <a:r>
-              <a:t>새 파일 또는 수정 파일은 build와 source 뒤에만 실행 이름·설정에 반영됩니다.</a:t>
+              <a:t>~/agv_ws/src/agv_control/agv_control/safety_controller.py</a:t>
             </a:r>
           </a:p>
         </p:txBody>
@@ -19608,23 +19809,124 @@
               </a:defRPr>
             </a:pPr>
             <a:r>
-              <a:t>현재 단계 실행    |    현재 폴더 ~/agv_ws    |    현재 터미널</a:t>
-            </a:r>
-          </a:p>
-        </p:txBody>
-      </p:sp>
-      <p:sp>
-        <p:nvSpPr>
-          <p:cNvPr id="7" name="Rounded Rectangle 6"/>
+              <a:t>현재 단계 27/29    |    현재 폴더 ~/agv_ws    |    현재 터미널</a:t>
+            </a:r>
+          </a:p>
+        </p:txBody>
+      </p:sp>
+      <p:sp>
+        <p:nvSpPr>
+          <p:cNvPr id="7" name="TextBox 6"/>
+          <p:cNvSpPr txBox="1"/>
+          <p:nvPr/>
+        </p:nvSpPr>
+        <p:spPr>
+          <a:xfrm>
+            <a:off x="658368" y="1627632"/>
+            <a:ext cx="10972800" cy="256032"/>
+          </a:xfrm>
+          <a:prstGeom prst="rect">
+            <a:avLst/>
+          </a:prstGeom>
+          <a:noFill/>
+        </p:spPr>
+        <p:txBody>
+          <a:bodyPr wrap="square" lIns="73152" rIns="73152" tIns="36576" bIns="36576">
+            <a:spAutoFit/>
+          </a:bodyPr>
+          <a:lstStyle/>
+          <a:p>
+            <a:pPr algn="l">
+              <a:spcAft>
+                <a:spcPts val="0"/>
+              </a:spcAft>
+              <a:defRPr sz="1500" b="1">
+                <a:solidFill>
+                  <a:srgbClr val="122C4E"/>
+                </a:solidFill>
+                <a:latin typeface="Noto Sans CJK KR"/>
+              </a:defRPr>
+            </a:pPr>
+            <a:r>
+              <a:t>이번 단계: 파일의 전체 내용을 중간 생략 없이 작성합니다. 아래 줄 범위를 끝까지 입력하세요.</a:t>
+            </a:r>
+          </a:p>
+        </p:txBody>
+      </p:sp>
+      <p:sp>
+        <p:nvSpPr>
+          <p:cNvPr id="8" name="Rectangle 7"/>
           <p:cNvSpPr/>
           <p:nvPr/>
         </p:nvSpPr>
         <p:spPr>
           <a:xfrm>
-            <a:off x="658368" y="1700784"/>
-            <a:ext cx="10972800" cy="3182112"/>
-          </a:xfrm>
-          <a:prstGeom prst="roundRect">
+            <a:off x="658368" y="1956816"/>
+            <a:ext cx="10972800" cy="603504"/>
+          </a:xfrm>
+          <a:prstGeom prst="rect">
+            <a:avLst/>
+          </a:prstGeom>
+          <a:solidFill>
+            <a:srgbClr val="F4F7FB"/>
+          </a:solidFill>
+          <a:ln>
+            <a:solidFill>
+              <a:srgbClr val="F4F7FB"/>
+            </a:solidFill>
+          </a:ln>
+        </p:spPr>
+        <p:style>
+          <a:lnRef idx="1">
+            <a:schemeClr val="accent1"/>
+          </a:lnRef>
+          <a:fillRef idx="3">
+            <a:schemeClr val="accent1"/>
+          </a:fillRef>
+          <a:effectRef idx="2">
+            <a:schemeClr val="accent1"/>
+          </a:effectRef>
+          <a:fontRef idx="minor">
+            <a:schemeClr val="lt1"/>
+          </a:fontRef>
+        </p:style>
+        <p:txBody>
+          <a:bodyPr rtlCol="0" anchor="ctr" wrap="square" lIns="73152" rIns="73152" tIns="36576" bIns="36576"/>
+          <a:lstStyle/>
+          <a:p>
+            <a:pPr algn="l">
+              <a:spcAft>
+                <a:spcPts val="0"/>
+              </a:spcAft>
+              <a:defRPr sz="1400" b="0">
+                <a:solidFill>
+                  <a:srgbClr val="122C4E"/>
+                </a:solidFill>
+                <a:latin typeface="DejaVu Sans Mono"/>
+              </a:defRPr>
+            </a:pPr>
+            <a:r>
+              <a:t>파일 생성: mkdir -p ~/agv_ws/src/agv_control/agv_control</a:t>
+            </a:r>
+            <a:br/>
+            <a:r>
+              <a:t>파일 열기: nano ~/agv_ws/src/agv_control/agv_control/safety_controller.py</a:t>
+            </a:r>
+          </a:p>
+        </p:txBody>
+      </p:sp>
+      <p:sp>
+        <p:nvSpPr>
+          <p:cNvPr id="9" name="Rectangle 8"/>
+          <p:cNvSpPr/>
+          <p:nvPr/>
+        </p:nvSpPr>
+        <p:spPr>
+          <a:xfrm>
+            <a:off x="658368" y="2706624"/>
+            <a:ext cx="10972800" cy="3364992"/>
+          </a:xfrm>
+          <a:prstGeom prst="rect">
             <a:avLst/>
           </a:prstGeom>
           <a:solidFill>
@@ -19651,14 +19953,14 @@
           </a:fontRef>
         </p:style>
         <p:txBody>
-          <a:bodyPr rtlCol="0" anchor="ctr" wrap="square" lIns="73152" rIns="73152" tIns="36576" bIns="36576"/>
-          <a:lstStyle/>
-          <a:p>
-            <a:pPr algn="l">
-              <a:spcAft>
-                <a:spcPts val="0"/>
-              </a:spcAft>
-              <a:defRPr sz="1600" b="0">
+          <a:bodyPr rtlCol="0" anchor="ctr" wrap="square" lIns="164592" rIns="164592" tIns="109728" bIns="36576"/>
+          <a:lstStyle/>
+          <a:p>
+            <a:pPr algn="l">
+              <a:spcAft>
+                <a:spcPts val="0"/>
+              </a:spcAft>
+              <a:defRPr sz="1400" b="0">
                 <a:solidFill>
                   <a:srgbClr val="FFFFFF"/>
                 </a:solidFill>
@@ -19666,25 +19968,62 @@
               </a:defRPr>
             </a:pPr>
             <a:r>
-              <a:t>cd ~/agv_ws &amp;&amp; source install/setup.bash</a:t>
-            </a:r>
-            <a:br/>
-            <a:r>
-              <a:t>ros2 launch agv_bringup agv_sim.launch.py</a:t>
-            </a:r>
-          </a:p>
-        </p:txBody>
-      </p:sp>
-      <p:sp>
-        <p:nvSpPr>
-          <p:cNvPr id="8" name="TextBox 7"/>
+              <a:t>    def command_callback(self, command):</a:t>
+            </a:r>
+            <a:br/>
+            <a:r>
+              <a:t>        safe = Twist()</a:t>
+            </a:r>
+            <a:br/>
+            <a:r>
+              <a:t>        if self.obstacle_distance &gt;= self.get_parameter('stop_distance').value or command.linear.x &lt;= 0.0:</a:t>
+            </a:r>
+            <a:br/>
+            <a:r>
+              <a:t>            safe = command</a:t>
+            </a:r>
+            <a:br/>
+            <a:r>
+              <a:t>        else:</a:t>
+            </a:r>
+            <a:br/>
+            <a:r>
+              <a:t>            self.get_logger().warn('obstacle at %.2f m: stopping forward command' % self.obstacle_distance)</a:t>
+            </a:r>
+            <a:br/>
+            <a:r>
+              <a:t>        self.publisher.publish(safe)</a:t>
+            </a:r>
+            <a:br/>
+            <a:br/>
+            <a:r>
+              <a:t>def main():</a:t>
+            </a:r>
+            <a:br/>
+            <a:r>
+              <a:t>    rclpy.init()</a:t>
+            </a:r>
+            <a:br/>
+            <a:r>
+              <a:t>    node = SafetyController()</a:t>
+            </a:r>
+            <a:br/>
+            <a:r>
+              <a:t>    try:</a:t>
+            </a:r>
+          </a:p>
+        </p:txBody>
+      </p:sp>
+      <p:sp>
+        <p:nvSpPr>
+          <p:cNvPr id="10" name="TextBox 9"/>
           <p:cNvSpPr txBox="1"/>
           <p:nvPr/>
         </p:nvSpPr>
         <p:spPr>
           <a:xfrm>
-            <a:off x="786384" y="5239512"/>
-            <a:ext cx="1261872" cy="237744"/>
+            <a:off x="749808" y="6181344"/>
+            <a:ext cx="10789920" cy="201168"/>
           </a:xfrm>
           <a:prstGeom prst="rect">
             <a:avLst/>
@@ -19701,54 +20040,15 @@
               <a:spcAft>
                 <a:spcPts val="0"/>
               </a:spcAft>
-              <a:defRPr sz="1800" b="1">
-                <a:solidFill>
-                  <a:srgbClr val="2A8B5A"/>
-                </a:solidFill>
-                <a:latin typeface="Noto Sans CJK KR"/>
-              </a:defRPr>
-            </a:pPr>
-            <a:r>
-              <a:t>확인 기준</a:t>
-            </a:r>
-          </a:p>
-        </p:txBody>
-      </p:sp>
-      <p:sp>
-        <p:nvSpPr>
-          <p:cNvPr id="9" name="TextBox 8"/>
-          <p:cNvSpPr txBox="1"/>
-          <p:nvPr/>
-        </p:nvSpPr>
-        <p:spPr>
-          <a:xfrm>
-            <a:off x="786384" y="5532120"/>
-            <a:ext cx="10469880" cy="420624"/>
-          </a:xfrm>
-          <a:prstGeom prst="rect">
-            <a:avLst/>
-          </a:prstGeom>
-          <a:noFill/>
-        </p:spPr>
-        <p:txBody>
-          <a:bodyPr wrap="square" lIns="73152" rIns="73152" tIns="36576" bIns="36576">
-            <a:spAutoFit/>
-          </a:bodyPr>
-          <a:lstStyle/>
-          <a:p>
-            <a:pPr algn="l">
-              <a:spcAft>
-                <a:spcPts val="0"/>
-              </a:spcAft>
-              <a:defRPr sz="1800" b="0">
-                <a:solidFill>
-                  <a:srgbClr val="122C4E"/>
-                </a:solidFill>
-                <a:latin typeface="Noto Sans CJK KR"/>
-              </a:defRPr>
-            </a:pPr>
-            <a:r>
-              <a:t>한 launch 실행, RViz/Gazebo 확인, mission log, rosbag 기록을 제출 체크리스트로 남긴다.</a:t>
+              <a:defRPr sz="1000" b="0">
+                <a:solidFill>
+                  <a:srgbClr val="5C6672"/>
+                </a:solidFill>
+                <a:latin typeface="Noto Sans CJK KR"/>
+              </a:defRPr>
+            </a:pPr>
+            <a:r>
+              <a:t>파일 전체 3/4 · 이 슬라이드 다음에 같은 파일의 나머지 줄이 이어집니다.</a:t>
             </a:r>
           </a:p>
         </p:txBody>
@@ -19805,7 +20105,7 @@
               </a:defRPr>
             </a:pPr>
             <a:r>
-              <a:t>정상 결과: 실제 환경에서 확인한 출력</a:t>
+              <a:t>파일을 계속 작성하고 저장한다 (4/4)</a:t>
             </a:r>
           </a:p>
         </p:txBody>
@@ -19844,7 +20144,7 @@
               </a:defRPr>
             </a:pPr>
             <a:r>
-              <a:t>실제 ROS 2 환경의 파일·패키지·구성 검증 로그</a:t>
+              <a:t>~/agv_ws/src/agv_control/agv_control/safety_controller.py</a:t>
             </a:r>
           </a:p>
         </p:txBody>
@@ -19927,30 +20227,64 @@
           </a:p>
         </p:txBody>
       </p:sp>
-      <p:pic>
-        <p:nvPicPr>
-          <p:cNvPr id="6" name="Picture 5" descr="validation_terminal.png"/>
-          <p:cNvPicPr>
-            <a:picLocks noChangeAspect="1"/>
-          </p:cNvPicPr>
-          <p:nvPr/>
-        </p:nvPicPr>
-        <p:blipFill>
-          <a:blip r:embed="rId2"/>
-          <a:stretch>
-            <a:fillRect/>
-          </a:stretch>
-        </p:blipFill>
-        <p:spPr>
-          <a:xfrm>
-            <a:off x="2855133" y="1353312"/>
-            <a:ext cx="6478685" cy="4800600"/>
-          </a:xfrm>
-          <a:prstGeom prst="rect">
-            <a:avLst/>
-          </a:prstGeom>
-        </p:spPr>
-      </p:pic>
+      <p:sp>
+        <p:nvSpPr>
+          <p:cNvPr id="6" name="Rectangle 5"/>
+          <p:cNvSpPr/>
+          <p:nvPr/>
+        </p:nvSpPr>
+        <p:spPr>
+          <a:xfrm>
+            <a:off x="566928" y="1188720"/>
+            <a:ext cx="11064240" cy="347472"/>
+          </a:xfrm>
+          <a:prstGeom prst="rect">
+            <a:avLst/>
+          </a:prstGeom>
+          <a:solidFill>
+            <a:srgbClr val="F4F7FB"/>
+          </a:solidFill>
+          <a:ln>
+            <a:solidFill>
+              <a:srgbClr val="F4F7FB"/>
+            </a:solidFill>
+          </a:ln>
+        </p:spPr>
+        <p:style>
+          <a:lnRef idx="1">
+            <a:schemeClr val="accent1"/>
+          </a:lnRef>
+          <a:fillRef idx="3">
+            <a:schemeClr val="accent1"/>
+          </a:fillRef>
+          <a:effectRef idx="2">
+            <a:schemeClr val="accent1"/>
+          </a:effectRef>
+          <a:fontRef idx="minor">
+            <a:schemeClr val="lt1"/>
+          </a:fontRef>
+        </p:style>
+        <p:txBody>
+          <a:bodyPr rtlCol="0" anchor="ctr" wrap="square" lIns="73152" rIns="73152" tIns="36576" bIns="36576"/>
+          <a:lstStyle/>
+          <a:p>
+            <a:pPr algn="l">
+              <a:spcAft>
+                <a:spcPts val="0"/>
+              </a:spcAft>
+              <a:defRPr sz="1300" b="1">
+                <a:solidFill>
+                  <a:srgbClr val="122C4E"/>
+                </a:solidFill>
+                <a:latin typeface="Noto Sans CJK KR"/>
+              </a:defRPr>
+            </a:pPr>
+            <a:r>
+              <a:t>현재 단계 28/29    |    현재 폴더 ~/agv_ws    |    현재 터미널</a:t>
+            </a:r>
+          </a:p>
+        </p:txBody>
+      </p:sp>
       <p:sp>
         <p:nvSpPr>
           <p:cNvPr id="7" name="TextBox 6"/>
@@ -19959,8 +20293,8 @@
         </p:nvSpPr>
         <p:spPr>
           <a:xfrm>
-            <a:off x="777240" y="6217920"/>
-            <a:ext cx="10607040" cy="182880"/>
+            <a:off x="658368" y="1627632"/>
+            <a:ext cx="10972800" cy="256032"/>
           </a:xfrm>
           <a:prstGeom prst="rect">
             <a:avLst/>
@@ -19973,19 +20307,202 @@
           </a:bodyPr>
           <a:lstStyle/>
           <a:p>
-            <a:pPr algn="ctr">
-              <a:spcAft>
-                <a:spcPts val="0"/>
-              </a:spcAft>
-              <a:defRPr sz="1100" b="1">
-                <a:solidFill>
-                  <a:srgbClr val="2A8B5A"/>
-                </a:solidFill>
-                <a:latin typeface="Noto Sans CJK KR"/>
-              </a:defRPr>
-            </a:pPr>
-            <a:r>
-              <a:t>① 명령/설정  ② 정상 출력 또는 화면  ③ 다음 검증 명령으로 재확인</a:t>
+            <a:pPr algn="l">
+              <a:spcAft>
+                <a:spcPts val="0"/>
+              </a:spcAft>
+              <a:defRPr sz="1500" b="1">
+                <a:solidFill>
+                  <a:srgbClr val="122C4E"/>
+                </a:solidFill>
+                <a:latin typeface="Noto Sans CJK KR"/>
+              </a:defRPr>
+            </a:pPr>
+            <a:r>
+              <a:t>이번 단계: 파일의 전체 내용을 중간 생략 없이 작성합니다. 아래 줄 범위를 끝까지 입력하세요.</a:t>
+            </a:r>
+          </a:p>
+        </p:txBody>
+      </p:sp>
+      <p:sp>
+        <p:nvSpPr>
+          <p:cNvPr id="8" name="Rectangle 7"/>
+          <p:cNvSpPr/>
+          <p:nvPr/>
+        </p:nvSpPr>
+        <p:spPr>
+          <a:xfrm>
+            <a:off x="658368" y="1956816"/>
+            <a:ext cx="10972800" cy="603504"/>
+          </a:xfrm>
+          <a:prstGeom prst="rect">
+            <a:avLst/>
+          </a:prstGeom>
+          <a:solidFill>
+            <a:srgbClr val="F4F7FB"/>
+          </a:solidFill>
+          <a:ln>
+            <a:solidFill>
+              <a:srgbClr val="F4F7FB"/>
+            </a:solidFill>
+          </a:ln>
+        </p:spPr>
+        <p:style>
+          <a:lnRef idx="1">
+            <a:schemeClr val="accent1"/>
+          </a:lnRef>
+          <a:fillRef idx="3">
+            <a:schemeClr val="accent1"/>
+          </a:fillRef>
+          <a:effectRef idx="2">
+            <a:schemeClr val="accent1"/>
+          </a:effectRef>
+          <a:fontRef idx="minor">
+            <a:schemeClr val="lt1"/>
+          </a:fontRef>
+        </p:style>
+        <p:txBody>
+          <a:bodyPr rtlCol="0" anchor="ctr" wrap="square" lIns="73152" rIns="73152" tIns="36576" bIns="36576"/>
+          <a:lstStyle/>
+          <a:p>
+            <a:pPr algn="l">
+              <a:spcAft>
+                <a:spcPts val="0"/>
+              </a:spcAft>
+              <a:defRPr sz="1400" b="0">
+                <a:solidFill>
+                  <a:srgbClr val="122C4E"/>
+                </a:solidFill>
+                <a:latin typeface="DejaVu Sans Mono"/>
+              </a:defRPr>
+            </a:pPr>
+            <a:r>
+              <a:t>파일 생성: mkdir -p ~/agv_ws/src/agv_control/agv_control</a:t>
+            </a:r>
+            <a:br/>
+            <a:r>
+              <a:t>파일 열기: nano ~/agv_ws/src/agv_control/agv_control/safety_controller.py</a:t>
+            </a:r>
+          </a:p>
+        </p:txBody>
+      </p:sp>
+      <p:sp>
+        <p:nvSpPr>
+          <p:cNvPr id="9" name="Rectangle 8"/>
+          <p:cNvSpPr/>
+          <p:nvPr/>
+        </p:nvSpPr>
+        <p:spPr>
+          <a:xfrm>
+            <a:off x="658368" y="2706624"/>
+            <a:ext cx="10972800" cy="3364992"/>
+          </a:xfrm>
+          <a:prstGeom prst="rect">
+            <a:avLst/>
+          </a:prstGeom>
+          <a:solidFill>
+            <a:srgbClr val="1D232D"/>
+          </a:solidFill>
+          <a:ln>
+            <a:solidFill>
+              <a:srgbClr val="1D232D"/>
+            </a:solidFill>
+          </a:ln>
+        </p:spPr>
+        <p:style>
+          <a:lnRef idx="1">
+            <a:schemeClr val="accent1"/>
+          </a:lnRef>
+          <a:fillRef idx="3">
+            <a:schemeClr val="accent1"/>
+          </a:fillRef>
+          <a:effectRef idx="2">
+            <a:schemeClr val="accent1"/>
+          </a:effectRef>
+          <a:fontRef idx="minor">
+            <a:schemeClr val="lt1"/>
+          </a:fontRef>
+        </p:style>
+        <p:txBody>
+          <a:bodyPr rtlCol="0" anchor="ctr" wrap="square" lIns="164592" rIns="164592" tIns="109728" bIns="36576"/>
+          <a:lstStyle/>
+          <a:p>
+            <a:pPr algn="l">
+              <a:spcAft>
+                <a:spcPts val="0"/>
+              </a:spcAft>
+              <a:defRPr sz="1400" b="0">
+                <a:solidFill>
+                  <a:srgbClr val="FFFFFF"/>
+                </a:solidFill>
+                <a:latin typeface="DejaVu Sans Mono"/>
+              </a:defRPr>
+            </a:pPr>
+            <a:r>
+              <a:t>        rclpy.spin(node)</a:t>
+            </a:r>
+            <a:br/>
+            <a:r>
+              <a:t>    except KeyboardInterrupt:</a:t>
+            </a:r>
+            <a:br/>
+            <a:r>
+              <a:t>        pass</a:t>
+            </a:r>
+            <a:br/>
+            <a:r>
+              <a:t>    finally:</a:t>
+            </a:r>
+            <a:br/>
+            <a:r>
+              <a:t>        node.destroy_node()</a:t>
+            </a:r>
+            <a:br/>
+            <a:r>
+              <a:t>        if rclpy.ok():</a:t>
+            </a:r>
+            <a:br/>
+            <a:r>
+              <a:t>            rclpy.shutdown()</a:t>
+            </a:r>
+          </a:p>
+        </p:txBody>
+      </p:sp>
+      <p:sp>
+        <p:nvSpPr>
+          <p:cNvPr id="10" name="TextBox 9"/>
+          <p:cNvSpPr txBox="1"/>
+          <p:nvPr/>
+        </p:nvSpPr>
+        <p:spPr>
+          <a:xfrm>
+            <a:off x="749808" y="6181344"/>
+            <a:ext cx="10789920" cy="201168"/>
+          </a:xfrm>
+          <a:prstGeom prst="rect">
+            <a:avLst/>
+          </a:prstGeom>
+          <a:noFill/>
+        </p:spPr>
+        <p:txBody>
+          <a:bodyPr wrap="square" lIns="73152" rIns="73152" tIns="36576" bIns="36576">
+            <a:spAutoFit/>
+          </a:bodyPr>
+          <a:lstStyle/>
+          <a:p>
+            <a:pPr algn="l">
+              <a:spcAft>
+                <a:spcPts val="0"/>
+              </a:spcAft>
+              <a:defRPr sz="1000" b="0">
+                <a:solidFill>
+                  <a:srgbClr val="5C6672"/>
+                </a:solidFill>
+                <a:latin typeface="Noto Sans CJK KR"/>
+              </a:defRPr>
+            </a:pPr>
+            <a:r>
+              <a:t>파일 전체 4/4 · 이 슬라이드 다음에 같은 파일의 나머지 줄이 이어집니다.</a:t>
             </a:r>
           </a:p>
         </p:txBody>
@@ -20042,7 +20559,7 @@
               </a:defRPr>
             </a:pPr>
             <a:r>
-              <a:t>객관적 검증 명령으로 완료를 확인한다</a:t>
+              <a:t>build → source → run 순서로 실행한다</a:t>
             </a:r>
           </a:p>
         </p:txBody>
@@ -20081,7 +20598,7 @@
               </a:defRPr>
             </a:pPr>
             <a:r>
-              <a:t>화면만 보지 말고 topic·frame·파일·parameter를 다시 확인합니다.</a:t>
+              <a:t>새 파일 또는 수정 파일은 build와 source 뒤에만 실행 이름·설정에 반영됩니다.</a:t>
             </a:r>
           </a:p>
         </p:txBody>
@@ -20217,7 +20734,7 @@
               </a:defRPr>
             </a:pPr>
             <a:r>
-              <a:t>현재 단계 검증    |    현재 폴더 ~/agv_ws    |    현재 터미널</a:t>
+              <a:t>현재 단계 실행    |    현재 폴더 ~/agv_ws    |    현재 터미널</a:t>
             </a:r>
           </a:p>
         </p:txBody>
@@ -20230,8 +20747,8 @@
         </p:nvSpPr>
         <p:spPr>
           <a:xfrm>
-            <a:off x="658368" y="1755648"/>
-            <a:ext cx="10972800" cy="2148840"/>
+            <a:off x="658368" y="1700784"/>
+            <a:ext cx="10972800" cy="3182112"/>
           </a:xfrm>
           <a:prstGeom prst="roundRect">
             <a:avLst/>
@@ -20275,99 +20792,25 @@
               </a:defRPr>
             </a:pPr>
             <a:r>
-              <a:t>ros2 launch agv_bringup agv_sim.launch.py --show-args</a:t>
-            </a:r>
-            <a:br/>
-            <a:r>
-              <a:t>ros2 node list</a:t>
-            </a:r>
-            <a:br/>
-            <a:r>
-              <a:t>ros2 topic list | rg '/scan|/imu/data|/odom|/camera/image_raw|/cmd_vel'</a:t>
-            </a:r>
-          </a:p>
-        </p:txBody>
-      </p:sp>
-      <p:sp>
-        <p:nvSpPr>
-          <p:cNvPr id="8" name="Rounded Rectangle 7"/>
-          <p:cNvSpPr/>
-          <p:nvPr/>
-        </p:nvSpPr>
-        <p:spPr>
-          <a:xfrm>
-            <a:off x="658368" y="4206240"/>
-            <a:ext cx="10972800" cy="1554480"/>
-          </a:xfrm>
-          <a:prstGeom prst="roundRect">
-            <a:avLst/>
-          </a:prstGeom>
-          <a:solidFill>
-            <a:srgbClr val="F4F7FB"/>
-          </a:solidFill>
-          <a:ln>
-            <a:solidFill>
-              <a:srgbClr val="D1DFD5"/>
-            </a:solidFill>
-          </a:ln>
-        </p:spPr>
-        <p:style>
-          <a:lnRef idx="1">
-            <a:schemeClr val="accent1"/>
-          </a:lnRef>
-          <a:fillRef idx="3">
-            <a:schemeClr val="accent1"/>
-          </a:fillRef>
-          <a:effectRef idx="2">
-            <a:schemeClr val="accent1"/>
-          </a:effectRef>
-          <a:fontRef idx="minor">
-            <a:schemeClr val="lt1"/>
-          </a:fontRef>
-        </p:style>
-        <p:txBody>
-          <a:bodyPr rtlCol="0" anchor="ctr" wrap="square" lIns="73152" rIns="73152" tIns="36576" bIns="36576"/>
-          <a:lstStyle/>
-          <a:p>
-            <a:pPr algn="l">
-              <a:spcAft>
-                <a:spcPts val="0"/>
-              </a:spcAft>
-              <a:defRPr sz="1800" b="1">
-                <a:solidFill>
-                  <a:srgbClr val="2A8B5A"/>
-                </a:solidFill>
-                <a:latin typeface="Noto Sans CJK KR"/>
-              </a:defRPr>
-            </a:pPr>
-            <a:r>
-              <a:t>완료 체크</a:t>
-            </a:r>
-            <a:br/>
-            <a:r>
-              <a:t>□ 명령이 오류 없이 실행된다.</a:t>
-            </a:r>
-            <a:br/>
-            <a:r>
-              <a:t>□ 기대한 파일·topic·frame·parameter 이름이 보인다.</a:t>
-            </a:r>
-            <a:br/>
-            <a:r>
-              <a:t>□ 값의 단위와 방향을 한 문장으로 설명할 수 있다.</a:t>
-            </a:r>
-          </a:p>
-        </p:txBody>
-      </p:sp>
-      <p:sp>
-        <p:nvSpPr>
-          <p:cNvPr id="9" name="TextBox 8"/>
+              <a:t>cd ~/agv_ws &amp;&amp; source install/setup.bash</a:t>
+            </a:r>
+            <a:br/>
+            <a:r>
+              <a:t>ros2 launch agv_bringup agv_sim.launch.py</a:t>
+            </a:r>
+          </a:p>
+        </p:txBody>
+      </p:sp>
+      <p:sp>
+        <p:nvSpPr>
+          <p:cNvPr id="8" name="TextBox 7"/>
           <p:cNvSpPr txBox="1"/>
           <p:nvPr/>
         </p:nvSpPr>
         <p:spPr>
           <a:xfrm>
-            <a:off x="731520" y="5989320"/>
-            <a:ext cx="10789920" cy="237744"/>
+            <a:off x="786384" y="5239512"/>
+            <a:ext cx="1261872" cy="237744"/>
           </a:xfrm>
           <a:prstGeom prst="rect">
             <a:avLst/>
@@ -20384,7 +20827,46 @@
               <a:spcAft>
                 <a:spcPts val="0"/>
               </a:spcAft>
-              <a:defRPr sz="1500" b="1">
+              <a:defRPr sz="1800" b="1">
+                <a:solidFill>
+                  <a:srgbClr val="2A8B5A"/>
+                </a:solidFill>
+                <a:latin typeface="Noto Sans CJK KR"/>
+              </a:defRPr>
+            </a:pPr>
+            <a:r>
+              <a:t>확인 기준</a:t>
+            </a:r>
+          </a:p>
+        </p:txBody>
+      </p:sp>
+      <p:sp>
+        <p:nvSpPr>
+          <p:cNvPr id="9" name="TextBox 8"/>
+          <p:cNvSpPr txBox="1"/>
+          <p:nvPr/>
+        </p:nvSpPr>
+        <p:spPr>
+          <a:xfrm>
+            <a:off x="786384" y="5532120"/>
+            <a:ext cx="10469880" cy="420624"/>
+          </a:xfrm>
+          <a:prstGeom prst="rect">
+            <a:avLst/>
+          </a:prstGeom>
+          <a:noFill/>
+        </p:spPr>
+        <p:txBody>
+          <a:bodyPr wrap="square" lIns="73152" rIns="73152" tIns="36576" bIns="36576">
+            <a:spAutoFit/>
+          </a:bodyPr>
+          <a:lstStyle/>
+          <a:p>
+            <a:pPr algn="l">
+              <a:spcAft>
+                <a:spcPts val="0"/>
+              </a:spcAft>
+              <a:defRPr sz="1800" b="0">
                 <a:solidFill>
                   <a:srgbClr val="122C4E"/>
                 </a:solidFill>
@@ -20392,7 +20874,7 @@
               </a:defRPr>
             </a:pPr>
             <a:r>
-              <a:t>완료 조건: 한 launch 실행, RViz/Gazebo 확인, mission log, rosbag 기록을 제출 체크리스트로 남긴다.</a:t>
+              <a:t>한 launch 실행, RViz/Gazebo 확인, mission log, rosbag 기록을 제출 체크리스트로 남긴다.</a:t>
             </a:r>
           </a:p>
         </p:txBody>
@@ -20449,7 +20931,7 @@
               </a:defRPr>
             </a:pPr>
             <a:r>
-              <a:t>막히면: 증상 → 우선 확인 → 재검증</a:t>
+              <a:t>정상 결과: 실제 환경에서 확인한 출력</a:t>
             </a:r>
           </a:p>
         </p:txBody>
@@ -20488,7 +20970,7 @@
               </a:defRPr>
             </a:pPr>
             <a:r>
-              <a:t>오류 메시지를 숨기지 않고 같은 순서로 점검합니다.</a:t>
+              <a:t>실제 ROS 2 환경의 파일·패키지·구성 검증 로그</a:t>
             </a:r>
           </a:p>
         </p:txBody>
@@ -20571,119 +21053,40 @@
           </a:p>
         </p:txBody>
       </p:sp>
-      <p:sp>
-        <p:nvSpPr>
-          <p:cNvPr id="6" name="Rectangle 5"/>
-          <p:cNvSpPr/>
-          <p:nvPr/>
-        </p:nvSpPr>
-        <p:spPr>
-          <a:xfrm>
-            <a:off x="566928" y="1188720"/>
-            <a:ext cx="11064240" cy="347472"/>
-          </a:xfrm>
-          <a:prstGeom prst="rect">
-            <a:avLst/>
-          </a:prstGeom>
-          <a:solidFill>
-            <a:srgbClr val="F4F7FB"/>
-          </a:solidFill>
-          <a:ln>
-            <a:solidFill>
-              <a:srgbClr val="F4F7FB"/>
-            </a:solidFill>
-          </a:ln>
-        </p:spPr>
-        <p:style>
-          <a:lnRef idx="1">
-            <a:schemeClr val="accent1"/>
-          </a:lnRef>
-          <a:fillRef idx="3">
-            <a:schemeClr val="accent1"/>
-          </a:fillRef>
-          <a:effectRef idx="2">
-            <a:schemeClr val="accent1"/>
-          </a:effectRef>
-          <a:fontRef idx="minor">
-            <a:schemeClr val="lt1"/>
-          </a:fontRef>
-        </p:style>
-        <p:txBody>
-          <a:bodyPr rtlCol="0" anchor="ctr" wrap="square" lIns="73152" rIns="73152" tIns="36576" bIns="36576"/>
-          <a:lstStyle/>
-          <a:p>
-            <a:pPr algn="l">
-              <a:spcAft>
-                <a:spcPts val="0"/>
-              </a:spcAft>
-              <a:defRPr sz="1300" b="1">
-                <a:solidFill>
-                  <a:srgbClr val="122C4E"/>
-                </a:solidFill>
-                <a:latin typeface="Noto Sans CJK KR"/>
-              </a:defRPr>
-            </a:pPr>
-            <a:r>
-              <a:t>현재 단계 오류 대응    |    현재 폴더 ~/agv_ws    |    현재 터미널</a:t>
-            </a:r>
-          </a:p>
-        </p:txBody>
-      </p:sp>
-      <p:sp>
-        <p:nvSpPr>
-          <p:cNvPr id="7" name="Rounded Rectangle 6"/>
-          <p:cNvSpPr/>
-          <p:nvPr/>
-        </p:nvSpPr>
-        <p:spPr>
-          <a:xfrm>
-            <a:off x="694944" y="1755648"/>
-            <a:ext cx="10972800" cy="1115568"/>
-          </a:xfrm>
-          <a:prstGeom prst="roundRect">
-            <a:avLst/>
-          </a:prstGeom>
-          <a:solidFill>
-            <a:srgbClr val="FFF7F4"/>
-          </a:solidFill>
-          <a:ln>
-            <a:solidFill>
-              <a:srgbClr val="EDBEB4"/>
-            </a:solidFill>
-          </a:ln>
-        </p:spPr>
-        <p:style>
-          <a:lnRef idx="1">
-            <a:schemeClr val="accent1"/>
-          </a:lnRef>
-          <a:fillRef idx="3">
-            <a:schemeClr val="accent1"/>
-          </a:fillRef>
-          <a:effectRef idx="2">
-            <a:schemeClr val="accent1"/>
-          </a:effectRef>
-          <a:fontRef idx="minor">
-            <a:schemeClr val="lt1"/>
-          </a:fontRef>
-        </p:style>
-        <p:txBody>
-          <a:bodyPr rtlCol="0" anchor="ctr"/>
-          <a:lstStyle/>
-          <a:p>
-            <a:pPr algn="ctr"/>
-          </a:p>
-        </p:txBody>
-      </p:sp>
-      <p:sp>
-        <p:nvSpPr>
-          <p:cNvPr id="8" name="TextBox 7"/>
+      <p:pic>
+        <p:nvPicPr>
+          <p:cNvPr id="6" name="Picture 5" descr="validation_terminal.png"/>
+          <p:cNvPicPr>
+            <a:picLocks noChangeAspect="1"/>
+          </p:cNvPicPr>
+          <p:nvPr/>
+        </p:nvPicPr>
+        <p:blipFill>
+          <a:blip r:embed="rId2"/>
+          <a:stretch>
+            <a:fillRect/>
+          </a:stretch>
+        </p:blipFill>
+        <p:spPr>
+          <a:xfrm>
+            <a:off x="2855133" y="1353312"/>
+            <a:ext cx="6478685" cy="4800600"/>
+          </a:xfrm>
+          <a:prstGeom prst="rect">
+            <a:avLst/>
+          </a:prstGeom>
+        </p:spPr>
+      </p:pic>
+      <p:sp>
+        <p:nvSpPr>
+          <p:cNvPr id="7" name="TextBox 6"/>
           <p:cNvSpPr txBox="1"/>
           <p:nvPr/>
         </p:nvSpPr>
         <p:spPr>
           <a:xfrm>
-            <a:off x="896112" y="1901952"/>
-            <a:ext cx="2926080" cy="274320"/>
+            <a:off x="777240" y="6217920"/>
+            <a:ext cx="10607040" cy="182880"/>
           </a:xfrm>
           <a:prstGeom prst="rect">
             <a:avLst/>
@@ -20696,355 +21099,19 @@
           </a:bodyPr>
           <a:lstStyle/>
           <a:p>
-            <a:pPr algn="l">
-              <a:spcAft>
-                <a:spcPts val="0"/>
-              </a:spcAft>
-              <a:defRPr sz="1800" b="1">
-                <a:solidFill>
-                  <a:srgbClr val="BE3B3B"/>
-                </a:solidFill>
-                <a:latin typeface="Noto Sans CJK KR"/>
-              </a:defRPr>
-            </a:pPr>
-            <a:r>
-              <a:t>증상 1: 일부 노드만 실행</a:t>
-            </a:r>
-          </a:p>
-        </p:txBody>
-      </p:sp>
-      <p:sp>
-        <p:nvSpPr>
-          <p:cNvPr id="9" name="TextBox 8"/>
-          <p:cNvSpPr txBox="1"/>
-          <p:nvPr/>
-        </p:nvSpPr>
-        <p:spPr>
-          <a:xfrm>
-            <a:off x="3794760" y="1883664"/>
-            <a:ext cx="7543800" cy="621792"/>
-          </a:xfrm>
-          <a:prstGeom prst="rect">
-            <a:avLst/>
-          </a:prstGeom>
-          <a:noFill/>
-        </p:spPr>
-        <p:txBody>
-          <a:bodyPr wrap="square" lIns="73152" rIns="73152" tIns="36576" bIns="36576">
-            <a:spAutoFit/>
-          </a:bodyPr>
-          <a:lstStyle/>
-          <a:p>
-            <a:pPr algn="l">
-              <a:spcAft>
-                <a:spcPts val="0"/>
-              </a:spcAft>
-              <a:defRPr sz="1600" b="0">
-                <a:solidFill>
-                  <a:srgbClr val="122C4E"/>
-                </a:solidFill>
-                <a:latin typeface="Noto Sans CJK KR"/>
-              </a:defRPr>
-            </a:pPr>
-            <a:r>
-              <a:t>우선 확인: launch 순서·namespace·config 경로를 확인한다.</a:t>
-            </a:r>
-            <a:br/>
-            <a:r>
-              <a:t>수정 후: ros2 launch agv_bringup agv_sim.launch.py --show-args</a:t>
-            </a:r>
-          </a:p>
-        </p:txBody>
-      </p:sp>
-      <p:sp>
-        <p:nvSpPr>
-          <p:cNvPr id="10" name="Rounded Rectangle 9"/>
-          <p:cNvSpPr/>
-          <p:nvPr/>
-        </p:nvSpPr>
-        <p:spPr>
-          <a:xfrm>
-            <a:off x="694944" y="3172968"/>
-            <a:ext cx="10972800" cy="1115568"/>
-          </a:xfrm>
-          <a:prstGeom prst="roundRect">
-            <a:avLst/>
-          </a:prstGeom>
-          <a:solidFill>
-            <a:srgbClr val="FFF7F4"/>
-          </a:solidFill>
-          <a:ln>
-            <a:solidFill>
-              <a:srgbClr val="EDBEB4"/>
-            </a:solidFill>
-          </a:ln>
-        </p:spPr>
-        <p:style>
-          <a:lnRef idx="1">
-            <a:schemeClr val="accent1"/>
-          </a:lnRef>
-          <a:fillRef idx="3">
-            <a:schemeClr val="accent1"/>
-          </a:fillRef>
-          <a:effectRef idx="2">
-            <a:schemeClr val="accent1"/>
-          </a:effectRef>
-          <a:fontRef idx="minor">
-            <a:schemeClr val="lt1"/>
-          </a:fontRef>
-        </p:style>
-        <p:txBody>
-          <a:bodyPr rtlCol="0" anchor="ctr"/>
-          <a:lstStyle/>
-          <a:p>
-            <a:pPr algn="ctr"/>
-          </a:p>
-        </p:txBody>
-      </p:sp>
-      <p:sp>
-        <p:nvSpPr>
-          <p:cNvPr id="11" name="TextBox 10"/>
-          <p:cNvSpPr txBox="1"/>
-          <p:nvPr/>
-        </p:nvSpPr>
-        <p:spPr>
-          <a:xfrm>
-            <a:off x="896112" y="3319272"/>
-            <a:ext cx="2926080" cy="274320"/>
-          </a:xfrm>
-          <a:prstGeom prst="rect">
-            <a:avLst/>
-          </a:prstGeom>
-          <a:noFill/>
-        </p:spPr>
-        <p:txBody>
-          <a:bodyPr wrap="square" lIns="73152" rIns="73152" tIns="36576" bIns="36576">
-            <a:spAutoFit/>
-          </a:bodyPr>
-          <a:lstStyle/>
-          <a:p>
-            <a:pPr algn="l">
-              <a:spcAft>
-                <a:spcPts val="0"/>
-              </a:spcAft>
-              <a:defRPr sz="1800" b="1">
-                <a:solidFill>
-                  <a:srgbClr val="BE3B3B"/>
-                </a:solidFill>
-                <a:latin typeface="Noto Sans CJK KR"/>
-              </a:defRPr>
-            </a:pPr>
-            <a:r>
-              <a:t>증상 2: 센서/TF 위치 불일치</a:t>
-            </a:r>
-          </a:p>
-        </p:txBody>
-      </p:sp>
-      <p:sp>
-        <p:nvSpPr>
-          <p:cNvPr id="12" name="TextBox 11"/>
-          <p:cNvSpPr txBox="1"/>
-          <p:nvPr/>
-        </p:nvSpPr>
-        <p:spPr>
-          <a:xfrm>
-            <a:off x="3794760" y="3300984"/>
-            <a:ext cx="7543800" cy="621792"/>
-          </a:xfrm>
-          <a:prstGeom prst="rect">
-            <a:avLst/>
-          </a:prstGeom>
-          <a:noFill/>
-        </p:spPr>
-        <p:txBody>
-          <a:bodyPr wrap="square" lIns="73152" rIns="73152" tIns="36576" bIns="36576">
-            <a:spAutoFit/>
-          </a:bodyPr>
-          <a:lstStyle/>
-          <a:p>
-            <a:pPr algn="l">
-              <a:spcAft>
-                <a:spcPts val="0"/>
-              </a:spcAft>
-              <a:defRPr sz="1600" b="0">
-                <a:solidFill>
-                  <a:srgbClr val="122C4E"/>
-                </a:solidFill>
-                <a:latin typeface="Noto Sans CJK KR"/>
-              </a:defRPr>
-            </a:pPr>
-            <a:r>
-              <a:t>우선 확인: header.frame_id와 TF tree를 확인한다.</a:t>
-            </a:r>
-            <a:br/>
-            <a:r>
-              <a:t>수정 후: ros2 launch agv_bringup agv_sim.launch.py --show-args</a:t>
-            </a:r>
-          </a:p>
-        </p:txBody>
-      </p:sp>
-      <p:sp>
-        <p:nvSpPr>
-          <p:cNvPr id="13" name="Rounded Rectangle 12"/>
-          <p:cNvSpPr/>
-          <p:nvPr/>
-        </p:nvSpPr>
-        <p:spPr>
-          <a:xfrm>
-            <a:off x="694944" y="4590288"/>
-            <a:ext cx="10972800" cy="1115568"/>
-          </a:xfrm>
-          <a:prstGeom prst="roundRect">
-            <a:avLst/>
-          </a:prstGeom>
-          <a:solidFill>
-            <a:srgbClr val="FFF7F4"/>
-          </a:solidFill>
-          <a:ln>
-            <a:solidFill>
-              <a:srgbClr val="EDBEB4"/>
-            </a:solidFill>
-          </a:ln>
-        </p:spPr>
-        <p:style>
-          <a:lnRef idx="1">
-            <a:schemeClr val="accent1"/>
-          </a:lnRef>
-          <a:fillRef idx="3">
-            <a:schemeClr val="accent1"/>
-          </a:fillRef>
-          <a:effectRef idx="2">
-            <a:schemeClr val="accent1"/>
-          </a:effectRef>
-          <a:fontRef idx="minor">
-            <a:schemeClr val="lt1"/>
-          </a:fontRef>
-        </p:style>
-        <p:txBody>
-          <a:bodyPr rtlCol="0" anchor="ctr"/>
-          <a:lstStyle/>
-          <a:p>
-            <a:pPr algn="ctr"/>
-          </a:p>
-        </p:txBody>
-      </p:sp>
-      <p:sp>
-        <p:nvSpPr>
-          <p:cNvPr id="14" name="TextBox 13"/>
-          <p:cNvSpPr txBox="1"/>
-          <p:nvPr/>
-        </p:nvSpPr>
-        <p:spPr>
-          <a:xfrm>
-            <a:off x="896112" y="4736592"/>
-            <a:ext cx="2926080" cy="274320"/>
-          </a:xfrm>
-          <a:prstGeom prst="rect">
-            <a:avLst/>
-          </a:prstGeom>
-          <a:noFill/>
-        </p:spPr>
-        <p:txBody>
-          <a:bodyPr wrap="square" lIns="73152" rIns="73152" tIns="36576" bIns="36576">
-            <a:spAutoFit/>
-          </a:bodyPr>
-          <a:lstStyle/>
-          <a:p>
-            <a:pPr algn="l">
-              <a:spcAft>
-                <a:spcPts val="0"/>
-              </a:spcAft>
-              <a:defRPr sz="1800" b="1">
-                <a:solidFill>
-                  <a:srgbClr val="BE3B3B"/>
-                </a:solidFill>
-                <a:latin typeface="Noto Sans CJK KR"/>
-              </a:defRPr>
-            </a:pPr>
-            <a:r>
-              <a:t>증상 3: 로봇이 불안정</a:t>
-            </a:r>
-          </a:p>
-        </p:txBody>
-      </p:sp>
-      <p:sp>
-        <p:nvSpPr>
-          <p:cNvPr id="15" name="TextBox 14"/>
-          <p:cNvSpPr txBox="1"/>
-          <p:nvPr/>
-        </p:nvSpPr>
-        <p:spPr>
-          <a:xfrm>
-            <a:off x="3794760" y="4718303"/>
-            <a:ext cx="7543800" cy="621792"/>
-          </a:xfrm>
-          <a:prstGeom prst="rect">
-            <a:avLst/>
-          </a:prstGeom>
-          <a:noFill/>
-        </p:spPr>
-        <p:txBody>
-          <a:bodyPr wrap="square" lIns="73152" rIns="73152" tIns="36576" bIns="36576">
-            <a:spAutoFit/>
-          </a:bodyPr>
-          <a:lstStyle/>
-          <a:p>
-            <a:pPr algn="l">
-              <a:spcAft>
-                <a:spcPts val="0"/>
-              </a:spcAft>
-              <a:defRPr sz="1600" b="0">
-                <a:solidFill>
-                  <a:srgbClr val="122C4E"/>
-                </a:solidFill>
-                <a:latin typeface="Noto Sans CJK KR"/>
-              </a:defRPr>
-            </a:pPr>
-            <a:r>
-              <a:t>우선 확인: physics collision·friction·inertia를 M07 순서로 점검한다.</a:t>
-            </a:r>
-            <a:br/>
-            <a:r>
-              <a:t>수정 후: ros2 launch agv_bringup agv_sim.launch.py --show-args</a:t>
-            </a:r>
-          </a:p>
-        </p:txBody>
-      </p:sp>
-      <p:sp>
-        <p:nvSpPr>
-          <p:cNvPr id="16" name="TextBox 15"/>
-          <p:cNvSpPr txBox="1"/>
-          <p:nvPr/>
-        </p:nvSpPr>
-        <p:spPr>
-          <a:xfrm>
-            <a:off x="822960" y="5102352"/>
-            <a:ext cx="10607040" cy="402336"/>
-          </a:xfrm>
-          <a:prstGeom prst="rect">
-            <a:avLst/>
-          </a:prstGeom>
-          <a:noFill/>
-        </p:spPr>
-        <p:txBody>
-          <a:bodyPr wrap="square" lIns="73152" rIns="73152" tIns="36576" bIns="36576">
-            <a:spAutoFit/>
-          </a:bodyPr>
-          <a:lstStyle/>
-          <a:p>
             <a:pPr algn="ctr">
               <a:spcAft>
                 <a:spcPts val="0"/>
               </a:spcAft>
-              <a:defRPr sz="1800" b="1">
-                <a:solidFill>
-                  <a:srgbClr val="DB7E22"/>
-                </a:solidFill>
-                <a:latin typeface="Noto Sans CJK KR"/>
-              </a:defRPr>
-            </a:pPr>
-            <a:r>
-              <a:t>공통 순서: ① 현재 폴더 ② source ③ 파일 경로 ④ 이름/타입/단위 ⑤ build·source 후 재실행</a:t>
+              <a:defRPr sz="1100" b="1">
+                <a:solidFill>
+                  <a:srgbClr val="2A8B5A"/>
+                </a:solidFill>
+                <a:latin typeface="Noto Sans CJK KR"/>
+              </a:defRPr>
+            </a:pPr>
+            <a:r>
+              <a:t>① 명령/설정  ② 정상 출력 또는 화면  ③ 다음 검증 명령으로 재확인</a:t>
             </a:r>
           </a:p>
         </p:txBody>
@@ -21101,7 +21168,7 @@
               </a:defRPr>
             </a:pPr>
             <a:r>
-              <a:t>미니 실습: 값 하나를 바꾸고 결과를 비교한다</a:t>
+              <a:t>객관적 검증 명령으로 완료를 확인한다</a:t>
             </a:r>
           </a:p>
         </p:txBody>
@@ -21140,7 +21207,7 @@
               </a:defRPr>
             </a:pPr>
             <a:r>
-              <a:t>정상 결과를 만든 뒤에는 한 번에 하나의 값만 바꿉니다.</a:t>
+              <a:t>화면만 보지 말고 topic·frame·파일·parameter를 다시 확인합니다.</a:t>
             </a:r>
           </a:p>
         </p:txBody>
@@ -21276,7 +21343,7 @@
               </a:defRPr>
             </a:pPr>
             <a:r>
-              <a:t>현재 단계 미니 실습    |    현재 폴더 ~/agv_ws    |    현재 터미널</a:t>
+              <a:t>현재 단계 검증    |    현재 폴더 ~/agv_ws    |    현재 터미널</a:t>
             </a:r>
           </a:p>
         </p:txBody>
@@ -21289,18 +21356,18 @@
         </p:nvSpPr>
         <p:spPr>
           <a:xfrm>
-            <a:off x="749808" y="1874519"/>
-            <a:ext cx="10652760" cy="1993392"/>
+            <a:off x="658368" y="1755648"/>
+            <a:ext cx="10972800" cy="2148840"/>
           </a:xfrm>
           <a:prstGeom prst="roundRect">
             <a:avLst/>
           </a:prstGeom>
           <a:solidFill>
-            <a:srgbClr val="FFF8EB"/>
+            <a:srgbClr val="1D232D"/>
           </a:solidFill>
           <a:ln>
             <a:solidFill>
-              <a:srgbClr val="ECC680"/>
+              <a:srgbClr val="1D232D"/>
             </a:solidFill>
           </a:ln>
         </p:spPr>
@@ -21322,33 +21389,111 @@
           <a:bodyPr rtlCol="0" anchor="ctr" wrap="square" lIns="73152" rIns="73152" tIns="36576" bIns="36576"/>
           <a:lstStyle/>
           <a:p>
-            <a:pPr algn="ctr">
-              <a:spcAft>
-                <a:spcPts val="0"/>
-              </a:spcAft>
-              <a:defRPr sz="2300" b="1">
-                <a:solidFill>
-                  <a:srgbClr val="122C4E"/>
-                </a:solidFill>
-                <a:latin typeface="Noto Sans CJK KR"/>
-              </a:defRPr>
-            </a:pPr>
-            <a:r>
-              <a:t>완료 증거를 ①Gazebo ②RViz ③ros2 topic ④mission log ⑤rosbag으로 나누어 실제 제출 파일 목록을 작성한다.</a:t>
-            </a:r>
-          </a:p>
-        </p:txBody>
-      </p:sp>
-      <p:sp>
-        <p:nvSpPr>
-          <p:cNvPr id="8" name="TextBox 7"/>
+            <a:pPr algn="l">
+              <a:spcAft>
+                <a:spcPts val="0"/>
+              </a:spcAft>
+              <a:defRPr sz="1600" b="0">
+                <a:solidFill>
+                  <a:srgbClr val="FFFFFF"/>
+                </a:solidFill>
+                <a:latin typeface="DejaVu Sans Mono"/>
+              </a:defRPr>
+            </a:pPr>
+            <a:r>
+              <a:t>ros2 launch agv_bringup agv_sim.launch.py --show-args</a:t>
+            </a:r>
+            <a:br/>
+            <a:r>
+              <a:t>ros2 node list</a:t>
+            </a:r>
+            <a:br/>
+            <a:r>
+              <a:t>ros2 topic list | rg '/scan|/imu/data|/odom|/camera/image_raw|/cmd_vel'</a:t>
+            </a:r>
+          </a:p>
+        </p:txBody>
+      </p:sp>
+      <p:sp>
+        <p:nvSpPr>
+          <p:cNvPr id="8" name="Rounded Rectangle 7"/>
+          <p:cNvSpPr/>
+          <p:nvPr/>
+        </p:nvSpPr>
+        <p:spPr>
+          <a:xfrm>
+            <a:off x="658368" y="4206240"/>
+            <a:ext cx="10972800" cy="1554480"/>
+          </a:xfrm>
+          <a:prstGeom prst="roundRect">
+            <a:avLst/>
+          </a:prstGeom>
+          <a:solidFill>
+            <a:srgbClr val="F4F7FB"/>
+          </a:solidFill>
+          <a:ln>
+            <a:solidFill>
+              <a:srgbClr val="D1DFD5"/>
+            </a:solidFill>
+          </a:ln>
+        </p:spPr>
+        <p:style>
+          <a:lnRef idx="1">
+            <a:schemeClr val="accent1"/>
+          </a:lnRef>
+          <a:fillRef idx="3">
+            <a:schemeClr val="accent1"/>
+          </a:fillRef>
+          <a:effectRef idx="2">
+            <a:schemeClr val="accent1"/>
+          </a:effectRef>
+          <a:fontRef idx="minor">
+            <a:schemeClr val="lt1"/>
+          </a:fontRef>
+        </p:style>
+        <p:txBody>
+          <a:bodyPr rtlCol="0" anchor="ctr" wrap="square" lIns="73152" rIns="73152" tIns="36576" bIns="36576"/>
+          <a:lstStyle/>
+          <a:p>
+            <a:pPr algn="l">
+              <a:spcAft>
+                <a:spcPts val="0"/>
+              </a:spcAft>
+              <a:defRPr sz="1800" b="1">
+                <a:solidFill>
+                  <a:srgbClr val="2A8B5A"/>
+                </a:solidFill>
+                <a:latin typeface="Noto Sans CJK KR"/>
+              </a:defRPr>
+            </a:pPr>
+            <a:r>
+              <a:t>완료 체크</a:t>
+            </a:r>
+            <a:br/>
+            <a:r>
+              <a:t>□ 명령이 오류 없이 실행된다.</a:t>
+            </a:r>
+            <a:br/>
+            <a:r>
+              <a:t>□ 기대한 파일·topic·frame·parameter 이름이 보인다.</a:t>
+            </a:r>
+            <a:br/>
+            <a:r>
+              <a:t>□ 값의 단위와 방향을 한 문장으로 설명할 수 있다.</a:t>
+            </a:r>
+          </a:p>
+        </p:txBody>
+      </p:sp>
+      <p:sp>
+        <p:nvSpPr>
+          <p:cNvPr id="9" name="TextBox 8"/>
           <p:cNvSpPr txBox="1"/>
           <p:nvPr/>
         </p:nvSpPr>
         <p:spPr>
           <a:xfrm>
-            <a:off x="877824" y="4590288"/>
-            <a:ext cx="10241280" cy="594360"/>
+            <a:off x="731520" y="5989320"/>
+            <a:ext cx="10789920" cy="237744"/>
           </a:xfrm>
           <a:prstGeom prst="rect">
             <a:avLst/>
@@ -21361,19 +21506,19 @@
           </a:bodyPr>
           <a:lstStyle/>
           <a:p>
-            <a:pPr algn="ctr">
-              <a:spcAft>
-                <a:spcPts val="0"/>
-              </a:spcAft>
-              <a:defRPr sz="1900" b="1">
-                <a:solidFill>
-                  <a:srgbClr val="DB7E22"/>
-                </a:solidFill>
-                <a:latin typeface="Noto Sans CJK KR"/>
-              </a:defRPr>
-            </a:pPr>
-            <a:r>
-              <a:t>기록할 것: 바꾼 값(단위) · 기대한 변화 · 실제 출력/화면 · 원래 값으로 되돌린 결과</a:t>
+            <a:pPr algn="l">
+              <a:spcAft>
+                <a:spcPts val="0"/>
+              </a:spcAft>
+              <a:defRPr sz="1500" b="1">
+                <a:solidFill>
+                  <a:srgbClr val="122C4E"/>
+                </a:solidFill>
+                <a:latin typeface="Noto Sans CJK KR"/>
+              </a:defRPr>
+            </a:pPr>
+            <a:r>
+              <a:t>완료 조건: 한 launch 실행, RViz/Gazebo 확인, mission log, rosbag 기록을 제출 체크리스트로 남긴다.</a:t>
             </a:r>
           </a:p>
         </p:txBody>
@@ -21430,7 +21575,7 @@
               </a:defRPr>
             </a:pPr>
             <a:r>
-              <a:t>최종 미션 시나리오</a:t>
+              <a:t>막히면: 증상 → 우선 확인 → 재검증</a:t>
             </a:r>
           </a:p>
         </p:txBody>
@@ -21469,7 +21614,7 @@
               </a:defRPr>
             </a:pPr>
             <a:r>
-              <a:t>통합 단계에서 놓치기 쉬운 실행·운영 조건을 정리합니다.</a:t>
+              <a:t>오류 메시지를 숨기지 않고 같은 순서로 점검합니다.</a:t>
             </a:r>
           </a:p>
         </p:txBody>
@@ -21605,7 +21750,7 @@
               </a:defRPr>
             </a:pPr>
             <a:r>
-              <a:t>현재 단계 통합 보강    |    현재 폴더 ~/agv_ws    |    현재 터미널</a:t>
+              <a:t>현재 단계 오류 대응    |    현재 폴더 ~/agv_ws    |    현재 터미널</a:t>
             </a:r>
           </a:p>
         </p:txBody>
@@ -21618,18 +21763,18 @@
         </p:nvSpPr>
         <p:spPr>
           <a:xfrm>
-            <a:off x="676656" y="1691640"/>
-            <a:ext cx="10972800" cy="4434840"/>
+            <a:off x="694944" y="1755648"/>
+            <a:ext cx="10972800" cy="1115568"/>
           </a:xfrm>
           <a:prstGeom prst="roundRect">
             <a:avLst/>
           </a:prstGeom>
           <a:solidFill>
-            <a:srgbClr val="F4F7FB"/>
+            <a:srgbClr val="FFF7F4"/>
           </a:solidFill>
           <a:ln>
             <a:solidFill>
-              <a:srgbClr val="D2DEEC"/>
+              <a:srgbClr val="EDBEB4"/>
             </a:solidFill>
           </a:ln>
         </p:spPr>
@@ -21663,8 +21808,8 @@
         </p:nvSpPr>
         <p:spPr>
           <a:xfrm>
-            <a:off x="914400" y="1993392"/>
-            <a:ext cx="10332720" cy="3749039"/>
+            <a:off x="896112" y="1901952"/>
+            <a:ext cx="2926080" cy="274320"/>
           </a:xfrm>
           <a:prstGeom prst="rect">
             <a:avLst/>
@@ -21672,16 +21817,55 @@
           <a:noFill/>
         </p:spPr>
         <p:txBody>
-          <a:bodyPr wrap="square" lIns="109728" rIns="109728">
+          <a:bodyPr wrap="square" lIns="73152" rIns="73152" tIns="36576" bIns="36576">
             <a:spAutoFit/>
           </a:bodyPr>
           <a:lstStyle/>
           <a:p>
-            <a:pPr>
-              <a:spcAft>
-                <a:spcPts val="800"/>
-              </a:spcAft>
-              <a:defRPr sz="1900">
+            <a:pPr algn="l">
+              <a:spcAft>
+                <a:spcPts val="0"/>
+              </a:spcAft>
+              <a:defRPr sz="1800" b="1">
+                <a:solidFill>
+                  <a:srgbClr val="BE3B3B"/>
+                </a:solidFill>
+                <a:latin typeface="Noto Sans CJK KR"/>
+              </a:defRPr>
+            </a:pPr>
+            <a:r>
+              <a:t>증상 1: 일부 노드만 실행</a:t>
+            </a:r>
+          </a:p>
+        </p:txBody>
+      </p:sp>
+      <p:sp>
+        <p:nvSpPr>
+          <p:cNvPr id="9" name="TextBox 8"/>
+          <p:cNvSpPr txBox="1"/>
+          <p:nvPr/>
+        </p:nvSpPr>
+        <p:spPr>
+          <a:xfrm>
+            <a:off x="3794760" y="1883664"/>
+            <a:ext cx="7543800" cy="621792"/>
+          </a:xfrm>
+          <a:prstGeom prst="rect">
+            <a:avLst/>
+          </a:prstGeom>
+          <a:noFill/>
+        </p:spPr>
+        <p:txBody>
+          <a:bodyPr wrap="square" lIns="73152" rIns="73152" tIns="36576" bIns="36576">
+            <a:spAutoFit/>
+          </a:bodyPr>
+          <a:lstStyle/>
+          <a:p>
+            <a:pPr algn="l">
+              <a:spcAft>
+                <a:spcPts val="0"/>
+              </a:spcAft>
+              <a:defRPr sz="1600" b="0">
                 <a:solidFill>
                   <a:srgbClr val="122C4E"/>
                 </a:solidFill>
@@ -21689,15 +21873,126 @@
               </a:defRPr>
             </a:pPr>
             <a:r>
-              <a:t>• 1. START: launch와 sensor topic을 확인한다.</a:t>
-            </a:r>
-          </a:p>
-          <a:p>
-            <a:pPr>
-              <a:spcAft>
-                <a:spcPts val="800"/>
-              </a:spcAft>
-              <a:defRPr sz="1900">
+              <a:t>우선 확인: launch 순서·namespace·config 경로를 확인한다.</a:t>
+            </a:r>
+            <a:br/>
+            <a:r>
+              <a:t>수정 후: ros2 launch agv_bringup agv_sim.launch.py --show-args</a:t>
+            </a:r>
+          </a:p>
+        </p:txBody>
+      </p:sp>
+      <p:sp>
+        <p:nvSpPr>
+          <p:cNvPr id="10" name="Rounded Rectangle 9"/>
+          <p:cNvSpPr/>
+          <p:nvPr/>
+        </p:nvSpPr>
+        <p:spPr>
+          <a:xfrm>
+            <a:off x="694944" y="3172968"/>
+            <a:ext cx="10972800" cy="1115568"/>
+          </a:xfrm>
+          <a:prstGeom prst="roundRect">
+            <a:avLst/>
+          </a:prstGeom>
+          <a:solidFill>
+            <a:srgbClr val="FFF7F4"/>
+          </a:solidFill>
+          <a:ln>
+            <a:solidFill>
+              <a:srgbClr val="EDBEB4"/>
+            </a:solidFill>
+          </a:ln>
+        </p:spPr>
+        <p:style>
+          <a:lnRef idx="1">
+            <a:schemeClr val="accent1"/>
+          </a:lnRef>
+          <a:fillRef idx="3">
+            <a:schemeClr val="accent1"/>
+          </a:fillRef>
+          <a:effectRef idx="2">
+            <a:schemeClr val="accent1"/>
+          </a:effectRef>
+          <a:fontRef idx="minor">
+            <a:schemeClr val="lt1"/>
+          </a:fontRef>
+        </p:style>
+        <p:txBody>
+          <a:bodyPr rtlCol="0" anchor="ctr"/>
+          <a:lstStyle/>
+          <a:p>
+            <a:pPr algn="ctr"/>
+          </a:p>
+        </p:txBody>
+      </p:sp>
+      <p:sp>
+        <p:nvSpPr>
+          <p:cNvPr id="11" name="TextBox 10"/>
+          <p:cNvSpPr txBox="1"/>
+          <p:nvPr/>
+        </p:nvSpPr>
+        <p:spPr>
+          <a:xfrm>
+            <a:off x="896112" y="3319272"/>
+            <a:ext cx="2926080" cy="274320"/>
+          </a:xfrm>
+          <a:prstGeom prst="rect">
+            <a:avLst/>
+          </a:prstGeom>
+          <a:noFill/>
+        </p:spPr>
+        <p:txBody>
+          <a:bodyPr wrap="square" lIns="73152" rIns="73152" tIns="36576" bIns="36576">
+            <a:spAutoFit/>
+          </a:bodyPr>
+          <a:lstStyle/>
+          <a:p>
+            <a:pPr algn="l">
+              <a:spcAft>
+                <a:spcPts val="0"/>
+              </a:spcAft>
+              <a:defRPr sz="1800" b="1">
+                <a:solidFill>
+                  <a:srgbClr val="BE3B3B"/>
+                </a:solidFill>
+                <a:latin typeface="Noto Sans CJK KR"/>
+              </a:defRPr>
+            </a:pPr>
+            <a:r>
+              <a:t>증상 2: 센서/TF 위치 불일치</a:t>
+            </a:r>
+          </a:p>
+        </p:txBody>
+      </p:sp>
+      <p:sp>
+        <p:nvSpPr>
+          <p:cNvPr id="12" name="TextBox 11"/>
+          <p:cNvSpPr txBox="1"/>
+          <p:nvPr/>
+        </p:nvSpPr>
+        <p:spPr>
+          <a:xfrm>
+            <a:off x="3794760" y="3300984"/>
+            <a:ext cx="7543800" cy="621792"/>
+          </a:xfrm>
+          <a:prstGeom prst="rect">
+            <a:avLst/>
+          </a:prstGeom>
+          <a:noFill/>
+        </p:spPr>
+        <p:txBody>
+          <a:bodyPr wrap="square" lIns="73152" rIns="73152" tIns="36576" bIns="36576">
+            <a:spAutoFit/>
+          </a:bodyPr>
+          <a:lstStyle/>
+          <a:p>
+            <a:pPr algn="l">
+              <a:spcAft>
+                <a:spcPts val="0"/>
+              </a:spcAft>
+              <a:defRPr sz="1600" b="0">
                 <a:solidFill>
                   <a:srgbClr val="122C4E"/>
                 </a:solidFill>
@@ -21705,15 +22000,126 @@
               </a:defRPr>
             </a:pPr>
             <a:r>
-              <a:t>• 2. SEARCH: target이 없을 때 회전 탐색 command를 관찰한다.</a:t>
-            </a:r>
-          </a:p>
-          <a:p>
-            <a:pPr>
-              <a:spcAft>
-                <a:spcPts val="800"/>
-              </a:spcAft>
-              <a:defRPr sz="1900">
+              <a:t>우선 확인: header.frame_id와 TF tree를 확인한다.</a:t>
+            </a:r>
+            <a:br/>
+            <a:r>
+              <a:t>수정 후: ros2 launch agv_bringup agv_sim.launch.py --show-args</a:t>
+            </a:r>
+          </a:p>
+        </p:txBody>
+      </p:sp>
+      <p:sp>
+        <p:nvSpPr>
+          <p:cNvPr id="13" name="Rounded Rectangle 12"/>
+          <p:cNvSpPr/>
+          <p:nvPr/>
+        </p:nvSpPr>
+        <p:spPr>
+          <a:xfrm>
+            <a:off x="694944" y="4590288"/>
+            <a:ext cx="10972800" cy="1115568"/>
+          </a:xfrm>
+          <a:prstGeom prst="roundRect">
+            <a:avLst/>
+          </a:prstGeom>
+          <a:solidFill>
+            <a:srgbClr val="FFF7F4"/>
+          </a:solidFill>
+          <a:ln>
+            <a:solidFill>
+              <a:srgbClr val="EDBEB4"/>
+            </a:solidFill>
+          </a:ln>
+        </p:spPr>
+        <p:style>
+          <a:lnRef idx="1">
+            <a:schemeClr val="accent1"/>
+          </a:lnRef>
+          <a:fillRef idx="3">
+            <a:schemeClr val="accent1"/>
+          </a:fillRef>
+          <a:effectRef idx="2">
+            <a:schemeClr val="accent1"/>
+          </a:effectRef>
+          <a:fontRef idx="minor">
+            <a:schemeClr val="lt1"/>
+          </a:fontRef>
+        </p:style>
+        <p:txBody>
+          <a:bodyPr rtlCol="0" anchor="ctr"/>
+          <a:lstStyle/>
+          <a:p>
+            <a:pPr algn="ctr"/>
+          </a:p>
+        </p:txBody>
+      </p:sp>
+      <p:sp>
+        <p:nvSpPr>
+          <p:cNvPr id="14" name="TextBox 13"/>
+          <p:cNvSpPr txBox="1"/>
+          <p:nvPr/>
+        </p:nvSpPr>
+        <p:spPr>
+          <a:xfrm>
+            <a:off x="896112" y="4736592"/>
+            <a:ext cx="2926080" cy="274320"/>
+          </a:xfrm>
+          <a:prstGeom prst="rect">
+            <a:avLst/>
+          </a:prstGeom>
+          <a:noFill/>
+        </p:spPr>
+        <p:txBody>
+          <a:bodyPr wrap="square" lIns="73152" rIns="73152" tIns="36576" bIns="36576">
+            <a:spAutoFit/>
+          </a:bodyPr>
+          <a:lstStyle/>
+          <a:p>
+            <a:pPr algn="l">
+              <a:spcAft>
+                <a:spcPts val="0"/>
+              </a:spcAft>
+              <a:defRPr sz="1800" b="1">
+                <a:solidFill>
+                  <a:srgbClr val="BE3B3B"/>
+                </a:solidFill>
+                <a:latin typeface="Noto Sans CJK KR"/>
+              </a:defRPr>
+            </a:pPr>
+            <a:r>
+              <a:t>증상 3: 로봇이 불안정</a:t>
+            </a:r>
+          </a:p>
+        </p:txBody>
+      </p:sp>
+      <p:sp>
+        <p:nvSpPr>
+          <p:cNvPr id="15" name="TextBox 14"/>
+          <p:cNvSpPr txBox="1"/>
+          <p:nvPr/>
+        </p:nvSpPr>
+        <p:spPr>
+          <a:xfrm>
+            <a:off x="3794760" y="4718303"/>
+            <a:ext cx="7543800" cy="621792"/>
+          </a:xfrm>
+          <a:prstGeom prst="rect">
+            <a:avLst/>
+          </a:prstGeom>
+          <a:noFill/>
+        </p:spPr>
+        <p:txBody>
+          <a:bodyPr wrap="square" lIns="73152" rIns="73152" tIns="36576" bIns="36576">
+            <a:spAutoFit/>
+          </a:bodyPr>
+          <a:lstStyle/>
+          <a:p>
+            <a:pPr algn="l">
+              <a:spcAft>
+                <a:spcPts val="0"/>
+              </a:spcAft>
+              <a:defRPr sz="1600" b="0">
                 <a:solidFill>
                   <a:srgbClr val="122C4E"/>
                 </a:solidFill>
@@ -21721,39 +22127,54 @@
               </a:defRPr>
             </a:pPr>
             <a:r>
-              <a:t>• 3. APPROACH: detection 중심 오차가 angular command로 바뀌는지 확인한다.</a:t>
-            </a:r>
-          </a:p>
-          <a:p>
-            <a:pPr>
-              <a:spcAft>
-                <a:spcPts val="800"/>
-              </a:spcAft>
-              <a:defRPr sz="1900">
-                <a:solidFill>
-                  <a:srgbClr val="122C4E"/>
-                </a:solidFill>
-                <a:latin typeface="Noto Sans CJK KR"/>
-              </a:defRPr>
-            </a:pPr>
-            <a:r>
-              <a:t>• 4. AVOID/STOP: LiDAR threshold 안에서는 safety가 우선하는지 확인한다.</a:t>
-            </a:r>
-          </a:p>
-          <a:p>
-            <a:pPr>
-              <a:spcAft>
-                <a:spcPts val="800"/>
-              </a:spcAft>
-              <a:defRPr sz="1900">
-                <a:solidFill>
-                  <a:srgbClr val="122C4E"/>
-                </a:solidFill>
-                <a:latin typeface="Noto Sans CJK KR"/>
-              </a:defRPr>
-            </a:pPr>
-            <a:r>
-              <a:t>• 5. GOAL/STOP: 목표 도달 뒤 forward /cmd_vel이 0인지 확인한다.</a:t>
+              <a:t>우선 확인: physics collision·friction·inertia를 M07 순서로 점검한다.</a:t>
+            </a:r>
+            <a:br/>
+            <a:r>
+              <a:t>수정 후: ros2 launch agv_bringup agv_sim.launch.py --show-args</a:t>
+            </a:r>
+          </a:p>
+        </p:txBody>
+      </p:sp>
+      <p:sp>
+        <p:nvSpPr>
+          <p:cNvPr id="16" name="TextBox 15"/>
+          <p:cNvSpPr txBox="1"/>
+          <p:nvPr/>
+        </p:nvSpPr>
+        <p:spPr>
+          <a:xfrm>
+            <a:off x="822960" y="5779008"/>
+            <a:ext cx="10607040" cy="493776"/>
+          </a:xfrm>
+          <a:prstGeom prst="rect">
+            <a:avLst/>
+          </a:prstGeom>
+          <a:noFill/>
+        </p:spPr>
+        <p:txBody>
+          <a:bodyPr wrap="square" lIns="73152" rIns="73152" tIns="36576" bIns="36576">
+            <a:spAutoFit/>
+          </a:bodyPr>
+          <a:lstStyle/>
+          <a:p>
+            <a:pPr algn="ctr">
+              <a:spcAft>
+                <a:spcPts val="0"/>
+              </a:spcAft>
+              <a:defRPr sz="1500" b="1">
+                <a:solidFill>
+                  <a:srgbClr val="DB7E22"/>
+                </a:solidFill>
+                <a:latin typeface="Noto Sans CJK KR"/>
+              </a:defRPr>
+            </a:pPr>
+            <a:r>
+              <a:t>공통 순서: ① 현재 폴더 ② source ③ 파일 경로</a:t>
+            </a:r>
+            <a:br/>
+            <a:r>
+              <a:t>④ 이름/타입/단위 ⑤ build·source 후 재실행</a:t>
             </a:r>
           </a:p>
         </p:txBody>
@@ -21810,7 +22231,7 @@
               </a:defRPr>
             </a:pPr>
             <a:r>
-              <a:t>최종 기능 체크표</a:t>
+              <a:t>미니 실습: 값 하나를 바꾸고 결과를 비교한다</a:t>
             </a:r>
           </a:p>
         </p:txBody>
@@ -21849,7 +22270,7 @@
               </a:defRPr>
             </a:pPr>
             <a:r>
-              <a:t>통합 단계에서 놓치기 쉬운 실행·운영 조건을 정리합니다.</a:t>
+              <a:t>정상 결과를 만든 뒤에는 한 번에 하나의 값만 바꿉니다.</a:t>
             </a:r>
           </a:p>
         </p:txBody>
@@ -21985,7 +22406,7 @@
               </a:defRPr>
             </a:pPr>
             <a:r>
-              <a:t>현재 단계 통합 보강    |    현재 폴더 ~/agv_ws    |    현재 터미널</a:t>
+              <a:t>현재 단계 미니 실습    |    현재 폴더 ~/agv_ws    |    현재 터미널</a:t>
             </a:r>
           </a:p>
         </p:txBody>
@@ -21998,18 +22419,18 @@
         </p:nvSpPr>
         <p:spPr>
           <a:xfrm>
-            <a:off x="676656" y="1691640"/>
-            <a:ext cx="10972800" cy="4434840"/>
+            <a:off x="749808" y="1874519"/>
+            <a:ext cx="10652760" cy="1993392"/>
           </a:xfrm>
           <a:prstGeom prst="roundRect">
             <a:avLst/>
           </a:prstGeom>
           <a:solidFill>
-            <a:srgbClr val="F4F7FB"/>
+            <a:srgbClr val="FFF8EB"/>
           </a:solidFill>
           <a:ln>
             <a:solidFill>
-              <a:srgbClr val="D2DEEC"/>
+              <a:srgbClr val="ECC680"/>
             </a:solidFill>
           </a:ln>
         </p:spPr>
@@ -22028,10 +22449,23 @@
           </a:fontRef>
         </p:style>
         <p:txBody>
-          <a:bodyPr rtlCol="0" anchor="ctr"/>
-          <a:lstStyle/>
-          <a:p>
-            <a:pPr algn="ctr"/>
+          <a:bodyPr rtlCol="0" anchor="ctr" wrap="square" lIns="73152" rIns="73152" tIns="36576" bIns="36576"/>
+          <a:lstStyle/>
+          <a:p>
+            <a:pPr algn="ctr">
+              <a:spcAft>
+                <a:spcPts val="0"/>
+              </a:spcAft>
+              <a:defRPr sz="2300" b="1">
+                <a:solidFill>
+                  <a:srgbClr val="122C4E"/>
+                </a:solidFill>
+                <a:latin typeface="Noto Sans CJK KR"/>
+              </a:defRPr>
+            </a:pPr>
+            <a:r>
+              <a:t>완료 증거를 ①Gazebo ②RViz ③ros2 topic ④mission log ⑤rosbag으로 나누어 실제 제출 파일 목록을 작성한다.</a:t>
+            </a:r>
           </a:p>
         </p:txBody>
       </p:sp>
@@ -22043,8 +22477,8 @@
         </p:nvSpPr>
         <p:spPr>
           <a:xfrm>
-            <a:off x="914400" y="1993392"/>
-            <a:ext cx="10332720" cy="3749039"/>
+            <a:off x="877824" y="4590288"/>
+            <a:ext cx="10241280" cy="594360"/>
           </a:xfrm>
           <a:prstGeom prst="rect">
             <a:avLst/>
@@ -22052,88 +22486,24 @@
           <a:noFill/>
         </p:spPr>
         <p:txBody>
-          <a:bodyPr wrap="square" lIns="109728" rIns="109728">
+          <a:bodyPr wrap="square" lIns="73152" rIns="73152" tIns="36576" bIns="36576">
             <a:spAutoFit/>
           </a:bodyPr>
           <a:lstStyle/>
           <a:p>
-            <a:pPr>
-              <a:spcAft>
-                <a:spcPts val="800"/>
-              </a:spcAft>
-              <a:defRPr sz="1900">
-                <a:solidFill>
-                  <a:srgbClr val="122C4E"/>
-                </a:solidFill>
-                <a:latin typeface="Noto Sans CJK KR"/>
-              </a:defRPr>
-            </a:pPr>
-            <a:r>
-              <a:t>• Model/Physics: body·wheel·collision·inertia</a:t>
-            </a:r>
-          </a:p>
-          <a:p>
-            <a:pPr>
-              <a:spcAft>
-                <a:spcPts val="800"/>
-              </a:spcAft>
-              <a:defRPr sz="1900">
-                <a:solidFill>
-                  <a:srgbClr val="122C4E"/>
-                </a:solidFill>
-                <a:latin typeface="Noto Sans CJK KR"/>
-              </a:defRPr>
-            </a:pPr>
-            <a:r>
-              <a:t>• Drive/TF/Odom: /cmd_vel, /odom, frame tree</a:t>
-            </a:r>
-          </a:p>
-          <a:p>
-            <a:pPr>
-              <a:spcAft>
-                <a:spcPts val="800"/>
-              </a:spcAft>
-              <a:defRPr sz="1900">
-                <a:solidFill>
-                  <a:srgbClr val="122C4E"/>
-                </a:solidFill>
-                <a:latin typeface="Noto Sans CJK KR"/>
-              </a:defRPr>
-            </a:pPr>
-            <a:r>
-              <a:t>• Sensors: /camera/image_raw, /scan, /imu/data</a:t>
-            </a:r>
-          </a:p>
-          <a:p>
-            <a:pPr>
-              <a:spcAft>
-                <a:spcPts val="800"/>
-              </a:spcAft>
-              <a:defRPr sz="1900">
-                <a:solidFill>
-                  <a:srgbClr val="122C4E"/>
-                </a:solidFill>
-                <a:latin typeface="Noto Sans CJK KR"/>
-              </a:defRPr>
-            </a:pPr>
-            <a:r>
-              <a:t>• Autonomy: detection, safety priority, mission state</a:t>
-            </a:r>
-          </a:p>
-          <a:p>
-            <a:pPr>
-              <a:spcAft>
-                <a:spcPts val="800"/>
-              </a:spcAft>
-              <a:defRPr sz="1900">
-                <a:solidFill>
-                  <a:srgbClr val="122C4E"/>
-                </a:solidFill>
-                <a:latin typeface="Noto Sans CJK KR"/>
-              </a:defRPr>
-            </a:pPr>
-            <a:r>
-              <a:t>• Operations/Data: launch, YAML, rosbag2, README/checkpoint</a:t>
+            <a:pPr algn="ctr">
+              <a:spcAft>
+                <a:spcPts val="0"/>
+              </a:spcAft>
+              <a:defRPr sz="1900" b="1">
+                <a:solidFill>
+                  <a:srgbClr val="DB7E22"/>
+                </a:solidFill>
+                <a:latin typeface="Noto Sans CJK KR"/>
+              </a:defRPr>
+            </a:pPr>
+            <a:r>
+              <a:t>기록할 것: 바꾼 값(단위) · 기대한 변화 · 실제 출력/화면 · 원래 값으로 되돌린 결과</a:t>
             </a:r>
           </a:p>
         </p:txBody>
@@ -22523,7 +22893,7 @@
               </a:defRPr>
             </a:pPr>
             <a:r>
-              <a:t>Milestone 1~8 제출 증거</a:t>
+              <a:t>최종 미션 시나리오</a:t>
             </a:r>
           </a:p>
         </p:txBody>
@@ -22782,7 +23152,7 @@
               </a:defRPr>
             </a:pPr>
             <a:r>
-              <a:t>• 1 모델 TF, 2 World spawn, 3 Differential Drive, 4 bridge/RViz</a:t>
+              <a:t>• 1. START: launch와 sensor topic을 확인한다.</a:t>
             </a:r>
           </a:p>
           <a:p>
@@ -22798,7 +23168,7 @@
               </a:defRPr>
             </a:pPr>
             <a:r>
-              <a:t>• 5 Camera/LiDAR/IMU, 6 safety/perception, 7 FSM/PID, 8 launch/rosbag</a:t>
+              <a:t>• 2. SEARCH: target이 없을 때 회전 탐색 command를 관찰한다.</a:t>
             </a:r>
           </a:p>
           <a:p>
@@ -22814,7 +23184,39 @@
               </a:defRPr>
             </a:pPr>
             <a:r>
-              <a:t>• 각 milestone마다 command 결과와 정상 화면을 함께 저장한다.</a:t>
+              <a:t>• 3. APPROACH: detection 중심 오차가 angular command로 바뀌는지 확인한다.</a:t>
+            </a:r>
+          </a:p>
+          <a:p>
+            <a:pPr>
+              <a:spcAft>
+                <a:spcPts val="800"/>
+              </a:spcAft>
+              <a:defRPr sz="1900">
+                <a:solidFill>
+                  <a:srgbClr val="122C4E"/>
+                </a:solidFill>
+                <a:latin typeface="Noto Sans CJK KR"/>
+              </a:defRPr>
+            </a:pPr>
+            <a:r>
+              <a:t>• 4. AVOID/STOP: LiDAR threshold 안에서는 safety가 우선하는지 확인한다.</a:t>
+            </a:r>
+          </a:p>
+          <a:p>
+            <a:pPr>
+              <a:spcAft>
+                <a:spcPts val="800"/>
+              </a:spcAft>
+              <a:defRPr sz="1900">
+                <a:solidFill>
+                  <a:srgbClr val="122C4E"/>
+                </a:solidFill>
+                <a:latin typeface="Noto Sans CJK KR"/>
+              </a:defRPr>
+            </a:pPr>
+            <a:r>
+              <a:t>• 5. GOAL/STOP: 목표 도달 뒤 forward /cmd_vel이 0인지 확인한다.</a:t>
             </a:r>
           </a:p>
         </p:txBody>
@@ -22871,7 +23273,7 @@
               </a:defRPr>
             </a:pPr>
             <a:r>
-              <a:t>실패를 재현 가능하게 기록한다</a:t>
+              <a:t>최종 기능 체크표</a:t>
             </a:r>
           </a:p>
         </p:txBody>
@@ -23130,7 +23532,7 @@
               </a:defRPr>
             </a:pPr>
             <a:r>
-              <a:t>• topic: 이름·타입·publisher/subscriber 수</a:t>
+              <a:t>• Model/Physics: body·wheel·collision·inertia</a:t>
             </a:r>
           </a:p>
           <a:p>
@@ -23146,7 +23548,7 @@
               </a:defRPr>
             </a:pPr>
             <a:r>
-              <a:t>• TF: frame_id·parent/child·Fixed Frame</a:t>
+              <a:t>• Drive/TF/Odom: /cmd_vel, /odom, frame tree</a:t>
             </a:r>
           </a:p>
           <a:p>
@@ -23162,7 +23564,7 @@
               </a:defRPr>
             </a:pPr>
             <a:r>
-              <a:t>• bridge: 방향·Gazebo/ROS type</a:t>
+              <a:t>• Sensors: /camera/image_raw, /scan, /imu/data</a:t>
             </a:r>
           </a:p>
           <a:p>
@@ -23178,7 +23580,7 @@
               </a:defRPr>
             </a:pPr>
             <a:r>
-              <a:t>• physics: collision·friction·inertia</a:t>
+              <a:t>• Autonomy: detection, safety priority, mission state</a:t>
             </a:r>
           </a:p>
           <a:p>
@@ -23194,7 +23596,7 @@
               </a:defRPr>
             </a:pPr>
             <a:r>
-              <a:t>• launch: package share·YAML key·실행 순서</a:t>
+              <a:t>• Operations/Data: launch, YAML, rosbag2, README/checkpoint</a:t>
             </a:r>
           </a:p>
         </p:txBody>
@@ -23251,7 +23653,7 @@
               </a:defRPr>
             </a:pPr>
             <a:r>
-              <a:t>체크포인트를 저장하고 다음 모듈로 넘긴다</a:t>
+              <a:t>Milestone 1~8 제출 증거</a:t>
             </a:r>
           </a:p>
         </p:txBody>
@@ -23290,7 +23692,7 @@
               </a:defRPr>
             </a:pPr>
             <a:r>
-              <a:t>현재 Complete는 다음 Starter의 기준선입니다.</a:t>
+              <a:t>통합 단계에서 놓치기 쉬운 실행·운영 조건을 정리합니다.</a:t>
             </a:r>
           </a:p>
         </p:txBody>
@@ -23426,7 +23828,7 @@
               </a:defRPr>
             </a:pPr>
             <a:r>
-              <a:t>현재 단계 체크포인트    |    현재 폴더 ~/agv_ws    |    현재 터미널</a:t>
+              <a:t>현재 단계 통합 보강    |    현재 폴더 ~/agv_ws    |    현재 터미널</a:t>
             </a:r>
           </a:p>
         </p:txBody>
@@ -23439,8 +23841,8 @@
         </p:nvSpPr>
         <p:spPr>
           <a:xfrm>
-            <a:off x="685800" y="1737360"/>
-            <a:ext cx="10972800" cy="3611880"/>
+            <a:off x="676656" y="1691640"/>
+            <a:ext cx="10972800" cy="4434840"/>
           </a:xfrm>
           <a:prstGeom prst="roundRect">
             <a:avLst/>
@@ -23450,7 +23852,7 @@
           </a:solidFill>
           <a:ln>
             <a:solidFill>
-              <a:srgbClr val="D2DCE8"/>
+              <a:srgbClr val="D2DEEC"/>
             </a:solidFill>
           </a:ln>
         </p:spPr>
@@ -23484,8 +23886,8 @@
         </p:nvSpPr>
         <p:spPr>
           <a:xfrm>
-            <a:off x="896112" y="1993392"/>
-            <a:ext cx="10332720" cy="2971800"/>
+            <a:off x="914400" y="1993392"/>
+            <a:ext cx="10332720" cy="3749039"/>
           </a:xfrm>
           <a:prstGeom prst="rect">
             <a:avLst/>
@@ -23502,7 +23904,7 @@
               <a:spcAft>
                 <a:spcPts val="800"/>
               </a:spcAft>
-              <a:defRPr sz="1800">
+              <a:defRPr sz="1900">
                 <a:solidFill>
                   <a:srgbClr val="122C4E"/>
                 </a:solidFill>
@@ -23510,7 +23912,7 @@
               </a:defRPr>
             </a:pPr>
             <a:r>
-              <a:t>• □ 완료 화면: 한 launch 실행, RViz/Gazebo 확인, mission log, rosbag 기록을 제출 체크리스트로 남긴다.</a:t>
+              <a:t>• 1 모델 TF, 2 World spawn, 3 Differential Drive, 4 bridge/RViz</a:t>
             </a:r>
           </a:p>
           <a:p>
@@ -23518,7 +23920,7 @@
               <a:spcAft>
                 <a:spcPts val="800"/>
               </a:spcAft>
-              <a:defRPr sz="1800">
+              <a:defRPr sz="1900">
                 <a:solidFill>
                   <a:srgbClr val="122C4E"/>
                 </a:solidFill>
@@ -23526,7 +23928,7 @@
               </a:defRPr>
             </a:pPr>
             <a:r>
-              <a:t>• □ Complete 파일: blocks/F_integration/M22_final_project/complete/</a:t>
+              <a:t>• 5 Camera/LiDAR/IMU, 6 safety/perception, 7 FSM/PID, 8 launch/rosbag</a:t>
             </a:r>
           </a:p>
           <a:p>
@@ -23534,7 +23936,7 @@
               <a:spcAft>
                 <a:spcPts val="800"/>
               </a:spcAft>
-              <a:defRPr sz="1800">
+              <a:defRPr sz="1900">
                 <a:solidFill>
                   <a:srgbClr val="122C4E"/>
                 </a:solidFill>
@@ -23542,78 +23944,7 @@
               </a:defRPr>
             </a:pPr>
             <a:r>
-              <a:t>• □ 정상 로그·캡처: logs/validation.log, screenshots/validation_terminal.png</a:t>
-            </a:r>
-          </a:p>
-          <a:p>
-            <a:pPr>
-              <a:spcAft>
-                <a:spcPts val="800"/>
-              </a:spcAft>
-              <a:defRPr sz="1800">
-                <a:solidFill>
-                  <a:srgbClr val="122C4E"/>
-                </a:solidFill>
-                <a:latin typeface="Noto Sans CJK KR"/>
-              </a:defRPr>
-            </a:pPr>
-            <a:r>
-              <a:t>• □ 버전 식별: CHECKSUM_or_TAG.txt의 SHA-256 manifest</a:t>
-            </a:r>
-          </a:p>
-          <a:p>
-            <a:pPr>
-              <a:spcAft>
-                <a:spcPts val="800"/>
-              </a:spcAft>
-              <a:defRPr sz="1800">
-                <a:solidFill>
-                  <a:srgbClr val="122C4E"/>
-                </a:solidFill>
-                <a:latin typeface="Noto Sans CJK KR"/>
-              </a:defRPr>
-            </a:pPr>
-            <a:r>
-              <a:t>• □ 다음 시작 조건: 핵심 과정 완료 → SLAM/Nav2 확장</a:t>
-            </a:r>
-          </a:p>
-        </p:txBody>
-      </p:sp>
-      <p:sp>
-        <p:nvSpPr>
-          <p:cNvPr id="9" name="TextBox 8"/>
-          <p:cNvSpPr txBox="1"/>
-          <p:nvPr/>
-        </p:nvSpPr>
-        <p:spPr>
-          <a:xfrm>
-            <a:off x="868680" y="5596128"/>
-            <a:ext cx="10515600" cy="338328"/>
-          </a:xfrm>
-          <a:prstGeom prst="rect">
-            <a:avLst/>
-          </a:prstGeom>
-          <a:noFill/>
-        </p:spPr>
-        <p:txBody>
-          <a:bodyPr wrap="square" lIns="73152" rIns="73152" tIns="36576" bIns="36576">
-            <a:spAutoFit/>
-          </a:bodyPr>
-          <a:lstStyle/>
-          <a:p>
-            <a:pPr algn="ctr">
-              <a:spcAft>
-                <a:spcPts val="0"/>
-              </a:spcAft>
-              <a:defRPr sz="1700" b="1">
-                <a:solidFill>
-                  <a:srgbClr val="2A8B5A"/>
-                </a:solidFill>
-                <a:latin typeface="Noto Sans CJK KR"/>
-              </a:defRPr>
-            </a:pPr>
-            <a:r>
-              <a:t>다음 모듈을 시작하기 전, 이 슬라이드의 Complete와 다음 모듈의 Starter를 비교합니다.</a:t>
+              <a:t>• 각 milestone마다 command 결과와 정상 화면을 함께 저장한다.</a:t>
             </a:r>
           </a:p>
         </p:txBody>
@@ -23670,6 +24001,805 @@
               </a:defRPr>
             </a:pPr>
             <a:r>
+              <a:t>실패를 재현 가능하게 기록한다</a:t>
+            </a:r>
+          </a:p>
+        </p:txBody>
+      </p:sp>
+      <p:sp>
+        <p:nvSpPr>
+          <p:cNvPr id="3" name="TextBox 2"/>
+          <p:cNvSpPr txBox="1"/>
+          <p:nvPr/>
+        </p:nvSpPr>
+        <p:spPr>
+          <a:xfrm>
+            <a:off x="603504" y="859536"/>
+            <a:ext cx="10698480" cy="292608"/>
+          </a:xfrm>
+          <a:prstGeom prst="rect">
+            <a:avLst/>
+          </a:prstGeom>
+          <a:noFill/>
+        </p:spPr>
+        <p:txBody>
+          <a:bodyPr wrap="square" lIns="73152" rIns="73152" tIns="36576" bIns="36576">
+            <a:spAutoFit/>
+          </a:bodyPr>
+          <a:lstStyle/>
+          <a:p>
+            <a:pPr algn="l">
+              <a:spcAft>
+                <a:spcPts val="0"/>
+              </a:spcAft>
+              <a:defRPr sz="1700" b="0">
+                <a:solidFill>
+                  <a:srgbClr val="5C6672"/>
+                </a:solidFill>
+                <a:latin typeface="Noto Sans CJK KR"/>
+              </a:defRPr>
+            </a:pPr>
+            <a:r>
+              <a:t>통합 단계에서 놓치기 쉬운 실행·운영 조건을 정리합니다.</a:t>
+            </a:r>
+          </a:p>
+        </p:txBody>
+      </p:sp>
+      <p:sp>
+        <p:nvSpPr>
+          <p:cNvPr id="4" name="TextBox 3"/>
+          <p:cNvSpPr txBox="1"/>
+          <p:nvPr/>
+        </p:nvSpPr>
+        <p:spPr>
+          <a:xfrm>
+            <a:off x="530352" y="6510528"/>
+            <a:ext cx="7772400" cy="201168"/>
+          </a:xfrm>
+          <a:prstGeom prst="rect">
+            <a:avLst/>
+          </a:prstGeom>
+          <a:noFill/>
+        </p:spPr>
+        <p:txBody>
+          <a:bodyPr wrap="square" lIns="73152" rIns="73152" tIns="36576" bIns="36576">
+            <a:spAutoFit/>
+          </a:bodyPr>
+          <a:lstStyle/>
+          <a:p>
+            <a:pPr algn="l">
+              <a:spcAft>
+                <a:spcPts val="0"/>
+              </a:spcAft>
+              <a:defRPr sz="1000" b="0">
+                <a:solidFill>
+                  <a:srgbClr val="5C6672"/>
+                </a:solidFill>
+                <a:latin typeface="Noto Sans CJK KR"/>
+              </a:defRPr>
+            </a:pPr>
+            <a:r>
+              <a:t>ROS 2 Jazzy · Gazebo Harmonic · M22 · 따라 하기형 AGV 실습</a:t>
+            </a:r>
+          </a:p>
+        </p:txBody>
+      </p:sp>
+      <p:sp>
+        <p:nvSpPr>
+          <p:cNvPr id="5" name="TextBox 4"/>
+          <p:cNvSpPr txBox="1"/>
+          <p:nvPr/>
+        </p:nvSpPr>
+        <p:spPr>
+          <a:xfrm>
+            <a:off x="9144000" y="6510528"/>
+            <a:ext cx="2468880" cy="201168"/>
+          </a:xfrm>
+          <a:prstGeom prst="rect">
+            <a:avLst/>
+          </a:prstGeom>
+          <a:noFill/>
+        </p:spPr>
+        <p:txBody>
+          <a:bodyPr wrap="square" lIns="73152" rIns="73152" tIns="36576" bIns="36576">
+            <a:spAutoFit/>
+          </a:bodyPr>
+          <a:lstStyle/>
+          <a:p>
+            <a:pPr algn="r">
+              <a:spcAft>
+                <a:spcPts val="0"/>
+              </a:spcAft>
+              <a:defRPr sz="1000" b="0">
+                <a:solidFill>
+                  <a:srgbClr val="5C6672"/>
+                </a:solidFill>
+                <a:latin typeface="Noto Sans CJK KR"/>
+              </a:defRPr>
+            </a:pPr>
+            <a:r>
+              <a:t>명령·파일 경로는 슬라이드에서 복사 가능</a:t>
+            </a:r>
+          </a:p>
+        </p:txBody>
+      </p:sp>
+      <p:sp>
+        <p:nvSpPr>
+          <p:cNvPr id="6" name="Rectangle 5"/>
+          <p:cNvSpPr/>
+          <p:nvPr/>
+        </p:nvSpPr>
+        <p:spPr>
+          <a:xfrm>
+            <a:off x="566928" y="1188720"/>
+            <a:ext cx="11064240" cy="347472"/>
+          </a:xfrm>
+          <a:prstGeom prst="rect">
+            <a:avLst/>
+          </a:prstGeom>
+          <a:solidFill>
+            <a:srgbClr val="F4F7FB"/>
+          </a:solidFill>
+          <a:ln>
+            <a:solidFill>
+              <a:srgbClr val="F4F7FB"/>
+            </a:solidFill>
+          </a:ln>
+        </p:spPr>
+        <p:style>
+          <a:lnRef idx="1">
+            <a:schemeClr val="accent1"/>
+          </a:lnRef>
+          <a:fillRef idx="3">
+            <a:schemeClr val="accent1"/>
+          </a:fillRef>
+          <a:effectRef idx="2">
+            <a:schemeClr val="accent1"/>
+          </a:effectRef>
+          <a:fontRef idx="minor">
+            <a:schemeClr val="lt1"/>
+          </a:fontRef>
+        </p:style>
+        <p:txBody>
+          <a:bodyPr rtlCol="0" anchor="ctr" wrap="square" lIns="73152" rIns="73152" tIns="36576" bIns="36576"/>
+          <a:lstStyle/>
+          <a:p>
+            <a:pPr algn="l">
+              <a:spcAft>
+                <a:spcPts val="0"/>
+              </a:spcAft>
+              <a:defRPr sz="1300" b="1">
+                <a:solidFill>
+                  <a:srgbClr val="122C4E"/>
+                </a:solidFill>
+                <a:latin typeface="Noto Sans CJK KR"/>
+              </a:defRPr>
+            </a:pPr>
+            <a:r>
+              <a:t>현재 단계 통합 보강    |    현재 폴더 ~/agv_ws    |    현재 터미널</a:t>
+            </a:r>
+          </a:p>
+        </p:txBody>
+      </p:sp>
+      <p:sp>
+        <p:nvSpPr>
+          <p:cNvPr id="7" name="Rounded Rectangle 6"/>
+          <p:cNvSpPr/>
+          <p:nvPr/>
+        </p:nvSpPr>
+        <p:spPr>
+          <a:xfrm>
+            <a:off x="676656" y="1691640"/>
+            <a:ext cx="10972800" cy="4434840"/>
+          </a:xfrm>
+          <a:prstGeom prst="roundRect">
+            <a:avLst/>
+          </a:prstGeom>
+          <a:solidFill>
+            <a:srgbClr val="F4F7FB"/>
+          </a:solidFill>
+          <a:ln>
+            <a:solidFill>
+              <a:srgbClr val="D2DEEC"/>
+            </a:solidFill>
+          </a:ln>
+        </p:spPr>
+        <p:style>
+          <a:lnRef idx="1">
+            <a:schemeClr val="accent1"/>
+          </a:lnRef>
+          <a:fillRef idx="3">
+            <a:schemeClr val="accent1"/>
+          </a:fillRef>
+          <a:effectRef idx="2">
+            <a:schemeClr val="accent1"/>
+          </a:effectRef>
+          <a:fontRef idx="minor">
+            <a:schemeClr val="lt1"/>
+          </a:fontRef>
+        </p:style>
+        <p:txBody>
+          <a:bodyPr rtlCol="0" anchor="ctr"/>
+          <a:lstStyle/>
+          <a:p>
+            <a:pPr algn="ctr"/>
+          </a:p>
+        </p:txBody>
+      </p:sp>
+      <p:sp>
+        <p:nvSpPr>
+          <p:cNvPr id="8" name="TextBox 7"/>
+          <p:cNvSpPr txBox="1"/>
+          <p:nvPr/>
+        </p:nvSpPr>
+        <p:spPr>
+          <a:xfrm>
+            <a:off x="914400" y="1993392"/>
+            <a:ext cx="10332720" cy="3749039"/>
+          </a:xfrm>
+          <a:prstGeom prst="rect">
+            <a:avLst/>
+          </a:prstGeom>
+          <a:noFill/>
+        </p:spPr>
+        <p:txBody>
+          <a:bodyPr wrap="square" lIns="109728" rIns="109728">
+            <a:spAutoFit/>
+          </a:bodyPr>
+          <a:lstStyle/>
+          <a:p>
+            <a:pPr>
+              <a:spcAft>
+                <a:spcPts val="800"/>
+              </a:spcAft>
+              <a:defRPr sz="1900">
+                <a:solidFill>
+                  <a:srgbClr val="122C4E"/>
+                </a:solidFill>
+                <a:latin typeface="Noto Sans CJK KR"/>
+              </a:defRPr>
+            </a:pPr>
+            <a:r>
+              <a:t>• topic: 이름·타입·publisher/subscriber 수</a:t>
+            </a:r>
+          </a:p>
+          <a:p>
+            <a:pPr>
+              <a:spcAft>
+                <a:spcPts val="800"/>
+              </a:spcAft>
+              <a:defRPr sz="1900">
+                <a:solidFill>
+                  <a:srgbClr val="122C4E"/>
+                </a:solidFill>
+                <a:latin typeface="Noto Sans CJK KR"/>
+              </a:defRPr>
+            </a:pPr>
+            <a:r>
+              <a:t>• TF: frame_id·parent/child·Fixed Frame</a:t>
+            </a:r>
+          </a:p>
+          <a:p>
+            <a:pPr>
+              <a:spcAft>
+                <a:spcPts val="800"/>
+              </a:spcAft>
+              <a:defRPr sz="1900">
+                <a:solidFill>
+                  <a:srgbClr val="122C4E"/>
+                </a:solidFill>
+                <a:latin typeface="Noto Sans CJK KR"/>
+              </a:defRPr>
+            </a:pPr>
+            <a:r>
+              <a:t>• bridge: 방향·Gazebo/ROS type</a:t>
+            </a:r>
+          </a:p>
+          <a:p>
+            <a:pPr>
+              <a:spcAft>
+                <a:spcPts val="800"/>
+              </a:spcAft>
+              <a:defRPr sz="1900">
+                <a:solidFill>
+                  <a:srgbClr val="122C4E"/>
+                </a:solidFill>
+                <a:latin typeface="Noto Sans CJK KR"/>
+              </a:defRPr>
+            </a:pPr>
+            <a:r>
+              <a:t>• physics: collision·friction·inertia</a:t>
+            </a:r>
+          </a:p>
+          <a:p>
+            <a:pPr>
+              <a:spcAft>
+                <a:spcPts val="800"/>
+              </a:spcAft>
+              <a:defRPr sz="1900">
+                <a:solidFill>
+                  <a:srgbClr val="122C4E"/>
+                </a:solidFill>
+                <a:latin typeface="Noto Sans CJK KR"/>
+              </a:defRPr>
+            </a:pPr>
+            <a:r>
+              <a:t>• launch: package share·YAML key·실행 순서</a:t>
+            </a:r>
+          </a:p>
+        </p:txBody>
+      </p:sp>
+    </p:spTree>
+  </p:cSld>
+  <p:clrMapOvr>
+    <a:masterClrMapping/>
+  </p:clrMapOvr>
+</p:sld>
+</file>
+
+<file path=ppt/slides/slide44.xml><?xml version="1.0" encoding="utf-8"?>
+<p:sld xmlns:a="http://schemas.openxmlformats.org/drawingml/2006/main" xmlns:p="http://schemas.openxmlformats.org/presentationml/2006/main" xmlns:r="http://schemas.openxmlformats.org/officeDocument/2006/relationships">
+  <p:cSld>
+    <p:spTree>
+      <p:nvGrpSpPr>
+        <p:cNvPr id="1" name=""/>
+        <p:cNvGrpSpPr/>
+        <p:nvPr/>
+      </p:nvGrpSpPr>
+      <p:grpSpPr/>
+      <p:sp>
+        <p:nvSpPr>
+          <p:cNvPr id="2" name="TextBox 1"/>
+          <p:cNvSpPr txBox="1"/>
+          <p:nvPr/>
+        </p:nvSpPr>
+        <p:spPr>
+          <a:xfrm>
+            <a:off x="566928" y="347472"/>
+            <a:ext cx="10881360" cy="438912"/>
+          </a:xfrm>
+          <a:prstGeom prst="rect">
+            <a:avLst/>
+          </a:prstGeom>
+          <a:noFill/>
+        </p:spPr>
+        <p:txBody>
+          <a:bodyPr wrap="square" lIns="73152" rIns="73152" tIns="36576" bIns="36576">
+            <a:spAutoFit/>
+          </a:bodyPr>
+          <a:lstStyle/>
+          <a:p>
+            <a:pPr algn="l">
+              <a:spcAft>
+                <a:spcPts val="0"/>
+              </a:spcAft>
+              <a:defRPr sz="3200" b="1">
+                <a:solidFill>
+                  <a:srgbClr val="122C4E"/>
+                </a:solidFill>
+                <a:latin typeface="Noto Sans CJK KR"/>
+              </a:defRPr>
+            </a:pPr>
+            <a:r>
+              <a:t>체크포인트를 저장하고 다음 모듈로 넘긴다</a:t>
+            </a:r>
+          </a:p>
+        </p:txBody>
+      </p:sp>
+      <p:sp>
+        <p:nvSpPr>
+          <p:cNvPr id="3" name="TextBox 2"/>
+          <p:cNvSpPr txBox="1"/>
+          <p:nvPr/>
+        </p:nvSpPr>
+        <p:spPr>
+          <a:xfrm>
+            <a:off x="603504" y="859536"/>
+            <a:ext cx="10698480" cy="292608"/>
+          </a:xfrm>
+          <a:prstGeom prst="rect">
+            <a:avLst/>
+          </a:prstGeom>
+          <a:noFill/>
+        </p:spPr>
+        <p:txBody>
+          <a:bodyPr wrap="square" lIns="73152" rIns="73152" tIns="36576" bIns="36576">
+            <a:spAutoFit/>
+          </a:bodyPr>
+          <a:lstStyle/>
+          <a:p>
+            <a:pPr algn="l">
+              <a:spcAft>
+                <a:spcPts val="0"/>
+              </a:spcAft>
+              <a:defRPr sz="1700" b="0">
+                <a:solidFill>
+                  <a:srgbClr val="5C6672"/>
+                </a:solidFill>
+                <a:latin typeface="Noto Sans CJK KR"/>
+              </a:defRPr>
+            </a:pPr>
+            <a:r>
+              <a:t>현재 Complete는 다음 Starter의 기준선입니다.</a:t>
+            </a:r>
+          </a:p>
+        </p:txBody>
+      </p:sp>
+      <p:sp>
+        <p:nvSpPr>
+          <p:cNvPr id="4" name="TextBox 3"/>
+          <p:cNvSpPr txBox="1"/>
+          <p:nvPr/>
+        </p:nvSpPr>
+        <p:spPr>
+          <a:xfrm>
+            <a:off x="530352" y="6510528"/>
+            <a:ext cx="7772400" cy="201168"/>
+          </a:xfrm>
+          <a:prstGeom prst="rect">
+            <a:avLst/>
+          </a:prstGeom>
+          <a:noFill/>
+        </p:spPr>
+        <p:txBody>
+          <a:bodyPr wrap="square" lIns="73152" rIns="73152" tIns="36576" bIns="36576">
+            <a:spAutoFit/>
+          </a:bodyPr>
+          <a:lstStyle/>
+          <a:p>
+            <a:pPr algn="l">
+              <a:spcAft>
+                <a:spcPts val="0"/>
+              </a:spcAft>
+              <a:defRPr sz="1000" b="0">
+                <a:solidFill>
+                  <a:srgbClr val="5C6672"/>
+                </a:solidFill>
+                <a:latin typeface="Noto Sans CJK KR"/>
+              </a:defRPr>
+            </a:pPr>
+            <a:r>
+              <a:t>ROS 2 Jazzy · Gazebo Harmonic · M22 · 따라 하기형 AGV 실습</a:t>
+            </a:r>
+          </a:p>
+        </p:txBody>
+      </p:sp>
+      <p:sp>
+        <p:nvSpPr>
+          <p:cNvPr id="5" name="TextBox 4"/>
+          <p:cNvSpPr txBox="1"/>
+          <p:nvPr/>
+        </p:nvSpPr>
+        <p:spPr>
+          <a:xfrm>
+            <a:off x="9144000" y="6510528"/>
+            <a:ext cx="2468880" cy="201168"/>
+          </a:xfrm>
+          <a:prstGeom prst="rect">
+            <a:avLst/>
+          </a:prstGeom>
+          <a:noFill/>
+        </p:spPr>
+        <p:txBody>
+          <a:bodyPr wrap="square" lIns="73152" rIns="73152" tIns="36576" bIns="36576">
+            <a:spAutoFit/>
+          </a:bodyPr>
+          <a:lstStyle/>
+          <a:p>
+            <a:pPr algn="r">
+              <a:spcAft>
+                <a:spcPts val="0"/>
+              </a:spcAft>
+              <a:defRPr sz="1000" b="0">
+                <a:solidFill>
+                  <a:srgbClr val="5C6672"/>
+                </a:solidFill>
+                <a:latin typeface="Noto Sans CJK KR"/>
+              </a:defRPr>
+            </a:pPr>
+            <a:r>
+              <a:t>명령·파일 경로는 슬라이드에서 복사 가능</a:t>
+            </a:r>
+          </a:p>
+        </p:txBody>
+      </p:sp>
+      <p:sp>
+        <p:nvSpPr>
+          <p:cNvPr id="6" name="Rectangle 5"/>
+          <p:cNvSpPr/>
+          <p:nvPr/>
+        </p:nvSpPr>
+        <p:spPr>
+          <a:xfrm>
+            <a:off x="566928" y="1188720"/>
+            <a:ext cx="11064240" cy="347472"/>
+          </a:xfrm>
+          <a:prstGeom prst="rect">
+            <a:avLst/>
+          </a:prstGeom>
+          <a:solidFill>
+            <a:srgbClr val="F4F7FB"/>
+          </a:solidFill>
+          <a:ln>
+            <a:solidFill>
+              <a:srgbClr val="F4F7FB"/>
+            </a:solidFill>
+          </a:ln>
+        </p:spPr>
+        <p:style>
+          <a:lnRef idx="1">
+            <a:schemeClr val="accent1"/>
+          </a:lnRef>
+          <a:fillRef idx="3">
+            <a:schemeClr val="accent1"/>
+          </a:fillRef>
+          <a:effectRef idx="2">
+            <a:schemeClr val="accent1"/>
+          </a:effectRef>
+          <a:fontRef idx="minor">
+            <a:schemeClr val="lt1"/>
+          </a:fontRef>
+        </p:style>
+        <p:txBody>
+          <a:bodyPr rtlCol="0" anchor="ctr" wrap="square" lIns="73152" rIns="73152" tIns="36576" bIns="36576"/>
+          <a:lstStyle/>
+          <a:p>
+            <a:pPr algn="l">
+              <a:spcAft>
+                <a:spcPts val="0"/>
+              </a:spcAft>
+              <a:defRPr sz="1300" b="1">
+                <a:solidFill>
+                  <a:srgbClr val="122C4E"/>
+                </a:solidFill>
+                <a:latin typeface="Noto Sans CJK KR"/>
+              </a:defRPr>
+            </a:pPr>
+            <a:r>
+              <a:t>현재 단계 체크포인트    |    현재 폴더 ~/agv_ws    |    현재 터미널</a:t>
+            </a:r>
+          </a:p>
+        </p:txBody>
+      </p:sp>
+      <p:sp>
+        <p:nvSpPr>
+          <p:cNvPr id="7" name="Rounded Rectangle 6"/>
+          <p:cNvSpPr/>
+          <p:nvPr/>
+        </p:nvSpPr>
+        <p:spPr>
+          <a:xfrm>
+            <a:off x="685800" y="1737360"/>
+            <a:ext cx="10972800" cy="3611880"/>
+          </a:xfrm>
+          <a:prstGeom prst="roundRect">
+            <a:avLst/>
+          </a:prstGeom>
+          <a:solidFill>
+            <a:srgbClr val="F4F7FB"/>
+          </a:solidFill>
+          <a:ln>
+            <a:solidFill>
+              <a:srgbClr val="D2DCE8"/>
+            </a:solidFill>
+          </a:ln>
+        </p:spPr>
+        <p:style>
+          <a:lnRef idx="1">
+            <a:schemeClr val="accent1"/>
+          </a:lnRef>
+          <a:fillRef idx="3">
+            <a:schemeClr val="accent1"/>
+          </a:fillRef>
+          <a:effectRef idx="2">
+            <a:schemeClr val="accent1"/>
+          </a:effectRef>
+          <a:fontRef idx="minor">
+            <a:schemeClr val="lt1"/>
+          </a:fontRef>
+        </p:style>
+        <p:txBody>
+          <a:bodyPr rtlCol="0" anchor="ctr"/>
+          <a:lstStyle/>
+          <a:p>
+            <a:pPr algn="ctr"/>
+          </a:p>
+        </p:txBody>
+      </p:sp>
+      <p:sp>
+        <p:nvSpPr>
+          <p:cNvPr id="8" name="TextBox 7"/>
+          <p:cNvSpPr txBox="1"/>
+          <p:nvPr/>
+        </p:nvSpPr>
+        <p:spPr>
+          <a:xfrm>
+            <a:off x="896112" y="1993392"/>
+            <a:ext cx="10332720" cy="2971800"/>
+          </a:xfrm>
+          <a:prstGeom prst="rect">
+            <a:avLst/>
+          </a:prstGeom>
+          <a:noFill/>
+        </p:spPr>
+        <p:txBody>
+          <a:bodyPr wrap="square" lIns="109728" rIns="109728">
+            <a:spAutoFit/>
+          </a:bodyPr>
+          <a:lstStyle/>
+          <a:p>
+            <a:pPr>
+              <a:spcAft>
+                <a:spcPts val="800"/>
+              </a:spcAft>
+              <a:defRPr sz="1800">
+                <a:solidFill>
+                  <a:srgbClr val="122C4E"/>
+                </a:solidFill>
+                <a:latin typeface="Noto Sans CJK KR"/>
+              </a:defRPr>
+            </a:pPr>
+            <a:r>
+              <a:t>• □ 완료 화면: 한 launch 실행, RViz/Gazebo 확인, mission log, rosbag 기록을 제출 체크리스트로 남긴다.</a:t>
+            </a:r>
+          </a:p>
+          <a:p>
+            <a:pPr>
+              <a:spcAft>
+                <a:spcPts val="800"/>
+              </a:spcAft>
+              <a:defRPr sz="1800">
+                <a:solidFill>
+                  <a:srgbClr val="122C4E"/>
+                </a:solidFill>
+                <a:latin typeface="Noto Sans CJK KR"/>
+              </a:defRPr>
+            </a:pPr>
+            <a:r>
+              <a:t>• □ Complete 파일: blocks/F_integration/M22_final_project/complete/</a:t>
+            </a:r>
+          </a:p>
+          <a:p>
+            <a:pPr>
+              <a:spcAft>
+                <a:spcPts val="800"/>
+              </a:spcAft>
+              <a:defRPr sz="1800">
+                <a:solidFill>
+                  <a:srgbClr val="122C4E"/>
+                </a:solidFill>
+                <a:latin typeface="Noto Sans CJK KR"/>
+              </a:defRPr>
+            </a:pPr>
+            <a:r>
+              <a:t>• □ 정상 로그·캡처: logs/validation.log, screenshots/validation_terminal.png</a:t>
+            </a:r>
+          </a:p>
+          <a:p>
+            <a:pPr>
+              <a:spcAft>
+                <a:spcPts val="800"/>
+              </a:spcAft>
+              <a:defRPr sz="1800">
+                <a:solidFill>
+                  <a:srgbClr val="122C4E"/>
+                </a:solidFill>
+                <a:latin typeface="Noto Sans CJK KR"/>
+              </a:defRPr>
+            </a:pPr>
+            <a:r>
+              <a:t>• □ 버전 식별: CHECKSUM_or_TAG.txt의 SHA-256 manifest</a:t>
+            </a:r>
+          </a:p>
+          <a:p>
+            <a:pPr>
+              <a:spcAft>
+                <a:spcPts val="800"/>
+              </a:spcAft>
+              <a:defRPr sz="1800">
+                <a:solidFill>
+                  <a:srgbClr val="122C4E"/>
+                </a:solidFill>
+                <a:latin typeface="Noto Sans CJK KR"/>
+              </a:defRPr>
+            </a:pPr>
+            <a:r>
+              <a:t>• □ 다음 시작 조건: 핵심 과정 완료 → SLAM/Nav2 확장</a:t>
+            </a:r>
+          </a:p>
+        </p:txBody>
+      </p:sp>
+      <p:sp>
+        <p:nvSpPr>
+          <p:cNvPr id="9" name="TextBox 8"/>
+          <p:cNvSpPr txBox="1"/>
+          <p:nvPr/>
+        </p:nvSpPr>
+        <p:spPr>
+          <a:xfrm>
+            <a:off x="868680" y="5596128"/>
+            <a:ext cx="10515600" cy="338328"/>
+          </a:xfrm>
+          <a:prstGeom prst="rect">
+            <a:avLst/>
+          </a:prstGeom>
+          <a:noFill/>
+        </p:spPr>
+        <p:txBody>
+          <a:bodyPr wrap="square" lIns="73152" rIns="73152" tIns="36576" bIns="36576">
+            <a:spAutoFit/>
+          </a:bodyPr>
+          <a:lstStyle/>
+          <a:p>
+            <a:pPr algn="ctr">
+              <a:spcAft>
+                <a:spcPts val="0"/>
+              </a:spcAft>
+              <a:defRPr sz="1700" b="1">
+                <a:solidFill>
+                  <a:srgbClr val="2A8B5A"/>
+                </a:solidFill>
+                <a:latin typeface="Noto Sans CJK KR"/>
+              </a:defRPr>
+            </a:pPr>
+            <a:r>
+              <a:t>다음 모듈을 시작하기 전, 이 슬라이드의 Complete와 다음 모듈의 Starter를 비교합니다.</a:t>
+            </a:r>
+          </a:p>
+        </p:txBody>
+      </p:sp>
+    </p:spTree>
+  </p:cSld>
+  <p:clrMapOvr>
+    <a:masterClrMapping/>
+  </p:clrMapOvr>
+</p:sld>
+</file>
+
+<file path=ppt/slides/slide45.xml><?xml version="1.0" encoding="utf-8"?>
+<p:sld xmlns:a="http://schemas.openxmlformats.org/drawingml/2006/main" xmlns:p="http://schemas.openxmlformats.org/presentationml/2006/main" xmlns:r="http://schemas.openxmlformats.org/officeDocument/2006/relationships">
+  <p:cSld>
+    <p:spTree>
+      <p:nvGrpSpPr>
+        <p:cNvPr id="1" name=""/>
+        <p:cNvGrpSpPr/>
+        <p:nvPr/>
+      </p:nvGrpSpPr>
+      <p:grpSpPr/>
+      <p:sp>
+        <p:nvSpPr>
+          <p:cNvPr id="2" name="TextBox 1"/>
+          <p:cNvSpPr txBox="1"/>
+          <p:nvPr/>
+        </p:nvSpPr>
+        <p:spPr>
+          <a:xfrm>
+            <a:off x="566928" y="347472"/>
+            <a:ext cx="10881360" cy="438912"/>
+          </a:xfrm>
+          <a:prstGeom prst="rect">
+            <a:avLst/>
+          </a:prstGeom>
+          <a:noFill/>
+        </p:spPr>
+        <p:txBody>
+          <a:bodyPr wrap="square" lIns="73152" rIns="73152" tIns="36576" bIns="36576">
+            <a:spAutoFit/>
+          </a:bodyPr>
+          <a:lstStyle/>
+          <a:p>
+            <a:pPr algn="l">
+              <a:spcAft>
+                <a:spcPts val="0"/>
+              </a:spcAft>
+              <a:defRPr sz="3200" b="1">
+                <a:solidFill>
+                  <a:srgbClr val="122C4E"/>
+                </a:solidFill>
+                <a:latin typeface="Noto Sans CJK KR"/>
+              </a:defRPr>
+            </a:pPr>
+            <a:r>
               <a:t>공식 참고 자료</a:t>
             </a:r>
           </a:p>
@@ -23845,7 +24975,7 @@
         </p:nvSpPr>
         <p:spPr>
           <a:xfrm>
-            <a:off x="914400" y="1810512"/>
+            <a:off x="914400" y="1773936"/>
             <a:ext cx="3840480" cy="256032"/>
           </a:xfrm>
           <a:prstGeom prst="rect">
@@ -23884,8 +25014,8 @@
         </p:nvSpPr>
         <p:spPr>
           <a:xfrm>
-            <a:off x="914400" y="2121408"/>
-            <a:ext cx="9966960" cy="256032"/>
+            <a:off x="914400" y="2048255"/>
+            <a:ext cx="9966960" cy="475488"/>
           </a:xfrm>
           <a:prstGeom prst="rect">
             <a:avLst/>
@@ -23902,7 +25032,7 @@
               <a:spcAft>
                 <a:spcPts val="0"/>
               </a:spcAft>
-              <a:defRPr sz="1200" b="0">
+              <a:defRPr sz="1000" b="0">
                 <a:solidFill>
                   <a:srgbClr val="225B9B"/>
                 </a:solidFill>
@@ -23923,7 +25053,7 @@
         </p:nvSpPr>
         <p:spPr>
           <a:xfrm>
-            <a:off x="914400" y="2816352"/>
+            <a:off x="914400" y="2852928"/>
             <a:ext cx="3840480" cy="256032"/>
           </a:xfrm>
           <a:prstGeom prst="rect">
@@ -23963,7 +25093,7 @@
         <p:spPr>
           <a:xfrm>
             <a:off x="914400" y="3127248"/>
-            <a:ext cx="9966960" cy="256032"/>
+            <a:ext cx="9966960" cy="475488"/>
           </a:xfrm>
           <a:prstGeom prst="rect">
             <a:avLst/>
@@ -23980,7 +25110,7 @@
               <a:spcAft>
                 <a:spcPts val="0"/>
               </a:spcAft>
-              <a:defRPr sz="1200" b="0">
+              <a:defRPr sz="1000" b="0">
                 <a:solidFill>
                   <a:srgbClr val="225B9B"/>
                 </a:solidFill>
@@ -24001,7 +25131,7 @@
         </p:nvSpPr>
         <p:spPr>
           <a:xfrm>
-            <a:off x="914400" y="3822191"/>
+            <a:off x="914400" y="3931920"/>
             <a:ext cx="3840480" cy="256032"/>
           </a:xfrm>
           <a:prstGeom prst="rect">
@@ -24040,8 +25170,8 @@
         </p:nvSpPr>
         <p:spPr>
           <a:xfrm>
-            <a:off x="914400" y="4133087"/>
-            <a:ext cx="9966960" cy="256032"/>
+            <a:off x="914400" y="4206240"/>
+            <a:ext cx="9966960" cy="475488"/>
           </a:xfrm>
           <a:prstGeom prst="rect">
             <a:avLst/>
@@ -24058,7 +25188,7 @@
               <a:spcAft>
                 <a:spcPts val="0"/>
               </a:spcAft>
-              <a:defRPr sz="1200" b="0">
+              <a:defRPr sz="1000" b="0">
                 <a:solidFill>
                   <a:srgbClr val="225B9B"/>
                 </a:solidFill>
@@ -24079,7 +25209,7 @@
         </p:nvSpPr>
         <p:spPr>
           <a:xfrm>
-            <a:off x="914400" y="4828032"/>
+            <a:off x="914400" y="5010912"/>
             <a:ext cx="3840480" cy="256032"/>
           </a:xfrm>
           <a:prstGeom prst="rect">
@@ -24118,8 +25248,8 @@
         </p:nvSpPr>
         <p:spPr>
           <a:xfrm>
-            <a:off x="914400" y="5138928"/>
-            <a:ext cx="9966960" cy="256032"/>
+            <a:off x="914400" y="5285232"/>
+            <a:ext cx="9966960" cy="475488"/>
           </a:xfrm>
           <a:prstGeom prst="rect">
             <a:avLst/>
@@ -24136,7 +25266,7 @@
               <a:spcAft>
                 <a:spcPts val="0"/>
               </a:spcAft>
-              <a:defRPr sz="1200" b="0">
+              <a:defRPr sz="1000" b="0">
                 <a:solidFill>
                   <a:srgbClr val="225B9B"/>
                 </a:solidFill>

--- a/blocks/F_integration/M22_final_project/M22_Final_Project_가상_AGV_자율_미션.pptx
+++ b/blocks/F_integration/M22_final_project/M22_Final_Project_가상_AGV_자율_미션.pptx
@@ -50,6 +50,10 @@
     <p:sldId id="298" r:id="rId50"/>
     <p:sldId id="299" r:id="rId51"/>
     <p:sldId id="300" r:id="rId52"/>
+    <p:sldId id="301" r:id="rId53"/>
+    <p:sldId id="302" r:id="rId54"/>
+    <p:sldId id="303" r:id="rId55"/>
+    <p:sldId id="304" r:id="rId56"/>
   </p:sldIdLst>
   <p:sldSz cx="12191999" cy="6858000" type="screen4x3"/>
   <p:notesSz cx="6858000" cy="9144000"/>
@@ -636,12 +640,12 @@
           <a:lstStyle/>
           <a:p>
             <a:r>
-              <a:t>[설명] ~/agv_ws/src/agv_bringup/launch/agv_sim.launch.py의 전체 파일을 1/3 구간으로 작성한다.</a:t>
-            </a:r>
-          </a:p>
-          <a:p>
-            <a:r>
-              <a:t>[실행] nano ~/agv_ws/src/agv_bringup/launch/agv_sim.launch.py</a:t>
+              <a:t>[설명] ~/ros2_curri/agv_ws/src/agv_bringup/launch/agv_sim.launch.py의 전체 파일을 1/4 구간으로 작성한다.</a:t>
+            </a:r>
+          </a:p>
+          <a:p>
+            <a:r>
+              <a:t>[실행] nano ~/ros2_curri/agv_ws/src/agv_bringup/launch/agv_sim.launch.py</a:t>
             </a:r>
           </a:p>
           <a:p>
@@ -726,12 +730,12 @@
           <a:lstStyle/>
           <a:p>
             <a:r>
-              <a:t>[설명] ~/agv_ws/src/agv_bringup/launch/agv_sim.launch.py의 전체 파일을 2/3 구간으로 작성한다.</a:t>
-            </a:r>
-          </a:p>
-          <a:p>
-            <a:r>
-              <a:t>[실행] nano ~/agv_ws/src/agv_bringup/launch/agv_sim.launch.py</a:t>
+              <a:t>[설명] ~/ros2_curri/agv_ws/src/agv_bringup/launch/agv_sim.launch.py의 전체 파일을 2/4 구간으로 작성한다.</a:t>
+            </a:r>
+          </a:p>
+          <a:p>
+            <a:r>
+              <a:t>[실행] nano ~/ros2_curri/agv_ws/src/agv_bringup/launch/agv_sim.launch.py</a:t>
             </a:r>
           </a:p>
           <a:p>
@@ -816,12 +820,12 @@
           <a:lstStyle/>
           <a:p>
             <a:r>
-              <a:t>[설명] ~/agv_ws/src/agv_bringup/launch/agv_sim.launch.py의 전체 파일을 3/3 구간으로 작성한다.</a:t>
-            </a:r>
-          </a:p>
-          <a:p>
-            <a:r>
-              <a:t>[실행] nano ~/agv_ws/src/agv_bringup/launch/agv_sim.launch.py</a:t>
+              <a:t>[설명] ~/ros2_curri/agv_ws/src/agv_bringup/launch/agv_sim.launch.py의 전체 파일을 3/4 구간으로 작성한다.</a:t>
+            </a:r>
+          </a:p>
+          <a:p>
+            <a:r>
+              <a:t>[실행] nano ~/ros2_curri/agv_ws/src/agv_bringup/launch/agv_sim.launch.py</a:t>
             </a:r>
           </a:p>
           <a:p>
@@ -906,12 +910,12 @@
           <a:lstStyle/>
           <a:p>
             <a:r>
-              <a:t>[설명] ~/agv_ws/src/agv_bringup/config/mission.yaml의 전체 파일을 1/1 구간으로 작성한다.</a:t>
-            </a:r>
-          </a:p>
-          <a:p>
-            <a:r>
-              <a:t>[실행] nano ~/agv_ws/src/agv_bringup/config/mission.yaml</a:t>
+              <a:t>[설명] ~/ros2_curri/agv_ws/src/agv_bringup/launch/agv_sim.launch.py의 전체 파일을 4/4 구간으로 작성한다.</a:t>
+            </a:r>
+          </a:p>
+          <a:p>
+            <a:r>
+              <a:t>[실행] nano ~/ros2_curri/agv_ws/src/agv_bringup/launch/agv_sim.launch.py</a:t>
             </a:r>
           </a:p>
           <a:p>
@@ -996,12 +1000,12 @@
           <a:lstStyle/>
           <a:p>
             <a:r>
-              <a:t>[설명] ~/agv_ws/src/agv_gazebo/worlds/warehouse.sdf의 전체 파일을 1/11 구간으로 작성한다.</a:t>
-            </a:r>
-          </a:p>
-          <a:p>
-            <a:r>
-              <a:t>[실행] nano ~/agv_ws/src/agv_gazebo/worlds/warehouse.sdf</a:t>
+              <a:t>[설명] ~/ros2_curri/agv_ws/src/agv_bringup/config/mission.yaml의 전체 파일을 1/2 구간으로 작성한다.</a:t>
+            </a:r>
+          </a:p>
+          <a:p>
+            <a:r>
+              <a:t>[실행] nano ~/ros2_curri/agv_ws/src/agv_bringup/config/mission.yaml</a:t>
             </a:r>
           </a:p>
           <a:p>
@@ -1086,12 +1090,12 @@
           <a:lstStyle/>
           <a:p>
             <a:r>
-              <a:t>[설명] ~/agv_ws/src/agv_gazebo/worlds/warehouse.sdf의 전체 파일을 2/11 구간으로 작성한다.</a:t>
-            </a:r>
-          </a:p>
-          <a:p>
-            <a:r>
-              <a:t>[실행] nano ~/agv_ws/src/agv_gazebo/worlds/warehouse.sdf</a:t>
+              <a:t>[설명] ~/ros2_curri/agv_ws/src/agv_bringup/config/mission.yaml의 전체 파일을 2/2 구간으로 작성한다.</a:t>
+            </a:r>
+          </a:p>
+          <a:p>
+            <a:r>
+              <a:t>[실행] nano ~/ros2_curri/agv_ws/src/agv_bringup/config/mission.yaml</a:t>
             </a:r>
           </a:p>
           <a:p>
@@ -1176,12 +1180,12 @@
           <a:lstStyle/>
           <a:p>
             <a:r>
-              <a:t>[설명] ~/agv_ws/src/agv_gazebo/worlds/warehouse.sdf의 전체 파일을 3/11 구간으로 작성한다.</a:t>
-            </a:r>
-          </a:p>
-          <a:p>
-            <a:r>
-              <a:t>[실행] nano ~/agv_ws/src/agv_gazebo/worlds/warehouse.sdf</a:t>
+              <a:t>[설명] ~/ros2_curri/agv_ws/src/agv_gazebo/worlds/warehouse.sdf의 전체 파일을 1/11 구간으로 작성한다.</a:t>
+            </a:r>
+          </a:p>
+          <a:p>
+            <a:r>
+              <a:t>[실행] nano ~/ros2_curri/agv_ws/src/agv_gazebo/worlds/warehouse.sdf</a:t>
             </a:r>
           </a:p>
           <a:p>
@@ -1266,12 +1270,12 @@
           <a:lstStyle/>
           <a:p>
             <a:r>
-              <a:t>[설명] ~/agv_ws/src/agv_gazebo/worlds/warehouse.sdf의 전체 파일을 4/11 구간으로 작성한다.</a:t>
-            </a:r>
-          </a:p>
-          <a:p>
-            <a:r>
-              <a:t>[실행] nano ~/agv_ws/src/agv_gazebo/worlds/warehouse.sdf</a:t>
+              <a:t>[설명] ~/ros2_curri/agv_ws/src/agv_gazebo/worlds/warehouse.sdf의 전체 파일을 2/11 구간으로 작성한다.</a:t>
+            </a:r>
+          </a:p>
+          <a:p>
+            <a:r>
+              <a:t>[실행] nano ~/ros2_curri/agv_ws/src/agv_gazebo/worlds/warehouse.sdf</a:t>
             </a:r>
           </a:p>
           <a:p>
@@ -1356,12 +1360,12 @@
           <a:lstStyle/>
           <a:p>
             <a:r>
-              <a:t>[설명] ~/agv_ws/src/agv_gazebo/worlds/warehouse.sdf의 전체 파일을 5/11 구간으로 작성한다.</a:t>
-            </a:r>
-          </a:p>
-          <a:p>
-            <a:r>
-              <a:t>[실행] nano ~/agv_ws/src/agv_gazebo/worlds/warehouse.sdf</a:t>
+              <a:t>[설명] ~/ros2_curri/agv_ws/src/agv_gazebo/worlds/warehouse.sdf의 전체 파일을 3/11 구간으로 작성한다.</a:t>
+            </a:r>
+          </a:p>
+          <a:p>
+            <a:r>
+              <a:t>[실행] nano ~/ros2_curri/agv_ws/src/agv_gazebo/worlds/warehouse.sdf</a:t>
             </a:r>
           </a:p>
           <a:p>
@@ -1446,12 +1450,12 @@
           <a:lstStyle/>
           <a:p>
             <a:r>
-              <a:t>[설명] ~/agv_ws/src/agv_gazebo/worlds/warehouse.sdf의 전체 파일을 6/11 구간으로 작성한다.</a:t>
-            </a:r>
-          </a:p>
-          <a:p>
-            <a:r>
-              <a:t>[실행] nano ~/agv_ws/src/agv_gazebo/worlds/warehouse.sdf</a:t>
+              <a:t>[설명] ~/ros2_curri/agv_ws/src/agv_gazebo/worlds/warehouse.sdf의 전체 파일을 4/11 구간으로 작성한다.</a:t>
+            </a:r>
+          </a:p>
+          <a:p>
+            <a:r>
+              <a:t>[실행] nano ~/ros2_curri/agv_ws/src/agv_gazebo/worlds/warehouse.sdf</a:t>
             </a:r>
           </a:p>
           <a:p>
@@ -1626,12 +1630,12 @@
           <a:lstStyle/>
           <a:p>
             <a:r>
-              <a:t>[설명] ~/agv_ws/src/agv_gazebo/worlds/warehouse.sdf의 전체 파일을 7/11 구간으로 작성한다.</a:t>
-            </a:r>
-          </a:p>
-          <a:p>
-            <a:r>
-              <a:t>[실행] nano ~/agv_ws/src/agv_gazebo/worlds/warehouse.sdf</a:t>
+              <a:t>[설명] ~/ros2_curri/agv_ws/src/agv_gazebo/worlds/warehouse.sdf의 전체 파일을 5/11 구간으로 작성한다.</a:t>
+            </a:r>
+          </a:p>
+          <a:p>
+            <a:r>
+              <a:t>[실행] nano ~/ros2_curri/agv_ws/src/agv_gazebo/worlds/warehouse.sdf</a:t>
             </a:r>
           </a:p>
           <a:p>
@@ -1716,12 +1720,12 @@
           <a:lstStyle/>
           <a:p>
             <a:r>
-              <a:t>[설명] ~/agv_ws/src/agv_gazebo/worlds/warehouse.sdf의 전체 파일을 8/11 구간으로 작성한다.</a:t>
-            </a:r>
-          </a:p>
-          <a:p>
-            <a:r>
-              <a:t>[실행] nano ~/agv_ws/src/agv_gazebo/worlds/warehouse.sdf</a:t>
+              <a:t>[설명] ~/ros2_curri/agv_ws/src/agv_gazebo/worlds/warehouse.sdf의 전체 파일을 6/11 구간으로 작성한다.</a:t>
+            </a:r>
+          </a:p>
+          <a:p>
+            <a:r>
+              <a:t>[실행] nano ~/ros2_curri/agv_ws/src/agv_gazebo/worlds/warehouse.sdf</a:t>
             </a:r>
           </a:p>
           <a:p>
@@ -1806,12 +1810,12 @@
           <a:lstStyle/>
           <a:p>
             <a:r>
-              <a:t>[설명] ~/agv_ws/src/agv_gazebo/worlds/warehouse.sdf의 전체 파일을 9/11 구간으로 작성한다.</a:t>
-            </a:r>
-          </a:p>
-          <a:p>
-            <a:r>
-              <a:t>[실행] nano ~/agv_ws/src/agv_gazebo/worlds/warehouse.sdf</a:t>
+              <a:t>[설명] ~/ros2_curri/agv_ws/src/agv_gazebo/worlds/warehouse.sdf의 전체 파일을 7/11 구간으로 작성한다.</a:t>
+            </a:r>
+          </a:p>
+          <a:p>
+            <a:r>
+              <a:t>[실행] nano ~/ros2_curri/agv_ws/src/agv_gazebo/worlds/warehouse.sdf</a:t>
             </a:r>
           </a:p>
           <a:p>
@@ -1896,12 +1900,12 @@
           <a:lstStyle/>
           <a:p>
             <a:r>
-              <a:t>[설명] ~/agv_ws/src/agv_gazebo/worlds/warehouse.sdf의 전체 파일을 10/11 구간으로 작성한다.</a:t>
-            </a:r>
-          </a:p>
-          <a:p>
-            <a:r>
-              <a:t>[실행] nano ~/agv_ws/src/agv_gazebo/worlds/warehouse.sdf</a:t>
+              <a:t>[설명] ~/ros2_curri/agv_ws/src/agv_gazebo/worlds/warehouse.sdf의 전체 파일을 8/11 구간으로 작성한다.</a:t>
+            </a:r>
+          </a:p>
+          <a:p>
+            <a:r>
+              <a:t>[실행] nano ~/ros2_curri/agv_ws/src/agv_gazebo/worlds/warehouse.sdf</a:t>
             </a:r>
           </a:p>
           <a:p>
@@ -1986,12 +1990,12 @@
           <a:lstStyle/>
           <a:p>
             <a:r>
-              <a:t>[설명] ~/agv_ws/src/agv_gazebo/worlds/warehouse.sdf의 전체 파일을 11/11 구간으로 작성한다.</a:t>
-            </a:r>
-          </a:p>
-          <a:p>
-            <a:r>
-              <a:t>[실행] nano ~/agv_ws/src/agv_gazebo/worlds/warehouse.sdf</a:t>
+              <a:t>[설명] ~/ros2_curri/agv_ws/src/agv_gazebo/worlds/warehouse.sdf의 전체 파일을 9/11 구간으로 작성한다.</a:t>
+            </a:r>
+          </a:p>
+          <a:p>
+            <a:r>
+              <a:t>[실행] nano ~/ros2_curri/agv_ws/src/agv_gazebo/worlds/warehouse.sdf</a:t>
             </a:r>
           </a:p>
           <a:p>
@@ -2076,12 +2080,12 @@
           <a:lstStyle/>
           <a:p>
             <a:r>
-              <a:t>[설명] ~/agv_ws/src/agv_mission/agv_mission/mission_manager.py의 전체 파일을 1/6 구간으로 작성한다.</a:t>
-            </a:r>
-          </a:p>
-          <a:p>
-            <a:r>
-              <a:t>[실행] nano ~/agv_ws/src/agv_mission/agv_mission/mission_manager.py</a:t>
+              <a:t>[설명] ~/ros2_curri/agv_ws/src/agv_gazebo/worlds/warehouse.sdf의 전체 파일을 10/11 구간으로 작성한다.</a:t>
+            </a:r>
+          </a:p>
+          <a:p>
+            <a:r>
+              <a:t>[실행] nano ~/ros2_curri/agv_ws/src/agv_gazebo/worlds/warehouse.sdf</a:t>
             </a:r>
           </a:p>
           <a:p>
@@ -2166,12 +2170,12 @@
           <a:lstStyle/>
           <a:p>
             <a:r>
-              <a:t>[설명] ~/agv_ws/src/agv_mission/agv_mission/mission_manager.py의 전체 파일을 2/6 구간으로 작성한다.</a:t>
-            </a:r>
-          </a:p>
-          <a:p>
-            <a:r>
-              <a:t>[실행] nano ~/agv_ws/src/agv_mission/agv_mission/mission_manager.py</a:t>
+              <a:t>[설명] ~/ros2_curri/agv_ws/src/agv_gazebo/worlds/warehouse.sdf의 전체 파일을 11/11 구간으로 작성한다.</a:t>
+            </a:r>
+          </a:p>
+          <a:p>
+            <a:r>
+              <a:t>[실행] nano ~/ros2_curri/agv_ws/src/agv_gazebo/worlds/warehouse.sdf</a:t>
             </a:r>
           </a:p>
           <a:p>
@@ -2256,12 +2260,12 @@
           <a:lstStyle/>
           <a:p>
             <a:r>
-              <a:t>[설명] ~/agv_ws/src/agv_mission/agv_mission/mission_manager.py의 전체 파일을 3/6 구간으로 작성한다.</a:t>
-            </a:r>
-          </a:p>
-          <a:p>
-            <a:r>
-              <a:t>[실행] nano ~/agv_ws/src/agv_mission/agv_mission/mission_manager.py</a:t>
+              <a:t>[설명] ~/ros2_curri/agv_ws/src/agv_mission/agv_mission/mission_manager.py의 전체 파일을 1/7 구간으로 작성한다.</a:t>
+            </a:r>
+          </a:p>
+          <a:p>
+            <a:r>
+              <a:t>[실행] nano ~/ros2_curri/agv_ws/src/agv_mission/agv_mission/mission_manager.py</a:t>
             </a:r>
           </a:p>
           <a:p>
@@ -2346,12 +2350,12 @@
           <a:lstStyle/>
           <a:p>
             <a:r>
-              <a:t>[설명] ~/agv_ws/src/agv_mission/agv_mission/mission_manager.py의 전체 파일을 4/6 구간으로 작성한다.</a:t>
-            </a:r>
-          </a:p>
-          <a:p>
-            <a:r>
-              <a:t>[실행] nano ~/agv_ws/src/agv_mission/agv_mission/mission_manager.py</a:t>
+              <a:t>[설명] ~/ros2_curri/agv_ws/src/agv_mission/agv_mission/mission_manager.py의 전체 파일을 2/7 구간으로 작성한다.</a:t>
+            </a:r>
+          </a:p>
+          <a:p>
+            <a:r>
+              <a:t>[실행] nano ~/ros2_curri/agv_ws/src/agv_mission/agv_mission/mission_manager.py</a:t>
             </a:r>
           </a:p>
           <a:p>
@@ -2436,12 +2440,12 @@
           <a:lstStyle/>
           <a:p>
             <a:r>
-              <a:t>[설명] ~/agv_ws/src/agv_mission/agv_mission/mission_manager.py의 전체 파일을 5/6 구간으로 작성한다.</a:t>
-            </a:r>
-          </a:p>
-          <a:p>
-            <a:r>
-              <a:t>[실행] nano ~/agv_ws/src/agv_mission/agv_mission/mission_manager.py</a:t>
+              <a:t>[설명] ~/ros2_curri/agv_ws/src/agv_mission/agv_mission/mission_manager.py의 전체 파일을 3/7 구간으로 작성한다.</a:t>
+            </a:r>
+          </a:p>
+          <a:p>
+            <a:r>
+              <a:t>[실행] nano ~/ros2_curri/agv_ws/src/agv_mission/agv_mission/mission_manager.py</a:t>
             </a:r>
           </a:p>
           <a:p>
@@ -2531,7 +2535,7 @@
           </a:p>
           <a:p>
             <a:r>
-              <a:t>[실행] pwd; source /opt/ros/jazzy/setup.bash; source ~/agv_ws/install/setup.bash</a:t>
+              <a:t>[실행] pwd; source /opt/ros/jazzy/setup.bash; source ~/ros2_curri/agv_ws/install/setup.bash</a:t>
             </a:r>
           </a:p>
           <a:p>
@@ -2616,12 +2620,12 @@
           <a:lstStyle/>
           <a:p>
             <a:r>
-              <a:t>[설명] ~/agv_ws/src/agv_mission/agv_mission/mission_manager.py의 전체 파일을 6/6 구간으로 작성한다.</a:t>
-            </a:r>
-          </a:p>
-          <a:p>
-            <a:r>
-              <a:t>[실행] nano ~/agv_ws/src/agv_mission/agv_mission/mission_manager.py</a:t>
+              <a:t>[설명] ~/ros2_curri/agv_ws/src/agv_mission/agv_mission/mission_manager.py의 전체 파일을 4/7 구간으로 작성한다.</a:t>
+            </a:r>
+          </a:p>
+          <a:p>
+            <a:r>
+              <a:t>[실행] nano ~/ros2_curri/agv_ws/src/agv_mission/agv_mission/mission_manager.py</a:t>
             </a:r>
           </a:p>
           <a:p>
@@ -2706,12 +2710,12 @@
           <a:lstStyle/>
           <a:p>
             <a:r>
-              <a:t>[설명] ~/agv_ws/src/agv_control/agv_control/safety_controller.py의 전체 파일을 1/4 구간으로 작성한다.</a:t>
-            </a:r>
-          </a:p>
-          <a:p>
-            <a:r>
-              <a:t>[실행] nano ~/agv_ws/src/agv_control/agv_control/safety_controller.py</a:t>
+              <a:t>[설명] ~/ros2_curri/agv_ws/src/agv_mission/agv_mission/mission_manager.py의 전체 파일을 5/7 구간으로 작성한다.</a:t>
+            </a:r>
+          </a:p>
+          <a:p>
+            <a:r>
+              <a:t>[실행] nano ~/ros2_curri/agv_ws/src/agv_mission/agv_mission/mission_manager.py</a:t>
             </a:r>
           </a:p>
           <a:p>
@@ -2796,12 +2800,12 @@
           <a:lstStyle/>
           <a:p>
             <a:r>
-              <a:t>[설명] ~/agv_ws/src/agv_control/agv_control/safety_controller.py의 전체 파일을 2/4 구간으로 작성한다.</a:t>
-            </a:r>
-          </a:p>
-          <a:p>
-            <a:r>
-              <a:t>[실행] nano ~/agv_ws/src/agv_control/agv_control/safety_controller.py</a:t>
+              <a:t>[설명] ~/ros2_curri/agv_ws/src/agv_mission/agv_mission/mission_manager.py의 전체 파일을 6/7 구간으로 작성한다.</a:t>
+            </a:r>
+          </a:p>
+          <a:p>
+            <a:r>
+              <a:t>[실행] nano ~/ros2_curri/agv_ws/src/agv_mission/agv_mission/mission_manager.py</a:t>
             </a:r>
           </a:p>
           <a:p>
@@ -2886,12 +2890,12 @@
           <a:lstStyle/>
           <a:p>
             <a:r>
-              <a:t>[설명] ~/agv_ws/src/agv_control/agv_control/safety_controller.py의 전체 파일을 3/4 구간으로 작성한다.</a:t>
-            </a:r>
-          </a:p>
-          <a:p>
-            <a:r>
-              <a:t>[실행] nano ~/agv_ws/src/agv_control/agv_control/safety_controller.py</a:t>
+              <a:t>[설명] ~/ros2_curri/agv_ws/src/agv_mission/agv_mission/mission_manager.py의 전체 파일을 7/7 구간으로 작성한다.</a:t>
+            </a:r>
+          </a:p>
+          <a:p>
+            <a:r>
+              <a:t>[실행] nano ~/ros2_curri/agv_ws/src/agv_mission/agv_mission/mission_manager.py</a:t>
             </a:r>
           </a:p>
           <a:p>
@@ -2976,12 +2980,12 @@
           <a:lstStyle/>
           <a:p>
             <a:r>
-              <a:t>[설명] ~/agv_ws/src/agv_control/agv_control/safety_controller.py의 전체 파일을 4/4 구간으로 작성한다.</a:t>
-            </a:r>
-          </a:p>
-          <a:p>
-            <a:r>
-              <a:t>[실행] nano ~/agv_ws/src/agv_control/agv_control/safety_controller.py</a:t>
+              <a:t>[설명] ~/ros2_curri/agv_ws/src/agv_control/agv_control/safety_controller.py의 전체 파일을 1/4 구간으로 작성한다.</a:t>
+            </a:r>
+          </a:p>
+          <a:p>
+            <a:r>
+              <a:t>[실행] nano ~/ros2_curri/agv_ws/src/agv_control/agv_control/safety_controller.py</a:t>
             </a:r>
           </a:p>
           <a:p>
@@ -3066,22 +3070,17 @@
           <a:lstStyle/>
           <a:p>
             <a:r>
-              <a:t>[설명] build/source/run을 생략 없이 실행한다.</a:t>
-            </a:r>
-          </a:p>
-          <a:p>
-            <a:r>
-              <a:t>[실행] cd ~/agv_ws &amp;&amp; source install/setup.bash</a:t>
-            </a:r>
-          </a:p>
-          <a:p>
-            <a:r>
-              <a:t>ros2 launch agv_bringup agv_sim.launch.py</a:t>
-            </a:r>
-          </a:p>
-          <a:p>
-            <a:r>
-              <a:t>[확인] 한 launch 실행, RViz/Gazebo 확인, mission log, rosbag 기록을 제출 체크리스트로 남긴다.</a:t>
+              <a:t>[설명] ~/ros2_curri/agv_ws/src/agv_control/agv_control/safety_controller.py의 전체 파일을 2/4 구간으로 작성한다.</a:t>
+            </a:r>
+          </a:p>
+          <a:p>
+            <a:r>
+              <a:t>[실행] nano ~/ros2_curri/agv_ws/src/agv_control/agv_control/safety_controller.py</a:t>
+            </a:r>
+          </a:p>
+          <a:p>
+            <a:r>
+              <a:t>[확인] 코드를 저장하고 다음 코드 슬라이드 또는 build 단계로 이동한다.</a:t>
             </a:r>
           </a:p>
           <a:p>
@@ -3091,7 +3090,7 @@
           </a:p>
           <a:p>
             <a:r>
-              <a:t>[오류] 오류가 나면 현재 폴더, source, 파일 경로를 먼저 확인한다.</a:t>
+              <a:t>[오류] 들여쓰기·XML 태그·따옴표가 슬라이드와 정확히 같은지 확인한다.</a:t>
             </a:r>
           </a:p>
         </p:txBody>
@@ -3161,17 +3160,17 @@
           <a:lstStyle/>
           <a:p>
             <a:r>
-              <a:t>[설명] 실제 Ubuntu/ROS 2 환경에서 생성한 검증 화면이다.</a:t>
-            </a:r>
-          </a:p>
-          <a:p>
-            <a:r>
-              <a:t>[실행] 슬라이드의 명령 또는 파일 작성 단계를 진행한다.</a:t>
-            </a:r>
-          </a:p>
-          <a:p>
-            <a:r>
-              <a:t>[확인] 캡처의 명령과 다음 슬라이드의 검증 명령을 비교한다.</a:t>
+              <a:t>[설명] ~/ros2_curri/agv_ws/src/agv_control/agv_control/safety_controller.py의 전체 파일을 3/4 구간으로 작성한다.</a:t>
+            </a:r>
+          </a:p>
+          <a:p>
+            <a:r>
+              <a:t>[실행] nano ~/ros2_curri/agv_ws/src/agv_control/agv_control/safety_controller.py</a:t>
+            </a:r>
+          </a:p>
+          <a:p>
+            <a:r>
+              <a:t>[확인] 코드를 저장하고 다음 코드 슬라이드 또는 build 단계로 이동한다.</a:t>
             </a:r>
           </a:p>
           <a:p>
@@ -3181,7 +3180,7 @@
           </a:p>
           <a:p>
             <a:r>
-              <a:t>[오류] 오류가 나면 현재 폴더, source, 파일 경로를 먼저 확인한다.</a:t>
+              <a:t>[오류] 들여쓰기·XML 태그·따옴표가 슬라이드와 정확히 같은지 확인한다.</a:t>
             </a:r>
           </a:p>
         </p:txBody>
@@ -3251,27 +3250,17 @@
           <a:lstStyle/>
           <a:p>
             <a:r>
-              <a:t>[설명] 검증 명령은 GUI 결과와 별도로 실행해 재현 가능한 완료 기준을 만든다.</a:t>
-            </a:r>
-          </a:p>
-          <a:p>
-            <a:r>
-              <a:t>[실행] ros2 launch agv_bringup agv_sim.launch.py --show-args</a:t>
-            </a:r>
-          </a:p>
-          <a:p>
-            <a:r>
-              <a:t>ros2 node list</a:t>
-            </a:r>
-          </a:p>
-          <a:p>
-            <a:r>
-              <a:t>ros2 topic list | rg '/scan|/imu/data|/odom|/camera/image_raw|/cmd_vel'</a:t>
-            </a:r>
-          </a:p>
-          <a:p>
-            <a:r>
-              <a:t>[확인] 한 launch 실행, RViz/Gazebo 확인, mission log, rosbag 기록을 제출 체크리스트로 남긴다.</a:t>
+              <a:t>[설명] ~/ros2_curri/agv_ws/src/agv_control/agv_control/safety_controller.py의 전체 파일을 4/4 구간으로 작성한다.</a:t>
+            </a:r>
+          </a:p>
+          <a:p>
+            <a:r>
+              <a:t>[실행] nano ~/ros2_curri/agv_ws/src/agv_control/agv_control/safety_controller.py</a:t>
+            </a:r>
+          </a:p>
+          <a:p>
+            <a:r>
+              <a:t>[확인] 코드를 저장하고 다음 코드 슬라이드 또는 build 단계로 이동한다.</a:t>
             </a:r>
           </a:p>
           <a:p>
@@ -3281,7 +3270,7 @@
           </a:p>
           <a:p>
             <a:r>
-              <a:t>[오류] 오류가 나면 현재 폴더, source, 파일 경로를 먼저 확인한다.</a:t>
+              <a:t>[오류] 들여쓰기·XML 태그·따옴표가 슬라이드와 정확히 같은지 확인한다.</a:t>
             </a:r>
           </a:p>
         </p:txBody>
@@ -3351,17 +3340,22 @@
           <a:lstStyle/>
           <a:p>
             <a:r>
-              <a:t>[설명] 오류를 대신 해결하지 말고 증상부터 우선 확인 순서대로 교육생이 실행하게 한다.</a:t>
-            </a:r>
-          </a:p>
-          <a:p>
-            <a:r>
-              <a:t>[실행] 슬라이드의 명령 또는 파일 작성 단계를 진행한다.</a:t>
-            </a:r>
-          </a:p>
-          <a:p>
-            <a:r>
-              <a:t>[확인] 수정 뒤 첫 검증 명령을 다시 실행한다.</a:t>
+              <a:t>[설명] build/source/run을 생략 없이 실행한다.</a:t>
+            </a:r>
+          </a:p>
+          <a:p>
+            <a:r>
+              <a:t>[실행] cd ~/ros2_curri/agv_ws &amp;&amp; source install/setup.bash</a:t>
+            </a:r>
+          </a:p>
+          <a:p>
+            <a:r>
+              <a:t>ros2 launch agv_bringup agv_sim.launch.py</a:t>
+            </a:r>
+          </a:p>
+          <a:p>
+            <a:r>
+              <a:t>[확인] 한 launch 실행, RViz/Gazebo 확인, mission log, rosbag 기록을 제출 체크리스트로 남긴다.</a:t>
             </a:r>
           </a:p>
           <a:p>
@@ -3371,7 +3365,7 @@
           </a:p>
           <a:p>
             <a:r>
-              <a:t>[오류] 슬라이드의 두 대표 오류를 먼저 사용한다.</a:t>
+              <a:t>[오류] 오류가 나면 현재 폴더, source, 파일 경로를 먼저 확인한다.</a:t>
             </a:r>
           </a:p>
         </p:txBody>
@@ -3441,7 +3435,7 @@
           <a:lstStyle/>
           <a:p>
             <a:r>
-              <a:t>[설명] 교육생이 직접 한 값만 바꿔 원인과 결과를 연결하게 한다.</a:t>
+              <a:t>[설명] 실제 Ubuntu/ROS 2 환경에서 생성한 검증 화면이다.</a:t>
             </a:r>
           </a:p>
           <a:p>
@@ -3451,7 +3445,7 @@
           </a:p>
           <a:p>
             <a:r>
-              <a:t>[확인] 원래 값과 변경 값을 모두 기록한다.</a:t>
+              <a:t>[확인] 캡처의 명령과 다음 슬라이드의 검증 명령을 비교한다.</a:t>
             </a:r>
           </a:p>
           <a:p>
@@ -3621,7 +3615,7 @@
           <a:lstStyle/>
           <a:p>
             <a:r>
-              <a:t>[설명] 최종 미션 시나리오</a:t>
+              <a:t>[설명] 실제 Ubuntu/ROS 2 환경에서 생성한 검증 화면이다.</a:t>
             </a:r>
           </a:p>
           <a:p>
@@ -3631,7 +3625,7 @@
           </a:p>
           <a:p>
             <a:r>
-              <a:t>[확인] 각 항목이 현재 시스템의 어느 package/topic/file과 연결되는지 확인한다.</a:t>
+              <a:t>[확인] 캡처의 명령과 다음 슬라이드의 검증 명령을 비교한다.</a:t>
             </a:r>
           </a:p>
           <a:p>
@@ -3711,17 +3705,27 @@
           <a:lstStyle/>
           <a:p>
             <a:r>
-              <a:t>[설명] 최종 기능 체크표</a:t>
-            </a:r>
-          </a:p>
-          <a:p>
-            <a:r>
-              <a:t>[실행] 슬라이드의 명령 또는 파일 작성 단계를 진행한다.</a:t>
-            </a:r>
-          </a:p>
-          <a:p>
-            <a:r>
-              <a:t>[확인] 각 항목이 현재 시스템의 어느 package/topic/file과 연결되는지 확인한다.</a:t>
+              <a:t>[설명] 검증 명령은 GUI 결과와 별도로 실행해 재현 가능한 완료 기준을 만든다.</a:t>
+            </a:r>
+          </a:p>
+          <a:p>
+            <a:r>
+              <a:t>[실행] ros2 launch agv_bringup agv_sim.launch.py --show-args</a:t>
+            </a:r>
+          </a:p>
+          <a:p>
+            <a:r>
+              <a:t>ros2 node list</a:t>
+            </a:r>
+          </a:p>
+          <a:p>
+            <a:r>
+              <a:t>ros2 topic list | rg '/scan|/imu/data|/odom|/camera/image_raw|/cmd_vel'</a:t>
+            </a:r>
+          </a:p>
+          <a:p>
+            <a:r>
+              <a:t>[확인] 한 launch 실행, RViz/Gazebo 확인, mission log, rosbag 기록을 제출 체크리스트로 남긴다.</a:t>
             </a:r>
           </a:p>
           <a:p>
@@ -3801,7 +3805,7 @@
           <a:lstStyle/>
           <a:p>
             <a:r>
-              <a:t>[설명] Milestone 1~8 제출 증거</a:t>
+              <a:t>[설명] 오류를 대신 해결하지 말고 증상부터 우선 확인 순서대로 교육생이 실행하게 한다.</a:t>
             </a:r>
           </a:p>
           <a:p>
@@ -3811,7 +3815,7 @@
           </a:p>
           <a:p>
             <a:r>
-              <a:t>[확인] 각 항목이 현재 시스템의 어느 package/topic/file과 연결되는지 확인한다.</a:t>
+              <a:t>[확인] 수정 뒤 첫 검증 명령을 다시 실행한다.</a:t>
             </a:r>
           </a:p>
           <a:p>
@@ -3821,7 +3825,7 @@
           </a:p>
           <a:p>
             <a:r>
-              <a:t>[오류] 오류가 나면 현재 폴더, source, 파일 경로를 먼저 확인한다.</a:t>
+              <a:t>[오류] 슬라이드의 두 대표 오류를 먼저 사용한다.</a:t>
             </a:r>
           </a:p>
         </p:txBody>
@@ -3891,7 +3895,7 @@
           <a:lstStyle/>
           <a:p>
             <a:r>
-              <a:t>[설명] 실패를 재현 가능하게 기록한다</a:t>
+              <a:t>[설명] 교육생이 직접 한 값만 바꿔 원인과 결과를 연결하게 한다.</a:t>
             </a:r>
           </a:p>
           <a:p>
@@ -3901,7 +3905,7 @@
           </a:p>
           <a:p>
             <a:r>
-              <a:t>[확인] 각 항목이 현재 시스템의 어느 package/topic/file과 연결되는지 확인한다.</a:t>
+              <a:t>[확인] 원래 값과 변경 값을 모두 기록한다.</a:t>
             </a:r>
           </a:p>
           <a:p>
@@ -3981,7 +3985,7 @@
           <a:lstStyle/>
           <a:p>
             <a:r>
-              <a:t>[설명] 교육생이 Complete·캡처·로그를 저장했는지 확인하고 다음 모듈의 시작 상태를 읽는다.</a:t>
+              <a:t>[설명] 최종 미션 시나리오</a:t>
             </a:r>
           </a:p>
           <a:p>
@@ -3991,7 +3995,7 @@
           </a:p>
           <a:p>
             <a:r>
-              <a:t>[확인] 핵심 과정 완료 → SLAM/Nav2 확장 시작 조건을 말할 수 있다.</a:t>
+              <a:t>[확인] 각 항목이 현재 시스템의 어느 package/topic/file과 연결되는지 확인한다.</a:t>
             </a:r>
           </a:p>
           <a:p>
@@ -4071,6 +4075,366 @@
           <a:lstStyle/>
           <a:p>
             <a:r>
+              <a:t>[설명] 최종 기능 체크표</a:t>
+            </a:r>
+          </a:p>
+          <a:p>
+            <a:r>
+              <a:t>[실행] 슬라이드의 명령 또는 파일 작성 단계를 진행한다.</a:t>
+            </a:r>
+          </a:p>
+          <a:p>
+            <a:r>
+              <a:t>[확인] 각 항목이 현재 시스템의 어느 package/topic/file과 연결되는지 확인한다.</a:t>
+            </a:r>
+          </a:p>
+          <a:p>
+            <a:r>
+              <a:t>[멈춤] 교육생이 현재 체크포인트를 통과할 때까지 기다린다.</a:t>
+            </a:r>
+          </a:p>
+          <a:p>
+            <a:r>
+              <a:t>[오류] 오류가 나면 현재 폴더, source, 파일 경로를 먼저 확인한다.</a:t>
+            </a:r>
+          </a:p>
+        </p:txBody>
+      </p:sp>
+      <p:sp>
+        <p:nvSpPr>
+          <p:cNvPr id="4" name="Slide Number Placeholder 3"/>
+          <p:cNvSpPr>
+            <a:spLocks noGrp="1"/>
+          </p:cNvSpPr>
+          <p:nvPr>
+            <p:ph type="sldNum" idx="5" sz="quarter"/>
+          </p:nvPr>
+        </p:nvSpPr>
+        <p:spPr/>
+      </p:sp>
+    </p:spTree>
+  </p:cSld>
+  <p:clrMapOvr>
+    <a:masterClrMapping/>
+  </p:clrMapOvr>
+</p:notes>
+</file>
+
+<file path=ppt/notesSlides/notesSlide46.xml><?xml version="1.0" encoding="utf-8"?>
+<p:notes xmlns:a="http://schemas.openxmlformats.org/drawingml/2006/main" xmlns:p="http://schemas.openxmlformats.org/presentationml/2006/main" xmlns:r="http://schemas.openxmlformats.org/officeDocument/2006/relationships">
+  <p:cSld>
+    <p:spTree>
+      <p:nvGrpSpPr>
+        <p:cNvPr id="1" name=""/>
+        <p:cNvGrpSpPr/>
+        <p:nvPr/>
+      </p:nvGrpSpPr>
+      <p:grpSpPr>
+        <a:xfrm>
+          <a:off x="0" y="0"/>
+          <a:ext cx="0" cy="0"/>
+          <a:chOff x="0" y="0"/>
+          <a:chExt cx="0" cy="0"/>
+        </a:xfrm>
+      </p:grpSpPr>
+      <p:sp>
+        <p:nvSpPr>
+          <p:cNvPr id="2" name="Slide Image Placeholder 1"/>
+          <p:cNvSpPr>
+            <a:spLocks noGrp="1"/>
+          </p:cNvSpPr>
+          <p:nvPr>
+            <p:ph type="sldImg" idx="2"/>
+          </p:nvPr>
+        </p:nvSpPr>
+        <p:spPr/>
+      </p:sp>
+      <p:sp>
+        <p:nvSpPr>
+          <p:cNvPr id="3" name="Notes Placeholder 2"/>
+          <p:cNvSpPr>
+            <a:spLocks noGrp="1"/>
+          </p:cNvSpPr>
+          <p:nvPr>
+            <p:ph type="body" idx="3" sz="quarter"/>
+          </p:nvPr>
+        </p:nvSpPr>
+        <p:spPr/>
+        <p:txBody>
+          <a:bodyPr/>
+          <a:lstStyle/>
+          <a:p>
+            <a:r>
+              <a:t>[설명] Milestone 1~8 제출 증거</a:t>
+            </a:r>
+          </a:p>
+          <a:p>
+            <a:r>
+              <a:t>[실행] 슬라이드의 명령 또는 파일 작성 단계를 진행한다.</a:t>
+            </a:r>
+          </a:p>
+          <a:p>
+            <a:r>
+              <a:t>[확인] 각 항목이 현재 시스템의 어느 package/topic/file과 연결되는지 확인한다.</a:t>
+            </a:r>
+          </a:p>
+          <a:p>
+            <a:r>
+              <a:t>[멈춤] 교육생이 현재 체크포인트를 통과할 때까지 기다린다.</a:t>
+            </a:r>
+          </a:p>
+          <a:p>
+            <a:r>
+              <a:t>[오류] 오류가 나면 현재 폴더, source, 파일 경로를 먼저 확인한다.</a:t>
+            </a:r>
+          </a:p>
+        </p:txBody>
+      </p:sp>
+      <p:sp>
+        <p:nvSpPr>
+          <p:cNvPr id="4" name="Slide Number Placeholder 3"/>
+          <p:cNvSpPr>
+            <a:spLocks noGrp="1"/>
+          </p:cNvSpPr>
+          <p:nvPr>
+            <p:ph type="sldNum" idx="5" sz="quarter"/>
+          </p:nvPr>
+        </p:nvSpPr>
+        <p:spPr/>
+      </p:sp>
+    </p:spTree>
+  </p:cSld>
+  <p:clrMapOvr>
+    <a:masterClrMapping/>
+  </p:clrMapOvr>
+</p:notes>
+</file>
+
+<file path=ppt/notesSlides/notesSlide47.xml><?xml version="1.0" encoding="utf-8"?>
+<p:notes xmlns:a="http://schemas.openxmlformats.org/drawingml/2006/main" xmlns:p="http://schemas.openxmlformats.org/presentationml/2006/main" xmlns:r="http://schemas.openxmlformats.org/officeDocument/2006/relationships">
+  <p:cSld>
+    <p:spTree>
+      <p:nvGrpSpPr>
+        <p:cNvPr id="1" name=""/>
+        <p:cNvGrpSpPr/>
+        <p:nvPr/>
+      </p:nvGrpSpPr>
+      <p:grpSpPr>
+        <a:xfrm>
+          <a:off x="0" y="0"/>
+          <a:ext cx="0" cy="0"/>
+          <a:chOff x="0" y="0"/>
+          <a:chExt cx="0" cy="0"/>
+        </a:xfrm>
+      </p:grpSpPr>
+      <p:sp>
+        <p:nvSpPr>
+          <p:cNvPr id="2" name="Slide Image Placeholder 1"/>
+          <p:cNvSpPr>
+            <a:spLocks noGrp="1"/>
+          </p:cNvSpPr>
+          <p:nvPr>
+            <p:ph type="sldImg" idx="2"/>
+          </p:nvPr>
+        </p:nvSpPr>
+        <p:spPr/>
+      </p:sp>
+      <p:sp>
+        <p:nvSpPr>
+          <p:cNvPr id="3" name="Notes Placeholder 2"/>
+          <p:cNvSpPr>
+            <a:spLocks noGrp="1"/>
+          </p:cNvSpPr>
+          <p:nvPr>
+            <p:ph type="body" idx="3" sz="quarter"/>
+          </p:nvPr>
+        </p:nvSpPr>
+        <p:spPr/>
+        <p:txBody>
+          <a:bodyPr/>
+          <a:lstStyle/>
+          <a:p>
+            <a:r>
+              <a:t>[설명] 실패를 재현 가능하게 기록한다</a:t>
+            </a:r>
+          </a:p>
+          <a:p>
+            <a:r>
+              <a:t>[실행] 슬라이드의 명령 또는 파일 작성 단계를 진행한다.</a:t>
+            </a:r>
+          </a:p>
+          <a:p>
+            <a:r>
+              <a:t>[확인] 각 항목이 현재 시스템의 어느 package/topic/file과 연결되는지 확인한다.</a:t>
+            </a:r>
+          </a:p>
+          <a:p>
+            <a:r>
+              <a:t>[멈춤] 교육생이 현재 체크포인트를 통과할 때까지 기다린다.</a:t>
+            </a:r>
+          </a:p>
+          <a:p>
+            <a:r>
+              <a:t>[오류] 오류가 나면 현재 폴더, source, 파일 경로를 먼저 확인한다.</a:t>
+            </a:r>
+          </a:p>
+        </p:txBody>
+      </p:sp>
+      <p:sp>
+        <p:nvSpPr>
+          <p:cNvPr id="4" name="Slide Number Placeholder 3"/>
+          <p:cNvSpPr>
+            <a:spLocks noGrp="1"/>
+          </p:cNvSpPr>
+          <p:nvPr>
+            <p:ph type="sldNum" idx="5" sz="quarter"/>
+          </p:nvPr>
+        </p:nvSpPr>
+        <p:spPr/>
+      </p:sp>
+    </p:spTree>
+  </p:cSld>
+  <p:clrMapOvr>
+    <a:masterClrMapping/>
+  </p:clrMapOvr>
+</p:notes>
+</file>
+
+<file path=ppt/notesSlides/notesSlide48.xml><?xml version="1.0" encoding="utf-8"?>
+<p:notes xmlns:a="http://schemas.openxmlformats.org/drawingml/2006/main" xmlns:p="http://schemas.openxmlformats.org/presentationml/2006/main" xmlns:r="http://schemas.openxmlformats.org/officeDocument/2006/relationships">
+  <p:cSld>
+    <p:spTree>
+      <p:nvGrpSpPr>
+        <p:cNvPr id="1" name=""/>
+        <p:cNvGrpSpPr/>
+        <p:nvPr/>
+      </p:nvGrpSpPr>
+      <p:grpSpPr>
+        <a:xfrm>
+          <a:off x="0" y="0"/>
+          <a:ext cx="0" cy="0"/>
+          <a:chOff x="0" y="0"/>
+          <a:chExt cx="0" cy="0"/>
+        </a:xfrm>
+      </p:grpSpPr>
+      <p:sp>
+        <p:nvSpPr>
+          <p:cNvPr id="2" name="Slide Image Placeholder 1"/>
+          <p:cNvSpPr>
+            <a:spLocks noGrp="1"/>
+          </p:cNvSpPr>
+          <p:nvPr>
+            <p:ph type="sldImg" idx="2"/>
+          </p:nvPr>
+        </p:nvSpPr>
+        <p:spPr/>
+      </p:sp>
+      <p:sp>
+        <p:nvSpPr>
+          <p:cNvPr id="3" name="Notes Placeholder 2"/>
+          <p:cNvSpPr>
+            <a:spLocks noGrp="1"/>
+          </p:cNvSpPr>
+          <p:nvPr>
+            <p:ph type="body" idx="3" sz="quarter"/>
+          </p:nvPr>
+        </p:nvSpPr>
+        <p:spPr/>
+        <p:txBody>
+          <a:bodyPr/>
+          <a:lstStyle/>
+          <a:p>
+            <a:r>
+              <a:t>[설명] 교육생이 Complete·캡처·로그를 저장했는지 확인하고 다음 모듈의 시작 상태를 읽는다.</a:t>
+            </a:r>
+          </a:p>
+          <a:p>
+            <a:r>
+              <a:t>[실행] 슬라이드의 명령 또는 파일 작성 단계를 진행한다.</a:t>
+            </a:r>
+          </a:p>
+          <a:p>
+            <a:r>
+              <a:t>[확인] 핵심 과정 완료 → SLAM/Nav2 확장 시작 조건을 말할 수 있다.</a:t>
+            </a:r>
+          </a:p>
+          <a:p>
+            <a:r>
+              <a:t>[멈춤] 교육생이 현재 체크포인트를 통과할 때까지 기다린다.</a:t>
+            </a:r>
+          </a:p>
+          <a:p>
+            <a:r>
+              <a:t>[오류] 오류가 나면 현재 폴더, source, 파일 경로를 먼저 확인한다.</a:t>
+            </a:r>
+          </a:p>
+        </p:txBody>
+      </p:sp>
+      <p:sp>
+        <p:nvSpPr>
+          <p:cNvPr id="4" name="Slide Number Placeholder 3"/>
+          <p:cNvSpPr>
+            <a:spLocks noGrp="1"/>
+          </p:cNvSpPr>
+          <p:nvPr>
+            <p:ph type="sldNum" idx="5" sz="quarter"/>
+          </p:nvPr>
+        </p:nvSpPr>
+        <p:spPr/>
+      </p:sp>
+    </p:spTree>
+  </p:cSld>
+  <p:clrMapOvr>
+    <a:masterClrMapping/>
+  </p:clrMapOvr>
+</p:notes>
+</file>
+
+<file path=ppt/notesSlides/notesSlide49.xml><?xml version="1.0" encoding="utf-8"?>
+<p:notes xmlns:a="http://schemas.openxmlformats.org/drawingml/2006/main" xmlns:p="http://schemas.openxmlformats.org/presentationml/2006/main" xmlns:r="http://schemas.openxmlformats.org/officeDocument/2006/relationships">
+  <p:cSld>
+    <p:spTree>
+      <p:nvGrpSpPr>
+        <p:cNvPr id="1" name=""/>
+        <p:cNvGrpSpPr/>
+        <p:nvPr/>
+      </p:nvGrpSpPr>
+      <p:grpSpPr>
+        <a:xfrm>
+          <a:off x="0" y="0"/>
+          <a:ext cx="0" cy="0"/>
+          <a:chOff x="0" y="0"/>
+          <a:chExt cx="0" cy="0"/>
+        </a:xfrm>
+      </p:grpSpPr>
+      <p:sp>
+        <p:nvSpPr>
+          <p:cNvPr id="2" name="Slide Image Placeholder 1"/>
+          <p:cNvSpPr>
+            <a:spLocks noGrp="1"/>
+          </p:cNvSpPr>
+          <p:nvPr>
+            <p:ph type="sldImg" idx="2"/>
+          </p:nvPr>
+        </p:nvSpPr>
+        <p:spPr/>
+      </p:sp>
+      <p:sp>
+        <p:nvSpPr>
+          <p:cNvPr id="3" name="Notes Placeholder 2"/>
+          <p:cNvSpPr>
+            <a:spLocks noGrp="1"/>
+          </p:cNvSpPr>
+          <p:nvPr>
+            <p:ph type="body" idx="3" sz="quarter"/>
+          </p:nvPr>
+        </p:nvSpPr>
+        <p:spPr/>
+        <p:txBody>
+          <a:bodyPr/>
+          <a:lstStyle/>
+          <a:p>
+            <a:r>
               <a:t>[설명] 공식 문서는 버전 차이와 확장 학습을 확인할 때 사용한다.</a:t>
             </a:r>
           </a:p>
@@ -4351,7 +4715,7 @@
           </a:p>
           <a:p>
             <a:r>
-              <a:t>cd ~/agv_ws</a:t>
+              <a:t>cd ~/ros2_curri/agv_ws</a:t>
             </a:r>
           </a:p>
           <a:p>
@@ -7939,7 +8303,7 @@
               </a:defRPr>
             </a:pPr>
             <a:r>
-              <a:t>파일을 새로 만들고 저장한다 (1/3)</a:t>
+              <a:t>파일을 새로 만들고 저장한다 (1/4)</a:t>
             </a:r>
           </a:p>
         </p:txBody>
@@ -7978,7 +8342,7 @@
               </a:defRPr>
             </a:pPr>
             <a:r>
-              <a:t>~/agv_ws/src/agv_bringup/launch/agv_sim.launch.py</a:t>
+              <a:t>~/ros2_curri/agv_ws/src/agv_bringup/launch/agv_sim.launch.py</a:t>
             </a:r>
           </a:p>
         </p:txBody>
@@ -8114,7 +8478,7 @@
               </a:defRPr>
             </a:pPr>
             <a:r>
-              <a:t>현재 단계 4/7    |    현재 폴더 ~/agv_ws    |    현재 터미널</a:t>
+              <a:t>현재 단계 4/8    |    현재 폴더 ~/ros2_curri/agv_ws    |    현재 터미널</a:t>
             </a:r>
           </a:p>
         </p:txBody>
@@ -8211,11 +8575,11 @@
               </a:defRPr>
             </a:pPr>
             <a:r>
-              <a:t>파일 생성: mkdir -p ~/agv_ws/src/agv_bringup/launch</a:t>
-            </a:r>
-            <a:br/>
-            <a:r>
-              <a:t>파일 열기: nano ~/agv_ws/src/agv_bringup/launch/agv_sim.launch.py</a:t>
+              <a:t>파일 생성: mkdir -p ~/ros2_curri/agv_ws/src/agv_bringup/launch</a:t>
+            </a:r>
+            <a:br/>
+            <a:r>
+              <a:t>파일 열기: nano ~/ros2_curri/agv_ws/src/agv_bringup/launch/agv_sim.launch.py</a:t>
             </a:r>
           </a:p>
         </p:txBody>
@@ -8353,7 +8717,7 @@
               </a:defRPr>
             </a:pPr>
             <a:r>
-              <a:t>파일 전체 1/3 · 이 슬라이드 다음에 같은 파일의 나머지 줄이 이어집니다.</a:t>
+              <a:t>파일 전체 1/4 · 이 슬라이드 다음에 같은 파일의 나머지 줄이 이어집니다.</a:t>
             </a:r>
           </a:p>
         </p:txBody>
@@ -8410,7 +8774,7 @@
               </a:defRPr>
             </a:pPr>
             <a:r>
-              <a:t>파일을 계속 작성하고 저장한다 (2/3)</a:t>
+              <a:t>파일을 계속 작성하고 저장한다 (2/4)</a:t>
             </a:r>
           </a:p>
         </p:txBody>
@@ -8449,7 +8813,7 @@
               </a:defRPr>
             </a:pPr>
             <a:r>
-              <a:t>~/agv_ws/src/agv_bringup/launch/agv_sim.launch.py</a:t>
+              <a:t>~/ros2_curri/agv_ws/src/agv_bringup/launch/agv_sim.launch.py</a:t>
             </a:r>
           </a:p>
         </p:txBody>
@@ -8585,7 +8949,7 @@
               </a:defRPr>
             </a:pPr>
             <a:r>
-              <a:t>현재 단계 5/7    |    현재 폴더 ~/agv_ws    |    현재 터미널</a:t>
+              <a:t>현재 단계 5/8    |    현재 폴더 ~/ros2_curri/agv_ws    |    현재 터미널</a:t>
             </a:r>
           </a:p>
         </p:txBody>
@@ -8682,11 +9046,11 @@
               </a:defRPr>
             </a:pPr>
             <a:r>
-              <a:t>파일 생성: mkdir -p ~/agv_ws/src/agv_bringup/launch</a:t>
-            </a:r>
-            <a:br/>
-            <a:r>
-              <a:t>파일 열기: nano ~/agv_ws/src/agv_bringup/launch/agv_sim.launch.py</a:t>
+              <a:t>파일 생성: mkdir -p ~/ros2_curri/agv_ws/src/agv_bringup/launch</a:t>
+            </a:r>
+            <a:br/>
+            <a:r>
+              <a:t>파일 열기: nano ~/ros2_curri/agv_ws/src/agv_bringup/launch/agv_sim.launch.py</a:t>
             </a:r>
           </a:p>
         </p:txBody>
@@ -8764,7 +9128,11 @@
             </a:r>
             <a:br/>
             <a:r>
-              <a:t>        description='Start RViz2'),</a:t>
+              <a:t>        description='Start RViz2'), DeclareLaunchArgument('autonomy', default_value='true',</a:t>
+            </a:r>
+            <a:br/>
+            <a:r>
+              <a:t>         description='Start mission and safety nodes'),</a:t>
             </a:r>
             <a:br/>
             <a:r>
@@ -8785,10 +9153,6 @@
             <a:br/>
             <a:r>
               <a:t>        executable='lidar_processor', parameters=[os.path.join(bringup, 'config',</a:t>
-            </a:r>
-            <a:br/>
-            <a:r>
-              <a:t>        'sensors.yaml')]), Node(package='agv_sensors', executable='imu_monitor',</a:t>
             </a:r>
           </a:p>
         </p:txBody>
@@ -8827,7 +9191,7 @@
               </a:defRPr>
             </a:pPr>
             <a:r>
-              <a:t>파일 전체 2/3 · 이 슬라이드 다음에 같은 파일의 나머지 줄이 이어집니다.</a:t>
+              <a:t>파일 전체 2/4 · 이 슬라이드 다음에 같은 파일의 나머지 줄이 이어집니다.</a:t>
             </a:r>
           </a:p>
         </p:txBody>
@@ -8884,7 +9248,7 @@
               </a:defRPr>
             </a:pPr>
             <a:r>
-              <a:t>파일을 계속 작성하고 저장한다 (3/3)</a:t>
+              <a:t>파일을 계속 작성하고 저장한다 (3/4)</a:t>
             </a:r>
           </a:p>
         </p:txBody>
@@ -8923,7 +9287,7 @@
               </a:defRPr>
             </a:pPr>
             <a:r>
-              <a:t>~/agv_ws/src/agv_bringup/launch/agv_sim.launch.py</a:t>
+              <a:t>~/ros2_curri/agv_ws/src/agv_bringup/launch/agv_sim.launch.py</a:t>
             </a:r>
           </a:p>
         </p:txBody>
@@ -9059,7 +9423,7 @@
               </a:defRPr>
             </a:pPr>
             <a:r>
-              <a:t>현재 단계 6/7    |    현재 폴더 ~/agv_ws    |    현재 터미널</a:t>
+              <a:t>현재 단계 6/8    |    현재 폴더 ~/ros2_curri/agv_ws    |    현재 터미널</a:t>
             </a:r>
           </a:p>
         </p:txBody>
@@ -9156,11 +9520,11 @@
               </a:defRPr>
             </a:pPr>
             <a:r>
-              <a:t>파일 생성: mkdir -p ~/agv_ws/src/agv_bringup/launch</a:t>
-            </a:r>
-            <a:br/>
-            <a:r>
-              <a:t>파일 열기: nano ~/agv_ws/src/agv_bringup/launch/agv_sim.launch.py</a:t>
+              <a:t>파일 생성: mkdir -p ~/ros2_curri/agv_ws/src/agv_bringup/launch</a:t>
+            </a:r>
+            <a:br/>
+            <a:r>
+              <a:t>파일 열기: nano ~/ros2_curri/agv_ws/src/agv_bringup/launch/agv_sim.launch.py</a:t>
             </a:r>
           </a:p>
         </p:txBody>
@@ -9218,7 +9582,15 @@
               </a:defRPr>
             </a:pPr>
             <a:r>
-              <a:t>        parameters=[os.path.join(bringup, 'config', 'sensors.yaml')]), Node(package='agv_vision',</a:t>
+              <a:t>        'sensors.yaml')]), Node(package='agv_sensors', executable='imu_monitor',</a:t>
+            </a:r>
+            <a:br/>
+            <a:r>
+              <a:t>        parameters=[os.path.join(bringup, 'config', 'sensors.yaml')]), Node(package='agv_sensors',</a:t>
+            </a:r>
+            <a:br/>
+            <a:r>
+              <a:t>         executable='odom_path', parameters=[{'use_sim_time': True}]), Node(package='agv_vision',</a:t>
             </a:r>
             <a:br/>
             <a:r>
@@ -9230,23 +9602,31 @@
             </a:r>
             <a:br/>
             <a:r>
-              <a:t>        parameters=[os.path.join(bringup, 'config', 'mission.yaml')]), Node(package='agv_control',</a:t>
-            </a:r>
-            <a:br/>
-            <a:r>
-              <a:t>         executable='safety_controller', parameters=[os.path.join(bringup, 'config',</a:t>
-            </a:r>
-            <a:br/>
-            <a:r>
-              <a:t>        'mission.yaml')]), Node(package='rviz2', executable='rviz2', arguments=['-d',</a:t>
-            </a:r>
-            <a:br/>
-            <a:r>
-              <a:t>        os.path.join(description, 'rviz', 'agv.rviz')],</a:t>
-            </a:r>
-            <a:br/>
-            <a:r>
-              <a:t>        condition=IfCondition(LaunchConfiguration('rviz')))])</a:t>
+              <a:t>        parameters=[os.path.join(bringup, 'config', 'mission.yaml')],</a:t>
+            </a:r>
+            <a:br/>
+            <a:r>
+              <a:t>        condition=IfCondition(LaunchConfiguration('autonomy'))), Node(package='agv_mission',</a:t>
+            </a:r>
+            <a:br/>
+            <a:r>
+              <a:t>         executable='mission_markers', parameters=[os.path.join(bringup, 'config',</a:t>
+            </a:r>
+            <a:br/>
+            <a:r>
+              <a:t>        'mission.yaml')], condition=IfCondition(LaunchConfiguration('autonomy'))),</a:t>
+            </a:r>
+            <a:br/>
+            <a:r>
+              <a:t>        Node(package='agv_control', executable='safety_controller',</a:t>
+            </a:r>
+            <a:br/>
+            <a:r>
+              <a:t>        parameters=[os.path.join(bringup, 'config', 'mission.yaml')],</a:t>
+            </a:r>
+            <a:br/>
+            <a:r>
+              <a:t>        condition=IfCondition(LaunchConfiguration('autonomy'))), Node(package='rviz2',</a:t>
             </a:r>
           </a:p>
         </p:txBody>
@@ -9285,7 +9665,7 @@
               </a:defRPr>
             </a:pPr>
             <a:r>
-              <a:t>파일 전체 3/3 · 이 슬라이드 다음에 같은 파일의 나머지 줄이 이어집니다.</a:t>
+              <a:t>파일 전체 3/4 · 이 슬라이드 다음에 같은 파일의 나머지 줄이 이어집니다.</a:t>
             </a:r>
           </a:p>
         </p:txBody>
@@ -9342,7 +9722,7 @@
               </a:defRPr>
             </a:pPr>
             <a:r>
-              <a:t>파일을 새로 만들고 저장한다 (1/1)</a:t>
+              <a:t>파일을 계속 작성하고 저장한다 (4/4)</a:t>
             </a:r>
           </a:p>
         </p:txBody>
@@ -9381,7 +9761,7 @@
               </a:defRPr>
             </a:pPr>
             <a:r>
-              <a:t>~/agv_ws/src/agv_bringup/config/mission.yaml</a:t>
+              <a:t>~/ros2_curri/agv_ws/src/agv_bringup/launch/agv_sim.launch.py</a:t>
             </a:r>
           </a:p>
         </p:txBody>
@@ -9517,7 +9897,7 @@
               </a:defRPr>
             </a:pPr>
             <a:r>
-              <a:t>현재 단계 7/8    |    현재 폴더 ~/agv_ws    |    현재 터미널</a:t>
+              <a:t>현재 단계 7/8    |    현재 폴더 ~/ros2_curri/agv_ws    |    현재 터미널</a:t>
             </a:r>
           </a:p>
         </p:txBody>
@@ -9614,11 +9994,11 @@
               </a:defRPr>
             </a:pPr>
             <a:r>
-              <a:t>파일 생성: mkdir -p ~/agv_ws/src/agv_bringup/config</a:t>
-            </a:r>
-            <a:br/>
-            <a:r>
-              <a:t>파일 열기: nano ~/agv_ws/src/agv_bringup/config/mission.yaml</a:t>
+              <a:t>파일 생성: mkdir -p ~/ros2_curri/agv_ws/src/agv_bringup/launch</a:t>
+            </a:r>
+            <a:br/>
+            <a:r>
+              <a:t>파일 열기: nano ~/ros2_curri/agv_ws/src/agv_bringup/launch/agv_sim.launch.py</a:t>
             </a:r>
           </a:p>
         </p:txBody>
@@ -9676,51 +10056,11 @@
               </a:defRPr>
             </a:pPr>
             <a:r>
-              <a:t>mission_manager:</a:t>
-            </a:r>
-            <a:br/>
-            <a:r>
-              <a:t>  ros__parameters:</a:t>
-            </a:r>
-            <a:br/>
-            <a:r>
-              <a:t>    use_sim_time: true</a:t>
-            </a:r>
-            <a:br/>
-            <a:r>
-              <a:t>    stop_distance: 0.50</a:t>
-            </a:r>
-            <a:br/>
-            <a:r>
-              <a:t>    search_speed: 0.25</a:t>
-            </a:r>
-            <a:br/>
-            <a:r>
-              <a:t>    approach_speed: 0.15</a:t>
-            </a:r>
-            <a:br/>
-            <a:r>
-              <a:t>    image_center_x: 320</a:t>
-            </a:r>
-            <a:br/>
-            <a:r>
-              <a:t>safety_controller:</a:t>
-            </a:r>
-            <a:br/>
-            <a:r>
-              <a:t>  ros__parameters:</a:t>
-            </a:r>
-            <a:br/>
-            <a:r>
-              <a:t>    use_sim_time: true</a:t>
-            </a:r>
-            <a:br/>
-            <a:r>
-              <a:t>    stop_distance: 0.50</a:t>
-            </a:r>
-            <a:br/>
-            <a:r>
-              <a:t>    front_half_angle_deg: 15.0</a:t>
+              <a:t>        executable='rviz2', arguments=['-d', os.path.join(description, 'rviz',</a:t>
+            </a:r>
+            <a:br/>
+            <a:r>
+              <a:t>        'agv.rviz')], condition=IfCondition(LaunchConfiguration('rviz')))])</a:t>
             </a:r>
           </a:p>
         </p:txBody>
@@ -9759,7 +10099,7 @@
               </a:defRPr>
             </a:pPr>
             <a:r>
-              <a:t>파일 전체 1/1 · 이 슬라이드 다음에 같은 파일의 나머지 줄이 이어집니다.</a:t>
+              <a:t>파일 전체 4/4 · 이 슬라이드 다음에 같은 파일의 나머지 줄이 이어집니다.</a:t>
             </a:r>
           </a:p>
         </p:txBody>
@@ -9816,7 +10156,7 @@
               </a:defRPr>
             </a:pPr>
             <a:r>
-              <a:t>파일을 새로 만들고 저장한다 (1/11)</a:t>
+              <a:t>파일을 새로 만들고 저장한다 (1/2)</a:t>
             </a:r>
           </a:p>
         </p:txBody>
@@ -9855,7 +10195,7 @@
               </a:defRPr>
             </a:pPr>
             <a:r>
-              <a:t>~/agv_ws/src/agv_gazebo/worlds/warehouse.sdf</a:t>
+              <a:t>~/ros2_curri/agv_ws/src/agv_bringup/config/mission.yaml</a:t>
             </a:r>
           </a:p>
         </p:txBody>
@@ -9991,7 +10331,7 @@
               </a:defRPr>
             </a:pPr>
             <a:r>
-              <a:t>현재 단계 8/19    |    현재 폴더 ~/agv_ws    |    현재 터미널</a:t>
+              <a:t>현재 단계 8/10    |    현재 폴더 ~/ros2_curri/agv_ws    |    현재 터미널</a:t>
             </a:r>
           </a:p>
         </p:txBody>
@@ -10088,11 +10428,11 @@
               </a:defRPr>
             </a:pPr>
             <a:r>
-              <a:t>파일 생성: mkdir -p ~/agv_ws/src/agv_gazebo/worlds</a:t>
-            </a:r>
-            <a:br/>
-            <a:r>
-              <a:t>파일 열기: nano ~/agv_ws/src/agv_gazebo/worlds/warehouse.sdf</a:t>
+              <a:t>파일 생성: mkdir -p ~/ros2_curri/agv_ws/src/agv_bringup/config</a:t>
+            </a:r>
+            <a:br/>
+            <a:r>
+              <a:t>파일 열기: nano ~/ros2_curri/agv_ws/src/agv_bringup/config/mission.yaml</a:t>
             </a:r>
           </a:p>
         </p:txBody>
@@ -10150,51 +10490,51 @@
               </a:defRPr>
             </a:pPr>
             <a:r>
-              <a:t>&lt;?xml version="1.0" ?&gt;</a:t>
-            </a:r>
-            <a:br/>
-            <a:r>
-              <a:t>&lt;sdf version="1.10"&gt;</a:t>
-            </a:r>
-            <a:br/>
-            <a:r>
-              <a:t>  &lt;world name="warehouse"&gt;</a:t>
-            </a:r>
-            <a:br/>
-            <a:r>
-              <a:t>    </a:t>
-            </a:r>
-            <a:br/>
-            <a:r>
-              <a:t>  </a:t>
-            </a:r>
-            <a:br/>
-            <a:r>
-              <a:t>    &lt;gravity&gt;0 0 -9.8&lt;/gravity&gt;</a:t>
-            </a:r>
-            <a:br/>
-            <a:r>
-              <a:t>    </a:t>
-            </a:r>
-            <a:br/>
-            <a:r>
-              <a:t>  </a:t>
-            </a:r>
-            <a:br/>
-            <a:r>
-              <a:t>    &lt;plugin filename="gz-sim-physics-system" name="gz::sim::systems::Physics"/&gt;</a:t>
-            </a:r>
-            <a:br/>
-            <a:r>
-              <a:t>    &lt;plugin filename="gz-sim-user-commands-system"</a:t>
-            </a:r>
-            <a:br/>
-            <a:r>
-              <a:t>      name="gz::sim::systems::UserCommands"/&gt;</a:t>
-            </a:r>
-            <a:br/>
-            <a:r>
-              <a:t>    &lt;plugin filename="gz-sim-scene-broadcaster-system"</a:t>
+              <a:t>mission_manager:</a:t>
+            </a:r>
+            <a:br/>
+            <a:r>
+              <a:t>  ros__parameters:</a:t>
+            </a:r>
+            <a:br/>
+            <a:r>
+              <a:t>    use_sim_time: true</a:t>
+            </a:r>
+            <a:br/>
+            <a:r>
+              <a:t>    stop_distance: 0.50</a:t>
+            </a:r>
+            <a:br/>
+            <a:r>
+              <a:t>    search_speed: 0.25</a:t>
+            </a:r>
+            <a:br/>
+            <a:r>
+              <a:t>    approach_speed: 0.15</a:t>
+            </a:r>
+            <a:br/>
+            <a:r>
+              <a:t>    image_center_x: 320</a:t>
+            </a:r>
+            <a:br/>
+            <a:r>
+              <a:t>    target_timeout_sec: 0.70</a:t>
+            </a:r>
+            <a:br/>
+            <a:r>
+              <a:t>safety_controller:</a:t>
+            </a:r>
+            <a:br/>
+            <a:r>
+              <a:t>  ros__parameters:</a:t>
+            </a:r>
+            <a:br/>
+            <a:r>
+              <a:t>    use_sim_time: true</a:t>
+            </a:r>
+            <a:br/>
+            <a:r>
+              <a:t>    stop_distance: 0.50</a:t>
             </a:r>
           </a:p>
         </p:txBody>
@@ -10233,7 +10573,7 @@
               </a:defRPr>
             </a:pPr>
             <a:r>
-              <a:t>파일 전체 1/11 · 이 슬라이드 다음에 같은 파일의 나머지 줄이 이어집니다.</a:t>
+              <a:t>파일 전체 1/2 · 이 슬라이드 다음에 같은 파일의 나머지 줄이 이어집니다.</a:t>
             </a:r>
           </a:p>
         </p:txBody>
@@ -10290,7 +10630,7 @@
               </a:defRPr>
             </a:pPr>
             <a:r>
-              <a:t>파일을 계속 작성하고 저장한다 (2/11)</a:t>
+              <a:t>파일을 계속 작성하고 저장한다 (2/2)</a:t>
             </a:r>
           </a:p>
         </p:txBody>
@@ -10329,7 +10669,7 @@
               </a:defRPr>
             </a:pPr>
             <a:r>
-              <a:t>~/agv_ws/src/agv_gazebo/worlds/warehouse.sdf</a:t>
+              <a:t>~/ros2_curri/agv_ws/src/agv_bringup/config/mission.yaml</a:t>
             </a:r>
           </a:p>
         </p:txBody>
@@ -10465,7 +10805,7 @@
               </a:defRPr>
             </a:pPr>
             <a:r>
-              <a:t>현재 단계 9/19    |    현재 폴더 ~/agv_ws    |    현재 터미널</a:t>
+              <a:t>현재 단계 9/10    |    현재 폴더 ~/ros2_curri/agv_ws    |    현재 터미널</a:t>
             </a:r>
           </a:p>
         </p:txBody>
@@ -10562,11 +10902,11 @@
               </a:defRPr>
             </a:pPr>
             <a:r>
-              <a:t>파일 생성: mkdir -p ~/agv_ws/src/agv_gazebo/worlds</a:t>
-            </a:r>
-            <a:br/>
-            <a:r>
-              <a:t>파일 열기: nano ~/agv_ws/src/agv_gazebo/worlds/warehouse.sdf</a:t>
+              <a:t>파일 생성: mkdir -p ~/ros2_curri/agv_ws/src/agv_bringup/config</a:t>
+            </a:r>
+            <a:br/>
+            <a:r>
+              <a:t>파일 열기: nano ~/ros2_curri/agv_ws/src/agv_bringup/config/mission.yaml</a:t>
             </a:r>
           </a:p>
         </p:txBody>
@@ -10624,51 +10964,7 @@
               </a:defRPr>
             </a:pPr>
             <a:r>
-              <a:t>      name="gz::sim::systems::SceneBroadcaster"/&gt;</a:t>
-            </a:r>
-            <a:br/>
-            <a:r>
-              <a:t>    &lt;plugin filename="gz-sim-sensors-system" name="gz::sim::systems::Sensors"/&gt;</a:t>
-            </a:r>
-            <a:br/>
-            <a:r>
-              <a:t>    </a:t>
-            </a:r>
-            <a:br/>
-            <a:r>
-              <a:t>  </a:t>
-            </a:r>
-            <a:br/>
-            <a:r>
-              <a:t>    &lt;light type="directional" name="sun"&gt;</a:t>
-            </a:r>
-            <a:br/>
-            <a:r>
-              <a:t>      &lt;pose&gt;0 0 10 0 0 0&lt;/pose&gt;</a:t>
-            </a:r>
-            <a:br/>
-            <a:r>
-              <a:t>      &lt;cast_shadows&gt;true&lt;/cast_shadows&gt;</a:t>
-            </a:r>
-            <a:br/>
-            <a:r>
-              <a:t>      &lt;direction&gt;-0.5 0.1 -0.9&lt;/direction&gt;</a:t>
-            </a:r>
-            <a:br/>
-            <a:r>
-              <a:t>    &lt;/light&gt;</a:t>
-            </a:r>
-            <a:br/>
-            <a:r>
-              <a:t>    </a:t>
-            </a:r>
-            <a:br/>
-            <a:r>
-              <a:t>  </a:t>
-            </a:r>
-            <a:br/>
-            <a:r>
-              <a:t>    &lt;model name="ground"&gt;</a:t>
+              <a:t>    front_half_angle_deg: 15.0</a:t>
             </a:r>
           </a:p>
         </p:txBody>
@@ -10707,7 +11003,7 @@
               </a:defRPr>
             </a:pPr>
             <a:r>
-              <a:t>파일 전체 2/11 · 이 슬라이드 다음에 같은 파일의 나머지 줄이 이어집니다.</a:t>
+              <a:t>파일 전체 2/2 · 이 슬라이드 다음에 같은 파일의 나머지 줄이 이어집니다.</a:t>
             </a:r>
           </a:p>
         </p:txBody>
@@ -10764,7 +11060,7 @@
               </a:defRPr>
             </a:pPr>
             <a:r>
-              <a:t>파일을 계속 작성하고 저장한다 (3/11)</a:t>
+              <a:t>파일을 새로 만들고 저장한다 (1/11)</a:t>
             </a:r>
           </a:p>
         </p:txBody>
@@ -10803,7 +11099,7 @@
               </a:defRPr>
             </a:pPr>
             <a:r>
-              <a:t>~/agv_ws/src/agv_gazebo/worlds/warehouse.sdf</a:t>
+              <a:t>~/ros2_curri/agv_ws/src/agv_gazebo/worlds/warehouse.sdf</a:t>
             </a:r>
           </a:p>
         </p:txBody>
@@ -10939,7 +11235,7 @@
               </a:defRPr>
             </a:pPr>
             <a:r>
-              <a:t>현재 단계 10/19    |    현재 폴더 ~/agv_ws    |    현재 터미널</a:t>
+              <a:t>현재 단계 10/21    |    현재 폴더 ~/ros2_curri/agv_ws    |    현재 터미널</a:t>
             </a:r>
           </a:p>
         </p:txBody>
@@ -11036,11 +11332,11 @@
               </a:defRPr>
             </a:pPr>
             <a:r>
-              <a:t>파일 생성: mkdir -p ~/agv_ws/src/agv_gazebo/worlds</a:t>
-            </a:r>
-            <a:br/>
-            <a:r>
-              <a:t>파일 열기: nano ~/agv_ws/src/agv_gazebo/worlds/warehouse.sdf</a:t>
+              <a:t>파일 생성: mkdir -p ~/ros2_curri/agv_ws/src/agv_gazebo/worlds</a:t>
+            </a:r>
+            <a:br/>
+            <a:r>
+              <a:t>파일 열기: nano ~/ros2_curri/agv_ws/src/agv_gazebo/worlds/warehouse.sdf</a:t>
             </a:r>
           </a:p>
         </p:txBody>
@@ -11098,51 +11394,51 @@
               </a:defRPr>
             </a:pPr>
             <a:r>
-              <a:t>      &lt;static&gt;true&lt;/static&gt;</a:t>
-            </a:r>
-            <a:br/>
-            <a:r>
-              <a:t>      &lt;link name="link"&gt;</a:t>
-            </a:r>
-            <a:br/>
-            <a:r>
-              <a:t>        &lt;collision name="collision"&gt;</a:t>
-            </a:r>
-            <a:br/>
-            <a:r>
-              <a:t>          &lt;geometry&gt;</a:t>
-            </a:r>
-            <a:br/>
-            <a:r>
-              <a:t>            &lt;plane&gt;</a:t>
-            </a:r>
-            <a:br/>
-            <a:r>
-              <a:t>              &lt;normal&gt;0 0 1&lt;/normal&gt;</a:t>
-            </a:r>
-            <a:br/>
-            <a:r>
-              <a:t>              &lt;size&gt;30 30&lt;/size&gt;</a:t>
-            </a:r>
-            <a:br/>
-            <a:r>
-              <a:t>            &lt;/plane&gt;</a:t>
-            </a:r>
-            <a:br/>
-            <a:r>
-              <a:t>          &lt;/geometry&gt;</a:t>
-            </a:r>
-            <a:br/>
-            <a:r>
-              <a:t>        &lt;/collision&gt;</a:t>
-            </a:r>
-            <a:br/>
-            <a:r>
-              <a:t>        &lt;visual name="visual"&gt;</a:t>
-            </a:r>
-            <a:br/>
-            <a:r>
-              <a:t>          &lt;geometry&gt;</a:t>
+              <a:t>&lt;?xml version="1.0" ?&gt;</a:t>
+            </a:r>
+            <a:br/>
+            <a:r>
+              <a:t>&lt;sdf version="1.10"&gt;</a:t>
+            </a:r>
+            <a:br/>
+            <a:r>
+              <a:t>  &lt;world name="warehouse"&gt;</a:t>
+            </a:r>
+            <a:br/>
+            <a:r>
+              <a:t>    </a:t>
+            </a:r>
+            <a:br/>
+            <a:r>
+              <a:t>  </a:t>
+            </a:r>
+            <a:br/>
+            <a:r>
+              <a:t>    &lt;gravity&gt;0 0 -9.8&lt;/gravity&gt;</a:t>
+            </a:r>
+            <a:br/>
+            <a:r>
+              <a:t>    </a:t>
+            </a:r>
+            <a:br/>
+            <a:r>
+              <a:t>  </a:t>
+            </a:r>
+            <a:br/>
+            <a:r>
+              <a:t>    &lt;plugin filename="gz-sim-physics-system" name="gz::sim::systems::Physics"/&gt;</a:t>
+            </a:r>
+            <a:br/>
+            <a:r>
+              <a:t>    &lt;plugin filename="gz-sim-user-commands-system"</a:t>
+            </a:r>
+            <a:br/>
+            <a:r>
+              <a:t>      name="gz::sim::systems::UserCommands"/&gt;</a:t>
+            </a:r>
+            <a:br/>
+            <a:r>
+              <a:t>    &lt;plugin filename="gz-sim-scene-broadcaster-system"</a:t>
             </a:r>
           </a:p>
         </p:txBody>
@@ -11181,7 +11477,7 @@
               </a:defRPr>
             </a:pPr>
             <a:r>
-              <a:t>파일 전체 3/11 · 이 슬라이드 다음에 같은 파일의 나머지 줄이 이어집니다.</a:t>
+              <a:t>파일 전체 1/11 · 이 슬라이드 다음에 같은 파일의 나머지 줄이 이어집니다.</a:t>
             </a:r>
           </a:p>
         </p:txBody>
@@ -11238,7 +11534,7 @@
               </a:defRPr>
             </a:pPr>
             <a:r>
-              <a:t>파일을 계속 작성하고 저장한다 (4/11)</a:t>
+              <a:t>파일을 계속 작성하고 저장한다 (2/11)</a:t>
             </a:r>
           </a:p>
         </p:txBody>
@@ -11277,7 +11573,7 @@
               </a:defRPr>
             </a:pPr>
             <a:r>
-              <a:t>~/agv_ws/src/agv_gazebo/worlds/warehouse.sdf</a:t>
+              <a:t>~/ros2_curri/agv_ws/src/agv_gazebo/worlds/warehouse.sdf</a:t>
             </a:r>
           </a:p>
         </p:txBody>
@@ -11413,7 +11709,7 @@
               </a:defRPr>
             </a:pPr>
             <a:r>
-              <a:t>현재 단계 11/19    |    현재 폴더 ~/agv_ws    |    현재 터미널</a:t>
+              <a:t>현재 단계 11/21    |    현재 폴더 ~/ros2_curri/agv_ws    |    현재 터미널</a:t>
             </a:r>
           </a:p>
         </p:txBody>
@@ -11510,11 +11806,11 @@
               </a:defRPr>
             </a:pPr>
             <a:r>
-              <a:t>파일 생성: mkdir -p ~/agv_ws/src/agv_gazebo/worlds</a:t>
-            </a:r>
-            <a:br/>
-            <a:r>
-              <a:t>파일 열기: nano ~/agv_ws/src/agv_gazebo/worlds/warehouse.sdf</a:t>
+              <a:t>파일 생성: mkdir -p ~/ros2_curri/agv_ws/src/agv_gazebo/worlds</a:t>
+            </a:r>
+            <a:br/>
+            <a:r>
+              <a:t>파일 열기: nano ~/ros2_curri/agv_ws/src/agv_gazebo/worlds/warehouse.sdf</a:t>
             </a:r>
           </a:p>
         </p:txBody>
@@ -11572,51 +11868,51 @@
               </a:defRPr>
             </a:pPr>
             <a:r>
-              <a:t>            &lt;plane&gt;</a:t>
-            </a:r>
-            <a:br/>
-            <a:r>
-              <a:t>              &lt;normal&gt;0 0 1&lt;/normal&gt;</a:t>
-            </a:r>
-            <a:br/>
-            <a:r>
-              <a:t>              &lt;size&gt;30 30&lt;/size&gt;</a:t>
-            </a:r>
-            <a:br/>
-            <a:r>
-              <a:t>            &lt;/plane&gt;</a:t>
-            </a:r>
-            <a:br/>
-            <a:r>
-              <a:t>          &lt;/geometry&gt;</a:t>
-            </a:r>
-            <a:br/>
-            <a:r>
-              <a:t>          &lt;material&gt;</a:t>
-            </a:r>
-            <a:br/>
-            <a:r>
-              <a:t>            &lt;diffuse&gt;0.65 0.65 0.65 1&lt;/diffuse&gt;</a:t>
-            </a:r>
-            <a:br/>
-            <a:r>
-              <a:t>          &lt;/material&gt;</a:t>
-            </a:r>
-            <a:br/>
-            <a:r>
-              <a:t>        &lt;/visual&gt;</a:t>
-            </a:r>
-            <a:br/>
-            <a:r>
-              <a:t>      &lt;/link&gt;</a:t>
-            </a:r>
-            <a:br/>
-            <a:r>
-              <a:t>    &lt;/model&gt;</a:t>
+              <a:t>      name="gz::sim::systems::SceneBroadcaster"/&gt;</a:t>
+            </a:r>
+            <a:br/>
+            <a:r>
+              <a:t>    &lt;plugin filename="gz-sim-sensors-system" name="gz::sim::systems::Sensors"/&gt;</a:t>
             </a:r>
             <a:br/>
             <a:r>
               <a:t>    </a:t>
+            </a:r>
+            <a:br/>
+            <a:r>
+              <a:t>  </a:t>
+            </a:r>
+            <a:br/>
+            <a:r>
+              <a:t>    &lt;light type="directional" name="sun"&gt;</a:t>
+            </a:r>
+            <a:br/>
+            <a:r>
+              <a:t>      &lt;pose&gt;0 0 10 0 0 0&lt;/pose&gt;</a:t>
+            </a:r>
+            <a:br/>
+            <a:r>
+              <a:t>      &lt;cast_shadows&gt;true&lt;/cast_shadows&gt;</a:t>
+            </a:r>
+            <a:br/>
+            <a:r>
+              <a:t>      &lt;direction&gt;-0.5 0.1 -0.9&lt;/direction&gt;</a:t>
+            </a:r>
+            <a:br/>
+            <a:r>
+              <a:t>    &lt;/light&gt;</a:t>
+            </a:r>
+            <a:br/>
+            <a:r>
+              <a:t>    </a:t>
+            </a:r>
+            <a:br/>
+            <a:r>
+              <a:t>  </a:t>
+            </a:r>
+            <a:br/>
+            <a:r>
+              <a:t>    &lt;model name="ground"&gt;</a:t>
             </a:r>
           </a:p>
         </p:txBody>
@@ -11655,7 +11951,7 @@
               </a:defRPr>
             </a:pPr>
             <a:r>
-              <a:t>파일 전체 4/11 · 이 슬라이드 다음에 같은 파일의 나머지 줄이 이어집니다.</a:t>
+              <a:t>파일 전체 2/11 · 이 슬라이드 다음에 같은 파일의 나머지 줄이 이어집니다.</a:t>
             </a:r>
           </a:p>
         </p:txBody>
@@ -11712,7 +12008,7 @@
               </a:defRPr>
             </a:pPr>
             <a:r>
-              <a:t>파일을 계속 작성하고 저장한다 (5/11)</a:t>
+              <a:t>파일을 계속 작성하고 저장한다 (3/11)</a:t>
             </a:r>
           </a:p>
         </p:txBody>
@@ -11751,7 +12047,7 @@
               </a:defRPr>
             </a:pPr>
             <a:r>
-              <a:t>~/agv_ws/src/agv_gazebo/worlds/warehouse.sdf</a:t>
+              <a:t>~/ros2_curri/agv_ws/src/agv_gazebo/worlds/warehouse.sdf</a:t>
             </a:r>
           </a:p>
         </p:txBody>
@@ -11887,7 +12183,7 @@
               </a:defRPr>
             </a:pPr>
             <a:r>
-              <a:t>현재 단계 12/19    |    현재 폴더 ~/agv_ws    |    현재 터미널</a:t>
+              <a:t>현재 단계 12/21    |    현재 폴더 ~/ros2_curri/agv_ws    |    현재 터미널</a:t>
             </a:r>
           </a:p>
         </p:txBody>
@@ -11984,11 +12280,11 @@
               </a:defRPr>
             </a:pPr>
             <a:r>
-              <a:t>파일 생성: mkdir -p ~/agv_ws/src/agv_gazebo/worlds</a:t>
-            </a:r>
-            <a:br/>
-            <a:r>
-              <a:t>파일 열기: nano ~/agv_ws/src/agv_gazebo/worlds/warehouse.sdf</a:t>
+              <a:t>파일 생성: mkdir -p ~/ros2_curri/agv_ws/src/agv_gazebo/worlds</a:t>
+            </a:r>
+            <a:br/>
+            <a:r>
+              <a:t>파일 열기: nano ~/ros2_curri/agv_ws/src/agv_gazebo/worlds/warehouse.sdf</a:t>
             </a:r>
           </a:p>
         </p:txBody>
@@ -12046,27 +12342,15 @@
               </a:defRPr>
             </a:pPr>
             <a:r>
-              <a:t>  </a:t>
-            </a:r>
-            <a:br/>
-            <a:r>
-              <a:t>    &lt;model name="wall_north"&gt;</a:t>
-            </a:r>
-            <a:br/>
-            <a:r>
               <a:t>      &lt;static&gt;true&lt;/static&gt;</a:t>
             </a:r>
             <a:br/>
             <a:r>
-              <a:t>      &lt;pose&gt;0 4 1 0 0 0&lt;/pose&gt;</a:t>
-            </a:r>
-            <a:br/>
-            <a:r>
               <a:t>      &lt;link name="link"&gt;</a:t>
             </a:r>
             <a:br/>
             <a:r>
-              <a:t>        &lt;collision name="c"&gt;</a:t>
+              <a:t>        &lt;collision name="collision"&gt;</a:t>
             </a:r>
             <a:br/>
             <a:r>
@@ -12074,15 +12358,19 @@
             </a:r>
             <a:br/>
             <a:r>
-              <a:t>            &lt;box&gt;</a:t>
-            </a:r>
-            <a:br/>
-            <a:r>
-              <a:t>              &lt;size&gt;8 0.15 2&lt;/size&gt;</a:t>
-            </a:r>
-            <a:br/>
-            <a:r>
-              <a:t>            &lt;/box&gt;</a:t>
+              <a:t>            &lt;plane&gt;</a:t>
+            </a:r>
+            <a:br/>
+            <a:r>
+              <a:t>              &lt;normal&gt;0 0 1&lt;/normal&gt;</a:t>
+            </a:r>
+            <a:br/>
+            <a:r>
+              <a:t>              &lt;size&gt;30 30&lt;/size&gt;</a:t>
+            </a:r>
+            <a:br/>
+            <a:r>
+              <a:t>            &lt;/plane&gt;</a:t>
             </a:r>
             <a:br/>
             <a:r>
@@ -12091,6 +12379,14 @@
             <a:br/>
             <a:r>
               <a:t>        &lt;/collision&gt;</a:t>
+            </a:r>
+            <a:br/>
+            <a:r>
+              <a:t>        &lt;visual name="visual"&gt;</a:t>
+            </a:r>
+            <a:br/>
+            <a:r>
+              <a:t>          &lt;geometry&gt;</a:t>
             </a:r>
           </a:p>
         </p:txBody>
@@ -12129,7 +12425,7 @@
               </a:defRPr>
             </a:pPr>
             <a:r>
-              <a:t>파일 전체 5/11 · 이 슬라이드 다음에 같은 파일의 나머지 줄이 이어집니다.</a:t>
+              <a:t>파일 전체 3/11 · 이 슬라이드 다음에 같은 파일의 나머지 줄이 이어집니다.</a:t>
             </a:r>
           </a:p>
         </p:txBody>
@@ -12186,7 +12482,7 @@
               </a:defRPr>
             </a:pPr>
             <a:r>
-              <a:t>파일을 계속 작성하고 저장한다 (6/11)</a:t>
+              <a:t>파일을 계속 작성하고 저장한다 (4/11)</a:t>
             </a:r>
           </a:p>
         </p:txBody>
@@ -12225,7 +12521,7 @@
               </a:defRPr>
             </a:pPr>
             <a:r>
-              <a:t>~/agv_ws/src/agv_gazebo/worlds/warehouse.sdf</a:t>
+              <a:t>~/ros2_curri/agv_ws/src/agv_gazebo/worlds/warehouse.sdf</a:t>
             </a:r>
           </a:p>
         </p:txBody>
@@ -12361,7 +12657,7 @@
               </a:defRPr>
             </a:pPr>
             <a:r>
-              <a:t>현재 단계 13/19    |    현재 폴더 ~/agv_ws    |    현재 터미널</a:t>
+              <a:t>현재 단계 13/21    |    현재 폴더 ~/ros2_curri/agv_ws    |    현재 터미널</a:t>
             </a:r>
           </a:p>
         </p:txBody>
@@ -12458,11 +12754,11 @@
               </a:defRPr>
             </a:pPr>
             <a:r>
-              <a:t>파일 생성: mkdir -p ~/agv_ws/src/agv_gazebo/worlds</a:t>
-            </a:r>
-            <a:br/>
-            <a:r>
-              <a:t>파일 열기: nano ~/agv_ws/src/agv_gazebo/worlds/warehouse.sdf</a:t>
+              <a:t>파일 생성: mkdir -p ~/ros2_curri/agv_ws/src/agv_gazebo/worlds</a:t>
+            </a:r>
+            <a:br/>
+            <a:r>
+              <a:t>파일 열기: nano ~/ros2_curri/agv_ws/src/agv_gazebo/worlds/warehouse.sdf</a:t>
             </a:r>
           </a:p>
         </p:txBody>
@@ -12520,23 +12816,19 @@
               </a:defRPr>
             </a:pPr>
             <a:r>
-              <a:t>        &lt;visual name="v"&gt;</a:t>
-            </a:r>
-            <a:br/>
-            <a:r>
-              <a:t>          &lt;geometry&gt;</a:t>
-            </a:r>
-            <a:br/>
-            <a:r>
-              <a:t>            &lt;box&gt;</a:t>
-            </a:r>
-            <a:br/>
-            <a:r>
-              <a:t>              &lt;size&gt;8 0.15 2&lt;/size&gt;</a:t>
-            </a:r>
-            <a:br/>
-            <a:r>
-              <a:t>            &lt;/box&gt;</a:t>
+              <a:t>            &lt;plane&gt;</a:t>
+            </a:r>
+            <a:br/>
+            <a:r>
+              <a:t>              &lt;normal&gt;0 0 1&lt;/normal&gt;</a:t>
+            </a:r>
+            <a:br/>
+            <a:r>
+              <a:t>              &lt;size&gt;30 30&lt;/size&gt;</a:t>
+            </a:r>
+            <a:br/>
+            <a:r>
+              <a:t>            &lt;/plane&gt;</a:t>
             </a:r>
             <a:br/>
             <a:r>
@@ -12544,6 +12836,18 @@
             </a:r>
             <a:br/>
             <a:r>
+              <a:t>          &lt;material&gt;</a:t>
+            </a:r>
+            <a:br/>
+            <a:r>
+              <a:t>            &lt;diffuse&gt;0.65 0.65 0.65 1&lt;/diffuse&gt;</a:t>
+            </a:r>
+            <a:br/>
+            <a:r>
+              <a:t>          &lt;/material&gt;</a:t>
+            </a:r>
+            <a:br/>
+            <a:r>
               <a:t>        &lt;/visual&gt;</a:t>
             </a:r>
             <a:br/>
@@ -12557,14 +12861,6 @@
             <a:br/>
             <a:r>
               <a:t>    </a:t>
-            </a:r>
-            <a:br/>
-            <a:r>
-              <a:t>  </a:t>
-            </a:r>
-            <a:br/>
-            <a:r>
-              <a:t>    &lt;model name="obstacle"&gt;</a:t>
             </a:r>
           </a:p>
         </p:txBody>
@@ -12603,7 +12899,7 @@
               </a:defRPr>
             </a:pPr>
             <a:r>
-              <a:t>파일 전체 6/11 · 이 슬라이드 다음에 같은 파일의 나머지 줄이 이어집니다.</a:t>
+              <a:t>파일 전체 4/11 · 이 슬라이드 다음에 같은 파일의 나머지 줄이 이어집니다.</a:t>
             </a:r>
           </a:p>
         </p:txBody>
@@ -13121,7 +13417,7 @@
               </a:defRPr>
             </a:pPr>
             <a:r>
-              <a:t>파일을 계속 작성하고 저장한다 (7/11)</a:t>
+              <a:t>파일을 계속 작성하고 저장한다 (5/11)</a:t>
             </a:r>
           </a:p>
         </p:txBody>
@@ -13160,7 +13456,7 @@
               </a:defRPr>
             </a:pPr>
             <a:r>
-              <a:t>~/agv_ws/src/agv_gazebo/worlds/warehouse.sdf</a:t>
+              <a:t>~/ros2_curri/agv_ws/src/agv_gazebo/worlds/warehouse.sdf</a:t>
             </a:r>
           </a:p>
         </p:txBody>
@@ -13296,7 +13592,7 @@
               </a:defRPr>
             </a:pPr>
             <a:r>
-              <a:t>현재 단계 14/19    |    현재 폴더 ~/agv_ws    |    현재 터미널</a:t>
+              <a:t>현재 단계 14/21    |    현재 폴더 ~/ros2_curri/agv_ws    |    현재 터미널</a:t>
             </a:r>
           </a:p>
         </p:txBody>
@@ -13393,11 +13689,11 @@
               </a:defRPr>
             </a:pPr>
             <a:r>
-              <a:t>파일 생성: mkdir -p ~/agv_ws/src/agv_gazebo/worlds</a:t>
-            </a:r>
-            <a:br/>
-            <a:r>
-              <a:t>파일 열기: nano ~/agv_ws/src/agv_gazebo/worlds/warehouse.sdf</a:t>
+              <a:t>파일 생성: mkdir -p ~/ros2_curri/agv_ws/src/agv_gazebo/worlds</a:t>
+            </a:r>
+            <a:br/>
+            <a:r>
+              <a:t>파일 열기: nano ~/ros2_curri/agv_ws/src/agv_gazebo/worlds/warehouse.sdf</a:t>
             </a:r>
           </a:p>
         </p:txBody>
@@ -13455,11 +13751,19 @@
               </a:defRPr>
             </a:pPr>
             <a:r>
+              <a:t>  </a:t>
+            </a:r>
+            <a:br/>
+            <a:r>
+              <a:t>    &lt;model name="wall_north"&gt;</a:t>
+            </a:r>
+            <a:br/>
+            <a:r>
               <a:t>      &lt;static&gt;true&lt;/static&gt;</a:t>
             </a:r>
             <a:br/>
             <a:r>
-              <a:t>      &lt;pose&gt;1.5 0 0.4 0 0 0&lt;/pose&gt;</a:t>
+              <a:t>      &lt;pose&gt;0 4 1 0 0 0&lt;/pose&gt;</a:t>
             </a:r>
             <a:br/>
             <a:r>
@@ -13479,7 +13783,7 @@
             </a:r>
             <a:br/>
             <a:r>
-              <a:t>              &lt;size&gt;0.5 0.5 0.8&lt;/size&gt;</a:t>
+              <a:t>              &lt;size&gt;8 0.15 2&lt;/size&gt;</a:t>
             </a:r>
             <a:br/>
             <a:r>
@@ -13492,14 +13796,6 @@
             <a:br/>
             <a:r>
               <a:t>        &lt;/collision&gt;</a:t>
-            </a:r>
-            <a:br/>
-            <a:r>
-              <a:t>        &lt;visual name="v"&gt;</a:t>
-            </a:r>
-            <a:br/>
-            <a:r>
-              <a:t>          &lt;geometry&gt;</a:t>
             </a:r>
           </a:p>
         </p:txBody>
@@ -13538,7 +13834,7 @@
               </a:defRPr>
             </a:pPr>
             <a:r>
-              <a:t>파일 전체 7/11 · 이 슬라이드 다음에 같은 파일의 나머지 줄이 이어집니다.</a:t>
+              <a:t>파일 전체 5/11 · 이 슬라이드 다음에 같은 파일의 나머지 줄이 이어집니다.</a:t>
             </a:r>
           </a:p>
         </p:txBody>
@@ -13595,7 +13891,7 @@
               </a:defRPr>
             </a:pPr>
             <a:r>
-              <a:t>파일을 계속 작성하고 저장한다 (8/11)</a:t>
+              <a:t>파일을 계속 작성하고 저장한다 (6/11)</a:t>
             </a:r>
           </a:p>
         </p:txBody>
@@ -13634,7 +13930,7 @@
               </a:defRPr>
             </a:pPr>
             <a:r>
-              <a:t>~/agv_ws/src/agv_gazebo/worlds/warehouse.sdf</a:t>
+              <a:t>~/ros2_curri/agv_ws/src/agv_gazebo/worlds/warehouse.sdf</a:t>
             </a:r>
           </a:p>
         </p:txBody>
@@ -13770,7 +14066,7 @@
               </a:defRPr>
             </a:pPr>
             <a:r>
-              <a:t>현재 단계 15/19    |    현재 폴더 ~/agv_ws    |    현재 터미널</a:t>
+              <a:t>현재 단계 15/21    |    현재 폴더 ~/ros2_curri/agv_ws    |    현재 터미널</a:t>
             </a:r>
           </a:p>
         </p:txBody>
@@ -13867,11 +14163,11 @@
               </a:defRPr>
             </a:pPr>
             <a:r>
-              <a:t>파일 생성: mkdir -p ~/agv_ws/src/agv_gazebo/worlds</a:t>
-            </a:r>
-            <a:br/>
-            <a:r>
-              <a:t>파일 열기: nano ~/agv_ws/src/agv_gazebo/worlds/warehouse.sdf</a:t>
+              <a:t>파일 생성: mkdir -p ~/ros2_curri/agv_ws/src/agv_gazebo/worlds</a:t>
+            </a:r>
+            <a:br/>
+            <a:r>
+              <a:t>파일 열기: nano ~/ros2_curri/agv_ws/src/agv_gazebo/worlds/warehouse.sdf</a:t>
             </a:r>
           </a:p>
         </p:txBody>
@@ -13929,11 +14225,19 @@
               </a:defRPr>
             </a:pPr>
             <a:r>
+              <a:t>        &lt;visual name="v"&gt;</a:t>
+            </a:r>
+            <a:br/>
+            <a:r>
+              <a:t>          &lt;geometry&gt;</a:t>
+            </a:r>
+            <a:br/>
+            <a:r>
               <a:t>            &lt;box&gt;</a:t>
             </a:r>
             <a:br/>
             <a:r>
-              <a:t>              &lt;size&gt;0.5 0.5 0.8&lt;/size&gt;</a:t>
+              <a:t>              &lt;size&gt;8 0.15 2&lt;/size&gt;</a:t>
             </a:r>
             <a:br/>
             <a:r>
@@ -13945,18 +14249,6 @@
             </a:r>
             <a:br/>
             <a:r>
-              <a:t>          &lt;material&gt;</a:t>
-            </a:r>
-            <a:br/>
-            <a:r>
-              <a:t>            &lt;diffuse&gt;0.9 0.7 0.1 1&lt;/diffuse&gt;</a:t>
-            </a:r>
-            <a:br/>
-            <a:r>
-              <a:t>          &lt;/material&gt;</a:t>
-            </a:r>
-            <a:br/>
-            <a:r>
               <a:t>        &lt;/visual&gt;</a:t>
             </a:r>
             <a:br/>
@@ -13974,6 +14266,10 @@
             <a:br/>
             <a:r>
               <a:t>  </a:t>
+            </a:r>
+            <a:br/>
+            <a:r>
+              <a:t>    &lt;model name="obstacle"&gt;</a:t>
             </a:r>
           </a:p>
         </p:txBody>
@@ -14012,7 +14308,7 @@
               </a:defRPr>
             </a:pPr>
             <a:r>
-              <a:t>파일 전체 8/11 · 이 슬라이드 다음에 같은 파일의 나머지 줄이 이어집니다.</a:t>
+              <a:t>파일 전체 6/11 · 이 슬라이드 다음에 같은 파일의 나머지 줄이 이어집니다.</a:t>
             </a:r>
           </a:p>
         </p:txBody>
@@ -14069,7 +14365,7 @@
               </a:defRPr>
             </a:pPr>
             <a:r>
-              <a:t>파일을 계속 작성하고 저장한다 (9/11)</a:t>
+              <a:t>파일을 계속 작성하고 저장한다 (7/11)</a:t>
             </a:r>
           </a:p>
         </p:txBody>
@@ -14108,7 +14404,7 @@
               </a:defRPr>
             </a:pPr>
             <a:r>
-              <a:t>~/agv_ws/src/agv_gazebo/worlds/warehouse.sdf</a:t>
+              <a:t>~/ros2_curri/agv_ws/src/agv_gazebo/worlds/warehouse.sdf</a:t>
             </a:r>
           </a:p>
         </p:txBody>
@@ -14244,7 +14540,7 @@
               </a:defRPr>
             </a:pPr>
             <a:r>
-              <a:t>현재 단계 16/19    |    현재 폴더 ~/agv_ws    |    현재 터미널</a:t>
+              <a:t>현재 단계 16/21    |    현재 폴더 ~/ros2_curri/agv_ws    |    현재 터미널</a:t>
             </a:r>
           </a:p>
         </p:txBody>
@@ -14341,11 +14637,11 @@
               </a:defRPr>
             </a:pPr>
             <a:r>
-              <a:t>파일 생성: mkdir -p ~/agv_ws/src/agv_gazebo/worlds</a:t>
-            </a:r>
-            <a:br/>
-            <a:r>
-              <a:t>파일 열기: nano ~/agv_ws/src/agv_gazebo/worlds/warehouse.sdf</a:t>
+              <a:t>파일 생성: mkdir -p ~/ros2_curri/agv_ws/src/agv_gazebo/worlds</a:t>
+            </a:r>
+            <a:br/>
+            <a:r>
+              <a:t>파일 열기: nano ~/ros2_curri/agv_ws/src/agv_gazebo/worlds/warehouse.sdf</a:t>
             </a:r>
           </a:p>
         </p:txBody>
@@ -14403,15 +14699,11 @@
               </a:defRPr>
             </a:pPr>
             <a:r>
-              <a:t>    &lt;model name="target"&gt;</a:t>
-            </a:r>
-            <a:br/>
-            <a:r>
               <a:t>      &lt;static&gt;true&lt;/static&gt;</a:t>
             </a:r>
             <a:br/>
             <a:r>
-              <a:t>      &lt;pose&gt;3 1 0.5 0 0 0&lt;/pose&gt;</a:t>
+              <a:t>      &lt;pose&gt;1.5 -1.0 0.4 0 0 0&lt;/pose&gt;</a:t>
             </a:r>
             <a:br/>
             <a:r>
@@ -14431,7 +14723,7 @@
             </a:r>
             <a:br/>
             <a:r>
-              <a:t>              &lt;size&gt;0.25 0.25 1&lt;/size&gt;</a:t>
+              <a:t>              &lt;size&gt;0.5 0.5 0.8&lt;/size&gt;</a:t>
             </a:r>
             <a:br/>
             <a:r>
@@ -14448,6 +14740,10 @@
             <a:br/>
             <a:r>
               <a:t>        &lt;visual name="v"&gt;</a:t>
+            </a:r>
+            <a:br/>
+            <a:r>
+              <a:t>          &lt;geometry&gt;</a:t>
             </a:r>
           </a:p>
         </p:txBody>
@@ -14486,7 +14782,7 @@
               </a:defRPr>
             </a:pPr>
             <a:r>
-              <a:t>파일 전체 9/11 · 이 슬라이드 다음에 같은 파일의 나머지 줄이 이어집니다.</a:t>
+              <a:t>파일 전체 7/11 · 이 슬라이드 다음에 같은 파일의 나머지 줄이 이어집니다.</a:t>
             </a:r>
           </a:p>
         </p:txBody>
@@ -14543,7 +14839,7 @@
               </a:defRPr>
             </a:pPr>
             <a:r>
-              <a:t>파일을 계속 작성하고 저장한다 (10/11)</a:t>
+              <a:t>파일을 계속 작성하고 저장한다 (8/11)</a:t>
             </a:r>
           </a:p>
         </p:txBody>
@@ -14582,7 +14878,7 @@
               </a:defRPr>
             </a:pPr>
             <a:r>
-              <a:t>~/agv_ws/src/agv_gazebo/worlds/warehouse.sdf</a:t>
+              <a:t>~/ros2_curri/agv_ws/src/agv_gazebo/worlds/warehouse.sdf</a:t>
             </a:r>
           </a:p>
         </p:txBody>
@@ -14718,7 +15014,7 @@
               </a:defRPr>
             </a:pPr>
             <a:r>
-              <a:t>현재 단계 17/19    |    현재 폴더 ~/agv_ws    |    현재 터미널</a:t>
+              <a:t>현재 단계 17/21    |    현재 폴더 ~/ros2_curri/agv_ws    |    현재 터미널</a:t>
             </a:r>
           </a:p>
         </p:txBody>
@@ -14815,11 +15111,11 @@
               </a:defRPr>
             </a:pPr>
             <a:r>
-              <a:t>파일 생성: mkdir -p ~/agv_ws/src/agv_gazebo/worlds</a:t>
-            </a:r>
-            <a:br/>
-            <a:r>
-              <a:t>파일 열기: nano ~/agv_ws/src/agv_gazebo/worlds/warehouse.sdf</a:t>
+              <a:t>파일 생성: mkdir -p ~/ros2_curri/agv_ws/src/agv_gazebo/worlds</a:t>
+            </a:r>
+            <a:br/>
+            <a:r>
+              <a:t>파일 열기: nano ~/ros2_curri/agv_ws/src/agv_gazebo/worlds/warehouse.sdf</a:t>
             </a:r>
           </a:p>
         </p:txBody>
@@ -14877,15 +15173,11 @@
               </a:defRPr>
             </a:pPr>
             <a:r>
-              <a:t>          &lt;geometry&gt;</a:t>
-            </a:r>
-            <a:br/>
-            <a:r>
               <a:t>            &lt;box&gt;</a:t>
             </a:r>
             <a:br/>
             <a:r>
-              <a:t>              &lt;size&gt;0.25 0.25 1&lt;/size&gt;</a:t>
+              <a:t>              &lt;size&gt;0.5 0.5 0.8&lt;/size&gt;</a:t>
             </a:r>
             <a:br/>
             <a:r>
@@ -14901,7 +15193,7 @@
             </a:r>
             <a:br/>
             <a:r>
-              <a:t>            &lt;diffuse&gt;0.9 0.05 0.05 1&lt;/diffuse&gt;</a:t>
+              <a:t>            &lt;diffuse&gt;0.9 0.7 0.1 1&lt;/diffuse&gt;</a:t>
             </a:r>
             <a:br/>
             <a:r>
@@ -14922,6 +15214,10 @@
             <a:br/>
             <a:r>
               <a:t>    </a:t>
+            </a:r>
+            <a:br/>
+            <a:r>
+              <a:t>  </a:t>
             </a:r>
           </a:p>
         </p:txBody>
@@ -14960,7 +15256,7 @@
               </a:defRPr>
             </a:pPr>
             <a:r>
-              <a:t>파일 전체 10/11 · 이 슬라이드 다음에 같은 파일의 나머지 줄이 이어집니다.</a:t>
+              <a:t>파일 전체 8/11 · 이 슬라이드 다음에 같은 파일의 나머지 줄이 이어집니다.</a:t>
             </a:r>
           </a:p>
         </p:txBody>
@@ -15017,7 +15313,7 @@
               </a:defRPr>
             </a:pPr>
             <a:r>
-              <a:t>파일을 계속 작성하고 저장한다 (11/11)</a:t>
+              <a:t>파일을 계속 작성하고 저장한다 (9/11)</a:t>
             </a:r>
           </a:p>
         </p:txBody>
@@ -15056,7 +15352,7 @@
               </a:defRPr>
             </a:pPr>
             <a:r>
-              <a:t>~/agv_ws/src/agv_gazebo/worlds/warehouse.sdf</a:t>
+              <a:t>~/ros2_curri/agv_ws/src/agv_gazebo/worlds/warehouse.sdf</a:t>
             </a:r>
           </a:p>
         </p:txBody>
@@ -15192,7 +15488,7 @@
               </a:defRPr>
             </a:pPr>
             <a:r>
-              <a:t>현재 단계 18/19    |    현재 폴더 ~/agv_ws    |    현재 터미널</a:t>
+              <a:t>현재 단계 18/21    |    현재 폴더 ~/ros2_curri/agv_ws    |    현재 터미널</a:t>
             </a:r>
           </a:p>
         </p:txBody>
@@ -15289,11 +15585,11 @@
               </a:defRPr>
             </a:pPr>
             <a:r>
-              <a:t>파일 생성: mkdir -p ~/agv_ws/src/agv_gazebo/worlds</a:t>
-            </a:r>
-            <a:br/>
-            <a:r>
-              <a:t>파일 열기: nano ~/agv_ws/src/agv_gazebo/worlds/warehouse.sdf</a:t>
+              <a:t>파일 생성: mkdir -p ~/ros2_curri/agv_ws/src/agv_gazebo/worlds</a:t>
+            </a:r>
+            <a:br/>
+            <a:r>
+              <a:t>파일 열기: nano ~/ros2_curri/agv_ws/src/agv_gazebo/worlds/warehouse.sdf</a:t>
             </a:r>
           </a:p>
         </p:txBody>
@@ -15351,40 +15647,51 @@
               </a:defRPr>
             </a:pPr>
             <a:r>
-              <a:t>  </a:t>
-            </a:r>
-            <a:br/>
-            <a:r>
-              <a:t>    &lt;include&gt;</a:t>
-            </a:r>
-            <a:br/>
-            <a:r>
-              <a:t>      &lt;uri&gt;model://agv&lt;/uri&gt;</a:t>
-            </a:r>
-            <a:br/>
-            <a:r>
-              <a:t>      &lt;name&gt;agv&lt;/name&gt;</a:t>
-            </a:r>
-            <a:br/>
-            <a:r>
-              <a:t>      &lt;pose&gt;0 0 0.08 0 0 0&lt;/pose&gt;</a:t>
-            </a:r>
-            <a:br/>
-            <a:r>
-              <a:t>    &lt;/include&gt;</a:t>
-            </a:r>
-            <a:br/>
-            <a:r>
-              <a:t>    </a:t>
-            </a:r>
-            <a:br/>
-            <a:br/>
-            <a:r>
-              <a:t>  &lt;/world&gt;</a:t>
-            </a:r>
-            <a:br/>
-            <a:r>
-              <a:t>&lt;/sdf&gt;</a:t>
+              <a:t>    &lt;model name="target"&gt;</a:t>
+            </a:r>
+            <a:br/>
+            <a:r>
+              <a:t>      &lt;static&gt;true&lt;/static&gt;</a:t>
+            </a:r>
+            <a:br/>
+            <a:r>
+              <a:t>      &lt;pose&gt;1.5 0 0.5 0 0 0&lt;/pose&gt;</a:t>
+            </a:r>
+            <a:br/>
+            <a:r>
+              <a:t>      &lt;link name="link"&gt;</a:t>
+            </a:r>
+            <a:br/>
+            <a:r>
+              <a:t>        &lt;collision name="c"&gt;</a:t>
+            </a:r>
+            <a:br/>
+            <a:r>
+              <a:t>          &lt;geometry&gt;</a:t>
+            </a:r>
+            <a:br/>
+            <a:r>
+              <a:t>            &lt;box&gt;</a:t>
+            </a:r>
+            <a:br/>
+            <a:r>
+              <a:t>              &lt;size&gt;0.25 0.25 1&lt;/size&gt;</a:t>
+            </a:r>
+            <a:br/>
+            <a:r>
+              <a:t>            &lt;/box&gt;</a:t>
+            </a:r>
+            <a:br/>
+            <a:r>
+              <a:t>          &lt;/geometry&gt;</a:t>
+            </a:r>
+            <a:br/>
+            <a:r>
+              <a:t>        &lt;/collision&gt;</a:t>
+            </a:r>
+            <a:br/>
+            <a:r>
+              <a:t>        &lt;visual name="v"&gt;</a:t>
             </a:r>
           </a:p>
         </p:txBody>
@@ -15423,7 +15730,7 @@
               </a:defRPr>
             </a:pPr>
             <a:r>
-              <a:t>파일 전체 11/11 · 이 슬라이드 다음에 같은 파일의 나머지 줄이 이어집니다.</a:t>
+              <a:t>파일 전체 9/11 · 이 슬라이드 다음에 같은 파일의 나머지 줄이 이어집니다.</a:t>
             </a:r>
           </a:p>
         </p:txBody>
@@ -15480,7 +15787,7 @@
               </a:defRPr>
             </a:pPr>
             <a:r>
-              <a:t>파일을 새로 만들고 저장한다 (1/6)</a:t>
+              <a:t>파일을 계속 작성하고 저장한다 (10/11)</a:t>
             </a:r>
           </a:p>
         </p:txBody>
@@ -15519,7 +15826,7 @@
               </a:defRPr>
             </a:pPr>
             <a:r>
-              <a:t>~/agv_ws/src/agv_mission/agv_mission/mission_manager.py</a:t>
+              <a:t>~/ros2_curri/agv_ws/src/agv_gazebo/worlds/warehouse.sdf</a:t>
             </a:r>
           </a:p>
         </p:txBody>
@@ -15655,7 +15962,7 @@
               </a:defRPr>
             </a:pPr>
             <a:r>
-              <a:t>현재 단계 19/25    |    현재 폴더 ~/agv_ws    |    현재 터미널</a:t>
+              <a:t>현재 단계 19/21    |    현재 폴더 ~/ros2_curri/agv_ws    |    현재 터미널</a:t>
             </a:r>
           </a:p>
         </p:txBody>
@@ -15752,11 +16059,11 @@
               </a:defRPr>
             </a:pPr>
             <a:r>
-              <a:t>파일 생성: mkdir -p ~/agv_ws/src/agv_mission/agv_mission</a:t>
-            </a:r>
-            <a:br/>
-            <a:r>
-              <a:t>파일 열기: nano ~/agv_ws/src/agv_mission/agv_mission/mission_manager.py</a:t>
+              <a:t>파일 생성: mkdir -p ~/ros2_curri/agv_ws/src/agv_gazebo/worlds</a:t>
+            </a:r>
+            <a:br/>
+            <a:r>
+              <a:t>파일 열기: nano ~/ros2_curri/agv_ws/src/agv_gazebo/worlds/warehouse.sdf</a:t>
             </a:r>
           </a:p>
         </p:txBody>
@@ -15814,45 +16121,51 @@
               </a:defRPr>
             </a:pPr>
             <a:r>
-              <a:t>import math</a:t>
-            </a:r>
-            <a:br/>
-            <a:r>
-              <a:t>import rclpy</a:t>
-            </a:r>
-            <a:br/>
-            <a:r>
-              <a:t>from rclpy.node import Node</a:t>
-            </a:r>
-            <a:br/>
-            <a:r>
-              <a:t>from geometry_msgs.msg import Twist</a:t>
-            </a:r>
-            <a:br/>
-            <a:r>
-              <a:t>from std_msgs.msg import Float32, String</a:t>
-            </a:r>
-            <a:br/>
-            <a:r>
-              <a:t>from agv_interfaces.msg import DetectionArray</a:t>
-            </a:r>
-            <a:br/>
-            <a:br/>
-            <a:r>
-              <a:t>class MissionManager(Node):</a:t>
-            </a:r>
-            <a:br/>
-            <a:br/>
-            <a:r>
-              <a:t>    def __init__(self):</a:t>
-            </a:r>
-            <a:br/>
-            <a:r>
-              <a:t>        super().__init__('mission_manager')</a:t>
-            </a:r>
-            <a:br/>
-            <a:r>
-              <a:t>        self.declare_parameter('stop_distance', 0.5)</a:t>
+              <a:t>          &lt;geometry&gt;</a:t>
+            </a:r>
+            <a:br/>
+            <a:r>
+              <a:t>            &lt;box&gt;</a:t>
+            </a:r>
+            <a:br/>
+            <a:r>
+              <a:t>              &lt;size&gt;0.25 0.25 1&lt;/size&gt;</a:t>
+            </a:r>
+            <a:br/>
+            <a:r>
+              <a:t>            &lt;/box&gt;</a:t>
+            </a:r>
+            <a:br/>
+            <a:r>
+              <a:t>          &lt;/geometry&gt;</a:t>
+            </a:r>
+            <a:br/>
+            <a:r>
+              <a:t>          &lt;material&gt;</a:t>
+            </a:r>
+            <a:br/>
+            <a:r>
+              <a:t>            &lt;diffuse&gt;0.9 0.05 0.05 1&lt;/diffuse&gt;</a:t>
+            </a:r>
+            <a:br/>
+            <a:r>
+              <a:t>          &lt;/material&gt;</a:t>
+            </a:r>
+            <a:br/>
+            <a:r>
+              <a:t>        &lt;/visual&gt;</a:t>
+            </a:r>
+            <a:br/>
+            <a:r>
+              <a:t>      &lt;/link&gt;</a:t>
+            </a:r>
+            <a:br/>
+            <a:r>
+              <a:t>    &lt;/model&gt;</a:t>
+            </a:r>
+            <a:br/>
+            <a:r>
+              <a:t>    </a:t>
             </a:r>
           </a:p>
         </p:txBody>
@@ -15891,7 +16204,7 @@
               </a:defRPr>
             </a:pPr>
             <a:r>
-              <a:t>파일 전체 1/6 · 이 슬라이드 다음에 같은 파일의 나머지 줄이 이어집니다.</a:t>
+              <a:t>파일 전체 10/11 · 이 슬라이드 다음에 같은 파일의 나머지 줄이 이어집니다.</a:t>
             </a:r>
           </a:p>
         </p:txBody>
@@ -15948,7 +16261,7 @@
               </a:defRPr>
             </a:pPr>
             <a:r>
-              <a:t>파일을 계속 작성하고 저장한다 (2/6)</a:t>
+              <a:t>파일을 계속 작성하고 저장한다 (11/11)</a:t>
             </a:r>
           </a:p>
         </p:txBody>
@@ -15987,7 +16300,7 @@
               </a:defRPr>
             </a:pPr>
             <a:r>
-              <a:t>~/agv_ws/src/agv_mission/agv_mission/mission_manager.py</a:t>
+              <a:t>~/ros2_curri/agv_ws/src/agv_gazebo/worlds/warehouse.sdf</a:t>
             </a:r>
           </a:p>
         </p:txBody>
@@ -16123,7 +16436,7 @@
               </a:defRPr>
             </a:pPr>
             <a:r>
-              <a:t>현재 단계 20/25    |    현재 폴더 ~/agv_ws    |    현재 터미널</a:t>
+              <a:t>현재 단계 20/21    |    현재 폴더 ~/ros2_curri/agv_ws    |    현재 터미널</a:t>
             </a:r>
           </a:p>
         </p:txBody>
@@ -16220,11 +16533,11 @@
               </a:defRPr>
             </a:pPr>
             <a:r>
-              <a:t>파일 생성: mkdir -p ~/agv_ws/src/agv_mission/agv_mission</a:t>
-            </a:r>
-            <a:br/>
-            <a:r>
-              <a:t>파일 열기: nano ~/agv_ws/src/agv_mission/agv_mission/mission_manager.py</a:t>
+              <a:t>파일 생성: mkdir -p ~/ros2_curri/agv_ws/src/agv_gazebo/worlds</a:t>
+            </a:r>
+            <a:br/>
+            <a:r>
+              <a:t>파일 열기: nano ~/ros2_curri/agv_ws/src/agv_gazebo/worlds/warehouse.sdf</a:t>
             </a:r>
           </a:p>
         </p:txBody>
@@ -16282,51 +16595,40 @@
               </a:defRPr>
             </a:pPr>
             <a:r>
-              <a:t>        self.declare_parameter('search_speed', 0.25)</a:t>
-            </a:r>
-            <a:br/>
-            <a:r>
-              <a:t>        self.declare_parameter('approach_speed', 0.15)</a:t>
-            </a:r>
-            <a:br/>
-            <a:r>
-              <a:t>        self.declare_parameter('image_center_x', 320)</a:t>
-            </a:r>
-            <a:br/>
-            <a:r>
-              <a:t>        self.state = 'IDLE'</a:t>
-            </a:r>
-            <a:br/>
-            <a:r>
-              <a:t>        self.obstacle_distance = math.inf</a:t>
-            </a:r>
-            <a:br/>
-            <a:r>
-              <a:t>        self.target = None</a:t>
-            </a:r>
-            <a:br/>
-            <a:r>
-              <a:t>        self.create_subscription(Float32, '/obstacle_distance', self.obstacle_callback,</a:t>
-            </a:r>
-            <a:br/>
-            <a:r>
-              <a:t>            10)</a:t>
-            </a:r>
-            <a:br/>
-            <a:r>
-              <a:t>        self.create_subscription(DetectionArray, '/detections', self.detections_callback,</a:t>
-            </a:r>
-            <a:br/>
-            <a:r>
-              <a:t>             10)</a:t>
-            </a:r>
-            <a:br/>
-            <a:r>
-              <a:t>        self.command_publisher = self.create_publisher(Twist, '/cmd_vel_raw', 10)</a:t>
-            </a:r>
-            <a:br/>
-            <a:r>
-              <a:t>        self.state_publisher = self.create_publisher(String, '/mission_state', 10)</a:t>
+              <a:t>  </a:t>
+            </a:r>
+            <a:br/>
+            <a:r>
+              <a:t>    &lt;include&gt;</a:t>
+            </a:r>
+            <a:br/>
+            <a:r>
+              <a:t>      &lt;uri&gt;model://agv&lt;/uri&gt;</a:t>
+            </a:r>
+            <a:br/>
+            <a:r>
+              <a:t>      &lt;name&gt;agv&lt;/name&gt;</a:t>
+            </a:r>
+            <a:br/>
+            <a:r>
+              <a:t>      &lt;pose&gt;0 0 0.08 0 0 0&lt;/pose&gt;</a:t>
+            </a:r>
+            <a:br/>
+            <a:r>
+              <a:t>    &lt;/include&gt;</a:t>
+            </a:r>
+            <a:br/>
+            <a:r>
+              <a:t>    </a:t>
+            </a:r>
+            <a:br/>
+            <a:br/>
+            <a:r>
+              <a:t>  &lt;/world&gt;</a:t>
+            </a:r>
+            <a:br/>
+            <a:r>
+              <a:t>&lt;/sdf&gt;</a:t>
             </a:r>
           </a:p>
         </p:txBody>
@@ -16365,7 +16667,7 @@
               </a:defRPr>
             </a:pPr>
             <a:r>
-              <a:t>파일 전체 2/6 · 이 슬라이드 다음에 같은 파일의 나머지 줄이 이어집니다.</a:t>
+              <a:t>파일 전체 11/11 · 이 슬라이드 다음에 같은 파일의 나머지 줄이 이어집니다.</a:t>
             </a:r>
           </a:p>
         </p:txBody>
@@ -16422,7 +16724,7 @@
               </a:defRPr>
             </a:pPr>
             <a:r>
-              <a:t>파일을 계속 작성하고 저장한다 (3/6)</a:t>
+              <a:t>파일을 새로 만들고 저장한다 (1/7)</a:t>
             </a:r>
           </a:p>
         </p:txBody>
@@ -16461,7 +16763,7 @@
               </a:defRPr>
             </a:pPr>
             <a:r>
-              <a:t>~/agv_ws/src/agv_mission/agv_mission/mission_manager.py</a:t>
+              <a:t>~/ros2_curri/agv_ws/src/agv_mission/agv_mission/mission_manager.py</a:t>
             </a:r>
           </a:p>
         </p:txBody>
@@ -16597,7 +16899,7 @@
               </a:defRPr>
             </a:pPr>
             <a:r>
-              <a:t>현재 단계 21/25    |    현재 폴더 ~/agv_ws    |    현재 터미널</a:t>
+              <a:t>현재 단계 21/28    |    현재 폴더 ~/ros2_curri/agv_ws    |    현재 터미널</a:t>
             </a:r>
           </a:p>
         </p:txBody>
@@ -16694,11 +16996,11 @@
               </a:defRPr>
             </a:pPr>
             <a:r>
-              <a:t>파일 생성: mkdir -p ~/agv_ws/src/agv_mission/agv_mission</a:t>
-            </a:r>
-            <a:br/>
-            <a:r>
-              <a:t>파일 열기: nano ~/agv_ws/src/agv_mission/agv_mission/mission_manager.py</a:t>
+              <a:t>파일 생성: mkdir -p ~/ros2_curri/agv_ws/src/agv_mission/agv_mission</a:t>
+            </a:r>
+            <a:br/>
+            <a:r>
+              <a:t>파일 열기: nano ~/ros2_curri/agv_ws/src/agv_mission/agv_mission/mission_manager.py</a:t>
             </a:r>
           </a:p>
         </p:txBody>
@@ -16756,42 +17058,45 @@
               </a:defRPr>
             </a:pPr>
             <a:r>
-              <a:t>        self.create_timer(0.1, self.tick)</a:t>
-            </a:r>
-            <a:br/>
-            <a:br/>
-            <a:r>
-              <a:t>    def obstacle_callback(self, message):</a:t>
-            </a:r>
-            <a:br/>
-            <a:r>
-              <a:t>        self.obstacle_distance = message.data</a:t>
-            </a:r>
-            <a:br/>
-            <a:br/>
-            <a:r>
-              <a:t>    def detections_callback(self, message):</a:t>
-            </a:r>
-            <a:br/>
-            <a:r>
-              <a:t>        self.target = message.detections[0] if message.detections else None</a:t>
-            </a:r>
-            <a:br/>
-            <a:br/>
-            <a:r>
-              <a:t>    def set_state(self, state):</a:t>
-            </a:r>
-            <a:br/>
-            <a:r>
-              <a:t>        if state != self.state:</a:t>
-            </a:r>
-            <a:br/>
-            <a:r>
-              <a:t>            self.state = state</a:t>
-            </a:r>
-            <a:br/>
-            <a:r>
-              <a:t>            self.get_logger().info('mission state -&gt; ' + state)</a:t>
+              <a:t>import math</a:t>
+            </a:r>
+            <a:br/>
+            <a:r>
+              <a:t>import rclpy</a:t>
+            </a:r>
+            <a:br/>
+            <a:r>
+              <a:t>from rclpy.node import Node</a:t>
+            </a:r>
+            <a:br/>
+            <a:r>
+              <a:t>from geometry_msgs.msg import Twist</a:t>
+            </a:r>
+            <a:br/>
+            <a:r>
+              <a:t>from std_msgs.msg import Float32, String</a:t>
+            </a:r>
+            <a:br/>
+            <a:r>
+              <a:t>from agv_interfaces.msg import DetectionArray</a:t>
+            </a:r>
+            <a:br/>
+            <a:br/>
+            <a:r>
+              <a:t>class MissionManager(Node):</a:t>
+            </a:r>
+            <a:br/>
+            <a:br/>
+            <a:r>
+              <a:t>    def __init__(self):</a:t>
+            </a:r>
+            <a:br/>
+            <a:r>
+              <a:t>        super().__init__('mission_manager')</a:t>
+            </a:r>
+            <a:br/>
+            <a:r>
+              <a:t>        self.declare_parameter('stop_distance', 0.5)</a:t>
             </a:r>
           </a:p>
         </p:txBody>
@@ -16830,7 +17135,7 @@
               </a:defRPr>
             </a:pPr>
             <a:r>
-              <a:t>파일 전체 3/6 · 이 슬라이드 다음에 같은 파일의 나머지 줄이 이어집니다.</a:t>
+              <a:t>파일 전체 1/7 · 이 슬라이드 다음에 같은 파일의 나머지 줄이 이어집니다.</a:t>
             </a:r>
           </a:p>
         </p:txBody>
@@ -16887,7 +17192,7 @@
               </a:defRPr>
             </a:pPr>
             <a:r>
-              <a:t>파일을 계속 작성하고 저장한다 (4/6)</a:t>
+              <a:t>파일을 계속 작성하고 저장한다 (2/7)</a:t>
             </a:r>
           </a:p>
         </p:txBody>
@@ -16926,7 +17231,7 @@
               </a:defRPr>
             </a:pPr>
             <a:r>
-              <a:t>~/agv_ws/src/agv_mission/agv_mission/mission_manager.py</a:t>
+              <a:t>~/ros2_curri/agv_ws/src/agv_mission/agv_mission/mission_manager.py</a:t>
             </a:r>
           </a:p>
         </p:txBody>
@@ -17062,7 +17367,7 @@
               </a:defRPr>
             </a:pPr>
             <a:r>
-              <a:t>현재 단계 22/25    |    현재 폴더 ~/agv_ws    |    현재 터미널</a:t>
+              <a:t>현재 단계 22/28    |    현재 폴더 ~/ros2_curri/agv_ws    |    현재 터미널</a:t>
             </a:r>
           </a:p>
         </p:txBody>
@@ -17159,11 +17464,11 @@
               </a:defRPr>
             </a:pPr>
             <a:r>
-              <a:t>파일 생성: mkdir -p ~/agv_ws/src/agv_mission/agv_mission</a:t>
-            </a:r>
-            <a:br/>
-            <a:r>
-              <a:t>파일 열기: nano ~/agv_ws/src/agv_mission/agv_mission/mission_manager.py</a:t>
+              <a:t>파일 생성: mkdir -p ~/ros2_curri/agv_ws/src/agv_mission/agv_mission</a:t>
+            </a:r>
+            <a:br/>
+            <a:r>
+              <a:t>파일 열기: nano ~/ros2_curri/agv_ws/src/agv_mission/agv_mission/mission_manager.py</a:t>
             </a:r>
           </a:p>
         </p:txBody>
@@ -17221,48 +17526,51 @@
               </a:defRPr>
             </a:pPr>
             <a:r>
-              <a:t>        self.state_publisher.publish(String(data=self.state))</a:t>
-            </a:r>
-            <a:br/>
-            <a:br/>
-            <a:r>
-              <a:t>    def tick(self):</a:t>
-            </a:r>
-            <a:br/>
-            <a:r>
-              <a:t>        command = Twist()</a:t>
-            </a:r>
-            <a:br/>
-            <a:r>
-              <a:t>        if self.obstacle_distance &lt; self.get_parameter('stop_distance').value:</a:t>
-            </a:r>
-            <a:br/>
-            <a:r>
-              <a:t>            self.set_state('AVOID')</a:t>
-            </a:r>
-            <a:br/>
-            <a:r>
-              <a:t>            command.angular.z = self.get_parameter('search_speed').value</a:t>
-            </a:r>
-            <a:br/>
-            <a:r>
-              <a:t>        elif self.target is None:</a:t>
-            </a:r>
-            <a:br/>
-            <a:r>
-              <a:t>            self.set_state('SEARCH')</a:t>
-            </a:r>
-            <a:br/>
-            <a:r>
-              <a:t>            command.angular.z = self.get_parameter('search_speed').value</a:t>
-            </a:r>
-            <a:br/>
-            <a:r>
-              <a:t>        elif self.target.estimated_distance &gt; 0.0 and self.target.estimated_distance &lt; self.get_parameter('stop_distance').value:</a:t>
-            </a:r>
-            <a:br/>
-            <a:r>
-              <a:t>            self.set_state('GOAL')</a:t>
+              <a:t>        self.declare_parameter('search_speed', 0.25)</a:t>
+            </a:r>
+            <a:br/>
+            <a:r>
+              <a:t>        self.declare_parameter('approach_speed', 0.15)</a:t>
+            </a:r>
+            <a:br/>
+            <a:r>
+              <a:t>        self.declare_parameter('image_center_x', 320)</a:t>
+            </a:r>
+            <a:br/>
+            <a:r>
+              <a:t>        self.declare_parameter('target_timeout_sec', 0.7)</a:t>
+            </a:r>
+            <a:br/>
+            <a:r>
+              <a:t>        self.state = 'IDLE'</a:t>
+            </a:r>
+            <a:br/>
+            <a:r>
+              <a:t>        self.obstacle_distance = math.inf</a:t>
+            </a:r>
+            <a:br/>
+            <a:r>
+              <a:t>        self.target = None</a:t>
+            </a:r>
+            <a:br/>
+            <a:r>
+              <a:t>        self.last_target_time = None</a:t>
+            </a:r>
+            <a:br/>
+            <a:r>
+              <a:t>        self.create_subscription(Float32, '/obstacle_distance', self.obstacle_callback,</a:t>
+            </a:r>
+            <a:br/>
+            <a:r>
+              <a:t>            10)</a:t>
+            </a:r>
+            <a:br/>
+            <a:r>
+              <a:t>        self.create_subscription(DetectionArray, '/detections', self.detections_callback,</a:t>
+            </a:r>
+            <a:br/>
+            <a:r>
+              <a:t>             10)</a:t>
             </a:r>
           </a:p>
         </p:txBody>
@@ -17301,7 +17609,7 @@
               </a:defRPr>
             </a:pPr>
             <a:r>
-              <a:t>파일 전체 4/6 · 이 슬라이드 다음에 같은 파일의 나머지 줄이 이어집니다.</a:t>
+              <a:t>파일 전체 2/7 · 이 슬라이드 다음에 같은 파일의 나머지 줄이 이어집니다.</a:t>
             </a:r>
           </a:p>
         </p:txBody>
@@ -17358,7 +17666,7 @@
               </a:defRPr>
             </a:pPr>
             <a:r>
-              <a:t>파일을 계속 작성하고 저장한다 (5/6)</a:t>
+              <a:t>파일을 계속 작성하고 저장한다 (3/7)</a:t>
             </a:r>
           </a:p>
         </p:txBody>
@@ -17397,7 +17705,7 @@
               </a:defRPr>
             </a:pPr>
             <a:r>
-              <a:t>~/agv_ws/src/agv_mission/agv_mission/mission_manager.py</a:t>
+              <a:t>~/ros2_curri/agv_ws/src/agv_mission/agv_mission/mission_manager.py</a:t>
             </a:r>
           </a:p>
         </p:txBody>
@@ -17533,7 +17841,7 @@
               </a:defRPr>
             </a:pPr>
             <a:r>
-              <a:t>현재 단계 23/25    |    현재 폴더 ~/agv_ws    |    현재 터미널</a:t>
+              <a:t>현재 단계 23/28    |    현재 폴더 ~/ros2_curri/agv_ws    |    현재 터미널</a:t>
             </a:r>
           </a:p>
         </p:txBody>
@@ -17630,11 +17938,11 @@
               </a:defRPr>
             </a:pPr>
             <a:r>
-              <a:t>파일 생성: mkdir -p ~/agv_ws/src/agv_mission/agv_mission</a:t>
-            </a:r>
-            <a:br/>
-            <a:r>
-              <a:t>파일 열기: nano ~/agv_ws/src/agv_mission/agv_mission/mission_manager.py</a:t>
+              <a:t>파일 생성: mkdir -p ~/ros2_curri/agv_ws/src/agv_mission/agv_mission</a:t>
+            </a:r>
+            <a:br/>
+            <a:r>
+              <a:t>파일 열기: nano ~/ros2_curri/agv_ws/src/agv_mission/agv_mission/mission_manager.py</a:t>
             </a:r>
           </a:p>
         </p:txBody>
@@ -17692,49 +18000,43 @@
               </a:defRPr>
             </a:pPr>
             <a:r>
-              <a:t>        else:</a:t>
-            </a:r>
-            <a:br/>
-            <a:r>
-              <a:t>            self.set_state('APPROACH')</a:t>
-            </a:r>
-            <a:br/>
-            <a:r>
-              <a:t>            command.linear.x = self.get_parameter('approach_speed').value</a:t>
-            </a:r>
-            <a:br/>
-            <a:r>
-              <a:t>            error = self.target.center_x - self.get_parameter('image_center_x').value</a:t>
-            </a:r>
-            <a:br/>
-            <a:r>
-              <a:t>            command.angular.z = max(min(-0.004 * error, 0.6), -0.6)</a:t>
-            </a:r>
-            <a:br/>
-            <a:r>
-              <a:t>        self.command_publisher.publish(command)</a:t>
-            </a:r>
-            <a:br/>
-            <a:br/>
-            <a:r>
-              <a:t>def main():</a:t>
-            </a:r>
-            <a:br/>
-            <a:r>
-              <a:t>    rclpy.init()</a:t>
-            </a:r>
-            <a:br/>
-            <a:r>
-              <a:t>    node = MissionManager()</a:t>
-            </a:r>
-            <a:br/>
-            <a:r>
-              <a:t>    try:</a:t>
-            </a:r>
-            <a:br/>
-            <a:r>
-              <a:t>        rclpy.spin(node)</a:t>
-            </a:r>
+              <a:t>        self.command_publisher = self.create_publisher(Twist, '/cmd_vel_raw', 10)</a:t>
+            </a:r>
+            <a:br/>
+            <a:r>
+              <a:t>        self.state_publisher = self.create_publisher(String, '/mission_state', 10)</a:t>
+            </a:r>
+            <a:br/>
+            <a:r>
+              <a:t>        self.create_timer(0.1, self.tick)</a:t>
+            </a:r>
+            <a:br/>
+            <a:br/>
+            <a:r>
+              <a:t>    def obstacle_callback(self, message):</a:t>
+            </a:r>
+            <a:br/>
+            <a:r>
+              <a:t>        self.obstacle_distance = message.data</a:t>
+            </a:r>
+            <a:br/>
+            <a:br/>
+            <a:r>
+              <a:t>    def detections_callback(self, message):</a:t>
+            </a:r>
+            <a:br/>
+            <a:r>
+              <a:t>        if message.detections:</a:t>
+            </a:r>
+            <a:br/>
+            <a:r>
+              <a:t>            self.target = message.detections[0]</a:t>
+            </a:r>
+            <a:br/>
+            <a:r>
+              <a:t>            self.last_target_time = self.get_clock().now()</a:t>
+            </a:r>
+            <a:br/>
           </a:p>
         </p:txBody>
       </p:sp>
@@ -17772,7 +18074,7 @@
               </a:defRPr>
             </a:pPr>
             <a:r>
-              <a:t>파일 전체 5/6 · 이 슬라이드 다음에 같은 파일의 나머지 줄이 이어집니다.</a:t>
+              <a:t>파일 전체 3/7 · 이 슬라이드 다음에 같은 파일의 나머지 줄이 이어집니다.</a:t>
             </a:r>
           </a:p>
         </p:txBody>
@@ -18004,7 +18306,7 @@
               </a:defRPr>
             </a:pPr>
             <a:r>
-              <a:t>현재 단계 시작    |    현재 폴더 ~/agv_ws    |    현재 터미널</a:t>
+              <a:t>현재 단계 시작    |    현재 폴더 ~/ros2_curri/agv_ws    |    현재 터미널</a:t>
             </a:r>
           </a:p>
         </p:txBody>
@@ -18120,7 +18422,7 @@
               </a:defRPr>
             </a:pPr>
             <a:r>
-              <a:t>• 현재 폴더: ~/agv_ws</a:t>
+              <a:t>• 현재 폴더: ~/ros2_curri/agv_ws</a:t>
             </a:r>
           </a:p>
           <a:p>
@@ -18191,7 +18493,7 @@
               </a:defRPr>
             </a:pPr>
             <a:r>
-              <a:t>확인: pwd가 ~/agv_ws이고, 이전 모듈의 완료 조건을 한 문장으로 설명할 수 있으면 시작합니다.</a:t>
+              <a:t>확인: pwd가 ~/ros2_curri/agv_ws이고, 이전 모듈의 완료 조건을 한 문장으로 설명할 수 있으면 시작합니다.</a:t>
             </a:r>
           </a:p>
         </p:txBody>
@@ -18248,7 +18550,7 @@
               </a:defRPr>
             </a:pPr>
             <a:r>
-              <a:t>파일을 계속 작성하고 저장한다 (6/6)</a:t>
+              <a:t>파일을 계속 작성하고 저장한다 (4/7)</a:t>
             </a:r>
           </a:p>
         </p:txBody>
@@ -18287,7 +18589,7 @@
               </a:defRPr>
             </a:pPr>
             <a:r>
-              <a:t>~/agv_ws/src/agv_mission/agv_mission/mission_manager.py</a:t>
+              <a:t>~/ros2_curri/agv_ws/src/agv_mission/agv_mission/mission_manager.py</a:t>
             </a:r>
           </a:p>
         </p:txBody>
@@ -18423,7 +18725,7 @@
               </a:defRPr>
             </a:pPr>
             <a:r>
-              <a:t>현재 단계 24/25    |    현재 폴더 ~/agv_ws    |    현재 터미널</a:t>
+              <a:t>현재 단계 24/28    |    현재 폴더 ~/ros2_curri/agv_ws    |    현재 터미널</a:t>
             </a:r>
           </a:p>
         </p:txBody>
@@ -18520,11 +18822,11 @@
               </a:defRPr>
             </a:pPr>
             <a:r>
-              <a:t>파일 생성: mkdir -p ~/agv_ws/src/agv_mission/agv_mission</a:t>
-            </a:r>
-            <a:br/>
-            <a:r>
-              <a:t>파일 열기: nano ~/agv_ws/src/agv_mission/agv_mission/mission_manager.py</a:t>
+              <a:t>파일 생성: mkdir -p ~/ros2_curri/agv_ws/src/agv_mission/agv_mission</a:t>
+            </a:r>
+            <a:br/>
+            <a:r>
+              <a:t>파일 열기: nano ~/ros2_curri/agv_ws/src/agv_mission/agv_mission/mission_manager.py</a:t>
             </a:r>
           </a:p>
         </p:txBody>
@@ -18582,27 +18884,48 @@
               </a:defRPr>
             </a:pPr>
             <a:r>
-              <a:t>    except KeyboardInterrupt:</a:t>
-            </a:r>
-            <a:br/>
-            <a:r>
-              <a:t>        pass</a:t>
-            </a:r>
-            <a:br/>
-            <a:r>
-              <a:t>    finally:</a:t>
-            </a:r>
-            <a:br/>
-            <a:r>
-              <a:t>        node.destroy_node()</a:t>
-            </a:r>
-            <a:br/>
-            <a:r>
-              <a:t>        if rclpy.ok():</a:t>
-            </a:r>
-            <a:br/>
-            <a:r>
-              <a:t>            rclpy.shutdown()</a:t>
+              <a:t>    def set_state(self, state):</a:t>
+            </a:r>
+            <a:br/>
+            <a:r>
+              <a:t>        if state != self.state:</a:t>
+            </a:r>
+            <a:br/>
+            <a:r>
+              <a:t>            self.state = state</a:t>
+            </a:r>
+            <a:br/>
+            <a:r>
+              <a:t>            self.get_logger().info('mission state -&gt; ' + state)</a:t>
+            </a:r>
+            <a:br/>
+            <a:r>
+              <a:t>        self.state_publisher.publish(String(data=self.state))</a:t>
+            </a:r>
+            <a:br/>
+            <a:br/>
+            <a:r>
+              <a:t>    def tick(self):</a:t>
+            </a:r>
+            <a:br/>
+            <a:r>
+              <a:t>        command = Twist()</a:t>
+            </a:r>
+            <a:br/>
+            <a:r>
+              <a:t>        if self.last_target_time is not None:</a:t>
+            </a:r>
+            <a:br/>
+            <a:r>
+              <a:t>            age = (self.get_clock().now() - self.last_target_time).nanoseconds / 1000000000.0</a:t>
+            </a:r>
+            <a:br/>
+            <a:r>
+              <a:t>            if age &gt; self.get_parameter('target_timeout_sec').value:</a:t>
+            </a:r>
+            <a:br/>
+            <a:r>
+              <a:t>                self.target = None</a:t>
             </a:r>
           </a:p>
         </p:txBody>
@@ -18641,7 +18964,7 @@
               </a:defRPr>
             </a:pPr>
             <a:r>
-              <a:t>파일 전체 6/6 · 이 슬라이드 다음에 같은 파일의 나머지 줄이 이어집니다.</a:t>
+              <a:t>파일 전체 4/7 · 이 슬라이드 다음에 같은 파일의 나머지 줄이 이어집니다.</a:t>
             </a:r>
           </a:p>
         </p:txBody>
@@ -18698,7 +19021,7 @@
               </a:defRPr>
             </a:pPr>
             <a:r>
-              <a:t>파일을 새로 만들고 저장한다 (1/4)</a:t>
+              <a:t>파일을 계속 작성하고 저장한다 (5/7)</a:t>
             </a:r>
           </a:p>
         </p:txBody>
@@ -18737,7 +19060,7 @@
               </a:defRPr>
             </a:pPr>
             <a:r>
-              <a:t>~/agv_ws/src/agv_control/agv_control/safety_controller.py</a:t>
+              <a:t>~/ros2_curri/agv_ws/src/agv_mission/agv_mission/mission_manager.py</a:t>
             </a:r>
           </a:p>
         </p:txBody>
@@ -18873,7 +19196,7 @@
               </a:defRPr>
             </a:pPr>
             <a:r>
-              <a:t>현재 단계 25/29    |    현재 폴더 ~/agv_ws    |    현재 터미널</a:t>
+              <a:t>현재 단계 25/28    |    현재 폴더 ~/ros2_curri/agv_ws    |    현재 터미널</a:t>
             </a:r>
           </a:p>
         </p:txBody>
@@ -18970,11 +19293,11 @@
               </a:defRPr>
             </a:pPr>
             <a:r>
-              <a:t>파일 생성: mkdir -p ~/agv_ws/src/agv_control/agv_control</a:t>
-            </a:r>
-            <a:br/>
-            <a:r>
-              <a:t>파일 열기: nano ~/agv_ws/src/agv_control/agv_control/safety_controller.py</a:t>
+              <a:t>파일 생성: mkdir -p ~/ros2_curri/agv_ws/src/agv_mission/agv_mission</a:t>
+            </a:r>
+            <a:br/>
+            <a:r>
+              <a:t>파일 열기: nano ~/ros2_curri/agv_ws/src/agv_mission/agv_mission/mission_manager.py</a:t>
             </a:r>
           </a:p>
         </p:txBody>
@@ -19032,45 +19355,51 @@
               </a:defRPr>
             </a:pPr>
             <a:r>
-              <a:t>import math</a:t>
-            </a:r>
-            <a:br/>
-            <a:r>
-              <a:t>import rclpy</a:t>
-            </a:r>
-            <a:br/>
-            <a:r>
-              <a:t>from rclpy.node import Node</a:t>
-            </a:r>
-            <a:br/>
-            <a:r>
-              <a:t>from geometry_msgs.msg import Twist</a:t>
-            </a:r>
-            <a:br/>
-            <a:r>
-              <a:t>from sensor_msgs.msg import LaserScan</a:t>
-            </a:r>
-            <a:br/>
-            <a:br/>
-            <a:r>
-              <a:t>class SafetyController(Node):</a:t>
-            </a:r>
-            <a:br/>
-            <a:r>
-              <a:t>    """Pass a desired command through unless an obstacle is within stop_distance."""</a:t>
-            </a:r>
-            <a:br/>
-            <a:br/>
-            <a:r>
-              <a:t>    def __init__(self):</a:t>
-            </a:r>
-            <a:br/>
-            <a:r>
-              <a:t>        super().__init__('safety_controller')</a:t>
-            </a:r>
-            <a:br/>
-            <a:r>
-              <a:t>        self.declare_parameter('stop_distance', 0.5)</a:t>
+              <a:t>        if self.obstacle_distance &lt; self.get_parameter('stop_distance').value:</a:t>
+            </a:r>
+            <a:br/>
+            <a:r>
+              <a:t>            self.set_state('AVOID')</a:t>
+            </a:r>
+            <a:br/>
+            <a:r>
+              <a:t>            command.angular.z = self.get_parameter('search_speed').value</a:t>
+            </a:r>
+            <a:br/>
+            <a:r>
+              <a:t>        elif self.target is None:</a:t>
+            </a:r>
+            <a:br/>
+            <a:r>
+              <a:t>            self.set_state('SEARCH')</a:t>
+            </a:r>
+            <a:br/>
+            <a:r>
+              <a:t>            command.angular.z = self.get_parameter('search_speed').value</a:t>
+            </a:r>
+            <a:br/>
+            <a:r>
+              <a:t>        elif self.target.estimated_distance &gt; 0.0 and self.target.estimated_distance &lt; self.get_parameter('stop_distance').value:</a:t>
+            </a:r>
+            <a:br/>
+            <a:r>
+              <a:t>            self.set_state('GOAL')</a:t>
+            </a:r>
+            <a:br/>
+            <a:r>
+              <a:t>        else:</a:t>
+            </a:r>
+            <a:br/>
+            <a:r>
+              <a:t>            self.set_state('APPROACH')</a:t>
+            </a:r>
+            <a:br/>
+            <a:r>
+              <a:t>            command.linear.x = self.get_parameter('approach_speed').value</a:t>
+            </a:r>
+            <a:br/>
+            <a:r>
+              <a:t>            error = self.target.center_x - self.get_parameter('image_center_x').value</a:t>
             </a:r>
           </a:p>
         </p:txBody>
@@ -19109,7 +19438,7 @@
               </a:defRPr>
             </a:pPr>
             <a:r>
-              <a:t>파일 전체 1/4 · 이 슬라이드 다음에 같은 파일의 나머지 줄이 이어집니다.</a:t>
+              <a:t>파일 전체 5/7 · 이 슬라이드 다음에 같은 파일의 나머지 줄이 이어집니다.</a:t>
             </a:r>
           </a:p>
         </p:txBody>
@@ -19166,7 +19495,7 @@
               </a:defRPr>
             </a:pPr>
             <a:r>
-              <a:t>파일을 계속 작성하고 저장한다 (2/4)</a:t>
+              <a:t>파일을 계속 작성하고 저장한다 (6/7)</a:t>
             </a:r>
           </a:p>
         </p:txBody>
@@ -19205,7 +19534,7 @@
               </a:defRPr>
             </a:pPr>
             <a:r>
-              <a:t>~/agv_ws/src/agv_control/agv_control/safety_controller.py</a:t>
+              <a:t>~/ros2_curri/agv_ws/src/agv_mission/agv_mission/mission_manager.py</a:t>
             </a:r>
           </a:p>
         </p:txBody>
@@ -19341,7 +19670,7 @@
               </a:defRPr>
             </a:pPr>
             <a:r>
-              <a:t>현재 단계 26/29    |    현재 폴더 ~/agv_ws    |    현재 터미널</a:t>
+              <a:t>현재 단계 26/28    |    현재 폴더 ~/ros2_curri/agv_ws    |    현재 터미널</a:t>
             </a:r>
           </a:p>
         </p:txBody>
@@ -19438,11 +19767,11 @@
               </a:defRPr>
             </a:pPr>
             <a:r>
-              <a:t>파일 생성: mkdir -p ~/agv_ws/src/agv_control/agv_control</a:t>
-            </a:r>
-            <a:br/>
-            <a:r>
-              <a:t>파일 열기: nano ~/agv_ws/src/agv_control/agv_control/safety_controller.py</a:t>
+              <a:t>파일 생성: mkdir -p ~/ros2_curri/agv_ws/src/agv_mission/agv_mission</a:t>
+            </a:r>
+            <a:br/>
+            <a:r>
+              <a:t>파일 열기: nano ~/ros2_curri/agv_ws/src/agv_mission/agv_mission/mission_manager.py</a:t>
             </a:r>
           </a:p>
         </p:txBody>
@@ -19500,46 +19829,49 @@
               </a:defRPr>
             </a:pPr>
             <a:r>
-              <a:t>        self.declare_parameter('front_half_angle_deg', 15.0)</a:t>
-            </a:r>
-            <a:br/>
-            <a:r>
-              <a:t>        self.obstacle_distance = math.inf</a:t>
-            </a:r>
-            <a:br/>
-            <a:r>
-              <a:t>        self.create_subscription(LaserScan, '/scan', self.scan_callback, 10)</a:t>
-            </a:r>
-            <a:br/>
-            <a:r>
-              <a:t>        self.create_subscription(Twist, '/cmd_vel_raw', self.command_callback, 10)</a:t>
-            </a:r>
-            <a:br/>
-            <a:r>
-              <a:t>        self.publisher = self.create_publisher(Twist, '/cmd_vel', 10)</a:t>
-            </a:r>
-            <a:br/>
-            <a:br/>
-            <a:r>
-              <a:t>    def scan_callback(self, scan):</a:t>
-            </a:r>
-            <a:br/>
-            <a:r>
-              <a:t>        limit = math.radians(self.get_parameter('front_half_angle_deg').value)</a:t>
-            </a:r>
-            <a:br/>
-            <a:r>
-              <a:t>        readings = [value for index,</a:t>
-            </a:r>
-            <a:br/>
-            <a:r>
-              <a:t>            value in enumerate(scan.ranges) if abs(scan.angle_min + index * scan.angle_increment) &lt;= limit and math.isfinite(value)]</a:t>
-            </a:r>
-            <a:br/>
-            <a:r>
-              <a:t>        self.obstacle_distance = min(readings) if readings else math.inf</a:t>
-            </a:r>
-            <a:br/>
+              <a:t>            command.angular.z = max(min(-0.004 * error, 0.6), -0.6)</a:t>
+            </a:r>
+            <a:br/>
+            <a:r>
+              <a:t>        self.command_publisher.publish(command)</a:t>
+            </a:r>
+            <a:br/>
+            <a:br/>
+            <a:r>
+              <a:t>def main():</a:t>
+            </a:r>
+            <a:br/>
+            <a:r>
+              <a:t>    rclpy.init()</a:t>
+            </a:r>
+            <a:br/>
+            <a:r>
+              <a:t>    node = MissionManager()</a:t>
+            </a:r>
+            <a:br/>
+            <a:r>
+              <a:t>    try:</a:t>
+            </a:r>
+            <a:br/>
+            <a:r>
+              <a:t>        rclpy.spin(node)</a:t>
+            </a:r>
+            <a:br/>
+            <a:r>
+              <a:t>    except KeyboardInterrupt:</a:t>
+            </a:r>
+            <a:br/>
+            <a:r>
+              <a:t>        pass</a:t>
+            </a:r>
+            <a:br/>
+            <a:r>
+              <a:t>    finally:</a:t>
+            </a:r>
+            <a:br/>
+            <a:r>
+              <a:t>        node.destroy_node()</a:t>
+            </a:r>
           </a:p>
         </p:txBody>
       </p:sp>
@@ -19577,7 +19909,7 @@
               </a:defRPr>
             </a:pPr>
             <a:r>
-              <a:t>파일 전체 2/4 · 이 슬라이드 다음에 같은 파일의 나머지 줄이 이어집니다.</a:t>
+              <a:t>파일 전체 6/7 · 이 슬라이드 다음에 같은 파일의 나머지 줄이 이어집니다.</a:t>
             </a:r>
           </a:p>
         </p:txBody>
@@ -19634,7 +19966,7 @@
               </a:defRPr>
             </a:pPr>
             <a:r>
-              <a:t>파일을 계속 작성하고 저장한다 (3/4)</a:t>
+              <a:t>파일을 계속 작성하고 저장한다 (7/7)</a:t>
             </a:r>
           </a:p>
         </p:txBody>
@@ -19673,7 +20005,7 @@
               </a:defRPr>
             </a:pPr>
             <a:r>
-              <a:t>~/agv_ws/src/agv_control/agv_control/safety_controller.py</a:t>
+              <a:t>~/ros2_curri/agv_ws/src/agv_mission/agv_mission/mission_manager.py</a:t>
             </a:r>
           </a:p>
         </p:txBody>
@@ -19809,7 +20141,7 @@
               </a:defRPr>
             </a:pPr>
             <a:r>
-              <a:t>현재 단계 27/29    |    현재 폴더 ~/agv_ws    |    현재 터미널</a:t>
+              <a:t>현재 단계 27/28    |    현재 폴더 ~/ros2_curri/agv_ws    |    현재 터미널</a:t>
             </a:r>
           </a:p>
         </p:txBody>
@@ -19906,11 +20238,11 @@
               </a:defRPr>
             </a:pPr>
             <a:r>
-              <a:t>파일 생성: mkdir -p ~/agv_ws/src/agv_control/agv_control</a:t>
-            </a:r>
-            <a:br/>
-            <a:r>
-              <a:t>파일 열기: nano ~/agv_ws/src/agv_control/agv_control/safety_controller.py</a:t>
+              <a:t>파일 생성: mkdir -p ~/ros2_curri/agv_ws/src/agv_mission/agv_mission</a:t>
+            </a:r>
+            <a:br/>
+            <a:r>
+              <a:t>파일 열기: nano ~/ros2_curri/agv_ws/src/agv_mission/agv_mission/mission_manager.py</a:t>
             </a:r>
           </a:p>
         </p:txBody>
@@ -19968,48 +20300,11 @@
               </a:defRPr>
             </a:pPr>
             <a:r>
-              <a:t>    def command_callback(self, command):</a:t>
-            </a:r>
-            <a:br/>
-            <a:r>
-              <a:t>        safe = Twist()</a:t>
-            </a:r>
-            <a:br/>
-            <a:r>
-              <a:t>        if self.obstacle_distance &gt;= self.get_parameter('stop_distance').value or command.linear.x &lt;= 0.0:</a:t>
-            </a:r>
-            <a:br/>
-            <a:r>
-              <a:t>            safe = command</a:t>
-            </a:r>
-            <a:br/>
-            <a:r>
-              <a:t>        else:</a:t>
-            </a:r>
-            <a:br/>
-            <a:r>
-              <a:t>            self.get_logger().warn('obstacle at %.2f m: stopping forward command' % self.obstacle_distance)</a:t>
-            </a:r>
-            <a:br/>
-            <a:r>
-              <a:t>        self.publisher.publish(safe)</a:t>
-            </a:r>
-            <a:br/>
-            <a:br/>
-            <a:r>
-              <a:t>def main():</a:t>
-            </a:r>
-            <a:br/>
-            <a:r>
-              <a:t>    rclpy.init()</a:t>
-            </a:r>
-            <a:br/>
-            <a:r>
-              <a:t>    node = SafetyController()</a:t>
-            </a:r>
-            <a:br/>
-            <a:r>
-              <a:t>    try:</a:t>
+              <a:t>        if rclpy.ok():</a:t>
+            </a:r>
+            <a:br/>
+            <a:r>
+              <a:t>            rclpy.shutdown()</a:t>
             </a:r>
           </a:p>
         </p:txBody>
@@ -20048,7 +20343,7 @@
               </a:defRPr>
             </a:pPr>
             <a:r>
-              <a:t>파일 전체 3/4 · 이 슬라이드 다음에 같은 파일의 나머지 줄이 이어집니다.</a:t>
+              <a:t>파일 전체 7/7 · 이 슬라이드 다음에 같은 파일의 나머지 줄이 이어집니다.</a:t>
             </a:r>
           </a:p>
         </p:txBody>
@@ -20105,7 +20400,7 @@
               </a:defRPr>
             </a:pPr>
             <a:r>
-              <a:t>파일을 계속 작성하고 저장한다 (4/4)</a:t>
+              <a:t>파일을 새로 만들고 저장한다 (1/4)</a:t>
             </a:r>
           </a:p>
         </p:txBody>
@@ -20144,7 +20439,7 @@
               </a:defRPr>
             </a:pPr>
             <a:r>
-              <a:t>~/agv_ws/src/agv_control/agv_control/safety_controller.py</a:t>
+              <a:t>~/ros2_curri/agv_ws/src/agv_control/agv_control/safety_controller.py</a:t>
             </a:r>
           </a:p>
         </p:txBody>
@@ -20280,7 +20575,7 @@
               </a:defRPr>
             </a:pPr>
             <a:r>
-              <a:t>현재 단계 28/29    |    현재 폴더 ~/agv_ws    |    현재 터미널</a:t>
+              <a:t>현재 단계 28/32    |    현재 폴더 ~/ros2_curri/agv_ws    |    현재 터미널</a:t>
             </a:r>
           </a:p>
         </p:txBody>
@@ -20377,11 +20672,11 @@
               </a:defRPr>
             </a:pPr>
             <a:r>
-              <a:t>파일 생성: mkdir -p ~/agv_ws/src/agv_control/agv_control</a:t>
-            </a:r>
-            <a:br/>
-            <a:r>
-              <a:t>파일 열기: nano ~/agv_ws/src/agv_control/agv_control/safety_controller.py</a:t>
+              <a:t>파일 생성: mkdir -p ~/ros2_curri/agv_ws/src/agv_control/agv_control</a:t>
+            </a:r>
+            <a:br/>
+            <a:r>
+              <a:t>파일 열기: nano ~/ros2_curri/agv_ws/src/agv_control/agv_control/safety_controller.py</a:t>
             </a:r>
           </a:p>
         </p:txBody>
@@ -20439,31 +20734,45 @@
               </a:defRPr>
             </a:pPr>
             <a:r>
-              <a:t>        rclpy.spin(node)</a:t>
-            </a:r>
-            <a:br/>
-            <a:r>
-              <a:t>    except KeyboardInterrupt:</a:t>
-            </a:r>
-            <a:br/>
-            <a:r>
-              <a:t>        pass</a:t>
-            </a:r>
-            <a:br/>
-            <a:r>
-              <a:t>    finally:</a:t>
-            </a:r>
-            <a:br/>
-            <a:r>
-              <a:t>        node.destroy_node()</a:t>
-            </a:r>
-            <a:br/>
-            <a:r>
-              <a:t>        if rclpy.ok():</a:t>
-            </a:r>
-            <a:br/>
-            <a:r>
-              <a:t>            rclpy.shutdown()</a:t>
+              <a:t>import math</a:t>
+            </a:r>
+            <a:br/>
+            <a:r>
+              <a:t>import rclpy</a:t>
+            </a:r>
+            <a:br/>
+            <a:r>
+              <a:t>from rclpy.node import Node</a:t>
+            </a:r>
+            <a:br/>
+            <a:r>
+              <a:t>from geometry_msgs.msg import Twist</a:t>
+            </a:r>
+            <a:br/>
+            <a:r>
+              <a:t>from sensor_msgs.msg import LaserScan</a:t>
+            </a:r>
+            <a:br/>
+            <a:br/>
+            <a:r>
+              <a:t>class SafetyController(Node):</a:t>
+            </a:r>
+            <a:br/>
+            <a:r>
+              <a:t>    """Pass a desired command through unless an obstacle is within stop_distance."""</a:t>
+            </a:r>
+            <a:br/>
+            <a:br/>
+            <a:r>
+              <a:t>    def __init__(self):</a:t>
+            </a:r>
+            <a:br/>
+            <a:r>
+              <a:t>        super().__init__('safety_controller')</a:t>
+            </a:r>
+            <a:br/>
+            <a:r>
+              <a:t>        self.declare_parameter('stop_distance', 0.5)</a:t>
             </a:r>
           </a:p>
         </p:txBody>
@@ -20502,7 +20811,7 @@
               </a:defRPr>
             </a:pPr>
             <a:r>
-              <a:t>파일 전체 4/4 · 이 슬라이드 다음에 같은 파일의 나머지 줄이 이어집니다.</a:t>
+              <a:t>파일 전체 1/4 · 이 슬라이드 다음에 같은 파일의 나머지 줄이 이어집니다.</a:t>
             </a:r>
           </a:p>
         </p:txBody>
@@ -20559,7 +20868,7 @@
               </a:defRPr>
             </a:pPr>
             <a:r>
-              <a:t>build → source → run 순서로 실행한다</a:t>
+              <a:t>파일을 계속 작성하고 저장한다 (2/4)</a:t>
             </a:r>
           </a:p>
         </p:txBody>
@@ -20598,7 +20907,7 @@
               </a:defRPr>
             </a:pPr>
             <a:r>
-              <a:t>새 파일 또는 수정 파일은 build와 source 뒤에만 실행 이름·설정에 반영됩니다.</a:t>
+              <a:t>~/ros2_curri/agv_ws/src/agv_control/agv_control/safety_controller.py</a:t>
             </a:r>
           </a:p>
         </p:txBody>
@@ -20734,23 +21043,124 @@
               </a:defRPr>
             </a:pPr>
             <a:r>
-              <a:t>현재 단계 실행    |    현재 폴더 ~/agv_ws    |    현재 터미널</a:t>
-            </a:r>
-          </a:p>
-        </p:txBody>
-      </p:sp>
-      <p:sp>
-        <p:nvSpPr>
-          <p:cNvPr id="7" name="Rounded Rectangle 6"/>
+              <a:t>현재 단계 29/32    |    현재 폴더 ~/ros2_curri/agv_ws    |    현재 터미널</a:t>
+            </a:r>
+          </a:p>
+        </p:txBody>
+      </p:sp>
+      <p:sp>
+        <p:nvSpPr>
+          <p:cNvPr id="7" name="TextBox 6"/>
+          <p:cNvSpPr txBox="1"/>
+          <p:nvPr/>
+        </p:nvSpPr>
+        <p:spPr>
+          <a:xfrm>
+            <a:off x="658368" y="1627632"/>
+            <a:ext cx="10972800" cy="256032"/>
+          </a:xfrm>
+          <a:prstGeom prst="rect">
+            <a:avLst/>
+          </a:prstGeom>
+          <a:noFill/>
+        </p:spPr>
+        <p:txBody>
+          <a:bodyPr wrap="square" lIns="73152" rIns="73152" tIns="36576" bIns="36576">
+            <a:spAutoFit/>
+          </a:bodyPr>
+          <a:lstStyle/>
+          <a:p>
+            <a:pPr algn="l">
+              <a:spcAft>
+                <a:spcPts val="0"/>
+              </a:spcAft>
+              <a:defRPr sz="1500" b="1">
+                <a:solidFill>
+                  <a:srgbClr val="122C4E"/>
+                </a:solidFill>
+                <a:latin typeface="Noto Sans CJK KR"/>
+              </a:defRPr>
+            </a:pPr>
+            <a:r>
+              <a:t>이번 단계: 파일의 전체 내용을 중간 생략 없이 작성합니다. 아래 줄 범위를 끝까지 입력하세요.</a:t>
+            </a:r>
+          </a:p>
+        </p:txBody>
+      </p:sp>
+      <p:sp>
+        <p:nvSpPr>
+          <p:cNvPr id="8" name="Rectangle 7"/>
           <p:cNvSpPr/>
           <p:nvPr/>
         </p:nvSpPr>
         <p:spPr>
           <a:xfrm>
-            <a:off x="658368" y="1700784"/>
-            <a:ext cx="10972800" cy="3182112"/>
-          </a:xfrm>
-          <a:prstGeom prst="roundRect">
+            <a:off x="658368" y="1956816"/>
+            <a:ext cx="10972800" cy="603504"/>
+          </a:xfrm>
+          <a:prstGeom prst="rect">
+            <a:avLst/>
+          </a:prstGeom>
+          <a:solidFill>
+            <a:srgbClr val="F4F7FB"/>
+          </a:solidFill>
+          <a:ln>
+            <a:solidFill>
+              <a:srgbClr val="F4F7FB"/>
+            </a:solidFill>
+          </a:ln>
+        </p:spPr>
+        <p:style>
+          <a:lnRef idx="1">
+            <a:schemeClr val="accent1"/>
+          </a:lnRef>
+          <a:fillRef idx="3">
+            <a:schemeClr val="accent1"/>
+          </a:fillRef>
+          <a:effectRef idx="2">
+            <a:schemeClr val="accent1"/>
+          </a:effectRef>
+          <a:fontRef idx="minor">
+            <a:schemeClr val="lt1"/>
+          </a:fontRef>
+        </p:style>
+        <p:txBody>
+          <a:bodyPr rtlCol="0" anchor="ctr" wrap="square" lIns="73152" rIns="73152" tIns="36576" bIns="36576"/>
+          <a:lstStyle/>
+          <a:p>
+            <a:pPr algn="l">
+              <a:spcAft>
+                <a:spcPts val="0"/>
+              </a:spcAft>
+              <a:defRPr sz="1400" b="0">
+                <a:solidFill>
+                  <a:srgbClr val="122C4E"/>
+                </a:solidFill>
+                <a:latin typeface="DejaVu Sans Mono"/>
+              </a:defRPr>
+            </a:pPr>
+            <a:r>
+              <a:t>파일 생성: mkdir -p ~/ros2_curri/agv_ws/src/agv_control/agv_control</a:t>
+            </a:r>
+            <a:br/>
+            <a:r>
+              <a:t>파일 열기: nano ~/ros2_curri/agv_ws/src/agv_control/agv_control/safety_controller.py</a:t>
+            </a:r>
+          </a:p>
+        </p:txBody>
+      </p:sp>
+      <p:sp>
+        <p:nvSpPr>
+          <p:cNvPr id="9" name="Rectangle 8"/>
+          <p:cNvSpPr/>
+          <p:nvPr/>
+        </p:nvSpPr>
+        <p:spPr>
+          <a:xfrm>
+            <a:off x="658368" y="2706624"/>
+            <a:ext cx="10972800" cy="3364992"/>
+          </a:xfrm>
+          <a:prstGeom prst="rect">
             <a:avLst/>
           </a:prstGeom>
           <a:solidFill>
@@ -20777,14 +21187,14 @@
           </a:fontRef>
         </p:style>
         <p:txBody>
-          <a:bodyPr rtlCol="0" anchor="ctr" wrap="square" lIns="73152" rIns="73152" tIns="36576" bIns="36576"/>
-          <a:lstStyle/>
-          <a:p>
-            <a:pPr algn="l">
-              <a:spcAft>
-                <a:spcPts val="0"/>
-              </a:spcAft>
-              <a:defRPr sz="1600" b="0">
+          <a:bodyPr rtlCol="0" anchor="ctr" wrap="square" lIns="164592" rIns="164592" tIns="109728" bIns="36576"/>
+          <a:lstStyle/>
+          <a:p>
+            <a:pPr algn="l">
+              <a:spcAft>
+                <a:spcPts val="0"/>
+              </a:spcAft>
+              <a:defRPr sz="1400" b="0">
                 <a:solidFill>
                   <a:srgbClr val="FFFFFF"/>
                 </a:solidFill>
@@ -20792,25 +21202,59 @@
               </a:defRPr>
             </a:pPr>
             <a:r>
-              <a:t>cd ~/agv_ws &amp;&amp; source install/setup.bash</a:t>
-            </a:r>
-            <a:br/>
-            <a:r>
-              <a:t>ros2 launch agv_bringup agv_sim.launch.py</a:t>
-            </a:r>
-          </a:p>
-        </p:txBody>
-      </p:sp>
-      <p:sp>
-        <p:nvSpPr>
-          <p:cNvPr id="8" name="TextBox 7"/>
+              <a:t>        self.declare_parameter('front_half_angle_deg', 15.0)</a:t>
+            </a:r>
+            <a:br/>
+            <a:r>
+              <a:t>        self.obstacle_distance = math.inf</a:t>
+            </a:r>
+            <a:br/>
+            <a:r>
+              <a:t>        self.create_subscription(LaserScan, '/scan', self.scan_callback, 10)</a:t>
+            </a:r>
+            <a:br/>
+            <a:r>
+              <a:t>        self.create_subscription(Twist, '/cmd_vel_raw', self.command_callback, 10)</a:t>
+            </a:r>
+            <a:br/>
+            <a:r>
+              <a:t>        self.publisher = self.create_publisher(Twist, '/cmd_vel', 10)</a:t>
+            </a:r>
+            <a:br/>
+            <a:br/>
+            <a:r>
+              <a:t>    def scan_callback(self, scan):</a:t>
+            </a:r>
+            <a:br/>
+            <a:r>
+              <a:t>        limit = math.radians(self.get_parameter('front_half_angle_deg').value)</a:t>
+            </a:r>
+            <a:br/>
+            <a:r>
+              <a:t>        readings = [value for index,</a:t>
+            </a:r>
+            <a:br/>
+            <a:r>
+              <a:t>            value in enumerate(scan.ranges) if abs(scan.angle_min + index * scan.angle_increment) &lt;= limit and math.isfinite(value)]</a:t>
+            </a:r>
+            <a:br/>
+            <a:r>
+              <a:t>        self.obstacle_distance = min(readings) if readings else math.inf</a:t>
+            </a:r>
+            <a:br/>
+          </a:p>
+        </p:txBody>
+      </p:sp>
+      <p:sp>
+        <p:nvSpPr>
+          <p:cNvPr id="10" name="TextBox 9"/>
           <p:cNvSpPr txBox="1"/>
           <p:nvPr/>
         </p:nvSpPr>
         <p:spPr>
           <a:xfrm>
-            <a:off x="786384" y="5239512"/>
-            <a:ext cx="1261872" cy="237744"/>
+            <a:off x="749808" y="6181344"/>
+            <a:ext cx="10789920" cy="201168"/>
           </a:xfrm>
           <a:prstGeom prst="rect">
             <a:avLst/>
@@ -20827,54 +21271,15 @@
               <a:spcAft>
                 <a:spcPts val="0"/>
               </a:spcAft>
-              <a:defRPr sz="1800" b="1">
-                <a:solidFill>
-                  <a:srgbClr val="2A8B5A"/>
-                </a:solidFill>
-                <a:latin typeface="Noto Sans CJK KR"/>
-              </a:defRPr>
-            </a:pPr>
-            <a:r>
-              <a:t>확인 기준</a:t>
-            </a:r>
-          </a:p>
-        </p:txBody>
-      </p:sp>
-      <p:sp>
-        <p:nvSpPr>
-          <p:cNvPr id="9" name="TextBox 8"/>
-          <p:cNvSpPr txBox="1"/>
-          <p:nvPr/>
-        </p:nvSpPr>
-        <p:spPr>
-          <a:xfrm>
-            <a:off x="786384" y="5532120"/>
-            <a:ext cx="10469880" cy="420624"/>
-          </a:xfrm>
-          <a:prstGeom prst="rect">
-            <a:avLst/>
-          </a:prstGeom>
-          <a:noFill/>
-        </p:spPr>
-        <p:txBody>
-          <a:bodyPr wrap="square" lIns="73152" rIns="73152" tIns="36576" bIns="36576">
-            <a:spAutoFit/>
-          </a:bodyPr>
-          <a:lstStyle/>
-          <a:p>
-            <a:pPr algn="l">
-              <a:spcAft>
-                <a:spcPts val="0"/>
-              </a:spcAft>
-              <a:defRPr sz="1800" b="0">
-                <a:solidFill>
-                  <a:srgbClr val="122C4E"/>
-                </a:solidFill>
-                <a:latin typeface="Noto Sans CJK KR"/>
-              </a:defRPr>
-            </a:pPr>
-            <a:r>
-              <a:t>한 launch 실행, RViz/Gazebo 확인, mission log, rosbag 기록을 제출 체크리스트로 남긴다.</a:t>
+              <a:defRPr sz="1000" b="0">
+                <a:solidFill>
+                  <a:srgbClr val="5C6672"/>
+                </a:solidFill>
+                <a:latin typeface="Noto Sans CJK KR"/>
+              </a:defRPr>
+            </a:pPr>
+            <a:r>
+              <a:t>파일 전체 2/4 · 이 슬라이드 다음에 같은 파일의 나머지 줄이 이어집니다.</a:t>
             </a:r>
           </a:p>
         </p:txBody>
@@ -20931,7 +21336,7 @@
               </a:defRPr>
             </a:pPr>
             <a:r>
-              <a:t>정상 결과: 실제 환경에서 확인한 출력</a:t>
+              <a:t>파일을 계속 작성하고 저장한다 (3/4)</a:t>
             </a:r>
           </a:p>
         </p:txBody>
@@ -20970,7 +21375,7 @@
               </a:defRPr>
             </a:pPr>
             <a:r>
-              <a:t>실제 ROS 2 환경의 파일·패키지·구성 검증 로그</a:t>
+              <a:t>~/ros2_curri/agv_ws/src/agv_control/agv_control/safety_controller.py</a:t>
             </a:r>
           </a:p>
         </p:txBody>
@@ -21053,30 +21458,64 @@
           </a:p>
         </p:txBody>
       </p:sp>
-      <p:pic>
-        <p:nvPicPr>
-          <p:cNvPr id="6" name="Picture 5" descr="validation_terminal.png"/>
-          <p:cNvPicPr>
-            <a:picLocks noChangeAspect="1"/>
-          </p:cNvPicPr>
-          <p:nvPr/>
-        </p:nvPicPr>
-        <p:blipFill>
-          <a:blip r:embed="rId2"/>
-          <a:stretch>
-            <a:fillRect/>
-          </a:stretch>
-        </p:blipFill>
-        <p:spPr>
-          <a:xfrm>
-            <a:off x="2855133" y="1353312"/>
-            <a:ext cx="6478685" cy="4800600"/>
-          </a:xfrm>
-          <a:prstGeom prst="rect">
-            <a:avLst/>
-          </a:prstGeom>
-        </p:spPr>
-      </p:pic>
+      <p:sp>
+        <p:nvSpPr>
+          <p:cNvPr id="6" name="Rectangle 5"/>
+          <p:cNvSpPr/>
+          <p:nvPr/>
+        </p:nvSpPr>
+        <p:spPr>
+          <a:xfrm>
+            <a:off x="566928" y="1188720"/>
+            <a:ext cx="11064240" cy="347472"/>
+          </a:xfrm>
+          <a:prstGeom prst="rect">
+            <a:avLst/>
+          </a:prstGeom>
+          <a:solidFill>
+            <a:srgbClr val="F4F7FB"/>
+          </a:solidFill>
+          <a:ln>
+            <a:solidFill>
+              <a:srgbClr val="F4F7FB"/>
+            </a:solidFill>
+          </a:ln>
+        </p:spPr>
+        <p:style>
+          <a:lnRef idx="1">
+            <a:schemeClr val="accent1"/>
+          </a:lnRef>
+          <a:fillRef idx="3">
+            <a:schemeClr val="accent1"/>
+          </a:fillRef>
+          <a:effectRef idx="2">
+            <a:schemeClr val="accent1"/>
+          </a:effectRef>
+          <a:fontRef idx="minor">
+            <a:schemeClr val="lt1"/>
+          </a:fontRef>
+        </p:style>
+        <p:txBody>
+          <a:bodyPr rtlCol="0" anchor="ctr" wrap="square" lIns="73152" rIns="73152" tIns="36576" bIns="36576"/>
+          <a:lstStyle/>
+          <a:p>
+            <a:pPr algn="l">
+              <a:spcAft>
+                <a:spcPts val="0"/>
+              </a:spcAft>
+              <a:defRPr sz="1300" b="1">
+                <a:solidFill>
+                  <a:srgbClr val="122C4E"/>
+                </a:solidFill>
+                <a:latin typeface="Noto Sans CJK KR"/>
+              </a:defRPr>
+            </a:pPr>
+            <a:r>
+              <a:t>현재 단계 30/32    |    현재 폴더 ~/ros2_curri/agv_ws    |    현재 터미널</a:t>
+            </a:r>
+          </a:p>
+        </p:txBody>
+      </p:sp>
       <p:sp>
         <p:nvSpPr>
           <p:cNvPr id="7" name="TextBox 6"/>
@@ -21085,8 +21524,8 @@
         </p:nvSpPr>
         <p:spPr>
           <a:xfrm>
-            <a:off x="777240" y="6217920"/>
-            <a:ext cx="10607040" cy="182880"/>
+            <a:off x="658368" y="1627632"/>
+            <a:ext cx="10972800" cy="256032"/>
           </a:xfrm>
           <a:prstGeom prst="rect">
             <a:avLst/>
@@ -21099,19 +21538,219 @@
           </a:bodyPr>
           <a:lstStyle/>
           <a:p>
-            <a:pPr algn="ctr">
-              <a:spcAft>
-                <a:spcPts val="0"/>
-              </a:spcAft>
-              <a:defRPr sz="1100" b="1">
-                <a:solidFill>
-                  <a:srgbClr val="2A8B5A"/>
-                </a:solidFill>
-                <a:latin typeface="Noto Sans CJK KR"/>
-              </a:defRPr>
-            </a:pPr>
-            <a:r>
-              <a:t>① 명령/설정  ② 정상 출력 또는 화면  ③ 다음 검증 명령으로 재확인</a:t>
+            <a:pPr algn="l">
+              <a:spcAft>
+                <a:spcPts val="0"/>
+              </a:spcAft>
+              <a:defRPr sz="1500" b="1">
+                <a:solidFill>
+                  <a:srgbClr val="122C4E"/>
+                </a:solidFill>
+                <a:latin typeface="Noto Sans CJK KR"/>
+              </a:defRPr>
+            </a:pPr>
+            <a:r>
+              <a:t>이번 단계: 파일의 전체 내용을 중간 생략 없이 작성합니다. 아래 줄 범위를 끝까지 입력하세요.</a:t>
+            </a:r>
+          </a:p>
+        </p:txBody>
+      </p:sp>
+      <p:sp>
+        <p:nvSpPr>
+          <p:cNvPr id="8" name="Rectangle 7"/>
+          <p:cNvSpPr/>
+          <p:nvPr/>
+        </p:nvSpPr>
+        <p:spPr>
+          <a:xfrm>
+            <a:off x="658368" y="1956816"/>
+            <a:ext cx="10972800" cy="603504"/>
+          </a:xfrm>
+          <a:prstGeom prst="rect">
+            <a:avLst/>
+          </a:prstGeom>
+          <a:solidFill>
+            <a:srgbClr val="F4F7FB"/>
+          </a:solidFill>
+          <a:ln>
+            <a:solidFill>
+              <a:srgbClr val="F4F7FB"/>
+            </a:solidFill>
+          </a:ln>
+        </p:spPr>
+        <p:style>
+          <a:lnRef idx="1">
+            <a:schemeClr val="accent1"/>
+          </a:lnRef>
+          <a:fillRef idx="3">
+            <a:schemeClr val="accent1"/>
+          </a:fillRef>
+          <a:effectRef idx="2">
+            <a:schemeClr val="accent1"/>
+          </a:effectRef>
+          <a:fontRef idx="minor">
+            <a:schemeClr val="lt1"/>
+          </a:fontRef>
+        </p:style>
+        <p:txBody>
+          <a:bodyPr rtlCol="0" anchor="ctr" wrap="square" lIns="73152" rIns="73152" tIns="36576" bIns="36576"/>
+          <a:lstStyle/>
+          <a:p>
+            <a:pPr algn="l">
+              <a:spcAft>
+                <a:spcPts val="0"/>
+              </a:spcAft>
+              <a:defRPr sz="1400" b="0">
+                <a:solidFill>
+                  <a:srgbClr val="122C4E"/>
+                </a:solidFill>
+                <a:latin typeface="DejaVu Sans Mono"/>
+              </a:defRPr>
+            </a:pPr>
+            <a:r>
+              <a:t>파일 생성: mkdir -p ~/ros2_curri/agv_ws/src/agv_control/agv_control</a:t>
+            </a:r>
+            <a:br/>
+            <a:r>
+              <a:t>파일 열기: nano ~/ros2_curri/agv_ws/src/agv_control/agv_control/safety_controller.py</a:t>
+            </a:r>
+          </a:p>
+        </p:txBody>
+      </p:sp>
+      <p:sp>
+        <p:nvSpPr>
+          <p:cNvPr id="9" name="Rectangle 8"/>
+          <p:cNvSpPr/>
+          <p:nvPr/>
+        </p:nvSpPr>
+        <p:spPr>
+          <a:xfrm>
+            <a:off x="658368" y="2706624"/>
+            <a:ext cx="10972800" cy="3364992"/>
+          </a:xfrm>
+          <a:prstGeom prst="rect">
+            <a:avLst/>
+          </a:prstGeom>
+          <a:solidFill>
+            <a:srgbClr val="1D232D"/>
+          </a:solidFill>
+          <a:ln>
+            <a:solidFill>
+              <a:srgbClr val="1D232D"/>
+            </a:solidFill>
+          </a:ln>
+        </p:spPr>
+        <p:style>
+          <a:lnRef idx="1">
+            <a:schemeClr val="accent1"/>
+          </a:lnRef>
+          <a:fillRef idx="3">
+            <a:schemeClr val="accent1"/>
+          </a:fillRef>
+          <a:effectRef idx="2">
+            <a:schemeClr val="accent1"/>
+          </a:effectRef>
+          <a:fontRef idx="minor">
+            <a:schemeClr val="lt1"/>
+          </a:fontRef>
+        </p:style>
+        <p:txBody>
+          <a:bodyPr rtlCol="0" anchor="ctr" wrap="square" lIns="164592" rIns="164592" tIns="109728" bIns="36576"/>
+          <a:lstStyle/>
+          <a:p>
+            <a:pPr algn="l">
+              <a:spcAft>
+                <a:spcPts val="0"/>
+              </a:spcAft>
+              <a:defRPr sz="1400" b="0">
+                <a:solidFill>
+                  <a:srgbClr val="FFFFFF"/>
+                </a:solidFill>
+                <a:latin typeface="DejaVu Sans Mono"/>
+              </a:defRPr>
+            </a:pPr>
+            <a:r>
+              <a:t>    def command_callback(self, command):</a:t>
+            </a:r>
+            <a:br/>
+            <a:r>
+              <a:t>        safe = Twist()</a:t>
+            </a:r>
+            <a:br/>
+            <a:r>
+              <a:t>        if self.obstacle_distance &gt;= self.get_parameter('stop_distance').value or command.linear.x &lt;= 0.0:</a:t>
+            </a:r>
+            <a:br/>
+            <a:r>
+              <a:t>            safe = command</a:t>
+            </a:r>
+            <a:br/>
+            <a:r>
+              <a:t>        else:</a:t>
+            </a:r>
+            <a:br/>
+            <a:r>
+              <a:t>            self.get_logger().warn('obstacle at %.2f m: stopping forward command' % self.obstacle_distance)</a:t>
+            </a:r>
+            <a:br/>
+            <a:r>
+              <a:t>        self.publisher.publish(safe)</a:t>
+            </a:r>
+            <a:br/>
+            <a:br/>
+            <a:r>
+              <a:t>def main():</a:t>
+            </a:r>
+            <a:br/>
+            <a:r>
+              <a:t>    rclpy.init()</a:t>
+            </a:r>
+            <a:br/>
+            <a:r>
+              <a:t>    node = SafetyController()</a:t>
+            </a:r>
+            <a:br/>
+            <a:r>
+              <a:t>    try:</a:t>
+            </a:r>
+          </a:p>
+        </p:txBody>
+      </p:sp>
+      <p:sp>
+        <p:nvSpPr>
+          <p:cNvPr id="10" name="TextBox 9"/>
+          <p:cNvSpPr txBox="1"/>
+          <p:nvPr/>
+        </p:nvSpPr>
+        <p:spPr>
+          <a:xfrm>
+            <a:off x="749808" y="6181344"/>
+            <a:ext cx="10789920" cy="201168"/>
+          </a:xfrm>
+          <a:prstGeom prst="rect">
+            <a:avLst/>
+          </a:prstGeom>
+          <a:noFill/>
+        </p:spPr>
+        <p:txBody>
+          <a:bodyPr wrap="square" lIns="73152" rIns="73152" tIns="36576" bIns="36576">
+            <a:spAutoFit/>
+          </a:bodyPr>
+          <a:lstStyle/>
+          <a:p>
+            <a:pPr algn="l">
+              <a:spcAft>
+                <a:spcPts val="0"/>
+              </a:spcAft>
+              <a:defRPr sz="1000" b="0">
+                <a:solidFill>
+                  <a:srgbClr val="5C6672"/>
+                </a:solidFill>
+                <a:latin typeface="Noto Sans CJK KR"/>
+              </a:defRPr>
+            </a:pPr>
+            <a:r>
+              <a:t>파일 전체 3/4 · 이 슬라이드 다음에 같은 파일의 나머지 줄이 이어집니다.</a:t>
             </a:r>
           </a:p>
         </p:txBody>
@@ -21168,7 +21807,7 @@
               </a:defRPr>
             </a:pPr>
             <a:r>
-              <a:t>객관적 검증 명령으로 완료를 확인한다</a:t>
+              <a:t>파일을 계속 작성하고 저장한다 (4/4)</a:t>
             </a:r>
           </a:p>
         </p:txBody>
@@ -21207,7 +21846,7 @@
               </a:defRPr>
             </a:pPr>
             <a:r>
-              <a:t>화면만 보지 말고 topic·frame·파일·parameter를 다시 확인합니다.</a:t>
+              <a:t>~/ros2_curri/agv_ws/src/agv_control/agv_control/safety_controller.py</a:t>
             </a:r>
           </a:p>
         </p:txBody>
@@ -21343,23 +21982,124 @@
               </a:defRPr>
             </a:pPr>
             <a:r>
-              <a:t>현재 단계 검증    |    현재 폴더 ~/agv_ws    |    현재 터미널</a:t>
-            </a:r>
-          </a:p>
-        </p:txBody>
-      </p:sp>
-      <p:sp>
-        <p:nvSpPr>
-          <p:cNvPr id="7" name="Rounded Rectangle 6"/>
+              <a:t>현재 단계 31/32    |    현재 폴더 ~/ros2_curri/agv_ws    |    현재 터미널</a:t>
+            </a:r>
+          </a:p>
+        </p:txBody>
+      </p:sp>
+      <p:sp>
+        <p:nvSpPr>
+          <p:cNvPr id="7" name="TextBox 6"/>
+          <p:cNvSpPr txBox="1"/>
+          <p:nvPr/>
+        </p:nvSpPr>
+        <p:spPr>
+          <a:xfrm>
+            <a:off x="658368" y="1627632"/>
+            <a:ext cx="10972800" cy="256032"/>
+          </a:xfrm>
+          <a:prstGeom prst="rect">
+            <a:avLst/>
+          </a:prstGeom>
+          <a:noFill/>
+        </p:spPr>
+        <p:txBody>
+          <a:bodyPr wrap="square" lIns="73152" rIns="73152" tIns="36576" bIns="36576">
+            <a:spAutoFit/>
+          </a:bodyPr>
+          <a:lstStyle/>
+          <a:p>
+            <a:pPr algn="l">
+              <a:spcAft>
+                <a:spcPts val="0"/>
+              </a:spcAft>
+              <a:defRPr sz="1500" b="1">
+                <a:solidFill>
+                  <a:srgbClr val="122C4E"/>
+                </a:solidFill>
+                <a:latin typeface="Noto Sans CJK KR"/>
+              </a:defRPr>
+            </a:pPr>
+            <a:r>
+              <a:t>이번 단계: 파일의 전체 내용을 중간 생략 없이 작성합니다. 아래 줄 범위를 끝까지 입력하세요.</a:t>
+            </a:r>
+          </a:p>
+        </p:txBody>
+      </p:sp>
+      <p:sp>
+        <p:nvSpPr>
+          <p:cNvPr id="8" name="Rectangle 7"/>
           <p:cNvSpPr/>
           <p:nvPr/>
         </p:nvSpPr>
         <p:spPr>
           <a:xfrm>
-            <a:off x="658368" y="1755648"/>
-            <a:ext cx="10972800" cy="2148840"/>
-          </a:xfrm>
-          <a:prstGeom prst="roundRect">
+            <a:off x="658368" y="1956816"/>
+            <a:ext cx="10972800" cy="603504"/>
+          </a:xfrm>
+          <a:prstGeom prst="rect">
+            <a:avLst/>
+          </a:prstGeom>
+          <a:solidFill>
+            <a:srgbClr val="F4F7FB"/>
+          </a:solidFill>
+          <a:ln>
+            <a:solidFill>
+              <a:srgbClr val="F4F7FB"/>
+            </a:solidFill>
+          </a:ln>
+        </p:spPr>
+        <p:style>
+          <a:lnRef idx="1">
+            <a:schemeClr val="accent1"/>
+          </a:lnRef>
+          <a:fillRef idx="3">
+            <a:schemeClr val="accent1"/>
+          </a:fillRef>
+          <a:effectRef idx="2">
+            <a:schemeClr val="accent1"/>
+          </a:effectRef>
+          <a:fontRef idx="minor">
+            <a:schemeClr val="lt1"/>
+          </a:fontRef>
+        </p:style>
+        <p:txBody>
+          <a:bodyPr rtlCol="0" anchor="ctr" wrap="square" lIns="73152" rIns="73152" tIns="36576" bIns="36576"/>
+          <a:lstStyle/>
+          <a:p>
+            <a:pPr algn="l">
+              <a:spcAft>
+                <a:spcPts val="0"/>
+              </a:spcAft>
+              <a:defRPr sz="1400" b="0">
+                <a:solidFill>
+                  <a:srgbClr val="122C4E"/>
+                </a:solidFill>
+                <a:latin typeface="DejaVu Sans Mono"/>
+              </a:defRPr>
+            </a:pPr>
+            <a:r>
+              <a:t>파일 생성: mkdir -p ~/ros2_curri/agv_ws/src/agv_control/agv_control</a:t>
+            </a:r>
+            <a:br/>
+            <a:r>
+              <a:t>파일 열기: nano ~/ros2_curri/agv_ws/src/agv_control/agv_control/safety_controller.py</a:t>
+            </a:r>
+          </a:p>
+        </p:txBody>
+      </p:sp>
+      <p:sp>
+        <p:nvSpPr>
+          <p:cNvPr id="9" name="Rectangle 8"/>
+          <p:cNvSpPr/>
+          <p:nvPr/>
+        </p:nvSpPr>
+        <p:spPr>
+          <a:xfrm>
+            <a:off x="658368" y="2706624"/>
+            <a:ext cx="10972800" cy="3364992"/>
+          </a:xfrm>
+          <a:prstGeom prst="rect">
             <a:avLst/>
           </a:prstGeom>
           <a:solidFill>
@@ -21386,14 +22126,14 @@
           </a:fontRef>
         </p:style>
         <p:txBody>
-          <a:bodyPr rtlCol="0" anchor="ctr" wrap="square" lIns="73152" rIns="73152" tIns="36576" bIns="36576"/>
-          <a:lstStyle/>
-          <a:p>
-            <a:pPr algn="l">
-              <a:spcAft>
-                <a:spcPts val="0"/>
-              </a:spcAft>
-              <a:defRPr sz="1600" b="0">
+          <a:bodyPr rtlCol="0" anchor="ctr" wrap="square" lIns="164592" rIns="164592" tIns="109728" bIns="36576"/>
+          <a:lstStyle/>
+          <a:p>
+            <a:pPr algn="l">
+              <a:spcAft>
+                <a:spcPts val="0"/>
+              </a:spcAft>
+              <a:defRPr sz="1400" b="0">
                 <a:solidFill>
                   <a:srgbClr val="FFFFFF"/>
                 </a:solidFill>
@@ -21401,99 +22141,45 @@
               </a:defRPr>
             </a:pPr>
             <a:r>
-              <a:t>ros2 launch agv_bringup agv_sim.launch.py --show-args</a:t>
-            </a:r>
-            <a:br/>
-            <a:r>
-              <a:t>ros2 node list</a:t>
-            </a:r>
-            <a:br/>
-            <a:r>
-              <a:t>ros2 topic list | rg '/scan|/imu/data|/odom|/camera/image_raw|/cmd_vel'</a:t>
-            </a:r>
-          </a:p>
-        </p:txBody>
-      </p:sp>
-      <p:sp>
-        <p:nvSpPr>
-          <p:cNvPr id="8" name="Rounded Rectangle 7"/>
-          <p:cNvSpPr/>
-          <p:nvPr/>
-        </p:nvSpPr>
-        <p:spPr>
-          <a:xfrm>
-            <a:off x="658368" y="4206240"/>
-            <a:ext cx="10972800" cy="1554480"/>
-          </a:xfrm>
-          <a:prstGeom prst="roundRect">
-            <a:avLst/>
-          </a:prstGeom>
-          <a:solidFill>
-            <a:srgbClr val="F4F7FB"/>
-          </a:solidFill>
-          <a:ln>
-            <a:solidFill>
-              <a:srgbClr val="D1DFD5"/>
-            </a:solidFill>
-          </a:ln>
-        </p:spPr>
-        <p:style>
-          <a:lnRef idx="1">
-            <a:schemeClr val="accent1"/>
-          </a:lnRef>
-          <a:fillRef idx="3">
-            <a:schemeClr val="accent1"/>
-          </a:fillRef>
-          <a:effectRef idx="2">
-            <a:schemeClr val="accent1"/>
-          </a:effectRef>
-          <a:fontRef idx="minor">
-            <a:schemeClr val="lt1"/>
-          </a:fontRef>
-        </p:style>
-        <p:txBody>
-          <a:bodyPr rtlCol="0" anchor="ctr" wrap="square" lIns="73152" rIns="73152" tIns="36576" bIns="36576"/>
-          <a:lstStyle/>
-          <a:p>
-            <a:pPr algn="l">
-              <a:spcAft>
-                <a:spcPts val="0"/>
-              </a:spcAft>
-              <a:defRPr sz="1800" b="1">
-                <a:solidFill>
-                  <a:srgbClr val="2A8B5A"/>
-                </a:solidFill>
-                <a:latin typeface="Noto Sans CJK KR"/>
-              </a:defRPr>
-            </a:pPr>
-            <a:r>
-              <a:t>완료 체크</a:t>
-            </a:r>
-            <a:br/>
-            <a:r>
-              <a:t>□ 명령이 오류 없이 실행된다.</a:t>
-            </a:r>
-            <a:br/>
-            <a:r>
-              <a:t>□ 기대한 파일·topic·frame·parameter 이름이 보인다.</a:t>
-            </a:r>
-            <a:br/>
-            <a:r>
-              <a:t>□ 값의 단위와 방향을 한 문장으로 설명할 수 있다.</a:t>
-            </a:r>
-          </a:p>
-        </p:txBody>
-      </p:sp>
-      <p:sp>
-        <p:nvSpPr>
-          <p:cNvPr id="9" name="TextBox 8"/>
+              <a:t>        rclpy.spin(node)</a:t>
+            </a:r>
+            <a:br/>
+            <a:r>
+              <a:t>    except KeyboardInterrupt:</a:t>
+            </a:r>
+            <a:br/>
+            <a:r>
+              <a:t>        pass</a:t>
+            </a:r>
+            <a:br/>
+            <a:r>
+              <a:t>    finally:</a:t>
+            </a:r>
+            <a:br/>
+            <a:r>
+              <a:t>        node.destroy_node()</a:t>
+            </a:r>
+            <a:br/>
+            <a:r>
+              <a:t>        if rclpy.ok():</a:t>
+            </a:r>
+            <a:br/>
+            <a:r>
+              <a:t>            rclpy.shutdown()</a:t>
+            </a:r>
+          </a:p>
+        </p:txBody>
+      </p:sp>
+      <p:sp>
+        <p:nvSpPr>
+          <p:cNvPr id="10" name="TextBox 9"/>
           <p:cNvSpPr txBox="1"/>
           <p:nvPr/>
         </p:nvSpPr>
         <p:spPr>
           <a:xfrm>
-            <a:off x="731520" y="5989320"/>
-            <a:ext cx="10789920" cy="237744"/>
+            <a:off x="749808" y="6181344"/>
+            <a:ext cx="10789920" cy="201168"/>
           </a:xfrm>
           <a:prstGeom prst="rect">
             <a:avLst/>
@@ -21510,15 +22196,15 @@
               <a:spcAft>
                 <a:spcPts val="0"/>
               </a:spcAft>
-              <a:defRPr sz="1500" b="1">
-                <a:solidFill>
-                  <a:srgbClr val="122C4E"/>
-                </a:solidFill>
-                <a:latin typeface="Noto Sans CJK KR"/>
-              </a:defRPr>
-            </a:pPr>
-            <a:r>
-              <a:t>완료 조건: 한 launch 실행, RViz/Gazebo 확인, mission log, rosbag 기록을 제출 체크리스트로 남긴다.</a:t>
+              <a:defRPr sz="1000" b="0">
+                <a:solidFill>
+                  <a:srgbClr val="5C6672"/>
+                </a:solidFill>
+                <a:latin typeface="Noto Sans CJK KR"/>
+              </a:defRPr>
+            </a:pPr>
+            <a:r>
+              <a:t>파일 전체 4/4 · 이 슬라이드 다음에 같은 파일의 나머지 줄이 이어집니다.</a:t>
             </a:r>
           </a:p>
         </p:txBody>
@@ -21575,7 +22261,7 @@
               </a:defRPr>
             </a:pPr>
             <a:r>
-              <a:t>막히면: 증상 → 우선 확인 → 재검증</a:t>
+              <a:t>build → source → run 순서로 실행한다</a:t>
             </a:r>
           </a:p>
         </p:txBody>
@@ -21614,7 +22300,7 @@
               </a:defRPr>
             </a:pPr>
             <a:r>
-              <a:t>오류 메시지를 숨기지 않고 같은 순서로 점검합니다.</a:t>
+              <a:t>새 파일 또는 수정 파일은 build와 source 뒤에만 실행 이름·설정에 반영됩니다.</a:t>
             </a:r>
           </a:p>
         </p:txBody>
@@ -21750,7 +22436,7 @@
               </a:defRPr>
             </a:pPr>
             <a:r>
-              <a:t>현재 단계 오류 대응    |    현재 폴더 ~/agv_ws    |    현재 터미널</a:t>
+              <a:t>현재 단계 실행    |    현재 폴더 ~/ros2_curri/agv_ws    |    현재 터미널</a:t>
             </a:r>
           </a:p>
         </p:txBody>
@@ -21763,18 +22449,18 @@
         </p:nvSpPr>
         <p:spPr>
           <a:xfrm>
-            <a:off x="694944" y="1755648"/>
-            <a:ext cx="10972800" cy="1115568"/>
+            <a:off x="658368" y="1700784"/>
+            <a:ext cx="10972800" cy="3182112"/>
           </a:xfrm>
           <a:prstGeom prst="roundRect">
             <a:avLst/>
           </a:prstGeom>
           <a:solidFill>
-            <a:srgbClr val="FFF7F4"/>
+            <a:srgbClr val="1D232D"/>
           </a:solidFill>
           <a:ln>
             <a:solidFill>
-              <a:srgbClr val="EDBEB4"/>
+              <a:srgbClr val="1D232D"/>
             </a:solidFill>
           </a:ln>
         </p:spPr>
@@ -21793,10 +22479,27 @@
           </a:fontRef>
         </p:style>
         <p:txBody>
-          <a:bodyPr rtlCol="0" anchor="ctr"/>
-          <a:lstStyle/>
-          <a:p>
-            <a:pPr algn="ctr"/>
+          <a:bodyPr rtlCol="0" anchor="ctr" wrap="square" lIns="73152" rIns="73152" tIns="36576" bIns="36576"/>
+          <a:lstStyle/>
+          <a:p>
+            <a:pPr algn="l">
+              <a:spcAft>
+                <a:spcPts val="0"/>
+              </a:spcAft>
+              <a:defRPr sz="1600" b="0">
+                <a:solidFill>
+                  <a:srgbClr val="FFFFFF"/>
+                </a:solidFill>
+                <a:latin typeface="DejaVu Sans Mono"/>
+              </a:defRPr>
+            </a:pPr>
+            <a:r>
+              <a:t>cd ~/ros2_curri/agv_ws &amp;&amp; source install/setup.bash</a:t>
+            </a:r>
+            <a:br/>
+            <a:r>
+              <a:t>ros2 launch agv_bringup agv_sim.launch.py</a:t>
+            </a:r>
           </a:p>
         </p:txBody>
       </p:sp>
@@ -21808,8 +22511,8 @@
         </p:nvSpPr>
         <p:spPr>
           <a:xfrm>
-            <a:off x="896112" y="1901952"/>
-            <a:ext cx="2926080" cy="274320"/>
+            <a:off x="786384" y="5239512"/>
+            <a:ext cx="1261872" cy="237744"/>
           </a:xfrm>
           <a:prstGeom prst="rect">
             <a:avLst/>
@@ -21828,13 +22531,13 @@
               </a:spcAft>
               <a:defRPr sz="1800" b="1">
                 <a:solidFill>
-                  <a:srgbClr val="BE3B3B"/>
-                </a:solidFill>
-                <a:latin typeface="Noto Sans CJK KR"/>
-              </a:defRPr>
-            </a:pPr>
-            <a:r>
-              <a:t>증상 1: 일부 노드만 실행</a:t>
+                  <a:srgbClr val="2A8B5A"/>
+                </a:solidFill>
+                <a:latin typeface="Noto Sans CJK KR"/>
+              </a:defRPr>
+            </a:pPr>
+            <a:r>
+              <a:t>확인 기준</a:t>
             </a:r>
           </a:p>
         </p:txBody>
@@ -21847,8 +22550,8 @@
         </p:nvSpPr>
         <p:spPr>
           <a:xfrm>
-            <a:off x="3794760" y="1883664"/>
-            <a:ext cx="7543800" cy="621792"/>
+            <a:off x="786384" y="5532120"/>
+            <a:ext cx="10469880" cy="420624"/>
           </a:xfrm>
           <a:prstGeom prst="rect">
             <a:avLst/>
@@ -21865,7 +22568,7 @@
               <a:spcAft>
                 <a:spcPts val="0"/>
               </a:spcAft>
-              <a:defRPr sz="1600" b="0">
+              <a:defRPr sz="1800" b="0">
                 <a:solidFill>
                   <a:srgbClr val="122C4E"/>
                 </a:solidFill>
@@ -21873,308 +22576,7 @@
               </a:defRPr>
             </a:pPr>
             <a:r>
-              <a:t>우선 확인: launch 순서·namespace·config 경로를 확인한다.</a:t>
-            </a:r>
-            <a:br/>
-            <a:r>
-              <a:t>수정 후: ros2 launch agv_bringup agv_sim.launch.py --show-args</a:t>
-            </a:r>
-          </a:p>
-        </p:txBody>
-      </p:sp>
-      <p:sp>
-        <p:nvSpPr>
-          <p:cNvPr id="10" name="Rounded Rectangle 9"/>
-          <p:cNvSpPr/>
-          <p:nvPr/>
-        </p:nvSpPr>
-        <p:spPr>
-          <a:xfrm>
-            <a:off x="694944" y="3172968"/>
-            <a:ext cx="10972800" cy="1115568"/>
-          </a:xfrm>
-          <a:prstGeom prst="roundRect">
-            <a:avLst/>
-          </a:prstGeom>
-          <a:solidFill>
-            <a:srgbClr val="FFF7F4"/>
-          </a:solidFill>
-          <a:ln>
-            <a:solidFill>
-              <a:srgbClr val="EDBEB4"/>
-            </a:solidFill>
-          </a:ln>
-        </p:spPr>
-        <p:style>
-          <a:lnRef idx="1">
-            <a:schemeClr val="accent1"/>
-          </a:lnRef>
-          <a:fillRef idx="3">
-            <a:schemeClr val="accent1"/>
-          </a:fillRef>
-          <a:effectRef idx="2">
-            <a:schemeClr val="accent1"/>
-          </a:effectRef>
-          <a:fontRef idx="minor">
-            <a:schemeClr val="lt1"/>
-          </a:fontRef>
-        </p:style>
-        <p:txBody>
-          <a:bodyPr rtlCol="0" anchor="ctr"/>
-          <a:lstStyle/>
-          <a:p>
-            <a:pPr algn="ctr"/>
-          </a:p>
-        </p:txBody>
-      </p:sp>
-      <p:sp>
-        <p:nvSpPr>
-          <p:cNvPr id="11" name="TextBox 10"/>
-          <p:cNvSpPr txBox="1"/>
-          <p:nvPr/>
-        </p:nvSpPr>
-        <p:spPr>
-          <a:xfrm>
-            <a:off x="896112" y="3319272"/>
-            <a:ext cx="2926080" cy="274320"/>
-          </a:xfrm>
-          <a:prstGeom prst="rect">
-            <a:avLst/>
-          </a:prstGeom>
-          <a:noFill/>
-        </p:spPr>
-        <p:txBody>
-          <a:bodyPr wrap="square" lIns="73152" rIns="73152" tIns="36576" bIns="36576">
-            <a:spAutoFit/>
-          </a:bodyPr>
-          <a:lstStyle/>
-          <a:p>
-            <a:pPr algn="l">
-              <a:spcAft>
-                <a:spcPts val="0"/>
-              </a:spcAft>
-              <a:defRPr sz="1800" b="1">
-                <a:solidFill>
-                  <a:srgbClr val="BE3B3B"/>
-                </a:solidFill>
-                <a:latin typeface="Noto Sans CJK KR"/>
-              </a:defRPr>
-            </a:pPr>
-            <a:r>
-              <a:t>증상 2: 센서/TF 위치 불일치</a:t>
-            </a:r>
-          </a:p>
-        </p:txBody>
-      </p:sp>
-      <p:sp>
-        <p:nvSpPr>
-          <p:cNvPr id="12" name="TextBox 11"/>
-          <p:cNvSpPr txBox="1"/>
-          <p:nvPr/>
-        </p:nvSpPr>
-        <p:spPr>
-          <a:xfrm>
-            <a:off x="3794760" y="3300984"/>
-            <a:ext cx="7543800" cy="621792"/>
-          </a:xfrm>
-          <a:prstGeom prst="rect">
-            <a:avLst/>
-          </a:prstGeom>
-          <a:noFill/>
-        </p:spPr>
-        <p:txBody>
-          <a:bodyPr wrap="square" lIns="73152" rIns="73152" tIns="36576" bIns="36576">
-            <a:spAutoFit/>
-          </a:bodyPr>
-          <a:lstStyle/>
-          <a:p>
-            <a:pPr algn="l">
-              <a:spcAft>
-                <a:spcPts val="0"/>
-              </a:spcAft>
-              <a:defRPr sz="1600" b="0">
-                <a:solidFill>
-                  <a:srgbClr val="122C4E"/>
-                </a:solidFill>
-                <a:latin typeface="Noto Sans CJK KR"/>
-              </a:defRPr>
-            </a:pPr>
-            <a:r>
-              <a:t>우선 확인: header.frame_id와 TF tree를 확인한다.</a:t>
-            </a:r>
-            <a:br/>
-            <a:r>
-              <a:t>수정 후: ros2 launch agv_bringup agv_sim.launch.py --show-args</a:t>
-            </a:r>
-          </a:p>
-        </p:txBody>
-      </p:sp>
-      <p:sp>
-        <p:nvSpPr>
-          <p:cNvPr id="13" name="Rounded Rectangle 12"/>
-          <p:cNvSpPr/>
-          <p:nvPr/>
-        </p:nvSpPr>
-        <p:spPr>
-          <a:xfrm>
-            <a:off x="694944" y="4590288"/>
-            <a:ext cx="10972800" cy="1115568"/>
-          </a:xfrm>
-          <a:prstGeom prst="roundRect">
-            <a:avLst/>
-          </a:prstGeom>
-          <a:solidFill>
-            <a:srgbClr val="FFF7F4"/>
-          </a:solidFill>
-          <a:ln>
-            <a:solidFill>
-              <a:srgbClr val="EDBEB4"/>
-            </a:solidFill>
-          </a:ln>
-        </p:spPr>
-        <p:style>
-          <a:lnRef idx="1">
-            <a:schemeClr val="accent1"/>
-          </a:lnRef>
-          <a:fillRef idx="3">
-            <a:schemeClr val="accent1"/>
-          </a:fillRef>
-          <a:effectRef idx="2">
-            <a:schemeClr val="accent1"/>
-          </a:effectRef>
-          <a:fontRef idx="minor">
-            <a:schemeClr val="lt1"/>
-          </a:fontRef>
-        </p:style>
-        <p:txBody>
-          <a:bodyPr rtlCol="0" anchor="ctr"/>
-          <a:lstStyle/>
-          <a:p>
-            <a:pPr algn="ctr"/>
-          </a:p>
-        </p:txBody>
-      </p:sp>
-      <p:sp>
-        <p:nvSpPr>
-          <p:cNvPr id="14" name="TextBox 13"/>
-          <p:cNvSpPr txBox="1"/>
-          <p:nvPr/>
-        </p:nvSpPr>
-        <p:spPr>
-          <a:xfrm>
-            <a:off x="896112" y="4736592"/>
-            <a:ext cx="2926080" cy="274320"/>
-          </a:xfrm>
-          <a:prstGeom prst="rect">
-            <a:avLst/>
-          </a:prstGeom>
-          <a:noFill/>
-        </p:spPr>
-        <p:txBody>
-          <a:bodyPr wrap="square" lIns="73152" rIns="73152" tIns="36576" bIns="36576">
-            <a:spAutoFit/>
-          </a:bodyPr>
-          <a:lstStyle/>
-          <a:p>
-            <a:pPr algn="l">
-              <a:spcAft>
-                <a:spcPts val="0"/>
-              </a:spcAft>
-              <a:defRPr sz="1800" b="1">
-                <a:solidFill>
-                  <a:srgbClr val="BE3B3B"/>
-                </a:solidFill>
-                <a:latin typeface="Noto Sans CJK KR"/>
-              </a:defRPr>
-            </a:pPr>
-            <a:r>
-              <a:t>증상 3: 로봇이 불안정</a:t>
-            </a:r>
-          </a:p>
-        </p:txBody>
-      </p:sp>
-      <p:sp>
-        <p:nvSpPr>
-          <p:cNvPr id="15" name="TextBox 14"/>
-          <p:cNvSpPr txBox="1"/>
-          <p:nvPr/>
-        </p:nvSpPr>
-        <p:spPr>
-          <a:xfrm>
-            <a:off x="3794760" y="4718303"/>
-            <a:ext cx="7543800" cy="621792"/>
-          </a:xfrm>
-          <a:prstGeom prst="rect">
-            <a:avLst/>
-          </a:prstGeom>
-          <a:noFill/>
-        </p:spPr>
-        <p:txBody>
-          <a:bodyPr wrap="square" lIns="73152" rIns="73152" tIns="36576" bIns="36576">
-            <a:spAutoFit/>
-          </a:bodyPr>
-          <a:lstStyle/>
-          <a:p>
-            <a:pPr algn="l">
-              <a:spcAft>
-                <a:spcPts val="0"/>
-              </a:spcAft>
-              <a:defRPr sz="1600" b="0">
-                <a:solidFill>
-                  <a:srgbClr val="122C4E"/>
-                </a:solidFill>
-                <a:latin typeface="Noto Sans CJK KR"/>
-              </a:defRPr>
-            </a:pPr>
-            <a:r>
-              <a:t>우선 확인: physics collision·friction·inertia를 M07 순서로 점검한다.</a:t>
-            </a:r>
-            <a:br/>
-            <a:r>
-              <a:t>수정 후: ros2 launch agv_bringup agv_sim.launch.py --show-args</a:t>
-            </a:r>
-          </a:p>
-        </p:txBody>
-      </p:sp>
-      <p:sp>
-        <p:nvSpPr>
-          <p:cNvPr id="16" name="TextBox 15"/>
-          <p:cNvSpPr txBox="1"/>
-          <p:nvPr/>
-        </p:nvSpPr>
-        <p:spPr>
-          <a:xfrm>
-            <a:off x="822960" y="5779008"/>
-            <a:ext cx="10607040" cy="493776"/>
-          </a:xfrm>
-          <a:prstGeom prst="rect">
-            <a:avLst/>
-          </a:prstGeom>
-          <a:noFill/>
-        </p:spPr>
-        <p:txBody>
-          <a:bodyPr wrap="square" lIns="73152" rIns="73152" tIns="36576" bIns="36576">
-            <a:spAutoFit/>
-          </a:bodyPr>
-          <a:lstStyle/>
-          <a:p>
-            <a:pPr algn="ctr">
-              <a:spcAft>
-                <a:spcPts val="0"/>
-              </a:spcAft>
-              <a:defRPr sz="1500" b="1">
-                <a:solidFill>
-                  <a:srgbClr val="DB7E22"/>
-                </a:solidFill>
-                <a:latin typeface="Noto Sans CJK KR"/>
-              </a:defRPr>
-            </a:pPr>
-            <a:r>
-              <a:t>공통 순서: ① 현재 폴더 ② source ③ 파일 경로</a:t>
-            </a:r>
-            <a:br/>
-            <a:r>
-              <a:t>④ 이름/타입/단위 ⑤ build·source 후 재실행</a:t>
+              <a:t>한 launch 실행, RViz/Gazebo 확인, mission log, rosbag 기록을 제출 체크리스트로 남긴다.</a:t>
             </a:r>
           </a:p>
         </p:txBody>
@@ -22231,7 +22633,7 @@
               </a:defRPr>
             </a:pPr>
             <a:r>
-              <a:t>미니 실습: 값 하나를 바꾸고 결과를 비교한다</a:t>
+              <a:t>정상 결과: 실제 환경에서 확인한 출력</a:t>
             </a:r>
           </a:p>
         </p:txBody>
@@ -22270,7 +22672,7 @@
               </a:defRPr>
             </a:pPr>
             <a:r>
-              <a:t>정상 결과를 만든 뒤에는 한 번에 하나의 값만 바꿉니다.</a:t>
+              <a:t>실제 ROS 2 환경의 파일·패키지·구성 검증 로그</a:t>
             </a:r>
           </a:p>
         </p:txBody>
@@ -22353,132 +22755,40 @@
           </a:p>
         </p:txBody>
       </p:sp>
-      <p:sp>
-        <p:nvSpPr>
-          <p:cNvPr id="6" name="Rectangle 5"/>
-          <p:cNvSpPr/>
-          <p:nvPr/>
-        </p:nvSpPr>
-        <p:spPr>
-          <a:xfrm>
-            <a:off x="566928" y="1188720"/>
-            <a:ext cx="11064240" cy="347472"/>
-          </a:xfrm>
-          <a:prstGeom prst="rect">
-            <a:avLst/>
-          </a:prstGeom>
-          <a:solidFill>
-            <a:srgbClr val="F4F7FB"/>
-          </a:solidFill>
-          <a:ln>
-            <a:solidFill>
-              <a:srgbClr val="F4F7FB"/>
-            </a:solidFill>
-          </a:ln>
-        </p:spPr>
-        <p:style>
-          <a:lnRef idx="1">
-            <a:schemeClr val="accent1"/>
-          </a:lnRef>
-          <a:fillRef idx="3">
-            <a:schemeClr val="accent1"/>
-          </a:fillRef>
-          <a:effectRef idx="2">
-            <a:schemeClr val="accent1"/>
-          </a:effectRef>
-          <a:fontRef idx="minor">
-            <a:schemeClr val="lt1"/>
-          </a:fontRef>
-        </p:style>
-        <p:txBody>
-          <a:bodyPr rtlCol="0" anchor="ctr" wrap="square" lIns="73152" rIns="73152" tIns="36576" bIns="36576"/>
-          <a:lstStyle/>
-          <a:p>
-            <a:pPr algn="l">
-              <a:spcAft>
-                <a:spcPts val="0"/>
-              </a:spcAft>
-              <a:defRPr sz="1300" b="1">
-                <a:solidFill>
-                  <a:srgbClr val="122C4E"/>
-                </a:solidFill>
-                <a:latin typeface="Noto Sans CJK KR"/>
-              </a:defRPr>
-            </a:pPr>
-            <a:r>
-              <a:t>현재 단계 미니 실습    |    현재 폴더 ~/agv_ws    |    현재 터미널</a:t>
-            </a:r>
-          </a:p>
-        </p:txBody>
-      </p:sp>
-      <p:sp>
-        <p:nvSpPr>
-          <p:cNvPr id="7" name="Rounded Rectangle 6"/>
-          <p:cNvSpPr/>
-          <p:nvPr/>
-        </p:nvSpPr>
-        <p:spPr>
-          <a:xfrm>
-            <a:off x="749808" y="1874519"/>
-            <a:ext cx="10652760" cy="1993392"/>
-          </a:xfrm>
-          <a:prstGeom prst="roundRect">
-            <a:avLst/>
-          </a:prstGeom>
-          <a:solidFill>
-            <a:srgbClr val="FFF8EB"/>
-          </a:solidFill>
-          <a:ln>
-            <a:solidFill>
-              <a:srgbClr val="ECC680"/>
-            </a:solidFill>
-          </a:ln>
-        </p:spPr>
-        <p:style>
-          <a:lnRef idx="1">
-            <a:schemeClr val="accent1"/>
-          </a:lnRef>
-          <a:fillRef idx="3">
-            <a:schemeClr val="accent1"/>
-          </a:fillRef>
-          <a:effectRef idx="2">
-            <a:schemeClr val="accent1"/>
-          </a:effectRef>
-          <a:fontRef idx="minor">
-            <a:schemeClr val="lt1"/>
-          </a:fontRef>
-        </p:style>
-        <p:txBody>
-          <a:bodyPr rtlCol="0" anchor="ctr" wrap="square" lIns="73152" rIns="73152" tIns="36576" bIns="36576"/>
-          <a:lstStyle/>
-          <a:p>
-            <a:pPr algn="ctr">
-              <a:spcAft>
-                <a:spcPts val="0"/>
-              </a:spcAft>
-              <a:defRPr sz="2300" b="1">
-                <a:solidFill>
-                  <a:srgbClr val="122C4E"/>
-                </a:solidFill>
-                <a:latin typeface="Noto Sans CJK KR"/>
-              </a:defRPr>
-            </a:pPr>
-            <a:r>
-              <a:t>완료 증거를 ①Gazebo ②RViz ③ros2 topic ④mission log ⑤rosbag으로 나누어 실제 제출 파일 목록을 작성한다.</a:t>
-            </a:r>
-          </a:p>
-        </p:txBody>
-      </p:sp>
-      <p:sp>
-        <p:nvSpPr>
-          <p:cNvPr id="8" name="TextBox 7"/>
+      <p:pic>
+        <p:nvPicPr>
+          <p:cNvPr id="6" name="Picture 5" descr="validation_terminal.png"/>
+          <p:cNvPicPr>
+            <a:picLocks noChangeAspect="1"/>
+          </p:cNvPicPr>
+          <p:nvPr/>
+        </p:nvPicPr>
+        <p:blipFill>
+          <a:blip r:embed="rId2"/>
+          <a:stretch>
+            <a:fillRect/>
+          </a:stretch>
+        </p:blipFill>
+        <p:spPr>
+          <a:xfrm>
+            <a:off x="2855133" y="1353312"/>
+            <a:ext cx="6478685" cy="4800600"/>
+          </a:xfrm>
+          <a:prstGeom prst="rect">
+            <a:avLst/>
+          </a:prstGeom>
+        </p:spPr>
+      </p:pic>
+      <p:sp>
+        <p:nvSpPr>
+          <p:cNvPr id="7" name="TextBox 6"/>
           <p:cNvSpPr txBox="1"/>
           <p:nvPr/>
         </p:nvSpPr>
         <p:spPr>
           <a:xfrm>
-            <a:off x="877824" y="4590288"/>
-            <a:ext cx="10241280" cy="594360"/>
+            <a:off x="777240" y="6217920"/>
+            <a:ext cx="10607040" cy="182880"/>
           </a:xfrm>
           <a:prstGeom prst="rect">
             <a:avLst/>
@@ -22495,15 +22805,15 @@
               <a:spcAft>
                 <a:spcPts val="0"/>
               </a:spcAft>
-              <a:defRPr sz="1900" b="1">
-                <a:solidFill>
-                  <a:srgbClr val="DB7E22"/>
-                </a:solidFill>
-                <a:latin typeface="Noto Sans CJK KR"/>
-              </a:defRPr>
-            </a:pPr>
-            <a:r>
-              <a:t>기록할 것: 바꾼 값(단위) · 기대한 변화 · 실제 출력/화면 · 원래 값으로 되돌린 결과</a:t>
+              <a:defRPr sz="1100" b="1">
+                <a:solidFill>
+                  <a:srgbClr val="2A8B5A"/>
+                </a:solidFill>
+                <a:latin typeface="Noto Sans CJK KR"/>
+              </a:defRPr>
+            </a:pPr>
+            <a:r>
+              <a:t>① 명령/설정  ② 정상 출력 또는 화면  ③ 다음 검증 명령으로 재확인</a:t>
             </a:r>
           </a:p>
         </p:txBody>
@@ -22893,7 +23203,7 @@
               </a:defRPr>
             </a:pPr>
             <a:r>
-              <a:t>최종 미션 시나리오</a:t>
+              <a:t>정상 결과: 실제 환경에서 확인한 출력</a:t>
             </a:r>
           </a:p>
         </p:txBody>
@@ -22932,7 +23242,7 @@
               </a:defRPr>
             </a:pPr>
             <a:r>
-              <a:t>통합 단계에서 놓치기 쉬운 실행·운영 조건을 정리합니다.</a:t>
+              <a:t>실제 RViz2 통합 display: 최종 미션에서 RobotModel·TF·sensor·Path·Marker를 함께 확인하는 화면</a:t>
             </a:r>
           </a:p>
         </p:txBody>
@@ -23015,119 +23325,40 @@
           </a:p>
         </p:txBody>
       </p:sp>
-      <p:sp>
-        <p:nvSpPr>
-          <p:cNvPr id="6" name="Rectangle 5"/>
-          <p:cNvSpPr/>
-          <p:nvPr/>
-        </p:nvSpPr>
-        <p:spPr>
-          <a:xfrm>
-            <a:off x="566928" y="1188720"/>
-            <a:ext cx="11064240" cy="347472"/>
-          </a:xfrm>
-          <a:prstGeom prst="rect">
-            <a:avLst/>
-          </a:prstGeom>
-          <a:solidFill>
-            <a:srgbClr val="F4F7FB"/>
-          </a:solidFill>
-          <a:ln>
-            <a:solidFill>
-              <a:srgbClr val="F4F7FB"/>
-            </a:solidFill>
-          </a:ln>
-        </p:spPr>
-        <p:style>
-          <a:lnRef idx="1">
-            <a:schemeClr val="accent1"/>
-          </a:lnRef>
-          <a:fillRef idx="3">
-            <a:schemeClr val="accent1"/>
-          </a:fillRef>
-          <a:effectRef idx="2">
-            <a:schemeClr val="accent1"/>
-          </a:effectRef>
-          <a:fontRef idx="minor">
-            <a:schemeClr val="lt1"/>
-          </a:fontRef>
-        </p:style>
-        <p:txBody>
-          <a:bodyPr rtlCol="0" anchor="ctr" wrap="square" lIns="73152" rIns="73152" tIns="36576" bIns="36576"/>
-          <a:lstStyle/>
-          <a:p>
-            <a:pPr algn="l">
-              <a:spcAft>
-                <a:spcPts val="0"/>
-              </a:spcAft>
-              <a:defRPr sz="1300" b="1">
-                <a:solidFill>
-                  <a:srgbClr val="122C4E"/>
-                </a:solidFill>
-                <a:latin typeface="Noto Sans CJK KR"/>
-              </a:defRPr>
-            </a:pPr>
-            <a:r>
-              <a:t>현재 단계 통합 보강    |    현재 폴더 ~/agv_ws    |    현재 터미널</a:t>
-            </a:r>
-          </a:p>
-        </p:txBody>
-      </p:sp>
-      <p:sp>
-        <p:nvSpPr>
-          <p:cNvPr id="7" name="Rounded Rectangle 6"/>
-          <p:cNvSpPr/>
-          <p:nvPr/>
-        </p:nvSpPr>
-        <p:spPr>
-          <a:xfrm>
-            <a:off x="676656" y="1691640"/>
-            <a:ext cx="10972800" cy="4434840"/>
-          </a:xfrm>
-          <a:prstGeom prst="roundRect">
-            <a:avLst/>
-          </a:prstGeom>
-          <a:solidFill>
-            <a:srgbClr val="F4F7FB"/>
-          </a:solidFill>
-          <a:ln>
-            <a:solidFill>
-              <a:srgbClr val="D2DEEC"/>
-            </a:solidFill>
-          </a:ln>
-        </p:spPr>
-        <p:style>
-          <a:lnRef idx="1">
-            <a:schemeClr val="accent1"/>
-          </a:lnRef>
-          <a:fillRef idx="3">
-            <a:schemeClr val="accent1"/>
-          </a:fillRef>
-          <a:effectRef idx="2">
-            <a:schemeClr val="accent1"/>
-          </a:effectRef>
-          <a:fontRef idx="minor">
-            <a:schemeClr val="lt1"/>
-          </a:fontRef>
-        </p:style>
-        <p:txBody>
-          <a:bodyPr rtlCol="0" anchor="ctr"/>
-          <a:lstStyle/>
-          <a:p>
-            <a:pPr algn="ctr"/>
-          </a:p>
-        </p:txBody>
-      </p:sp>
-      <p:sp>
-        <p:nvSpPr>
-          <p:cNvPr id="8" name="TextBox 7"/>
+      <p:pic>
+        <p:nvPicPr>
+          <p:cNvPr id="6" name="Picture 5" descr="02_rviz_final_actual.png"/>
+          <p:cNvPicPr>
+            <a:picLocks noChangeAspect="1"/>
+          </p:cNvPicPr>
+          <p:nvPr/>
+        </p:nvPicPr>
+        <p:blipFill>
+          <a:blip r:embed="rId2"/>
+          <a:stretch>
+            <a:fillRect/>
+          </a:stretch>
+        </p:blipFill>
+        <p:spPr>
+          <a:xfrm>
+            <a:off x="2971409" y="1353312"/>
+            <a:ext cx="6246133" cy="4800600"/>
+          </a:xfrm>
+          <a:prstGeom prst="rect">
+            <a:avLst/>
+          </a:prstGeom>
+        </p:spPr>
+      </p:pic>
+      <p:sp>
+        <p:nvSpPr>
+          <p:cNvPr id="7" name="TextBox 6"/>
           <p:cNvSpPr txBox="1"/>
           <p:nvPr/>
         </p:nvSpPr>
         <p:spPr>
           <a:xfrm>
-            <a:off x="914400" y="1993392"/>
-            <a:ext cx="10332720" cy="3749039"/>
+            <a:off x="777240" y="6217920"/>
+            <a:ext cx="10607040" cy="182880"/>
           </a:xfrm>
           <a:prstGeom prst="rect">
             <a:avLst/>
@@ -23135,88 +23366,24 @@
           <a:noFill/>
         </p:spPr>
         <p:txBody>
-          <a:bodyPr wrap="square" lIns="109728" rIns="109728">
+          <a:bodyPr wrap="square" lIns="73152" rIns="73152" tIns="36576" bIns="36576">
             <a:spAutoFit/>
           </a:bodyPr>
           <a:lstStyle/>
           <a:p>
-            <a:pPr>
-              <a:spcAft>
-                <a:spcPts val="800"/>
-              </a:spcAft>
-              <a:defRPr sz="1900">
-                <a:solidFill>
-                  <a:srgbClr val="122C4E"/>
-                </a:solidFill>
-                <a:latin typeface="Noto Sans CJK KR"/>
-              </a:defRPr>
-            </a:pPr>
-            <a:r>
-              <a:t>• 1. START: launch와 sensor topic을 확인한다.</a:t>
-            </a:r>
-          </a:p>
-          <a:p>
-            <a:pPr>
-              <a:spcAft>
-                <a:spcPts val="800"/>
-              </a:spcAft>
-              <a:defRPr sz="1900">
-                <a:solidFill>
-                  <a:srgbClr val="122C4E"/>
-                </a:solidFill>
-                <a:latin typeface="Noto Sans CJK KR"/>
-              </a:defRPr>
-            </a:pPr>
-            <a:r>
-              <a:t>• 2. SEARCH: target이 없을 때 회전 탐색 command를 관찰한다.</a:t>
-            </a:r>
-          </a:p>
-          <a:p>
-            <a:pPr>
-              <a:spcAft>
-                <a:spcPts val="800"/>
-              </a:spcAft>
-              <a:defRPr sz="1900">
-                <a:solidFill>
-                  <a:srgbClr val="122C4E"/>
-                </a:solidFill>
-                <a:latin typeface="Noto Sans CJK KR"/>
-              </a:defRPr>
-            </a:pPr>
-            <a:r>
-              <a:t>• 3. APPROACH: detection 중심 오차가 angular command로 바뀌는지 확인한다.</a:t>
-            </a:r>
-          </a:p>
-          <a:p>
-            <a:pPr>
-              <a:spcAft>
-                <a:spcPts val="800"/>
-              </a:spcAft>
-              <a:defRPr sz="1900">
-                <a:solidFill>
-                  <a:srgbClr val="122C4E"/>
-                </a:solidFill>
-                <a:latin typeface="Noto Sans CJK KR"/>
-              </a:defRPr>
-            </a:pPr>
-            <a:r>
-              <a:t>• 4. AVOID/STOP: LiDAR threshold 안에서는 safety가 우선하는지 확인한다.</a:t>
-            </a:r>
-          </a:p>
-          <a:p>
-            <a:pPr>
-              <a:spcAft>
-                <a:spcPts val="800"/>
-              </a:spcAft>
-              <a:defRPr sz="1900">
-                <a:solidFill>
-                  <a:srgbClr val="122C4E"/>
-                </a:solidFill>
-                <a:latin typeface="Noto Sans CJK KR"/>
-              </a:defRPr>
-            </a:pPr>
-            <a:r>
-              <a:t>• 5. GOAL/STOP: 목표 도달 뒤 forward /cmd_vel이 0인지 확인한다.</a:t>
+            <a:pPr algn="ctr">
+              <a:spcAft>
+                <a:spcPts val="0"/>
+              </a:spcAft>
+              <a:defRPr sz="1100" b="1">
+                <a:solidFill>
+                  <a:srgbClr val="2A8B5A"/>
+                </a:solidFill>
+                <a:latin typeface="Noto Sans CJK KR"/>
+              </a:defRPr>
+            </a:pPr>
+            <a:r>
+              <a:t>① 명령/설정  ② 정상 출력 또는 화면  ③ 다음 검증 명령으로 재확인</a:t>
             </a:r>
           </a:p>
         </p:txBody>
@@ -23273,7 +23440,7 @@
               </a:defRPr>
             </a:pPr>
             <a:r>
-              <a:t>최종 기능 체크표</a:t>
+              <a:t>객관적 검증 명령으로 완료를 확인한다</a:t>
             </a:r>
           </a:p>
         </p:txBody>
@@ -23312,7 +23479,7 @@
               </a:defRPr>
             </a:pPr>
             <a:r>
-              <a:t>통합 단계에서 놓치기 쉬운 실행·운영 조건을 정리합니다.</a:t>
+              <a:t>화면만 보지 말고 topic·frame·파일·parameter를 다시 확인합니다.</a:t>
             </a:r>
           </a:p>
         </p:txBody>
@@ -23448,7 +23615,7 @@
               </a:defRPr>
             </a:pPr>
             <a:r>
-              <a:t>현재 단계 통합 보강    |    현재 폴더 ~/agv_ws    |    현재 터미널</a:t>
+              <a:t>현재 단계 검증    |    현재 폴더 ~/ros2_curri/agv_ws    |    현재 터미널</a:t>
             </a:r>
           </a:p>
         </p:txBody>
@@ -23461,8 +23628,74 @@
         </p:nvSpPr>
         <p:spPr>
           <a:xfrm>
-            <a:off x="676656" y="1691640"/>
-            <a:ext cx="10972800" cy="4434840"/>
+            <a:off x="658368" y="1755648"/>
+            <a:ext cx="10972800" cy="2148840"/>
+          </a:xfrm>
+          <a:prstGeom prst="roundRect">
+            <a:avLst/>
+          </a:prstGeom>
+          <a:solidFill>
+            <a:srgbClr val="1D232D"/>
+          </a:solidFill>
+          <a:ln>
+            <a:solidFill>
+              <a:srgbClr val="1D232D"/>
+            </a:solidFill>
+          </a:ln>
+        </p:spPr>
+        <p:style>
+          <a:lnRef idx="1">
+            <a:schemeClr val="accent1"/>
+          </a:lnRef>
+          <a:fillRef idx="3">
+            <a:schemeClr val="accent1"/>
+          </a:fillRef>
+          <a:effectRef idx="2">
+            <a:schemeClr val="accent1"/>
+          </a:effectRef>
+          <a:fontRef idx="minor">
+            <a:schemeClr val="lt1"/>
+          </a:fontRef>
+        </p:style>
+        <p:txBody>
+          <a:bodyPr rtlCol="0" anchor="ctr" wrap="square" lIns="73152" rIns="73152" tIns="36576" bIns="36576"/>
+          <a:lstStyle/>
+          <a:p>
+            <a:pPr algn="l">
+              <a:spcAft>
+                <a:spcPts val="0"/>
+              </a:spcAft>
+              <a:defRPr sz="1600" b="0">
+                <a:solidFill>
+                  <a:srgbClr val="FFFFFF"/>
+                </a:solidFill>
+                <a:latin typeface="DejaVu Sans Mono"/>
+              </a:defRPr>
+            </a:pPr>
+            <a:r>
+              <a:t>ros2 launch agv_bringup agv_sim.launch.py --show-args</a:t>
+            </a:r>
+            <a:br/>
+            <a:r>
+              <a:t>ros2 node list</a:t>
+            </a:r>
+            <a:br/>
+            <a:r>
+              <a:t>ros2 topic list | rg '/scan|/imu/data|/odom|/camera/image_raw|/cmd_vel'</a:t>
+            </a:r>
+          </a:p>
+        </p:txBody>
+      </p:sp>
+      <p:sp>
+        <p:nvSpPr>
+          <p:cNvPr id="8" name="Rounded Rectangle 7"/>
+          <p:cNvSpPr/>
+          <p:nvPr/>
+        </p:nvSpPr>
+        <p:spPr>
+          <a:xfrm>
+            <a:off x="658368" y="4206240"/>
+            <a:ext cx="10972800" cy="1554480"/>
           </a:xfrm>
           <a:prstGeom prst="roundRect">
             <a:avLst/>
@@ -23472,7 +23705,7 @@
           </a:solidFill>
           <a:ln>
             <a:solidFill>
-              <a:srgbClr val="D2DEEC"/>
+              <a:srgbClr val="D1DFD5"/>
             </a:solidFill>
           </a:ln>
         </p:spPr>
@@ -23491,23 +23724,48 @@
           </a:fontRef>
         </p:style>
         <p:txBody>
-          <a:bodyPr rtlCol="0" anchor="ctr"/>
-          <a:lstStyle/>
-          <a:p>
-            <a:pPr algn="ctr"/>
-          </a:p>
-        </p:txBody>
-      </p:sp>
-      <p:sp>
-        <p:nvSpPr>
-          <p:cNvPr id="8" name="TextBox 7"/>
+          <a:bodyPr rtlCol="0" anchor="ctr" wrap="square" lIns="73152" rIns="73152" tIns="36576" bIns="36576"/>
+          <a:lstStyle/>
+          <a:p>
+            <a:pPr algn="l">
+              <a:spcAft>
+                <a:spcPts val="0"/>
+              </a:spcAft>
+              <a:defRPr sz="1800" b="1">
+                <a:solidFill>
+                  <a:srgbClr val="2A8B5A"/>
+                </a:solidFill>
+                <a:latin typeface="Noto Sans CJK KR"/>
+              </a:defRPr>
+            </a:pPr>
+            <a:r>
+              <a:t>완료 체크</a:t>
+            </a:r>
+            <a:br/>
+            <a:r>
+              <a:t>□ 명령이 오류 없이 실행된다.</a:t>
+            </a:r>
+            <a:br/>
+            <a:r>
+              <a:t>□ 기대한 파일·topic·frame·parameter 이름이 보인다.</a:t>
+            </a:r>
+            <a:br/>
+            <a:r>
+              <a:t>□ 값의 단위와 방향을 한 문장으로 설명할 수 있다.</a:t>
+            </a:r>
+          </a:p>
+        </p:txBody>
+      </p:sp>
+      <p:sp>
+        <p:nvSpPr>
+          <p:cNvPr id="9" name="TextBox 8"/>
           <p:cNvSpPr txBox="1"/>
           <p:nvPr/>
         </p:nvSpPr>
         <p:spPr>
           <a:xfrm>
-            <a:off x="914400" y="1993392"/>
-            <a:ext cx="10332720" cy="3749039"/>
+            <a:off x="731520" y="5989320"/>
+            <a:ext cx="10789920" cy="237744"/>
           </a:xfrm>
           <a:prstGeom prst="rect">
             <a:avLst/>
@@ -23515,16 +23773,16 @@
           <a:noFill/>
         </p:spPr>
         <p:txBody>
-          <a:bodyPr wrap="square" lIns="109728" rIns="109728">
+          <a:bodyPr wrap="square" lIns="73152" rIns="73152" tIns="36576" bIns="36576">
             <a:spAutoFit/>
           </a:bodyPr>
           <a:lstStyle/>
           <a:p>
-            <a:pPr>
-              <a:spcAft>
-                <a:spcPts val="800"/>
-              </a:spcAft>
-              <a:defRPr sz="1900">
+            <a:pPr algn="l">
+              <a:spcAft>
+                <a:spcPts val="0"/>
+              </a:spcAft>
+              <a:defRPr sz="1500" b="1">
                 <a:solidFill>
                   <a:srgbClr val="122C4E"/>
                 </a:solidFill>
@@ -23532,71 +23790,7 @@
               </a:defRPr>
             </a:pPr>
             <a:r>
-              <a:t>• Model/Physics: body·wheel·collision·inertia</a:t>
-            </a:r>
-          </a:p>
-          <a:p>
-            <a:pPr>
-              <a:spcAft>
-                <a:spcPts val="800"/>
-              </a:spcAft>
-              <a:defRPr sz="1900">
-                <a:solidFill>
-                  <a:srgbClr val="122C4E"/>
-                </a:solidFill>
-                <a:latin typeface="Noto Sans CJK KR"/>
-              </a:defRPr>
-            </a:pPr>
-            <a:r>
-              <a:t>• Drive/TF/Odom: /cmd_vel, /odom, frame tree</a:t>
-            </a:r>
-          </a:p>
-          <a:p>
-            <a:pPr>
-              <a:spcAft>
-                <a:spcPts val="800"/>
-              </a:spcAft>
-              <a:defRPr sz="1900">
-                <a:solidFill>
-                  <a:srgbClr val="122C4E"/>
-                </a:solidFill>
-                <a:latin typeface="Noto Sans CJK KR"/>
-              </a:defRPr>
-            </a:pPr>
-            <a:r>
-              <a:t>• Sensors: /camera/image_raw, /scan, /imu/data</a:t>
-            </a:r>
-          </a:p>
-          <a:p>
-            <a:pPr>
-              <a:spcAft>
-                <a:spcPts val="800"/>
-              </a:spcAft>
-              <a:defRPr sz="1900">
-                <a:solidFill>
-                  <a:srgbClr val="122C4E"/>
-                </a:solidFill>
-                <a:latin typeface="Noto Sans CJK KR"/>
-              </a:defRPr>
-            </a:pPr>
-            <a:r>
-              <a:t>• Autonomy: detection, safety priority, mission state</a:t>
-            </a:r>
-          </a:p>
-          <a:p>
-            <a:pPr>
-              <a:spcAft>
-                <a:spcPts val="800"/>
-              </a:spcAft>
-              <a:defRPr sz="1900">
-                <a:solidFill>
-                  <a:srgbClr val="122C4E"/>
-                </a:solidFill>
-                <a:latin typeface="Noto Sans CJK KR"/>
-              </a:defRPr>
-            </a:pPr>
-            <a:r>
-              <a:t>• Operations/Data: launch, YAML, rosbag2, README/checkpoint</a:t>
+              <a:t>완료 조건: 한 launch 실행, RViz/Gazebo 확인, mission log, rosbag 기록을 제출 체크리스트로 남긴다.</a:t>
             </a:r>
           </a:p>
         </p:txBody>
@@ -23653,7 +23847,7 @@
               </a:defRPr>
             </a:pPr>
             <a:r>
-              <a:t>Milestone 1~8 제출 증거</a:t>
+              <a:t>막히면: 증상 → 우선 확인 → 재검증</a:t>
             </a:r>
           </a:p>
         </p:txBody>
@@ -23692,7 +23886,7 @@
               </a:defRPr>
             </a:pPr>
             <a:r>
-              <a:t>통합 단계에서 놓치기 쉬운 실행·운영 조건을 정리합니다.</a:t>
+              <a:t>오류 메시지를 숨기지 않고 같은 순서로 점검합니다.</a:t>
             </a:r>
           </a:p>
         </p:txBody>
@@ -23828,7 +24022,7 @@
               </a:defRPr>
             </a:pPr>
             <a:r>
-              <a:t>현재 단계 통합 보강    |    현재 폴더 ~/agv_ws    |    현재 터미널</a:t>
+              <a:t>현재 단계 오류 대응    |    현재 폴더 ~/ros2_curri/agv_ws    |    현재 터미널</a:t>
             </a:r>
           </a:p>
         </p:txBody>
@@ -23841,18 +24035,18 @@
         </p:nvSpPr>
         <p:spPr>
           <a:xfrm>
-            <a:off x="676656" y="1691640"/>
-            <a:ext cx="10972800" cy="4434840"/>
+            <a:off x="694944" y="1755648"/>
+            <a:ext cx="10972800" cy="1115568"/>
           </a:xfrm>
           <a:prstGeom prst="roundRect">
             <a:avLst/>
           </a:prstGeom>
           <a:solidFill>
-            <a:srgbClr val="F4F7FB"/>
+            <a:srgbClr val="FFF7F4"/>
           </a:solidFill>
           <a:ln>
             <a:solidFill>
-              <a:srgbClr val="D2DEEC"/>
+              <a:srgbClr val="EDBEB4"/>
             </a:solidFill>
           </a:ln>
         </p:spPr>
@@ -23886,8 +24080,8 @@
         </p:nvSpPr>
         <p:spPr>
           <a:xfrm>
-            <a:off x="914400" y="1993392"/>
-            <a:ext cx="10332720" cy="3749039"/>
+            <a:off x="896112" y="1901952"/>
+            <a:ext cx="2926080" cy="274320"/>
           </a:xfrm>
           <a:prstGeom prst="rect">
             <a:avLst/>
@@ -23895,16 +24089,55 @@
           <a:noFill/>
         </p:spPr>
         <p:txBody>
-          <a:bodyPr wrap="square" lIns="109728" rIns="109728">
+          <a:bodyPr wrap="square" lIns="73152" rIns="73152" tIns="36576" bIns="36576">
             <a:spAutoFit/>
           </a:bodyPr>
           <a:lstStyle/>
           <a:p>
-            <a:pPr>
-              <a:spcAft>
-                <a:spcPts val="800"/>
-              </a:spcAft>
-              <a:defRPr sz="1900">
+            <a:pPr algn="l">
+              <a:spcAft>
+                <a:spcPts val="0"/>
+              </a:spcAft>
+              <a:defRPr sz="1800" b="1">
+                <a:solidFill>
+                  <a:srgbClr val="BE3B3B"/>
+                </a:solidFill>
+                <a:latin typeface="Noto Sans CJK KR"/>
+              </a:defRPr>
+            </a:pPr>
+            <a:r>
+              <a:t>증상 1: 일부 노드만 실행</a:t>
+            </a:r>
+          </a:p>
+        </p:txBody>
+      </p:sp>
+      <p:sp>
+        <p:nvSpPr>
+          <p:cNvPr id="9" name="TextBox 8"/>
+          <p:cNvSpPr txBox="1"/>
+          <p:nvPr/>
+        </p:nvSpPr>
+        <p:spPr>
+          <a:xfrm>
+            <a:off x="3794760" y="1883664"/>
+            <a:ext cx="7543800" cy="621792"/>
+          </a:xfrm>
+          <a:prstGeom prst="rect">
+            <a:avLst/>
+          </a:prstGeom>
+          <a:noFill/>
+        </p:spPr>
+        <p:txBody>
+          <a:bodyPr wrap="square" lIns="73152" rIns="73152" tIns="36576" bIns="36576">
+            <a:spAutoFit/>
+          </a:bodyPr>
+          <a:lstStyle/>
+          <a:p>
+            <a:pPr algn="l">
+              <a:spcAft>
+                <a:spcPts val="0"/>
+              </a:spcAft>
+              <a:defRPr sz="1600" b="0">
                 <a:solidFill>
                   <a:srgbClr val="122C4E"/>
                 </a:solidFill>
@@ -23912,15 +24145,126 @@
               </a:defRPr>
             </a:pPr>
             <a:r>
-              <a:t>• 1 모델 TF, 2 World spawn, 3 Differential Drive, 4 bridge/RViz</a:t>
-            </a:r>
-          </a:p>
-          <a:p>
-            <a:pPr>
-              <a:spcAft>
-                <a:spcPts val="800"/>
-              </a:spcAft>
-              <a:defRPr sz="1900">
+              <a:t>우선 확인: launch 순서·namespace·config 경로를 확인한다.</a:t>
+            </a:r>
+            <a:br/>
+            <a:r>
+              <a:t>수정 후: ros2 launch agv_bringup agv_sim.launch.py --show-args</a:t>
+            </a:r>
+          </a:p>
+        </p:txBody>
+      </p:sp>
+      <p:sp>
+        <p:nvSpPr>
+          <p:cNvPr id="10" name="Rounded Rectangle 9"/>
+          <p:cNvSpPr/>
+          <p:nvPr/>
+        </p:nvSpPr>
+        <p:spPr>
+          <a:xfrm>
+            <a:off x="694944" y="3172968"/>
+            <a:ext cx="10972800" cy="1115568"/>
+          </a:xfrm>
+          <a:prstGeom prst="roundRect">
+            <a:avLst/>
+          </a:prstGeom>
+          <a:solidFill>
+            <a:srgbClr val="FFF7F4"/>
+          </a:solidFill>
+          <a:ln>
+            <a:solidFill>
+              <a:srgbClr val="EDBEB4"/>
+            </a:solidFill>
+          </a:ln>
+        </p:spPr>
+        <p:style>
+          <a:lnRef idx="1">
+            <a:schemeClr val="accent1"/>
+          </a:lnRef>
+          <a:fillRef idx="3">
+            <a:schemeClr val="accent1"/>
+          </a:fillRef>
+          <a:effectRef idx="2">
+            <a:schemeClr val="accent1"/>
+          </a:effectRef>
+          <a:fontRef idx="minor">
+            <a:schemeClr val="lt1"/>
+          </a:fontRef>
+        </p:style>
+        <p:txBody>
+          <a:bodyPr rtlCol="0" anchor="ctr"/>
+          <a:lstStyle/>
+          <a:p>
+            <a:pPr algn="ctr"/>
+          </a:p>
+        </p:txBody>
+      </p:sp>
+      <p:sp>
+        <p:nvSpPr>
+          <p:cNvPr id="11" name="TextBox 10"/>
+          <p:cNvSpPr txBox="1"/>
+          <p:nvPr/>
+        </p:nvSpPr>
+        <p:spPr>
+          <a:xfrm>
+            <a:off x="896112" y="3319272"/>
+            <a:ext cx="2926080" cy="274320"/>
+          </a:xfrm>
+          <a:prstGeom prst="rect">
+            <a:avLst/>
+          </a:prstGeom>
+          <a:noFill/>
+        </p:spPr>
+        <p:txBody>
+          <a:bodyPr wrap="square" lIns="73152" rIns="73152" tIns="36576" bIns="36576">
+            <a:spAutoFit/>
+          </a:bodyPr>
+          <a:lstStyle/>
+          <a:p>
+            <a:pPr algn="l">
+              <a:spcAft>
+                <a:spcPts val="0"/>
+              </a:spcAft>
+              <a:defRPr sz="1800" b="1">
+                <a:solidFill>
+                  <a:srgbClr val="BE3B3B"/>
+                </a:solidFill>
+                <a:latin typeface="Noto Sans CJK KR"/>
+              </a:defRPr>
+            </a:pPr>
+            <a:r>
+              <a:t>증상 2: 센서/TF 위치 불일치</a:t>
+            </a:r>
+          </a:p>
+        </p:txBody>
+      </p:sp>
+      <p:sp>
+        <p:nvSpPr>
+          <p:cNvPr id="12" name="TextBox 11"/>
+          <p:cNvSpPr txBox="1"/>
+          <p:nvPr/>
+        </p:nvSpPr>
+        <p:spPr>
+          <a:xfrm>
+            <a:off x="3794760" y="3300984"/>
+            <a:ext cx="7543800" cy="621792"/>
+          </a:xfrm>
+          <a:prstGeom prst="rect">
+            <a:avLst/>
+          </a:prstGeom>
+          <a:noFill/>
+        </p:spPr>
+        <p:txBody>
+          <a:bodyPr wrap="square" lIns="73152" rIns="73152" tIns="36576" bIns="36576">
+            <a:spAutoFit/>
+          </a:bodyPr>
+          <a:lstStyle/>
+          <a:p>
+            <a:pPr algn="l">
+              <a:spcAft>
+                <a:spcPts val="0"/>
+              </a:spcAft>
+              <a:defRPr sz="1600" b="0">
                 <a:solidFill>
                   <a:srgbClr val="122C4E"/>
                 </a:solidFill>
@@ -23928,15 +24272,126 @@
               </a:defRPr>
             </a:pPr>
             <a:r>
-              <a:t>• 5 Camera/LiDAR/IMU, 6 safety/perception, 7 FSM/PID, 8 launch/rosbag</a:t>
-            </a:r>
-          </a:p>
-          <a:p>
-            <a:pPr>
-              <a:spcAft>
-                <a:spcPts val="800"/>
-              </a:spcAft>
-              <a:defRPr sz="1900">
+              <a:t>우선 확인: header.frame_id와 TF tree를 확인한다.</a:t>
+            </a:r>
+            <a:br/>
+            <a:r>
+              <a:t>수정 후: ros2 launch agv_bringup agv_sim.launch.py --show-args</a:t>
+            </a:r>
+          </a:p>
+        </p:txBody>
+      </p:sp>
+      <p:sp>
+        <p:nvSpPr>
+          <p:cNvPr id="13" name="Rounded Rectangle 12"/>
+          <p:cNvSpPr/>
+          <p:nvPr/>
+        </p:nvSpPr>
+        <p:spPr>
+          <a:xfrm>
+            <a:off x="694944" y="4590288"/>
+            <a:ext cx="10972800" cy="1115568"/>
+          </a:xfrm>
+          <a:prstGeom prst="roundRect">
+            <a:avLst/>
+          </a:prstGeom>
+          <a:solidFill>
+            <a:srgbClr val="FFF7F4"/>
+          </a:solidFill>
+          <a:ln>
+            <a:solidFill>
+              <a:srgbClr val="EDBEB4"/>
+            </a:solidFill>
+          </a:ln>
+        </p:spPr>
+        <p:style>
+          <a:lnRef idx="1">
+            <a:schemeClr val="accent1"/>
+          </a:lnRef>
+          <a:fillRef idx="3">
+            <a:schemeClr val="accent1"/>
+          </a:fillRef>
+          <a:effectRef idx="2">
+            <a:schemeClr val="accent1"/>
+          </a:effectRef>
+          <a:fontRef idx="minor">
+            <a:schemeClr val="lt1"/>
+          </a:fontRef>
+        </p:style>
+        <p:txBody>
+          <a:bodyPr rtlCol="0" anchor="ctr"/>
+          <a:lstStyle/>
+          <a:p>
+            <a:pPr algn="ctr"/>
+          </a:p>
+        </p:txBody>
+      </p:sp>
+      <p:sp>
+        <p:nvSpPr>
+          <p:cNvPr id="14" name="TextBox 13"/>
+          <p:cNvSpPr txBox="1"/>
+          <p:nvPr/>
+        </p:nvSpPr>
+        <p:spPr>
+          <a:xfrm>
+            <a:off x="896112" y="4736592"/>
+            <a:ext cx="2926080" cy="274320"/>
+          </a:xfrm>
+          <a:prstGeom prst="rect">
+            <a:avLst/>
+          </a:prstGeom>
+          <a:noFill/>
+        </p:spPr>
+        <p:txBody>
+          <a:bodyPr wrap="square" lIns="73152" rIns="73152" tIns="36576" bIns="36576">
+            <a:spAutoFit/>
+          </a:bodyPr>
+          <a:lstStyle/>
+          <a:p>
+            <a:pPr algn="l">
+              <a:spcAft>
+                <a:spcPts val="0"/>
+              </a:spcAft>
+              <a:defRPr sz="1800" b="1">
+                <a:solidFill>
+                  <a:srgbClr val="BE3B3B"/>
+                </a:solidFill>
+                <a:latin typeface="Noto Sans CJK KR"/>
+              </a:defRPr>
+            </a:pPr>
+            <a:r>
+              <a:t>증상 3: 로봇이 불안정</a:t>
+            </a:r>
+          </a:p>
+        </p:txBody>
+      </p:sp>
+      <p:sp>
+        <p:nvSpPr>
+          <p:cNvPr id="15" name="TextBox 14"/>
+          <p:cNvSpPr txBox="1"/>
+          <p:nvPr/>
+        </p:nvSpPr>
+        <p:spPr>
+          <a:xfrm>
+            <a:off x="3794760" y="4718303"/>
+            <a:ext cx="7543800" cy="621792"/>
+          </a:xfrm>
+          <a:prstGeom prst="rect">
+            <a:avLst/>
+          </a:prstGeom>
+          <a:noFill/>
+        </p:spPr>
+        <p:txBody>
+          <a:bodyPr wrap="square" lIns="73152" rIns="73152" tIns="36576" bIns="36576">
+            <a:spAutoFit/>
+          </a:bodyPr>
+          <a:lstStyle/>
+          <a:p>
+            <a:pPr algn="l">
+              <a:spcAft>
+                <a:spcPts val="0"/>
+              </a:spcAft>
+              <a:defRPr sz="1600" b="0">
                 <a:solidFill>
                   <a:srgbClr val="122C4E"/>
                 </a:solidFill>
@@ -23944,7 +24399,54 @@
               </a:defRPr>
             </a:pPr>
             <a:r>
-              <a:t>• 각 milestone마다 command 결과와 정상 화면을 함께 저장한다.</a:t>
+              <a:t>우선 확인: physics collision·friction·inertia를 M07 순서로 점검한다.</a:t>
+            </a:r>
+            <a:br/>
+            <a:r>
+              <a:t>수정 후: ros2 launch agv_bringup agv_sim.launch.py --show-args</a:t>
+            </a:r>
+          </a:p>
+        </p:txBody>
+      </p:sp>
+      <p:sp>
+        <p:nvSpPr>
+          <p:cNvPr id="16" name="TextBox 15"/>
+          <p:cNvSpPr txBox="1"/>
+          <p:nvPr/>
+        </p:nvSpPr>
+        <p:spPr>
+          <a:xfrm>
+            <a:off x="822960" y="5779008"/>
+            <a:ext cx="10607040" cy="493776"/>
+          </a:xfrm>
+          <a:prstGeom prst="rect">
+            <a:avLst/>
+          </a:prstGeom>
+          <a:noFill/>
+        </p:spPr>
+        <p:txBody>
+          <a:bodyPr wrap="square" lIns="73152" rIns="73152" tIns="36576" bIns="36576">
+            <a:spAutoFit/>
+          </a:bodyPr>
+          <a:lstStyle/>
+          <a:p>
+            <a:pPr algn="ctr">
+              <a:spcAft>
+                <a:spcPts val="0"/>
+              </a:spcAft>
+              <a:defRPr sz="1500" b="1">
+                <a:solidFill>
+                  <a:srgbClr val="DB7E22"/>
+                </a:solidFill>
+                <a:latin typeface="Noto Sans CJK KR"/>
+              </a:defRPr>
+            </a:pPr>
+            <a:r>
+              <a:t>공통 순서: ① 현재 폴더 ② source ③ 파일 경로</a:t>
+            </a:r>
+            <a:br/>
+            <a:r>
+              <a:t>④ 이름/타입/단위 ⑤ build·source 후 재실행</a:t>
             </a:r>
           </a:p>
         </p:txBody>
@@ -24001,7 +24503,7 @@
               </a:defRPr>
             </a:pPr>
             <a:r>
-              <a:t>실패를 재현 가능하게 기록한다</a:t>
+              <a:t>미니 실습: 값 하나를 바꾸고 결과를 비교한다</a:t>
             </a:r>
           </a:p>
         </p:txBody>
@@ -24040,7 +24542,7 @@
               </a:defRPr>
             </a:pPr>
             <a:r>
-              <a:t>통합 단계에서 놓치기 쉬운 실행·운영 조건을 정리합니다.</a:t>
+              <a:t>정상 결과를 만든 뒤에는 한 번에 하나의 값만 바꿉니다.</a:t>
             </a:r>
           </a:p>
         </p:txBody>
@@ -24176,7 +24678,7 @@
               </a:defRPr>
             </a:pPr>
             <a:r>
-              <a:t>현재 단계 통합 보강    |    현재 폴더 ~/agv_ws    |    현재 터미널</a:t>
+              <a:t>현재 단계 미니 실습    |    현재 폴더 ~/ros2_curri/agv_ws    |    현재 터미널</a:t>
             </a:r>
           </a:p>
         </p:txBody>
@@ -24189,18 +24691,18 @@
         </p:nvSpPr>
         <p:spPr>
           <a:xfrm>
-            <a:off x="676656" y="1691640"/>
-            <a:ext cx="10972800" cy="4434840"/>
+            <a:off x="749808" y="1874519"/>
+            <a:ext cx="10652760" cy="1993392"/>
           </a:xfrm>
           <a:prstGeom prst="roundRect">
             <a:avLst/>
           </a:prstGeom>
           <a:solidFill>
-            <a:srgbClr val="F4F7FB"/>
+            <a:srgbClr val="FFF8EB"/>
           </a:solidFill>
           <a:ln>
             <a:solidFill>
-              <a:srgbClr val="D2DEEC"/>
+              <a:srgbClr val="ECC680"/>
             </a:solidFill>
           </a:ln>
         </p:spPr>
@@ -24219,10 +24721,23 @@
           </a:fontRef>
         </p:style>
         <p:txBody>
-          <a:bodyPr rtlCol="0" anchor="ctr"/>
-          <a:lstStyle/>
-          <a:p>
-            <a:pPr algn="ctr"/>
+          <a:bodyPr rtlCol="0" anchor="ctr" wrap="square" lIns="73152" rIns="73152" tIns="36576" bIns="36576"/>
+          <a:lstStyle/>
+          <a:p>
+            <a:pPr algn="ctr">
+              <a:spcAft>
+                <a:spcPts val="0"/>
+              </a:spcAft>
+              <a:defRPr sz="2300" b="1">
+                <a:solidFill>
+                  <a:srgbClr val="122C4E"/>
+                </a:solidFill>
+                <a:latin typeface="Noto Sans CJK KR"/>
+              </a:defRPr>
+            </a:pPr>
+            <a:r>
+              <a:t>완료 증거를 ①Gazebo ②RViz ③ros2 topic ④mission log ⑤rosbag으로 나누어 실제 제출 파일 목록을 작성한다.</a:t>
+            </a:r>
           </a:p>
         </p:txBody>
       </p:sp>
@@ -24234,8 +24749,8 @@
         </p:nvSpPr>
         <p:spPr>
           <a:xfrm>
-            <a:off x="914400" y="1993392"/>
-            <a:ext cx="10332720" cy="3749039"/>
+            <a:off x="877824" y="4590288"/>
+            <a:ext cx="10241280" cy="594360"/>
           </a:xfrm>
           <a:prstGeom prst="rect">
             <a:avLst/>
@@ -24243,88 +24758,24 @@
           <a:noFill/>
         </p:spPr>
         <p:txBody>
-          <a:bodyPr wrap="square" lIns="109728" rIns="109728">
+          <a:bodyPr wrap="square" lIns="73152" rIns="73152" tIns="36576" bIns="36576">
             <a:spAutoFit/>
           </a:bodyPr>
           <a:lstStyle/>
           <a:p>
-            <a:pPr>
-              <a:spcAft>
-                <a:spcPts val="800"/>
-              </a:spcAft>
-              <a:defRPr sz="1900">
-                <a:solidFill>
-                  <a:srgbClr val="122C4E"/>
-                </a:solidFill>
-                <a:latin typeface="Noto Sans CJK KR"/>
-              </a:defRPr>
-            </a:pPr>
-            <a:r>
-              <a:t>• topic: 이름·타입·publisher/subscriber 수</a:t>
-            </a:r>
-          </a:p>
-          <a:p>
-            <a:pPr>
-              <a:spcAft>
-                <a:spcPts val="800"/>
-              </a:spcAft>
-              <a:defRPr sz="1900">
-                <a:solidFill>
-                  <a:srgbClr val="122C4E"/>
-                </a:solidFill>
-                <a:latin typeface="Noto Sans CJK KR"/>
-              </a:defRPr>
-            </a:pPr>
-            <a:r>
-              <a:t>• TF: frame_id·parent/child·Fixed Frame</a:t>
-            </a:r>
-          </a:p>
-          <a:p>
-            <a:pPr>
-              <a:spcAft>
-                <a:spcPts val="800"/>
-              </a:spcAft>
-              <a:defRPr sz="1900">
-                <a:solidFill>
-                  <a:srgbClr val="122C4E"/>
-                </a:solidFill>
-                <a:latin typeface="Noto Sans CJK KR"/>
-              </a:defRPr>
-            </a:pPr>
-            <a:r>
-              <a:t>• bridge: 방향·Gazebo/ROS type</a:t>
-            </a:r>
-          </a:p>
-          <a:p>
-            <a:pPr>
-              <a:spcAft>
-                <a:spcPts val="800"/>
-              </a:spcAft>
-              <a:defRPr sz="1900">
-                <a:solidFill>
-                  <a:srgbClr val="122C4E"/>
-                </a:solidFill>
-                <a:latin typeface="Noto Sans CJK KR"/>
-              </a:defRPr>
-            </a:pPr>
-            <a:r>
-              <a:t>• physics: collision·friction·inertia</a:t>
-            </a:r>
-          </a:p>
-          <a:p>
-            <a:pPr>
-              <a:spcAft>
-                <a:spcPts val="800"/>
-              </a:spcAft>
-              <a:defRPr sz="1900">
-                <a:solidFill>
-                  <a:srgbClr val="122C4E"/>
-                </a:solidFill>
-                <a:latin typeface="Noto Sans CJK KR"/>
-              </a:defRPr>
-            </a:pPr>
-            <a:r>
-              <a:t>• launch: package share·YAML key·실행 순서</a:t>
+            <a:pPr algn="ctr">
+              <a:spcAft>
+                <a:spcPts val="0"/>
+              </a:spcAft>
+              <a:defRPr sz="1900" b="1">
+                <a:solidFill>
+                  <a:srgbClr val="DB7E22"/>
+                </a:solidFill>
+                <a:latin typeface="Noto Sans CJK KR"/>
+              </a:defRPr>
+            </a:pPr>
+            <a:r>
+              <a:t>기록할 것: 바꾼 값(단위) · 기대한 변화 · 실제 출력/화면 · 원래 값으로 되돌린 결과</a:t>
             </a:r>
           </a:p>
         </p:txBody>
@@ -24381,7 +24832,7 @@
               </a:defRPr>
             </a:pPr>
             <a:r>
-              <a:t>체크포인트를 저장하고 다음 모듈로 넘긴다</a:t>
+              <a:t>최종 미션 시나리오</a:t>
             </a:r>
           </a:p>
         </p:txBody>
@@ -24420,7 +24871,7 @@
               </a:defRPr>
             </a:pPr>
             <a:r>
-              <a:t>현재 Complete는 다음 Starter의 기준선입니다.</a:t>
+              <a:t>통합 단계에서 놓치기 쉬운 실행·운영 조건을 정리합니다.</a:t>
             </a:r>
           </a:p>
         </p:txBody>
@@ -24556,7 +25007,7 @@
               </a:defRPr>
             </a:pPr>
             <a:r>
-              <a:t>현재 단계 체크포인트    |    현재 폴더 ~/agv_ws    |    현재 터미널</a:t>
+              <a:t>현재 단계 통합 보강    |    현재 폴더 ~/ros2_curri/agv_ws    |    현재 터미널</a:t>
             </a:r>
           </a:p>
         </p:txBody>
@@ -24569,8 +25020,8 @@
         </p:nvSpPr>
         <p:spPr>
           <a:xfrm>
-            <a:off x="685800" y="1737360"/>
-            <a:ext cx="10972800" cy="3611880"/>
+            <a:off x="676656" y="1691640"/>
+            <a:ext cx="10972800" cy="4434840"/>
           </a:xfrm>
           <a:prstGeom prst="roundRect">
             <a:avLst/>
@@ -24580,7 +25031,7 @@
           </a:solidFill>
           <a:ln>
             <a:solidFill>
-              <a:srgbClr val="D2DCE8"/>
+              <a:srgbClr val="D2DEEC"/>
             </a:solidFill>
           </a:ln>
         </p:spPr>
@@ -24614,8 +25065,8 @@
         </p:nvSpPr>
         <p:spPr>
           <a:xfrm>
-            <a:off x="896112" y="1993392"/>
-            <a:ext cx="10332720" cy="2971800"/>
+            <a:off x="914400" y="1993392"/>
+            <a:ext cx="10332720" cy="3749039"/>
           </a:xfrm>
           <a:prstGeom prst="rect">
             <a:avLst/>
@@ -24632,7 +25083,7 @@
               <a:spcAft>
                 <a:spcPts val="800"/>
               </a:spcAft>
-              <a:defRPr sz="1800">
+              <a:defRPr sz="1900">
                 <a:solidFill>
                   <a:srgbClr val="122C4E"/>
                 </a:solidFill>
@@ -24640,7 +25091,7 @@
               </a:defRPr>
             </a:pPr>
             <a:r>
-              <a:t>• □ 완료 화면: 한 launch 실행, RViz/Gazebo 확인, mission log, rosbag 기록을 제출 체크리스트로 남긴다.</a:t>
+              <a:t>• 1. START: launch와 sensor topic을 확인한다.</a:t>
             </a:r>
           </a:p>
           <a:p>
@@ -24648,7 +25099,7 @@
               <a:spcAft>
                 <a:spcPts val="800"/>
               </a:spcAft>
-              <a:defRPr sz="1800">
+              <a:defRPr sz="1900">
                 <a:solidFill>
                   <a:srgbClr val="122C4E"/>
                 </a:solidFill>
@@ -24656,7 +25107,7 @@
               </a:defRPr>
             </a:pPr>
             <a:r>
-              <a:t>• □ Complete 파일: blocks/F_integration/M22_final_project/complete/</a:t>
+              <a:t>• 2. SEARCH: target이 없을 때 회전 탐색 command를 관찰한다.</a:t>
             </a:r>
           </a:p>
           <a:p>
@@ -24664,7 +25115,7 @@
               <a:spcAft>
                 <a:spcPts val="800"/>
               </a:spcAft>
-              <a:defRPr sz="1800">
+              <a:defRPr sz="1900">
                 <a:solidFill>
                   <a:srgbClr val="122C4E"/>
                 </a:solidFill>
@@ -24672,7 +25123,7 @@
               </a:defRPr>
             </a:pPr>
             <a:r>
-              <a:t>• □ 정상 로그·캡처: logs/validation.log, screenshots/validation_terminal.png</a:t>
+              <a:t>• 3. APPROACH: detection 중심 오차가 angular command로 바뀌는지 확인한다.</a:t>
             </a:r>
           </a:p>
           <a:p>
@@ -24680,7 +25131,7 @@
               <a:spcAft>
                 <a:spcPts val="800"/>
               </a:spcAft>
-              <a:defRPr sz="1800">
+              <a:defRPr sz="1900">
                 <a:solidFill>
                   <a:srgbClr val="122C4E"/>
                 </a:solidFill>
@@ -24688,7 +25139,7 @@
               </a:defRPr>
             </a:pPr>
             <a:r>
-              <a:t>• □ 버전 식별: CHECKSUM_or_TAG.txt의 SHA-256 manifest</a:t>
+              <a:t>• 4. AVOID/STOP: LiDAR threshold 안에서는 safety가 우선하는지 확인한다.</a:t>
             </a:r>
           </a:p>
           <a:p>
@@ -24696,7 +25147,7 @@
               <a:spcAft>
                 <a:spcPts val="800"/>
               </a:spcAft>
-              <a:defRPr sz="1800">
+              <a:defRPr sz="1900">
                 <a:solidFill>
                   <a:srgbClr val="122C4E"/>
                 </a:solidFill>
@@ -24704,46 +25155,7 @@
               </a:defRPr>
             </a:pPr>
             <a:r>
-              <a:t>• □ 다음 시작 조건: 핵심 과정 완료 → SLAM/Nav2 확장</a:t>
-            </a:r>
-          </a:p>
-        </p:txBody>
-      </p:sp>
-      <p:sp>
-        <p:nvSpPr>
-          <p:cNvPr id="9" name="TextBox 8"/>
-          <p:cNvSpPr txBox="1"/>
-          <p:nvPr/>
-        </p:nvSpPr>
-        <p:spPr>
-          <a:xfrm>
-            <a:off x="868680" y="5596128"/>
-            <a:ext cx="10515600" cy="338328"/>
-          </a:xfrm>
-          <a:prstGeom prst="rect">
-            <a:avLst/>
-          </a:prstGeom>
-          <a:noFill/>
-        </p:spPr>
-        <p:txBody>
-          <a:bodyPr wrap="square" lIns="73152" rIns="73152" tIns="36576" bIns="36576">
-            <a:spAutoFit/>
-          </a:bodyPr>
-          <a:lstStyle/>
-          <a:p>
-            <a:pPr algn="ctr">
-              <a:spcAft>
-                <a:spcPts val="0"/>
-              </a:spcAft>
-              <a:defRPr sz="1700" b="1">
-                <a:solidFill>
-                  <a:srgbClr val="2A8B5A"/>
-                </a:solidFill>
-                <a:latin typeface="Noto Sans CJK KR"/>
-              </a:defRPr>
-            </a:pPr>
-            <a:r>
-              <a:t>다음 모듈을 시작하기 전, 이 슬라이드의 Complete와 다음 모듈의 Starter를 비교합니다.</a:t>
+              <a:t>• 5. GOAL/STOP: 목표 도달 뒤 forward /cmd_vel이 0인지 확인한다.</a:t>
             </a:r>
           </a:p>
         </p:txBody>
@@ -24800,6 +25212,1533 @@
               </a:defRPr>
             </a:pPr>
             <a:r>
+              <a:t>최종 기능 체크표</a:t>
+            </a:r>
+          </a:p>
+        </p:txBody>
+      </p:sp>
+      <p:sp>
+        <p:nvSpPr>
+          <p:cNvPr id="3" name="TextBox 2"/>
+          <p:cNvSpPr txBox="1"/>
+          <p:nvPr/>
+        </p:nvSpPr>
+        <p:spPr>
+          <a:xfrm>
+            <a:off x="603504" y="859536"/>
+            <a:ext cx="10698480" cy="292608"/>
+          </a:xfrm>
+          <a:prstGeom prst="rect">
+            <a:avLst/>
+          </a:prstGeom>
+          <a:noFill/>
+        </p:spPr>
+        <p:txBody>
+          <a:bodyPr wrap="square" lIns="73152" rIns="73152" tIns="36576" bIns="36576">
+            <a:spAutoFit/>
+          </a:bodyPr>
+          <a:lstStyle/>
+          <a:p>
+            <a:pPr algn="l">
+              <a:spcAft>
+                <a:spcPts val="0"/>
+              </a:spcAft>
+              <a:defRPr sz="1700" b="0">
+                <a:solidFill>
+                  <a:srgbClr val="5C6672"/>
+                </a:solidFill>
+                <a:latin typeface="Noto Sans CJK KR"/>
+              </a:defRPr>
+            </a:pPr>
+            <a:r>
+              <a:t>통합 단계에서 놓치기 쉬운 실행·운영 조건을 정리합니다.</a:t>
+            </a:r>
+          </a:p>
+        </p:txBody>
+      </p:sp>
+      <p:sp>
+        <p:nvSpPr>
+          <p:cNvPr id="4" name="TextBox 3"/>
+          <p:cNvSpPr txBox="1"/>
+          <p:nvPr/>
+        </p:nvSpPr>
+        <p:spPr>
+          <a:xfrm>
+            <a:off x="530352" y="6510528"/>
+            <a:ext cx="7772400" cy="201168"/>
+          </a:xfrm>
+          <a:prstGeom prst="rect">
+            <a:avLst/>
+          </a:prstGeom>
+          <a:noFill/>
+        </p:spPr>
+        <p:txBody>
+          <a:bodyPr wrap="square" lIns="73152" rIns="73152" tIns="36576" bIns="36576">
+            <a:spAutoFit/>
+          </a:bodyPr>
+          <a:lstStyle/>
+          <a:p>
+            <a:pPr algn="l">
+              <a:spcAft>
+                <a:spcPts val="0"/>
+              </a:spcAft>
+              <a:defRPr sz="1000" b="0">
+                <a:solidFill>
+                  <a:srgbClr val="5C6672"/>
+                </a:solidFill>
+                <a:latin typeface="Noto Sans CJK KR"/>
+              </a:defRPr>
+            </a:pPr>
+            <a:r>
+              <a:t>ROS 2 Jazzy · Gazebo Harmonic · M22 · 따라 하기형 AGV 실습</a:t>
+            </a:r>
+          </a:p>
+        </p:txBody>
+      </p:sp>
+      <p:sp>
+        <p:nvSpPr>
+          <p:cNvPr id="5" name="TextBox 4"/>
+          <p:cNvSpPr txBox="1"/>
+          <p:nvPr/>
+        </p:nvSpPr>
+        <p:spPr>
+          <a:xfrm>
+            <a:off x="9144000" y="6510528"/>
+            <a:ext cx="2468880" cy="201168"/>
+          </a:xfrm>
+          <a:prstGeom prst="rect">
+            <a:avLst/>
+          </a:prstGeom>
+          <a:noFill/>
+        </p:spPr>
+        <p:txBody>
+          <a:bodyPr wrap="square" lIns="73152" rIns="73152" tIns="36576" bIns="36576">
+            <a:spAutoFit/>
+          </a:bodyPr>
+          <a:lstStyle/>
+          <a:p>
+            <a:pPr algn="r">
+              <a:spcAft>
+                <a:spcPts val="0"/>
+              </a:spcAft>
+              <a:defRPr sz="1000" b="0">
+                <a:solidFill>
+                  <a:srgbClr val="5C6672"/>
+                </a:solidFill>
+                <a:latin typeface="Noto Sans CJK KR"/>
+              </a:defRPr>
+            </a:pPr>
+            <a:r>
+              <a:t>명령·파일 경로는 슬라이드에서 복사 가능</a:t>
+            </a:r>
+          </a:p>
+        </p:txBody>
+      </p:sp>
+      <p:sp>
+        <p:nvSpPr>
+          <p:cNvPr id="6" name="Rectangle 5"/>
+          <p:cNvSpPr/>
+          <p:nvPr/>
+        </p:nvSpPr>
+        <p:spPr>
+          <a:xfrm>
+            <a:off x="566928" y="1188720"/>
+            <a:ext cx="11064240" cy="347472"/>
+          </a:xfrm>
+          <a:prstGeom prst="rect">
+            <a:avLst/>
+          </a:prstGeom>
+          <a:solidFill>
+            <a:srgbClr val="F4F7FB"/>
+          </a:solidFill>
+          <a:ln>
+            <a:solidFill>
+              <a:srgbClr val="F4F7FB"/>
+            </a:solidFill>
+          </a:ln>
+        </p:spPr>
+        <p:style>
+          <a:lnRef idx="1">
+            <a:schemeClr val="accent1"/>
+          </a:lnRef>
+          <a:fillRef idx="3">
+            <a:schemeClr val="accent1"/>
+          </a:fillRef>
+          <a:effectRef idx="2">
+            <a:schemeClr val="accent1"/>
+          </a:effectRef>
+          <a:fontRef idx="minor">
+            <a:schemeClr val="lt1"/>
+          </a:fontRef>
+        </p:style>
+        <p:txBody>
+          <a:bodyPr rtlCol="0" anchor="ctr" wrap="square" lIns="73152" rIns="73152" tIns="36576" bIns="36576"/>
+          <a:lstStyle/>
+          <a:p>
+            <a:pPr algn="l">
+              <a:spcAft>
+                <a:spcPts val="0"/>
+              </a:spcAft>
+              <a:defRPr sz="1300" b="1">
+                <a:solidFill>
+                  <a:srgbClr val="122C4E"/>
+                </a:solidFill>
+                <a:latin typeface="Noto Sans CJK KR"/>
+              </a:defRPr>
+            </a:pPr>
+            <a:r>
+              <a:t>현재 단계 통합 보강    |    현재 폴더 ~/ros2_curri/agv_ws    |    현재 터미널</a:t>
+            </a:r>
+          </a:p>
+        </p:txBody>
+      </p:sp>
+      <p:sp>
+        <p:nvSpPr>
+          <p:cNvPr id="7" name="Rounded Rectangle 6"/>
+          <p:cNvSpPr/>
+          <p:nvPr/>
+        </p:nvSpPr>
+        <p:spPr>
+          <a:xfrm>
+            <a:off x="676656" y="1691640"/>
+            <a:ext cx="10972800" cy="4434840"/>
+          </a:xfrm>
+          <a:prstGeom prst="roundRect">
+            <a:avLst/>
+          </a:prstGeom>
+          <a:solidFill>
+            <a:srgbClr val="F4F7FB"/>
+          </a:solidFill>
+          <a:ln>
+            <a:solidFill>
+              <a:srgbClr val="D2DEEC"/>
+            </a:solidFill>
+          </a:ln>
+        </p:spPr>
+        <p:style>
+          <a:lnRef idx="1">
+            <a:schemeClr val="accent1"/>
+          </a:lnRef>
+          <a:fillRef idx="3">
+            <a:schemeClr val="accent1"/>
+          </a:fillRef>
+          <a:effectRef idx="2">
+            <a:schemeClr val="accent1"/>
+          </a:effectRef>
+          <a:fontRef idx="minor">
+            <a:schemeClr val="lt1"/>
+          </a:fontRef>
+        </p:style>
+        <p:txBody>
+          <a:bodyPr rtlCol="0" anchor="ctr"/>
+          <a:lstStyle/>
+          <a:p>
+            <a:pPr algn="ctr"/>
+          </a:p>
+        </p:txBody>
+      </p:sp>
+      <p:sp>
+        <p:nvSpPr>
+          <p:cNvPr id="8" name="TextBox 7"/>
+          <p:cNvSpPr txBox="1"/>
+          <p:nvPr/>
+        </p:nvSpPr>
+        <p:spPr>
+          <a:xfrm>
+            <a:off x="914400" y="1993392"/>
+            <a:ext cx="10332720" cy="3749039"/>
+          </a:xfrm>
+          <a:prstGeom prst="rect">
+            <a:avLst/>
+          </a:prstGeom>
+          <a:noFill/>
+        </p:spPr>
+        <p:txBody>
+          <a:bodyPr wrap="square" lIns="109728" rIns="109728">
+            <a:spAutoFit/>
+          </a:bodyPr>
+          <a:lstStyle/>
+          <a:p>
+            <a:pPr>
+              <a:spcAft>
+                <a:spcPts val="800"/>
+              </a:spcAft>
+              <a:defRPr sz="1900">
+                <a:solidFill>
+                  <a:srgbClr val="122C4E"/>
+                </a:solidFill>
+                <a:latin typeface="Noto Sans CJK KR"/>
+              </a:defRPr>
+            </a:pPr>
+            <a:r>
+              <a:t>• Model/Physics: body·wheel·collision·inertia</a:t>
+            </a:r>
+          </a:p>
+          <a:p>
+            <a:pPr>
+              <a:spcAft>
+                <a:spcPts val="800"/>
+              </a:spcAft>
+              <a:defRPr sz="1900">
+                <a:solidFill>
+                  <a:srgbClr val="122C4E"/>
+                </a:solidFill>
+                <a:latin typeface="Noto Sans CJK KR"/>
+              </a:defRPr>
+            </a:pPr>
+            <a:r>
+              <a:t>• Drive/TF/Odom: /cmd_vel, /odom, frame tree</a:t>
+            </a:r>
+          </a:p>
+          <a:p>
+            <a:pPr>
+              <a:spcAft>
+                <a:spcPts val="800"/>
+              </a:spcAft>
+              <a:defRPr sz="1900">
+                <a:solidFill>
+                  <a:srgbClr val="122C4E"/>
+                </a:solidFill>
+                <a:latin typeface="Noto Sans CJK KR"/>
+              </a:defRPr>
+            </a:pPr>
+            <a:r>
+              <a:t>• Sensors: /camera/image_raw, /scan, /imu/data</a:t>
+            </a:r>
+          </a:p>
+          <a:p>
+            <a:pPr>
+              <a:spcAft>
+                <a:spcPts val="800"/>
+              </a:spcAft>
+              <a:defRPr sz="1900">
+                <a:solidFill>
+                  <a:srgbClr val="122C4E"/>
+                </a:solidFill>
+                <a:latin typeface="Noto Sans CJK KR"/>
+              </a:defRPr>
+            </a:pPr>
+            <a:r>
+              <a:t>• Autonomy: detection, safety priority, mission state</a:t>
+            </a:r>
+          </a:p>
+          <a:p>
+            <a:pPr>
+              <a:spcAft>
+                <a:spcPts val="800"/>
+              </a:spcAft>
+              <a:defRPr sz="1900">
+                <a:solidFill>
+                  <a:srgbClr val="122C4E"/>
+                </a:solidFill>
+                <a:latin typeface="Noto Sans CJK KR"/>
+              </a:defRPr>
+            </a:pPr>
+            <a:r>
+              <a:t>• Operations/Data: launch, YAML, rosbag2, README/checkpoint</a:t>
+            </a:r>
+          </a:p>
+        </p:txBody>
+      </p:sp>
+    </p:spTree>
+  </p:cSld>
+  <p:clrMapOvr>
+    <a:masterClrMapping/>
+  </p:clrMapOvr>
+</p:sld>
+</file>
+
+<file path=ppt/slides/slide46.xml><?xml version="1.0" encoding="utf-8"?>
+<p:sld xmlns:a="http://schemas.openxmlformats.org/drawingml/2006/main" xmlns:p="http://schemas.openxmlformats.org/presentationml/2006/main" xmlns:r="http://schemas.openxmlformats.org/officeDocument/2006/relationships">
+  <p:cSld>
+    <p:spTree>
+      <p:nvGrpSpPr>
+        <p:cNvPr id="1" name=""/>
+        <p:cNvGrpSpPr/>
+        <p:nvPr/>
+      </p:nvGrpSpPr>
+      <p:grpSpPr/>
+      <p:sp>
+        <p:nvSpPr>
+          <p:cNvPr id="2" name="TextBox 1"/>
+          <p:cNvSpPr txBox="1"/>
+          <p:nvPr/>
+        </p:nvSpPr>
+        <p:spPr>
+          <a:xfrm>
+            <a:off x="566928" y="347472"/>
+            <a:ext cx="10881360" cy="438912"/>
+          </a:xfrm>
+          <a:prstGeom prst="rect">
+            <a:avLst/>
+          </a:prstGeom>
+          <a:noFill/>
+        </p:spPr>
+        <p:txBody>
+          <a:bodyPr wrap="square" lIns="73152" rIns="73152" tIns="36576" bIns="36576">
+            <a:spAutoFit/>
+          </a:bodyPr>
+          <a:lstStyle/>
+          <a:p>
+            <a:pPr algn="l">
+              <a:spcAft>
+                <a:spcPts val="0"/>
+              </a:spcAft>
+              <a:defRPr sz="3200" b="1">
+                <a:solidFill>
+                  <a:srgbClr val="122C4E"/>
+                </a:solidFill>
+                <a:latin typeface="Noto Sans CJK KR"/>
+              </a:defRPr>
+            </a:pPr>
+            <a:r>
+              <a:t>Milestone 1~8 제출 증거</a:t>
+            </a:r>
+          </a:p>
+        </p:txBody>
+      </p:sp>
+      <p:sp>
+        <p:nvSpPr>
+          <p:cNvPr id="3" name="TextBox 2"/>
+          <p:cNvSpPr txBox="1"/>
+          <p:nvPr/>
+        </p:nvSpPr>
+        <p:spPr>
+          <a:xfrm>
+            <a:off x="603504" y="859536"/>
+            <a:ext cx="10698480" cy="292608"/>
+          </a:xfrm>
+          <a:prstGeom prst="rect">
+            <a:avLst/>
+          </a:prstGeom>
+          <a:noFill/>
+        </p:spPr>
+        <p:txBody>
+          <a:bodyPr wrap="square" lIns="73152" rIns="73152" tIns="36576" bIns="36576">
+            <a:spAutoFit/>
+          </a:bodyPr>
+          <a:lstStyle/>
+          <a:p>
+            <a:pPr algn="l">
+              <a:spcAft>
+                <a:spcPts val="0"/>
+              </a:spcAft>
+              <a:defRPr sz="1700" b="0">
+                <a:solidFill>
+                  <a:srgbClr val="5C6672"/>
+                </a:solidFill>
+                <a:latin typeface="Noto Sans CJK KR"/>
+              </a:defRPr>
+            </a:pPr>
+            <a:r>
+              <a:t>통합 단계에서 놓치기 쉬운 실행·운영 조건을 정리합니다.</a:t>
+            </a:r>
+          </a:p>
+        </p:txBody>
+      </p:sp>
+      <p:sp>
+        <p:nvSpPr>
+          <p:cNvPr id="4" name="TextBox 3"/>
+          <p:cNvSpPr txBox="1"/>
+          <p:nvPr/>
+        </p:nvSpPr>
+        <p:spPr>
+          <a:xfrm>
+            <a:off x="530352" y="6510528"/>
+            <a:ext cx="7772400" cy="201168"/>
+          </a:xfrm>
+          <a:prstGeom prst="rect">
+            <a:avLst/>
+          </a:prstGeom>
+          <a:noFill/>
+        </p:spPr>
+        <p:txBody>
+          <a:bodyPr wrap="square" lIns="73152" rIns="73152" tIns="36576" bIns="36576">
+            <a:spAutoFit/>
+          </a:bodyPr>
+          <a:lstStyle/>
+          <a:p>
+            <a:pPr algn="l">
+              <a:spcAft>
+                <a:spcPts val="0"/>
+              </a:spcAft>
+              <a:defRPr sz="1000" b="0">
+                <a:solidFill>
+                  <a:srgbClr val="5C6672"/>
+                </a:solidFill>
+                <a:latin typeface="Noto Sans CJK KR"/>
+              </a:defRPr>
+            </a:pPr>
+            <a:r>
+              <a:t>ROS 2 Jazzy · Gazebo Harmonic · M22 · 따라 하기형 AGV 실습</a:t>
+            </a:r>
+          </a:p>
+        </p:txBody>
+      </p:sp>
+      <p:sp>
+        <p:nvSpPr>
+          <p:cNvPr id="5" name="TextBox 4"/>
+          <p:cNvSpPr txBox="1"/>
+          <p:nvPr/>
+        </p:nvSpPr>
+        <p:spPr>
+          <a:xfrm>
+            <a:off x="9144000" y="6510528"/>
+            <a:ext cx="2468880" cy="201168"/>
+          </a:xfrm>
+          <a:prstGeom prst="rect">
+            <a:avLst/>
+          </a:prstGeom>
+          <a:noFill/>
+        </p:spPr>
+        <p:txBody>
+          <a:bodyPr wrap="square" lIns="73152" rIns="73152" tIns="36576" bIns="36576">
+            <a:spAutoFit/>
+          </a:bodyPr>
+          <a:lstStyle/>
+          <a:p>
+            <a:pPr algn="r">
+              <a:spcAft>
+                <a:spcPts val="0"/>
+              </a:spcAft>
+              <a:defRPr sz="1000" b="0">
+                <a:solidFill>
+                  <a:srgbClr val="5C6672"/>
+                </a:solidFill>
+                <a:latin typeface="Noto Sans CJK KR"/>
+              </a:defRPr>
+            </a:pPr>
+            <a:r>
+              <a:t>명령·파일 경로는 슬라이드에서 복사 가능</a:t>
+            </a:r>
+          </a:p>
+        </p:txBody>
+      </p:sp>
+      <p:sp>
+        <p:nvSpPr>
+          <p:cNvPr id="6" name="Rectangle 5"/>
+          <p:cNvSpPr/>
+          <p:nvPr/>
+        </p:nvSpPr>
+        <p:spPr>
+          <a:xfrm>
+            <a:off x="566928" y="1188720"/>
+            <a:ext cx="11064240" cy="347472"/>
+          </a:xfrm>
+          <a:prstGeom prst="rect">
+            <a:avLst/>
+          </a:prstGeom>
+          <a:solidFill>
+            <a:srgbClr val="F4F7FB"/>
+          </a:solidFill>
+          <a:ln>
+            <a:solidFill>
+              <a:srgbClr val="F4F7FB"/>
+            </a:solidFill>
+          </a:ln>
+        </p:spPr>
+        <p:style>
+          <a:lnRef idx="1">
+            <a:schemeClr val="accent1"/>
+          </a:lnRef>
+          <a:fillRef idx="3">
+            <a:schemeClr val="accent1"/>
+          </a:fillRef>
+          <a:effectRef idx="2">
+            <a:schemeClr val="accent1"/>
+          </a:effectRef>
+          <a:fontRef idx="minor">
+            <a:schemeClr val="lt1"/>
+          </a:fontRef>
+        </p:style>
+        <p:txBody>
+          <a:bodyPr rtlCol="0" anchor="ctr" wrap="square" lIns="73152" rIns="73152" tIns="36576" bIns="36576"/>
+          <a:lstStyle/>
+          <a:p>
+            <a:pPr algn="l">
+              <a:spcAft>
+                <a:spcPts val="0"/>
+              </a:spcAft>
+              <a:defRPr sz="1300" b="1">
+                <a:solidFill>
+                  <a:srgbClr val="122C4E"/>
+                </a:solidFill>
+                <a:latin typeface="Noto Sans CJK KR"/>
+              </a:defRPr>
+            </a:pPr>
+            <a:r>
+              <a:t>현재 단계 통합 보강    |    현재 폴더 ~/ros2_curri/agv_ws    |    현재 터미널</a:t>
+            </a:r>
+          </a:p>
+        </p:txBody>
+      </p:sp>
+      <p:sp>
+        <p:nvSpPr>
+          <p:cNvPr id="7" name="Rounded Rectangle 6"/>
+          <p:cNvSpPr/>
+          <p:nvPr/>
+        </p:nvSpPr>
+        <p:spPr>
+          <a:xfrm>
+            <a:off x="676656" y="1691640"/>
+            <a:ext cx="10972800" cy="4434840"/>
+          </a:xfrm>
+          <a:prstGeom prst="roundRect">
+            <a:avLst/>
+          </a:prstGeom>
+          <a:solidFill>
+            <a:srgbClr val="F4F7FB"/>
+          </a:solidFill>
+          <a:ln>
+            <a:solidFill>
+              <a:srgbClr val="D2DEEC"/>
+            </a:solidFill>
+          </a:ln>
+        </p:spPr>
+        <p:style>
+          <a:lnRef idx="1">
+            <a:schemeClr val="accent1"/>
+          </a:lnRef>
+          <a:fillRef idx="3">
+            <a:schemeClr val="accent1"/>
+          </a:fillRef>
+          <a:effectRef idx="2">
+            <a:schemeClr val="accent1"/>
+          </a:effectRef>
+          <a:fontRef idx="minor">
+            <a:schemeClr val="lt1"/>
+          </a:fontRef>
+        </p:style>
+        <p:txBody>
+          <a:bodyPr rtlCol="0" anchor="ctr"/>
+          <a:lstStyle/>
+          <a:p>
+            <a:pPr algn="ctr"/>
+          </a:p>
+        </p:txBody>
+      </p:sp>
+      <p:sp>
+        <p:nvSpPr>
+          <p:cNvPr id="8" name="TextBox 7"/>
+          <p:cNvSpPr txBox="1"/>
+          <p:nvPr/>
+        </p:nvSpPr>
+        <p:spPr>
+          <a:xfrm>
+            <a:off x="914400" y="1993392"/>
+            <a:ext cx="10332720" cy="3749039"/>
+          </a:xfrm>
+          <a:prstGeom prst="rect">
+            <a:avLst/>
+          </a:prstGeom>
+          <a:noFill/>
+        </p:spPr>
+        <p:txBody>
+          <a:bodyPr wrap="square" lIns="109728" rIns="109728">
+            <a:spAutoFit/>
+          </a:bodyPr>
+          <a:lstStyle/>
+          <a:p>
+            <a:pPr>
+              <a:spcAft>
+                <a:spcPts val="800"/>
+              </a:spcAft>
+              <a:defRPr sz="1900">
+                <a:solidFill>
+                  <a:srgbClr val="122C4E"/>
+                </a:solidFill>
+                <a:latin typeface="Noto Sans CJK KR"/>
+              </a:defRPr>
+            </a:pPr>
+            <a:r>
+              <a:t>• 1 모델 TF, 2 World spawn, 3 Differential Drive, 4 bridge/RViz</a:t>
+            </a:r>
+          </a:p>
+          <a:p>
+            <a:pPr>
+              <a:spcAft>
+                <a:spcPts val="800"/>
+              </a:spcAft>
+              <a:defRPr sz="1900">
+                <a:solidFill>
+                  <a:srgbClr val="122C4E"/>
+                </a:solidFill>
+                <a:latin typeface="Noto Sans CJK KR"/>
+              </a:defRPr>
+            </a:pPr>
+            <a:r>
+              <a:t>• 5 Camera/LiDAR/IMU, 6 safety/perception, 7 FSM/PID, 8 launch/rosbag</a:t>
+            </a:r>
+          </a:p>
+          <a:p>
+            <a:pPr>
+              <a:spcAft>
+                <a:spcPts val="800"/>
+              </a:spcAft>
+              <a:defRPr sz="1900">
+                <a:solidFill>
+                  <a:srgbClr val="122C4E"/>
+                </a:solidFill>
+                <a:latin typeface="Noto Sans CJK KR"/>
+              </a:defRPr>
+            </a:pPr>
+            <a:r>
+              <a:t>• 각 milestone마다 command 결과와 정상 화면을 함께 저장한다.</a:t>
+            </a:r>
+          </a:p>
+        </p:txBody>
+      </p:sp>
+    </p:spTree>
+  </p:cSld>
+  <p:clrMapOvr>
+    <a:masterClrMapping/>
+  </p:clrMapOvr>
+</p:sld>
+</file>
+
+<file path=ppt/slides/slide47.xml><?xml version="1.0" encoding="utf-8"?>
+<p:sld xmlns:a="http://schemas.openxmlformats.org/drawingml/2006/main" xmlns:p="http://schemas.openxmlformats.org/presentationml/2006/main" xmlns:r="http://schemas.openxmlformats.org/officeDocument/2006/relationships">
+  <p:cSld>
+    <p:spTree>
+      <p:nvGrpSpPr>
+        <p:cNvPr id="1" name=""/>
+        <p:cNvGrpSpPr/>
+        <p:nvPr/>
+      </p:nvGrpSpPr>
+      <p:grpSpPr/>
+      <p:sp>
+        <p:nvSpPr>
+          <p:cNvPr id="2" name="TextBox 1"/>
+          <p:cNvSpPr txBox="1"/>
+          <p:nvPr/>
+        </p:nvSpPr>
+        <p:spPr>
+          <a:xfrm>
+            <a:off x="566928" y="347472"/>
+            <a:ext cx="10881360" cy="438912"/>
+          </a:xfrm>
+          <a:prstGeom prst="rect">
+            <a:avLst/>
+          </a:prstGeom>
+          <a:noFill/>
+        </p:spPr>
+        <p:txBody>
+          <a:bodyPr wrap="square" lIns="73152" rIns="73152" tIns="36576" bIns="36576">
+            <a:spAutoFit/>
+          </a:bodyPr>
+          <a:lstStyle/>
+          <a:p>
+            <a:pPr algn="l">
+              <a:spcAft>
+                <a:spcPts val="0"/>
+              </a:spcAft>
+              <a:defRPr sz="3200" b="1">
+                <a:solidFill>
+                  <a:srgbClr val="122C4E"/>
+                </a:solidFill>
+                <a:latin typeface="Noto Sans CJK KR"/>
+              </a:defRPr>
+            </a:pPr>
+            <a:r>
+              <a:t>실패를 재현 가능하게 기록한다</a:t>
+            </a:r>
+          </a:p>
+        </p:txBody>
+      </p:sp>
+      <p:sp>
+        <p:nvSpPr>
+          <p:cNvPr id="3" name="TextBox 2"/>
+          <p:cNvSpPr txBox="1"/>
+          <p:nvPr/>
+        </p:nvSpPr>
+        <p:spPr>
+          <a:xfrm>
+            <a:off x="603504" y="859536"/>
+            <a:ext cx="10698480" cy="292608"/>
+          </a:xfrm>
+          <a:prstGeom prst="rect">
+            <a:avLst/>
+          </a:prstGeom>
+          <a:noFill/>
+        </p:spPr>
+        <p:txBody>
+          <a:bodyPr wrap="square" lIns="73152" rIns="73152" tIns="36576" bIns="36576">
+            <a:spAutoFit/>
+          </a:bodyPr>
+          <a:lstStyle/>
+          <a:p>
+            <a:pPr algn="l">
+              <a:spcAft>
+                <a:spcPts val="0"/>
+              </a:spcAft>
+              <a:defRPr sz="1700" b="0">
+                <a:solidFill>
+                  <a:srgbClr val="5C6672"/>
+                </a:solidFill>
+                <a:latin typeface="Noto Sans CJK KR"/>
+              </a:defRPr>
+            </a:pPr>
+            <a:r>
+              <a:t>통합 단계에서 놓치기 쉬운 실행·운영 조건을 정리합니다.</a:t>
+            </a:r>
+          </a:p>
+        </p:txBody>
+      </p:sp>
+      <p:sp>
+        <p:nvSpPr>
+          <p:cNvPr id="4" name="TextBox 3"/>
+          <p:cNvSpPr txBox="1"/>
+          <p:nvPr/>
+        </p:nvSpPr>
+        <p:spPr>
+          <a:xfrm>
+            <a:off x="530352" y="6510528"/>
+            <a:ext cx="7772400" cy="201168"/>
+          </a:xfrm>
+          <a:prstGeom prst="rect">
+            <a:avLst/>
+          </a:prstGeom>
+          <a:noFill/>
+        </p:spPr>
+        <p:txBody>
+          <a:bodyPr wrap="square" lIns="73152" rIns="73152" tIns="36576" bIns="36576">
+            <a:spAutoFit/>
+          </a:bodyPr>
+          <a:lstStyle/>
+          <a:p>
+            <a:pPr algn="l">
+              <a:spcAft>
+                <a:spcPts val="0"/>
+              </a:spcAft>
+              <a:defRPr sz="1000" b="0">
+                <a:solidFill>
+                  <a:srgbClr val="5C6672"/>
+                </a:solidFill>
+                <a:latin typeface="Noto Sans CJK KR"/>
+              </a:defRPr>
+            </a:pPr>
+            <a:r>
+              <a:t>ROS 2 Jazzy · Gazebo Harmonic · M22 · 따라 하기형 AGV 실습</a:t>
+            </a:r>
+          </a:p>
+        </p:txBody>
+      </p:sp>
+      <p:sp>
+        <p:nvSpPr>
+          <p:cNvPr id="5" name="TextBox 4"/>
+          <p:cNvSpPr txBox="1"/>
+          <p:nvPr/>
+        </p:nvSpPr>
+        <p:spPr>
+          <a:xfrm>
+            <a:off x="9144000" y="6510528"/>
+            <a:ext cx="2468880" cy="201168"/>
+          </a:xfrm>
+          <a:prstGeom prst="rect">
+            <a:avLst/>
+          </a:prstGeom>
+          <a:noFill/>
+        </p:spPr>
+        <p:txBody>
+          <a:bodyPr wrap="square" lIns="73152" rIns="73152" tIns="36576" bIns="36576">
+            <a:spAutoFit/>
+          </a:bodyPr>
+          <a:lstStyle/>
+          <a:p>
+            <a:pPr algn="r">
+              <a:spcAft>
+                <a:spcPts val="0"/>
+              </a:spcAft>
+              <a:defRPr sz="1000" b="0">
+                <a:solidFill>
+                  <a:srgbClr val="5C6672"/>
+                </a:solidFill>
+                <a:latin typeface="Noto Sans CJK KR"/>
+              </a:defRPr>
+            </a:pPr>
+            <a:r>
+              <a:t>명령·파일 경로는 슬라이드에서 복사 가능</a:t>
+            </a:r>
+          </a:p>
+        </p:txBody>
+      </p:sp>
+      <p:sp>
+        <p:nvSpPr>
+          <p:cNvPr id="6" name="Rectangle 5"/>
+          <p:cNvSpPr/>
+          <p:nvPr/>
+        </p:nvSpPr>
+        <p:spPr>
+          <a:xfrm>
+            <a:off x="566928" y="1188720"/>
+            <a:ext cx="11064240" cy="347472"/>
+          </a:xfrm>
+          <a:prstGeom prst="rect">
+            <a:avLst/>
+          </a:prstGeom>
+          <a:solidFill>
+            <a:srgbClr val="F4F7FB"/>
+          </a:solidFill>
+          <a:ln>
+            <a:solidFill>
+              <a:srgbClr val="F4F7FB"/>
+            </a:solidFill>
+          </a:ln>
+        </p:spPr>
+        <p:style>
+          <a:lnRef idx="1">
+            <a:schemeClr val="accent1"/>
+          </a:lnRef>
+          <a:fillRef idx="3">
+            <a:schemeClr val="accent1"/>
+          </a:fillRef>
+          <a:effectRef idx="2">
+            <a:schemeClr val="accent1"/>
+          </a:effectRef>
+          <a:fontRef idx="minor">
+            <a:schemeClr val="lt1"/>
+          </a:fontRef>
+        </p:style>
+        <p:txBody>
+          <a:bodyPr rtlCol="0" anchor="ctr" wrap="square" lIns="73152" rIns="73152" tIns="36576" bIns="36576"/>
+          <a:lstStyle/>
+          <a:p>
+            <a:pPr algn="l">
+              <a:spcAft>
+                <a:spcPts val="0"/>
+              </a:spcAft>
+              <a:defRPr sz="1300" b="1">
+                <a:solidFill>
+                  <a:srgbClr val="122C4E"/>
+                </a:solidFill>
+                <a:latin typeface="Noto Sans CJK KR"/>
+              </a:defRPr>
+            </a:pPr>
+            <a:r>
+              <a:t>현재 단계 통합 보강    |    현재 폴더 ~/ros2_curri/agv_ws    |    현재 터미널</a:t>
+            </a:r>
+          </a:p>
+        </p:txBody>
+      </p:sp>
+      <p:sp>
+        <p:nvSpPr>
+          <p:cNvPr id="7" name="Rounded Rectangle 6"/>
+          <p:cNvSpPr/>
+          <p:nvPr/>
+        </p:nvSpPr>
+        <p:spPr>
+          <a:xfrm>
+            <a:off x="676656" y="1691640"/>
+            <a:ext cx="10972800" cy="4434840"/>
+          </a:xfrm>
+          <a:prstGeom prst="roundRect">
+            <a:avLst/>
+          </a:prstGeom>
+          <a:solidFill>
+            <a:srgbClr val="F4F7FB"/>
+          </a:solidFill>
+          <a:ln>
+            <a:solidFill>
+              <a:srgbClr val="D2DEEC"/>
+            </a:solidFill>
+          </a:ln>
+        </p:spPr>
+        <p:style>
+          <a:lnRef idx="1">
+            <a:schemeClr val="accent1"/>
+          </a:lnRef>
+          <a:fillRef idx="3">
+            <a:schemeClr val="accent1"/>
+          </a:fillRef>
+          <a:effectRef idx="2">
+            <a:schemeClr val="accent1"/>
+          </a:effectRef>
+          <a:fontRef idx="minor">
+            <a:schemeClr val="lt1"/>
+          </a:fontRef>
+        </p:style>
+        <p:txBody>
+          <a:bodyPr rtlCol="0" anchor="ctr"/>
+          <a:lstStyle/>
+          <a:p>
+            <a:pPr algn="ctr"/>
+          </a:p>
+        </p:txBody>
+      </p:sp>
+      <p:sp>
+        <p:nvSpPr>
+          <p:cNvPr id="8" name="TextBox 7"/>
+          <p:cNvSpPr txBox="1"/>
+          <p:nvPr/>
+        </p:nvSpPr>
+        <p:spPr>
+          <a:xfrm>
+            <a:off x="914400" y="1993392"/>
+            <a:ext cx="10332720" cy="3749039"/>
+          </a:xfrm>
+          <a:prstGeom prst="rect">
+            <a:avLst/>
+          </a:prstGeom>
+          <a:noFill/>
+        </p:spPr>
+        <p:txBody>
+          <a:bodyPr wrap="square" lIns="109728" rIns="109728">
+            <a:spAutoFit/>
+          </a:bodyPr>
+          <a:lstStyle/>
+          <a:p>
+            <a:pPr>
+              <a:spcAft>
+                <a:spcPts val="800"/>
+              </a:spcAft>
+              <a:defRPr sz="1900">
+                <a:solidFill>
+                  <a:srgbClr val="122C4E"/>
+                </a:solidFill>
+                <a:latin typeface="Noto Sans CJK KR"/>
+              </a:defRPr>
+            </a:pPr>
+            <a:r>
+              <a:t>• topic: 이름·타입·publisher/subscriber 수</a:t>
+            </a:r>
+          </a:p>
+          <a:p>
+            <a:pPr>
+              <a:spcAft>
+                <a:spcPts val="800"/>
+              </a:spcAft>
+              <a:defRPr sz="1900">
+                <a:solidFill>
+                  <a:srgbClr val="122C4E"/>
+                </a:solidFill>
+                <a:latin typeface="Noto Sans CJK KR"/>
+              </a:defRPr>
+            </a:pPr>
+            <a:r>
+              <a:t>• TF: frame_id·parent/child·Fixed Frame</a:t>
+            </a:r>
+          </a:p>
+          <a:p>
+            <a:pPr>
+              <a:spcAft>
+                <a:spcPts val="800"/>
+              </a:spcAft>
+              <a:defRPr sz="1900">
+                <a:solidFill>
+                  <a:srgbClr val="122C4E"/>
+                </a:solidFill>
+                <a:latin typeface="Noto Sans CJK KR"/>
+              </a:defRPr>
+            </a:pPr>
+            <a:r>
+              <a:t>• bridge: 방향·Gazebo/ROS type</a:t>
+            </a:r>
+          </a:p>
+          <a:p>
+            <a:pPr>
+              <a:spcAft>
+                <a:spcPts val="800"/>
+              </a:spcAft>
+              <a:defRPr sz="1900">
+                <a:solidFill>
+                  <a:srgbClr val="122C4E"/>
+                </a:solidFill>
+                <a:latin typeface="Noto Sans CJK KR"/>
+              </a:defRPr>
+            </a:pPr>
+            <a:r>
+              <a:t>• physics: collision·friction·inertia</a:t>
+            </a:r>
+          </a:p>
+          <a:p>
+            <a:pPr>
+              <a:spcAft>
+                <a:spcPts val="800"/>
+              </a:spcAft>
+              <a:defRPr sz="1900">
+                <a:solidFill>
+                  <a:srgbClr val="122C4E"/>
+                </a:solidFill>
+                <a:latin typeface="Noto Sans CJK KR"/>
+              </a:defRPr>
+            </a:pPr>
+            <a:r>
+              <a:t>• launch: package share·YAML key·실행 순서</a:t>
+            </a:r>
+          </a:p>
+        </p:txBody>
+      </p:sp>
+    </p:spTree>
+  </p:cSld>
+  <p:clrMapOvr>
+    <a:masterClrMapping/>
+  </p:clrMapOvr>
+</p:sld>
+</file>
+
+<file path=ppt/slides/slide48.xml><?xml version="1.0" encoding="utf-8"?>
+<p:sld xmlns:a="http://schemas.openxmlformats.org/drawingml/2006/main" xmlns:p="http://schemas.openxmlformats.org/presentationml/2006/main" xmlns:r="http://schemas.openxmlformats.org/officeDocument/2006/relationships">
+  <p:cSld>
+    <p:spTree>
+      <p:nvGrpSpPr>
+        <p:cNvPr id="1" name=""/>
+        <p:cNvGrpSpPr/>
+        <p:nvPr/>
+      </p:nvGrpSpPr>
+      <p:grpSpPr/>
+      <p:sp>
+        <p:nvSpPr>
+          <p:cNvPr id="2" name="TextBox 1"/>
+          <p:cNvSpPr txBox="1"/>
+          <p:nvPr/>
+        </p:nvSpPr>
+        <p:spPr>
+          <a:xfrm>
+            <a:off x="566928" y="347472"/>
+            <a:ext cx="10881360" cy="438912"/>
+          </a:xfrm>
+          <a:prstGeom prst="rect">
+            <a:avLst/>
+          </a:prstGeom>
+          <a:noFill/>
+        </p:spPr>
+        <p:txBody>
+          <a:bodyPr wrap="square" lIns="73152" rIns="73152" tIns="36576" bIns="36576">
+            <a:spAutoFit/>
+          </a:bodyPr>
+          <a:lstStyle/>
+          <a:p>
+            <a:pPr algn="l">
+              <a:spcAft>
+                <a:spcPts val="0"/>
+              </a:spcAft>
+              <a:defRPr sz="3200" b="1">
+                <a:solidFill>
+                  <a:srgbClr val="122C4E"/>
+                </a:solidFill>
+                <a:latin typeface="Noto Sans CJK KR"/>
+              </a:defRPr>
+            </a:pPr>
+            <a:r>
+              <a:t>체크포인트를 저장하고 다음 모듈로 넘긴다</a:t>
+            </a:r>
+          </a:p>
+        </p:txBody>
+      </p:sp>
+      <p:sp>
+        <p:nvSpPr>
+          <p:cNvPr id="3" name="TextBox 2"/>
+          <p:cNvSpPr txBox="1"/>
+          <p:nvPr/>
+        </p:nvSpPr>
+        <p:spPr>
+          <a:xfrm>
+            <a:off x="603504" y="859536"/>
+            <a:ext cx="10698480" cy="292608"/>
+          </a:xfrm>
+          <a:prstGeom prst="rect">
+            <a:avLst/>
+          </a:prstGeom>
+          <a:noFill/>
+        </p:spPr>
+        <p:txBody>
+          <a:bodyPr wrap="square" lIns="73152" rIns="73152" tIns="36576" bIns="36576">
+            <a:spAutoFit/>
+          </a:bodyPr>
+          <a:lstStyle/>
+          <a:p>
+            <a:pPr algn="l">
+              <a:spcAft>
+                <a:spcPts val="0"/>
+              </a:spcAft>
+              <a:defRPr sz="1700" b="0">
+                <a:solidFill>
+                  <a:srgbClr val="5C6672"/>
+                </a:solidFill>
+                <a:latin typeface="Noto Sans CJK KR"/>
+              </a:defRPr>
+            </a:pPr>
+            <a:r>
+              <a:t>현재 Complete는 다음 Starter의 기준선입니다.</a:t>
+            </a:r>
+          </a:p>
+        </p:txBody>
+      </p:sp>
+      <p:sp>
+        <p:nvSpPr>
+          <p:cNvPr id="4" name="TextBox 3"/>
+          <p:cNvSpPr txBox="1"/>
+          <p:nvPr/>
+        </p:nvSpPr>
+        <p:spPr>
+          <a:xfrm>
+            <a:off x="530352" y="6510528"/>
+            <a:ext cx="7772400" cy="201168"/>
+          </a:xfrm>
+          <a:prstGeom prst="rect">
+            <a:avLst/>
+          </a:prstGeom>
+          <a:noFill/>
+        </p:spPr>
+        <p:txBody>
+          <a:bodyPr wrap="square" lIns="73152" rIns="73152" tIns="36576" bIns="36576">
+            <a:spAutoFit/>
+          </a:bodyPr>
+          <a:lstStyle/>
+          <a:p>
+            <a:pPr algn="l">
+              <a:spcAft>
+                <a:spcPts val="0"/>
+              </a:spcAft>
+              <a:defRPr sz="1000" b="0">
+                <a:solidFill>
+                  <a:srgbClr val="5C6672"/>
+                </a:solidFill>
+                <a:latin typeface="Noto Sans CJK KR"/>
+              </a:defRPr>
+            </a:pPr>
+            <a:r>
+              <a:t>ROS 2 Jazzy · Gazebo Harmonic · M22 · 따라 하기형 AGV 실습</a:t>
+            </a:r>
+          </a:p>
+        </p:txBody>
+      </p:sp>
+      <p:sp>
+        <p:nvSpPr>
+          <p:cNvPr id="5" name="TextBox 4"/>
+          <p:cNvSpPr txBox="1"/>
+          <p:nvPr/>
+        </p:nvSpPr>
+        <p:spPr>
+          <a:xfrm>
+            <a:off x="9144000" y="6510528"/>
+            <a:ext cx="2468880" cy="201168"/>
+          </a:xfrm>
+          <a:prstGeom prst="rect">
+            <a:avLst/>
+          </a:prstGeom>
+          <a:noFill/>
+        </p:spPr>
+        <p:txBody>
+          <a:bodyPr wrap="square" lIns="73152" rIns="73152" tIns="36576" bIns="36576">
+            <a:spAutoFit/>
+          </a:bodyPr>
+          <a:lstStyle/>
+          <a:p>
+            <a:pPr algn="r">
+              <a:spcAft>
+                <a:spcPts val="0"/>
+              </a:spcAft>
+              <a:defRPr sz="1000" b="0">
+                <a:solidFill>
+                  <a:srgbClr val="5C6672"/>
+                </a:solidFill>
+                <a:latin typeface="Noto Sans CJK KR"/>
+              </a:defRPr>
+            </a:pPr>
+            <a:r>
+              <a:t>명령·파일 경로는 슬라이드에서 복사 가능</a:t>
+            </a:r>
+          </a:p>
+        </p:txBody>
+      </p:sp>
+      <p:sp>
+        <p:nvSpPr>
+          <p:cNvPr id="6" name="Rectangle 5"/>
+          <p:cNvSpPr/>
+          <p:nvPr/>
+        </p:nvSpPr>
+        <p:spPr>
+          <a:xfrm>
+            <a:off x="566928" y="1188720"/>
+            <a:ext cx="11064240" cy="347472"/>
+          </a:xfrm>
+          <a:prstGeom prst="rect">
+            <a:avLst/>
+          </a:prstGeom>
+          <a:solidFill>
+            <a:srgbClr val="F4F7FB"/>
+          </a:solidFill>
+          <a:ln>
+            <a:solidFill>
+              <a:srgbClr val="F4F7FB"/>
+            </a:solidFill>
+          </a:ln>
+        </p:spPr>
+        <p:style>
+          <a:lnRef idx="1">
+            <a:schemeClr val="accent1"/>
+          </a:lnRef>
+          <a:fillRef idx="3">
+            <a:schemeClr val="accent1"/>
+          </a:fillRef>
+          <a:effectRef idx="2">
+            <a:schemeClr val="accent1"/>
+          </a:effectRef>
+          <a:fontRef idx="minor">
+            <a:schemeClr val="lt1"/>
+          </a:fontRef>
+        </p:style>
+        <p:txBody>
+          <a:bodyPr rtlCol="0" anchor="ctr" wrap="square" lIns="73152" rIns="73152" tIns="36576" bIns="36576"/>
+          <a:lstStyle/>
+          <a:p>
+            <a:pPr algn="l">
+              <a:spcAft>
+                <a:spcPts val="0"/>
+              </a:spcAft>
+              <a:defRPr sz="1300" b="1">
+                <a:solidFill>
+                  <a:srgbClr val="122C4E"/>
+                </a:solidFill>
+                <a:latin typeface="Noto Sans CJK KR"/>
+              </a:defRPr>
+            </a:pPr>
+            <a:r>
+              <a:t>현재 단계 체크포인트    |    현재 폴더 ~/ros2_curri/agv_ws    |    현재 터미널</a:t>
+            </a:r>
+          </a:p>
+        </p:txBody>
+      </p:sp>
+      <p:sp>
+        <p:nvSpPr>
+          <p:cNvPr id="7" name="Rounded Rectangle 6"/>
+          <p:cNvSpPr/>
+          <p:nvPr/>
+        </p:nvSpPr>
+        <p:spPr>
+          <a:xfrm>
+            <a:off x="685800" y="1737360"/>
+            <a:ext cx="10972800" cy="3611880"/>
+          </a:xfrm>
+          <a:prstGeom prst="roundRect">
+            <a:avLst/>
+          </a:prstGeom>
+          <a:solidFill>
+            <a:srgbClr val="F4F7FB"/>
+          </a:solidFill>
+          <a:ln>
+            <a:solidFill>
+              <a:srgbClr val="D2DCE8"/>
+            </a:solidFill>
+          </a:ln>
+        </p:spPr>
+        <p:style>
+          <a:lnRef idx="1">
+            <a:schemeClr val="accent1"/>
+          </a:lnRef>
+          <a:fillRef idx="3">
+            <a:schemeClr val="accent1"/>
+          </a:fillRef>
+          <a:effectRef idx="2">
+            <a:schemeClr val="accent1"/>
+          </a:effectRef>
+          <a:fontRef idx="minor">
+            <a:schemeClr val="lt1"/>
+          </a:fontRef>
+        </p:style>
+        <p:txBody>
+          <a:bodyPr rtlCol="0" anchor="ctr"/>
+          <a:lstStyle/>
+          <a:p>
+            <a:pPr algn="ctr"/>
+          </a:p>
+        </p:txBody>
+      </p:sp>
+      <p:sp>
+        <p:nvSpPr>
+          <p:cNvPr id="8" name="TextBox 7"/>
+          <p:cNvSpPr txBox="1"/>
+          <p:nvPr/>
+        </p:nvSpPr>
+        <p:spPr>
+          <a:xfrm>
+            <a:off x="896112" y="1993392"/>
+            <a:ext cx="10332720" cy="2971800"/>
+          </a:xfrm>
+          <a:prstGeom prst="rect">
+            <a:avLst/>
+          </a:prstGeom>
+          <a:noFill/>
+        </p:spPr>
+        <p:txBody>
+          <a:bodyPr wrap="square" lIns="109728" rIns="109728">
+            <a:spAutoFit/>
+          </a:bodyPr>
+          <a:lstStyle/>
+          <a:p>
+            <a:pPr>
+              <a:spcAft>
+                <a:spcPts val="800"/>
+              </a:spcAft>
+              <a:defRPr sz="1800">
+                <a:solidFill>
+                  <a:srgbClr val="122C4E"/>
+                </a:solidFill>
+                <a:latin typeface="Noto Sans CJK KR"/>
+              </a:defRPr>
+            </a:pPr>
+            <a:r>
+              <a:t>• □ 완료 화면: 한 launch 실행, RViz/Gazebo 확인, mission log, rosbag 기록을 제출 체크리스트로 남긴다.</a:t>
+            </a:r>
+          </a:p>
+          <a:p>
+            <a:pPr>
+              <a:spcAft>
+                <a:spcPts val="800"/>
+              </a:spcAft>
+              <a:defRPr sz="1800">
+                <a:solidFill>
+                  <a:srgbClr val="122C4E"/>
+                </a:solidFill>
+                <a:latin typeface="Noto Sans CJK KR"/>
+              </a:defRPr>
+            </a:pPr>
+            <a:r>
+              <a:t>• □ Complete 파일: blocks/F_integration/M22_final_project/complete/</a:t>
+            </a:r>
+          </a:p>
+          <a:p>
+            <a:pPr>
+              <a:spcAft>
+                <a:spcPts val="800"/>
+              </a:spcAft>
+              <a:defRPr sz="1800">
+                <a:solidFill>
+                  <a:srgbClr val="122C4E"/>
+                </a:solidFill>
+                <a:latin typeface="Noto Sans CJK KR"/>
+              </a:defRPr>
+            </a:pPr>
+            <a:r>
+              <a:t>• □ 정상 로그·캡처: logs/validation.log, screenshots/validation_terminal.png</a:t>
+            </a:r>
+          </a:p>
+          <a:p>
+            <a:pPr>
+              <a:spcAft>
+                <a:spcPts val="800"/>
+              </a:spcAft>
+              <a:defRPr sz="1800">
+                <a:solidFill>
+                  <a:srgbClr val="122C4E"/>
+                </a:solidFill>
+                <a:latin typeface="Noto Sans CJK KR"/>
+              </a:defRPr>
+            </a:pPr>
+            <a:r>
+              <a:t>• □ 버전 식별: CHECKSUM_or_TAG.txt의 SHA-256 manifest</a:t>
+            </a:r>
+          </a:p>
+          <a:p>
+            <a:pPr>
+              <a:spcAft>
+                <a:spcPts val="800"/>
+              </a:spcAft>
+              <a:defRPr sz="1800">
+                <a:solidFill>
+                  <a:srgbClr val="122C4E"/>
+                </a:solidFill>
+                <a:latin typeface="Noto Sans CJK KR"/>
+              </a:defRPr>
+            </a:pPr>
+            <a:r>
+              <a:t>• □ 다음 시작 조건: 핵심 과정 완료 → SLAM/Nav2 확장</a:t>
+            </a:r>
+          </a:p>
+        </p:txBody>
+      </p:sp>
+      <p:sp>
+        <p:nvSpPr>
+          <p:cNvPr id="9" name="TextBox 8"/>
+          <p:cNvSpPr txBox="1"/>
+          <p:nvPr/>
+        </p:nvSpPr>
+        <p:spPr>
+          <a:xfrm>
+            <a:off x="868680" y="5596128"/>
+            <a:ext cx="10515600" cy="338328"/>
+          </a:xfrm>
+          <a:prstGeom prst="rect">
+            <a:avLst/>
+          </a:prstGeom>
+          <a:noFill/>
+        </p:spPr>
+        <p:txBody>
+          <a:bodyPr wrap="square" lIns="73152" rIns="73152" tIns="36576" bIns="36576">
+            <a:spAutoFit/>
+          </a:bodyPr>
+          <a:lstStyle/>
+          <a:p>
+            <a:pPr algn="ctr">
+              <a:spcAft>
+                <a:spcPts val="0"/>
+              </a:spcAft>
+              <a:defRPr sz="1700" b="1">
+                <a:solidFill>
+                  <a:srgbClr val="2A8B5A"/>
+                </a:solidFill>
+                <a:latin typeface="Noto Sans CJK KR"/>
+              </a:defRPr>
+            </a:pPr>
+            <a:r>
+              <a:t>다음 모듈을 시작하기 전, 이 슬라이드의 Complete와 다음 모듈의 Starter를 비교합니다.</a:t>
+            </a:r>
+          </a:p>
+        </p:txBody>
+      </p:sp>
+    </p:spTree>
+  </p:cSld>
+  <p:clrMapOvr>
+    <a:masterClrMapping/>
+  </p:clrMapOvr>
+</p:sld>
+</file>
+
+<file path=ppt/slides/slide49.xml><?xml version="1.0" encoding="utf-8"?>
+<p:sld xmlns:a="http://schemas.openxmlformats.org/drawingml/2006/main" xmlns:p="http://schemas.openxmlformats.org/presentationml/2006/main" xmlns:r="http://schemas.openxmlformats.org/officeDocument/2006/relationships">
+  <p:cSld>
+    <p:spTree>
+      <p:nvGrpSpPr>
+        <p:cNvPr id="1" name=""/>
+        <p:cNvGrpSpPr/>
+        <p:nvPr/>
+      </p:nvGrpSpPr>
+      <p:grpSpPr/>
+      <p:sp>
+        <p:nvSpPr>
+          <p:cNvPr id="2" name="TextBox 1"/>
+          <p:cNvSpPr txBox="1"/>
+          <p:nvPr/>
+        </p:nvSpPr>
+        <p:spPr>
+          <a:xfrm>
+            <a:off x="566928" y="347472"/>
+            <a:ext cx="10881360" cy="438912"/>
+          </a:xfrm>
+          <a:prstGeom prst="rect">
+            <a:avLst/>
+          </a:prstGeom>
+          <a:noFill/>
+        </p:spPr>
+        <p:txBody>
+          <a:bodyPr wrap="square" lIns="73152" rIns="73152" tIns="36576" bIns="36576">
+            <a:spAutoFit/>
+          </a:bodyPr>
+          <a:lstStyle/>
+          <a:p>
+            <a:pPr algn="l">
+              <a:spcAft>
+                <a:spcPts val="0"/>
+              </a:spcAft>
+              <a:defRPr sz="3200" b="1">
+                <a:solidFill>
+                  <a:srgbClr val="122C4E"/>
+                </a:solidFill>
+                <a:latin typeface="Noto Sans CJK KR"/>
+              </a:defRPr>
+            </a:pPr>
+            <a:r>
               <a:t>공식 참고 자료</a:t>
             </a:r>
           </a:p>
@@ -26149,7 +28088,7 @@
               </a:defRPr>
             </a:pPr>
             <a:r>
-              <a:t>~/agv_ws/src/</a:t>
+              <a:t>~/ros2_curri/agv_ws/src/</a:t>
             </a:r>
             <a:br/>
             <a:r>
@@ -26440,7 +28379,7 @@
               </a:defRPr>
             </a:pPr>
             <a:r>
-              <a:t>현재 단계 1/3    |    현재 폴더 ~/agv_ws    |    현재 터미널</a:t>
+              <a:t>현재 단계 1/3    |    현재 폴더 ~/ros2_curri/agv_ws    |    현재 터미널</a:t>
             </a:r>
           </a:p>
         </p:txBody>
@@ -26580,7 +28519,7 @@
             </a:r>
             <a:br/>
             <a:r>
-              <a:t>cd ~/agv_ws</a:t>
+              <a:t>cd ~/ros2_curri/agv_ws</a:t>
             </a:r>
             <a:br/>
             <a:r>
@@ -26898,7 +28837,7 @@
               </a:defRPr>
             </a:pPr>
             <a:r>
-              <a:t>현재 단계 2/3    |    현재 폴더 ~/agv_ws    |    현재 터미널</a:t>
+              <a:t>현재 단계 2/3    |    현재 폴더 ~/ros2_curri/agv_ws    |    현재 터미널</a:t>
             </a:r>
           </a:p>
         </p:txBody>
@@ -27344,7 +29283,7 @@
               </a:defRPr>
             </a:pPr>
             <a:r>
-              <a:t>현재 단계 3/3    |    현재 폴더 ~/agv_ws    |    현재 터미널</a:t>
+              <a:t>현재 단계 3/3    |    현재 폴더 ~/ros2_curri/agv_ws    |    현재 터미널</a:t>
             </a:r>
           </a:p>
         </p:txBody>

--- a/blocks/F_integration/M22_final_project/M22_Final_Project_가상_AGV_자율_미션.pptx
+++ b/blocks/F_integration/M22_final_project/M22_Final_Project_가상_AGV_자율_미션.pptx
@@ -10574,7 +10574,7 @@
               <a:spcAft>
                 <a:spcPts val="0"/>
               </a:spcAft>
-              <a:defRPr sz="1800" b="1">
+              <a:defRPr sz="1400" b="1">
                 <a:solidFill>
                   <a:srgbClr val="FFFFFF"/>
                 </a:solidFill>
@@ -10582,7 +10582,7 @@
               </a:defRPr>
             </a:pPr>
             <a:r>
-              <a:t>M22 · Block F · ROS 2 + Gazebo Sim AGV</a:t>
+              <a:t>ROS 2 기반 AGV End-to-End 개발 커리큘럼 · M22 · Block F</a:t>
             </a:r>
           </a:p>
         </p:txBody>
@@ -10792,7 +10792,7 @@
               <a:spcAft>
                 <a:spcPts val="0"/>
               </a:spcAft>
-              <a:defRPr sz="1000" b="0">
+              <a:defRPr sz="900" b="0">
                 <a:solidFill>
                   <a:srgbClr val="5C6672"/>
                 </a:solidFill>
@@ -10800,7 +10800,7 @@
               </a:defRPr>
             </a:pPr>
             <a:r>
-              <a:t>ROS 2 Jazzy · Gazebo Harmonic · M22 · 따라 하기형 AGV 실습</a:t>
+              <a:t>ROS 2 기반 AGV End-to-End 개발 커리큘럼 · M22 · Block F</a:t>
             </a:r>
           </a:p>
         </p:txBody>
@@ -10966,7 +10966,7 @@
               <a:spcAft>
                 <a:spcPts val="0"/>
               </a:spcAft>
-              <a:defRPr sz="1000" b="0">
+              <a:defRPr sz="900" b="0">
                 <a:solidFill>
                   <a:srgbClr val="5C6672"/>
                 </a:solidFill>
@@ -10974,7 +10974,7 @@
               </a:defRPr>
             </a:pPr>
             <a:r>
-              <a:t>ROS 2 Jazzy · Gazebo Harmonic · M22 · 따라 하기형 AGV 실습</a:t>
+              <a:t>ROS 2 기반 AGV End-to-End 개발 커리큘럼 · M22 · Block F</a:t>
             </a:r>
           </a:p>
         </p:txBody>
@@ -11842,7 +11842,7 @@
               <a:spcAft>
                 <a:spcPts val="0"/>
               </a:spcAft>
-              <a:defRPr sz="1000" b="0">
+              <a:defRPr sz="900" b="0">
                 <a:solidFill>
                   <a:srgbClr val="5C6672"/>
                 </a:solidFill>
@@ -11850,7 +11850,7 @@
               </a:defRPr>
             </a:pPr>
             <a:r>
-              <a:t>ROS 2 Jazzy · Gazebo Harmonic · M22 · 따라 하기형 AGV 실습</a:t>
+              <a:t>ROS 2 기반 AGV End-to-End 개발 커리큘럼 · M22 · Block F</a:t>
             </a:r>
           </a:p>
         </p:txBody>
@@ -12396,7 +12396,7 @@
               <a:spcAft>
                 <a:spcPts val="0"/>
               </a:spcAft>
-              <a:defRPr sz="1000" b="0">
+              <a:defRPr sz="900" b="0">
                 <a:solidFill>
                   <a:srgbClr val="5C6672"/>
                 </a:solidFill>
@@ -12404,7 +12404,7 @@
               </a:defRPr>
             </a:pPr>
             <a:r>
-              <a:t>ROS 2 Jazzy · Gazebo Harmonic · M22 · 따라 하기형 AGV 실습</a:t>
+              <a:t>ROS 2 기반 AGV End-to-End 개발 커리큘럼 · M22 · Block F</a:t>
             </a:r>
           </a:p>
         </p:txBody>
@@ -12924,7 +12924,7 @@
               <a:spcAft>
                 <a:spcPts val="0"/>
               </a:spcAft>
-              <a:defRPr sz="1000" b="0">
+              <a:defRPr sz="900" b="0">
                 <a:solidFill>
                   <a:srgbClr val="5C6672"/>
                 </a:solidFill>
@@ -12932,7 +12932,7 @@
               </a:defRPr>
             </a:pPr>
             <a:r>
-              <a:t>ROS 2 Jazzy · Gazebo Harmonic · M22 · 따라 하기형 AGV 실습</a:t>
+              <a:t>ROS 2 기반 AGV End-to-End 개발 커리큘럼 · M22 · Block F</a:t>
             </a:r>
           </a:p>
         </p:txBody>
@@ -13713,7 +13713,7 @@
               <a:spcAft>
                 <a:spcPts val="0"/>
               </a:spcAft>
-              <a:defRPr sz="1000" b="0">
+              <a:defRPr sz="900" b="0">
                 <a:solidFill>
                   <a:srgbClr val="5C6672"/>
                 </a:solidFill>
@@ -13721,7 +13721,7 @@
               </a:defRPr>
             </a:pPr>
             <a:r>
-              <a:t>ROS 2 Jazzy · Gazebo Harmonic · M22 · 따라 하기형 AGV 실습</a:t>
+              <a:t>ROS 2 기반 AGV End-to-End 개발 커리큘럼 · M22 · Block F</a:t>
             </a:r>
           </a:p>
         </p:txBody>
@@ -14510,7 +14510,7 @@
               <a:spcAft>
                 <a:spcPts val="0"/>
               </a:spcAft>
-              <a:defRPr sz="1000" b="0">
+              <a:defRPr sz="900" b="0">
                 <a:solidFill>
                   <a:srgbClr val="5C6672"/>
                 </a:solidFill>
@@ -14518,7 +14518,7 @@
               </a:defRPr>
             </a:pPr>
             <a:r>
-              <a:t>ROS 2 Jazzy · Gazebo Harmonic · M22 · 따라 하기형 AGV 실습</a:t>
+              <a:t>ROS 2 기반 AGV End-to-End 개발 커리큘럼 · M22 · Block F</a:t>
             </a:r>
           </a:p>
         </p:txBody>
@@ -15307,7 +15307,7 @@
               <a:spcAft>
                 <a:spcPts val="0"/>
               </a:spcAft>
-              <a:defRPr sz="1000" b="0">
+              <a:defRPr sz="900" b="0">
                 <a:solidFill>
                   <a:srgbClr val="5C6672"/>
                 </a:solidFill>
@@ -15315,7 +15315,7 @@
               </a:defRPr>
             </a:pPr>
             <a:r>
-              <a:t>ROS 2 Jazzy · Gazebo Harmonic · M22 · 따라 하기형 AGV 실습</a:t>
+              <a:t>ROS 2 기반 AGV End-to-End 개발 커리큘럼 · M22 · Block F</a:t>
             </a:r>
           </a:p>
         </p:txBody>
@@ -15778,7 +15778,7 @@
               <a:spcAft>
                 <a:spcPts val="0"/>
               </a:spcAft>
-              <a:defRPr sz="1000" b="0">
+              <a:defRPr sz="900" b="0">
                 <a:solidFill>
                   <a:srgbClr val="5C6672"/>
                 </a:solidFill>
@@ -15786,7 +15786,7 @@
               </a:defRPr>
             </a:pPr>
             <a:r>
-              <a:t>ROS 2 Jazzy · Gazebo Harmonic · M22 · 따라 하기형 AGV 실습</a:t>
+              <a:t>ROS 2 기반 AGV End-to-End 개발 커리큘럼 · M22 · Block F</a:t>
             </a:r>
           </a:p>
         </p:txBody>
@@ -16252,7 +16252,7 @@
               <a:spcAft>
                 <a:spcPts val="0"/>
               </a:spcAft>
-              <a:defRPr sz="1000" b="0">
+              <a:defRPr sz="900" b="0">
                 <a:solidFill>
                   <a:srgbClr val="5C6672"/>
                 </a:solidFill>
@@ -16260,7 +16260,7 @@
               </a:defRPr>
             </a:pPr>
             <a:r>
-              <a:t>ROS 2 Jazzy · Gazebo Harmonic · M22 · 따라 하기형 AGV 실습</a:t>
+              <a:t>ROS 2 기반 AGV End-to-End 개발 커리큘럼 · M22 · Block F</a:t>
             </a:r>
           </a:p>
         </p:txBody>
@@ -16726,7 +16726,7 @@
               <a:spcAft>
                 <a:spcPts val="0"/>
               </a:spcAft>
-              <a:defRPr sz="1000" b="0">
+              <a:defRPr sz="900" b="0">
                 <a:solidFill>
                   <a:srgbClr val="5C6672"/>
                 </a:solidFill>
@@ -16734,7 +16734,7 @@
               </a:defRPr>
             </a:pPr>
             <a:r>
-              <a:t>ROS 2 Jazzy · Gazebo Harmonic · M22 · 따라 하기형 AGV 실습</a:t>
+              <a:t>ROS 2 기반 AGV End-to-End 개발 커리큘럼 · M22 · Block F</a:t>
             </a:r>
           </a:p>
         </p:txBody>
@@ -17160,7 +17160,7 @@
               <a:spcAft>
                 <a:spcPts val="0"/>
               </a:spcAft>
-              <a:defRPr sz="1000" b="0">
+              <a:defRPr sz="900" b="0">
                 <a:solidFill>
                   <a:srgbClr val="5C6672"/>
                 </a:solidFill>
@@ -17168,7 +17168,7 @@
               </a:defRPr>
             </a:pPr>
             <a:r>
-              <a:t>ROS 2 Jazzy · Gazebo Harmonic · M22 · 따라 하기형 AGV 실습</a:t>
+              <a:t>ROS 2 기반 AGV End-to-End 개발 커리큘럼 · M22 · Block F</a:t>
             </a:r>
           </a:p>
         </p:txBody>
@@ -17621,7 +17621,7 @@
               <a:spcAft>
                 <a:spcPts val="0"/>
               </a:spcAft>
-              <a:defRPr sz="1000" b="0">
+              <a:defRPr sz="900" b="0">
                 <a:solidFill>
                   <a:srgbClr val="5C6672"/>
                 </a:solidFill>
@@ -17629,7 +17629,7 @@
               </a:defRPr>
             </a:pPr>
             <a:r>
-              <a:t>ROS 2 Jazzy · Gazebo Harmonic · M22 · 따라 하기형 AGV 실습</a:t>
+              <a:t>ROS 2 기반 AGV End-to-End 개발 커리큘럼 · M22 · Block F</a:t>
             </a:r>
           </a:p>
         </p:txBody>
@@ -18149,7 +18149,7 @@
               <a:spcAft>
                 <a:spcPts val="0"/>
               </a:spcAft>
-              <a:defRPr sz="1000" b="0">
+              <a:defRPr sz="900" b="0">
                 <a:solidFill>
                   <a:srgbClr val="5C6672"/>
                 </a:solidFill>
@@ -18157,7 +18157,7 @@
               </a:defRPr>
             </a:pPr>
             <a:r>
-              <a:t>ROS 2 Jazzy · Gazebo Harmonic · M22 · 따라 하기형 AGV 실습</a:t>
+              <a:t>ROS 2 기반 AGV End-to-End 개발 커리큘럼 · M22 · Block F</a:t>
             </a:r>
           </a:p>
         </p:txBody>
@@ -18938,7 +18938,7 @@
               <a:spcAft>
                 <a:spcPts val="0"/>
               </a:spcAft>
-              <a:defRPr sz="1000" b="0">
+              <a:defRPr sz="900" b="0">
                 <a:solidFill>
                   <a:srgbClr val="5C6672"/>
                 </a:solidFill>
@@ -18946,7 +18946,7 @@
               </a:defRPr>
             </a:pPr>
             <a:r>
-              <a:t>ROS 2 Jazzy · Gazebo Harmonic · M22 · 따라 하기형 AGV 실습</a:t>
+              <a:t>ROS 2 기반 AGV End-to-End 개발 커리큘럼 · M22 · Block F</a:t>
             </a:r>
           </a:p>
         </p:txBody>
@@ -19507,7 +19507,7 @@
               <a:spcAft>
                 <a:spcPts val="0"/>
               </a:spcAft>
-              <a:defRPr sz="1000" b="0">
+              <a:defRPr sz="900" b="0">
                 <a:solidFill>
                   <a:srgbClr val="5C6672"/>
                 </a:solidFill>
@@ -19515,7 +19515,7 @@
               </a:defRPr>
             </a:pPr>
             <a:r>
-              <a:t>ROS 2 Jazzy · Gazebo Harmonic · M22 · 따라 하기형 AGV 실습</a:t>
+              <a:t>ROS 2 기반 AGV End-to-End 개발 커리큘럼 · M22 · Block F</a:t>
             </a:r>
           </a:p>
         </p:txBody>
@@ -19981,7 +19981,7 @@
               <a:spcAft>
                 <a:spcPts val="0"/>
               </a:spcAft>
-              <a:defRPr sz="1000" b="0">
+              <a:defRPr sz="900" b="0">
                 <a:solidFill>
                   <a:srgbClr val="5C6672"/>
                 </a:solidFill>
@@ -19989,7 +19989,7 @@
               </a:defRPr>
             </a:pPr>
             <a:r>
-              <a:t>ROS 2 Jazzy · Gazebo Harmonic · M22 · 따라 하기형 AGV 실습</a:t>
+              <a:t>ROS 2 기반 AGV End-to-End 개발 커리큘럼 · M22 · Block F</a:t>
             </a:r>
           </a:p>
         </p:txBody>
@@ -20411,7 +20411,7 @@
               <a:spcAft>
                 <a:spcPts val="0"/>
               </a:spcAft>
-              <a:defRPr sz="1000" b="0">
+              <a:defRPr sz="900" b="0">
                 <a:solidFill>
                   <a:srgbClr val="5C6672"/>
                 </a:solidFill>
@@ -20419,7 +20419,7 @@
               </a:defRPr>
             </a:pPr>
             <a:r>
-              <a:t>ROS 2 Jazzy · Gazebo Harmonic · M22 · 따라 하기형 AGV 실습</a:t>
+              <a:t>ROS 2 기반 AGV End-to-End 개발 커리큘럼 · M22 · Block F</a:t>
             </a:r>
           </a:p>
         </p:txBody>
@@ -20939,7 +20939,7 @@
               <a:spcAft>
                 <a:spcPts val="0"/>
               </a:spcAft>
-              <a:defRPr sz="1000" b="0">
+              <a:defRPr sz="900" b="0">
                 <a:solidFill>
                   <a:srgbClr val="5C6672"/>
                 </a:solidFill>
@@ -20947,7 +20947,7 @@
               </a:defRPr>
             </a:pPr>
             <a:r>
-              <a:t>ROS 2 Jazzy · Gazebo Harmonic · M22 · 따라 하기형 AGV 실습</a:t>
+              <a:t>ROS 2 기반 AGV End-to-End 개발 커리큘럼 · M22 · Block F</a:t>
             </a:r>
           </a:p>
         </p:txBody>
@@ -21732,7 +21732,7 @@
               <a:spcAft>
                 <a:spcPts val="0"/>
               </a:spcAft>
-              <a:defRPr sz="1000" b="0">
+              <a:defRPr sz="900" b="0">
                 <a:solidFill>
                   <a:srgbClr val="5C6672"/>
                 </a:solidFill>
@@ -21740,7 +21740,7 @@
               </a:defRPr>
             </a:pPr>
             <a:r>
-              <a:t>ROS 2 Jazzy · Gazebo Harmonic · M22 · 따라 하기형 AGV 실습</a:t>
+              <a:t>ROS 2 기반 AGV End-to-End 개발 커리큘럼 · M22 · Block F</a:t>
             </a:r>
           </a:p>
         </p:txBody>
@@ -22521,7 +22521,7 @@
               <a:spcAft>
                 <a:spcPts val="0"/>
               </a:spcAft>
-              <a:defRPr sz="1000" b="0">
+              <a:defRPr sz="900" b="0">
                 <a:solidFill>
                   <a:srgbClr val="5C6672"/>
                 </a:solidFill>
@@ -22529,7 +22529,7 @@
               </a:defRPr>
             </a:pPr>
             <a:r>
-              <a:t>ROS 2 Jazzy · Gazebo Harmonic · M22 · 따라 하기형 AGV 실습</a:t>
+              <a:t>ROS 2 기반 AGV End-to-End 개발 커리큘럼 · M22 · Block F</a:t>
             </a:r>
           </a:p>
         </p:txBody>
@@ -23310,7 +23310,7 @@
               <a:spcAft>
                 <a:spcPts val="0"/>
               </a:spcAft>
-              <a:defRPr sz="1000" b="0">
+              <a:defRPr sz="900" b="0">
                 <a:solidFill>
                   <a:srgbClr val="5C6672"/>
                 </a:solidFill>
@@ -23318,7 +23318,7 @@
               </a:defRPr>
             </a:pPr>
             <a:r>
-              <a:t>ROS 2 Jazzy · Gazebo Harmonic · M22 · 따라 하기형 AGV 실습</a:t>
+              <a:t>ROS 2 기반 AGV End-to-End 개발 커리큘럼 · M22 · Block F</a:t>
             </a:r>
           </a:p>
         </p:txBody>
@@ -23784,7 +23784,7 @@
               <a:spcAft>
                 <a:spcPts val="0"/>
               </a:spcAft>
-              <a:defRPr sz="1000" b="0">
+              <a:defRPr sz="900" b="0">
                 <a:solidFill>
                   <a:srgbClr val="5C6672"/>
                 </a:solidFill>
@@ -23792,7 +23792,7 @@
               </a:defRPr>
             </a:pPr>
             <a:r>
-              <a:t>ROS 2 Jazzy · Gazebo Harmonic · M22 · 따라 하기형 AGV 실습</a:t>
+              <a:t>ROS 2 기반 AGV End-to-End 개발 커리큘럼 · M22 · Block F</a:t>
             </a:r>
           </a:p>
         </p:txBody>
@@ -24203,7 +24203,7 @@
               <a:spcAft>
                 <a:spcPts val="0"/>
               </a:spcAft>
-              <a:defRPr sz="1000" b="0">
+              <a:defRPr sz="900" b="0">
                 <a:solidFill>
                   <a:srgbClr val="5C6672"/>
                 </a:solidFill>
@@ -24211,7 +24211,7 @@
               </a:defRPr>
             </a:pPr>
             <a:r>
-              <a:t>ROS 2 Jazzy · Gazebo Harmonic · M22 · 따라 하기형 AGV 실습</a:t>
+              <a:t>ROS 2 기반 AGV End-to-End 개발 커리큘럼 · M22 · Block F</a:t>
             </a:r>
           </a:p>
         </p:txBody>
@@ -24677,7 +24677,7 @@
               <a:spcAft>
                 <a:spcPts val="0"/>
               </a:spcAft>
-              <a:defRPr sz="1000" b="0">
+              <a:defRPr sz="900" b="0">
                 <a:solidFill>
                   <a:srgbClr val="5C6672"/>
                 </a:solidFill>
@@ -24685,7 +24685,7 @@
               </a:defRPr>
             </a:pPr>
             <a:r>
-              <a:t>ROS 2 Jazzy · Gazebo Harmonic · M22 · 따라 하기형 AGV 실습</a:t>
+              <a:t>ROS 2 기반 AGV End-to-End 개발 커리큘럼 · M22 · Block F</a:t>
             </a:r>
           </a:p>
         </p:txBody>
@@ -25151,7 +25151,7 @@
               <a:spcAft>
                 <a:spcPts val="0"/>
               </a:spcAft>
-              <a:defRPr sz="1000" b="0">
+              <a:defRPr sz="900" b="0">
                 <a:solidFill>
                   <a:srgbClr val="5C6672"/>
                 </a:solidFill>
@@ -25159,7 +25159,7 @@
               </a:defRPr>
             </a:pPr>
             <a:r>
-              <a:t>ROS 2 Jazzy · Gazebo Harmonic · M22 · 따라 하기형 AGV 실습</a:t>
+              <a:t>ROS 2 기반 AGV End-to-End 개발 커리큘럼 · M22 · Block F</a:t>
             </a:r>
           </a:p>
         </p:txBody>
@@ -25625,7 +25625,7 @@
               <a:spcAft>
                 <a:spcPts val="0"/>
               </a:spcAft>
-              <a:defRPr sz="1000" b="0">
+              <a:defRPr sz="900" b="0">
                 <a:solidFill>
                   <a:srgbClr val="5C6672"/>
                 </a:solidFill>
@@ -25633,7 +25633,7 @@
               </a:defRPr>
             </a:pPr>
             <a:r>
-              <a:t>ROS 2 Jazzy · Gazebo Harmonic · M22 · 따라 하기형 AGV 실습</a:t>
+              <a:t>ROS 2 기반 AGV End-to-End 개발 커리큘럼 · M22 · Block F</a:t>
             </a:r>
           </a:p>
         </p:txBody>
@@ -26099,7 +26099,7 @@
               <a:spcAft>
                 <a:spcPts val="0"/>
               </a:spcAft>
-              <a:defRPr sz="1000" b="0">
+              <a:defRPr sz="900" b="0">
                 <a:solidFill>
                   <a:srgbClr val="5C6672"/>
                 </a:solidFill>
@@ -26107,7 +26107,7 @@
               </a:defRPr>
             </a:pPr>
             <a:r>
-              <a:t>ROS 2 Jazzy · Gazebo Harmonic · M22 · 따라 하기형 AGV 실습</a:t>
+              <a:t>ROS 2 기반 AGV End-to-End 개발 커리큘럼 · M22 · Block F</a:t>
             </a:r>
           </a:p>
         </p:txBody>
@@ -26573,7 +26573,7 @@
               <a:spcAft>
                 <a:spcPts val="0"/>
               </a:spcAft>
-              <a:defRPr sz="1000" b="0">
+              <a:defRPr sz="900" b="0">
                 <a:solidFill>
                   <a:srgbClr val="5C6672"/>
                 </a:solidFill>
@@ -26581,7 +26581,7 @@
               </a:defRPr>
             </a:pPr>
             <a:r>
-              <a:t>ROS 2 Jazzy · Gazebo Harmonic · M22 · 따라 하기형 AGV 실습</a:t>
+              <a:t>ROS 2 기반 AGV End-to-End 개발 커리큘럼 · M22 · Block F</a:t>
             </a:r>
           </a:p>
         </p:txBody>
@@ -27047,7 +27047,7 @@
               <a:spcAft>
                 <a:spcPts val="0"/>
               </a:spcAft>
-              <a:defRPr sz="1000" b="0">
+              <a:defRPr sz="900" b="0">
                 <a:solidFill>
                   <a:srgbClr val="5C6672"/>
                 </a:solidFill>
@@ -27055,7 +27055,7 @@
               </a:defRPr>
             </a:pPr>
             <a:r>
-              <a:t>ROS 2 Jazzy · Gazebo Harmonic · M22 · 따라 하기형 AGV 실습</a:t>
+              <a:t>ROS 2 기반 AGV End-to-End 개발 커리큘럼 · M22 · Block F</a:t>
             </a:r>
           </a:p>
         </p:txBody>
@@ -27521,7 +27521,7 @@
               <a:spcAft>
                 <a:spcPts val="0"/>
               </a:spcAft>
-              <a:defRPr sz="1000" b="0">
+              <a:defRPr sz="900" b="0">
                 <a:solidFill>
                   <a:srgbClr val="5C6672"/>
                 </a:solidFill>
@@ -27529,7 +27529,7 @@
               </a:defRPr>
             </a:pPr>
             <a:r>
-              <a:t>ROS 2 Jazzy · Gazebo Harmonic · M22 · 따라 하기형 AGV 실습</a:t>
+              <a:t>ROS 2 기반 AGV End-to-End 개발 커리큘럼 · M22 · Block F</a:t>
             </a:r>
           </a:p>
         </p:txBody>
@@ -27995,7 +27995,7 @@
               <a:spcAft>
                 <a:spcPts val="0"/>
               </a:spcAft>
-              <a:defRPr sz="1000" b="0">
+              <a:defRPr sz="900" b="0">
                 <a:solidFill>
                   <a:srgbClr val="5C6672"/>
                 </a:solidFill>
@@ -28003,7 +28003,7 @@
               </a:defRPr>
             </a:pPr>
             <a:r>
-              <a:t>ROS 2 Jazzy · Gazebo Harmonic · M22 · 따라 하기형 AGV 실습</a:t>
+              <a:t>ROS 2 기반 AGV End-to-End 개발 커리큘럼 · M22 · Block F</a:t>
             </a:r>
           </a:p>
         </p:txBody>
@@ -28469,7 +28469,7 @@
               <a:spcAft>
                 <a:spcPts val="0"/>
               </a:spcAft>
-              <a:defRPr sz="1000" b="0">
+              <a:defRPr sz="900" b="0">
                 <a:solidFill>
                   <a:srgbClr val="5C6672"/>
                 </a:solidFill>
@@ -28477,7 +28477,7 @@
               </a:defRPr>
             </a:pPr>
             <a:r>
-              <a:t>ROS 2 Jazzy · Gazebo Harmonic · M22 · 따라 하기형 AGV 실습</a:t>
+              <a:t>ROS 2 기반 AGV End-to-End 개발 커리큘럼 · M22 · Block F</a:t>
             </a:r>
           </a:p>
         </p:txBody>
@@ -28936,7 +28936,7 @@
               <a:spcAft>
                 <a:spcPts val="0"/>
               </a:spcAft>
-              <a:defRPr sz="1000" b="0">
+              <a:defRPr sz="900" b="0">
                 <a:solidFill>
                   <a:srgbClr val="5C6672"/>
                 </a:solidFill>
@@ -28944,7 +28944,7 @@
               </a:defRPr>
             </a:pPr>
             <a:r>
-              <a:t>ROS 2 Jazzy · Gazebo Harmonic · M22 · 따라 하기형 AGV 실습</a:t>
+              <a:t>ROS 2 기반 AGV End-to-End 개발 커리큘럼 · M22 · Block F</a:t>
             </a:r>
           </a:p>
         </p:txBody>
@@ -29269,7 +29269,7 @@
               <a:spcAft>
                 <a:spcPts val="0"/>
               </a:spcAft>
-              <a:defRPr sz="1000" b="0">
+              <a:defRPr sz="900" b="0">
                 <a:solidFill>
                   <a:srgbClr val="5C6672"/>
                 </a:solidFill>
@@ -29277,7 +29277,7 @@
               </a:defRPr>
             </a:pPr>
             <a:r>
-              <a:t>ROS 2 Jazzy · Gazebo Harmonic · M22 · 따라 하기형 AGV 실습</a:t>
+              <a:t>ROS 2 기반 AGV End-to-End 개발 커리큘럼 · M22 · Block F</a:t>
             </a:r>
           </a:p>
         </p:txBody>
@@ -29797,7 +29797,7 @@
               <a:spcAft>
                 <a:spcPts val="0"/>
               </a:spcAft>
-              <a:defRPr sz="1000" b="0">
+              <a:defRPr sz="900" b="0">
                 <a:solidFill>
                   <a:srgbClr val="5C6672"/>
                 </a:solidFill>
@@ -29805,7 +29805,7 @@
               </a:defRPr>
             </a:pPr>
             <a:r>
-              <a:t>ROS 2 Jazzy · Gazebo Harmonic · M22 · 따라 하기형 AGV 실습</a:t>
+              <a:t>ROS 2 기반 AGV End-to-End 개발 커리큘럼 · M22 · Block F</a:t>
             </a:r>
           </a:p>
         </p:txBody>
@@ -30586,7 +30586,7 @@
               <a:spcAft>
                 <a:spcPts val="0"/>
               </a:spcAft>
-              <a:defRPr sz="1000" b="0">
+              <a:defRPr sz="900" b="0">
                 <a:solidFill>
                   <a:srgbClr val="5C6672"/>
                 </a:solidFill>
@@ -30594,7 +30594,7 @@
               </a:defRPr>
             </a:pPr>
             <a:r>
-              <a:t>ROS 2 Jazzy · Gazebo Harmonic · M22 · 따라 하기형 AGV 실습</a:t>
+              <a:t>ROS 2 기반 AGV End-to-End 개발 커리큘럼 · M22 · Block F</a:t>
             </a:r>
           </a:p>
         </p:txBody>
@@ -31375,7 +31375,7 @@
               <a:spcAft>
                 <a:spcPts val="0"/>
               </a:spcAft>
-              <a:defRPr sz="1000" b="0">
+              <a:defRPr sz="900" b="0">
                 <a:solidFill>
                   <a:srgbClr val="5C6672"/>
                 </a:solidFill>
@@ -31383,7 +31383,7 @@
               </a:defRPr>
             </a:pPr>
             <a:r>
-              <a:t>ROS 2 Jazzy · Gazebo Harmonic · M22 · 따라 하기형 AGV 실습</a:t>
+              <a:t>ROS 2 기반 AGV End-to-End 개발 커리큘럼 · M22 · Block F</a:t>
             </a:r>
           </a:p>
         </p:txBody>
@@ -32172,7 +32172,7 @@
               <a:spcAft>
                 <a:spcPts val="0"/>
               </a:spcAft>
-              <a:defRPr sz="1000" b="0">
+              <a:defRPr sz="900" b="0">
                 <a:solidFill>
                   <a:srgbClr val="5C6672"/>
                 </a:solidFill>
@@ -32180,7 +32180,7 @@
               </a:defRPr>
             </a:pPr>
             <a:r>
-              <a:t>ROS 2 Jazzy · Gazebo Harmonic · M22 · 따라 하기형 AGV 실습</a:t>
+              <a:t>ROS 2 기반 AGV End-to-End 개발 커리큘럼 · M22 · Block F</a:t>
             </a:r>
           </a:p>
         </p:txBody>
@@ -32961,7 +32961,7 @@
               <a:spcAft>
                 <a:spcPts val="0"/>
               </a:spcAft>
-              <a:defRPr sz="1000" b="0">
+              <a:defRPr sz="900" b="0">
                 <a:solidFill>
                   <a:srgbClr val="5C6672"/>
                 </a:solidFill>
@@ -32969,7 +32969,7 @@
               </a:defRPr>
             </a:pPr>
             <a:r>
-              <a:t>ROS 2 Jazzy · Gazebo Harmonic · M22 · 따라 하기형 AGV 실습</a:t>
+              <a:t>ROS 2 기반 AGV End-to-End 개발 커리큘럼 · M22 · Block F</a:t>
             </a:r>
           </a:p>
         </p:txBody>
@@ -33530,7 +33530,7 @@
               <a:spcAft>
                 <a:spcPts val="0"/>
               </a:spcAft>
-              <a:defRPr sz="1000" b="0">
+              <a:defRPr sz="900" b="0">
                 <a:solidFill>
                   <a:srgbClr val="5C6672"/>
                 </a:solidFill>
@@ -33538,7 +33538,7 @@
               </a:defRPr>
             </a:pPr>
             <a:r>
-              <a:t>ROS 2 Jazzy · Gazebo Harmonic · M22 · 따라 하기형 AGV 실습</a:t>
+              <a:t>ROS 2 기반 AGV End-to-End 개발 커리큘럼 · M22 · Block F</a:t>
             </a:r>
           </a:p>
         </p:txBody>
@@ -33998,7 +33998,7 @@
               <a:spcAft>
                 <a:spcPts val="0"/>
               </a:spcAft>
-              <a:defRPr sz="1000" b="0">
+              <a:defRPr sz="900" b="0">
                 <a:solidFill>
                   <a:srgbClr val="5C6672"/>
                 </a:solidFill>
@@ -34006,7 +34006,7 @@
               </a:defRPr>
             </a:pPr>
             <a:r>
-              <a:t>ROS 2 Jazzy · Gazebo Harmonic · M22 · 따라 하기형 AGV 실습</a:t>
+              <a:t>ROS 2 기반 AGV End-to-End 개발 커리큘럼 · M22 · Block F</a:t>
             </a:r>
           </a:p>
         </p:txBody>
@@ -34472,7 +34472,7 @@
               <a:spcAft>
                 <a:spcPts val="0"/>
               </a:spcAft>
-              <a:defRPr sz="1000" b="0">
+              <a:defRPr sz="900" b="0">
                 <a:solidFill>
                   <a:srgbClr val="5C6672"/>
                 </a:solidFill>
@@ -34480,7 +34480,7 @@
               </a:defRPr>
             </a:pPr>
             <a:r>
-              <a:t>ROS 2 Jazzy · Gazebo Harmonic · M22 · 따라 하기형 AGV 실습</a:t>
+              <a:t>ROS 2 기반 AGV End-to-End 개발 커리큘럼 · M22 · Block F</a:t>
             </a:r>
           </a:p>
         </p:txBody>
@@ -34937,7 +34937,7 @@
               <a:spcAft>
                 <a:spcPts val="0"/>
               </a:spcAft>
-              <a:defRPr sz="1000" b="0">
+              <a:defRPr sz="900" b="0">
                 <a:solidFill>
                   <a:srgbClr val="5C6672"/>
                 </a:solidFill>
@@ -34945,7 +34945,7 @@
               </a:defRPr>
             </a:pPr>
             <a:r>
-              <a:t>ROS 2 Jazzy · Gazebo Harmonic · M22 · 따라 하기형 AGV 실습</a:t>
+              <a:t>ROS 2 기반 AGV End-to-End 개발 커리큘럼 · M22 · Block F</a:t>
             </a:r>
           </a:p>
         </p:txBody>
@@ -35408,7 +35408,7 @@
               <a:spcAft>
                 <a:spcPts val="0"/>
               </a:spcAft>
-              <a:defRPr sz="1000" b="0">
+              <a:defRPr sz="900" b="0">
                 <a:solidFill>
                   <a:srgbClr val="5C6672"/>
                 </a:solidFill>
@@ -35416,7 +35416,7 @@
               </a:defRPr>
             </a:pPr>
             <a:r>
-              <a:t>ROS 2 Jazzy · Gazebo Harmonic · M22 · 따라 하기형 AGV 실습</a:t>
+              <a:t>ROS 2 기반 AGV End-to-End 개발 커리큘럼 · M22 · Block F</a:t>
             </a:r>
           </a:p>
         </p:txBody>
@@ -36048,7 +36048,7 @@
               <a:spcAft>
                 <a:spcPts val="0"/>
               </a:spcAft>
-              <a:defRPr sz="1000" b="0">
+              <a:defRPr sz="900" b="0">
                 <a:solidFill>
                   <a:srgbClr val="5C6672"/>
                 </a:solidFill>
@@ -36056,7 +36056,7 @@
               </a:defRPr>
             </a:pPr>
             <a:r>
-              <a:t>ROS 2 Jazzy · Gazebo Harmonic · M22 · 따라 하기형 AGV 실습</a:t>
+              <a:t>ROS 2 기반 AGV End-to-End 개발 커리큘럼 · M22 · Block F</a:t>
             </a:r>
           </a:p>
         </p:txBody>
@@ -36522,7 +36522,7 @@
               <a:spcAft>
                 <a:spcPts val="0"/>
               </a:spcAft>
-              <a:defRPr sz="1000" b="0">
+              <a:defRPr sz="900" b="0">
                 <a:solidFill>
                   <a:srgbClr val="5C6672"/>
                 </a:solidFill>
@@ -36530,7 +36530,7 @@
               </a:defRPr>
             </a:pPr>
             <a:r>
-              <a:t>ROS 2 Jazzy · Gazebo Harmonic · M22 · 따라 하기형 AGV 실습</a:t>
+              <a:t>ROS 2 기반 AGV End-to-End 개발 커리큘럼 · M22 · Block F</a:t>
             </a:r>
           </a:p>
         </p:txBody>
@@ -36993,7 +36993,7 @@
               <a:spcAft>
                 <a:spcPts val="0"/>
               </a:spcAft>
-              <a:defRPr sz="1000" b="0">
+              <a:defRPr sz="900" b="0">
                 <a:solidFill>
                   <a:srgbClr val="5C6672"/>
                 </a:solidFill>
@@ -37001,7 +37001,7 @@
               </a:defRPr>
             </a:pPr>
             <a:r>
-              <a:t>ROS 2 Jazzy · Gazebo Harmonic · M22 · 따라 하기형 AGV 실습</a:t>
+              <a:t>ROS 2 기반 AGV End-to-End 개발 커리큘럼 · M22 · Block F</a:t>
             </a:r>
           </a:p>
         </p:txBody>
@@ -37427,7 +37427,7 @@
               <a:spcAft>
                 <a:spcPts val="0"/>
               </a:spcAft>
-              <a:defRPr sz="1000" b="0">
+              <a:defRPr sz="900" b="0">
                 <a:solidFill>
                   <a:srgbClr val="5C6672"/>
                 </a:solidFill>
@@ -37435,7 +37435,7 @@
               </a:defRPr>
             </a:pPr>
             <a:r>
-              <a:t>ROS 2 Jazzy · Gazebo Harmonic · M22 · 따라 하기형 AGV 실습</a:t>
+              <a:t>ROS 2 기반 AGV End-to-End 개발 커리큘럼 · M22 · Block F</a:t>
             </a:r>
           </a:p>
         </p:txBody>
@@ -37955,7 +37955,7 @@
               <a:spcAft>
                 <a:spcPts val="0"/>
               </a:spcAft>
-              <a:defRPr sz="1000" b="0">
+              <a:defRPr sz="900" b="0">
                 <a:solidFill>
                   <a:srgbClr val="5C6672"/>
                 </a:solidFill>
@@ -37963,7 +37963,7 @@
               </a:defRPr>
             </a:pPr>
             <a:r>
-              <a:t>ROS 2 Jazzy · Gazebo Harmonic · M22 · 따라 하기형 AGV 실습</a:t>
+              <a:t>ROS 2 기반 AGV End-to-End 개발 커리큘럼 · M22 · Block F</a:t>
             </a:r>
           </a:p>
         </p:txBody>
@@ -38744,7 +38744,7 @@
               <a:spcAft>
                 <a:spcPts val="0"/>
               </a:spcAft>
-              <a:defRPr sz="1000" b="0">
+              <a:defRPr sz="900" b="0">
                 <a:solidFill>
                   <a:srgbClr val="5C6672"/>
                 </a:solidFill>
@@ -38752,7 +38752,7 @@
               </a:defRPr>
             </a:pPr>
             <a:r>
-              <a:t>ROS 2 Jazzy · Gazebo Harmonic · M22 · 따라 하기형 AGV 실습</a:t>
+              <a:t>ROS 2 기반 AGV End-to-End 개발 커리큘럼 · M22 · Block F</a:t>
             </a:r>
           </a:p>
         </p:txBody>
@@ -39533,7 +39533,7 @@
               <a:spcAft>
                 <a:spcPts val="0"/>
               </a:spcAft>
-              <a:defRPr sz="1000" b="0">
+              <a:defRPr sz="900" b="0">
                 <a:solidFill>
                   <a:srgbClr val="5C6672"/>
                 </a:solidFill>
@@ -39541,7 +39541,7 @@
               </a:defRPr>
             </a:pPr>
             <a:r>
-              <a:t>ROS 2 Jazzy · Gazebo Harmonic · M22 · 따라 하기형 AGV 실습</a:t>
+              <a:t>ROS 2 기반 AGV End-to-End 개발 커리큘럼 · M22 · Block F</a:t>
             </a:r>
           </a:p>
         </p:txBody>
@@ -40330,7 +40330,7 @@
               <a:spcAft>
                 <a:spcPts val="0"/>
               </a:spcAft>
-              <a:defRPr sz="1000" b="0">
+              <a:defRPr sz="900" b="0">
                 <a:solidFill>
                   <a:srgbClr val="5C6672"/>
                 </a:solidFill>
@@ -40338,7 +40338,7 @@
               </a:defRPr>
             </a:pPr>
             <a:r>
-              <a:t>ROS 2 Jazzy · Gazebo Harmonic · M22 · 따라 하기형 AGV 실습</a:t>
+              <a:t>ROS 2 기반 AGV End-to-End 개발 커리큘럼 · M22 · Block F</a:t>
             </a:r>
           </a:p>
         </p:txBody>
@@ -41123,7 +41123,7 @@
               <a:spcAft>
                 <a:spcPts val="0"/>
               </a:spcAft>
-              <a:defRPr sz="1000" b="0">
+              <a:defRPr sz="900" b="0">
                 <a:solidFill>
                   <a:srgbClr val="5C6672"/>
                 </a:solidFill>
@@ -41131,7 +41131,7 @@
               </a:defRPr>
             </a:pPr>
             <a:r>
-              <a:t>ROS 2 Jazzy · Gazebo Harmonic · M22 · 따라 하기형 AGV 실습</a:t>
+              <a:t>ROS 2 기반 AGV End-to-End 개발 커리큘럼 · M22 · Block F</a:t>
             </a:r>
           </a:p>
         </p:txBody>
@@ -41696,7 +41696,7 @@
               <a:spcAft>
                 <a:spcPts val="0"/>
               </a:spcAft>
-              <a:defRPr sz="1000" b="0">
+              <a:defRPr sz="900" b="0">
                 <a:solidFill>
                   <a:srgbClr val="5C6672"/>
                 </a:solidFill>
@@ -41704,7 +41704,7 @@
               </a:defRPr>
             </a:pPr>
             <a:r>
-              <a:t>ROS 2 Jazzy · Gazebo Harmonic · M22 · 따라 하기형 AGV 실습</a:t>
+              <a:t>ROS 2 기반 AGV End-to-End 개발 커리큘럼 · M22 · Block F</a:t>
             </a:r>
           </a:p>
         </p:txBody>
@@ -42164,7 +42164,7 @@
               <a:spcAft>
                 <a:spcPts val="0"/>
               </a:spcAft>
-              <a:defRPr sz="1000" b="0">
+              <a:defRPr sz="900" b="0">
                 <a:solidFill>
                   <a:srgbClr val="5C6672"/>
                 </a:solidFill>
@@ -42172,7 +42172,7 @@
               </a:defRPr>
             </a:pPr>
             <a:r>
-              <a:t>ROS 2 Jazzy · Gazebo Harmonic · M22 · 따라 하기형 AGV 실습</a:t>
+              <a:t>ROS 2 기반 AGV End-to-End 개발 커리큘럼 · M22 · Block F</a:t>
             </a:r>
           </a:p>
         </p:txBody>
@@ -42401,7 +42401,7 @@
               <a:spcAft>
                 <a:spcPts val="0"/>
               </a:spcAft>
-              <a:defRPr sz="1000" b="0">
+              <a:defRPr sz="900" b="0">
                 <a:solidFill>
                   <a:srgbClr val="5C6672"/>
                 </a:solidFill>
@@ -42409,7 +42409,7 @@
               </a:defRPr>
             </a:pPr>
             <a:r>
-              <a:t>ROS 2 Jazzy · Gazebo Harmonic · M22 · 따라 하기형 AGV 실습</a:t>
+              <a:t>ROS 2 기반 AGV End-to-End 개발 커리큘럼 · M22 · Block F</a:t>
             </a:r>
           </a:p>
         </p:txBody>
@@ -42869,7 +42869,7 @@
               <a:spcAft>
                 <a:spcPts val="0"/>
               </a:spcAft>
-              <a:defRPr sz="1000" b="0">
+              <a:defRPr sz="900" b="0">
                 <a:solidFill>
                   <a:srgbClr val="5C6672"/>
                 </a:solidFill>
@@ -42877,7 +42877,7 @@
               </a:defRPr>
             </a:pPr>
             <a:r>
-              <a:t>ROS 2 Jazzy · Gazebo Harmonic · M22 · 따라 하기형 AGV 실습</a:t>
+              <a:t>ROS 2 기반 AGV End-to-End 개발 커리큘럼 · M22 · Block F</a:t>
             </a:r>
           </a:p>
         </p:txBody>
@@ -43340,7 +43340,7 @@
               <a:spcAft>
                 <a:spcPts val="0"/>
               </a:spcAft>
-              <a:defRPr sz="1000" b="0">
+              <a:defRPr sz="900" b="0">
                 <a:solidFill>
                   <a:srgbClr val="5C6672"/>
                 </a:solidFill>
@@ -43348,7 +43348,7 @@
               </a:defRPr>
             </a:pPr>
             <a:r>
-              <a:t>ROS 2 Jazzy · Gazebo Harmonic · M22 · 따라 하기형 AGV 실습</a:t>
+              <a:t>ROS 2 기반 AGV End-to-End 개발 커리큘럼 · M22 · Block F</a:t>
             </a:r>
           </a:p>
         </p:txBody>
@@ -43794,7 +43794,7 @@
               <a:spcAft>
                 <a:spcPts val="0"/>
               </a:spcAft>
-              <a:defRPr sz="1000" b="0">
+              <a:defRPr sz="900" b="0">
                 <a:solidFill>
                   <a:srgbClr val="5C6672"/>
                 </a:solidFill>
@@ -43802,7 +43802,7 @@
               </a:defRPr>
             </a:pPr>
             <a:r>
-              <a:t>ROS 2 Jazzy · Gazebo Harmonic · M22 · 따라 하기형 AGV 실습</a:t>
+              <a:t>ROS 2 기반 AGV End-to-End 개발 커리큘럼 · M22 · Block F</a:t>
             </a:r>
           </a:p>
         </p:txBody>
@@ -44252,7 +44252,7 @@
               <a:spcAft>
                 <a:spcPts val="0"/>
               </a:spcAft>
-              <a:defRPr sz="1000" b="0">
+              <a:defRPr sz="900" b="0">
                 <a:solidFill>
                   <a:srgbClr val="5C6672"/>
                 </a:solidFill>
@@ -44260,7 +44260,7 @@
               </a:defRPr>
             </a:pPr>
             <a:r>
-              <a:t>ROS 2 Jazzy · Gazebo Harmonic · M22 · 따라 하기형 AGV 실습</a:t>
+              <a:t>ROS 2 기반 AGV End-to-End 개발 커리큘럼 · M22 · Block F</a:t>
             </a:r>
           </a:p>
         </p:txBody>
@@ -44698,7 +44698,7 @@
               <a:spcAft>
                 <a:spcPts val="0"/>
               </a:spcAft>
-              <a:defRPr sz="1000" b="0">
+              <a:defRPr sz="900" b="0">
                 <a:solidFill>
                   <a:srgbClr val="5C6672"/>
                 </a:solidFill>
@@ -44706,7 +44706,7 @@
               </a:defRPr>
             </a:pPr>
             <a:r>
-              <a:t>ROS 2 Jazzy · Gazebo Harmonic · M22 · 따라 하기형 AGV 실습</a:t>
+              <a:t>ROS 2 기반 AGV End-to-End 개발 커리큘럼 · M22 · Block F</a:t>
             </a:r>
           </a:p>
         </p:txBody>
@@ -45152,7 +45152,7 @@
               <a:spcAft>
                 <a:spcPts val="0"/>
               </a:spcAft>
-              <a:defRPr sz="1000" b="0">
+              <a:defRPr sz="900" b="0">
                 <a:solidFill>
                   <a:srgbClr val="5C6672"/>
                 </a:solidFill>
@@ -45160,7 +45160,7 @@
               </a:defRPr>
             </a:pPr>
             <a:r>
-              <a:t>ROS 2 Jazzy · Gazebo Harmonic · M22 · 따라 하기형 AGV 실습</a:t>
+              <a:t>ROS 2 기반 AGV End-to-End 개발 커리큘럼 · M22 · Block F</a:t>
             </a:r>
           </a:p>
         </p:txBody>
@@ -45524,7 +45524,7 @@
               <a:spcAft>
                 <a:spcPts val="0"/>
               </a:spcAft>
-              <a:defRPr sz="1000" b="0">
+              <a:defRPr sz="900" b="0">
                 <a:solidFill>
                   <a:srgbClr val="5C6672"/>
                 </a:solidFill>
@@ -45532,7 +45532,7 @@
               </a:defRPr>
             </a:pPr>
             <a:r>
-              <a:t>ROS 2 Jazzy · Gazebo Harmonic · M22 · 따라 하기형 AGV 실습</a:t>
+              <a:t>ROS 2 기반 AGV End-to-End 개발 커리큘럼 · M22 · Block F</a:t>
             </a:r>
           </a:p>
         </p:txBody>
@@ -45761,7 +45761,7 @@
               <a:spcAft>
                 <a:spcPts val="0"/>
               </a:spcAft>
-              <a:defRPr sz="1000" b="0">
+              <a:defRPr sz="900" b="0">
                 <a:solidFill>
                   <a:srgbClr val="5C6672"/>
                 </a:solidFill>
@@ -45769,7 +45769,7 @@
               </a:defRPr>
             </a:pPr>
             <a:r>
-              <a:t>ROS 2 Jazzy · Gazebo Harmonic · M22 · 따라 하기형 AGV 실습</a:t>
+              <a:t>ROS 2 기반 AGV End-to-End 개발 커리큘럼 · M22 · Block F</a:t>
             </a:r>
           </a:p>
         </p:txBody>
@@ -46168,7 +46168,7 @@
               <a:spcAft>
                 <a:spcPts val="0"/>
               </a:spcAft>
-              <a:defRPr sz="1000" b="0">
+              <a:defRPr sz="900" b="0">
                 <a:solidFill>
                   <a:srgbClr val="5C6672"/>
                 </a:solidFill>
@@ -46176,7 +46176,7 @@
               </a:defRPr>
             </a:pPr>
             <a:r>
-              <a:t>ROS 2 Jazzy · Gazebo Harmonic · M22 · 따라 하기형 AGV 실습</a:t>
+              <a:t>ROS 2 기반 AGV End-to-End 개발 커리큘럼 · M22 · Block F</a:t>
             </a:r>
           </a:p>
         </p:txBody>
@@ -46824,7 +46824,7 @@
               <a:spcAft>
                 <a:spcPts val="0"/>
               </a:spcAft>
-              <a:defRPr sz="1000" b="0">
+              <a:defRPr sz="900" b="0">
                 <a:solidFill>
                   <a:srgbClr val="5C6672"/>
                 </a:solidFill>
@@ -46832,7 +46832,7 @@
               </a:defRPr>
             </a:pPr>
             <a:r>
-              <a:t>ROS 2 Jazzy · Gazebo Harmonic · M22 · 따라 하기형 AGV 실습</a:t>
+              <a:t>ROS 2 기반 AGV End-to-End 개발 커리큘럼 · M22 · Block F</a:t>
             </a:r>
           </a:p>
         </p:txBody>
@@ -47467,7 +47467,7 @@
               <a:spcAft>
                 <a:spcPts val="0"/>
               </a:spcAft>
-              <a:defRPr sz="1000" b="0">
+              <a:defRPr sz="900" b="0">
                 <a:solidFill>
                   <a:srgbClr val="5C6672"/>
                 </a:solidFill>
@@ -47475,7 +47475,7 @@
               </a:defRPr>
             </a:pPr>
             <a:r>
-              <a:t>ROS 2 Jazzy · Gazebo Harmonic · M22 · 따라 하기형 AGV 실습</a:t>
+              <a:t>ROS 2 기반 AGV End-to-End 개발 커리큘럼 · M22 · Block F</a:t>
             </a:r>
           </a:p>
         </p:txBody>
@@ -47851,7 +47851,7 @@
               <a:spcAft>
                 <a:spcPts val="0"/>
               </a:spcAft>
-              <a:defRPr sz="1000" b="0">
+              <a:defRPr sz="900" b="0">
                 <a:solidFill>
                   <a:srgbClr val="5C6672"/>
                 </a:solidFill>
@@ -47859,7 +47859,7 @@
               </a:defRPr>
             </a:pPr>
             <a:r>
-              <a:t>ROS 2 Jazzy · Gazebo Harmonic · M22 · 따라 하기형 AGV 실습</a:t>
+              <a:t>ROS 2 기반 AGV End-to-End 개발 커리큘럼 · M22 · Block F</a:t>
             </a:r>
           </a:p>
         </p:txBody>
@@ -48180,7 +48180,7 @@
               <a:spcAft>
                 <a:spcPts val="0"/>
               </a:spcAft>
-              <a:defRPr sz="1000" b="0">
+              <a:defRPr sz="900" b="0">
                 <a:solidFill>
                   <a:srgbClr val="5C6672"/>
                 </a:solidFill>
@@ -48188,7 +48188,7 @@
               </a:defRPr>
             </a:pPr>
             <a:r>
-              <a:t>ROS 2 Jazzy · Gazebo Harmonic · M22 · 따라 하기형 AGV 실습</a:t>
+              <a:t>ROS 2 기반 AGV End-to-End 개발 커리큘럼 · M22 · Block F</a:t>
             </a:r>
           </a:p>
         </p:txBody>
@@ -48560,7 +48560,7 @@
               <a:spcAft>
                 <a:spcPts val="0"/>
               </a:spcAft>
-              <a:defRPr sz="1000" b="0">
+              <a:defRPr sz="900" b="0">
                 <a:solidFill>
                   <a:srgbClr val="5C6672"/>
                 </a:solidFill>
@@ -48568,7 +48568,7 @@
               </a:defRPr>
             </a:pPr>
             <a:r>
-              <a:t>ROS 2 Jazzy · Gazebo Harmonic · M22 · 따라 하기형 AGV 실습</a:t>
+              <a:t>ROS 2 기반 AGV End-to-End 개발 커리큘럼 · M22 · Block F</a:t>
             </a:r>
           </a:p>
         </p:txBody>
@@ -48940,7 +48940,7 @@
               <a:spcAft>
                 <a:spcPts val="0"/>
               </a:spcAft>
-              <a:defRPr sz="1000" b="0">
+              <a:defRPr sz="900" b="0">
                 <a:solidFill>
                   <a:srgbClr val="5C6672"/>
                 </a:solidFill>
@@ -48948,7 +48948,7 @@
               </a:defRPr>
             </a:pPr>
             <a:r>
-              <a:t>ROS 2 Jazzy · Gazebo Harmonic · M22 · 따라 하기형 AGV 실습</a:t>
+              <a:t>ROS 2 기반 AGV End-to-End 개발 커리큘럼 · M22 · Block F</a:t>
             </a:r>
           </a:p>
         </p:txBody>
@@ -49288,7 +49288,7 @@
               <a:spcAft>
                 <a:spcPts val="0"/>
               </a:spcAft>
-              <a:defRPr sz="1000" b="0">
+              <a:defRPr sz="900" b="0">
                 <a:solidFill>
                   <a:srgbClr val="5C6672"/>
                 </a:solidFill>
@@ -49296,7 +49296,7 @@
               </a:defRPr>
             </a:pPr>
             <a:r>
-              <a:t>ROS 2 Jazzy · Gazebo Harmonic · M22 · 따라 하기형 AGV 실습</a:t>
+              <a:t>ROS 2 기반 AGV End-to-End 개발 커리큘럼 · M22 · Block F</a:t>
             </a:r>
           </a:p>
         </p:txBody>
@@ -49668,7 +49668,7 @@
               <a:spcAft>
                 <a:spcPts val="0"/>
               </a:spcAft>
-              <a:defRPr sz="1000" b="0">
+              <a:defRPr sz="900" b="0">
                 <a:solidFill>
                   <a:srgbClr val="5C6672"/>
                 </a:solidFill>
@@ -49676,7 +49676,7 @@
               </a:defRPr>
             </a:pPr>
             <a:r>
-              <a:t>ROS 2 Jazzy · Gazebo Harmonic · M22 · 따라 하기형 AGV 실습</a:t>
+              <a:t>ROS 2 기반 AGV End-to-End 개발 커리큘럼 · M22 · Block F</a:t>
             </a:r>
           </a:p>
         </p:txBody>
@@ -50087,7 +50087,7 @@
               <a:spcAft>
                 <a:spcPts val="0"/>
               </a:spcAft>
-              <a:defRPr sz="1000" b="0">
+              <a:defRPr sz="900" b="0">
                 <a:solidFill>
                   <a:srgbClr val="5C6672"/>
                 </a:solidFill>
@@ -50095,7 +50095,7 @@
               </a:defRPr>
             </a:pPr>
             <a:r>
-              <a:t>ROS 2 Jazzy · Gazebo Harmonic · M22 · 따라 하기형 AGV 실습</a:t>
+              <a:t>ROS 2 기반 AGV End-to-End 개발 커리큘럼 · M22 · Block F</a:t>
             </a:r>
           </a:p>
         </p:txBody>
@@ -50618,7 +50618,7 @@
               <a:spcAft>
                 <a:spcPts val="0"/>
               </a:spcAft>
-              <a:defRPr sz="1000" b="0">
+              <a:defRPr sz="900" b="0">
                 <a:solidFill>
                   <a:srgbClr val="5C6672"/>
                 </a:solidFill>
@@ -50626,7 +50626,7 @@
               </a:defRPr>
             </a:pPr>
             <a:r>
-              <a:t>ROS 2 Jazzy · Gazebo Harmonic · M22 · 따라 하기형 AGV 실습</a:t>
+              <a:t>ROS 2 기반 AGV End-to-End 개발 커리큘럼 · M22 · Block F</a:t>
             </a:r>
           </a:p>
         </p:txBody>
@@ -50909,7 +50909,7 @@
               <a:spcAft>
                 <a:spcPts val="0"/>
               </a:spcAft>
-              <a:defRPr sz="1000" b="0">
+              <a:defRPr sz="900" b="0">
                 <a:solidFill>
                   <a:srgbClr val="5C6672"/>
                 </a:solidFill>
@@ -50917,7 +50917,7 @@
               </a:defRPr>
             </a:pPr>
             <a:r>
-              <a:t>ROS 2 Jazzy · Gazebo Harmonic · M22 · 따라 하기형 AGV 실습</a:t>
+              <a:t>ROS 2 기반 AGV End-to-End 개발 커리큘럼 · M22 · Block F</a:t>
             </a:r>
           </a:p>
         </p:txBody>

--- a/blocks/F_integration/M22_final_project/M22_Final_Project_가상_AGV_자율_미션.pptx
+++ b/blocks/F_integration/M22_final_project/M22_Final_Project_가상_AGV_자율_미션.pptx
@@ -82,6 +82,7 @@
     <p:sldId id="330" r:id="rId82"/>
     <p:sldId id="331" r:id="rId83"/>
     <p:sldId id="332" r:id="rId84"/>
+    <p:sldId id="333" r:id="rId85"/>
   </p:sldIdLst>
   <p:sldSz cx="12191999" cy="6858000" type="screen4x3"/>
   <p:notesSz cx="6858000" cy="9144000"/>
@@ -6313,7 +6314,7 @@
           </a:p>
           <a:p>
             <a:r>
-              <a:t>[확인] ① 명령/설정  ② 정상 출력 또는 화면  ③ 다음 검증 명령으로 재확인</a:t>
+              <a:t>[확인] 명령·설정과 화면의 topic·frame·결과 이름을 대조합니다.</a:t>
             </a:r>
           </a:p>
           <a:p>
@@ -6393,27 +6394,17 @@
           <a:lstStyle/>
           <a:p>
             <a:r>
-              <a:t>[설명] 검증 명령은 GUI 결과와 별도로 실행해 재현 가능한 완료 기준을 만든다.</a:t>
-            </a:r>
-          </a:p>
-          <a:p>
-            <a:r>
-              <a:t>[실행] ros2 launch agv_bringup agv_sim.launch.py --show-args</a:t>
-            </a:r>
-          </a:p>
-          <a:p>
-            <a:r>
-              <a:t>ros2 node list</a:t>
-            </a:r>
-          </a:p>
-          <a:p>
-            <a:r>
-              <a:t>ros2 topic list | rg '/scan|/imu/data|/odom|/camera/image_raw|/cmd_vel'</a:t>
-            </a:r>
-          </a:p>
-          <a:p>
-            <a:r>
-              <a:t>[확인] 한 launch 실행, RViz/Gazebo 확인, mission log, rosbag 기록을 제출 체크리스트로 남긴다.</a:t>
+              <a:t>[설명] 실제 Ubuntu/ROS 2 환경에서 생성한 검증 화면이다.</a:t>
+            </a:r>
+          </a:p>
+          <a:p>
+            <a:r>
+              <a:t>[실행] 슬라이드의 명령 또는 파일 작성 단계를 진행한다.</a:t>
+            </a:r>
+          </a:p>
+          <a:p>
+            <a:r>
+              <a:t>[확인] ① 명령/설정  ② 정상 출력 또는 화면  ③ 다음 검증 명령으로 재확인</a:t>
             </a:r>
           </a:p>
           <a:p>
@@ -6493,17 +6484,27 @@
           <a:lstStyle/>
           <a:p>
             <a:r>
-              <a:t>[설명] 오류를 대신 해결하지 말고 증상부터 우선 확인 순서대로 교육생이 실행하게 한다.</a:t>
-            </a:r>
-          </a:p>
-          <a:p>
-            <a:r>
-              <a:t>[실행] 슬라이드의 명령 또는 파일 작성 단계를 진행한다.</a:t>
-            </a:r>
-          </a:p>
-          <a:p>
-            <a:r>
-              <a:t>[확인] 수정 뒤 첫 검증 명령을 다시 실행한다.</a:t>
+              <a:t>[설명] 검증 명령은 GUI 결과와 별도로 실행해 재현 가능한 완료 기준을 만든다.</a:t>
+            </a:r>
+          </a:p>
+          <a:p>
+            <a:r>
+              <a:t>[실행] ros2 launch agv_bringup agv_sim.launch.py --show-args</a:t>
+            </a:r>
+          </a:p>
+          <a:p>
+            <a:r>
+              <a:t>ros2 node list</a:t>
+            </a:r>
+          </a:p>
+          <a:p>
+            <a:r>
+              <a:t>ros2 topic list | rg '/scan|/imu/data|/odom|/camera/image_raw|/cmd_vel'</a:t>
+            </a:r>
+          </a:p>
+          <a:p>
+            <a:r>
+              <a:t>[확인] 한 launch 실행, RViz/Gazebo 확인, mission log, rosbag 기록을 제출 체크리스트로 남긴다.</a:t>
             </a:r>
           </a:p>
           <a:p>
@@ -6513,7 +6514,7 @@
           </a:p>
           <a:p>
             <a:r>
-              <a:t>[오류] 슬라이드의 두 대표 오류를 먼저 사용한다.</a:t>
+              <a:t>[오류] 오류가 나면 현재 폴더, source, 파일 경로를 먼저 확인한다.</a:t>
             </a:r>
           </a:p>
         </p:txBody>
@@ -6673,37 +6674,17 @@
           <a:lstStyle/>
           <a:p>
             <a:r>
-              <a:t>[설명] Complete는 정답 복사본이 아니라 막혔을 때 비교·복구하는 안전망이다.</a:t>
-            </a:r>
-          </a:p>
-          <a:p>
-            <a:r>
-              <a:t>[실행] cd ~/ros2_curri</a:t>
-            </a:r>
-          </a:p>
-          <a:p>
-            <a:r>
-              <a:t>diff -ru my_agv_ws/src blocks/F_integration/M22_final_project/complete/agv_ws/src || true</a:t>
-            </a:r>
-          </a:p>
-          <a:p>
-            <a:r>
-              <a:t>cp -a my_agv_ws/src my_agv_ws/src_before_M22</a:t>
-            </a:r>
-          </a:p>
-          <a:p>
-            <a:r>
-              <a:t>cp -a blocks/F_integration/M22_final_project/complete/agv_ws/src/. my_agv_ws/src/</a:t>
-            </a:r>
-          </a:p>
-          <a:p>
-            <a:r>
-              <a:t>cd my_agv_ws &amp;&amp; colcon build --symlink-install &amp;&amp; source install/setup.bash</a:t>
-            </a:r>
-          </a:p>
-          <a:p>
-            <a:r>
-              <a:t>[확인] diff에서 내 파일과 Complete의 차이를 설명할 수 있다.</a:t>
+              <a:t>[설명] 오류를 대신 해결하지 말고 증상부터 우선 확인 순서대로 교육생이 실행하게 한다.</a:t>
+            </a:r>
+          </a:p>
+          <a:p>
+            <a:r>
+              <a:t>[실행] 슬라이드의 명령 또는 파일 작성 단계를 진행한다.</a:t>
+            </a:r>
+          </a:p>
+          <a:p>
+            <a:r>
+              <a:t>[확인] 수정 뒤 첫 검증 명령을 다시 실행한다.</a:t>
             </a:r>
           </a:p>
           <a:p>
@@ -6713,7 +6694,7 @@
           </a:p>
           <a:p>
             <a:r>
-              <a:t>[오류] 오류가 나면 현재 폴더, source, 파일 경로를 먼저 확인한다.</a:t>
+              <a:t>[오류] 슬라이드의 두 대표 오류를 먼저 사용한다.</a:t>
             </a:r>
           </a:p>
         </p:txBody>
@@ -6783,17 +6764,37 @@
           <a:lstStyle/>
           <a:p>
             <a:r>
-              <a:t>[설명] 교육생이 직접 한 값만 바꿔 원인과 결과를 연결하게 한다.</a:t>
-            </a:r>
-          </a:p>
-          <a:p>
-            <a:r>
-              <a:t>[실행] 슬라이드의 명령 또는 파일 작성 단계를 진행한다.</a:t>
-            </a:r>
-          </a:p>
-          <a:p>
-            <a:r>
-              <a:t>[확인] 원래 값과 변경 값을 모두 기록한다.</a:t>
+              <a:t>[설명] Complete는 정답 복사본이 아니라 막혔을 때 비교·복구하는 안전망이다.</a:t>
+            </a:r>
+          </a:p>
+          <a:p>
+            <a:r>
+              <a:t>[실행] cd ~/ros2_curri</a:t>
+            </a:r>
+          </a:p>
+          <a:p>
+            <a:r>
+              <a:t>diff -ru my_agv_ws/src blocks/F_integration/M22_final_project/complete/agv_ws/src || true</a:t>
+            </a:r>
+          </a:p>
+          <a:p>
+            <a:r>
+              <a:t>cp -a my_agv_ws/src my_agv_ws/src_before_M22</a:t>
+            </a:r>
+          </a:p>
+          <a:p>
+            <a:r>
+              <a:t>cp -a blocks/F_integration/M22_final_project/complete/agv_ws/src/. my_agv_ws/src/</a:t>
+            </a:r>
+          </a:p>
+          <a:p>
+            <a:r>
+              <a:t>cd my_agv_ws &amp;&amp; colcon build --symlink-install &amp;&amp; source install/setup.bash</a:t>
+            </a:r>
+          </a:p>
+          <a:p>
+            <a:r>
+              <a:t>[확인] diff에서 내 파일과 Complete의 차이를 설명할 수 있다.</a:t>
             </a:r>
           </a:p>
           <a:p>
@@ -6873,7 +6874,7 @@
           <a:lstStyle/>
           <a:p>
             <a:r>
-              <a:t>[설명] 최종 미션 시나리오</a:t>
+              <a:t>[설명] 교육생이 직접 한 값만 바꿔 원인과 결과를 연결하게 한다.</a:t>
             </a:r>
           </a:p>
           <a:p>
@@ -6883,7 +6884,7 @@
           </a:p>
           <a:p>
             <a:r>
-              <a:t>[확인] 각 항목이 현재 시스템의 어느 package/topic/file과 연결되는지 확인한다.</a:t>
+              <a:t>[확인] 원래 값과 변경 값을 모두 기록한다.</a:t>
             </a:r>
           </a:p>
           <a:p>
@@ -6963,7 +6964,7 @@
           <a:lstStyle/>
           <a:p>
             <a:r>
-              <a:t>[설명] 최종 기능 체크표</a:t>
+              <a:t>[설명] 최종 미션 시나리오</a:t>
             </a:r>
           </a:p>
           <a:p>
@@ -7053,7 +7054,7 @@
           <a:lstStyle/>
           <a:p>
             <a:r>
-              <a:t>[설명] Milestone 1~8 제출 증거</a:t>
+              <a:t>[설명] 최종 기능 체크표</a:t>
             </a:r>
           </a:p>
           <a:p>
@@ -7143,7 +7144,7 @@
           <a:lstStyle/>
           <a:p>
             <a:r>
-              <a:t>[설명] 실패를 재현 가능하게 기록한다</a:t>
+              <a:t>[설명] Milestone 1~8 제출 증거</a:t>
             </a:r>
           </a:p>
           <a:p>
@@ -7233,7 +7234,7 @@
           <a:lstStyle/>
           <a:p>
             <a:r>
-              <a:t>[설명] 교육생이 자신의 workspace·캡처·로그를 저장했는지 확인하고 다음 모듈의 시작 상태를 읽는다.</a:t>
+              <a:t>[설명] 실패를 재현 가능하게 기록한다</a:t>
             </a:r>
           </a:p>
           <a:p>
@@ -7243,7 +7244,7 @@
           </a:p>
           <a:p>
             <a:r>
-              <a:t>[확인] 핵심 과정 완료 → SLAM/Nav2 확장 시작 조건을 말할 수 있다.</a:t>
+              <a:t>[확인] 각 항목이 현재 시스템의 어느 package/topic/file과 연결되는지 확인한다.</a:t>
             </a:r>
           </a:p>
           <a:p>
@@ -7279,6 +7280,96 @@
 </file>
 
 <file path=ppt/notesSlides/notesSlide77.xml><?xml version="1.0" encoding="utf-8"?>
+<p:notes xmlns:a="http://schemas.openxmlformats.org/drawingml/2006/main" xmlns:p="http://schemas.openxmlformats.org/presentationml/2006/main" xmlns:r="http://schemas.openxmlformats.org/officeDocument/2006/relationships">
+  <p:cSld>
+    <p:spTree>
+      <p:nvGrpSpPr>
+        <p:cNvPr id="1" name=""/>
+        <p:cNvGrpSpPr/>
+        <p:nvPr/>
+      </p:nvGrpSpPr>
+      <p:grpSpPr>
+        <a:xfrm>
+          <a:off x="0" y="0"/>
+          <a:ext cx="0" cy="0"/>
+          <a:chOff x="0" y="0"/>
+          <a:chExt cx="0" cy="0"/>
+        </a:xfrm>
+      </p:grpSpPr>
+      <p:sp>
+        <p:nvSpPr>
+          <p:cNvPr id="2" name="Slide Image Placeholder 1"/>
+          <p:cNvSpPr>
+            <a:spLocks noGrp="1"/>
+          </p:cNvSpPr>
+          <p:nvPr>
+            <p:ph type="sldImg" idx="2"/>
+          </p:nvPr>
+        </p:nvSpPr>
+        <p:spPr/>
+      </p:sp>
+      <p:sp>
+        <p:nvSpPr>
+          <p:cNvPr id="3" name="Notes Placeholder 2"/>
+          <p:cNvSpPr>
+            <a:spLocks noGrp="1"/>
+          </p:cNvSpPr>
+          <p:nvPr>
+            <p:ph type="body" idx="3" sz="quarter"/>
+          </p:nvPr>
+        </p:nvSpPr>
+        <p:spPr/>
+        <p:txBody>
+          <a:bodyPr/>
+          <a:lstStyle/>
+          <a:p>
+            <a:r>
+              <a:t>[설명] 교육생이 자신의 workspace·캡처·로그를 저장했는지 확인하고 다음 모듈의 시작 상태를 읽는다.</a:t>
+            </a:r>
+          </a:p>
+          <a:p>
+            <a:r>
+              <a:t>[실행] 슬라이드의 명령 또는 파일 작성 단계를 진행한다.</a:t>
+            </a:r>
+          </a:p>
+          <a:p>
+            <a:r>
+              <a:t>[확인] 핵심 과정 완료 → SLAM/Nav2 확장 시작 조건을 말할 수 있다.</a:t>
+            </a:r>
+          </a:p>
+          <a:p>
+            <a:r>
+              <a:t>[멈춤] 교육생이 현재 체크포인트를 통과할 때까지 기다린다.</a:t>
+            </a:r>
+          </a:p>
+          <a:p>
+            <a:r>
+              <a:t>[오류] 오류가 나면 현재 폴더, source, 파일 경로를 먼저 확인한다.</a:t>
+            </a:r>
+          </a:p>
+        </p:txBody>
+      </p:sp>
+      <p:sp>
+        <p:nvSpPr>
+          <p:cNvPr id="4" name="Slide Number Placeholder 3"/>
+          <p:cNvSpPr>
+            <a:spLocks noGrp="1"/>
+          </p:cNvSpPr>
+          <p:nvPr>
+            <p:ph type="sldNum" idx="5" sz="quarter"/>
+          </p:nvPr>
+        </p:nvSpPr>
+        <p:spPr/>
+      </p:sp>
+    </p:spTree>
+  </p:cSld>
+  <p:clrMapOvr>
+    <a:masterClrMapping/>
+  </p:clrMapOvr>
+</p:notes>
+</file>
+
+<file path=ppt/notesSlides/notesSlide78.xml><?xml version="1.0" encoding="utf-8"?>
 <p:notes xmlns:a="http://schemas.openxmlformats.org/drawingml/2006/main" xmlns:p="http://schemas.openxmlformats.org/presentationml/2006/main" xmlns:r="http://schemas.openxmlformats.org/officeDocument/2006/relationships">
   <p:cSld>
     <p:spTree>
@@ -12700,7 +12791,7 @@
           </a:fontRef>
         </p:style>
         <p:txBody>
-          <a:bodyPr rtlCol="0" anchor="ctr" wrap="square" lIns="73152" rIns="73152" tIns="36576" bIns="36576"/>
+          <a:bodyPr rtlCol="0" anchor="ctr" wrap="square" lIns="109728" rIns="109728" tIns="73152" bIns="73152"/>
           <a:lstStyle/>
           <a:p>
             <a:pPr algn="l">
@@ -12717,7 +12808,19 @@
             <a:r>
               <a:t>mkdir -p ~/ros2_curri/my_agv_ws/src/agv_bringup/launch</a:t>
             </a:r>
-            <a:br/>
+          </a:p>
+          <a:p>
+            <a:pPr algn="l">
+              <a:spcAft>
+                <a:spcPts val="0"/>
+              </a:spcAft>
+              <a:defRPr sz="1600" b="0">
+                <a:solidFill>
+                  <a:srgbClr val="FFFFFF"/>
+                </a:solidFill>
+                <a:latin typeface="DejaVu Sans Mono"/>
+              </a:defRPr>
+            </a:pPr>
             <a:r>
               <a:t>nano ~/ros2_curri/my_agv_ws/src/agv_bringup/launch/agv_sim.launch.py</a:t>
             </a:r>
@@ -15556,7 +15659,7 @@
           </a:fontRef>
         </p:style>
         <p:txBody>
-          <a:bodyPr rtlCol="0" anchor="ctr" wrap="square" lIns="164592" rIns="164592" tIns="109728" bIns="36576"/>
+          <a:bodyPr rtlCol="0" anchor="ctr" wrap="square" lIns="164592" rIns="164592" tIns="109728" bIns="73152"/>
           <a:lstStyle/>
           <a:p>
             <a:pPr algn="l">
@@ -15573,44 +15676,176 @@
             <a:r>
               <a:t>import os</a:t>
             </a:r>
-            <a:br/>
+          </a:p>
+          <a:p>
+            <a:pPr algn="l">
+              <a:spcAft>
+                <a:spcPts val="0"/>
+              </a:spcAft>
+              <a:defRPr sz="1400" b="0">
+                <a:solidFill>
+                  <a:srgbClr val="FFFFFF"/>
+                </a:solidFill>
+                <a:latin typeface="DejaVu Sans Mono"/>
+              </a:defRPr>
+            </a:pPr>
             <a:r>
               <a:t>from ament_index_python.packages import get_package_share_directory</a:t>
             </a:r>
-            <a:br/>
+          </a:p>
+          <a:p>
+            <a:pPr algn="l">
+              <a:spcAft>
+                <a:spcPts val="0"/>
+              </a:spcAft>
+              <a:defRPr sz="1400" b="0">
+                <a:solidFill>
+                  <a:srgbClr val="FFFFFF"/>
+                </a:solidFill>
+                <a:latin typeface="DejaVu Sans Mono"/>
+              </a:defRPr>
+            </a:pPr>
             <a:r>
               <a:t>from launch import LaunchDescription</a:t>
             </a:r>
-            <a:br/>
+          </a:p>
+          <a:p>
+            <a:pPr algn="l">
+              <a:spcAft>
+                <a:spcPts val="0"/>
+              </a:spcAft>
+              <a:defRPr sz="1400" b="0">
+                <a:solidFill>
+                  <a:srgbClr val="FFFFFF"/>
+                </a:solidFill>
+                <a:latin typeface="DejaVu Sans Mono"/>
+              </a:defRPr>
+            </a:pPr>
             <a:r>
               <a:t>from launch.actions import DeclareLaunchArgument, IncludeLaunchDescription</a:t>
             </a:r>
-            <a:br/>
+          </a:p>
+          <a:p>
+            <a:pPr algn="l">
+              <a:spcAft>
+                <a:spcPts val="0"/>
+              </a:spcAft>
+              <a:defRPr sz="1400" b="0">
+                <a:solidFill>
+                  <a:srgbClr val="FFFFFF"/>
+                </a:solidFill>
+                <a:latin typeface="DejaVu Sans Mono"/>
+              </a:defRPr>
+            </a:pPr>
             <a:r>
               <a:t>from launch.conditions import IfCondition</a:t>
             </a:r>
-            <a:br/>
+          </a:p>
+          <a:p>
+            <a:pPr algn="l">
+              <a:spcAft>
+                <a:spcPts val="0"/>
+              </a:spcAft>
+              <a:defRPr sz="1400" b="0">
+                <a:solidFill>
+                  <a:srgbClr val="FFFFFF"/>
+                </a:solidFill>
+                <a:latin typeface="DejaVu Sans Mono"/>
+              </a:defRPr>
+            </a:pPr>
             <a:r>
               <a:t>from launch.launch_description_sources import PythonLaunchDescriptionSource</a:t>
             </a:r>
-            <a:br/>
+          </a:p>
+          <a:p>
+            <a:pPr algn="l">
+              <a:spcAft>
+                <a:spcPts val="0"/>
+              </a:spcAft>
+              <a:defRPr sz="1400" b="0">
+                <a:solidFill>
+                  <a:srgbClr val="FFFFFF"/>
+                </a:solidFill>
+                <a:latin typeface="DejaVu Sans Mono"/>
+              </a:defRPr>
+            </a:pPr>
             <a:r>
               <a:t>from launch.substitutions import Command, LaunchConfiguration</a:t>
             </a:r>
-            <a:br/>
+          </a:p>
+          <a:p>
+            <a:pPr algn="l">
+              <a:spcAft>
+                <a:spcPts val="0"/>
+              </a:spcAft>
+              <a:defRPr sz="1400" b="0">
+                <a:solidFill>
+                  <a:srgbClr val="FFFFFF"/>
+                </a:solidFill>
+                <a:latin typeface="DejaVu Sans Mono"/>
+              </a:defRPr>
+            </a:pPr>
             <a:r>
               <a:t>from launch_ros.actions import Node</a:t>
             </a:r>
-            <a:br/>
+          </a:p>
+          <a:p>
+            <a:pPr algn="l">
+              <a:spcAft>
+                <a:spcPts val="0"/>
+              </a:spcAft>
+              <a:defRPr sz="1400" b="0">
+                <a:solidFill>
+                  <a:srgbClr val="FFFFFF"/>
+                </a:solidFill>
+                <a:latin typeface="DejaVu Sans Mono"/>
+              </a:defRPr>
+            </a:pPr>
             <a:r>
               <a:t>from launch_ros.parameter_descriptions import ParameterValue</a:t>
             </a:r>
-            <a:br/>
-            <a:br/>
+          </a:p>
+          <a:p>
+            <a:pPr algn="l">
+              <a:spcAft>
+                <a:spcPts val="0"/>
+              </a:spcAft>
+              <a:defRPr sz="1400" b="0">
+                <a:solidFill>
+                  <a:srgbClr val="FFFFFF"/>
+                </a:solidFill>
+                <a:latin typeface="DejaVu Sans Mono"/>
+              </a:defRPr>
+            </a:pPr>
+          </a:p>
+          <a:p>
+            <a:pPr algn="l">
+              <a:spcAft>
+                <a:spcPts val="0"/>
+              </a:spcAft>
+              <a:defRPr sz="1400" b="0">
+                <a:solidFill>
+                  <a:srgbClr val="FFFFFF"/>
+                </a:solidFill>
+                <a:latin typeface="DejaVu Sans Mono"/>
+              </a:defRPr>
+            </a:pPr>
             <a:r>
               <a:t>def generate_launch_description():</a:t>
             </a:r>
-            <a:br/>
+          </a:p>
+          <a:p>
+            <a:pPr algn="l">
+              <a:spcAft>
+                <a:spcPts val="0"/>
+              </a:spcAft>
+              <a:defRPr sz="1400" b="0">
+                <a:solidFill>
+                  <a:srgbClr val="FFFFFF"/>
+                </a:solidFill>
+                <a:latin typeface="DejaVu Sans Mono"/>
+              </a:defRPr>
+            </a:pPr>
             <a:r>
               <a:t>    bringup = get_package_share_directory('agv_bringup')</a:t>
             </a:r>
@@ -16027,7 +16262,7 @@
           </a:fontRef>
         </p:style>
         <p:txBody>
-          <a:bodyPr rtlCol="0" anchor="ctr" wrap="square" lIns="164592" rIns="164592" tIns="109728" bIns="36576"/>
+          <a:bodyPr rtlCol="0" anchor="ctr" wrap="square" lIns="164592" rIns="164592" tIns="109728" bIns="73152"/>
           <a:lstStyle/>
           <a:p>
             <a:pPr algn="l">
@@ -16044,47 +16279,179 @@
             <a:r>
               <a:t>    description = get_package_share_directory('agv_description')</a:t>
             </a:r>
-            <a:br/>
+          </a:p>
+          <a:p>
+            <a:pPr algn="l">
+              <a:spcAft>
+                <a:spcPts val="0"/>
+              </a:spcAft>
+              <a:defRPr sz="1400" b="0">
+                <a:solidFill>
+                  <a:srgbClr val="FFFFFF"/>
+                </a:solidFill>
+                <a:latin typeface="DejaVu Sans Mono"/>
+              </a:defRPr>
+            </a:pPr>
             <a:r>
               <a:t>    gazebo = get_package_share_directory('agv_gazebo')</a:t>
             </a:r>
-            <a:br/>
+          </a:p>
+          <a:p>
+            <a:pPr algn="l">
+              <a:spcAft>
+                <a:spcPts val="0"/>
+              </a:spcAft>
+              <a:defRPr sz="1400" b="0">
+                <a:solidFill>
+                  <a:srgbClr val="FFFFFF"/>
+                </a:solidFill>
+                <a:latin typeface="DejaVu Sans Mono"/>
+              </a:defRPr>
+            </a:pPr>
             <a:r>
               <a:t>    xacro_file = os.path.join(description, 'urdf', 'agv.urdf.xacro')</a:t>
             </a:r>
-            <a:br/>
+          </a:p>
+          <a:p>
+            <a:pPr algn="l">
+              <a:spcAft>
+                <a:spcPts val="0"/>
+              </a:spcAft>
+              <a:defRPr sz="1400" b="0">
+                <a:solidFill>
+                  <a:srgbClr val="FFFFFF"/>
+                </a:solidFill>
+                <a:latin typeface="DejaVu Sans Mono"/>
+              </a:defRPr>
+            </a:pPr>
             <a:r>
               <a:t>    robot_description = ParameterValue(Command(['xacro ', xacro_file]), value_type=str)</a:t>
             </a:r>
-            <a:br/>
+          </a:p>
+          <a:p>
+            <a:pPr algn="l">
+              <a:spcAft>
+                <a:spcPts val="0"/>
+              </a:spcAft>
+              <a:defRPr sz="1400" b="0">
+                <a:solidFill>
+                  <a:srgbClr val="FFFFFF"/>
+                </a:solidFill>
+                <a:latin typeface="DejaVu Sans Mono"/>
+              </a:defRPr>
+            </a:pPr>
             <a:r>
               <a:t>    return LaunchDescription([DeclareLaunchArgument('rviz', default_value='true',</a:t>
             </a:r>
-            <a:br/>
+          </a:p>
+          <a:p>
+            <a:pPr algn="l">
+              <a:spcAft>
+                <a:spcPts val="0"/>
+              </a:spcAft>
+              <a:defRPr sz="1400" b="0">
+                <a:solidFill>
+                  <a:srgbClr val="FFFFFF"/>
+                </a:solidFill>
+                <a:latin typeface="DejaVu Sans Mono"/>
+              </a:defRPr>
+            </a:pPr>
             <a:r>
               <a:t>        description='Start RViz2'), DeclareLaunchArgument('autonomy', default_value='true',</a:t>
             </a:r>
-            <a:br/>
+          </a:p>
+          <a:p>
+            <a:pPr algn="l">
+              <a:spcAft>
+                <a:spcPts val="0"/>
+              </a:spcAft>
+              <a:defRPr sz="1400" b="0">
+                <a:solidFill>
+                  <a:srgbClr val="FFFFFF"/>
+                </a:solidFill>
+                <a:latin typeface="DejaVu Sans Mono"/>
+              </a:defRPr>
+            </a:pPr>
             <a:r>
               <a:t>         description='Start mission and safety nodes'),</a:t>
             </a:r>
-            <a:br/>
+          </a:p>
+          <a:p>
+            <a:pPr algn="l">
+              <a:spcAft>
+                <a:spcPts val="0"/>
+              </a:spcAft>
+              <a:defRPr sz="1400" b="0">
+                <a:solidFill>
+                  <a:srgbClr val="FFFFFF"/>
+                </a:solidFill>
+                <a:latin typeface="DejaVu Sans Mono"/>
+              </a:defRPr>
+            </a:pPr>
             <a:r>
               <a:t>        IncludeLaunchDescription(PythonLaunchDescriptionSource(os.path.join(gazebo, 'launch',</a:t>
             </a:r>
-            <a:br/>
+          </a:p>
+          <a:p>
+            <a:pPr algn="l">
+              <a:spcAft>
+                <a:spcPts val="0"/>
+              </a:spcAft>
+              <a:defRPr sz="1400" b="0">
+                <a:solidFill>
+                  <a:srgbClr val="FFFFFF"/>
+                </a:solidFill>
+                <a:latin typeface="DejaVu Sans Mono"/>
+              </a:defRPr>
+            </a:pPr>
             <a:r>
               <a:t>         'gazebo.launch.py'))), Node(package='robot_state_publisher', executable='robot_state_publisher',</a:t>
             </a:r>
-            <a:br/>
+          </a:p>
+          <a:p>
+            <a:pPr algn="l">
+              <a:spcAft>
+                <a:spcPts val="0"/>
+              </a:spcAft>
+              <a:defRPr sz="1400" b="0">
+                <a:solidFill>
+                  <a:srgbClr val="FFFFFF"/>
+                </a:solidFill>
+                <a:latin typeface="DejaVu Sans Mono"/>
+              </a:defRPr>
+            </a:pPr>
             <a:r>
               <a:t>         parameters=[os.path.join(bringup, 'config', 'robot.yaml'),</a:t>
             </a:r>
-            <a:br/>
+          </a:p>
+          <a:p>
+            <a:pPr algn="l">
+              <a:spcAft>
+                <a:spcPts val="0"/>
+              </a:spcAft>
+              <a:defRPr sz="1400" b="0">
+                <a:solidFill>
+                  <a:srgbClr val="FFFFFF"/>
+                </a:solidFill>
+                <a:latin typeface="DejaVu Sans Mono"/>
+              </a:defRPr>
+            </a:pPr>
             <a:r>
               <a:t>        {'robot_description': robot_description}]), Node(package='agv_sensors',</a:t>
             </a:r>
-            <a:br/>
+          </a:p>
+          <a:p>
+            <a:pPr algn="l">
+              <a:spcAft>
+                <a:spcPts val="0"/>
+              </a:spcAft>
+              <a:defRPr sz="1400" b="0">
+                <a:solidFill>
+                  <a:srgbClr val="FFFFFF"/>
+                </a:solidFill>
+                <a:latin typeface="DejaVu Sans Mono"/>
+              </a:defRPr>
+            </a:pPr>
             <a:r>
               <a:t>        executable='lidar_processor', parameters=[os.path.join(bringup, 'config',</a:t>
             </a:r>
@@ -16501,7 +16868,7 @@
           </a:fontRef>
         </p:style>
         <p:txBody>
-          <a:bodyPr rtlCol="0" anchor="ctr" wrap="square" lIns="164592" rIns="164592" tIns="109728" bIns="36576"/>
+          <a:bodyPr rtlCol="0" anchor="ctr" wrap="square" lIns="164592" rIns="164592" tIns="109728" bIns="73152"/>
           <a:lstStyle/>
           <a:p>
             <a:pPr algn="l">
@@ -16518,47 +16885,179 @@
             <a:r>
               <a:t>        'sensors.yaml')]), Node(package='agv_sensors', executable='imu_monitor',</a:t>
             </a:r>
-            <a:br/>
+          </a:p>
+          <a:p>
+            <a:pPr algn="l">
+              <a:spcAft>
+                <a:spcPts val="0"/>
+              </a:spcAft>
+              <a:defRPr sz="1400" b="0">
+                <a:solidFill>
+                  <a:srgbClr val="FFFFFF"/>
+                </a:solidFill>
+                <a:latin typeface="DejaVu Sans Mono"/>
+              </a:defRPr>
+            </a:pPr>
             <a:r>
               <a:t>        parameters=[os.path.join(bringup, 'config', 'sensors.yaml')]), Node(package='agv_sensors',</a:t>
             </a:r>
-            <a:br/>
+          </a:p>
+          <a:p>
+            <a:pPr algn="l">
+              <a:spcAft>
+                <a:spcPts val="0"/>
+              </a:spcAft>
+              <a:defRPr sz="1400" b="0">
+                <a:solidFill>
+                  <a:srgbClr val="FFFFFF"/>
+                </a:solidFill>
+                <a:latin typeface="DejaVu Sans Mono"/>
+              </a:defRPr>
+            </a:pPr>
             <a:r>
               <a:t>         executable='odom_path', parameters=[{'use_sim_time': True}]), Node(package='agv_vision',</a:t>
             </a:r>
-            <a:br/>
+          </a:p>
+          <a:p>
+            <a:pPr algn="l">
+              <a:spcAft>
+                <a:spcPts val="0"/>
+              </a:spcAft>
+              <a:defRPr sz="1400" b="0">
+                <a:solidFill>
+                  <a:srgbClr val="FFFFFF"/>
+                </a:solidFill>
+                <a:latin typeface="DejaVu Sans Mono"/>
+              </a:defRPr>
+            </a:pPr>
             <a:r>
               <a:t>         executable='yolo_node', parameters=[os.path.join(bringup, 'config',</a:t>
             </a:r>
-            <a:br/>
+          </a:p>
+          <a:p>
+            <a:pPr algn="l">
+              <a:spcAft>
+                <a:spcPts val="0"/>
+              </a:spcAft>
+              <a:defRPr sz="1400" b="0">
+                <a:solidFill>
+                  <a:srgbClr val="FFFFFF"/>
+                </a:solidFill>
+                <a:latin typeface="DejaVu Sans Mono"/>
+              </a:defRPr>
+            </a:pPr>
             <a:r>
               <a:t>        'vision.yaml')]), Node(package='agv_mission', executable='mission_manager',</a:t>
             </a:r>
-            <a:br/>
+          </a:p>
+          <a:p>
+            <a:pPr algn="l">
+              <a:spcAft>
+                <a:spcPts val="0"/>
+              </a:spcAft>
+              <a:defRPr sz="1400" b="0">
+                <a:solidFill>
+                  <a:srgbClr val="FFFFFF"/>
+                </a:solidFill>
+                <a:latin typeface="DejaVu Sans Mono"/>
+              </a:defRPr>
+            </a:pPr>
             <a:r>
               <a:t>        parameters=[os.path.join(bringup, 'config', 'mission.yaml')],</a:t>
             </a:r>
-            <a:br/>
+          </a:p>
+          <a:p>
+            <a:pPr algn="l">
+              <a:spcAft>
+                <a:spcPts val="0"/>
+              </a:spcAft>
+              <a:defRPr sz="1400" b="0">
+                <a:solidFill>
+                  <a:srgbClr val="FFFFFF"/>
+                </a:solidFill>
+                <a:latin typeface="DejaVu Sans Mono"/>
+              </a:defRPr>
+            </a:pPr>
             <a:r>
               <a:t>        condition=IfCondition(LaunchConfiguration('autonomy'))), Node(package='agv_mission',</a:t>
             </a:r>
-            <a:br/>
+          </a:p>
+          <a:p>
+            <a:pPr algn="l">
+              <a:spcAft>
+                <a:spcPts val="0"/>
+              </a:spcAft>
+              <a:defRPr sz="1400" b="0">
+                <a:solidFill>
+                  <a:srgbClr val="FFFFFF"/>
+                </a:solidFill>
+                <a:latin typeface="DejaVu Sans Mono"/>
+              </a:defRPr>
+            </a:pPr>
             <a:r>
               <a:t>         executable='mission_markers', parameters=[os.path.join(bringup, 'config',</a:t>
             </a:r>
-            <a:br/>
+          </a:p>
+          <a:p>
+            <a:pPr algn="l">
+              <a:spcAft>
+                <a:spcPts val="0"/>
+              </a:spcAft>
+              <a:defRPr sz="1400" b="0">
+                <a:solidFill>
+                  <a:srgbClr val="FFFFFF"/>
+                </a:solidFill>
+                <a:latin typeface="DejaVu Sans Mono"/>
+              </a:defRPr>
+            </a:pPr>
             <a:r>
               <a:t>        'mission.yaml')], condition=IfCondition(LaunchConfiguration('autonomy'))),</a:t>
             </a:r>
-            <a:br/>
+          </a:p>
+          <a:p>
+            <a:pPr algn="l">
+              <a:spcAft>
+                <a:spcPts val="0"/>
+              </a:spcAft>
+              <a:defRPr sz="1400" b="0">
+                <a:solidFill>
+                  <a:srgbClr val="FFFFFF"/>
+                </a:solidFill>
+                <a:latin typeface="DejaVu Sans Mono"/>
+              </a:defRPr>
+            </a:pPr>
             <a:r>
               <a:t>        Node(package='agv_control', executable='safety_controller',</a:t>
             </a:r>
-            <a:br/>
+          </a:p>
+          <a:p>
+            <a:pPr algn="l">
+              <a:spcAft>
+                <a:spcPts val="0"/>
+              </a:spcAft>
+              <a:defRPr sz="1400" b="0">
+                <a:solidFill>
+                  <a:srgbClr val="FFFFFF"/>
+                </a:solidFill>
+                <a:latin typeface="DejaVu Sans Mono"/>
+              </a:defRPr>
+            </a:pPr>
             <a:r>
               <a:t>        parameters=[os.path.join(bringup, 'config', 'mission.yaml')],</a:t>
             </a:r>
-            <a:br/>
+          </a:p>
+          <a:p>
+            <a:pPr algn="l">
+              <a:spcAft>
+                <a:spcPts val="0"/>
+              </a:spcAft>
+              <a:defRPr sz="1400" b="0">
+                <a:solidFill>
+                  <a:srgbClr val="FFFFFF"/>
+                </a:solidFill>
+                <a:latin typeface="DejaVu Sans Mono"/>
+              </a:defRPr>
+            </a:pPr>
             <a:r>
               <a:t>        condition=IfCondition(LaunchConfiguration('autonomy'))), Node(package='rviz2',</a:t>
             </a:r>
@@ -16975,7 +17474,7 @@
           </a:fontRef>
         </p:style>
         <p:txBody>
-          <a:bodyPr rtlCol="0" anchor="ctr" wrap="square" lIns="164592" rIns="164592" tIns="109728" bIns="36576"/>
+          <a:bodyPr rtlCol="0" anchor="ctr" wrap="square" lIns="164592" rIns="164592" tIns="109728" bIns="73152"/>
           <a:lstStyle/>
           <a:p>
             <a:pPr algn="l">
@@ -16992,7 +17491,19 @@
             <a:r>
               <a:t>        executable='rviz2', arguments=['-d', os.path.join(description, 'rviz',</a:t>
             </a:r>
-            <a:br/>
+          </a:p>
+          <a:p>
+            <a:pPr algn="l">
+              <a:spcAft>
+                <a:spcPts val="0"/>
+              </a:spcAft>
+              <a:defRPr sz="1400" b="0">
+                <a:solidFill>
+                  <a:srgbClr val="FFFFFF"/>
+                </a:solidFill>
+                <a:latin typeface="DejaVu Sans Mono"/>
+              </a:defRPr>
+            </a:pPr>
             <a:r>
               <a:t>        'agv.rviz')], condition=IfCondition(LaunchConfiguration('rviz')))])</a:t>
             </a:r>
@@ -17925,7 +18436,7 @@
           </a:fontRef>
         </p:style>
         <p:txBody>
-          <a:bodyPr rtlCol="0" anchor="ctr" wrap="square" lIns="73152" rIns="73152" tIns="36576" bIns="36576"/>
+          <a:bodyPr rtlCol="0" anchor="ctr" wrap="square" lIns="109728" rIns="109728" tIns="73152" bIns="73152"/>
           <a:lstStyle/>
           <a:p>
             <a:pPr algn="l">
@@ -17942,7 +18453,19 @@
             <a:r>
               <a:t>mkdir -p ~/ros2_curri/my_agv_ws/src/agv_bringup/config</a:t>
             </a:r>
-            <a:br/>
+          </a:p>
+          <a:p>
+            <a:pPr algn="l">
+              <a:spcAft>
+                <a:spcPts val="0"/>
+              </a:spcAft>
+              <a:defRPr sz="1600" b="0">
+                <a:solidFill>
+                  <a:srgbClr val="FFFFFF"/>
+                </a:solidFill>
+                <a:latin typeface="DejaVu Sans Mono"/>
+              </a:defRPr>
+            </a:pPr>
             <a:r>
               <a:t>nano ~/ros2_curri/my_agv_ws/src/agv_bringup/config/mission.yaml</a:t>
             </a:r>
@@ -19756,7 +20279,7 @@
           </a:fontRef>
         </p:style>
         <p:txBody>
-          <a:bodyPr rtlCol="0" anchor="ctr" wrap="square" lIns="164592" rIns="164592" tIns="109728" bIns="36576"/>
+          <a:bodyPr rtlCol="0" anchor="ctr" wrap="square" lIns="164592" rIns="164592" tIns="109728" bIns="73152"/>
           <a:lstStyle/>
           <a:p>
             <a:pPr algn="l">
@@ -19773,47 +20296,179 @@
             <a:r>
               <a:t>mission_manager:</a:t>
             </a:r>
-            <a:br/>
+          </a:p>
+          <a:p>
+            <a:pPr algn="l">
+              <a:spcAft>
+                <a:spcPts val="0"/>
+              </a:spcAft>
+              <a:defRPr sz="1400" b="0">
+                <a:solidFill>
+                  <a:srgbClr val="FFFFFF"/>
+                </a:solidFill>
+                <a:latin typeface="DejaVu Sans Mono"/>
+              </a:defRPr>
+            </a:pPr>
             <a:r>
               <a:t>  ros__parameters:</a:t>
             </a:r>
-            <a:br/>
+          </a:p>
+          <a:p>
+            <a:pPr algn="l">
+              <a:spcAft>
+                <a:spcPts val="0"/>
+              </a:spcAft>
+              <a:defRPr sz="1400" b="0">
+                <a:solidFill>
+                  <a:srgbClr val="FFFFFF"/>
+                </a:solidFill>
+                <a:latin typeface="DejaVu Sans Mono"/>
+              </a:defRPr>
+            </a:pPr>
             <a:r>
               <a:t>    use_sim_time: true</a:t>
             </a:r>
-            <a:br/>
+          </a:p>
+          <a:p>
+            <a:pPr algn="l">
+              <a:spcAft>
+                <a:spcPts val="0"/>
+              </a:spcAft>
+              <a:defRPr sz="1400" b="0">
+                <a:solidFill>
+                  <a:srgbClr val="FFFFFF"/>
+                </a:solidFill>
+                <a:latin typeface="DejaVu Sans Mono"/>
+              </a:defRPr>
+            </a:pPr>
             <a:r>
               <a:t>    stop_distance: 0.50</a:t>
             </a:r>
-            <a:br/>
+          </a:p>
+          <a:p>
+            <a:pPr algn="l">
+              <a:spcAft>
+                <a:spcPts val="0"/>
+              </a:spcAft>
+              <a:defRPr sz="1400" b="0">
+                <a:solidFill>
+                  <a:srgbClr val="FFFFFF"/>
+                </a:solidFill>
+                <a:latin typeface="DejaVu Sans Mono"/>
+              </a:defRPr>
+            </a:pPr>
             <a:r>
               <a:t>    search_speed: 0.25</a:t>
             </a:r>
-            <a:br/>
+          </a:p>
+          <a:p>
+            <a:pPr algn="l">
+              <a:spcAft>
+                <a:spcPts val="0"/>
+              </a:spcAft>
+              <a:defRPr sz="1400" b="0">
+                <a:solidFill>
+                  <a:srgbClr val="FFFFFF"/>
+                </a:solidFill>
+                <a:latin typeface="DejaVu Sans Mono"/>
+              </a:defRPr>
+            </a:pPr>
             <a:r>
               <a:t>    approach_speed: 0.15</a:t>
             </a:r>
-            <a:br/>
+          </a:p>
+          <a:p>
+            <a:pPr algn="l">
+              <a:spcAft>
+                <a:spcPts val="0"/>
+              </a:spcAft>
+              <a:defRPr sz="1400" b="0">
+                <a:solidFill>
+                  <a:srgbClr val="FFFFFF"/>
+                </a:solidFill>
+                <a:latin typeface="DejaVu Sans Mono"/>
+              </a:defRPr>
+            </a:pPr>
             <a:r>
               <a:t>    image_center_x: 320</a:t>
             </a:r>
-            <a:br/>
+          </a:p>
+          <a:p>
+            <a:pPr algn="l">
+              <a:spcAft>
+                <a:spcPts val="0"/>
+              </a:spcAft>
+              <a:defRPr sz="1400" b="0">
+                <a:solidFill>
+                  <a:srgbClr val="FFFFFF"/>
+                </a:solidFill>
+                <a:latin typeface="DejaVu Sans Mono"/>
+              </a:defRPr>
+            </a:pPr>
             <a:r>
               <a:t>    target_timeout_sec: 0.70</a:t>
             </a:r>
-            <a:br/>
+          </a:p>
+          <a:p>
+            <a:pPr algn="l">
+              <a:spcAft>
+                <a:spcPts val="0"/>
+              </a:spcAft>
+              <a:defRPr sz="1400" b="0">
+                <a:solidFill>
+                  <a:srgbClr val="FFFFFF"/>
+                </a:solidFill>
+                <a:latin typeface="DejaVu Sans Mono"/>
+              </a:defRPr>
+            </a:pPr>
             <a:r>
               <a:t>safety_controller:</a:t>
             </a:r>
-            <a:br/>
+          </a:p>
+          <a:p>
+            <a:pPr algn="l">
+              <a:spcAft>
+                <a:spcPts val="0"/>
+              </a:spcAft>
+              <a:defRPr sz="1400" b="0">
+                <a:solidFill>
+                  <a:srgbClr val="FFFFFF"/>
+                </a:solidFill>
+                <a:latin typeface="DejaVu Sans Mono"/>
+              </a:defRPr>
+            </a:pPr>
             <a:r>
               <a:t>  ros__parameters:</a:t>
             </a:r>
-            <a:br/>
+          </a:p>
+          <a:p>
+            <a:pPr algn="l">
+              <a:spcAft>
+                <a:spcPts val="0"/>
+              </a:spcAft>
+              <a:defRPr sz="1400" b="0">
+                <a:solidFill>
+                  <a:srgbClr val="FFFFFF"/>
+                </a:solidFill>
+                <a:latin typeface="DejaVu Sans Mono"/>
+              </a:defRPr>
+            </a:pPr>
             <a:r>
               <a:t>    use_sim_time: true</a:t>
             </a:r>
-            <a:br/>
+          </a:p>
+          <a:p>
+            <a:pPr algn="l">
+              <a:spcAft>
+                <a:spcPts val="0"/>
+              </a:spcAft>
+              <a:defRPr sz="1400" b="0">
+                <a:solidFill>
+                  <a:srgbClr val="FFFFFF"/>
+                </a:solidFill>
+                <a:latin typeface="DejaVu Sans Mono"/>
+              </a:defRPr>
+            </a:pPr>
             <a:r>
               <a:t>    stop_distance: 0.50</a:t>
             </a:r>
@@ -20230,7 +20885,7 @@
           </a:fontRef>
         </p:style>
         <p:txBody>
-          <a:bodyPr rtlCol="0" anchor="ctr" wrap="square" lIns="164592" rIns="164592" tIns="109728" bIns="36576"/>
+          <a:bodyPr rtlCol="0" anchor="ctr" wrap="square" lIns="164592" rIns="164592" tIns="109728" bIns="73152"/>
           <a:lstStyle/>
           <a:p>
             <a:pPr algn="l">
@@ -20715,7 +21370,7 @@
           </a:fontRef>
         </p:style>
         <p:txBody>
-          <a:bodyPr rtlCol="0" anchor="ctr" wrap="square" lIns="73152" rIns="73152" tIns="36576" bIns="36576"/>
+          <a:bodyPr rtlCol="0" anchor="ctr" wrap="square" lIns="109728" rIns="109728" tIns="73152" bIns="73152"/>
           <a:lstStyle/>
           <a:p>
             <a:pPr algn="l">
@@ -20732,7 +21387,19 @@
             <a:r>
               <a:t>mkdir -p ~/ros2_curri/my_agv_ws/src/agv_gazebo/worlds</a:t>
             </a:r>
-            <a:br/>
+          </a:p>
+          <a:p>
+            <a:pPr algn="l">
+              <a:spcAft>
+                <a:spcPts val="0"/>
+              </a:spcAft>
+              <a:defRPr sz="1600" b="0">
+                <a:solidFill>
+                  <a:srgbClr val="FFFFFF"/>
+                </a:solidFill>
+                <a:latin typeface="DejaVu Sans Mono"/>
+              </a:defRPr>
+            </a:pPr>
             <a:r>
               <a:t>nano ~/ros2_curri/my_agv_ws/src/agv_gazebo/worlds/warehouse.sdf</a:t>
             </a:r>
@@ -23559,7 +24226,7 @@
           </a:fontRef>
         </p:style>
         <p:txBody>
-          <a:bodyPr rtlCol="0" anchor="ctr" wrap="square" lIns="164592" rIns="164592" tIns="109728" bIns="36576"/>
+          <a:bodyPr rtlCol="0" anchor="ctr" wrap="square" lIns="164592" rIns="164592" tIns="109728" bIns="73152"/>
           <a:lstStyle/>
           <a:p>
             <a:pPr algn="l">
@@ -23576,47 +24243,179 @@
             <a:r>
               <a:t>&lt;?xml version="1.0" ?&gt;</a:t>
             </a:r>
-            <a:br/>
+          </a:p>
+          <a:p>
+            <a:pPr algn="l">
+              <a:spcAft>
+                <a:spcPts val="0"/>
+              </a:spcAft>
+              <a:defRPr sz="1400" b="0">
+                <a:solidFill>
+                  <a:srgbClr val="FFFFFF"/>
+                </a:solidFill>
+                <a:latin typeface="DejaVu Sans Mono"/>
+              </a:defRPr>
+            </a:pPr>
             <a:r>
               <a:t>&lt;sdf version="1.10"&gt;</a:t>
             </a:r>
-            <a:br/>
+          </a:p>
+          <a:p>
+            <a:pPr algn="l">
+              <a:spcAft>
+                <a:spcPts val="0"/>
+              </a:spcAft>
+              <a:defRPr sz="1400" b="0">
+                <a:solidFill>
+                  <a:srgbClr val="FFFFFF"/>
+                </a:solidFill>
+                <a:latin typeface="DejaVu Sans Mono"/>
+              </a:defRPr>
+            </a:pPr>
             <a:r>
               <a:t>  &lt;world name="warehouse"&gt;</a:t>
             </a:r>
-            <a:br/>
+          </a:p>
+          <a:p>
+            <a:pPr algn="l">
+              <a:spcAft>
+                <a:spcPts val="0"/>
+              </a:spcAft>
+              <a:defRPr sz="1400" b="0">
+                <a:solidFill>
+                  <a:srgbClr val="FFFFFF"/>
+                </a:solidFill>
+                <a:latin typeface="DejaVu Sans Mono"/>
+              </a:defRPr>
+            </a:pPr>
             <a:r>
               <a:t>    </a:t>
             </a:r>
-            <a:br/>
+          </a:p>
+          <a:p>
+            <a:pPr algn="l">
+              <a:spcAft>
+                <a:spcPts val="0"/>
+              </a:spcAft>
+              <a:defRPr sz="1400" b="0">
+                <a:solidFill>
+                  <a:srgbClr val="FFFFFF"/>
+                </a:solidFill>
+                <a:latin typeface="DejaVu Sans Mono"/>
+              </a:defRPr>
+            </a:pPr>
             <a:r>
               <a:t>  </a:t>
             </a:r>
-            <a:br/>
+          </a:p>
+          <a:p>
+            <a:pPr algn="l">
+              <a:spcAft>
+                <a:spcPts val="0"/>
+              </a:spcAft>
+              <a:defRPr sz="1400" b="0">
+                <a:solidFill>
+                  <a:srgbClr val="FFFFFF"/>
+                </a:solidFill>
+                <a:latin typeface="DejaVu Sans Mono"/>
+              </a:defRPr>
+            </a:pPr>
             <a:r>
               <a:t>    &lt;gravity&gt;0 0 -9.8&lt;/gravity&gt;</a:t>
             </a:r>
-            <a:br/>
+          </a:p>
+          <a:p>
+            <a:pPr algn="l">
+              <a:spcAft>
+                <a:spcPts val="0"/>
+              </a:spcAft>
+              <a:defRPr sz="1400" b="0">
+                <a:solidFill>
+                  <a:srgbClr val="FFFFFF"/>
+                </a:solidFill>
+                <a:latin typeface="DejaVu Sans Mono"/>
+              </a:defRPr>
+            </a:pPr>
             <a:r>
               <a:t>    </a:t>
             </a:r>
-            <a:br/>
+          </a:p>
+          <a:p>
+            <a:pPr algn="l">
+              <a:spcAft>
+                <a:spcPts val="0"/>
+              </a:spcAft>
+              <a:defRPr sz="1400" b="0">
+                <a:solidFill>
+                  <a:srgbClr val="FFFFFF"/>
+                </a:solidFill>
+                <a:latin typeface="DejaVu Sans Mono"/>
+              </a:defRPr>
+            </a:pPr>
             <a:r>
               <a:t>  </a:t>
             </a:r>
-            <a:br/>
+          </a:p>
+          <a:p>
+            <a:pPr algn="l">
+              <a:spcAft>
+                <a:spcPts val="0"/>
+              </a:spcAft>
+              <a:defRPr sz="1400" b="0">
+                <a:solidFill>
+                  <a:srgbClr val="FFFFFF"/>
+                </a:solidFill>
+                <a:latin typeface="DejaVu Sans Mono"/>
+              </a:defRPr>
+            </a:pPr>
             <a:r>
               <a:t>    &lt;plugin filename="gz-sim-physics-system" name="gz::sim::systems::Physics"/&gt;</a:t>
             </a:r>
-            <a:br/>
+          </a:p>
+          <a:p>
+            <a:pPr algn="l">
+              <a:spcAft>
+                <a:spcPts val="0"/>
+              </a:spcAft>
+              <a:defRPr sz="1400" b="0">
+                <a:solidFill>
+                  <a:srgbClr val="FFFFFF"/>
+                </a:solidFill>
+                <a:latin typeface="DejaVu Sans Mono"/>
+              </a:defRPr>
+            </a:pPr>
             <a:r>
               <a:t>    &lt;plugin filename="gz-sim-user-commands-system"</a:t>
             </a:r>
-            <a:br/>
+          </a:p>
+          <a:p>
+            <a:pPr algn="l">
+              <a:spcAft>
+                <a:spcPts val="0"/>
+              </a:spcAft>
+              <a:defRPr sz="1400" b="0">
+                <a:solidFill>
+                  <a:srgbClr val="FFFFFF"/>
+                </a:solidFill>
+                <a:latin typeface="DejaVu Sans Mono"/>
+              </a:defRPr>
+            </a:pPr>
             <a:r>
               <a:t>      name="gz::sim::systems::UserCommands"/&gt;</a:t>
             </a:r>
-            <a:br/>
+          </a:p>
+          <a:p>
+            <a:pPr algn="l">
+              <a:spcAft>
+                <a:spcPts val="0"/>
+              </a:spcAft>
+              <a:defRPr sz="1400" b="0">
+                <a:solidFill>
+                  <a:srgbClr val="FFFFFF"/>
+                </a:solidFill>
+                <a:latin typeface="DejaVu Sans Mono"/>
+              </a:defRPr>
+            </a:pPr>
             <a:r>
               <a:t>    &lt;plugin filename="gz-sim-scene-broadcaster-system"</a:t>
             </a:r>
@@ -24452,7 +25251,7 @@
           </a:fontRef>
         </p:style>
         <p:txBody>
-          <a:bodyPr rtlCol="0" anchor="ctr" wrap="square" lIns="164592" rIns="164592" tIns="109728" bIns="36576"/>
+          <a:bodyPr rtlCol="0" anchor="ctr" wrap="square" lIns="164592" rIns="164592" tIns="109728" bIns="73152"/>
           <a:lstStyle/>
           <a:p>
             <a:pPr algn="l">
@@ -24469,47 +25268,179 @@
             <a:r>
               <a:t>      name="gz::sim::systems::SceneBroadcaster"/&gt;</a:t>
             </a:r>
-            <a:br/>
+          </a:p>
+          <a:p>
+            <a:pPr algn="l">
+              <a:spcAft>
+                <a:spcPts val="0"/>
+              </a:spcAft>
+              <a:defRPr sz="1400" b="0">
+                <a:solidFill>
+                  <a:srgbClr val="FFFFFF"/>
+                </a:solidFill>
+                <a:latin typeface="DejaVu Sans Mono"/>
+              </a:defRPr>
+            </a:pPr>
             <a:r>
               <a:t>    &lt;plugin filename="gz-sim-imu-system" name="gz::sim::systems::Imu"/&gt;</a:t>
             </a:r>
-            <a:br/>
+          </a:p>
+          <a:p>
+            <a:pPr algn="l">
+              <a:spcAft>
+                <a:spcPts val="0"/>
+              </a:spcAft>
+              <a:defRPr sz="1400" b="0">
+                <a:solidFill>
+                  <a:srgbClr val="FFFFFF"/>
+                </a:solidFill>
+                <a:latin typeface="DejaVu Sans Mono"/>
+              </a:defRPr>
+            </a:pPr>
             <a:r>
               <a:t>    &lt;plugin filename="gz-sim-sensors-system" name="gz::sim::systems::Sensors"/&gt;</a:t>
             </a:r>
-            <a:br/>
+          </a:p>
+          <a:p>
+            <a:pPr algn="l">
+              <a:spcAft>
+                <a:spcPts val="0"/>
+              </a:spcAft>
+              <a:defRPr sz="1400" b="0">
+                <a:solidFill>
+                  <a:srgbClr val="FFFFFF"/>
+                </a:solidFill>
+                <a:latin typeface="DejaVu Sans Mono"/>
+              </a:defRPr>
+            </a:pPr>
             <a:r>
               <a:t>    </a:t>
             </a:r>
-            <a:br/>
+          </a:p>
+          <a:p>
+            <a:pPr algn="l">
+              <a:spcAft>
+                <a:spcPts val="0"/>
+              </a:spcAft>
+              <a:defRPr sz="1400" b="0">
+                <a:solidFill>
+                  <a:srgbClr val="FFFFFF"/>
+                </a:solidFill>
+                <a:latin typeface="DejaVu Sans Mono"/>
+              </a:defRPr>
+            </a:pPr>
             <a:r>
               <a:t>  </a:t>
             </a:r>
-            <a:br/>
+          </a:p>
+          <a:p>
+            <a:pPr algn="l">
+              <a:spcAft>
+                <a:spcPts val="0"/>
+              </a:spcAft>
+              <a:defRPr sz="1400" b="0">
+                <a:solidFill>
+                  <a:srgbClr val="FFFFFF"/>
+                </a:solidFill>
+                <a:latin typeface="DejaVu Sans Mono"/>
+              </a:defRPr>
+            </a:pPr>
             <a:r>
               <a:t>    &lt;light type="directional" name="sun"&gt;</a:t>
             </a:r>
-            <a:br/>
+          </a:p>
+          <a:p>
+            <a:pPr algn="l">
+              <a:spcAft>
+                <a:spcPts val="0"/>
+              </a:spcAft>
+              <a:defRPr sz="1400" b="0">
+                <a:solidFill>
+                  <a:srgbClr val="FFFFFF"/>
+                </a:solidFill>
+                <a:latin typeface="DejaVu Sans Mono"/>
+              </a:defRPr>
+            </a:pPr>
             <a:r>
               <a:t>      &lt;pose&gt;0 0 10 0 0 0&lt;/pose&gt;</a:t>
             </a:r>
-            <a:br/>
+          </a:p>
+          <a:p>
+            <a:pPr algn="l">
+              <a:spcAft>
+                <a:spcPts val="0"/>
+              </a:spcAft>
+              <a:defRPr sz="1400" b="0">
+                <a:solidFill>
+                  <a:srgbClr val="FFFFFF"/>
+                </a:solidFill>
+                <a:latin typeface="DejaVu Sans Mono"/>
+              </a:defRPr>
+            </a:pPr>
             <a:r>
               <a:t>      &lt;cast_shadows&gt;true&lt;/cast_shadows&gt;</a:t>
             </a:r>
-            <a:br/>
+          </a:p>
+          <a:p>
+            <a:pPr algn="l">
+              <a:spcAft>
+                <a:spcPts val="0"/>
+              </a:spcAft>
+              <a:defRPr sz="1400" b="0">
+                <a:solidFill>
+                  <a:srgbClr val="FFFFFF"/>
+                </a:solidFill>
+                <a:latin typeface="DejaVu Sans Mono"/>
+              </a:defRPr>
+            </a:pPr>
             <a:r>
               <a:t>      &lt;direction&gt;-0.5 0.1 -0.9&lt;/direction&gt;</a:t>
             </a:r>
-            <a:br/>
+          </a:p>
+          <a:p>
+            <a:pPr algn="l">
+              <a:spcAft>
+                <a:spcPts val="0"/>
+              </a:spcAft>
+              <a:defRPr sz="1400" b="0">
+                <a:solidFill>
+                  <a:srgbClr val="FFFFFF"/>
+                </a:solidFill>
+                <a:latin typeface="DejaVu Sans Mono"/>
+              </a:defRPr>
+            </a:pPr>
             <a:r>
               <a:t>    &lt;/light&gt;</a:t>
             </a:r>
-            <a:br/>
+          </a:p>
+          <a:p>
+            <a:pPr algn="l">
+              <a:spcAft>
+                <a:spcPts val="0"/>
+              </a:spcAft>
+              <a:defRPr sz="1400" b="0">
+                <a:solidFill>
+                  <a:srgbClr val="FFFFFF"/>
+                </a:solidFill>
+                <a:latin typeface="DejaVu Sans Mono"/>
+              </a:defRPr>
+            </a:pPr>
             <a:r>
               <a:t>    </a:t>
             </a:r>
-            <a:br/>
+          </a:p>
+          <a:p>
+            <a:pPr algn="l">
+              <a:spcAft>
+                <a:spcPts val="0"/>
+              </a:spcAft>
+              <a:defRPr sz="1400" b="0">
+                <a:solidFill>
+                  <a:srgbClr val="FFFFFF"/>
+                </a:solidFill>
+                <a:latin typeface="DejaVu Sans Mono"/>
+              </a:defRPr>
+            </a:pPr>
             <a:r>
               <a:t>  </a:t>
             </a:r>
@@ -24926,7 +25857,7 @@
           </a:fontRef>
         </p:style>
         <p:txBody>
-          <a:bodyPr rtlCol="0" anchor="ctr" wrap="square" lIns="164592" rIns="164592" tIns="109728" bIns="36576"/>
+          <a:bodyPr rtlCol="0" anchor="ctr" wrap="square" lIns="164592" rIns="164592" tIns="109728" bIns="73152"/>
           <a:lstStyle/>
           <a:p>
             <a:pPr algn="l">
@@ -24943,47 +25874,179 @@
             <a:r>
               <a:t>    &lt;model name="ground"&gt;</a:t>
             </a:r>
-            <a:br/>
+          </a:p>
+          <a:p>
+            <a:pPr algn="l">
+              <a:spcAft>
+                <a:spcPts val="0"/>
+              </a:spcAft>
+              <a:defRPr sz="1400" b="0">
+                <a:solidFill>
+                  <a:srgbClr val="FFFFFF"/>
+                </a:solidFill>
+                <a:latin typeface="DejaVu Sans Mono"/>
+              </a:defRPr>
+            </a:pPr>
             <a:r>
               <a:t>      &lt;static&gt;true&lt;/static&gt;</a:t>
             </a:r>
-            <a:br/>
+          </a:p>
+          <a:p>
+            <a:pPr algn="l">
+              <a:spcAft>
+                <a:spcPts val="0"/>
+              </a:spcAft>
+              <a:defRPr sz="1400" b="0">
+                <a:solidFill>
+                  <a:srgbClr val="FFFFFF"/>
+                </a:solidFill>
+                <a:latin typeface="DejaVu Sans Mono"/>
+              </a:defRPr>
+            </a:pPr>
             <a:r>
               <a:t>      &lt;link name="link"&gt;</a:t>
             </a:r>
-            <a:br/>
+          </a:p>
+          <a:p>
+            <a:pPr algn="l">
+              <a:spcAft>
+                <a:spcPts val="0"/>
+              </a:spcAft>
+              <a:defRPr sz="1400" b="0">
+                <a:solidFill>
+                  <a:srgbClr val="FFFFFF"/>
+                </a:solidFill>
+                <a:latin typeface="DejaVu Sans Mono"/>
+              </a:defRPr>
+            </a:pPr>
             <a:r>
               <a:t>        &lt;collision name="collision"&gt;</a:t>
             </a:r>
-            <a:br/>
+          </a:p>
+          <a:p>
+            <a:pPr algn="l">
+              <a:spcAft>
+                <a:spcPts val="0"/>
+              </a:spcAft>
+              <a:defRPr sz="1400" b="0">
+                <a:solidFill>
+                  <a:srgbClr val="FFFFFF"/>
+                </a:solidFill>
+                <a:latin typeface="DejaVu Sans Mono"/>
+              </a:defRPr>
+            </a:pPr>
             <a:r>
               <a:t>          &lt;geometry&gt;</a:t>
             </a:r>
-            <a:br/>
+          </a:p>
+          <a:p>
+            <a:pPr algn="l">
+              <a:spcAft>
+                <a:spcPts val="0"/>
+              </a:spcAft>
+              <a:defRPr sz="1400" b="0">
+                <a:solidFill>
+                  <a:srgbClr val="FFFFFF"/>
+                </a:solidFill>
+                <a:latin typeface="DejaVu Sans Mono"/>
+              </a:defRPr>
+            </a:pPr>
             <a:r>
               <a:t>            &lt;plane&gt;</a:t>
             </a:r>
-            <a:br/>
+          </a:p>
+          <a:p>
+            <a:pPr algn="l">
+              <a:spcAft>
+                <a:spcPts val="0"/>
+              </a:spcAft>
+              <a:defRPr sz="1400" b="0">
+                <a:solidFill>
+                  <a:srgbClr val="FFFFFF"/>
+                </a:solidFill>
+                <a:latin typeface="DejaVu Sans Mono"/>
+              </a:defRPr>
+            </a:pPr>
             <a:r>
               <a:t>              &lt;normal&gt;0 0 1&lt;/normal&gt;</a:t>
             </a:r>
-            <a:br/>
+          </a:p>
+          <a:p>
+            <a:pPr algn="l">
+              <a:spcAft>
+                <a:spcPts val="0"/>
+              </a:spcAft>
+              <a:defRPr sz="1400" b="0">
+                <a:solidFill>
+                  <a:srgbClr val="FFFFFF"/>
+                </a:solidFill>
+                <a:latin typeface="DejaVu Sans Mono"/>
+              </a:defRPr>
+            </a:pPr>
             <a:r>
               <a:t>              &lt;size&gt;30 30&lt;/size&gt;</a:t>
             </a:r>
-            <a:br/>
+          </a:p>
+          <a:p>
+            <a:pPr algn="l">
+              <a:spcAft>
+                <a:spcPts val="0"/>
+              </a:spcAft>
+              <a:defRPr sz="1400" b="0">
+                <a:solidFill>
+                  <a:srgbClr val="FFFFFF"/>
+                </a:solidFill>
+                <a:latin typeface="DejaVu Sans Mono"/>
+              </a:defRPr>
+            </a:pPr>
             <a:r>
               <a:t>            &lt;/plane&gt;</a:t>
             </a:r>
-            <a:br/>
+          </a:p>
+          <a:p>
+            <a:pPr algn="l">
+              <a:spcAft>
+                <a:spcPts val="0"/>
+              </a:spcAft>
+              <a:defRPr sz="1400" b="0">
+                <a:solidFill>
+                  <a:srgbClr val="FFFFFF"/>
+                </a:solidFill>
+                <a:latin typeface="DejaVu Sans Mono"/>
+              </a:defRPr>
+            </a:pPr>
             <a:r>
               <a:t>          &lt;/geometry&gt;</a:t>
             </a:r>
-            <a:br/>
+          </a:p>
+          <a:p>
+            <a:pPr algn="l">
+              <a:spcAft>
+                <a:spcPts val="0"/>
+              </a:spcAft>
+              <a:defRPr sz="1400" b="0">
+                <a:solidFill>
+                  <a:srgbClr val="FFFFFF"/>
+                </a:solidFill>
+                <a:latin typeface="DejaVu Sans Mono"/>
+              </a:defRPr>
+            </a:pPr>
             <a:r>
               <a:t>        &lt;/collision&gt;</a:t>
             </a:r>
-            <a:br/>
+          </a:p>
+          <a:p>
+            <a:pPr algn="l">
+              <a:spcAft>
+                <a:spcPts val="0"/>
+              </a:spcAft>
+              <a:defRPr sz="1400" b="0">
+                <a:solidFill>
+                  <a:srgbClr val="FFFFFF"/>
+                </a:solidFill>
+                <a:latin typeface="DejaVu Sans Mono"/>
+              </a:defRPr>
+            </a:pPr>
             <a:r>
               <a:t>        &lt;visual name="visual"&gt;</a:t>
             </a:r>
@@ -25400,7 +26463,7 @@
           </a:fontRef>
         </p:style>
         <p:txBody>
-          <a:bodyPr rtlCol="0" anchor="ctr" wrap="square" lIns="164592" rIns="164592" tIns="109728" bIns="36576"/>
+          <a:bodyPr rtlCol="0" anchor="ctr" wrap="square" lIns="164592" rIns="164592" tIns="109728" bIns="73152"/>
           <a:lstStyle/>
           <a:p>
             <a:pPr algn="l">
@@ -25417,47 +26480,179 @@
             <a:r>
               <a:t>          &lt;geometry&gt;</a:t>
             </a:r>
-            <a:br/>
+          </a:p>
+          <a:p>
+            <a:pPr algn="l">
+              <a:spcAft>
+                <a:spcPts val="0"/>
+              </a:spcAft>
+              <a:defRPr sz="1400" b="0">
+                <a:solidFill>
+                  <a:srgbClr val="FFFFFF"/>
+                </a:solidFill>
+                <a:latin typeface="DejaVu Sans Mono"/>
+              </a:defRPr>
+            </a:pPr>
             <a:r>
               <a:t>            &lt;plane&gt;</a:t>
             </a:r>
-            <a:br/>
+          </a:p>
+          <a:p>
+            <a:pPr algn="l">
+              <a:spcAft>
+                <a:spcPts val="0"/>
+              </a:spcAft>
+              <a:defRPr sz="1400" b="0">
+                <a:solidFill>
+                  <a:srgbClr val="FFFFFF"/>
+                </a:solidFill>
+                <a:latin typeface="DejaVu Sans Mono"/>
+              </a:defRPr>
+            </a:pPr>
             <a:r>
               <a:t>              &lt;normal&gt;0 0 1&lt;/normal&gt;</a:t>
             </a:r>
-            <a:br/>
+          </a:p>
+          <a:p>
+            <a:pPr algn="l">
+              <a:spcAft>
+                <a:spcPts val="0"/>
+              </a:spcAft>
+              <a:defRPr sz="1400" b="0">
+                <a:solidFill>
+                  <a:srgbClr val="FFFFFF"/>
+                </a:solidFill>
+                <a:latin typeface="DejaVu Sans Mono"/>
+              </a:defRPr>
+            </a:pPr>
             <a:r>
               <a:t>              &lt;size&gt;30 30&lt;/size&gt;</a:t>
             </a:r>
-            <a:br/>
+          </a:p>
+          <a:p>
+            <a:pPr algn="l">
+              <a:spcAft>
+                <a:spcPts val="0"/>
+              </a:spcAft>
+              <a:defRPr sz="1400" b="0">
+                <a:solidFill>
+                  <a:srgbClr val="FFFFFF"/>
+                </a:solidFill>
+                <a:latin typeface="DejaVu Sans Mono"/>
+              </a:defRPr>
+            </a:pPr>
             <a:r>
               <a:t>            &lt;/plane&gt;</a:t>
             </a:r>
-            <a:br/>
+          </a:p>
+          <a:p>
+            <a:pPr algn="l">
+              <a:spcAft>
+                <a:spcPts val="0"/>
+              </a:spcAft>
+              <a:defRPr sz="1400" b="0">
+                <a:solidFill>
+                  <a:srgbClr val="FFFFFF"/>
+                </a:solidFill>
+                <a:latin typeface="DejaVu Sans Mono"/>
+              </a:defRPr>
+            </a:pPr>
             <a:r>
               <a:t>          &lt;/geometry&gt;</a:t>
             </a:r>
-            <a:br/>
+          </a:p>
+          <a:p>
+            <a:pPr algn="l">
+              <a:spcAft>
+                <a:spcPts val="0"/>
+              </a:spcAft>
+              <a:defRPr sz="1400" b="0">
+                <a:solidFill>
+                  <a:srgbClr val="FFFFFF"/>
+                </a:solidFill>
+                <a:latin typeface="DejaVu Sans Mono"/>
+              </a:defRPr>
+            </a:pPr>
             <a:r>
               <a:t>          &lt;material&gt;</a:t>
             </a:r>
-            <a:br/>
+          </a:p>
+          <a:p>
+            <a:pPr algn="l">
+              <a:spcAft>
+                <a:spcPts val="0"/>
+              </a:spcAft>
+              <a:defRPr sz="1400" b="0">
+                <a:solidFill>
+                  <a:srgbClr val="FFFFFF"/>
+                </a:solidFill>
+                <a:latin typeface="DejaVu Sans Mono"/>
+              </a:defRPr>
+            </a:pPr>
             <a:r>
               <a:t>            &lt;diffuse&gt;0.65 0.65 0.65 1&lt;/diffuse&gt;</a:t>
             </a:r>
-            <a:br/>
+          </a:p>
+          <a:p>
+            <a:pPr algn="l">
+              <a:spcAft>
+                <a:spcPts val="0"/>
+              </a:spcAft>
+              <a:defRPr sz="1400" b="0">
+                <a:solidFill>
+                  <a:srgbClr val="FFFFFF"/>
+                </a:solidFill>
+                <a:latin typeface="DejaVu Sans Mono"/>
+              </a:defRPr>
+            </a:pPr>
             <a:r>
               <a:t>          &lt;/material&gt;</a:t>
             </a:r>
-            <a:br/>
+          </a:p>
+          <a:p>
+            <a:pPr algn="l">
+              <a:spcAft>
+                <a:spcPts val="0"/>
+              </a:spcAft>
+              <a:defRPr sz="1400" b="0">
+                <a:solidFill>
+                  <a:srgbClr val="FFFFFF"/>
+                </a:solidFill>
+                <a:latin typeface="DejaVu Sans Mono"/>
+              </a:defRPr>
+            </a:pPr>
             <a:r>
               <a:t>        &lt;/visual&gt;</a:t>
             </a:r>
-            <a:br/>
+          </a:p>
+          <a:p>
+            <a:pPr algn="l">
+              <a:spcAft>
+                <a:spcPts val="0"/>
+              </a:spcAft>
+              <a:defRPr sz="1400" b="0">
+                <a:solidFill>
+                  <a:srgbClr val="FFFFFF"/>
+                </a:solidFill>
+                <a:latin typeface="DejaVu Sans Mono"/>
+              </a:defRPr>
+            </a:pPr>
             <a:r>
               <a:t>      &lt;/link&gt;</a:t>
             </a:r>
-            <a:br/>
+          </a:p>
+          <a:p>
+            <a:pPr algn="l">
+              <a:spcAft>
+                <a:spcPts val="0"/>
+              </a:spcAft>
+              <a:defRPr sz="1400" b="0">
+                <a:solidFill>
+                  <a:srgbClr val="FFFFFF"/>
+                </a:solidFill>
+                <a:latin typeface="DejaVu Sans Mono"/>
+              </a:defRPr>
+            </a:pPr>
             <a:r>
               <a:t>    &lt;/model&gt;</a:t>
             </a:r>
@@ -25874,7 +27069,7 @@
           </a:fontRef>
         </p:style>
         <p:txBody>
-          <a:bodyPr rtlCol="0" anchor="ctr" wrap="square" lIns="164592" rIns="164592" tIns="109728" bIns="36576"/>
+          <a:bodyPr rtlCol="0" anchor="ctr" wrap="square" lIns="164592" rIns="164592" tIns="109728" bIns="73152"/>
           <a:lstStyle/>
           <a:p>
             <a:pPr algn="l">
@@ -25891,47 +27086,179 @@
             <a:r>
               <a:t>    </a:t>
             </a:r>
-            <a:br/>
+          </a:p>
+          <a:p>
+            <a:pPr algn="l">
+              <a:spcAft>
+                <a:spcPts val="0"/>
+              </a:spcAft>
+              <a:defRPr sz="1400" b="0">
+                <a:solidFill>
+                  <a:srgbClr val="FFFFFF"/>
+                </a:solidFill>
+                <a:latin typeface="DejaVu Sans Mono"/>
+              </a:defRPr>
+            </a:pPr>
             <a:r>
               <a:t>  </a:t>
             </a:r>
-            <a:br/>
+          </a:p>
+          <a:p>
+            <a:pPr algn="l">
+              <a:spcAft>
+                <a:spcPts val="0"/>
+              </a:spcAft>
+              <a:defRPr sz="1400" b="0">
+                <a:solidFill>
+                  <a:srgbClr val="FFFFFF"/>
+                </a:solidFill>
+                <a:latin typeface="DejaVu Sans Mono"/>
+              </a:defRPr>
+            </a:pPr>
             <a:r>
               <a:t>    &lt;model name="wall_north"&gt;</a:t>
             </a:r>
-            <a:br/>
+          </a:p>
+          <a:p>
+            <a:pPr algn="l">
+              <a:spcAft>
+                <a:spcPts val="0"/>
+              </a:spcAft>
+              <a:defRPr sz="1400" b="0">
+                <a:solidFill>
+                  <a:srgbClr val="FFFFFF"/>
+                </a:solidFill>
+                <a:latin typeface="DejaVu Sans Mono"/>
+              </a:defRPr>
+            </a:pPr>
             <a:r>
               <a:t>      &lt;static&gt;true&lt;/static&gt;</a:t>
             </a:r>
-            <a:br/>
+          </a:p>
+          <a:p>
+            <a:pPr algn="l">
+              <a:spcAft>
+                <a:spcPts val="0"/>
+              </a:spcAft>
+              <a:defRPr sz="1400" b="0">
+                <a:solidFill>
+                  <a:srgbClr val="FFFFFF"/>
+                </a:solidFill>
+                <a:latin typeface="DejaVu Sans Mono"/>
+              </a:defRPr>
+            </a:pPr>
             <a:r>
               <a:t>      &lt;pose&gt;0 4 1 0 0 0&lt;/pose&gt;</a:t>
             </a:r>
-            <a:br/>
+          </a:p>
+          <a:p>
+            <a:pPr algn="l">
+              <a:spcAft>
+                <a:spcPts val="0"/>
+              </a:spcAft>
+              <a:defRPr sz="1400" b="0">
+                <a:solidFill>
+                  <a:srgbClr val="FFFFFF"/>
+                </a:solidFill>
+                <a:latin typeface="DejaVu Sans Mono"/>
+              </a:defRPr>
+            </a:pPr>
             <a:r>
               <a:t>      &lt;link name="link"&gt;</a:t>
             </a:r>
-            <a:br/>
+          </a:p>
+          <a:p>
+            <a:pPr algn="l">
+              <a:spcAft>
+                <a:spcPts val="0"/>
+              </a:spcAft>
+              <a:defRPr sz="1400" b="0">
+                <a:solidFill>
+                  <a:srgbClr val="FFFFFF"/>
+                </a:solidFill>
+                <a:latin typeface="DejaVu Sans Mono"/>
+              </a:defRPr>
+            </a:pPr>
             <a:r>
               <a:t>        &lt;collision name="c"&gt;</a:t>
             </a:r>
-            <a:br/>
+          </a:p>
+          <a:p>
+            <a:pPr algn="l">
+              <a:spcAft>
+                <a:spcPts val="0"/>
+              </a:spcAft>
+              <a:defRPr sz="1400" b="0">
+                <a:solidFill>
+                  <a:srgbClr val="FFFFFF"/>
+                </a:solidFill>
+                <a:latin typeface="DejaVu Sans Mono"/>
+              </a:defRPr>
+            </a:pPr>
             <a:r>
               <a:t>          &lt;geometry&gt;</a:t>
             </a:r>
-            <a:br/>
+          </a:p>
+          <a:p>
+            <a:pPr algn="l">
+              <a:spcAft>
+                <a:spcPts val="0"/>
+              </a:spcAft>
+              <a:defRPr sz="1400" b="0">
+                <a:solidFill>
+                  <a:srgbClr val="FFFFFF"/>
+                </a:solidFill>
+                <a:latin typeface="DejaVu Sans Mono"/>
+              </a:defRPr>
+            </a:pPr>
             <a:r>
               <a:t>            &lt;box&gt;</a:t>
             </a:r>
-            <a:br/>
+          </a:p>
+          <a:p>
+            <a:pPr algn="l">
+              <a:spcAft>
+                <a:spcPts val="0"/>
+              </a:spcAft>
+              <a:defRPr sz="1400" b="0">
+                <a:solidFill>
+                  <a:srgbClr val="FFFFFF"/>
+                </a:solidFill>
+                <a:latin typeface="DejaVu Sans Mono"/>
+              </a:defRPr>
+            </a:pPr>
             <a:r>
               <a:t>              &lt;size&gt;8 0.15 2&lt;/size&gt;</a:t>
             </a:r>
-            <a:br/>
+          </a:p>
+          <a:p>
+            <a:pPr algn="l">
+              <a:spcAft>
+                <a:spcPts val="0"/>
+              </a:spcAft>
+              <a:defRPr sz="1400" b="0">
+                <a:solidFill>
+                  <a:srgbClr val="FFFFFF"/>
+                </a:solidFill>
+                <a:latin typeface="DejaVu Sans Mono"/>
+              </a:defRPr>
+            </a:pPr>
             <a:r>
               <a:t>            &lt;/box&gt;</a:t>
             </a:r>
-            <a:br/>
+          </a:p>
+          <a:p>
+            <a:pPr algn="l">
+              <a:spcAft>
+                <a:spcPts val="0"/>
+              </a:spcAft>
+              <a:defRPr sz="1400" b="0">
+                <a:solidFill>
+                  <a:srgbClr val="FFFFFF"/>
+                </a:solidFill>
+                <a:latin typeface="DejaVu Sans Mono"/>
+              </a:defRPr>
+            </a:pPr>
             <a:r>
               <a:t>          &lt;/geometry&gt;</a:t>
             </a:r>
@@ -26348,7 +27675,7 @@
           </a:fontRef>
         </p:style>
         <p:txBody>
-          <a:bodyPr rtlCol="0" anchor="ctr" wrap="square" lIns="164592" rIns="164592" tIns="109728" bIns="36576"/>
+          <a:bodyPr rtlCol="0" anchor="ctr" wrap="square" lIns="164592" rIns="164592" tIns="109728" bIns="73152"/>
           <a:lstStyle/>
           <a:p>
             <a:pPr algn="l">
@@ -26365,47 +27692,179 @@
             <a:r>
               <a:t>        &lt;/collision&gt;</a:t>
             </a:r>
-            <a:br/>
+          </a:p>
+          <a:p>
+            <a:pPr algn="l">
+              <a:spcAft>
+                <a:spcPts val="0"/>
+              </a:spcAft>
+              <a:defRPr sz="1400" b="0">
+                <a:solidFill>
+                  <a:srgbClr val="FFFFFF"/>
+                </a:solidFill>
+                <a:latin typeface="DejaVu Sans Mono"/>
+              </a:defRPr>
+            </a:pPr>
             <a:r>
               <a:t>        &lt;visual name="v"&gt;</a:t>
             </a:r>
-            <a:br/>
+          </a:p>
+          <a:p>
+            <a:pPr algn="l">
+              <a:spcAft>
+                <a:spcPts val="0"/>
+              </a:spcAft>
+              <a:defRPr sz="1400" b="0">
+                <a:solidFill>
+                  <a:srgbClr val="FFFFFF"/>
+                </a:solidFill>
+                <a:latin typeface="DejaVu Sans Mono"/>
+              </a:defRPr>
+            </a:pPr>
             <a:r>
               <a:t>          &lt;geometry&gt;</a:t>
             </a:r>
-            <a:br/>
+          </a:p>
+          <a:p>
+            <a:pPr algn="l">
+              <a:spcAft>
+                <a:spcPts val="0"/>
+              </a:spcAft>
+              <a:defRPr sz="1400" b="0">
+                <a:solidFill>
+                  <a:srgbClr val="FFFFFF"/>
+                </a:solidFill>
+                <a:latin typeface="DejaVu Sans Mono"/>
+              </a:defRPr>
+            </a:pPr>
             <a:r>
               <a:t>            &lt;box&gt;</a:t>
             </a:r>
-            <a:br/>
+          </a:p>
+          <a:p>
+            <a:pPr algn="l">
+              <a:spcAft>
+                <a:spcPts val="0"/>
+              </a:spcAft>
+              <a:defRPr sz="1400" b="0">
+                <a:solidFill>
+                  <a:srgbClr val="FFFFFF"/>
+                </a:solidFill>
+                <a:latin typeface="DejaVu Sans Mono"/>
+              </a:defRPr>
+            </a:pPr>
             <a:r>
               <a:t>              &lt;size&gt;8 0.15 2&lt;/size&gt;</a:t>
             </a:r>
-            <a:br/>
+          </a:p>
+          <a:p>
+            <a:pPr algn="l">
+              <a:spcAft>
+                <a:spcPts val="0"/>
+              </a:spcAft>
+              <a:defRPr sz="1400" b="0">
+                <a:solidFill>
+                  <a:srgbClr val="FFFFFF"/>
+                </a:solidFill>
+                <a:latin typeface="DejaVu Sans Mono"/>
+              </a:defRPr>
+            </a:pPr>
             <a:r>
               <a:t>            &lt;/box&gt;</a:t>
             </a:r>
-            <a:br/>
+          </a:p>
+          <a:p>
+            <a:pPr algn="l">
+              <a:spcAft>
+                <a:spcPts val="0"/>
+              </a:spcAft>
+              <a:defRPr sz="1400" b="0">
+                <a:solidFill>
+                  <a:srgbClr val="FFFFFF"/>
+                </a:solidFill>
+                <a:latin typeface="DejaVu Sans Mono"/>
+              </a:defRPr>
+            </a:pPr>
             <a:r>
               <a:t>          &lt;/geometry&gt;</a:t>
             </a:r>
-            <a:br/>
+          </a:p>
+          <a:p>
+            <a:pPr algn="l">
+              <a:spcAft>
+                <a:spcPts val="0"/>
+              </a:spcAft>
+              <a:defRPr sz="1400" b="0">
+                <a:solidFill>
+                  <a:srgbClr val="FFFFFF"/>
+                </a:solidFill>
+                <a:latin typeface="DejaVu Sans Mono"/>
+              </a:defRPr>
+            </a:pPr>
             <a:r>
               <a:t>        &lt;/visual&gt;</a:t>
             </a:r>
-            <a:br/>
+          </a:p>
+          <a:p>
+            <a:pPr algn="l">
+              <a:spcAft>
+                <a:spcPts val="0"/>
+              </a:spcAft>
+              <a:defRPr sz="1400" b="0">
+                <a:solidFill>
+                  <a:srgbClr val="FFFFFF"/>
+                </a:solidFill>
+                <a:latin typeface="DejaVu Sans Mono"/>
+              </a:defRPr>
+            </a:pPr>
             <a:r>
               <a:t>      &lt;/link&gt;</a:t>
             </a:r>
-            <a:br/>
+          </a:p>
+          <a:p>
+            <a:pPr algn="l">
+              <a:spcAft>
+                <a:spcPts val="0"/>
+              </a:spcAft>
+              <a:defRPr sz="1400" b="0">
+                <a:solidFill>
+                  <a:srgbClr val="FFFFFF"/>
+                </a:solidFill>
+                <a:latin typeface="DejaVu Sans Mono"/>
+              </a:defRPr>
+            </a:pPr>
             <a:r>
               <a:t>    &lt;/model&gt;</a:t>
             </a:r>
-            <a:br/>
+          </a:p>
+          <a:p>
+            <a:pPr algn="l">
+              <a:spcAft>
+                <a:spcPts val="0"/>
+              </a:spcAft>
+              <a:defRPr sz="1400" b="0">
+                <a:solidFill>
+                  <a:srgbClr val="FFFFFF"/>
+                </a:solidFill>
+                <a:latin typeface="DejaVu Sans Mono"/>
+              </a:defRPr>
+            </a:pPr>
             <a:r>
               <a:t>    </a:t>
             </a:r>
-            <a:br/>
+          </a:p>
+          <a:p>
+            <a:pPr algn="l">
+              <a:spcAft>
+                <a:spcPts val="0"/>
+              </a:spcAft>
+              <a:defRPr sz="1400" b="0">
+                <a:solidFill>
+                  <a:srgbClr val="FFFFFF"/>
+                </a:solidFill>
+                <a:latin typeface="DejaVu Sans Mono"/>
+              </a:defRPr>
+            </a:pPr>
             <a:r>
               <a:t>  </a:t>
             </a:r>
@@ -26822,7 +28281,7 @@
           </a:fontRef>
         </p:style>
         <p:txBody>
-          <a:bodyPr rtlCol="0" anchor="ctr" wrap="square" lIns="164592" rIns="164592" tIns="109728" bIns="36576"/>
+          <a:bodyPr rtlCol="0" anchor="ctr" wrap="square" lIns="164592" rIns="164592" tIns="109728" bIns="73152"/>
           <a:lstStyle/>
           <a:p>
             <a:pPr algn="l">
@@ -26839,47 +28298,179 @@
             <a:r>
               <a:t>    &lt;model name="obstacle"&gt;</a:t>
             </a:r>
-            <a:br/>
+          </a:p>
+          <a:p>
+            <a:pPr algn="l">
+              <a:spcAft>
+                <a:spcPts val="0"/>
+              </a:spcAft>
+              <a:defRPr sz="1400" b="0">
+                <a:solidFill>
+                  <a:srgbClr val="FFFFFF"/>
+                </a:solidFill>
+                <a:latin typeface="DejaVu Sans Mono"/>
+              </a:defRPr>
+            </a:pPr>
             <a:r>
               <a:t>      &lt;static&gt;true&lt;/static&gt;</a:t>
             </a:r>
-            <a:br/>
+          </a:p>
+          <a:p>
+            <a:pPr algn="l">
+              <a:spcAft>
+                <a:spcPts val="0"/>
+              </a:spcAft>
+              <a:defRPr sz="1400" b="0">
+                <a:solidFill>
+                  <a:srgbClr val="FFFFFF"/>
+                </a:solidFill>
+                <a:latin typeface="DejaVu Sans Mono"/>
+              </a:defRPr>
+            </a:pPr>
             <a:r>
               <a:t>      &lt;pose&gt;1.5 -1.0 0.4 0 0 0&lt;/pose&gt;</a:t>
             </a:r>
-            <a:br/>
+          </a:p>
+          <a:p>
+            <a:pPr algn="l">
+              <a:spcAft>
+                <a:spcPts val="0"/>
+              </a:spcAft>
+              <a:defRPr sz="1400" b="0">
+                <a:solidFill>
+                  <a:srgbClr val="FFFFFF"/>
+                </a:solidFill>
+                <a:latin typeface="DejaVu Sans Mono"/>
+              </a:defRPr>
+            </a:pPr>
             <a:r>
               <a:t>      &lt;link name="link"&gt;</a:t>
             </a:r>
-            <a:br/>
+          </a:p>
+          <a:p>
+            <a:pPr algn="l">
+              <a:spcAft>
+                <a:spcPts val="0"/>
+              </a:spcAft>
+              <a:defRPr sz="1400" b="0">
+                <a:solidFill>
+                  <a:srgbClr val="FFFFFF"/>
+                </a:solidFill>
+                <a:latin typeface="DejaVu Sans Mono"/>
+              </a:defRPr>
+            </a:pPr>
             <a:r>
               <a:t>        &lt;collision name="c"&gt;</a:t>
             </a:r>
-            <a:br/>
+          </a:p>
+          <a:p>
+            <a:pPr algn="l">
+              <a:spcAft>
+                <a:spcPts val="0"/>
+              </a:spcAft>
+              <a:defRPr sz="1400" b="0">
+                <a:solidFill>
+                  <a:srgbClr val="FFFFFF"/>
+                </a:solidFill>
+                <a:latin typeface="DejaVu Sans Mono"/>
+              </a:defRPr>
+            </a:pPr>
             <a:r>
               <a:t>          &lt;geometry&gt;</a:t>
             </a:r>
-            <a:br/>
+          </a:p>
+          <a:p>
+            <a:pPr algn="l">
+              <a:spcAft>
+                <a:spcPts val="0"/>
+              </a:spcAft>
+              <a:defRPr sz="1400" b="0">
+                <a:solidFill>
+                  <a:srgbClr val="FFFFFF"/>
+                </a:solidFill>
+                <a:latin typeface="DejaVu Sans Mono"/>
+              </a:defRPr>
+            </a:pPr>
             <a:r>
               <a:t>            &lt;box&gt;</a:t>
             </a:r>
-            <a:br/>
+          </a:p>
+          <a:p>
+            <a:pPr algn="l">
+              <a:spcAft>
+                <a:spcPts val="0"/>
+              </a:spcAft>
+              <a:defRPr sz="1400" b="0">
+                <a:solidFill>
+                  <a:srgbClr val="FFFFFF"/>
+                </a:solidFill>
+                <a:latin typeface="DejaVu Sans Mono"/>
+              </a:defRPr>
+            </a:pPr>
             <a:r>
               <a:t>              &lt;size&gt;0.5 0.5 0.8&lt;/size&gt;</a:t>
             </a:r>
-            <a:br/>
+          </a:p>
+          <a:p>
+            <a:pPr algn="l">
+              <a:spcAft>
+                <a:spcPts val="0"/>
+              </a:spcAft>
+              <a:defRPr sz="1400" b="0">
+                <a:solidFill>
+                  <a:srgbClr val="FFFFFF"/>
+                </a:solidFill>
+                <a:latin typeface="DejaVu Sans Mono"/>
+              </a:defRPr>
+            </a:pPr>
             <a:r>
               <a:t>            &lt;/box&gt;</a:t>
             </a:r>
-            <a:br/>
+          </a:p>
+          <a:p>
+            <a:pPr algn="l">
+              <a:spcAft>
+                <a:spcPts val="0"/>
+              </a:spcAft>
+              <a:defRPr sz="1400" b="0">
+                <a:solidFill>
+                  <a:srgbClr val="FFFFFF"/>
+                </a:solidFill>
+                <a:latin typeface="DejaVu Sans Mono"/>
+              </a:defRPr>
+            </a:pPr>
             <a:r>
               <a:t>          &lt;/geometry&gt;</a:t>
             </a:r>
-            <a:br/>
+          </a:p>
+          <a:p>
+            <a:pPr algn="l">
+              <a:spcAft>
+                <a:spcPts val="0"/>
+              </a:spcAft>
+              <a:defRPr sz="1400" b="0">
+                <a:solidFill>
+                  <a:srgbClr val="FFFFFF"/>
+                </a:solidFill>
+                <a:latin typeface="DejaVu Sans Mono"/>
+              </a:defRPr>
+            </a:pPr>
             <a:r>
               <a:t>        &lt;/collision&gt;</a:t>
             </a:r>
-            <a:br/>
+          </a:p>
+          <a:p>
+            <a:pPr algn="l">
+              <a:spcAft>
+                <a:spcPts val="0"/>
+              </a:spcAft>
+              <a:defRPr sz="1400" b="0">
+                <a:solidFill>
+                  <a:srgbClr val="FFFFFF"/>
+                </a:solidFill>
+                <a:latin typeface="DejaVu Sans Mono"/>
+              </a:defRPr>
+            </a:pPr>
             <a:r>
               <a:t>        &lt;visual name="v"&gt;</a:t>
             </a:r>
@@ -27296,7 +28887,7 @@
           </a:fontRef>
         </p:style>
         <p:txBody>
-          <a:bodyPr rtlCol="0" anchor="ctr" wrap="square" lIns="164592" rIns="164592" tIns="109728" bIns="36576"/>
+          <a:bodyPr rtlCol="0" anchor="ctr" wrap="square" lIns="164592" rIns="164592" tIns="109728" bIns="73152"/>
           <a:lstStyle/>
           <a:p>
             <a:pPr algn="l">
@@ -27313,47 +28904,179 @@
             <a:r>
               <a:t>          &lt;geometry&gt;</a:t>
             </a:r>
-            <a:br/>
+          </a:p>
+          <a:p>
+            <a:pPr algn="l">
+              <a:spcAft>
+                <a:spcPts val="0"/>
+              </a:spcAft>
+              <a:defRPr sz="1400" b="0">
+                <a:solidFill>
+                  <a:srgbClr val="FFFFFF"/>
+                </a:solidFill>
+                <a:latin typeface="DejaVu Sans Mono"/>
+              </a:defRPr>
+            </a:pPr>
             <a:r>
               <a:t>            &lt;box&gt;</a:t>
             </a:r>
-            <a:br/>
+          </a:p>
+          <a:p>
+            <a:pPr algn="l">
+              <a:spcAft>
+                <a:spcPts val="0"/>
+              </a:spcAft>
+              <a:defRPr sz="1400" b="0">
+                <a:solidFill>
+                  <a:srgbClr val="FFFFFF"/>
+                </a:solidFill>
+                <a:latin typeface="DejaVu Sans Mono"/>
+              </a:defRPr>
+            </a:pPr>
             <a:r>
               <a:t>              &lt;size&gt;0.5 0.5 0.8&lt;/size&gt;</a:t>
             </a:r>
-            <a:br/>
+          </a:p>
+          <a:p>
+            <a:pPr algn="l">
+              <a:spcAft>
+                <a:spcPts val="0"/>
+              </a:spcAft>
+              <a:defRPr sz="1400" b="0">
+                <a:solidFill>
+                  <a:srgbClr val="FFFFFF"/>
+                </a:solidFill>
+                <a:latin typeface="DejaVu Sans Mono"/>
+              </a:defRPr>
+            </a:pPr>
             <a:r>
               <a:t>            &lt;/box&gt;</a:t>
             </a:r>
-            <a:br/>
+          </a:p>
+          <a:p>
+            <a:pPr algn="l">
+              <a:spcAft>
+                <a:spcPts val="0"/>
+              </a:spcAft>
+              <a:defRPr sz="1400" b="0">
+                <a:solidFill>
+                  <a:srgbClr val="FFFFFF"/>
+                </a:solidFill>
+                <a:latin typeface="DejaVu Sans Mono"/>
+              </a:defRPr>
+            </a:pPr>
             <a:r>
               <a:t>          &lt;/geometry&gt;</a:t>
             </a:r>
-            <a:br/>
+          </a:p>
+          <a:p>
+            <a:pPr algn="l">
+              <a:spcAft>
+                <a:spcPts val="0"/>
+              </a:spcAft>
+              <a:defRPr sz="1400" b="0">
+                <a:solidFill>
+                  <a:srgbClr val="FFFFFF"/>
+                </a:solidFill>
+                <a:latin typeface="DejaVu Sans Mono"/>
+              </a:defRPr>
+            </a:pPr>
             <a:r>
               <a:t>          &lt;material&gt;</a:t>
             </a:r>
-            <a:br/>
+          </a:p>
+          <a:p>
+            <a:pPr algn="l">
+              <a:spcAft>
+                <a:spcPts val="0"/>
+              </a:spcAft>
+              <a:defRPr sz="1400" b="0">
+                <a:solidFill>
+                  <a:srgbClr val="FFFFFF"/>
+                </a:solidFill>
+                <a:latin typeface="DejaVu Sans Mono"/>
+              </a:defRPr>
+            </a:pPr>
             <a:r>
               <a:t>            &lt;diffuse&gt;0.9 0.7 0.1 1&lt;/diffuse&gt;</a:t>
             </a:r>
-            <a:br/>
+          </a:p>
+          <a:p>
+            <a:pPr algn="l">
+              <a:spcAft>
+                <a:spcPts val="0"/>
+              </a:spcAft>
+              <a:defRPr sz="1400" b="0">
+                <a:solidFill>
+                  <a:srgbClr val="FFFFFF"/>
+                </a:solidFill>
+                <a:latin typeface="DejaVu Sans Mono"/>
+              </a:defRPr>
+            </a:pPr>
             <a:r>
               <a:t>          &lt;/material&gt;</a:t>
             </a:r>
-            <a:br/>
+          </a:p>
+          <a:p>
+            <a:pPr algn="l">
+              <a:spcAft>
+                <a:spcPts val="0"/>
+              </a:spcAft>
+              <a:defRPr sz="1400" b="0">
+                <a:solidFill>
+                  <a:srgbClr val="FFFFFF"/>
+                </a:solidFill>
+                <a:latin typeface="DejaVu Sans Mono"/>
+              </a:defRPr>
+            </a:pPr>
             <a:r>
               <a:t>        &lt;/visual&gt;</a:t>
             </a:r>
-            <a:br/>
+          </a:p>
+          <a:p>
+            <a:pPr algn="l">
+              <a:spcAft>
+                <a:spcPts val="0"/>
+              </a:spcAft>
+              <a:defRPr sz="1400" b="0">
+                <a:solidFill>
+                  <a:srgbClr val="FFFFFF"/>
+                </a:solidFill>
+                <a:latin typeface="DejaVu Sans Mono"/>
+              </a:defRPr>
+            </a:pPr>
             <a:r>
               <a:t>      &lt;/link&gt;</a:t>
             </a:r>
-            <a:br/>
+          </a:p>
+          <a:p>
+            <a:pPr algn="l">
+              <a:spcAft>
+                <a:spcPts val="0"/>
+              </a:spcAft>
+              <a:defRPr sz="1400" b="0">
+                <a:solidFill>
+                  <a:srgbClr val="FFFFFF"/>
+                </a:solidFill>
+                <a:latin typeface="DejaVu Sans Mono"/>
+              </a:defRPr>
+            </a:pPr>
             <a:r>
               <a:t>    &lt;/model&gt;</a:t>
             </a:r>
-            <a:br/>
+          </a:p>
+          <a:p>
+            <a:pPr algn="l">
+              <a:spcAft>
+                <a:spcPts val="0"/>
+              </a:spcAft>
+              <a:defRPr sz="1400" b="0">
+                <a:solidFill>
+                  <a:srgbClr val="FFFFFF"/>
+                </a:solidFill>
+                <a:latin typeface="DejaVu Sans Mono"/>
+              </a:defRPr>
+            </a:pPr>
             <a:r>
               <a:t>    </a:t>
             </a:r>
@@ -27770,7 +29493,7 @@
           </a:fontRef>
         </p:style>
         <p:txBody>
-          <a:bodyPr rtlCol="0" anchor="ctr" wrap="square" lIns="164592" rIns="164592" tIns="109728" bIns="36576"/>
+          <a:bodyPr rtlCol="0" anchor="ctr" wrap="square" lIns="164592" rIns="164592" tIns="109728" bIns="73152"/>
           <a:lstStyle/>
           <a:p>
             <a:pPr algn="l">
@@ -27787,47 +29510,179 @@
             <a:r>
               <a:t>  </a:t>
             </a:r>
-            <a:br/>
+          </a:p>
+          <a:p>
+            <a:pPr algn="l">
+              <a:spcAft>
+                <a:spcPts val="0"/>
+              </a:spcAft>
+              <a:defRPr sz="1400" b="0">
+                <a:solidFill>
+                  <a:srgbClr val="FFFFFF"/>
+                </a:solidFill>
+                <a:latin typeface="DejaVu Sans Mono"/>
+              </a:defRPr>
+            </a:pPr>
             <a:r>
               <a:t>    &lt;model name="target"&gt;</a:t>
             </a:r>
-            <a:br/>
+          </a:p>
+          <a:p>
+            <a:pPr algn="l">
+              <a:spcAft>
+                <a:spcPts val="0"/>
+              </a:spcAft>
+              <a:defRPr sz="1400" b="0">
+                <a:solidFill>
+                  <a:srgbClr val="FFFFFF"/>
+                </a:solidFill>
+                <a:latin typeface="DejaVu Sans Mono"/>
+              </a:defRPr>
+            </a:pPr>
             <a:r>
               <a:t>      &lt;static&gt;true&lt;/static&gt;</a:t>
             </a:r>
-            <a:br/>
+          </a:p>
+          <a:p>
+            <a:pPr algn="l">
+              <a:spcAft>
+                <a:spcPts val="0"/>
+              </a:spcAft>
+              <a:defRPr sz="1400" b="0">
+                <a:solidFill>
+                  <a:srgbClr val="FFFFFF"/>
+                </a:solidFill>
+                <a:latin typeface="DejaVu Sans Mono"/>
+              </a:defRPr>
+            </a:pPr>
             <a:r>
               <a:t>      &lt;pose&gt;1.5 0 0.5 0 0 0&lt;/pose&gt;</a:t>
             </a:r>
-            <a:br/>
+          </a:p>
+          <a:p>
+            <a:pPr algn="l">
+              <a:spcAft>
+                <a:spcPts val="0"/>
+              </a:spcAft>
+              <a:defRPr sz="1400" b="0">
+                <a:solidFill>
+                  <a:srgbClr val="FFFFFF"/>
+                </a:solidFill>
+                <a:latin typeface="DejaVu Sans Mono"/>
+              </a:defRPr>
+            </a:pPr>
             <a:r>
               <a:t>      &lt;link name="link"&gt;</a:t>
             </a:r>
-            <a:br/>
+          </a:p>
+          <a:p>
+            <a:pPr algn="l">
+              <a:spcAft>
+                <a:spcPts val="0"/>
+              </a:spcAft>
+              <a:defRPr sz="1400" b="0">
+                <a:solidFill>
+                  <a:srgbClr val="FFFFFF"/>
+                </a:solidFill>
+                <a:latin typeface="DejaVu Sans Mono"/>
+              </a:defRPr>
+            </a:pPr>
             <a:r>
               <a:t>        &lt;collision name="c"&gt;</a:t>
             </a:r>
-            <a:br/>
+          </a:p>
+          <a:p>
+            <a:pPr algn="l">
+              <a:spcAft>
+                <a:spcPts val="0"/>
+              </a:spcAft>
+              <a:defRPr sz="1400" b="0">
+                <a:solidFill>
+                  <a:srgbClr val="FFFFFF"/>
+                </a:solidFill>
+                <a:latin typeface="DejaVu Sans Mono"/>
+              </a:defRPr>
+            </a:pPr>
             <a:r>
               <a:t>          &lt;geometry&gt;</a:t>
             </a:r>
-            <a:br/>
+          </a:p>
+          <a:p>
+            <a:pPr algn="l">
+              <a:spcAft>
+                <a:spcPts val="0"/>
+              </a:spcAft>
+              <a:defRPr sz="1400" b="0">
+                <a:solidFill>
+                  <a:srgbClr val="FFFFFF"/>
+                </a:solidFill>
+                <a:latin typeface="DejaVu Sans Mono"/>
+              </a:defRPr>
+            </a:pPr>
             <a:r>
               <a:t>            &lt;box&gt;</a:t>
             </a:r>
-            <a:br/>
+          </a:p>
+          <a:p>
+            <a:pPr algn="l">
+              <a:spcAft>
+                <a:spcPts val="0"/>
+              </a:spcAft>
+              <a:defRPr sz="1400" b="0">
+                <a:solidFill>
+                  <a:srgbClr val="FFFFFF"/>
+                </a:solidFill>
+                <a:latin typeface="DejaVu Sans Mono"/>
+              </a:defRPr>
+            </a:pPr>
             <a:r>
               <a:t>              &lt;size&gt;0.25 0.25 1&lt;/size&gt;</a:t>
             </a:r>
-            <a:br/>
+          </a:p>
+          <a:p>
+            <a:pPr algn="l">
+              <a:spcAft>
+                <a:spcPts val="0"/>
+              </a:spcAft>
+              <a:defRPr sz="1400" b="0">
+                <a:solidFill>
+                  <a:srgbClr val="FFFFFF"/>
+                </a:solidFill>
+                <a:latin typeface="DejaVu Sans Mono"/>
+              </a:defRPr>
+            </a:pPr>
             <a:r>
               <a:t>            &lt;/box&gt;</a:t>
             </a:r>
-            <a:br/>
+          </a:p>
+          <a:p>
+            <a:pPr algn="l">
+              <a:spcAft>
+                <a:spcPts val="0"/>
+              </a:spcAft>
+              <a:defRPr sz="1400" b="0">
+                <a:solidFill>
+                  <a:srgbClr val="FFFFFF"/>
+                </a:solidFill>
+                <a:latin typeface="DejaVu Sans Mono"/>
+              </a:defRPr>
+            </a:pPr>
             <a:r>
               <a:t>          &lt;/geometry&gt;</a:t>
             </a:r>
-            <a:br/>
+          </a:p>
+          <a:p>
+            <a:pPr algn="l">
+              <a:spcAft>
+                <a:spcPts val="0"/>
+              </a:spcAft>
+              <a:defRPr sz="1400" b="0">
+                <a:solidFill>
+                  <a:srgbClr val="FFFFFF"/>
+                </a:solidFill>
+                <a:latin typeface="DejaVu Sans Mono"/>
+              </a:defRPr>
+            </a:pPr>
             <a:r>
               <a:t>        &lt;/collision&gt;</a:t>
             </a:r>
@@ -28244,7 +30099,7 @@
           </a:fontRef>
         </p:style>
         <p:txBody>
-          <a:bodyPr rtlCol="0" anchor="ctr" wrap="square" lIns="164592" rIns="164592" tIns="109728" bIns="36576"/>
+          <a:bodyPr rtlCol="0" anchor="ctr" wrap="square" lIns="164592" rIns="164592" tIns="109728" bIns="73152"/>
           <a:lstStyle/>
           <a:p>
             <a:pPr algn="l">
@@ -28261,47 +30116,179 @@
             <a:r>
               <a:t>        &lt;visual name="v"&gt;</a:t>
             </a:r>
-            <a:br/>
+          </a:p>
+          <a:p>
+            <a:pPr algn="l">
+              <a:spcAft>
+                <a:spcPts val="0"/>
+              </a:spcAft>
+              <a:defRPr sz="1400" b="0">
+                <a:solidFill>
+                  <a:srgbClr val="FFFFFF"/>
+                </a:solidFill>
+                <a:latin typeface="DejaVu Sans Mono"/>
+              </a:defRPr>
+            </a:pPr>
             <a:r>
               <a:t>          &lt;geometry&gt;</a:t>
             </a:r>
-            <a:br/>
+          </a:p>
+          <a:p>
+            <a:pPr algn="l">
+              <a:spcAft>
+                <a:spcPts val="0"/>
+              </a:spcAft>
+              <a:defRPr sz="1400" b="0">
+                <a:solidFill>
+                  <a:srgbClr val="FFFFFF"/>
+                </a:solidFill>
+                <a:latin typeface="DejaVu Sans Mono"/>
+              </a:defRPr>
+            </a:pPr>
             <a:r>
               <a:t>            &lt;box&gt;</a:t>
             </a:r>
-            <a:br/>
+          </a:p>
+          <a:p>
+            <a:pPr algn="l">
+              <a:spcAft>
+                <a:spcPts val="0"/>
+              </a:spcAft>
+              <a:defRPr sz="1400" b="0">
+                <a:solidFill>
+                  <a:srgbClr val="FFFFFF"/>
+                </a:solidFill>
+                <a:latin typeface="DejaVu Sans Mono"/>
+              </a:defRPr>
+            </a:pPr>
             <a:r>
               <a:t>              &lt;size&gt;0.25 0.25 1&lt;/size&gt;</a:t>
             </a:r>
-            <a:br/>
+          </a:p>
+          <a:p>
+            <a:pPr algn="l">
+              <a:spcAft>
+                <a:spcPts val="0"/>
+              </a:spcAft>
+              <a:defRPr sz="1400" b="0">
+                <a:solidFill>
+                  <a:srgbClr val="FFFFFF"/>
+                </a:solidFill>
+                <a:latin typeface="DejaVu Sans Mono"/>
+              </a:defRPr>
+            </a:pPr>
             <a:r>
               <a:t>            &lt;/box&gt;</a:t>
             </a:r>
-            <a:br/>
+          </a:p>
+          <a:p>
+            <a:pPr algn="l">
+              <a:spcAft>
+                <a:spcPts val="0"/>
+              </a:spcAft>
+              <a:defRPr sz="1400" b="0">
+                <a:solidFill>
+                  <a:srgbClr val="FFFFFF"/>
+                </a:solidFill>
+                <a:latin typeface="DejaVu Sans Mono"/>
+              </a:defRPr>
+            </a:pPr>
             <a:r>
               <a:t>          &lt;/geometry&gt;</a:t>
             </a:r>
-            <a:br/>
+          </a:p>
+          <a:p>
+            <a:pPr algn="l">
+              <a:spcAft>
+                <a:spcPts val="0"/>
+              </a:spcAft>
+              <a:defRPr sz="1400" b="0">
+                <a:solidFill>
+                  <a:srgbClr val="FFFFFF"/>
+                </a:solidFill>
+                <a:latin typeface="DejaVu Sans Mono"/>
+              </a:defRPr>
+            </a:pPr>
             <a:r>
               <a:t>          &lt;material&gt;</a:t>
             </a:r>
-            <a:br/>
+          </a:p>
+          <a:p>
+            <a:pPr algn="l">
+              <a:spcAft>
+                <a:spcPts val="0"/>
+              </a:spcAft>
+              <a:defRPr sz="1400" b="0">
+                <a:solidFill>
+                  <a:srgbClr val="FFFFFF"/>
+                </a:solidFill>
+                <a:latin typeface="DejaVu Sans Mono"/>
+              </a:defRPr>
+            </a:pPr>
             <a:r>
               <a:t>            &lt;diffuse&gt;0.9 0.05 0.05 1&lt;/diffuse&gt;</a:t>
             </a:r>
-            <a:br/>
+          </a:p>
+          <a:p>
+            <a:pPr algn="l">
+              <a:spcAft>
+                <a:spcPts val="0"/>
+              </a:spcAft>
+              <a:defRPr sz="1400" b="0">
+                <a:solidFill>
+                  <a:srgbClr val="FFFFFF"/>
+                </a:solidFill>
+                <a:latin typeface="DejaVu Sans Mono"/>
+              </a:defRPr>
+            </a:pPr>
             <a:r>
               <a:t>          &lt;/material&gt;</a:t>
             </a:r>
-            <a:br/>
+          </a:p>
+          <a:p>
+            <a:pPr algn="l">
+              <a:spcAft>
+                <a:spcPts val="0"/>
+              </a:spcAft>
+              <a:defRPr sz="1400" b="0">
+                <a:solidFill>
+                  <a:srgbClr val="FFFFFF"/>
+                </a:solidFill>
+                <a:latin typeface="DejaVu Sans Mono"/>
+              </a:defRPr>
+            </a:pPr>
             <a:r>
               <a:t>        &lt;/visual&gt;</a:t>
             </a:r>
-            <a:br/>
+          </a:p>
+          <a:p>
+            <a:pPr algn="l">
+              <a:spcAft>
+                <a:spcPts val="0"/>
+              </a:spcAft>
+              <a:defRPr sz="1400" b="0">
+                <a:solidFill>
+                  <a:srgbClr val="FFFFFF"/>
+                </a:solidFill>
+                <a:latin typeface="DejaVu Sans Mono"/>
+              </a:defRPr>
+            </a:pPr>
             <a:r>
               <a:t>      &lt;/link&gt;</a:t>
             </a:r>
-            <a:br/>
+          </a:p>
+          <a:p>
+            <a:pPr algn="l">
+              <a:spcAft>
+                <a:spcPts val="0"/>
+              </a:spcAft>
+              <a:defRPr sz="1400" b="0">
+                <a:solidFill>
+                  <a:srgbClr val="FFFFFF"/>
+                </a:solidFill>
+                <a:latin typeface="DejaVu Sans Mono"/>
+              </a:defRPr>
+            </a:pPr>
             <a:r>
               <a:t>    &lt;/model&gt;</a:t>
             </a:r>
@@ -28718,7 +30705,7 @@
           </a:fontRef>
         </p:style>
         <p:txBody>
-          <a:bodyPr rtlCol="0" anchor="ctr" wrap="square" lIns="164592" rIns="164592" tIns="109728" bIns="36576"/>
+          <a:bodyPr rtlCol="0" anchor="ctr" wrap="square" lIns="164592" rIns="164592" tIns="109728" bIns="73152"/>
           <a:lstStyle/>
           <a:p>
             <a:pPr algn="l">
@@ -28735,40 +30722,160 @@
             <a:r>
               <a:t>    </a:t>
             </a:r>
-            <a:br/>
+          </a:p>
+          <a:p>
+            <a:pPr algn="l">
+              <a:spcAft>
+                <a:spcPts val="0"/>
+              </a:spcAft>
+              <a:defRPr sz="1400" b="0">
+                <a:solidFill>
+                  <a:srgbClr val="FFFFFF"/>
+                </a:solidFill>
+                <a:latin typeface="DejaVu Sans Mono"/>
+              </a:defRPr>
+            </a:pPr>
             <a:r>
               <a:t>  </a:t>
             </a:r>
-            <a:br/>
+          </a:p>
+          <a:p>
+            <a:pPr algn="l">
+              <a:spcAft>
+                <a:spcPts val="0"/>
+              </a:spcAft>
+              <a:defRPr sz="1400" b="0">
+                <a:solidFill>
+                  <a:srgbClr val="FFFFFF"/>
+                </a:solidFill>
+                <a:latin typeface="DejaVu Sans Mono"/>
+              </a:defRPr>
+            </a:pPr>
             <a:r>
               <a:t>    &lt;include&gt;</a:t>
             </a:r>
-            <a:br/>
+          </a:p>
+          <a:p>
+            <a:pPr algn="l">
+              <a:spcAft>
+                <a:spcPts val="0"/>
+              </a:spcAft>
+              <a:defRPr sz="1400" b="0">
+                <a:solidFill>
+                  <a:srgbClr val="FFFFFF"/>
+                </a:solidFill>
+                <a:latin typeface="DejaVu Sans Mono"/>
+              </a:defRPr>
+            </a:pPr>
             <a:r>
               <a:t>      &lt;uri&gt;model://agv&lt;/uri&gt;</a:t>
             </a:r>
-            <a:br/>
+          </a:p>
+          <a:p>
+            <a:pPr algn="l">
+              <a:spcAft>
+                <a:spcPts val="0"/>
+              </a:spcAft>
+              <a:defRPr sz="1400" b="0">
+                <a:solidFill>
+                  <a:srgbClr val="FFFFFF"/>
+                </a:solidFill>
+                <a:latin typeface="DejaVu Sans Mono"/>
+              </a:defRPr>
+            </a:pPr>
             <a:r>
               <a:t>      &lt;name&gt;agv&lt;/name&gt;</a:t>
             </a:r>
-            <a:br/>
+          </a:p>
+          <a:p>
+            <a:pPr algn="l">
+              <a:spcAft>
+                <a:spcPts val="0"/>
+              </a:spcAft>
+              <a:defRPr sz="1400" b="0">
+                <a:solidFill>
+                  <a:srgbClr val="FFFFFF"/>
+                </a:solidFill>
+                <a:latin typeface="DejaVu Sans Mono"/>
+              </a:defRPr>
+            </a:pPr>
             <a:r>
               <a:t>      &lt;pose&gt;0 0 0.08 0 0 0&lt;/pose&gt;</a:t>
             </a:r>
-            <a:br/>
+          </a:p>
+          <a:p>
+            <a:pPr algn="l">
+              <a:spcAft>
+                <a:spcPts val="0"/>
+              </a:spcAft>
+              <a:defRPr sz="1400" b="0">
+                <a:solidFill>
+                  <a:srgbClr val="FFFFFF"/>
+                </a:solidFill>
+                <a:latin typeface="DejaVu Sans Mono"/>
+              </a:defRPr>
+            </a:pPr>
             <a:r>
               <a:t>    &lt;/include&gt;</a:t>
             </a:r>
-            <a:br/>
+          </a:p>
+          <a:p>
+            <a:pPr algn="l">
+              <a:spcAft>
+                <a:spcPts val="0"/>
+              </a:spcAft>
+              <a:defRPr sz="1400" b="0">
+                <a:solidFill>
+                  <a:srgbClr val="FFFFFF"/>
+                </a:solidFill>
+                <a:latin typeface="DejaVu Sans Mono"/>
+              </a:defRPr>
+            </a:pPr>
             <a:r>
               <a:t>    </a:t>
             </a:r>
-            <a:br/>
-            <a:br/>
+          </a:p>
+          <a:p>
+            <a:pPr algn="l">
+              <a:spcAft>
+                <a:spcPts val="0"/>
+              </a:spcAft>
+              <a:defRPr sz="1400" b="0">
+                <a:solidFill>
+                  <a:srgbClr val="FFFFFF"/>
+                </a:solidFill>
+                <a:latin typeface="DejaVu Sans Mono"/>
+              </a:defRPr>
+            </a:pPr>
+          </a:p>
+          <a:p>
+            <a:pPr algn="l">
+              <a:spcAft>
+                <a:spcPts val="0"/>
+              </a:spcAft>
+              <a:defRPr sz="1400" b="0">
+                <a:solidFill>
+                  <a:srgbClr val="FFFFFF"/>
+                </a:solidFill>
+                <a:latin typeface="DejaVu Sans Mono"/>
+              </a:defRPr>
+            </a:pPr>
             <a:r>
               <a:t>  &lt;/world&gt;</a:t>
             </a:r>
-            <a:br/>
+          </a:p>
+          <a:p>
+            <a:pPr algn="l">
+              <a:spcAft>
+                <a:spcPts val="0"/>
+              </a:spcAft>
+              <a:defRPr sz="1400" b="0">
+                <a:solidFill>
+                  <a:srgbClr val="FFFFFF"/>
+                </a:solidFill>
+                <a:latin typeface="DejaVu Sans Mono"/>
+              </a:defRPr>
+            </a:pPr>
             <a:r>
               <a:t>&lt;/sdf&gt;</a:t>
             </a:r>
@@ -29573,7 +31680,7 @@
           </a:fontRef>
         </p:style>
         <p:txBody>
-          <a:bodyPr rtlCol="0" anchor="ctr" wrap="square" lIns="73152" rIns="73152" tIns="36576" bIns="36576"/>
+          <a:bodyPr rtlCol="0" anchor="ctr" wrap="square" lIns="109728" rIns="109728" tIns="73152" bIns="73152"/>
           <a:lstStyle/>
           <a:p>
             <a:pPr algn="l">
@@ -29590,7 +31697,19 @@
             <a:r>
               <a:t>mkdir -p ~/ros2_curri/my_agv_ws/src/agv_mission/agv_mission</a:t>
             </a:r>
-            <a:br/>
+          </a:p>
+          <a:p>
+            <a:pPr algn="l">
+              <a:spcAft>
+                <a:spcPts val="0"/>
+              </a:spcAft>
+              <a:defRPr sz="1600" b="0">
+                <a:solidFill>
+                  <a:srgbClr val="FFFFFF"/>
+                </a:solidFill>
+                <a:latin typeface="DejaVu Sans Mono"/>
+              </a:defRPr>
+            </a:pPr>
             <a:r>
               <a:t>nano ~/ros2_curri/my_agv_ws/src/agv_mission/agv_mission/mission_manager.py</a:t>
             </a:r>
@@ -33779,7 +35898,7 @@
           </a:fontRef>
         </p:style>
         <p:txBody>
-          <a:bodyPr rtlCol="0" anchor="ctr" wrap="square" lIns="164592" rIns="164592" tIns="109728" bIns="36576"/>
+          <a:bodyPr rtlCol="0" anchor="ctr" wrap="square" lIns="164592" rIns="164592" tIns="109728" bIns="73152"/>
           <a:lstStyle/>
           <a:p>
             <a:pPr algn="l">
@@ -33796,41 +35915,173 @@
             <a:r>
               <a:t>import math</a:t>
             </a:r>
-            <a:br/>
+          </a:p>
+          <a:p>
+            <a:pPr algn="l">
+              <a:spcAft>
+                <a:spcPts val="0"/>
+              </a:spcAft>
+              <a:defRPr sz="1400" b="0">
+                <a:solidFill>
+                  <a:srgbClr val="FFFFFF"/>
+                </a:solidFill>
+                <a:latin typeface="DejaVu Sans Mono"/>
+              </a:defRPr>
+            </a:pPr>
             <a:r>
               <a:t>import rclpy</a:t>
             </a:r>
-            <a:br/>
+          </a:p>
+          <a:p>
+            <a:pPr algn="l">
+              <a:spcAft>
+                <a:spcPts val="0"/>
+              </a:spcAft>
+              <a:defRPr sz="1400" b="0">
+                <a:solidFill>
+                  <a:srgbClr val="FFFFFF"/>
+                </a:solidFill>
+                <a:latin typeface="DejaVu Sans Mono"/>
+              </a:defRPr>
+            </a:pPr>
             <a:r>
               <a:t>from rclpy.node import Node</a:t>
             </a:r>
-            <a:br/>
+          </a:p>
+          <a:p>
+            <a:pPr algn="l">
+              <a:spcAft>
+                <a:spcPts val="0"/>
+              </a:spcAft>
+              <a:defRPr sz="1400" b="0">
+                <a:solidFill>
+                  <a:srgbClr val="FFFFFF"/>
+                </a:solidFill>
+                <a:latin typeface="DejaVu Sans Mono"/>
+              </a:defRPr>
+            </a:pPr>
             <a:r>
               <a:t>from geometry_msgs.msg import Twist</a:t>
             </a:r>
-            <a:br/>
+          </a:p>
+          <a:p>
+            <a:pPr algn="l">
+              <a:spcAft>
+                <a:spcPts val="0"/>
+              </a:spcAft>
+              <a:defRPr sz="1400" b="0">
+                <a:solidFill>
+                  <a:srgbClr val="FFFFFF"/>
+                </a:solidFill>
+                <a:latin typeface="DejaVu Sans Mono"/>
+              </a:defRPr>
+            </a:pPr>
             <a:r>
               <a:t>from std_msgs.msg import Float32, String</a:t>
             </a:r>
-            <a:br/>
+          </a:p>
+          <a:p>
+            <a:pPr algn="l">
+              <a:spcAft>
+                <a:spcPts val="0"/>
+              </a:spcAft>
+              <a:defRPr sz="1400" b="0">
+                <a:solidFill>
+                  <a:srgbClr val="FFFFFF"/>
+                </a:solidFill>
+                <a:latin typeface="DejaVu Sans Mono"/>
+              </a:defRPr>
+            </a:pPr>
             <a:r>
               <a:t>from agv_interfaces.msg import DetectionArray</a:t>
             </a:r>
-            <a:br/>
-            <a:br/>
+          </a:p>
+          <a:p>
+            <a:pPr algn="l">
+              <a:spcAft>
+                <a:spcPts val="0"/>
+              </a:spcAft>
+              <a:defRPr sz="1400" b="0">
+                <a:solidFill>
+                  <a:srgbClr val="FFFFFF"/>
+                </a:solidFill>
+                <a:latin typeface="DejaVu Sans Mono"/>
+              </a:defRPr>
+            </a:pPr>
+          </a:p>
+          <a:p>
+            <a:pPr algn="l">
+              <a:spcAft>
+                <a:spcPts val="0"/>
+              </a:spcAft>
+              <a:defRPr sz="1400" b="0">
+                <a:solidFill>
+                  <a:srgbClr val="FFFFFF"/>
+                </a:solidFill>
+                <a:latin typeface="DejaVu Sans Mono"/>
+              </a:defRPr>
+            </a:pPr>
             <a:r>
               <a:t>class MissionManager(Node):</a:t>
             </a:r>
-            <a:br/>
-            <a:br/>
+          </a:p>
+          <a:p>
+            <a:pPr algn="l">
+              <a:spcAft>
+                <a:spcPts val="0"/>
+              </a:spcAft>
+              <a:defRPr sz="1400" b="0">
+                <a:solidFill>
+                  <a:srgbClr val="FFFFFF"/>
+                </a:solidFill>
+                <a:latin typeface="DejaVu Sans Mono"/>
+              </a:defRPr>
+            </a:pPr>
+          </a:p>
+          <a:p>
+            <a:pPr algn="l">
+              <a:spcAft>
+                <a:spcPts val="0"/>
+              </a:spcAft>
+              <a:defRPr sz="1400" b="0">
+                <a:solidFill>
+                  <a:srgbClr val="FFFFFF"/>
+                </a:solidFill>
+                <a:latin typeface="DejaVu Sans Mono"/>
+              </a:defRPr>
+            </a:pPr>
             <a:r>
               <a:t>    def __init__(self):</a:t>
             </a:r>
-            <a:br/>
+          </a:p>
+          <a:p>
+            <a:pPr algn="l">
+              <a:spcAft>
+                <a:spcPts val="0"/>
+              </a:spcAft>
+              <a:defRPr sz="1400" b="0">
+                <a:solidFill>
+                  <a:srgbClr val="FFFFFF"/>
+                </a:solidFill>
+                <a:latin typeface="DejaVu Sans Mono"/>
+              </a:defRPr>
+            </a:pPr>
             <a:r>
               <a:t>        super().__init__('mission_manager')</a:t>
             </a:r>
-            <a:br/>
+          </a:p>
+          <a:p>
+            <a:pPr algn="l">
+              <a:spcAft>
+                <a:spcPts val="0"/>
+              </a:spcAft>
+              <a:defRPr sz="1400" b="0">
+                <a:solidFill>
+                  <a:srgbClr val="FFFFFF"/>
+                </a:solidFill>
+                <a:latin typeface="DejaVu Sans Mono"/>
+              </a:defRPr>
+            </a:pPr>
             <a:r>
               <a:t>        self.declare_parameter('stop_distance', 0.5)</a:t>
             </a:r>
@@ -34247,7 +36498,7 @@
           </a:fontRef>
         </p:style>
         <p:txBody>
-          <a:bodyPr rtlCol="0" anchor="ctr" wrap="square" lIns="164592" rIns="164592" tIns="109728" bIns="36576"/>
+          <a:bodyPr rtlCol="0" anchor="ctr" wrap="square" lIns="164592" rIns="164592" tIns="109728" bIns="73152"/>
           <a:lstStyle/>
           <a:p>
             <a:pPr algn="l">
@@ -34264,47 +36515,179 @@
             <a:r>
               <a:t>        self.declare_parameter('search_speed', 0.25)</a:t>
             </a:r>
-            <a:br/>
+          </a:p>
+          <a:p>
+            <a:pPr algn="l">
+              <a:spcAft>
+                <a:spcPts val="0"/>
+              </a:spcAft>
+              <a:defRPr sz="1400" b="0">
+                <a:solidFill>
+                  <a:srgbClr val="FFFFFF"/>
+                </a:solidFill>
+                <a:latin typeface="DejaVu Sans Mono"/>
+              </a:defRPr>
+            </a:pPr>
             <a:r>
               <a:t>        self.declare_parameter('approach_speed', 0.15)</a:t>
             </a:r>
-            <a:br/>
+          </a:p>
+          <a:p>
+            <a:pPr algn="l">
+              <a:spcAft>
+                <a:spcPts val="0"/>
+              </a:spcAft>
+              <a:defRPr sz="1400" b="0">
+                <a:solidFill>
+                  <a:srgbClr val="FFFFFF"/>
+                </a:solidFill>
+                <a:latin typeface="DejaVu Sans Mono"/>
+              </a:defRPr>
+            </a:pPr>
             <a:r>
               <a:t>        self.declare_parameter('image_center_x', 320)</a:t>
             </a:r>
-            <a:br/>
+          </a:p>
+          <a:p>
+            <a:pPr algn="l">
+              <a:spcAft>
+                <a:spcPts val="0"/>
+              </a:spcAft>
+              <a:defRPr sz="1400" b="0">
+                <a:solidFill>
+                  <a:srgbClr val="FFFFFF"/>
+                </a:solidFill>
+                <a:latin typeface="DejaVu Sans Mono"/>
+              </a:defRPr>
+            </a:pPr>
             <a:r>
               <a:t>        self.declare_parameter('target_timeout_sec', 0.7)</a:t>
             </a:r>
-            <a:br/>
+          </a:p>
+          <a:p>
+            <a:pPr algn="l">
+              <a:spcAft>
+                <a:spcPts val="0"/>
+              </a:spcAft>
+              <a:defRPr sz="1400" b="0">
+                <a:solidFill>
+                  <a:srgbClr val="FFFFFF"/>
+                </a:solidFill>
+                <a:latin typeface="DejaVu Sans Mono"/>
+              </a:defRPr>
+            </a:pPr>
             <a:r>
               <a:t>        self.state = 'IDLE'</a:t>
             </a:r>
-            <a:br/>
+          </a:p>
+          <a:p>
+            <a:pPr algn="l">
+              <a:spcAft>
+                <a:spcPts val="0"/>
+              </a:spcAft>
+              <a:defRPr sz="1400" b="0">
+                <a:solidFill>
+                  <a:srgbClr val="FFFFFF"/>
+                </a:solidFill>
+                <a:latin typeface="DejaVu Sans Mono"/>
+              </a:defRPr>
+            </a:pPr>
             <a:r>
               <a:t>        self.obstacle_distance = math.inf</a:t>
             </a:r>
-            <a:br/>
+          </a:p>
+          <a:p>
+            <a:pPr algn="l">
+              <a:spcAft>
+                <a:spcPts val="0"/>
+              </a:spcAft>
+              <a:defRPr sz="1400" b="0">
+                <a:solidFill>
+                  <a:srgbClr val="FFFFFF"/>
+                </a:solidFill>
+                <a:latin typeface="DejaVu Sans Mono"/>
+              </a:defRPr>
+            </a:pPr>
             <a:r>
               <a:t>        self.target = None</a:t>
             </a:r>
-            <a:br/>
+          </a:p>
+          <a:p>
+            <a:pPr algn="l">
+              <a:spcAft>
+                <a:spcPts val="0"/>
+              </a:spcAft>
+              <a:defRPr sz="1400" b="0">
+                <a:solidFill>
+                  <a:srgbClr val="FFFFFF"/>
+                </a:solidFill>
+                <a:latin typeface="DejaVu Sans Mono"/>
+              </a:defRPr>
+            </a:pPr>
             <a:r>
               <a:t>        self.last_target_time = None</a:t>
             </a:r>
-            <a:br/>
+          </a:p>
+          <a:p>
+            <a:pPr algn="l">
+              <a:spcAft>
+                <a:spcPts val="0"/>
+              </a:spcAft>
+              <a:defRPr sz="1400" b="0">
+                <a:solidFill>
+                  <a:srgbClr val="FFFFFF"/>
+                </a:solidFill>
+                <a:latin typeface="DejaVu Sans Mono"/>
+              </a:defRPr>
+            </a:pPr>
             <a:r>
               <a:t>        self.create_subscription(Float32, '/obstacle_distance', self.obstacle_callback,</a:t>
             </a:r>
-            <a:br/>
+          </a:p>
+          <a:p>
+            <a:pPr algn="l">
+              <a:spcAft>
+                <a:spcPts val="0"/>
+              </a:spcAft>
+              <a:defRPr sz="1400" b="0">
+                <a:solidFill>
+                  <a:srgbClr val="FFFFFF"/>
+                </a:solidFill>
+                <a:latin typeface="DejaVu Sans Mono"/>
+              </a:defRPr>
+            </a:pPr>
             <a:r>
               <a:t>            10)</a:t>
             </a:r>
-            <a:br/>
+          </a:p>
+          <a:p>
+            <a:pPr algn="l">
+              <a:spcAft>
+                <a:spcPts val="0"/>
+              </a:spcAft>
+              <a:defRPr sz="1400" b="0">
+                <a:solidFill>
+                  <a:srgbClr val="FFFFFF"/>
+                </a:solidFill>
+                <a:latin typeface="DejaVu Sans Mono"/>
+              </a:defRPr>
+            </a:pPr>
             <a:r>
               <a:t>        self.create_subscription(DetectionArray, '/detections', self.detections_callback,</a:t>
             </a:r>
-            <a:br/>
+          </a:p>
+          <a:p>
+            <a:pPr algn="l">
+              <a:spcAft>
+                <a:spcPts val="0"/>
+              </a:spcAft>
+              <a:defRPr sz="1400" b="0">
+                <a:solidFill>
+                  <a:srgbClr val="FFFFFF"/>
+                </a:solidFill>
+                <a:latin typeface="DejaVu Sans Mono"/>
+              </a:defRPr>
+            </a:pPr>
             <a:r>
               <a:t>             10)</a:t>
             </a:r>
@@ -34721,7 +37104,7 @@
           </a:fontRef>
         </p:style>
         <p:txBody>
-          <a:bodyPr rtlCol="0" anchor="ctr" wrap="square" lIns="164592" rIns="164592" tIns="109728" bIns="36576"/>
+          <a:bodyPr rtlCol="0" anchor="ctr" wrap="square" lIns="164592" rIns="164592" tIns="109728" bIns="73152"/>
           <a:lstStyle/>
           <a:p>
             <a:pPr algn="l">
@@ -34738,41 +37121,160 @@
             <a:r>
               <a:t>        self.command_publisher = self.create_publisher(Twist, '/cmd_vel_raw', 10)</a:t>
             </a:r>
-            <a:br/>
+          </a:p>
+          <a:p>
+            <a:pPr algn="l">
+              <a:spcAft>
+                <a:spcPts val="0"/>
+              </a:spcAft>
+              <a:defRPr sz="1400" b="0">
+                <a:solidFill>
+                  <a:srgbClr val="FFFFFF"/>
+                </a:solidFill>
+                <a:latin typeface="DejaVu Sans Mono"/>
+              </a:defRPr>
+            </a:pPr>
             <a:r>
               <a:t>        self.state_publisher = self.create_publisher(String, '/mission_state', 10)</a:t>
             </a:r>
-            <a:br/>
+          </a:p>
+          <a:p>
+            <a:pPr algn="l">
+              <a:spcAft>
+                <a:spcPts val="0"/>
+              </a:spcAft>
+              <a:defRPr sz="1400" b="0">
+                <a:solidFill>
+                  <a:srgbClr val="FFFFFF"/>
+                </a:solidFill>
+                <a:latin typeface="DejaVu Sans Mono"/>
+              </a:defRPr>
+            </a:pPr>
             <a:r>
               <a:t>        self.create_timer(0.1, self.tick)</a:t>
             </a:r>
-            <a:br/>
-            <a:br/>
+          </a:p>
+          <a:p>
+            <a:pPr algn="l">
+              <a:spcAft>
+                <a:spcPts val="0"/>
+              </a:spcAft>
+              <a:defRPr sz="1400" b="0">
+                <a:solidFill>
+                  <a:srgbClr val="FFFFFF"/>
+                </a:solidFill>
+                <a:latin typeface="DejaVu Sans Mono"/>
+              </a:defRPr>
+            </a:pPr>
+          </a:p>
+          <a:p>
+            <a:pPr algn="l">
+              <a:spcAft>
+                <a:spcPts val="0"/>
+              </a:spcAft>
+              <a:defRPr sz="1400" b="0">
+                <a:solidFill>
+                  <a:srgbClr val="FFFFFF"/>
+                </a:solidFill>
+                <a:latin typeface="DejaVu Sans Mono"/>
+              </a:defRPr>
+            </a:pPr>
             <a:r>
               <a:t>    def obstacle_callback(self, message):</a:t>
             </a:r>
-            <a:br/>
+          </a:p>
+          <a:p>
+            <a:pPr algn="l">
+              <a:spcAft>
+                <a:spcPts val="0"/>
+              </a:spcAft>
+              <a:defRPr sz="1400" b="0">
+                <a:solidFill>
+                  <a:srgbClr val="FFFFFF"/>
+                </a:solidFill>
+                <a:latin typeface="DejaVu Sans Mono"/>
+              </a:defRPr>
+            </a:pPr>
             <a:r>
               <a:t>        self.obstacle_distance = message.data</a:t>
             </a:r>
-            <a:br/>
-            <a:br/>
+          </a:p>
+          <a:p>
+            <a:pPr algn="l">
+              <a:spcAft>
+                <a:spcPts val="0"/>
+              </a:spcAft>
+              <a:defRPr sz="1400" b="0">
+                <a:solidFill>
+                  <a:srgbClr val="FFFFFF"/>
+                </a:solidFill>
+                <a:latin typeface="DejaVu Sans Mono"/>
+              </a:defRPr>
+            </a:pPr>
+          </a:p>
+          <a:p>
+            <a:pPr algn="l">
+              <a:spcAft>
+                <a:spcPts val="0"/>
+              </a:spcAft>
+              <a:defRPr sz="1400" b="0">
+                <a:solidFill>
+                  <a:srgbClr val="FFFFFF"/>
+                </a:solidFill>
+                <a:latin typeface="DejaVu Sans Mono"/>
+              </a:defRPr>
+            </a:pPr>
             <a:r>
               <a:t>    def detections_callback(self, message):</a:t>
             </a:r>
-            <a:br/>
+          </a:p>
+          <a:p>
+            <a:pPr algn="l">
+              <a:spcAft>
+                <a:spcPts val="0"/>
+              </a:spcAft>
+              <a:defRPr sz="1400" b="0">
+                <a:solidFill>
+                  <a:srgbClr val="FFFFFF"/>
+                </a:solidFill>
+                <a:latin typeface="DejaVu Sans Mono"/>
+              </a:defRPr>
+            </a:pPr>
             <a:r>
               <a:t>        if message.detections:</a:t>
             </a:r>
-            <a:br/>
+          </a:p>
+          <a:p>
+            <a:pPr algn="l">
+              <a:spcAft>
+                <a:spcPts val="0"/>
+              </a:spcAft>
+              <a:defRPr sz="1400" b="0">
+                <a:solidFill>
+                  <a:srgbClr val="FFFFFF"/>
+                </a:solidFill>
+                <a:latin typeface="DejaVu Sans Mono"/>
+              </a:defRPr>
+            </a:pPr>
             <a:r>
               <a:t>            self.target = message.detections[0]</a:t>
             </a:r>
-            <a:br/>
+          </a:p>
+          <a:p>
+            <a:pPr algn="l">
+              <a:spcAft>
+                <a:spcPts val="0"/>
+              </a:spcAft>
+              <a:defRPr sz="1400" b="0">
+                <a:solidFill>
+                  <a:srgbClr val="FFFFFF"/>
+                </a:solidFill>
+                <a:latin typeface="DejaVu Sans Mono"/>
+              </a:defRPr>
+            </a:pPr>
             <a:r>
               <a:t>            self.last_target_time = self.get_clock().now()</a:t>
             </a:r>
-            <a:br/>
           </a:p>
         </p:txBody>
       </p:sp>
@@ -35186,7 +37688,7 @@
           </a:fontRef>
         </p:style>
         <p:txBody>
-          <a:bodyPr rtlCol="0" anchor="ctr" wrap="square" lIns="164592" rIns="164592" tIns="109728" bIns="36576"/>
+          <a:bodyPr rtlCol="0" anchor="ctr" wrap="square" lIns="164592" rIns="164592" tIns="109728" bIns="73152"/>
           <a:lstStyle/>
           <a:p>
             <a:pPr algn="l">
@@ -35203,44 +37705,176 @@
             <a:r>
               <a:t>    def set_state(self, state):</a:t>
             </a:r>
-            <a:br/>
+          </a:p>
+          <a:p>
+            <a:pPr algn="l">
+              <a:spcAft>
+                <a:spcPts val="0"/>
+              </a:spcAft>
+              <a:defRPr sz="1400" b="0">
+                <a:solidFill>
+                  <a:srgbClr val="FFFFFF"/>
+                </a:solidFill>
+                <a:latin typeface="DejaVu Sans Mono"/>
+              </a:defRPr>
+            </a:pPr>
             <a:r>
               <a:t>        if state != self.state:</a:t>
             </a:r>
-            <a:br/>
+          </a:p>
+          <a:p>
+            <a:pPr algn="l">
+              <a:spcAft>
+                <a:spcPts val="0"/>
+              </a:spcAft>
+              <a:defRPr sz="1400" b="0">
+                <a:solidFill>
+                  <a:srgbClr val="FFFFFF"/>
+                </a:solidFill>
+                <a:latin typeface="DejaVu Sans Mono"/>
+              </a:defRPr>
+            </a:pPr>
             <a:r>
               <a:t>            self.state = state</a:t>
             </a:r>
-            <a:br/>
+          </a:p>
+          <a:p>
+            <a:pPr algn="l">
+              <a:spcAft>
+                <a:spcPts val="0"/>
+              </a:spcAft>
+              <a:defRPr sz="1400" b="0">
+                <a:solidFill>
+                  <a:srgbClr val="FFFFFF"/>
+                </a:solidFill>
+                <a:latin typeface="DejaVu Sans Mono"/>
+              </a:defRPr>
+            </a:pPr>
             <a:r>
               <a:t>            self.get_logger().info('mission state -&gt; ' + state)</a:t>
             </a:r>
-            <a:br/>
+          </a:p>
+          <a:p>
+            <a:pPr algn="l">
+              <a:spcAft>
+                <a:spcPts val="0"/>
+              </a:spcAft>
+              <a:defRPr sz="1400" b="0">
+                <a:solidFill>
+                  <a:srgbClr val="FFFFFF"/>
+                </a:solidFill>
+                <a:latin typeface="DejaVu Sans Mono"/>
+              </a:defRPr>
+            </a:pPr>
             <a:r>
               <a:t>        self.state_publisher.publish(String(data=self.state))</a:t>
             </a:r>
-            <a:br/>
-            <a:br/>
+          </a:p>
+          <a:p>
+            <a:pPr algn="l">
+              <a:spcAft>
+                <a:spcPts val="0"/>
+              </a:spcAft>
+              <a:defRPr sz="1400" b="0">
+                <a:solidFill>
+                  <a:srgbClr val="FFFFFF"/>
+                </a:solidFill>
+                <a:latin typeface="DejaVu Sans Mono"/>
+              </a:defRPr>
+            </a:pPr>
+          </a:p>
+          <a:p>
+            <a:pPr algn="l">
+              <a:spcAft>
+                <a:spcPts val="0"/>
+              </a:spcAft>
+              <a:defRPr sz="1400" b="0">
+                <a:solidFill>
+                  <a:srgbClr val="FFFFFF"/>
+                </a:solidFill>
+                <a:latin typeface="DejaVu Sans Mono"/>
+              </a:defRPr>
+            </a:pPr>
             <a:r>
               <a:t>    def tick(self):</a:t>
             </a:r>
-            <a:br/>
+          </a:p>
+          <a:p>
+            <a:pPr algn="l">
+              <a:spcAft>
+                <a:spcPts val="0"/>
+              </a:spcAft>
+              <a:defRPr sz="1400" b="0">
+                <a:solidFill>
+                  <a:srgbClr val="FFFFFF"/>
+                </a:solidFill>
+                <a:latin typeface="DejaVu Sans Mono"/>
+              </a:defRPr>
+            </a:pPr>
             <a:r>
               <a:t>        command = Twist()</a:t>
             </a:r>
-            <a:br/>
+          </a:p>
+          <a:p>
+            <a:pPr algn="l">
+              <a:spcAft>
+                <a:spcPts val="0"/>
+              </a:spcAft>
+              <a:defRPr sz="1400" b="0">
+                <a:solidFill>
+                  <a:srgbClr val="FFFFFF"/>
+                </a:solidFill>
+                <a:latin typeface="DejaVu Sans Mono"/>
+              </a:defRPr>
+            </a:pPr>
             <a:r>
               <a:t>        if self.last_target_time is not None:</a:t>
             </a:r>
-            <a:br/>
+          </a:p>
+          <a:p>
+            <a:pPr algn="l">
+              <a:spcAft>
+                <a:spcPts val="0"/>
+              </a:spcAft>
+              <a:defRPr sz="1400" b="0">
+                <a:solidFill>
+                  <a:srgbClr val="FFFFFF"/>
+                </a:solidFill>
+                <a:latin typeface="DejaVu Sans Mono"/>
+              </a:defRPr>
+            </a:pPr>
             <a:r>
               <a:t>            age = (self.get_clock().now() - self.last_target_time).nanoseconds / 1000000000.0</a:t>
             </a:r>
-            <a:br/>
+          </a:p>
+          <a:p>
+            <a:pPr algn="l">
+              <a:spcAft>
+                <a:spcPts val="0"/>
+              </a:spcAft>
+              <a:defRPr sz="1400" b="0">
+                <a:solidFill>
+                  <a:srgbClr val="FFFFFF"/>
+                </a:solidFill>
+                <a:latin typeface="DejaVu Sans Mono"/>
+              </a:defRPr>
+            </a:pPr>
             <a:r>
               <a:t>            if age &gt; self.get_parameter('target_timeout_sec').value:</a:t>
             </a:r>
-            <a:br/>
+          </a:p>
+          <a:p>
+            <a:pPr algn="l">
+              <a:spcAft>
+                <a:spcPts val="0"/>
+              </a:spcAft>
+              <a:defRPr sz="1400" b="0">
+                <a:solidFill>
+                  <a:srgbClr val="FFFFFF"/>
+                </a:solidFill>
+                <a:latin typeface="DejaVu Sans Mono"/>
+              </a:defRPr>
+            </a:pPr>
             <a:r>
               <a:t>                self.target = None</a:t>
             </a:r>
@@ -36297,7 +38931,7 @@
           </a:fontRef>
         </p:style>
         <p:txBody>
-          <a:bodyPr rtlCol="0" anchor="ctr" wrap="square" lIns="164592" rIns="164592" tIns="109728" bIns="36576"/>
+          <a:bodyPr rtlCol="0" anchor="ctr" wrap="square" lIns="164592" rIns="164592" tIns="109728" bIns="73152"/>
           <a:lstStyle/>
           <a:p>
             <a:pPr algn="l">
@@ -36314,47 +38948,179 @@
             <a:r>
               <a:t>        if self.obstacle_distance &lt; self.get_parameter('stop_distance').value:</a:t>
             </a:r>
-            <a:br/>
+          </a:p>
+          <a:p>
+            <a:pPr algn="l">
+              <a:spcAft>
+                <a:spcPts val="0"/>
+              </a:spcAft>
+              <a:defRPr sz="1400" b="0">
+                <a:solidFill>
+                  <a:srgbClr val="FFFFFF"/>
+                </a:solidFill>
+                <a:latin typeface="DejaVu Sans Mono"/>
+              </a:defRPr>
+            </a:pPr>
             <a:r>
               <a:t>            self.set_state('AVOID')</a:t>
             </a:r>
-            <a:br/>
+          </a:p>
+          <a:p>
+            <a:pPr algn="l">
+              <a:spcAft>
+                <a:spcPts val="0"/>
+              </a:spcAft>
+              <a:defRPr sz="1400" b="0">
+                <a:solidFill>
+                  <a:srgbClr val="FFFFFF"/>
+                </a:solidFill>
+                <a:latin typeface="DejaVu Sans Mono"/>
+              </a:defRPr>
+            </a:pPr>
             <a:r>
               <a:t>            command.angular.z = self.get_parameter('search_speed').value</a:t>
             </a:r>
-            <a:br/>
+          </a:p>
+          <a:p>
+            <a:pPr algn="l">
+              <a:spcAft>
+                <a:spcPts val="0"/>
+              </a:spcAft>
+              <a:defRPr sz="1400" b="0">
+                <a:solidFill>
+                  <a:srgbClr val="FFFFFF"/>
+                </a:solidFill>
+                <a:latin typeface="DejaVu Sans Mono"/>
+              </a:defRPr>
+            </a:pPr>
             <a:r>
               <a:t>        elif self.target is None:</a:t>
             </a:r>
-            <a:br/>
+          </a:p>
+          <a:p>
+            <a:pPr algn="l">
+              <a:spcAft>
+                <a:spcPts val="0"/>
+              </a:spcAft>
+              <a:defRPr sz="1400" b="0">
+                <a:solidFill>
+                  <a:srgbClr val="FFFFFF"/>
+                </a:solidFill>
+                <a:latin typeface="DejaVu Sans Mono"/>
+              </a:defRPr>
+            </a:pPr>
             <a:r>
               <a:t>            self.set_state('SEARCH')</a:t>
             </a:r>
-            <a:br/>
+          </a:p>
+          <a:p>
+            <a:pPr algn="l">
+              <a:spcAft>
+                <a:spcPts val="0"/>
+              </a:spcAft>
+              <a:defRPr sz="1400" b="0">
+                <a:solidFill>
+                  <a:srgbClr val="FFFFFF"/>
+                </a:solidFill>
+                <a:latin typeface="DejaVu Sans Mono"/>
+              </a:defRPr>
+            </a:pPr>
             <a:r>
               <a:t>            command.angular.z = self.get_parameter('search_speed').value</a:t>
             </a:r>
-            <a:br/>
+          </a:p>
+          <a:p>
+            <a:pPr algn="l">
+              <a:spcAft>
+                <a:spcPts val="0"/>
+              </a:spcAft>
+              <a:defRPr sz="1400" b="0">
+                <a:solidFill>
+                  <a:srgbClr val="FFFFFF"/>
+                </a:solidFill>
+                <a:latin typeface="DejaVu Sans Mono"/>
+              </a:defRPr>
+            </a:pPr>
             <a:r>
               <a:t>        elif self.target.estimated_distance &gt; 0.0 and self.target.estimated_distance &lt; self.get_parameter('stop_distance').value:</a:t>
             </a:r>
-            <a:br/>
+          </a:p>
+          <a:p>
+            <a:pPr algn="l">
+              <a:spcAft>
+                <a:spcPts val="0"/>
+              </a:spcAft>
+              <a:defRPr sz="1400" b="0">
+                <a:solidFill>
+                  <a:srgbClr val="FFFFFF"/>
+                </a:solidFill>
+                <a:latin typeface="DejaVu Sans Mono"/>
+              </a:defRPr>
+            </a:pPr>
             <a:r>
               <a:t>            self.set_state('GOAL')</a:t>
             </a:r>
-            <a:br/>
+          </a:p>
+          <a:p>
+            <a:pPr algn="l">
+              <a:spcAft>
+                <a:spcPts val="0"/>
+              </a:spcAft>
+              <a:defRPr sz="1400" b="0">
+                <a:solidFill>
+                  <a:srgbClr val="FFFFFF"/>
+                </a:solidFill>
+                <a:latin typeface="DejaVu Sans Mono"/>
+              </a:defRPr>
+            </a:pPr>
             <a:r>
               <a:t>        else:</a:t>
             </a:r>
-            <a:br/>
+          </a:p>
+          <a:p>
+            <a:pPr algn="l">
+              <a:spcAft>
+                <a:spcPts val="0"/>
+              </a:spcAft>
+              <a:defRPr sz="1400" b="0">
+                <a:solidFill>
+                  <a:srgbClr val="FFFFFF"/>
+                </a:solidFill>
+                <a:latin typeface="DejaVu Sans Mono"/>
+              </a:defRPr>
+            </a:pPr>
             <a:r>
               <a:t>            self.set_state('APPROACH')</a:t>
             </a:r>
-            <a:br/>
+          </a:p>
+          <a:p>
+            <a:pPr algn="l">
+              <a:spcAft>
+                <a:spcPts val="0"/>
+              </a:spcAft>
+              <a:defRPr sz="1400" b="0">
+                <a:solidFill>
+                  <a:srgbClr val="FFFFFF"/>
+                </a:solidFill>
+                <a:latin typeface="DejaVu Sans Mono"/>
+              </a:defRPr>
+            </a:pPr>
             <a:r>
               <a:t>            command.linear.x = self.get_parameter('approach_speed').value</a:t>
             </a:r>
-            <a:br/>
+          </a:p>
+          <a:p>
+            <a:pPr algn="l">
+              <a:spcAft>
+                <a:spcPts val="0"/>
+              </a:spcAft>
+              <a:defRPr sz="1400" b="0">
+                <a:solidFill>
+                  <a:srgbClr val="FFFFFF"/>
+                </a:solidFill>
+                <a:latin typeface="DejaVu Sans Mono"/>
+              </a:defRPr>
+            </a:pPr>
             <a:r>
               <a:t>            error = self.target.center_x - self.get_parameter('image_center_x').value</a:t>
             </a:r>
@@ -36771,7 +39537,7 @@
           </a:fontRef>
         </p:style>
         <p:txBody>
-          <a:bodyPr rtlCol="0" anchor="ctr" wrap="square" lIns="164592" rIns="164592" tIns="109728" bIns="36576"/>
+          <a:bodyPr rtlCol="0" anchor="ctr" wrap="square" lIns="164592" rIns="164592" tIns="109728" bIns="73152"/>
           <a:lstStyle/>
           <a:p>
             <a:pPr algn="l">
@@ -36788,44 +39554,176 @@
             <a:r>
               <a:t>            command.angular.z = max(min(-0.004 * error, 0.6), -0.6)</a:t>
             </a:r>
-            <a:br/>
+          </a:p>
+          <a:p>
+            <a:pPr algn="l">
+              <a:spcAft>
+                <a:spcPts val="0"/>
+              </a:spcAft>
+              <a:defRPr sz="1400" b="0">
+                <a:solidFill>
+                  <a:srgbClr val="FFFFFF"/>
+                </a:solidFill>
+                <a:latin typeface="DejaVu Sans Mono"/>
+              </a:defRPr>
+            </a:pPr>
             <a:r>
               <a:t>        self.command_publisher.publish(command)</a:t>
             </a:r>
-            <a:br/>
-            <a:br/>
+          </a:p>
+          <a:p>
+            <a:pPr algn="l">
+              <a:spcAft>
+                <a:spcPts val="0"/>
+              </a:spcAft>
+              <a:defRPr sz="1400" b="0">
+                <a:solidFill>
+                  <a:srgbClr val="FFFFFF"/>
+                </a:solidFill>
+                <a:latin typeface="DejaVu Sans Mono"/>
+              </a:defRPr>
+            </a:pPr>
+          </a:p>
+          <a:p>
+            <a:pPr algn="l">
+              <a:spcAft>
+                <a:spcPts val="0"/>
+              </a:spcAft>
+              <a:defRPr sz="1400" b="0">
+                <a:solidFill>
+                  <a:srgbClr val="FFFFFF"/>
+                </a:solidFill>
+                <a:latin typeface="DejaVu Sans Mono"/>
+              </a:defRPr>
+            </a:pPr>
             <a:r>
               <a:t>def main():</a:t>
             </a:r>
-            <a:br/>
+          </a:p>
+          <a:p>
+            <a:pPr algn="l">
+              <a:spcAft>
+                <a:spcPts val="0"/>
+              </a:spcAft>
+              <a:defRPr sz="1400" b="0">
+                <a:solidFill>
+                  <a:srgbClr val="FFFFFF"/>
+                </a:solidFill>
+                <a:latin typeface="DejaVu Sans Mono"/>
+              </a:defRPr>
+            </a:pPr>
             <a:r>
               <a:t>    rclpy.init()</a:t>
             </a:r>
-            <a:br/>
+          </a:p>
+          <a:p>
+            <a:pPr algn="l">
+              <a:spcAft>
+                <a:spcPts val="0"/>
+              </a:spcAft>
+              <a:defRPr sz="1400" b="0">
+                <a:solidFill>
+                  <a:srgbClr val="FFFFFF"/>
+                </a:solidFill>
+                <a:latin typeface="DejaVu Sans Mono"/>
+              </a:defRPr>
+            </a:pPr>
             <a:r>
               <a:t>    node = MissionManager()</a:t>
             </a:r>
-            <a:br/>
+          </a:p>
+          <a:p>
+            <a:pPr algn="l">
+              <a:spcAft>
+                <a:spcPts val="0"/>
+              </a:spcAft>
+              <a:defRPr sz="1400" b="0">
+                <a:solidFill>
+                  <a:srgbClr val="FFFFFF"/>
+                </a:solidFill>
+                <a:latin typeface="DejaVu Sans Mono"/>
+              </a:defRPr>
+            </a:pPr>
             <a:r>
               <a:t>    try:</a:t>
             </a:r>
-            <a:br/>
+          </a:p>
+          <a:p>
+            <a:pPr algn="l">
+              <a:spcAft>
+                <a:spcPts val="0"/>
+              </a:spcAft>
+              <a:defRPr sz="1400" b="0">
+                <a:solidFill>
+                  <a:srgbClr val="FFFFFF"/>
+                </a:solidFill>
+                <a:latin typeface="DejaVu Sans Mono"/>
+              </a:defRPr>
+            </a:pPr>
             <a:r>
               <a:t>        rclpy.spin(node)</a:t>
             </a:r>
-            <a:br/>
+          </a:p>
+          <a:p>
+            <a:pPr algn="l">
+              <a:spcAft>
+                <a:spcPts val="0"/>
+              </a:spcAft>
+              <a:defRPr sz="1400" b="0">
+                <a:solidFill>
+                  <a:srgbClr val="FFFFFF"/>
+                </a:solidFill>
+                <a:latin typeface="DejaVu Sans Mono"/>
+              </a:defRPr>
+            </a:pPr>
             <a:r>
               <a:t>    except KeyboardInterrupt:</a:t>
             </a:r>
-            <a:br/>
+          </a:p>
+          <a:p>
+            <a:pPr algn="l">
+              <a:spcAft>
+                <a:spcPts val="0"/>
+              </a:spcAft>
+              <a:defRPr sz="1400" b="0">
+                <a:solidFill>
+                  <a:srgbClr val="FFFFFF"/>
+                </a:solidFill>
+                <a:latin typeface="DejaVu Sans Mono"/>
+              </a:defRPr>
+            </a:pPr>
             <a:r>
               <a:t>        pass</a:t>
             </a:r>
-            <a:br/>
+          </a:p>
+          <a:p>
+            <a:pPr algn="l">
+              <a:spcAft>
+                <a:spcPts val="0"/>
+              </a:spcAft>
+              <a:defRPr sz="1400" b="0">
+                <a:solidFill>
+                  <a:srgbClr val="FFFFFF"/>
+                </a:solidFill>
+                <a:latin typeface="DejaVu Sans Mono"/>
+              </a:defRPr>
+            </a:pPr>
             <a:r>
               <a:t>    finally:</a:t>
             </a:r>
-            <a:br/>
+          </a:p>
+          <a:p>
+            <a:pPr algn="l">
+              <a:spcAft>
+                <a:spcPts val="0"/>
+              </a:spcAft>
+              <a:defRPr sz="1400" b="0">
+                <a:solidFill>
+                  <a:srgbClr val="FFFFFF"/>
+                </a:solidFill>
+                <a:latin typeface="DejaVu Sans Mono"/>
+              </a:defRPr>
+            </a:pPr>
             <a:r>
               <a:t>        node.destroy_node()</a:t>
             </a:r>
@@ -37242,7 +40140,7 @@
           </a:fontRef>
         </p:style>
         <p:txBody>
-          <a:bodyPr rtlCol="0" anchor="ctr" wrap="square" lIns="164592" rIns="164592" tIns="109728" bIns="36576"/>
+          <a:bodyPr rtlCol="0" anchor="ctr" wrap="square" lIns="164592" rIns="164592" tIns="109728" bIns="73152"/>
           <a:lstStyle/>
           <a:p>
             <a:pPr algn="l">
@@ -37259,7 +40157,19 @@
             <a:r>
               <a:t>        if rclpy.ok():</a:t>
             </a:r>
-            <a:br/>
+          </a:p>
+          <a:p>
+            <a:pPr algn="l">
+              <a:spcAft>
+                <a:spcPts val="0"/>
+              </a:spcAft>
+              <a:defRPr sz="1400" b="0">
+                <a:solidFill>
+                  <a:srgbClr val="FFFFFF"/>
+                </a:solidFill>
+                <a:latin typeface="DejaVu Sans Mono"/>
+              </a:defRPr>
+            </a:pPr>
             <a:r>
               <a:t>            rclpy.shutdown()</a:t>
             </a:r>
@@ -37731,7 +40641,7 @@
           </a:fontRef>
         </p:style>
         <p:txBody>
-          <a:bodyPr rtlCol="0" anchor="ctr" wrap="square" lIns="73152" rIns="73152" tIns="36576" bIns="36576"/>
+          <a:bodyPr rtlCol="0" anchor="ctr" wrap="square" lIns="109728" rIns="109728" tIns="73152" bIns="73152"/>
           <a:lstStyle/>
           <a:p>
             <a:pPr algn="l">
@@ -37748,7 +40658,19 @@
             <a:r>
               <a:t>mkdir -p ~/ros2_curri/my_agv_ws/src/agv_control/agv_control</a:t>
             </a:r>
-            <a:br/>
+          </a:p>
+          <a:p>
+            <a:pPr algn="l">
+              <a:spcAft>
+                <a:spcPts val="0"/>
+              </a:spcAft>
+              <a:defRPr sz="1600" b="0">
+                <a:solidFill>
+                  <a:srgbClr val="FFFFFF"/>
+                </a:solidFill>
+                <a:latin typeface="DejaVu Sans Mono"/>
+              </a:defRPr>
+            </a:pPr>
             <a:r>
               <a:t>nano ~/ros2_curri/my_agv_ws/src/agv_control/agv_control/safety_controller.py</a:t>
             </a:r>
@@ -41945,7 +44867,7 @@
           </a:fontRef>
         </p:style>
         <p:txBody>
-          <a:bodyPr rtlCol="0" anchor="ctr" wrap="square" lIns="164592" rIns="164592" tIns="109728" bIns="36576"/>
+          <a:bodyPr rtlCol="0" anchor="ctr" wrap="square" lIns="164592" rIns="164592" tIns="109728" bIns="73152"/>
           <a:lstStyle/>
           <a:p>
             <a:pPr algn="l">
@@ -41962,41 +44884,173 @@
             <a:r>
               <a:t>import math</a:t>
             </a:r>
-            <a:br/>
+          </a:p>
+          <a:p>
+            <a:pPr algn="l">
+              <a:spcAft>
+                <a:spcPts val="0"/>
+              </a:spcAft>
+              <a:defRPr sz="1400" b="0">
+                <a:solidFill>
+                  <a:srgbClr val="FFFFFF"/>
+                </a:solidFill>
+                <a:latin typeface="DejaVu Sans Mono"/>
+              </a:defRPr>
+            </a:pPr>
             <a:r>
               <a:t>import rclpy</a:t>
             </a:r>
-            <a:br/>
+          </a:p>
+          <a:p>
+            <a:pPr algn="l">
+              <a:spcAft>
+                <a:spcPts val="0"/>
+              </a:spcAft>
+              <a:defRPr sz="1400" b="0">
+                <a:solidFill>
+                  <a:srgbClr val="FFFFFF"/>
+                </a:solidFill>
+                <a:latin typeface="DejaVu Sans Mono"/>
+              </a:defRPr>
+            </a:pPr>
             <a:r>
               <a:t>from rclpy.node import Node</a:t>
             </a:r>
-            <a:br/>
+          </a:p>
+          <a:p>
+            <a:pPr algn="l">
+              <a:spcAft>
+                <a:spcPts val="0"/>
+              </a:spcAft>
+              <a:defRPr sz="1400" b="0">
+                <a:solidFill>
+                  <a:srgbClr val="FFFFFF"/>
+                </a:solidFill>
+                <a:latin typeface="DejaVu Sans Mono"/>
+              </a:defRPr>
+            </a:pPr>
             <a:r>
               <a:t>from geometry_msgs.msg import Twist</a:t>
             </a:r>
-            <a:br/>
+          </a:p>
+          <a:p>
+            <a:pPr algn="l">
+              <a:spcAft>
+                <a:spcPts val="0"/>
+              </a:spcAft>
+              <a:defRPr sz="1400" b="0">
+                <a:solidFill>
+                  <a:srgbClr val="FFFFFF"/>
+                </a:solidFill>
+                <a:latin typeface="DejaVu Sans Mono"/>
+              </a:defRPr>
+            </a:pPr>
             <a:r>
               <a:t>from sensor_msgs.msg import LaserScan</a:t>
             </a:r>
-            <a:br/>
-            <a:br/>
+          </a:p>
+          <a:p>
+            <a:pPr algn="l">
+              <a:spcAft>
+                <a:spcPts val="0"/>
+              </a:spcAft>
+              <a:defRPr sz="1400" b="0">
+                <a:solidFill>
+                  <a:srgbClr val="FFFFFF"/>
+                </a:solidFill>
+                <a:latin typeface="DejaVu Sans Mono"/>
+              </a:defRPr>
+            </a:pPr>
+          </a:p>
+          <a:p>
+            <a:pPr algn="l">
+              <a:spcAft>
+                <a:spcPts val="0"/>
+              </a:spcAft>
+              <a:defRPr sz="1400" b="0">
+                <a:solidFill>
+                  <a:srgbClr val="FFFFFF"/>
+                </a:solidFill>
+                <a:latin typeface="DejaVu Sans Mono"/>
+              </a:defRPr>
+            </a:pPr>
             <a:r>
               <a:t>class SafetyController(Node):</a:t>
             </a:r>
-            <a:br/>
+          </a:p>
+          <a:p>
+            <a:pPr algn="l">
+              <a:spcAft>
+                <a:spcPts val="0"/>
+              </a:spcAft>
+              <a:defRPr sz="1400" b="0">
+                <a:solidFill>
+                  <a:srgbClr val="FFFFFF"/>
+                </a:solidFill>
+                <a:latin typeface="DejaVu Sans Mono"/>
+              </a:defRPr>
+            </a:pPr>
             <a:r>
               <a:t>    """Pass a desired command through unless an obstacle is within stop_distance."""</a:t>
             </a:r>
-            <a:br/>
-            <a:br/>
+          </a:p>
+          <a:p>
+            <a:pPr algn="l">
+              <a:spcAft>
+                <a:spcPts val="0"/>
+              </a:spcAft>
+              <a:defRPr sz="1400" b="0">
+                <a:solidFill>
+                  <a:srgbClr val="FFFFFF"/>
+                </a:solidFill>
+                <a:latin typeface="DejaVu Sans Mono"/>
+              </a:defRPr>
+            </a:pPr>
+          </a:p>
+          <a:p>
+            <a:pPr algn="l">
+              <a:spcAft>
+                <a:spcPts val="0"/>
+              </a:spcAft>
+              <a:defRPr sz="1400" b="0">
+                <a:solidFill>
+                  <a:srgbClr val="FFFFFF"/>
+                </a:solidFill>
+                <a:latin typeface="DejaVu Sans Mono"/>
+              </a:defRPr>
+            </a:pPr>
             <a:r>
               <a:t>    def __init__(self):</a:t>
             </a:r>
-            <a:br/>
+          </a:p>
+          <a:p>
+            <a:pPr algn="l">
+              <a:spcAft>
+                <a:spcPts val="0"/>
+              </a:spcAft>
+              <a:defRPr sz="1400" b="0">
+                <a:solidFill>
+                  <a:srgbClr val="FFFFFF"/>
+                </a:solidFill>
+                <a:latin typeface="DejaVu Sans Mono"/>
+              </a:defRPr>
+            </a:pPr>
             <a:r>
               <a:t>        super().__init__('safety_controller')</a:t>
             </a:r>
-            <a:br/>
+          </a:p>
+          <a:p>
+            <a:pPr algn="l">
+              <a:spcAft>
+                <a:spcPts val="0"/>
+              </a:spcAft>
+              <a:defRPr sz="1400" b="0">
+                <a:solidFill>
+                  <a:srgbClr val="FFFFFF"/>
+                </a:solidFill>
+                <a:latin typeface="DejaVu Sans Mono"/>
+              </a:defRPr>
+            </a:pPr>
             <a:r>
               <a:t>        self.declare_parameter('stop_distance', 0.5)</a:t>
             </a:r>
@@ -42650,7 +45704,7 @@
           </a:fontRef>
         </p:style>
         <p:txBody>
-          <a:bodyPr rtlCol="0" anchor="ctr" wrap="square" lIns="164592" rIns="164592" tIns="109728" bIns="36576"/>
+          <a:bodyPr rtlCol="0" anchor="ctr" wrap="square" lIns="164592" rIns="164592" tIns="109728" bIns="73152"/>
           <a:lstStyle/>
           <a:p>
             <a:pPr algn="l">
@@ -42667,44 +45721,163 @@
             <a:r>
               <a:t>        self.declare_parameter('front_half_angle_deg', 15.0)</a:t>
             </a:r>
-            <a:br/>
+          </a:p>
+          <a:p>
+            <a:pPr algn="l">
+              <a:spcAft>
+                <a:spcPts val="0"/>
+              </a:spcAft>
+              <a:defRPr sz="1400" b="0">
+                <a:solidFill>
+                  <a:srgbClr val="FFFFFF"/>
+                </a:solidFill>
+                <a:latin typeface="DejaVu Sans Mono"/>
+              </a:defRPr>
+            </a:pPr>
             <a:r>
               <a:t>        self.obstacle_distance = math.inf</a:t>
             </a:r>
-            <a:br/>
+          </a:p>
+          <a:p>
+            <a:pPr algn="l">
+              <a:spcAft>
+                <a:spcPts val="0"/>
+              </a:spcAft>
+              <a:defRPr sz="1400" b="0">
+                <a:solidFill>
+                  <a:srgbClr val="FFFFFF"/>
+                </a:solidFill>
+                <a:latin typeface="DejaVu Sans Mono"/>
+              </a:defRPr>
+            </a:pPr>
             <a:r>
               <a:t>        self.create_subscription(LaserScan, '/scan', self.scan_callback, 10)</a:t>
             </a:r>
-            <a:br/>
+          </a:p>
+          <a:p>
+            <a:pPr algn="l">
+              <a:spcAft>
+                <a:spcPts val="0"/>
+              </a:spcAft>
+              <a:defRPr sz="1400" b="0">
+                <a:solidFill>
+                  <a:srgbClr val="FFFFFF"/>
+                </a:solidFill>
+                <a:latin typeface="DejaVu Sans Mono"/>
+              </a:defRPr>
+            </a:pPr>
             <a:r>
               <a:t>        self.create_subscription(Twist, '/cmd_vel_raw', self.command_callback, 10)</a:t>
             </a:r>
-            <a:br/>
+          </a:p>
+          <a:p>
+            <a:pPr algn="l">
+              <a:spcAft>
+                <a:spcPts val="0"/>
+              </a:spcAft>
+              <a:defRPr sz="1400" b="0">
+                <a:solidFill>
+                  <a:srgbClr val="FFFFFF"/>
+                </a:solidFill>
+                <a:latin typeface="DejaVu Sans Mono"/>
+              </a:defRPr>
+            </a:pPr>
             <a:r>
               <a:t>        self.publisher = self.create_publisher(Twist, '/cmd_vel', 10)</a:t>
             </a:r>
-            <a:br/>
-            <a:br/>
+          </a:p>
+          <a:p>
+            <a:pPr algn="l">
+              <a:spcAft>
+                <a:spcPts val="0"/>
+              </a:spcAft>
+              <a:defRPr sz="1400" b="0">
+                <a:solidFill>
+                  <a:srgbClr val="FFFFFF"/>
+                </a:solidFill>
+                <a:latin typeface="DejaVu Sans Mono"/>
+              </a:defRPr>
+            </a:pPr>
+          </a:p>
+          <a:p>
+            <a:pPr algn="l">
+              <a:spcAft>
+                <a:spcPts val="0"/>
+              </a:spcAft>
+              <a:defRPr sz="1400" b="0">
+                <a:solidFill>
+                  <a:srgbClr val="FFFFFF"/>
+                </a:solidFill>
+                <a:latin typeface="DejaVu Sans Mono"/>
+              </a:defRPr>
+            </a:pPr>
             <a:r>
               <a:t>    def scan_callback(self, scan):</a:t>
             </a:r>
-            <a:br/>
+          </a:p>
+          <a:p>
+            <a:pPr algn="l">
+              <a:spcAft>
+                <a:spcPts val="0"/>
+              </a:spcAft>
+              <a:defRPr sz="1400" b="0">
+                <a:solidFill>
+                  <a:srgbClr val="FFFFFF"/>
+                </a:solidFill>
+                <a:latin typeface="DejaVu Sans Mono"/>
+              </a:defRPr>
+            </a:pPr>
             <a:r>
               <a:t>        limit = math.radians(self.get_parameter('front_half_angle_deg').value)</a:t>
             </a:r>
-            <a:br/>
+          </a:p>
+          <a:p>
+            <a:pPr algn="l">
+              <a:spcAft>
+                <a:spcPts val="0"/>
+              </a:spcAft>
+              <a:defRPr sz="1400" b="0">
+                <a:solidFill>
+                  <a:srgbClr val="FFFFFF"/>
+                </a:solidFill>
+                <a:latin typeface="DejaVu Sans Mono"/>
+              </a:defRPr>
+            </a:pPr>
             <a:r>
               <a:t>        readings = [value for index,</a:t>
             </a:r>
-            <a:br/>
+          </a:p>
+          <a:p>
+            <a:pPr algn="l">
+              <a:spcAft>
+                <a:spcPts val="0"/>
+              </a:spcAft>
+              <a:defRPr sz="1400" b="0">
+                <a:solidFill>
+                  <a:srgbClr val="FFFFFF"/>
+                </a:solidFill>
+                <a:latin typeface="DejaVu Sans Mono"/>
+              </a:defRPr>
+            </a:pPr>
             <a:r>
               <a:t>            value in enumerate(scan.ranges) if abs(scan.angle_min + index * scan.angle_increment) &lt;= limit and math.isfinite(value)]</a:t>
             </a:r>
-            <a:br/>
+          </a:p>
+          <a:p>
+            <a:pPr algn="l">
+              <a:spcAft>
+                <a:spcPts val="0"/>
+              </a:spcAft>
+              <a:defRPr sz="1400" b="0">
+                <a:solidFill>
+                  <a:srgbClr val="FFFFFF"/>
+                </a:solidFill>
+                <a:latin typeface="DejaVu Sans Mono"/>
+              </a:defRPr>
+            </a:pPr>
             <a:r>
               <a:t>        self.obstacle_distance = min(readings) if readings else math.inf</a:t>
             </a:r>
-            <a:br/>
           </a:p>
         </p:txBody>
       </p:sp>
@@ -43118,7 +46291,7 @@
           </a:fontRef>
         </p:style>
         <p:txBody>
-          <a:bodyPr rtlCol="0" anchor="ctr" wrap="square" lIns="164592" rIns="164592" tIns="109728" bIns="36576"/>
+          <a:bodyPr rtlCol="0" anchor="ctr" wrap="square" lIns="164592" rIns="164592" tIns="109728" bIns="73152"/>
           <a:lstStyle/>
           <a:p>
             <a:pPr algn="l">
@@ -43135,44 +46308,176 @@
             <a:r>
               <a:t>    def command_callback(self, command):</a:t>
             </a:r>
-            <a:br/>
+          </a:p>
+          <a:p>
+            <a:pPr algn="l">
+              <a:spcAft>
+                <a:spcPts val="0"/>
+              </a:spcAft>
+              <a:defRPr sz="1400" b="0">
+                <a:solidFill>
+                  <a:srgbClr val="FFFFFF"/>
+                </a:solidFill>
+                <a:latin typeface="DejaVu Sans Mono"/>
+              </a:defRPr>
+            </a:pPr>
             <a:r>
               <a:t>        safe = Twist()</a:t>
             </a:r>
-            <a:br/>
+          </a:p>
+          <a:p>
+            <a:pPr algn="l">
+              <a:spcAft>
+                <a:spcPts val="0"/>
+              </a:spcAft>
+              <a:defRPr sz="1400" b="0">
+                <a:solidFill>
+                  <a:srgbClr val="FFFFFF"/>
+                </a:solidFill>
+                <a:latin typeface="DejaVu Sans Mono"/>
+              </a:defRPr>
+            </a:pPr>
             <a:r>
               <a:t>        if self.obstacle_distance &gt;= self.get_parameter('stop_distance').value or command.linear.x &lt;= 0.0:</a:t>
             </a:r>
-            <a:br/>
+          </a:p>
+          <a:p>
+            <a:pPr algn="l">
+              <a:spcAft>
+                <a:spcPts val="0"/>
+              </a:spcAft>
+              <a:defRPr sz="1400" b="0">
+                <a:solidFill>
+                  <a:srgbClr val="FFFFFF"/>
+                </a:solidFill>
+                <a:latin typeface="DejaVu Sans Mono"/>
+              </a:defRPr>
+            </a:pPr>
             <a:r>
               <a:t>            safe = command</a:t>
             </a:r>
-            <a:br/>
+          </a:p>
+          <a:p>
+            <a:pPr algn="l">
+              <a:spcAft>
+                <a:spcPts val="0"/>
+              </a:spcAft>
+              <a:defRPr sz="1400" b="0">
+                <a:solidFill>
+                  <a:srgbClr val="FFFFFF"/>
+                </a:solidFill>
+                <a:latin typeface="DejaVu Sans Mono"/>
+              </a:defRPr>
+            </a:pPr>
             <a:r>
               <a:t>        else:</a:t>
             </a:r>
-            <a:br/>
+          </a:p>
+          <a:p>
+            <a:pPr algn="l">
+              <a:spcAft>
+                <a:spcPts val="0"/>
+              </a:spcAft>
+              <a:defRPr sz="1400" b="0">
+                <a:solidFill>
+                  <a:srgbClr val="FFFFFF"/>
+                </a:solidFill>
+                <a:latin typeface="DejaVu Sans Mono"/>
+              </a:defRPr>
+            </a:pPr>
             <a:r>
               <a:t>            self.get_logger().warn('obstacle at %.2f m: stopping forward command' % self.obstacle_distance)</a:t>
             </a:r>
-            <a:br/>
+          </a:p>
+          <a:p>
+            <a:pPr algn="l">
+              <a:spcAft>
+                <a:spcPts val="0"/>
+              </a:spcAft>
+              <a:defRPr sz="1400" b="0">
+                <a:solidFill>
+                  <a:srgbClr val="FFFFFF"/>
+                </a:solidFill>
+                <a:latin typeface="DejaVu Sans Mono"/>
+              </a:defRPr>
+            </a:pPr>
             <a:r>
               <a:t>        self.publisher.publish(safe)</a:t>
             </a:r>
-            <a:br/>
-            <a:br/>
+          </a:p>
+          <a:p>
+            <a:pPr algn="l">
+              <a:spcAft>
+                <a:spcPts val="0"/>
+              </a:spcAft>
+              <a:defRPr sz="1400" b="0">
+                <a:solidFill>
+                  <a:srgbClr val="FFFFFF"/>
+                </a:solidFill>
+                <a:latin typeface="DejaVu Sans Mono"/>
+              </a:defRPr>
+            </a:pPr>
+          </a:p>
+          <a:p>
+            <a:pPr algn="l">
+              <a:spcAft>
+                <a:spcPts val="0"/>
+              </a:spcAft>
+              <a:defRPr sz="1400" b="0">
+                <a:solidFill>
+                  <a:srgbClr val="FFFFFF"/>
+                </a:solidFill>
+                <a:latin typeface="DejaVu Sans Mono"/>
+              </a:defRPr>
+            </a:pPr>
             <a:r>
               <a:t>def main():</a:t>
             </a:r>
-            <a:br/>
+          </a:p>
+          <a:p>
+            <a:pPr algn="l">
+              <a:spcAft>
+                <a:spcPts val="0"/>
+              </a:spcAft>
+              <a:defRPr sz="1400" b="0">
+                <a:solidFill>
+                  <a:srgbClr val="FFFFFF"/>
+                </a:solidFill>
+                <a:latin typeface="DejaVu Sans Mono"/>
+              </a:defRPr>
+            </a:pPr>
             <a:r>
               <a:t>    rclpy.init()</a:t>
             </a:r>
-            <a:br/>
+          </a:p>
+          <a:p>
+            <a:pPr algn="l">
+              <a:spcAft>
+                <a:spcPts val="0"/>
+              </a:spcAft>
+              <a:defRPr sz="1400" b="0">
+                <a:solidFill>
+                  <a:srgbClr val="FFFFFF"/>
+                </a:solidFill>
+                <a:latin typeface="DejaVu Sans Mono"/>
+              </a:defRPr>
+            </a:pPr>
             <a:r>
               <a:t>    node = SafetyController()</a:t>
             </a:r>
-            <a:br/>
+          </a:p>
+          <a:p>
+            <a:pPr algn="l">
+              <a:spcAft>
+                <a:spcPts val="0"/>
+              </a:spcAft>
+              <a:defRPr sz="1400" b="0">
+                <a:solidFill>
+                  <a:srgbClr val="FFFFFF"/>
+                </a:solidFill>
+                <a:latin typeface="DejaVu Sans Mono"/>
+              </a:defRPr>
+            </a:pPr>
             <a:r>
               <a:t>    try:</a:t>
             </a:r>
@@ -43589,7 +46894,7 @@
           </a:fontRef>
         </p:style>
         <p:txBody>
-          <a:bodyPr rtlCol="0" anchor="ctr" wrap="square" lIns="164592" rIns="164592" tIns="109728" bIns="36576"/>
+          <a:bodyPr rtlCol="0" anchor="ctr" wrap="square" lIns="164592" rIns="164592" tIns="109728" bIns="73152"/>
           <a:lstStyle/>
           <a:p>
             <a:pPr algn="l">
@@ -43606,27 +46911,99 @@
             <a:r>
               <a:t>        rclpy.spin(node)</a:t>
             </a:r>
-            <a:br/>
+          </a:p>
+          <a:p>
+            <a:pPr algn="l">
+              <a:spcAft>
+                <a:spcPts val="0"/>
+              </a:spcAft>
+              <a:defRPr sz="1400" b="0">
+                <a:solidFill>
+                  <a:srgbClr val="FFFFFF"/>
+                </a:solidFill>
+                <a:latin typeface="DejaVu Sans Mono"/>
+              </a:defRPr>
+            </a:pPr>
             <a:r>
               <a:t>    except KeyboardInterrupt:</a:t>
             </a:r>
-            <a:br/>
+          </a:p>
+          <a:p>
+            <a:pPr algn="l">
+              <a:spcAft>
+                <a:spcPts val="0"/>
+              </a:spcAft>
+              <a:defRPr sz="1400" b="0">
+                <a:solidFill>
+                  <a:srgbClr val="FFFFFF"/>
+                </a:solidFill>
+                <a:latin typeface="DejaVu Sans Mono"/>
+              </a:defRPr>
+            </a:pPr>
             <a:r>
               <a:t>        pass</a:t>
             </a:r>
-            <a:br/>
+          </a:p>
+          <a:p>
+            <a:pPr algn="l">
+              <a:spcAft>
+                <a:spcPts val="0"/>
+              </a:spcAft>
+              <a:defRPr sz="1400" b="0">
+                <a:solidFill>
+                  <a:srgbClr val="FFFFFF"/>
+                </a:solidFill>
+                <a:latin typeface="DejaVu Sans Mono"/>
+              </a:defRPr>
+            </a:pPr>
             <a:r>
               <a:t>    finally:</a:t>
             </a:r>
-            <a:br/>
+          </a:p>
+          <a:p>
+            <a:pPr algn="l">
+              <a:spcAft>
+                <a:spcPts val="0"/>
+              </a:spcAft>
+              <a:defRPr sz="1400" b="0">
+                <a:solidFill>
+                  <a:srgbClr val="FFFFFF"/>
+                </a:solidFill>
+                <a:latin typeface="DejaVu Sans Mono"/>
+              </a:defRPr>
+            </a:pPr>
             <a:r>
               <a:t>        node.destroy_node()</a:t>
             </a:r>
-            <a:br/>
+          </a:p>
+          <a:p>
+            <a:pPr algn="l">
+              <a:spcAft>
+                <a:spcPts val="0"/>
+              </a:spcAft>
+              <a:defRPr sz="1400" b="0">
+                <a:solidFill>
+                  <a:srgbClr val="FFFFFF"/>
+                </a:solidFill>
+                <a:latin typeface="DejaVu Sans Mono"/>
+              </a:defRPr>
+            </a:pPr>
             <a:r>
               <a:t>        if rclpy.ok():</a:t>
             </a:r>
-            <a:br/>
+          </a:p>
+          <a:p>
+            <a:pPr algn="l">
+              <a:spcAft>
+                <a:spcPts val="0"/>
+              </a:spcAft>
+              <a:defRPr sz="1400" b="0">
+                <a:solidFill>
+                  <a:srgbClr val="FFFFFF"/>
+                </a:solidFill>
+                <a:latin typeface="DejaVu Sans Mono"/>
+              </a:defRPr>
+            </a:pPr>
             <a:r>
               <a:t>            rclpy.shutdown()</a:t>
             </a:r>
@@ -43899,7 +47276,7 @@
               </a:defRPr>
             </a:pPr>
             <a:r>
-              <a:t>현재 단계 실행 1/3    |    현재 폴더 ~/ros2_curri/my_agv_ws    |    현재 터미널</a:t>
+              <a:t>현재 단계 실행 1/3    |    현재 폴더 ~/ros2_curri/my_agv_ws    |    터미널 1</a:t>
             </a:r>
           </a:p>
         </p:txBody>
@@ -43912,25 +47289,25 @@
         </p:nvSpPr>
         <p:spPr>
           <a:xfrm>
-            <a:off x="676656" y="1764792"/>
-            <a:ext cx="1828800" cy="347472"/>
-          </a:xfrm>
-          <a:prstGeom prst="rect">
-            <a:avLst/>
-          </a:prstGeom>
-          <a:noFill/>
-        </p:spPr>
-        <p:txBody>
-          <a:bodyPr wrap="square" lIns="73152" rIns="73152" tIns="36576" bIns="36576">
-            <a:spAutoFit/>
-          </a:bodyPr>
-          <a:lstStyle/>
-          <a:p>
-            <a:pPr algn="l">
-              <a:spcAft>
-                <a:spcPts val="0"/>
-              </a:spcAft>
-              <a:defRPr sz="1800" b="1">
+            <a:off x="676656" y="1719072"/>
+            <a:ext cx="1691640" cy="274320"/>
+          </a:xfrm>
+          <a:prstGeom prst="rect">
+            <a:avLst/>
+          </a:prstGeom>
+          <a:noFill/>
+        </p:spPr>
+        <p:txBody>
+          <a:bodyPr wrap="square" lIns="73152" rIns="73152" tIns="36576" bIns="36576">
+            <a:spAutoFit/>
+          </a:bodyPr>
+          <a:lstStyle/>
+          <a:p>
+            <a:pPr algn="l">
+              <a:spcAft>
+                <a:spcPts val="0"/>
+              </a:spcAft>
+              <a:defRPr sz="1700" b="1">
                 <a:solidFill>
                   <a:srgbClr val="225B9B"/>
                 </a:solidFill>
@@ -43938,7 +47315,7 @@
               </a:defRPr>
             </a:pPr>
             <a:r>
-              <a:t>왜 하는가</a:t>
+              <a:t>명령의 목적</a:t>
             </a:r>
           </a:p>
         </p:txBody>
@@ -43951,7 +47328,7 @@
         </p:nvSpPr>
         <p:spPr>
           <a:xfrm>
-            <a:off x="676656" y="2103120"/>
+            <a:off x="676656" y="2002536"/>
             <a:ext cx="10789920" cy="512064"/>
           </a:xfrm>
           <a:prstGeom prst="rect">
@@ -43969,7 +47346,7 @@
               <a:spcAft>
                 <a:spcPts val="0"/>
               </a:spcAft>
-              <a:defRPr sz="2000" b="0">
+              <a:defRPr sz="1800" b="0">
                 <a:solidFill>
                   <a:srgbClr val="122C4E"/>
                 </a:solidFill>
@@ -43984,14 +47361,53 @@
       </p:sp>
       <p:sp>
         <p:nvSpPr>
-          <p:cNvPr id="9" name="Rounded Rectangle 8"/>
+          <p:cNvPr id="9" name="TextBox 8"/>
+          <p:cNvSpPr txBox="1"/>
+          <p:nvPr/>
+        </p:nvSpPr>
+        <p:spPr>
+          <a:xfrm>
+            <a:off x="676656" y="2816352"/>
+            <a:ext cx="10835640" cy="256032"/>
+          </a:xfrm>
+          <a:prstGeom prst="rect">
+            <a:avLst/>
+          </a:prstGeom>
+          <a:noFill/>
+        </p:spPr>
+        <p:txBody>
+          <a:bodyPr wrap="square" lIns="73152" rIns="73152" tIns="36576" bIns="36576">
+            <a:spAutoFit/>
+          </a:bodyPr>
+          <a:lstStyle/>
+          <a:p>
+            <a:pPr algn="ctr">
+              <a:spcAft>
+                <a:spcPts val="0"/>
+              </a:spcAft>
+              <a:defRPr sz="1600" b="1">
+                <a:solidFill>
+                  <a:srgbClr val="225B9B"/>
+                </a:solidFill>
+                <a:latin typeface="Noto Sans CJK KR"/>
+              </a:defRPr>
+            </a:pPr>
+            <a:r>
+              <a:t>터미널 1 — 아래 검은 블록은 명령만 복사합니다.</a:t>
+            </a:r>
+          </a:p>
+        </p:txBody>
+      </p:sp>
+      <p:sp>
+        <p:nvSpPr>
+          <p:cNvPr id="10" name="Rounded Rectangle 9"/>
           <p:cNvSpPr/>
           <p:nvPr/>
         </p:nvSpPr>
         <p:spPr>
           <a:xfrm>
-            <a:off x="676656" y="2871216"/>
-            <a:ext cx="10835640" cy="2331720"/>
+            <a:off x="676656" y="3154680"/>
+            <a:ext cx="10835640" cy="1938528"/>
           </a:xfrm>
           <a:prstGeom prst="roundRect">
             <a:avLst/>
@@ -44020,7 +47436,7 @@
           </a:fontRef>
         </p:style>
         <p:txBody>
-          <a:bodyPr rtlCol="0" anchor="ctr" wrap="square" lIns="73152" rIns="73152" tIns="36576" bIns="36576"/>
+          <a:bodyPr rtlCol="0" anchor="ctr" wrap="square" lIns="109728" rIns="109728" tIns="73152" bIns="73152"/>
           <a:lstStyle/>
           <a:p>
             <a:pPr algn="l">
@@ -44037,15 +47453,51 @@
             <a:r>
               <a:t>source /opt/ros/jazzy/setup.bash</a:t>
             </a:r>
-            <a:br/>
+          </a:p>
+          <a:p>
+            <a:pPr algn="l">
+              <a:spcAft>
+                <a:spcPts val="0"/>
+              </a:spcAft>
+              <a:defRPr sz="1600" b="0">
+                <a:solidFill>
+                  <a:srgbClr val="FFFFFF"/>
+                </a:solidFill>
+                <a:latin typeface="DejaVu Sans Mono"/>
+              </a:defRPr>
+            </a:pPr>
             <a:r>
               <a:t>cd ~/ros2_curri/my_agv_ws</a:t>
             </a:r>
-            <a:br/>
+          </a:p>
+          <a:p>
+            <a:pPr algn="l">
+              <a:spcAft>
+                <a:spcPts val="0"/>
+              </a:spcAft>
+              <a:defRPr sz="1600" b="0">
+                <a:solidFill>
+                  <a:srgbClr val="FFFFFF"/>
+                </a:solidFill>
+                <a:latin typeface="DejaVu Sans Mono"/>
+              </a:defRPr>
+            </a:pPr>
             <a:r>
               <a:t>colcon build --symlink-install</a:t>
             </a:r>
-            <a:br/>
+          </a:p>
+          <a:p>
+            <a:pPr algn="l">
+              <a:spcAft>
+                <a:spcPts val="0"/>
+              </a:spcAft>
+              <a:defRPr sz="1600" b="0">
+                <a:solidFill>
+                  <a:srgbClr val="FFFFFF"/>
+                </a:solidFill>
+                <a:latin typeface="DejaVu Sans Mono"/>
+              </a:defRPr>
+            </a:pPr>
             <a:r>
               <a:t>source install/setup.bash</a:t>
             </a:r>
@@ -44054,31 +47506,31 @@
       </p:sp>
       <p:sp>
         <p:nvSpPr>
-          <p:cNvPr id="10" name="TextBox 9"/>
-          <p:cNvSpPr txBox="1"/>
-          <p:nvPr/>
-        </p:nvSpPr>
-        <p:spPr>
-          <a:xfrm>
-            <a:off x="768096" y="5468112"/>
-            <a:ext cx="1143000" cy="256032"/>
-          </a:xfrm>
-          <a:prstGeom prst="rect">
-            <a:avLst/>
-          </a:prstGeom>
-          <a:noFill/>
-        </p:spPr>
-        <p:txBody>
-          <a:bodyPr wrap="square" lIns="73152" rIns="73152" tIns="36576" bIns="36576">
-            <a:spAutoFit/>
-          </a:bodyPr>
-          <a:lstStyle/>
-          <a:p>
-            <a:pPr algn="l">
-              <a:spcAft>
-                <a:spcPts val="0"/>
-              </a:spcAft>
-              <a:defRPr sz="1800" b="1">
+          <p:cNvPr id="11" name="TextBox 10"/>
+          <p:cNvSpPr txBox="1"/>
+          <p:nvPr/>
+        </p:nvSpPr>
+        <p:spPr>
+          <a:xfrm>
+            <a:off x="768096" y="5276088"/>
+            <a:ext cx="10561320" cy="384048"/>
+          </a:xfrm>
+          <a:prstGeom prst="rect">
+            <a:avLst/>
+          </a:prstGeom>
+          <a:noFill/>
+        </p:spPr>
+        <p:txBody>
+          <a:bodyPr wrap="square" lIns="73152" rIns="73152" tIns="36576" bIns="36576">
+            <a:spAutoFit/>
+          </a:bodyPr>
+          <a:lstStyle/>
+          <a:p>
+            <a:pPr algn="ctr">
+              <a:spcAft>
+                <a:spcPts val="0"/>
+              </a:spcAft>
+              <a:defRPr sz="1500" b="1">
                 <a:solidFill>
                   <a:srgbClr val="2A8B5A"/>
                 </a:solidFill>
@@ -44086,38 +47538,38 @@
               </a:defRPr>
             </a:pPr>
             <a:r>
-              <a:t>확인</a:t>
-            </a:r>
-          </a:p>
-        </p:txBody>
-      </p:sp>
-      <p:sp>
-        <p:nvSpPr>
-          <p:cNvPr id="11" name="TextBox 10"/>
-          <p:cNvSpPr txBox="1"/>
-          <p:nvPr/>
-        </p:nvSpPr>
-        <p:spPr>
-          <a:xfrm>
-            <a:off x="768096" y="5742432"/>
-            <a:ext cx="10561320" cy="347472"/>
-          </a:xfrm>
-          <a:prstGeom prst="rect">
-            <a:avLst/>
-          </a:prstGeom>
-          <a:noFill/>
-        </p:spPr>
-        <p:txBody>
-          <a:bodyPr wrap="square" lIns="73152" rIns="73152" tIns="36576" bIns="36576">
-            <a:spAutoFit/>
-          </a:bodyPr>
-          <a:lstStyle/>
-          <a:p>
-            <a:pPr algn="l">
-              <a:spcAft>
-                <a:spcPts val="0"/>
-              </a:spcAft>
-              <a:defRPr sz="1800" b="0">
+              <a:t>터미널 1 역할: 터미널 1에서 이 명령만 그대로 복사해 실행합니다.</a:t>
+            </a:r>
+          </a:p>
+        </p:txBody>
+      </p:sp>
+      <p:sp>
+        <p:nvSpPr>
+          <p:cNvPr id="12" name="TextBox 11"/>
+          <p:cNvSpPr txBox="1"/>
+          <p:nvPr/>
+        </p:nvSpPr>
+        <p:spPr>
+          <a:xfrm>
+            <a:off x="768096" y="5916168"/>
+            <a:ext cx="10561320" cy="292608"/>
+          </a:xfrm>
+          <a:prstGeom prst="rect">
+            <a:avLst/>
+          </a:prstGeom>
+          <a:noFill/>
+        </p:spPr>
+        <p:txBody>
+          <a:bodyPr wrap="square" lIns="73152" rIns="73152" tIns="36576" bIns="36576">
+            <a:spAutoFit/>
+          </a:bodyPr>
+          <a:lstStyle/>
+          <a:p>
+            <a:pPr algn="ctr">
+              <a:spcAft>
+                <a:spcPts val="0"/>
+              </a:spcAft>
+              <a:defRPr sz="1500" b="1">
                 <a:solidFill>
                   <a:srgbClr val="122C4E"/>
                 </a:solidFill>
@@ -44125,7 +47577,7 @@
               </a:defRPr>
             </a:pPr>
             <a:r>
-              <a:t>출력에서 topic·frame·파일 이름 또는 성공 메시지를 찾고, 맞지 않으면 다음 파일로 가지 않습니다.</a:t>
+              <a:t>확인: 출력에서 topic·frame·파일 이름 또는 성공 메시지를 찾고, 맞지 않으면 다음 파일로 가지 않습니다.</a:t>
             </a:r>
           </a:p>
         </p:txBody>
@@ -44357,7 +47809,7 @@
               </a:defRPr>
             </a:pPr>
             <a:r>
-              <a:t>현재 단계 실행 2/3    |    현재 폴더 ~/ros2_curri/my_agv_ws    |    현재 터미널</a:t>
+              <a:t>현재 단계 실행 2/3    |    현재 폴더 ~/ros2_curri/my_agv_ws    |    터미널 1</a:t>
             </a:r>
           </a:p>
         </p:txBody>
@@ -44370,25 +47822,25 @@
         </p:nvSpPr>
         <p:spPr>
           <a:xfrm>
-            <a:off x="676656" y="1764792"/>
-            <a:ext cx="1828800" cy="347472"/>
-          </a:xfrm>
-          <a:prstGeom prst="rect">
-            <a:avLst/>
-          </a:prstGeom>
-          <a:noFill/>
-        </p:spPr>
-        <p:txBody>
-          <a:bodyPr wrap="square" lIns="73152" rIns="73152" tIns="36576" bIns="36576">
-            <a:spAutoFit/>
-          </a:bodyPr>
-          <a:lstStyle/>
-          <a:p>
-            <a:pPr algn="l">
-              <a:spcAft>
-                <a:spcPts val="0"/>
-              </a:spcAft>
-              <a:defRPr sz="1800" b="1">
+            <a:off x="676656" y="1719072"/>
+            <a:ext cx="1691640" cy="274320"/>
+          </a:xfrm>
+          <a:prstGeom prst="rect">
+            <a:avLst/>
+          </a:prstGeom>
+          <a:noFill/>
+        </p:spPr>
+        <p:txBody>
+          <a:bodyPr wrap="square" lIns="73152" rIns="73152" tIns="36576" bIns="36576">
+            <a:spAutoFit/>
+          </a:bodyPr>
+          <a:lstStyle/>
+          <a:p>
+            <a:pPr algn="l">
+              <a:spcAft>
+                <a:spcPts val="0"/>
+              </a:spcAft>
+              <a:defRPr sz="1700" b="1">
                 <a:solidFill>
                   <a:srgbClr val="225B9B"/>
                 </a:solidFill>
@@ -44396,7 +47848,7 @@
               </a:defRPr>
             </a:pPr>
             <a:r>
-              <a:t>왜 하는가</a:t>
+              <a:t>명령의 목적</a:t>
             </a:r>
           </a:p>
         </p:txBody>
@@ -44409,7 +47861,7 @@
         </p:nvSpPr>
         <p:spPr>
           <a:xfrm>
-            <a:off x="676656" y="2103120"/>
+            <a:off x="676656" y="2002536"/>
             <a:ext cx="10789920" cy="512064"/>
           </a:xfrm>
           <a:prstGeom prst="rect">
@@ -44427,7 +47879,7 @@
               <a:spcAft>
                 <a:spcPts val="0"/>
               </a:spcAft>
-              <a:defRPr sz="2000" b="0">
+              <a:defRPr sz="1800" b="0">
                 <a:solidFill>
                   <a:srgbClr val="122C4E"/>
                 </a:solidFill>
@@ -44442,14 +47894,53 @@
       </p:sp>
       <p:sp>
         <p:nvSpPr>
-          <p:cNvPr id="9" name="Rounded Rectangle 8"/>
+          <p:cNvPr id="9" name="TextBox 8"/>
+          <p:cNvSpPr txBox="1"/>
+          <p:nvPr/>
+        </p:nvSpPr>
+        <p:spPr>
+          <a:xfrm>
+            <a:off x="676656" y="2816352"/>
+            <a:ext cx="10835640" cy="256032"/>
+          </a:xfrm>
+          <a:prstGeom prst="rect">
+            <a:avLst/>
+          </a:prstGeom>
+          <a:noFill/>
+        </p:spPr>
+        <p:txBody>
+          <a:bodyPr wrap="square" lIns="73152" rIns="73152" tIns="36576" bIns="36576">
+            <a:spAutoFit/>
+          </a:bodyPr>
+          <a:lstStyle/>
+          <a:p>
+            <a:pPr algn="ctr">
+              <a:spcAft>
+                <a:spcPts val="0"/>
+              </a:spcAft>
+              <a:defRPr sz="1600" b="1">
+                <a:solidFill>
+                  <a:srgbClr val="225B9B"/>
+                </a:solidFill>
+                <a:latin typeface="Noto Sans CJK KR"/>
+              </a:defRPr>
+            </a:pPr>
+            <a:r>
+              <a:t>터미널 1 — 아래 검은 블록은 명령만 복사합니다.</a:t>
+            </a:r>
+          </a:p>
+        </p:txBody>
+      </p:sp>
+      <p:sp>
+        <p:nvSpPr>
+          <p:cNvPr id="10" name="Rounded Rectangle 9"/>
           <p:cNvSpPr/>
           <p:nvPr/>
         </p:nvSpPr>
         <p:spPr>
           <a:xfrm>
-            <a:off x="676656" y="2871216"/>
-            <a:ext cx="10835640" cy="2331720"/>
+            <a:off x="676656" y="3154680"/>
+            <a:ext cx="10835640" cy="1938528"/>
           </a:xfrm>
           <a:prstGeom prst="roundRect">
             <a:avLst/>
@@ -44478,7 +47969,7 @@
           </a:fontRef>
         </p:style>
         <p:txBody>
-          <a:bodyPr rtlCol="0" anchor="ctr" wrap="square" lIns="73152" rIns="73152" tIns="36576" bIns="36576"/>
+          <a:bodyPr rtlCol="0" anchor="ctr" wrap="square" lIns="109728" rIns="109728" tIns="73152" bIns="73152"/>
           <a:lstStyle/>
           <a:p>
             <a:pPr algn="l">
@@ -44500,31 +47991,31 @@
       </p:sp>
       <p:sp>
         <p:nvSpPr>
-          <p:cNvPr id="10" name="TextBox 9"/>
-          <p:cNvSpPr txBox="1"/>
-          <p:nvPr/>
-        </p:nvSpPr>
-        <p:spPr>
-          <a:xfrm>
-            <a:off x="768096" y="5468112"/>
-            <a:ext cx="1143000" cy="256032"/>
-          </a:xfrm>
-          <a:prstGeom prst="rect">
-            <a:avLst/>
-          </a:prstGeom>
-          <a:noFill/>
-        </p:spPr>
-        <p:txBody>
-          <a:bodyPr wrap="square" lIns="73152" rIns="73152" tIns="36576" bIns="36576">
-            <a:spAutoFit/>
-          </a:bodyPr>
-          <a:lstStyle/>
-          <a:p>
-            <a:pPr algn="l">
-              <a:spcAft>
-                <a:spcPts val="0"/>
-              </a:spcAft>
-              <a:defRPr sz="1800" b="1">
+          <p:cNvPr id="11" name="TextBox 10"/>
+          <p:cNvSpPr txBox="1"/>
+          <p:nvPr/>
+        </p:nvSpPr>
+        <p:spPr>
+          <a:xfrm>
+            <a:off x="768096" y="5276088"/>
+            <a:ext cx="10561320" cy="384048"/>
+          </a:xfrm>
+          <a:prstGeom prst="rect">
+            <a:avLst/>
+          </a:prstGeom>
+          <a:noFill/>
+        </p:spPr>
+        <p:txBody>
+          <a:bodyPr wrap="square" lIns="73152" rIns="73152" tIns="36576" bIns="36576">
+            <a:spAutoFit/>
+          </a:bodyPr>
+          <a:lstStyle/>
+          <a:p>
+            <a:pPr algn="ctr">
+              <a:spcAft>
+                <a:spcPts val="0"/>
+              </a:spcAft>
+              <a:defRPr sz="1500" b="1">
                 <a:solidFill>
                   <a:srgbClr val="2A8B5A"/>
                 </a:solidFill>
@@ -44532,38 +48023,38 @@
               </a:defRPr>
             </a:pPr>
             <a:r>
-              <a:t>확인</a:t>
-            </a:r>
-          </a:p>
-        </p:txBody>
-      </p:sp>
-      <p:sp>
-        <p:nvSpPr>
-          <p:cNvPr id="11" name="TextBox 10"/>
-          <p:cNvSpPr txBox="1"/>
-          <p:nvPr/>
-        </p:nvSpPr>
-        <p:spPr>
-          <a:xfrm>
-            <a:off x="768096" y="5742432"/>
-            <a:ext cx="10561320" cy="347472"/>
-          </a:xfrm>
-          <a:prstGeom prst="rect">
-            <a:avLst/>
-          </a:prstGeom>
-          <a:noFill/>
-        </p:spPr>
-        <p:txBody>
-          <a:bodyPr wrap="square" lIns="73152" rIns="73152" tIns="36576" bIns="36576">
-            <a:spAutoFit/>
-          </a:bodyPr>
-          <a:lstStyle/>
-          <a:p>
-            <a:pPr algn="l">
-              <a:spcAft>
-                <a:spcPts val="0"/>
-              </a:spcAft>
-              <a:defRPr sz="1800" b="0">
+              <a:t>터미널 1 역할: 시뮬레이터·bridge·node를 먼저 시작한 뒤 이 창은 종료하지 않고 둡니다.</a:t>
+            </a:r>
+          </a:p>
+        </p:txBody>
+      </p:sp>
+      <p:sp>
+        <p:nvSpPr>
+          <p:cNvPr id="12" name="TextBox 11"/>
+          <p:cNvSpPr txBox="1"/>
+          <p:nvPr/>
+        </p:nvSpPr>
+        <p:spPr>
+          <a:xfrm>
+            <a:off x="768096" y="5916168"/>
+            <a:ext cx="10561320" cy="292608"/>
+          </a:xfrm>
+          <a:prstGeom prst="rect">
+            <a:avLst/>
+          </a:prstGeom>
+          <a:noFill/>
+        </p:spPr>
+        <p:txBody>
+          <a:bodyPr wrap="square" lIns="73152" rIns="73152" tIns="36576" bIns="36576">
+            <a:spAutoFit/>
+          </a:bodyPr>
+          <a:lstStyle/>
+          <a:p>
+            <a:pPr algn="ctr">
+              <a:spcAft>
+                <a:spcPts val="0"/>
+              </a:spcAft>
+              <a:defRPr sz="1500" b="1">
                 <a:solidFill>
                   <a:srgbClr val="122C4E"/>
                 </a:solidFill>
@@ -44571,7 +48062,7 @@
               </a:defRPr>
             </a:pPr>
             <a:r>
-              <a:t>출력에서 topic·frame·파일 이름 또는 성공 메시지를 찾고, 맞지 않으면 다음 파일로 가지 않습니다.</a:t>
+              <a:t>확인: 출력에서 topic·frame·파일 이름 또는 성공 메시지를 찾고, 맞지 않으면 다음 파일로 가지 않습니다.</a:t>
             </a:r>
           </a:p>
         </p:txBody>
@@ -44803,7 +48294,7 @@
               </a:defRPr>
             </a:pPr>
             <a:r>
-              <a:t>현재 단계 실행 3/3    |    현재 폴더 ~/ros2_curri/my_agv_ws    |    현재 터미널</a:t>
+              <a:t>현재 단계 실행 3/3    |    현재 폴더 ~/ros2_curri/my_agv_ws    |    터미널 1</a:t>
             </a:r>
           </a:p>
         </p:txBody>
@@ -44816,25 +48307,25 @@
         </p:nvSpPr>
         <p:spPr>
           <a:xfrm>
-            <a:off x="676656" y="1764792"/>
-            <a:ext cx="1828800" cy="347472"/>
-          </a:xfrm>
-          <a:prstGeom prst="rect">
-            <a:avLst/>
-          </a:prstGeom>
-          <a:noFill/>
-        </p:spPr>
-        <p:txBody>
-          <a:bodyPr wrap="square" lIns="73152" rIns="73152" tIns="36576" bIns="36576">
-            <a:spAutoFit/>
-          </a:bodyPr>
-          <a:lstStyle/>
-          <a:p>
-            <a:pPr algn="l">
-              <a:spcAft>
-                <a:spcPts val="0"/>
-              </a:spcAft>
-              <a:defRPr sz="1800" b="1">
+            <a:off x="676656" y="1719072"/>
+            <a:ext cx="1691640" cy="274320"/>
+          </a:xfrm>
+          <a:prstGeom prst="rect">
+            <a:avLst/>
+          </a:prstGeom>
+          <a:noFill/>
+        </p:spPr>
+        <p:txBody>
+          <a:bodyPr wrap="square" lIns="73152" rIns="73152" tIns="36576" bIns="36576">
+            <a:spAutoFit/>
+          </a:bodyPr>
+          <a:lstStyle/>
+          <a:p>
+            <a:pPr algn="l">
+              <a:spcAft>
+                <a:spcPts val="0"/>
+              </a:spcAft>
+              <a:defRPr sz="1700" b="1">
                 <a:solidFill>
                   <a:srgbClr val="225B9B"/>
                 </a:solidFill>
@@ -44842,7 +48333,7 @@
               </a:defRPr>
             </a:pPr>
             <a:r>
-              <a:t>왜 하는가</a:t>
+              <a:t>명령의 목적</a:t>
             </a:r>
           </a:p>
         </p:txBody>
@@ -44855,7 +48346,7 @@
         </p:nvSpPr>
         <p:spPr>
           <a:xfrm>
-            <a:off x="676656" y="2103120"/>
+            <a:off x="676656" y="2002536"/>
             <a:ext cx="10789920" cy="512064"/>
           </a:xfrm>
           <a:prstGeom prst="rect">
@@ -44873,7 +48364,7 @@
               <a:spcAft>
                 <a:spcPts val="0"/>
               </a:spcAft>
-              <a:defRPr sz="2000" b="0">
+              <a:defRPr sz="1800" b="0">
                 <a:solidFill>
                   <a:srgbClr val="122C4E"/>
                 </a:solidFill>
@@ -44888,14 +48379,53 @@
       </p:sp>
       <p:sp>
         <p:nvSpPr>
-          <p:cNvPr id="9" name="Rounded Rectangle 8"/>
+          <p:cNvPr id="9" name="TextBox 8"/>
+          <p:cNvSpPr txBox="1"/>
+          <p:nvPr/>
+        </p:nvSpPr>
+        <p:spPr>
+          <a:xfrm>
+            <a:off x="676656" y="2816352"/>
+            <a:ext cx="10835640" cy="256032"/>
+          </a:xfrm>
+          <a:prstGeom prst="rect">
+            <a:avLst/>
+          </a:prstGeom>
+          <a:noFill/>
+        </p:spPr>
+        <p:txBody>
+          <a:bodyPr wrap="square" lIns="73152" rIns="73152" tIns="36576" bIns="36576">
+            <a:spAutoFit/>
+          </a:bodyPr>
+          <a:lstStyle/>
+          <a:p>
+            <a:pPr algn="ctr">
+              <a:spcAft>
+                <a:spcPts val="0"/>
+              </a:spcAft>
+              <a:defRPr sz="1600" b="1">
+                <a:solidFill>
+                  <a:srgbClr val="225B9B"/>
+                </a:solidFill>
+                <a:latin typeface="Noto Sans CJK KR"/>
+              </a:defRPr>
+            </a:pPr>
+            <a:r>
+              <a:t>터미널 1 — 아래 검은 블록은 명령만 복사합니다.</a:t>
+            </a:r>
+          </a:p>
+        </p:txBody>
+      </p:sp>
+      <p:sp>
+        <p:nvSpPr>
+          <p:cNvPr id="10" name="Rounded Rectangle 9"/>
           <p:cNvSpPr/>
           <p:nvPr/>
         </p:nvSpPr>
         <p:spPr>
           <a:xfrm>
-            <a:off x="676656" y="2871216"/>
-            <a:ext cx="10835640" cy="2331720"/>
+            <a:off x="676656" y="3154680"/>
+            <a:ext cx="10835640" cy="1938528"/>
           </a:xfrm>
           <a:prstGeom prst="roundRect">
             <a:avLst/>
@@ -44924,7 +48454,7 @@
           </a:fontRef>
         </p:style>
         <p:txBody>
-          <a:bodyPr rtlCol="0" anchor="ctr" wrap="square" lIns="73152" rIns="73152" tIns="36576" bIns="36576"/>
+          <a:bodyPr rtlCol="0" anchor="ctr" wrap="square" lIns="109728" rIns="109728" tIns="73152" bIns="73152"/>
           <a:lstStyle/>
           <a:p>
             <a:pPr algn="l">
@@ -44941,11 +48471,35 @@
             <a:r>
               <a:t>ros2 node list</a:t>
             </a:r>
-            <a:br/>
+          </a:p>
+          <a:p>
+            <a:pPr algn="l">
+              <a:spcAft>
+                <a:spcPts val="0"/>
+              </a:spcAft>
+              <a:defRPr sz="1600" b="0">
+                <a:solidFill>
+                  <a:srgbClr val="FFFFFF"/>
+                </a:solidFill>
+                <a:latin typeface="DejaVu Sans Mono"/>
+              </a:defRPr>
+            </a:pPr>
             <a:r>
               <a:t>ros2 topic list</a:t>
             </a:r>
-            <a:br/>
+          </a:p>
+          <a:p>
+            <a:pPr algn="l">
+              <a:spcAft>
+                <a:spcPts val="0"/>
+              </a:spcAft>
+              <a:defRPr sz="1600" b="0">
+                <a:solidFill>
+                  <a:srgbClr val="FFFFFF"/>
+                </a:solidFill>
+                <a:latin typeface="DejaVu Sans Mono"/>
+              </a:defRPr>
+            </a:pPr>
             <a:r>
               <a:t>ros2 bag record -o ~/agv_final_bag /scan /imu/data /odom /camera/image_raw</a:t>
             </a:r>
@@ -44954,31 +48508,31 @@
       </p:sp>
       <p:sp>
         <p:nvSpPr>
-          <p:cNvPr id="10" name="TextBox 9"/>
-          <p:cNvSpPr txBox="1"/>
-          <p:nvPr/>
-        </p:nvSpPr>
-        <p:spPr>
-          <a:xfrm>
-            <a:off x="768096" y="5468112"/>
-            <a:ext cx="1143000" cy="256032"/>
-          </a:xfrm>
-          <a:prstGeom prst="rect">
-            <a:avLst/>
-          </a:prstGeom>
-          <a:noFill/>
-        </p:spPr>
-        <p:txBody>
-          <a:bodyPr wrap="square" lIns="73152" rIns="73152" tIns="36576" bIns="36576">
-            <a:spAutoFit/>
-          </a:bodyPr>
-          <a:lstStyle/>
-          <a:p>
-            <a:pPr algn="l">
-              <a:spcAft>
-                <a:spcPts val="0"/>
-              </a:spcAft>
-              <a:defRPr sz="1800" b="1">
+          <p:cNvPr id="11" name="TextBox 10"/>
+          <p:cNvSpPr txBox="1"/>
+          <p:nvPr/>
+        </p:nvSpPr>
+        <p:spPr>
+          <a:xfrm>
+            <a:off x="768096" y="5276088"/>
+            <a:ext cx="10561320" cy="384048"/>
+          </a:xfrm>
+          <a:prstGeom prst="rect">
+            <a:avLst/>
+          </a:prstGeom>
+          <a:noFill/>
+        </p:spPr>
+        <p:txBody>
+          <a:bodyPr wrap="square" lIns="73152" rIns="73152" tIns="36576" bIns="36576">
+            <a:spAutoFit/>
+          </a:bodyPr>
+          <a:lstStyle/>
+          <a:p>
+            <a:pPr algn="ctr">
+              <a:spcAft>
+                <a:spcPts val="0"/>
+              </a:spcAft>
+              <a:defRPr sz="1500" b="1">
                 <a:solidFill>
                   <a:srgbClr val="2A8B5A"/>
                 </a:solidFill>
@@ -44986,38 +48540,38 @@
               </a:defRPr>
             </a:pPr>
             <a:r>
-              <a:t>확인</a:t>
-            </a:r>
-          </a:p>
-        </p:txBody>
-      </p:sp>
-      <p:sp>
-        <p:nvSpPr>
-          <p:cNvPr id="11" name="TextBox 10"/>
-          <p:cNvSpPr txBox="1"/>
-          <p:nvPr/>
-        </p:nvSpPr>
-        <p:spPr>
-          <a:xfrm>
-            <a:off x="768096" y="5742432"/>
-            <a:ext cx="10561320" cy="347472"/>
-          </a:xfrm>
-          <a:prstGeom prst="rect">
-            <a:avLst/>
-          </a:prstGeom>
-          <a:noFill/>
-        </p:spPr>
-        <p:txBody>
-          <a:bodyPr wrap="square" lIns="73152" rIns="73152" tIns="36576" bIns="36576">
-            <a:spAutoFit/>
-          </a:bodyPr>
-          <a:lstStyle/>
-          <a:p>
-            <a:pPr algn="l">
-              <a:spcAft>
-                <a:spcPts val="0"/>
-              </a:spcAft>
-              <a:defRPr sz="1800" b="0">
+              <a:t>터미널 1 역할: 터미널 1에서 이 명령만 그대로 복사해 실행합니다.</a:t>
+            </a:r>
+          </a:p>
+        </p:txBody>
+      </p:sp>
+      <p:sp>
+        <p:nvSpPr>
+          <p:cNvPr id="12" name="TextBox 11"/>
+          <p:cNvSpPr txBox="1"/>
+          <p:nvPr/>
+        </p:nvSpPr>
+        <p:spPr>
+          <a:xfrm>
+            <a:off x="768096" y="5916168"/>
+            <a:ext cx="10561320" cy="292608"/>
+          </a:xfrm>
+          <a:prstGeom prst="rect">
+            <a:avLst/>
+          </a:prstGeom>
+          <a:noFill/>
+        </p:spPr>
+        <p:txBody>
+          <a:bodyPr wrap="square" lIns="73152" rIns="73152" tIns="36576" bIns="36576">
+            <a:spAutoFit/>
+          </a:bodyPr>
+          <a:lstStyle/>
+          <a:p>
+            <a:pPr algn="ctr">
+              <a:spcAft>
+                <a:spcPts val="0"/>
+              </a:spcAft>
+              <a:defRPr sz="1500" b="1">
                 <a:solidFill>
                   <a:srgbClr val="122C4E"/>
                 </a:solidFill>
@@ -45025,7 +48579,7 @@
               </a:defRPr>
             </a:pPr>
             <a:r>
-              <a:t>출력에서 topic·frame·파일 이름 또는 성공 메시지를 찾고, 맞지 않으면 다음 파일로 가지 않습니다.</a:t>
+              <a:t>확인: 출력에서 topic·frame·파일 이름 또는 성공 메시지를 찾고, 맞지 않으면 다음 파일로 가지 않습니다.</a:t>
             </a:r>
           </a:p>
         </p:txBody>
@@ -45257,21 +48811,138 @@
               </a:defRPr>
             </a:pPr>
             <a:r>
-              <a:t>현재 단계 실행    |    현재 폴더 ~/ros2_curri/my_agv_ws    |    현재 터미널</a:t>
-            </a:r>
-          </a:p>
-        </p:txBody>
-      </p:sp>
-      <p:sp>
-        <p:nvSpPr>
-          <p:cNvPr id="7" name="Rounded Rectangle 6"/>
+              <a:t>현재 단계 실행    |    현재 폴더 ~/ros2_curri/my_agv_ws    |    터미널 1</a:t>
+            </a:r>
+          </a:p>
+        </p:txBody>
+      </p:sp>
+      <p:sp>
+        <p:nvSpPr>
+          <p:cNvPr id="7" name="TextBox 6"/>
+          <p:cNvSpPr txBox="1"/>
+          <p:nvPr/>
+        </p:nvSpPr>
+        <p:spPr>
+          <a:xfrm>
+            <a:off x="676656" y="1719072"/>
+            <a:ext cx="1691640" cy="274320"/>
+          </a:xfrm>
+          <a:prstGeom prst="rect">
+            <a:avLst/>
+          </a:prstGeom>
+          <a:noFill/>
+        </p:spPr>
+        <p:txBody>
+          <a:bodyPr wrap="square" lIns="73152" rIns="73152" tIns="36576" bIns="36576">
+            <a:spAutoFit/>
+          </a:bodyPr>
+          <a:lstStyle/>
+          <a:p>
+            <a:pPr algn="l">
+              <a:spcAft>
+                <a:spcPts val="0"/>
+              </a:spcAft>
+              <a:defRPr sz="1700" b="1">
+                <a:solidFill>
+                  <a:srgbClr val="225B9B"/>
+                </a:solidFill>
+                <a:latin typeface="Noto Sans CJK KR"/>
+              </a:defRPr>
+            </a:pPr>
+            <a:r>
+              <a:t>명령의 목적</a:t>
+            </a:r>
+          </a:p>
+        </p:txBody>
+      </p:sp>
+      <p:sp>
+        <p:nvSpPr>
+          <p:cNvPr id="8" name="TextBox 7"/>
+          <p:cNvSpPr txBox="1"/>
+          <p:nvPr/>
+        </p:nvSpPr>
+        <p:spPr>
+          <a:xfrm>
+            <a:off x="676656" y="2002536"/>
+            <a:ext cx="10789920" cy="512064"/>
+          </a:xfrm>
+          <a:prstGeom prst="rect">
+            <a:avLst/>
+          </a:prstGeom>
+          <a:noFill/>
+        </p:spPr>
+        <p:txBody>
+          <a:bodyPr wrap="square" lIns="73152" rIns="73152" tIns="36576" bIns="36576">
+            <a:spAutoFit/>
+          </a:bodyPr>
+          <a:lstStyle/>
+          <a:p>
+            <a:pPr algn="l">
+              <a:spcAft>
+                <a:spcPts val="0"/>
+              </a:spcAft>
+              <a:defRPr sz="1800" b="0">
+                <a:solidFill>
+                  <a:srgbClr val="122C4E"/>
+                </a:solidFill>
+                <a:latin typeface="Noto Sans CJK KR"/>
+              </a:defRPr>
+            </a:pPr>
+            <a:r>
+              <a:t>명령 순서를 바꾸지 않습니다. build가 끝난 뒤 source하고, 마지막 명령으로 node·Gazebo·RViz를 실행합니다.</a:t>
+            </a:r>
+          </a:p>
+        </p:txBody>
+      </p:sp>
+      <p:sp>
+        <p:nvSpPr>
+          <p:cNvPr id="9" name="TextBox 8"/>
+          <p:cNvSpPr txBox="1"/>
+          <p:nvPr/>
+        </p:nvSpPr>
+        <p:spPr>
+          <a:xfrm>
+            <a:off x="676656" y="2816352"/>
+            <a:ext cx="10835640" cy="256032"/>
+          </a:xfrm>
+          <a:prstGeom prst="rect">
+            <a:avLst/>
+          </a:prstGeom>
+          <a:noFill/>
+        </p:spPr>
+        <p:txBody>
+          <a:bodyPr wrap="square" lIns="73152" rIns="73152" tIns="36576" bIns="36576">
+            <a:spAutoFit/>
+          </a:bodyPr>
+          <a:lstStyle/>
+          <a:p>
+            <a:pPr algn="ctr">
+              <a:spcAft>
+                <a:spcPts val="0"/>
+              </a:spcAft>
+              <a:defRPr sz="1600" b="1">
+                <a:solidFill>
+                  <a:srgbClr val="225B9B"/>
+                </a:solidFill>
+                <a:latin typeface="Noto Sans CJK KR"/>
+              </a:defRPr>
+            </a:pPr>
+            <a:r>
+              <a:t>터미널 1 — 아래 검은 블록은 명령만 복사합니다.</a:t>
+            </a:r>
+          </a:p>
+        </p:txBody>
+      </p:sp>
+      <p:sp>
+        <p:nvSpPr>
+          <p:cNvPr id="10" name="Rounded Rectangle 9"/>
           <p:cNvSpPr/>
           <p:nvPr/>
         </p:nvSpPr>
         <p:spPr>
           <a:xfrm>
-            <a:off x="658368" y="1700784"/>
-            <a:ext cx="10972800" cy="3182112"/>
+            <a:off x="676656" y="3154680"/>
+            <a:ext cx="10835640" cy="1938528"/>
           </a:xfrm>
           <a:prstGeom prst="roundRect">
             <a:avLst/>
@@ -45300,7 +48971,7 @@
           </a:fontRef>
         </p:style>
         <p:txBody>
-          <a:bodyPr rtlCol="0" anchor="ctr" wrap="square" lIns="73152" rIns="73152" tIns="36576" bIns="36576"/>
+          <a:bodyPr rtlCol="0" anchor="ctr" wrap="square" lIns="109728" rIns="109728" tIns="73152" bIns="73152"/>
           <a:lstStyle/>
           <a:p>
             <a:pPr algn="l">
@@ -45317,7 +48988,19 @@
             <a:r>
               <a:t>cd ~/ros2_curri/my_agv_ws &amp;&amp; source install/setup.bash</a:t>
             </a:r>
-            <a:br/>
+          </a:p>
+          <a:p>
+            <a:pPr algn="l">
+              <a:spcAft>
+                <a:spcPts val="0"/>
+              </a:spcAft>
+              <a:defRPr sz="1600" b="0">
+                <a:solidFill>
+                  <a:srgbClr val="FFFFFF"/>
+                </a:solidFill>
+                <a:latin typeface="DejaVu Sans Mono"/>
+              </a:defRPr>
+            </a:pPr>
             <a:r>
               <a:t>ros2 launch agv_bringup agv_sim.launch.py</a:t>
             </a:r>
@@ -45326,31 +49009,31 @@
       </p:sp>
       <p:sp>
         <p:nvSpPr>
-          <p:cNvPr id="8" name="TextBox 7"/>
-          <p:cNvSpPr txBox="1"/>
-          <p:nvPr/>
-        </p:nvSpPr>
-        <p:spPr>
-          <a:xfrm>
-            <a:off x="786384" y="5239512"/>
-            <a:ext cx="1261872" cy="237744"/>
-          </a:xfrm>
-          <a:prstGeom prst="rect">
-            <a:avLst/>
-          </a:prstGeom>
-          <a:noFill/>
-        </p:spPr>
-        <p:txBody>
-          <a:bodyPr wrap="square" lIns="73152" rIns="73152" tIns="36576" bIns="36576">
-            <a:spAutoFit/>
-          </a:bodyPr>
-          <a:lstStyle/>
-          <a:p>
-            <a:pPr algn="l">
-              <a:spcAft>
-                <a:spcPts val="0"/>
-              </a:spcAft>
-              <a:defRPr sz="1800" b="1">
+          <p:cNvPr id="11" name="TextBox 10"/>
+          <p:cNvSpPr txBox="1"/>
+          <p:nvPr/>
+        </p:nvSpPr>
+        <p:spPr>
+          <a:xfrm>
+            <a:off x="768096" y="5276088"/>
+            <a:ext cx="10561320" cy="384048"/>
+          </a:xfrm>
+          <a:prstGeom prst="rect">
+            <a:avLst/>
+          </a:prstGeom>
+          <a:noFill/>
+        </p:spPr>
+        <p:txBody>
+          <a:bodyPr wrap="square" lIns="73152" rIns="73152" tIns="36576" bIns="36576">
+            <a:spAutoFit/>
+          </a:bodyPr>
+          <a:lstStyle/>
+          <a:p>
+            <a:pPr algn="ctr">
+              <a:spcAft>
+                <a:spcPts val="0"/>
+              </a:spcAft>
+              <a:defRPr sz="1500" b="1">
                 <a:solidFill>
                   <a:srgbClr val="2A8B5A"/>
                 </a:solidFill>
@@ -45358,38 +49041,38 @@
               </a:defRPr>
             </a:pPr>
             <a:r>
-              <a:t>확인 기준</a:t>
-            </a:r>
-          </a:p>
-        </p:txBody>
-      </p:sp>
-      <p:sp>
-        <p:nvSpPr>
-          <p:cNvPr id="9" name="TextBox 8"/>
-          <p:cNvSpPr txBox="1"/>
-          <p:nvPr/>
-        </p:nvSpPr>
-        <p:spPr>
-          <a:xfrm>
-            <a:off x="786384" y="5532120"/>
-            <a:ext cx="10469880" cy="420624"/>
-          </a:xfrm>
-          <a:prstGeom prst="rect">
-            <a:avLst/>
-          </a:prstGeom>
-          <a:noFill/>
-        </p:spPr>
-        <p:txBody>
-          <a:bodyPr wrap="square" lIns="73152" rIns="73152" tIns="36576" bIns="36576">
-            <a:spAutoFit/>
-          </a:bodyPr>
-          <a:lstStyle/>
-          <a:p>
-            <a:pPr algn="l">
-              <a:spcAft>
-                <a:spcPts val="0"/>
-              </a:spcAft>
-              <a:defRPr sz="1800" b="0">
+              <a:t>터미널 1 역할: 시뮬레이터·bridge·node를 먼저 시작한 뒤 이 창은 종료하지 않고 둡니다.</a:t>
+            </a:r>
+          </a:p>
+        </p:txBody>
+      </p:sp>
+      <p:sp>
+        <p:nvSpPr>
+          <p:cNvPr id="12" name="TextBox 11"/>
+          <p:cNvSpPr txBox="1"/>
+          <p:nvPr/>
+        </p:nvSpPr>
+        <p:spPr>
+          <a:xfrm>
+            <a:off x="768096" y="5916168"/>
+            <a:ext cx="10561320" cy="292608"/>
+          </a:xfrm>
+          <a:prstGeom prst="rect">
+            <a:avLst/>
+          </a:prstGeom>
+          <a:noFill/>
+        </p:spPr>
+        <p:txBody>
+          <a:bodyPr wrap="square" lIns="73152" rIns="73152" tIns="36576" bIns="36576">
+            <a:spAutoFit/>
+          </a:bodyPr>
+          <a:lstStyle/>
+          <a:p>
+            <a:pPr algn="ctr">
+              <a:spcAft>
+                <a:spcPts val="0"/>
+              </a:spcAft>
+              <a:defRPr sz="1500" b="1">
                 <a:solidFill>
                   <a:srgbClr val="122C4E"/>
                 </a:solidFill>
@@ -45397,7 +49080,7 @@
               </a:defRPr>
             </a:pPr>
             <a:r>
-              <a:t>한 launch 실행, RViz/Gazebo 확인, mission log, rosbag 기록을 제출 체크리스트로 남긴다.</a:t>
+              <a:t>확인: 한 launch 실행, RViz/Gazebo 확인, mission log, rosbag 기록을 제출 체크리스트로 남긴다.</a:t>
             </a:r>
           </a:p>
         </p:txBody>
@@ -45493,7 +49176,7 @@
               </a:defRPr>
             </a:pPr>
             <a:r>
-              <a:t>실제 ROS 2 환경의 파일·패키지·구성 검증 로그</a:t>
+              <a:t>실제 RViz2 통합 display: 최종 미션에서 RobotModel·TF·sensor·Path·Marker를 함께 확인하는 화면</a:t>
             </a:r>
           </a:p>
         </p:txBody>
@@ -45578,7 +49261,7 @@
       </p:sp>
       <p:pic>
         <p:nvPicPr>
-          <p:cNvPr id="6" name="Picture 5" descr="validation_terminal.png"/>
+          <p:cNvPr id="6" name="Picture 5" descr="02_rviz_final_actual.png"/>
           <p:cNvPicPr>
             <a:picLocks noChangeAspect="1"/>
           </p:cNvPicPr>
@@ -45592,8 +49275,8 @@
         </p:blipFill>
         <p:spPr>
           <a:xfrm>
-            <a:off x="2855133" y="1353312"/>
-            <a:ext cx="6478685" cy="4800600"/>
+            <a:off x="2971409" y="1353312"/>
+            <a:ext cx="6246133" cy="4800600"/>
           </a:xfrm>
           <a:prstGeom prst="rect">
             <a:avLst/>
@@ -45634,7 +49317,7 @@
               </a:defRPr>
             </a:pPr>
             <a:r>
-              <a:t>화면에서 확인: ① 명령/설정  ② 정상 출력 또는 화면  ③ 다음 검증 명령으로 재확인</a:t>
+              <a:t>화면에서 확인: 명령·설정과 화면의 topic·frame·결과 이름을 대조합니다.</a:t>
             </a:r>
           </a:p>
         </p:txBody>
@@ -45691,7 +49374,7 @@
               </a:defRPr>
             </a:pPr>
             <a:r>
-              <a:t>객관적 검증 명령으로 완료를 확인한다</a:t>
+              <a:t>정상 결과: 실제 환경에서 확인한 출력</a:t>
             </a:r>
           </a:p>
         </p:txBody>
@@ -45730,7 +49413,7 @@
               </a:defRPr>
             </a:pPr>
             <a:r>
-              <a:t>화면만 보지 말고 topic·frame·파일·parameter를 다시 확인합니다.</a:t>
+              <a:t>실제 ROS 2 환경의 파일·패키지·구성 검증 로그</a:t>
             </a:r>
           </a:p>
         </p:txBody>
@@ -45813,176 +49496,57 @@
           </a:p>
         </p:txBody>
       </p:sp>
-      <p:sp>
-        <p:nvSpPr>
-          <p:cNvPr id="6" name="Rectangle 5"/>
-          <p:cNvSpPr/>
-          <p:nvPr/>
-        </p:nvSpPr>
-        <p:spPr>
-          <a:xfrm>
-            <a:off x="566928" y="1188720"/>
-            <a:ext cx="11064240" cy="347472"/>
-          </a:xfrm>
-          <a:prstGeom prst="rect">
-            <a:avLst/>
-          </a:prstGeom>
-          <a:solidFill>
-            <a:srgbClr val="F4F7FB"/>
-          </a:solidFill>
-          <a:ln>
-            <a:solidFill>
-              <a:srgbClr val="F4F7FB"/>
-            </a:solidFill>
-          </a:ln>
-        </p:spPr>
-        <p:style>
-          <a:lnRef idx="1">
-            <a:schemeClr val="accent1"/>
-          </a:lnRef>
-          <a:fillRef idx="3">
-            <a:schemeClr val="accent1"/>
-          </a:fillRef>
-          <a:effectRef idx="2">
-            <a:schemeClr val="accent1"/>
-          </a:effectRef>
-          <a:fontRef idx="minor">
-            <a:schemeClr val="lt1"/>
-          </a:fontRef>
-        </p:style>
-        <p:txBody>
-          <a:bodyPr rtlCol="0" anchor="ctr" wrap="square" lIns="73152" rIns="73152" tIns="36576" bIns="36576"/>
-          <a:lstStyle/>
-          <a:p>
-            <a:pPr algn="l">
-              <a:spcAft>
-                <a:spcPts val="0"/>
-              </a:spcAft>
-              <a:defRPr sz="1300" b="1">
-                <a:solidFill>
-                  <a:srgbClr val="122C4E"/>
-                </a:solidFill>
-                <a:latin typeface="Noto Sans CJK KR"/>
-              </a:defRPr>
-            </a:pPr>
-            <a:r>
-              <a:t>현재 단계 검증    |    현재 폴더 ~/ros2_curri/my_agv_ws    |    현재 터미널</a:t>
-            </a:r>
-          </a:p>
-        </p:txBody>
-      </p:sp>
-      <p:sp>
-        <p:nvSpPr>
-          <p:cNvPr id="7" name="Rounded Rectangle 6"/>
-          <p:cNvSpPr/>
-          <p:nvPr/>
-        </p:nvSpPr>
-        <p:spPr>
-          <a:xfrm>
-            <a:off x="658368" y="1755648"/>
-            <a:ext cx="10972800" cy="2148840"/>
-          </a:xfrm>
-          <a:prstGeom prst="roundRect">
-            <a:avLst/>
-          </a:prstGeom>
-          <a:solidFill>
-            <a:srgbClr val="1D232D"/>
-          </a:solidFill>
-          <a:ln>
-            <a:solidFill>
-              <a:srgbClr val="1D232D"/>
-            </a:solidFill>
-          </a:ln>
-        </p:spPr>
-        <p:style>
-          <a:lnRef idx="1">
-            <a:schemeClr val="accent1"/>
-          </a:lnRef>
-          <a:fillRef idx="3">
-            <a:schemeClr val="accent1"/>
-          </a:fillRef>
-          <a:effectRef idx="2">
-            <a:schemeClr val="accent1"/>
-          </a:effectRef>
-          <a:fontRef idx="minor">
-            <a:schemeClr val="lt1"/>
-          </a:fontRef>
-        </p:style>
-        <p:txBody>
-          <a:bodyPr rtlCol="0" anchor="ctr" wrap="square" lIns="73152" rIns="73152" tIns="36576" bIns="36576"/>
-          <a:lstStyle/>
-          <a:p>
-            <a:pPr algn="l">
-              <a:spcAft>
-                <a:spcPts val="0"/>
-              </a:spcAft>
-              <a:defRPr sz="1600" b="0">
-                <a:solidFill>
-                  <a:srgbClr val="FFFFFF"/>
-                </a:solidFill>
-                <a:latin typeface="DejaVu Sans Mono"/>
-              </a:defRPr>
-            </a:pPr>
-            <a:r>
-              <a:t>ros2 launch agv_bringup agv_sim.launch.py --show-args</a:t>
-            </a:r>
-            <a:br/>
-            <a:r>
-              <a:t>ros2 node list</a:t>
-            </a:r>
-            <a:br/>
-            <a:r>
-              <a:t>ros2 topic list | rg '/scan|/imu/data|/odom|/camera/image_raw|/cmd_vel'</a:t>
-            </a:r>
-          </a:p>
-        </p:txBody>
-      </p:sp>
-      <p:sp>
-        <p:nvSpPr>
-          <p:cNvPr id="8" name="Rounded Rectangle 7"/>
-          <p:cNvSpPr/>
-          <p:nvPr/>
-        </p:nvSpPr>
-        <p:spPr>
-          <a:xfrm>
-            <a:off x="658368" y="4206240"/>
-            <a:ext cx="10972800" cy="1554480"/>
-          </a:xfrm>
-          <a:prstGeom prst="roundRect">
-            <a:avLst/>
-          </a:prstGeom>
-          <a:solidFill>
-            <a:srgbClr val="F4F7FB"/>
-          </a:solidFill>
-          <a:ln>
-            <a:solidFill>
-              <a:srgbClr val="D1DFD5"/>
-            </a:solidFill>
-          </a:ln>
-        </p:spPr>
-        <p:style>
-          <a:lnRef idx="1">
-            <a:schemeClr val="accent1"/>
-          </a:lnRef>
-          <a:fillRef idx="3">
-            <a:schemeClr val="accent1"/>
-          </a:fillRef>
-          <a:effectRef idx="2">
-            <a:schemeClr val="accent1"/>
-          </a:effectRef>
-          <a:fontRef idx="minor">
-            <a:schemeClr val="lt1"/>
-          </a:fontRef>
-        </p:style>
-        <p:txBody>
-          <a:bodyPr rtlCol="0" anchor="ctr" wrap="square" lIns="73152" rIns="73152" tIns="36576" bIns="36576"/>
-          <a:lstStyle/>
-          <a:p>
-            <a:pPr algn="l">
-              <a:spcAft>
-                <a:spcPts val="0"/>
-              </a:spcAft>
-              <a:defRPr sz="1800" b="1">
+      <p:pic>
+        <p:nvPicPr>
+          <p:cNvPr id="6" name="Picture 5" descr="validation_terminal.png"/>
+          <p:cNvPicPr>
+            <a:picLocks noChangeAspect="1"/>
+          </p:cNvPicPr>
+          <p:nvPr/>
+        </p:nvPicPr>
+        <p:blipFill>
+          <a:blip r:embed="rId2"/>
+          <a:stretch>
+            <a:fillRect/>
+          </a:stretch>
+        </p:blipFill>
+        <p:spPr>
+          <a:xfrm>
+            <a:off x="2855133" y="1353312"/>
+            <a:ext cx="6478685" cy="4800600"/>
+          </a:xfrm>
+          <a:prstGeom prst="rect">
+            <a:avLst/>
+          </a:prstGeom>
+        </p:spPr>
+      </p:pic>
+      <p:sp>
+        <p:nvSpPr>
+          <p:cNvPr id="7" name="TextBox 6"/>
+          <p:cNvSpPr txBox="1"/>
+          <p:nvPr/>
+        </p:nvSpPr>
+        <p:spPr>
+          <a:xfrm>
+            <a:off x="777240" y="6144768"/>
+            <a:ext cx="10607040" cy="310896"/>
+          </a:xfrm>
+          <a:prstGeom prst="rect">
+            <a:avLst/>
+          </a:prstGeom>
+          <a:noFill/>
+        </p:spPr>
+        <p:txBody>
+          <a:bodyPr wrap="square" lIns="73152" rIns="73152" tIns="36576" bIns="36576">
+            <a:spAutoFit/>
+          </a:bodyPr>
+          <a:lstStyle/>
+          <a:p>
+            <a:pPr algn="ctr">
+              <a:spcAft>
+                <a:spcPts val="0"/>
+              </a:spcAft>
+              <a:defRPr sz="1100" b="1">
                 <a:solidFill>
                   <a:srgbClr val="2A8B5A"/>
                 </a:solidFill>
@@ -45990,58 +49554,7 @@
               </a:defRPr>
             </a:pPr>
             <a:r>
-              <a:t>완료 체크</a:t>
-            </a:r>
-            <a:br/>
-            <a:r>
-              <a:t>□ 명령이 오류 없이 실행된다.</a:t>
-            </a:r>
-            <a:br/>
-            <a:r>
-              <a:t>□ 기대한 파일·topic·frame·parameter 이름이 보인다.</a:t>
-            </a:r>
-            <a:br/>
-            <a:r>
-              <a:t>□ 값의 단위와 방향을 한 문장으로 설명할 수 있다.</a:t>
-            </a:r>
-          </a:p>
-        </p:txBody>
-      </p:sp>
-      <p:sp>
-        <p:nvSpPr>
-          <p:cNvPr id="9" name="TextBox 8"/>
-          <p:cNvSpPr txBox="1"/>
-          <p:nvPr/>
-        </p:nvSpPr>
-        <p:spPr>
-          <a:xfrm>
-            <a:off x="731520" y="5989320"/>
-            <a:ext cx="10789920" cy="237744"/>
-          </a:xfrm>
-          <a:prstGeom prst="rect">
-            <a:avLst/>
-          </a:prstGeom>
-          <a:noFill/>
-        </p:spPr>
-        <p:txBody>
-          <a:bodyPr wrap="square" lIns="73152" rIns="73152" tIns="36576" bIns="36576">
-            <a:spAutoFit/>
-          </a:bodyPr>
-          <a:lstStyle/>
-          <a:p>
-            <a:pPr algn="l">
-              <a:spcAft>
-                <a:spcPts val="0"/>
-              </a:spcAft>
-              <a:defRPr sz="1500" b="1">
-                <a:solidFill>
-                  <a:srgbClr val="122C4E"/>
-                </a:solidFill>
-                <a:latin typeface="Noto Sans CJK KR"/>
-              </a:defRPr>
-            </a:pPr>
-            <a:r>
-              <a:t>완료 조건: 한 launch 실행, RViz/Gazebo 확인, mission log, rosbag 기록을 제출 체크리스트로 남긴다.</a:t>
+              <a:t>화면에서 확인: ① 명령/설정  ② 정상 출력 또는 화면  ③ 다음 검증 명령으로 재확인</a:t>
             </a:r>
           </a:p>
         </p:txBody>
@@ -46098,7 +49611,7 @@
               </a:defRPr>
             </a:pPr>
             <a:r>
-              <a:t>막히면: 증상 → 우선 확인 → 재검증</a:t>
+              <a:t>객관적 검증 명령으로 완료를 확인한다</a:t>
             </a:r>
           </a:p>
         </p:txBody>
@@ -46137,7 +49650,7 @@
               </a:defRPr>
             </a:pPr>
             <a:r>
-              <a:t>오류 메시지를 숨기지 않고 같은 순서로 점검합니다.</a:t>
+              <a:t>화면만 보지 말고 topic·frame·파일·parameter를 다시 확인합니다.</a:t>
             </a:r>
           </a:p>
         </p:txBody>
@@ -46273,7 +49786,7 @@
               </a:defRPr>
             </a:pPr>
             <a:r>
-              <a:t>현재 단계 오류 대응    |    현재 폴더 ~/ros2_curri/my_agv_ws    |    현재 터미널</a:t>
+              <a:t>현재 단계 검증    |    현재 폴더 ~/ros2_curri/my_agv_ws    |    현재 터미널</a:t>
             </a:r>
           </a:p>
         </p:txBody>
@@ -46286,18 +49799,18 @@
         </p:nvSpPr>
         <p:spPr>
           <a:xfrm>
-            <a:off x="694944" y="1755648"/>
-            <a:ext cx="10972800" cy="1115568"/>
+            <a:off x="658368" y="1755648"/>
+            <a:ext cx="10972800" cy="2148840"/>
           </a:xfrm>
           <a:prstGeom prst="roundRect">
             <a:avLst/>
           </a:prstGeom>
           <a:solidFill>
-            <a:srgbClr val="FFF7F4"/>
+            <a:srgbClr val="1D232D"/>
           </a:solidFill>
           <a:ln>
             <a:solidFill>
-              <a:srgbClr val="EDBEB4"/>
+              <a:srgbClr val="1D232D"/>
             </a:solidFill>
           </a:ln>
         </p:spPr>
@@ -46316,72 +49829,7 @@
           </a:fontRef>
         </p:style>
         <p:txBody>
-          <a:bodyPr rtlCol="0" anchor="ctr"/>
-          <a:lstStyle/>
-          <a:p>
-            <a:pPr algn="ctr"/>
-          </a:p>
-        </p:txBody>
-      </p:sp>
-      <p:sp>
-        <p:nvSpPr>
-          <p:cNvPr id="8" name="TextBox 7"/>
-          <p:cNvSpPr txBox="1"/>
-          <p:nvPr/>
-        </p:nvSpPr>
-        <p:spPr>
-          <a:xfrm>
-            <a:off x="896112" y="1901952"/>
-            <a:ext cx="2926080" cy="274320"/>
-          </a:xfrm>
-          <a:prstGeom prst="rect">
-            <a:avLst/>
-          </a:prstGeom>
-          <a:noFill/>
-        </p:spPr>
-        <p:txBody>
-          <a:bodyPr wrap="square" lIns="73152" rIns="73152" tIns="36576" bIns="36576">
-            <a:spAutoFit/>
-          </a:bodyPr>
-          <a:lstStyle/>
-          <a:p>
-            <a:pPr algn="l">
-              <a:spcAft>
-                <a:spcPts val="0"/>
-              </a:spcAft>
-              <a:defRPr sz="1800" b="1">
-                <a:solidFill>
-                  <a:srgbClr val="BE3B3B"/>
-                </a:solidFill>
-                <a:latin typeface="Noto Sans CJK KR"/>
-              </a:defRPr>
-            </a:pPr>
-            <a:r>
-              <a:t>증상 1: 일부 노드만 실행</a:t>
-            </a:r>
-          </a:p>
-        </p:txBody>
-      </p:sp>
-      <p:sp>
-        <p:nvSpPr>
-          <p:cNvPr id="9" name="TextBox 8"/>
-          <p:cNvSpPr txBox="1"/>
-          <p:nvPr/>
-        </p:nvSpPr>
-        <p:spPr>
-          <a:xfrm>
-            <a:off x="3794760" y="1883664"/>
-            <a:ext cx="7543800" cy="621792"/>
-          </a:xfrm>
-          <a:prstGeom prst="rect">
-            <a:avLst/>
-          </a:prstGeom>
-          <a:noFill/>
-        </p:spPr>
-        <p:txBody>
-          <a:bodyPr wrap="square" lIns="73152" rIns="73152" tIns="36576" bIns="36576">
-            <a:spAutoFit/>
-          </a:bodyPr>
+          <a:bodyPr rtlCol="0" anchor="ctr" wrap="square" lIns="109728" rIns="109728" tIns="73152" bIns="73152"/>
           <a:lstStyle/>
           <a:p>
             <a:pPr algn="l">
@@ -46390,41 +49838,69 @@
               </a:spcAft>
               <a:defRPr sz="1600" b="0">
                 <a:solidFill>
-                  <a:srgbClr val="122C4E"/>
-                </a:solidFill>
-                <a:latin typeface="Noto Sans CJK KR"/>
-              </a:defRPr>
-            </a:pPr>
-            <a:r>
-              <a:t>우선 확인: launch 순서·namespace·config 경로를 확인한다.</a:t>
-            </a:r>
-            <a:br/>
-            <a:r>
-              <a:t>수정 후: ros2 launch agv_bringup agv_sim.launch.py --show-args</a:t>
-            </a:r>
-          </a:p>
-        </p:txBody>
-      </p:sp>
-      <p:sp>
-        <p:nvSpPr>
-          <p:cNvPr id="10" name="Rounded Rectangle 9"/>
+                  <a:srgbClr val="FFFFFF"/>
+                </a:solidFill>
+                <a:latin typeface="DejaVu Sans Mono"/>
+              </a:defRPr>
+            </a:pPr>
+            <a:r>
+              <a:t>ros2 launch agv_bringup agv_sim.launch.py --show-args</a:t>
+            </a:r>
+          </a:p>
+          <a:p>
+            <a:pPr algn="l">
+              <a:spcAft>
+                <a:spcPts val="0"/>
+              </a:spcAft>
+              <a:defRPr sz="1600" b="0">
+                <a:solidFill>
+                  <a:srgbClr val="FFFFFF"/>
+                </a:solidFill>
+                <a:latin typeface="DejaVu Sans Mono"/>
+              </a:defRPr>
+            </a:pPr>
+            <a:r>
+              <a:t>ros2 node list</a:t>
+            </a:r>
+          </a:p>
+          <a:p>
+            <a:pPr algn="l">
+              <a:spcAft>
+                <a:spcPts val="0"/>
+              </a:spcAft>
+              <a:defRPr sz="1600" b="0">
+                <a:solidFill>
+                  <a:srgbClr val="FFFFFF"/>
+                </a:solidFill>
+                <a:latin typeface="DejaVu Sans Mono"/>
+              </a:defRPr>
+            </a:pPr>
+            <a:r>
+              <a:t>ros2 topic list | rg '/scan|/imu/data|/odom|/camera/image_raw|/cmd_vel'</a:t>
+            </a:r>
+          </a:p>
+        </p:txBody>
+      </p:sp>
+      <p:sp>
+        <p:nvSpPr>
+          <p:cNvPr id="8" name="Rounded Rectangle 7"/>
           <p:cNvSpPr/>
           <p:nvPr/>
         </p:nvSpPr>
         <p:spPr>
           <a:xfrm>
-            <a:off x="694944" y="3172968"/>
-            <a:ext cx="10972800" cy="1115568"/>
+            <a:off x="658368" y="4206240"/>
+            <a:ext cx="10972800" cy="1554480"/>
           </a:xfrm>
           <a:prstGeom prst="roundRect">
             <a:avLst/>
           </a:prstGeom>
           <a:solidFill>
-            <a:srgbClr val="FFF7F4"/>
+            <a:srgbClr val="F4F7FB"/>
           </a:solidFill>
           <a:ln>
             <a:solidFill>
-              <a:srgbClr val="EDBEB4"/>
+              <a:srgbClr val="D1DFD5"/>
             </a:solidFill>
           </a:ln>
         </p:spPr>
@@ -46443,33 +49919,7 @@
           </a:fontRef>
         </p:style>
         <p:txBody>
-          <a:bodyPr rtlCol="0" anchor="ctr"/>
-          <a:lstStyle/>
-          <a:p>
-            <a:pPr algn="ctr"/>
-          </a:p>
-        </p:txBody>
-      </p:sp>
-      <p:sp>
-        <p:nvSpPr>
-          <p:cNvPr id="11" name="TextBox 10"/>
-          <p:cNvSpPr txBox="1"/>
-          <p:nvPr/>
-        </p:nvSpPr>
-        <p:spPr>
-          <a:xfrm>
-            <a:off x="896112" y="3319272"/>
-            <a:ext cx="2926080" cy="274320"/>
-          </a:xfrm>
-          <a:prstGeom prst="rect">
-            <a:avLst/>
-          </a:prstGeom>
-          <a:noFill/>
-        </p:spPr>
-        <p:txBody>
-          <a:bodyPr wrap="square" lIns="73152" rIns="73152" tIns="36576" bIns="36576">
-            <a:spAutoFit/>
-          </a:bodyPr>
+          <a:bodyPr rtlCol="0" anchor="ctr" wrap="square" lIns="73152" rIns="73152" tIns="36576" bIns="36576"/>
           <a:lstStyle/>
           <a:p>
             <a:pPr algn="l">
@@ -46478,44 +49928,56 @@
               </a:spcAft>
               <a:defRPr sz="1800" b="1">
                 <a:solidFill>
-                  <a:srgbClr val="BE3B3B"/>
-                </a:solidFill>
-                <a:latin typeface="Noto Sans CJK KR"/>
-              </a:defRPr>
-            </a:pPr>
-            <a:r>
-              <a:t>증상 2: 센서/TF 위치 불일치</a:t>
-            </a:r>
-          </a:p>
-        </p:txBody>
-      </p:sp>
-      <p:sp>
-        <p:nvSpPr>
-          <p:cNvPr id="12" name="TextBox 11"/>
-          <p:cNvSpPr txBox="1"/>
-          <p:nvPr/>
-        </p:nvSpPr>
-        <p:spPr>
-          <a:xfrm>
-            <a:off x="3794760" y="3300984"/>
-            <a:ext cx="7543800" cy="621792"/>
-          </a:xfrm>
-          <a:prstGeom prst="rect">
-            <a:avLst/>
-          </a:prstGeom>
-          <a:noFill/>
-        </p:spPr>
-        <p:txBody>
-          <a:bodyPr wrap="square" lIns="73152" rIns="73152" tIns="36576" bIns="36576">
-            <a:spAutoFit/>
-          </a:bodyPr>
-          <a:lstStyle/>
-          <a:p>
-            <a:pPr algn="l">
-              <a:spcAft>
-                <a:spcPts val="0"/>
-              </a:spcAft>
-              <a:defRPr sz="1600" b="0">
+                  <a:srgbClr val="2A8B5A"/>
+                </a:solidFill>
+                <a:latin typeface="Noto Sans CJK KR"/>
+              </a:defRPr>
+            </a:pPr>
+            <a:r>
+              <a:t>완료 체크</a:t>
+            </a:r>
+            <a:br/>
+            <a:r>
+              <a:t>□ 명령이 오류 없이 실행된다.</a:t>
+            </a:r>
+            <a:br/>
+            <a:r>
+              <a:t>□ 기대한 파일·topic·frame·parameter 이름이 보인다.</a:t>
+            </a:r>
+            <a:br/>
+            <a:r>
+              <a:t>□ 값의 단위와 방향을 한 문장으로 설명할 수 있다.</a:t>
+            </a:r>
+          </a:p>
+        </p:txBody>
+      </p:sp>
+      <p:sp>
+        <p:nvSpPr>
+          <p:cNvPr id="9" name="TextBox 8"/>
+          <p:cNvSpPr txBox="1"/>
+          <p:nvPr/>
+        </p:nvSpPr>
+        <p:spPr>
+          <a:xfrm>
+            <a:off x="731520" y="5989320"/>
+            <a:ext cx="10789920" cy="237744"/>
+          </a:xfrm>
+          <a:prstGeom prst="rect">
+            <a:avLst/>
+          </a:prstGeom>
+          <a:noFill/>
+        </p:spPr>
+        <p:txBody>
+          <a:bodyPr wrap="square" lIns="73152" rIns="73152" tIns="36576" bIns="36576">
+            <a:spAutoFit/>
+          </a:bodyPr>
+          <a:lstStyle/>
+          <a:p>
+            <a:pPr algn="l">
+              <a:spcAft>
+                <a:spcPts val="0"/>
+              </a:spcAft>
+              <a:defRPr sz="1500" b="1">
                 <a:solidFill>
                   <a:srgbClr val="122C4E"/>
                 </a:solidFill>
@@ -46523,181 +49985,7 @@
               </a:defRPr>
             </a:pPr>
             <a:r>
-              <a:t>우선 확인: header.frame_id와 TF tree를 확인한다.</a:t>
-            </a:r>
-            <a:br/>
-            <a:r>
-              <a:t>수정 후: ros2 launch agv_bringup agv_sim.launch.py --show-args</a:t>
-            </a:r>
-          </a:p>
-        </p:txBody>
-      </p:sp>
-      <p:sp>
-        <p:nvSpPr>
-          <p:cNvPr id="13" name="Rounded Rectangle 12"/>
-          <p:cNvSpPr/>
-          <p:nvPr/>
-        </p:nvSpPr>
-        <p:spPr>
-          <a:xfrm>
-            <a:off x="694944" y="4590288"/>
-            <a:ext cx="10972800" cy="1115568"/>
-          </a:xfrm>
-          <a:prstGeom prst="roundRect">
-            <a:avLst/>
-          </a:prstGeom>
-          <a:solidFill>
-            <a:srgbClr val="FFF7F4"/>
-          </a:solidFill>
-          <a:ln>
-            <a:solidFill>
-              <a:srgbClr val="EDBEB4"/>
-            </a:solidFill>
-          </a:ln>
-        </p:spPr>
-        <p:style>
-          <a:lnRef idx="1">
-            <a:schemeClr val="accent1"/>
-          </a:lnRef>
-          <a:fillRef idx="3">
-            <a:schemeClr val="accent1"/>
-          </a:fillRef>
-          <a:effectRef idx="2">
-            <a:schemeClr val="accent1"/>
-          </a:effectRef>
-          <a:fontRef idx="minor">
-            <a:schemeClr val="lt1"/>
-          </a:fontRef>
-        </p:style>
-        <p:txBody>
-          <a:bodyPr rtlCol="0" anchor="ctr"/>
-          <a:lstStyle/>
-          <a:p>
-            <a:pPr algn="ctr"/>
-          </a:p>
-        </p:txBody>
-      </p:sp>
-      <p:sp>
-        <p:nvSpPr>
-          <p:cNvPr id="14" name="TextBox 13"/>
-          <p:cNvSpPr txBox="1"/>
-          <p:nvPr/>
-        </p:nvSpPr>
-        <p:spPr>
-          <a:xfrm>
-            <a:off x="896112" y="4736592"/>
-            <a:ext cx="2926080" cy="274320"/>
-          </a:xfrm>
-          <a:prstGeom prst="rect">
-            <a:avLst/>
-          </a:prstGeom>
-          <a:noFill/>
-        </p:spPr>
-        <p:txBody>
-          <a:bodyPr wrap="square" lIns="73152" rIns="73152" tIns="36576" bIns="36576">
-            <a:spAutoFit/>
-          </a:bodyPr>
-          <a:lstStyle/>
-          <a:p>
-            <a:pPr algn="l">
-              <a:spcAft>
-                <a:spcPts val="0"/>
-              </a:spcAft>
-              <a:defRPr sz="1800" b="1">
-                <a:solidFill>
-                  <a:srgbClr val="BE3B3B"/>
-                </a:solidFill>
-                <a:latin typeface="Noto Sans CJK KR"/>
-              </a:defRPr>
-            </a:pPr>
-            <a:r>
-              <a:t>증상 3: 로봇이 불안정</a:t>
-            </a:r>
-          </a:p>
-        </p:txBody>
-      </p:sp>
-      <p:sp>
-        <p:nvSpPr>
-          <p:cNvPr id="15" name="TextBox 14"/>
-          <p:cNvSpPr txBox="1"/>
-          <p:nvPr/>
-        </p:nvSpPr>
-        <p:spPr>
-          <a:xfrm>
-            <a:off x="3794760" y="4718303"/>
-            <a:ext cx="7543800" cy="621792"/>
-          </a:xfrm>
-          <a:prstGeom prst="rect">
-            <a:avLst/>
-          </a:prstGeom>
-          <a:noFill/>
-        </p:spPr>
-        <p:txBody>
-          <a:bodyPr wrap="square" lIns="73152" rIns="73152" tIns="36576" bIns="36576">
-            <a:spAutoFit/>
-          </a:bodyPr>
-          <a:lstStyle/>
-          <a:p>
-            <a:pPr algn="l">
-              <a:spcAft>
-                <a:spcPts val="0"/>
-              </a:spcAft>
-              <a:defRPr sz="1600" b="0">
-                <a:solidFill>
-                  <a:srgbClr val="122C4E"/>
-                </a:solidFill>
-                <a:latin typeface="Noto Sans CJK KR"/>
-              </a:defRPr>
-            </a:pPr>
-            <a:r>
-              <a:t>우선 확인: physics collision·friction·inertia를 M07 순서로 점검한다.</a:t>
-            </a:r>
-            <a:br/>
-            <a:r>
-              <a:t>수정 후: ros2 launch agv_bringup agv_sim.launch.py --show-args</a:t>
-            </a:r>
-          </a:p>
-        </p:txBody>
-      </p:sp>
-      <p:sp>
-        <p:nvSpPr>
-          <p:cNvPr id="16" name="TextBox 15"/>
-          <p:cNvSpPr txBox="1"/>
-          <p:nvPr/>
-        </p:nvSpPr>
-        <p:spPr>
-          <a:xfrm>
-            <a:off x="822960" y="5779008"/>
-            <a:ext cx="10607040" cy="493776"/>
-          </a:xfrm>
-          <a:prstGeom prst="rect">
-            <a:avLst/>
-          </a:prstGeom>
-          <a:noFill/>
-        </p:spPr>
-        <p:txBody>
-          <a:bodyPr wrap="square" lIns="73152" rIns="73152" tIns="36576" bIns="36576">
-            <a:spAutoFit/>
-          </a:bodyPr>
-          <a:lstStyle/>
-          <a:p>
-            <a:pPr algn="ctr">
-              <a:spcAft>
-                <a:spcPts val="0"/>
-              </a:spcAft>
-              <a:defRPr sz="1500" b="1">
-                <a:solidFill>
-                  <a:srgbClr val="DB7E22"/>
-                </a:solidFill>
-                <a:latin typeface="Noto Sans CJK KR"/>
-              </a:defRPr>
-            </a:pPr>
-            <a:r>
-              <a:t>공통 순서: ① 현재 폴더 ② source ③ 파일 경로</a:t>
-            </a:r>
-            <a:br/>
-            <a:r>
-              <a:t>④ 이름/타입/단위 ⑤ build·source 후 재실행</a:t>
+              <a:t>완료 조건: 한 launch 실행, RViz/Gazebo 확인, mission log, rosbag 기록을 제출 체크리스트로 남긴다.</a:t>
             </a:r>
           </a:p>
         </p:txBody>
@@ -47397,7 +50685,7 @@
               </a:defRPr>
             </a:pPr>
             <a:r>
-              <a:t>막혔을 때만: Complete를 복구용으로 사용한다</a:t>
+              <a:t>막히면: 증상 → 우선 확인 → 재검증</a:t>
             </a:r>
           </a:p>
         </p:txBody>
@@ -47436,7 +50724,7 @@
               </a:defRPr>
             </a:pPr>
             <a:r>
-              <a:t>이 슬라이드가 먼저가 아닙니다. 직접 입력·실행을 시도한 뒤에만 내 파일과 Complete를 비교합니다.</a:t>
+              <a:t>오류 메시지를 숨기지 않고 같은 순서로 점검합니다.</a:t>
             </a:r>
           </a:p>
         </p:txBody>
@@ -47572,70 +50860,31 @@
               </a:defRPr>
             </a:pPr>
             <a:r>
-              <a:t>현재 단계 복구용 Complete    |    현재 폴더 ~/ros2_curri    |    현재 터미널</a:t>
-            </a:r>
-          </a:p>
-        </p:txBody>
-      </p:sp>
-      <p:sp>
-        <p:nvSpPr>
-          <p:cNvPr id="7" name="TextBox 6"/>
-          <p:cNvSpPr txBox="1"/>
-          <p:nvPr/>
-        </p:nvSpPr>
-        <p:spPr>
-          <a:xfrm>
-            <a:off x="713232" y="1664208"/>
-            <a:ext cx="10698480" cy="402336"/>
-          </a:xfrm>
-          <a:prstGeom prst="rect">
-            <a:avLst/>
-          </a:prstGeom>
-          <a:noFill/>
-        </p:spPr>
-        <p:txBody>
-          <a:bodyPr wrap="square" lIns="73152" rIns="73152" tIns="36576" bIns="36576">
-            <a:spAutoFit/>
-          </a:bodyPr>
-          <a:lstStyle/>
-          <a:p>
-            <a:pPr algn="ctr">
-              <a:spcAft>
-                <a:spcPts val="0"/>
-              </a:spcAft>
-              <a:defRPr sz="1800" b="1">
-                <a:solidFill>
-                  <a:srgbClr val="DB7E22"/>
-                </a:solidFill>
-                <a:latin typeface="Noto Sans CJK KR"/>
-              </a:defRPr>
-            </a:pPr>
-            <a:r>
-              <a:t>권장 순서: ① 내 오류를 확인  ② Complete와 diff  ③ 꼭 필요할 때만 backup 후 복사</a:t>
-            </a:r>
-          </a:p>
-        </p:txBody>
-      </p:sp>
-      <p:sp>
-        <p:nvSpPr>
-          <p:cNvPr id="8" name="Rounded Rectangle 7"/>
+              <a:t>현재 단계 오류 대응    |    현재 폴더 ~/ros2_curri/my_agv_ws    |    현재 터미널</a:t>
+            </a:r>
+          </a:p>
+        </p:txBody>
+      </p:sp>
+      <p:sp>
+        <p:nvSpPr>
+          <p:cNvPr id="7" name="Rounded Rectangle 6"/>
           <p:cNvSpPr/>
           <p:nvPr/>
         </p:nvSpPr>
         <p:spPr>
           <a:xfrm>
-            <a:off x="676656" y="2423160"/>
-            <a:ext cx="10881360" cy="2606040"/>
+            <a:off x="694944" y="1755648"/>
+            <a:ext cx="10972800" cy="1115568"/>
           </a:xfrm>
           <a:prstGeom prst="roundRect">
             <a:avLst/>
           </a:prstGeom>
           <a:solidFill>
-            <a:srgbClr val="1D232D"/>
+            <a:srgbClr val="FFF7F4"/>
           </a:solidFill>
           <a:ln>
             <a:solidFill>
-              <a:srgbClr val="1D232D"/>
+              <a:srgbClr val="EDBEB4"/>
             </a:solidFill>
           </a:ln>
         </p:spPr>
@@ -47654,77 +50903,388 @@
           </a:fontRef>
         </p:style>
         <p:txBody>
-          <a:bodyPr rtlCol="0" anchor="ctr" wrap="square" lIns="73152" rIns="73152" tIns="36576" bIns="36576"/>
-          <a:lstStyle/>
-          <a:p>
-            <a:pPr algn="l">
-              <a:spcAft>
-                <a:spcPts val="0"/>
-              </a:spcAft>
-              <a:defRPr sz="1400" b="0">
-                <a:solidFill>
-                  <a:srgbClr val="FFFFFF"/>
-                </a:solidFill>
-                <a:latin typeface="DejaVu Sans Mono"/>
-              </a:defRPr>
-            </a:pPr>
-            <a:r>
-              <a:t>cd ~/ros2_curri</a:t>
+          <a:bodyPr rtlCol="0" anchor="ctr"/>
+          <a:lstStyle/>
+          <a:p>
+            <a:pPr algn="ctr"/>
+          </a:p>
+        </p:txBody>
+      </p:sp>
+      <p:sp>
+        <p:nvSpPr>
+          <p:cNvPr id="8" name="TextBox 7"/>
+          <p:cNvSpPr txBox="1"/>
+          <p:nvPr/>
+        </p:nvSpPr>
+        <p:spPr>
+          <a:xfrm>
+            <a:off x="896112" y="1901952"/>
+            <a:ext cx="2926080" cy="274320"/>
+          </a:xfrm>
+          <a:prstGeom prst="rect">
+            <a:avLst/>
+          </a:prstGeom>
+          <a:noFill/>
+        </p:spPr>
+        <p:txBody>
+          <a:bodyPr wrap="square" lIns="73152" rIns="73152" tIns="36576" bIns="36576">
+            <a:spAutoFit/>
+          </a:bodyPr>
+          <a:lstStyle/>
+          <a:p>
+            <a:pPr algn="l">
+              <a:spcAft>
+                <a:spcPts val="0"/>
+              </a:spcAft>
+              <a:defRPr sz="1800" b="1">
+                <a:solidFill>
+                  <a:srgbClr val="BE3B3B"/>
+                </a:solidFill>
+                <a:latin typeface="Noto Sans CJK KR"/>
+              </a:defRPr>
+            </a:pPr>
+            <a:r>
+              <a:t>증상 1: 일부 노드만 실행</a:t>
+            </a:r>
+          </a:p>
+        </p:txBody>
+      </p:sp>
+      <p:sp>
+        <p:nvSpPr>
+          <p:cNvPr id="9" name="TextBox 8"/>
+          <p:cNvSpPr txBox="1"/>
+          <p:nvPr/>
+        </p:nvSpPr>
+        <p:spPr>
+          <a:xfrm>
+            <a:off x="3794760" y="1883664"/>
+            <a:ext cx="7543800" cy="621792"/>
+          </a:xfrm>
+          <a:prstGeom prst="rect">
+            <a:avLst/>
+          </a:prstGeom>
+          <a:noFill/>
+        </p:spPr>
+        <p:txBody>
+          <a:bodyPr wrap="square" lIns="73152" rIns="73152" tIns="36576" bIns="36576">
+            <a:spAutoFit/>
+          </a:bodyPr>
+          <a:lstStyle/>
+          <a:p>
+            <a:pPr algn="l">
+              <a:spcAft>
+                <a:spcPts val="0"/>
+              </a:spcAft>
+              <a:defRPr sz="1600" b="0">
+                <a:solidFill>
+                  <a:srgbClr val="122C4E"/>
+                </a:solidFill>
+                <a:latin typeface="Noto Sans CJK KR"/>
+              </a:defRPr>
+            </a:pPr>
+            <a:r>
+              <a:t>우선 확인: launch 순서·namespace·config 경로를 확인한다.</a:t>
             </a:r>
             <a:br/>
             <a:r>
-              <a:t>diff -ru my_agv_ws/src blocks/F_integration/M22_final_project/complete/agv_ws/src || true</a:t>
+              <a:t>수정 후: ros2 launch agv_bringup agv_sim.launch.py --show-args</a:t>
+            </a:r>
+          </a:p>
+        </p:txBody>
+      </p:sp>
+      <p:sp>
+        <p:nvSpPr>
+          <p:cNvPr id="10" name="Rounded Rectangle 9"/>
+          <p:cNvSpPr/>
+          <p:nvPr/>
+        </p:nvSpPr>
+        <p:spPr>
+          <a:xfrm>
+            <a:off x="694944" y="3172968"/>
+            <a:ext cx="10972800" cy="1115568"/>
+          </a:xfrm>
+          <a:prstGeom prst="roundRect">
+            <a:avLst/>
+          </a:prstGeom>
+          <a:solidFill>
+            <a:srgbClr val="FFF7F4"/>
+          </a:solidFill>
+          <a:ln>
+            <a:solidFill>
+              <a:srgbClr val="EDBEB4"/>
+            </a:solidFill>
+          </a:ln>
+        </p:spPr>
+        <p:style>
+          <a:lnRef idx="1">
+            <a:schemeClr val="accent1"/>
+          </a:lnRef>
+          <a:fillRef idx="3">
+            <a:schemeClr val="accent1"/>
+          </a:fillRef>
+          <a:effectRef idx="2">
+            <a:schemeClr val="accent1"/>
+          </a:effectRef>
+          <a:fontRef idx="minor">
+            <a:schemeClr val="lt1"/>
+          </a:fontRef>
+        </p:style>
+        <p:txBody>
+          <a:bodyPr rtlCol="0" anchor="ctr"/>
+          <a:lstStyle/>
+          <a:p>
+            <a:pPr algn="ctr"/>
+          </a:p>
+        </p:txBody>
+      </p:sp>
+      <p:sp>
+        <p:nvSpPr>
+          <p:cNvPr id="11" name="TextBox 10"/>
+          <p:cNvSpPr txBox="1"/>
+          <p:nvPr/>
+        </p:nvSpPr>
+        <p:spPr>
+          <a:xfrm>
+            <a:off x="896112" y="3319272"/>
+            <a:ext cx="2926080" cy="274320"/>
+          </a:xfrm>
+          <a:prstGeom prst="rect">
+            <a:avLst/>
+          </a:prstGeom>
+          <a:noFill/>
+        </p:spPr>
+        <p:txBody>
+          <a:bodyPr wrap="square" lIns="73152" rIns="73152" tIns="36576" bIns="36576">
+            <a:spAutoFit/>
+          </a:bodyPr>
+          <a:lstStyle/>
+          <a:p>
+            <a:pPr algn="l">
+              <a:spcAft>
+                <a:spcPts val="0"/>
+              </a:spcAft>
+              <a:defRPr sz="1800" b="1">
+                <a:solidFill>
+                  <a:srgbClr val="BE3B3B"/>
+                </a:solidFill>
+                <a:latin typeface="Noto Sans CJK KR"/>
+              </a:defRPr>
+            </a:pPr>
+            <a:r>
+              <a:t>증상 2: 센서/TF 위치 불일치</a:t>
+            </a:r>
+          </a:p>
+        </p:txBody>
+      </p:sp>
+      <p:sp>
+        <p:nvSpPr>
+          <p:cNvPr id="12" name="TextBox 11"/>
+          <p:cNvSpPr txBox="1"/>
+          <p:nvPr/>
+        </p:nvSpPr>
+        <p:spPr>
+          <a:xfrm>
+            <a:off x="3794760" y="3300984"/>
+            <a:ext cx="7543800" cy="621792"/>
+          </a:xfrm>
+          <a:prstGeom prst="rect">
+            <a:avLst/>
+          </a:prstGeom>
+          <a:noFill/>
+        </p:spPr>
+        <p:txBody>
+          <a:bodyPr wrap="square" lIns="73152" rIns="73152" tIns="36576" bIns="36576">
+            <a:spAutoFit/>
+          </a:bodyPr>
+          <a:lstStyle/>
+          <a:p>
+            <a:pPr algn="l">
+              <a:spcAft>
+                <a:spcPts val="0"/>
+              </a:spcAft>
+              <a:defRPr sz="1600" b="0">
+                <a:solidFill>
+                  <a:srgbClr val="122C4E"/>
+                </a:solidFill>
+                <a:latin typeface="Noto Sans CJK KR"/>
+              </a:defRPr>
+            </a:pPr>
+            <a:r>
+              <a:t>우선 확인: header.frame_id와 TF tree를 확인한다.</a:t>
             </a:r>
             <a:br/>
             <a:r>
-              <a:t>cp -a my_agv_ws/src my_agv_ws/src_before_M22</a:t>
+              <a:t>수정 후: ros2 launch agv_bringup agv_sim.launch.py --show-args</a:t>
+            </a:r>
+          </a:p>
+        </p:txBody>
+      </p:sp>
+      <p:sp>
+        <p:nvSpPr>
+          <p:cNvPr id="13" name="Rounded Rectangle 12"/>
+          <p:cNvSpPr/>
+          <p:nvPr/>
+        </p:nvSpPr>
+        <p:spPr>
+          <a:xfrm>
+            <a:off x="694944" y="4590288"/>
+            <a:ext cx="10972800" cy="1115568"/>
+          </a:xfrm>
+          <a:prstGeom prst="roundRect">
+            <a:avLst/>
+          </a:prstGeom>
+          <a:solidFill>
+            <a:srgbClr val="FFF7F4"/>
+          </a:solidFill>
+          <a:ln>
+            <a:solidFill>
+              <a:srgbClr val="EDBEB4"/>
+            </a:solidFill>
+          </a:ln>
+        </p:spPr>
+        <p:style>
+          <a:lnRef idx="1">
+            <a:schemeClr val="accent1"/>
+          </a:lnRef>
+          <a:fillRef idx="3">
+            <a:schemeClr val="accent1"/>
+          </a:fillRef>
+          <a:effectRef idx="2">
+            <a:schemeClr val="accent1"/>
+          </a:effectRef>
+          <a:fontRef idx="minor">
+            <a:schemeClr val="lt1"/>
+          </a:fontRef>
+        </p:style>
+        <p:txBody>
+          <a:bodyPr rtlCol="0" anchor="ctr"/>
+          <a:lstStyle/>
+          <a:p>
+            <a:pPr algn="ctr"/>
+          </a:p>
+        </p:txBody>
+      </p:sp>
+      <p:sp>
+        <p:nvSpPr>
+          <p:cNvPr id="14" name="TextBox 13"/>
+          <p:cNvSpPr txBox="1"/>
+          <p:nvPr/>
+        </p:nvSpPr>
+        <p:spPr>
+          <a:xfrm>
+            <a:off x="896112" y="4736592"/>
+            <a:ext cx="2926080" cy="274320"/>
+          </a:xfrm>
+          <a:prstGeom prst="rect">
+            <a:avLst/>
+          </a:prstGeom>
+          <a:noFill/>
+        </p:spPr>
+        <p:txBody>
+          <a:bodyPr wrap="square" lIns="73152" rIns="73152" tIns="36576" bIns="36576">
+            <a:spAutoFit/>
+          </a:bodyPr>
+          <a:lstStyle/>
+          <a:p>
+            <a:pPr algn="l">
+              <a:spcAft>
+                <a:spcPts val="0"/>
+              </a:spcAft>
+              <a:defRPr sz="1800" b="1">
+                <a:solidFill>
+                  <a:srgbClr val="BE3B3B"/>
+                </a:solidFill>
+                <a:latin typeface="Noto Sans CJK KR"/>
+              </a:defRPr>
+            </a:pPr>
+            <a:r>
+              <a:t>증상 3: 로봇이 불안정</a:t>
+            </a:r>
+          </a:p>
+        </p:txBody>
+      </p:sp>
+      <p:sp>
+        <p:nvSpPr>
+          <p:cNvPr id="15" name="TextBox 14"/>
+          <p:cNvSpPr txBox="1"/>
+          <p:nvPr/>
+        </p:nvSpPr>
+        <p:spPr>
+          <a:xfrm>
+            <a:off x="3794760" y="4718303"/>
+            <a:ext cx="7543800" cy="621792"/>
+          </a:xfrm>
+          <a:prstGeom prst="rect">
+            <a:avLst/>
+          </a:prstGeom>
+          <a:noFill/>
+        </p:spPr>
+        <p:txBody>
+          <a:bodyPr wrap="square" lIns="73152" rIns="73152" tIns="36576" bIns="36576">
+            <a:spAutoFit/>
+          </a:bodyPr>
+          <a:lstStyle/>
+          <a:p>
+            <a:pPr algn="l">
+              <a:spcAft>
+                <a:spcPts val="0"/>
+              </a:spcAft>
+              <a:defRPr sz="1600" b="0">
+                <a:solidFill>
+                  <a:srgbClr val="122C4E"/>
+                </a:solidFill>
+                <a:latin typeface="Noto Sans CJK KR"/>
+              </a:defRPr>
+            </a:pPr>
+            <a:r>
+              <a:t>우선 확인: physics collision·friction·inertia를 M07 순서로 점검한다.</a:t>
             </a:r>
             <a:br/>
             <a:r>
-              <a:t>cp -a blocks/F_integration/M22_final_project/complete/agv_ws/src/. my_agv_ws/src/</a:t>
+              <a:t>수정 후: ros2 launch agv_bringup agv_sim.launch.py --show-args</a:t>
+            </a:r>
+          </a:p>
+        </p:txBody>
+      </p:sp>
+      <p:sp>
+        <p:nvSpPr>
+          <p:cNvPr id="16" name="TextBox 15"/>
+          <p:cNvSpPr txBox="1"/>
+          <p:nvPr/>
+        </p:nvSpPr>
+        <p:spPr>
+          <a:xfrm>
+            <a:off x="822960" y="5779008"/>
+            <a:ext cx="10607040" cy="493776"/>
+          </a:xfrm>
+          <a:prstGeom prst="rect">
+            <a:avLst/>
+          </a:prstGeom>
+          <a:noFill/>
+        </p:spPr>
+        <p:txBody>
+          <a:bodyPr wrap="square" lIns="73152" rIns="73152" tIns="36576" bIns="36576">
+            <a:spAutoFit/>
+          </a:bodyPr>
+          <a:lstStyle/>
+          <a:p>
+            <a:pPr algn="ctr">
+              <a:spcAft>
+                <a:spcPts val="0"/>
+              </a:spcAft>
+              <a:defRPr sz="1500" b="1">
+                <a:solidFill>
+                  <a:srgbClr val="DB7E22"/>
+                </a:solidFill>
+                <a:latin typeface="Noto Sans CJK KR"/>
+              </a:defRPr>
+            </a:pPr>
+            <a:r>
+              <a:t>공통 순서: ① 현재 폴더 ② source ③ 파일 경로</a:t>
             </a:r>
             <a:br/>
             <a:r>
-              <a:t>cd my_agv_ws &amp;&amp; colcon build --symlink-install &amp;&amp; source install/setup.bash</a:t>
-            </a:r>
-          </a:p>
-        </p:txBody>
-      </p:sp>
-      <p:sp>
-        <p:nvSpPr>
-          <p:cNvPr id="9" name="TextBox 8"/>
-          <p:cNvSpPr txBox="1"/>
-          <p:nvPr/>
-        </p:nvSpPr>
-        <p:spPr>
-          <a:xfrm>
-            <a:off x="786384" y="5413248"/>
-            <a:ext cx="10424160" cy="429768"/>
-          </a:xfrm>
-          <a:prstGeom prst="rect">
-            <a:avLst/>
-          </a:prstGeom>
-          <a:noFill/>
-        </p:spPr>
-        <p:txBody>
-          <a:bodyPr wrap="square" lIns="73152" rIns="73152" tIns="36576" bIns="36576">
-            <a:spAutoFit/>
-          </a:bodyPr>
-          <a:lstStyle/>
-          <a:p>
-            <a:pPr algn="ctr">
-              <a:spcAft>
-                <a:spcPts val="0"/>
-              </a:spcAft>
-              <a:defRPr sz="1700" b="1">
-                <a:solidFill>
-                  <a:srgbClr val="2A8B5A"/>
-                </a:solidFill>
-                <a:latin typeface="Noto Sans CJK KR"/>
-              </a:defRPr>
-            </a:pPr>
-            <a:r>
-              <a:t>복구 뒤에는 끝내지 말고, 내 파일과 Complete의 차이를 한 줄씩 설명한 뒤 다시 직접 입력해 봅니다.</a:t>
+              <a:t>④ 이름/타입/단위 ⑤ build·source 후 재실행</a:t>
             </a:r>
           </a:p>
         </p:txBody>
@@ -47781,7 +51341,7 @@
               </a:defRPr>
             </a:pPr>
             <a:r>
-              <a:t>미니 실습: 값 하나를 바꾸고 결과를 비교한다</a:t>
+              <a:t>막혔을 때만: Complete를 복구용으로 사용한다</a:t>
             </a:r>
           </a:p>
         </p:txBody>
@@ -47820,7 +51380,7 @@
               </a:defRPr>
             </a:pPr>
             <a:r>
-              <a:t>정상 결과를 만든 뒤에는 한 번에 하나의 값만 바꿉니다.</a:t>
+              <a:t>이 슬라이드가 먼저가 아닙니다. 직접 입력·실행을 시도한 뒤에만 내 파일과 Complete를 비교합니다.</a:t>
             </a:r>
           </a:p>
         </p:txBody>
@@ -47956,31 +51516,70 @@
               </a:defRPr>
             </a:pPr>
             <a:r>
-              <a:t>현재 단계 미니 실습    |    현재 폴더 ~/ros2_curri/my_agv_ws    |    현재 터미널</a:t>
-            </a:r>
-          </a:p>
-        </p:txBody>
-      </p:sp>
-      <p:sp>
-        <p:nvSpPr>
-          <p:cNvPr id="7" name="Rounded Rectangle 6"/>
+              <a:t>현재 단계 복구용 Complete    |    현재 폴더 ~/ros2_curri    |    현재 터미널</a:t>
+            </a:r>
+          </a:p>
+        </p:txBody>
+      </p:sp>
+      <p:sp>
+        <p:nvSpPr>
+          <p:cNvPr id="7" name="TextBox 6"/>
+          <p:cNvSpPr txBox="1"/>
+          <p:nvPr/>
+        </p:nvSpPr>
+        <p:spPr>
+          <a:xfrm>
+            <a:off x="713232" y="1664208"/>
+            <a:ext cx="10698480" cy="402336"/>
+          </a:xfrm>
+          <a:prstGeom prst="rect">
+            <a:avLst/>
+          </a:prstGeom>
+          <a:noFill/>
+        </p:spPr>
+        <p:txBody>
+          <a:bodyPr wrap="square" lIns="73152" rIns="73152" tIns="36576" bIns="36576">
+            <a:spAutoFit/>
+          </a:bodyPr>
+          <a:lstStyle/>
+          <a:p>
+            <a:pPr algn="ctr">
+              <a:spcAft>
+                <a:spcPts val="0"/>
+              </a:spcAft>
+              <a:defRPr sz="1800" b="1">
+                <a:solidFill>
+                  <a:srgbClr val="DB7E22"/>
+                </a:solidFill>
+                <a:latin typeface="Noto Sans CJK KR"/>
+              </a:defRPr>
+            </a:pPr>
+            <a:r>
+              <a:t>권장 순서: ① 내 오류를 확인  ② Complete와 diff  ③ 꼭 필요할 때만 backup 후 복사</a:t>
+            </a:r>
+          </a:p>
+        </p:txBody>
+      </p:sp>
+      <p:sp>
+        <p:nvSpPr>
+          <p:cNvPr id="8" name="Rounded Rectangle 7"/>
           <p:cNvSpPr/>
           <p:nvPr/>
         </p:nvSpPr>
         <p:spPr>
           <a:xfrm>
-            <a:off x="749808" y="1874519"/>
-            <a:ext cx="10652760" cy="1993392"/>
+            <a:off x="676656" y="2423160"/>
+            <a:ext cx="10881360" cy="2606040"/>
           </a:xfrm>
           <a:prstGeom prst="roundRect">
             <a:avLst/>
           </a:prstGeom>
           <a:solidFill>
-            <a:srgbClr val="FFF8EB"/>
+            <a:srgbClr val="1D232D"/>
           </a:solidFill>
           <a:ln>
             <a:solidFill>
-              <a:srgbClr val="ECC680"/>
+              <a:srgbClr val="1D232D"/>
             </a:solidFill>
           </a:ln>
         </p:spPr>
@@ -47999,61 +51598,125 @@
           </a:fontRef>
         </p:style>
         <p:txBody>
-          <a:bodyPr rtlCol="0" anchor="ctr" wrap="square" lIns="73152" rIns="73152" tIns="36576" bIns="36576"/>
+          <a:bodyPr rtlCol="0" anchor="ctr" wrap="square" lIns="109728" rIns="109728" tIns="73152" bIns="73152"/>
+          <a:lstStyle/>
+          <a:p>
+            <a:pPr algn="l">
+              <a:spcAft>
+                <a:spcPts val="0"/>
+              </a:spcAft>
+              <a:defRPr sz="1400" b="0">
+                <a:solidFill>
+                  <a:srgbClr val="FFFFFF"/>
+                </a:solidFill>
+                <a:latin typeface="DejaVu Sans Mono"/>
+              </a:defRPr>
+            </a:pPr>
+            <a:r>
+              <a:t>cd ~/ros2_curri</a:t>
+            </a:r>
+          </a:p>
+          <a:p>
+            <a:pPr algn="l">
+              <a:spcAft>
+                <a:spcPts val="0"/>
+              </a:spcAft>
+              <a:defRPr sz="1400" b="0">
+                <a:solidFill>
+                  <a:srgbClr val="FFFFFF"/>
+                </a:solidFill>
+                <a:latin typeface="DejaVu Sans Mono"/>
+              </a:defRPr>
+            </a:pPr>
+            <a:r>
+              <a:t>diff -ru my_agv_ws/src blocks/F_integration/M22_final_project/complete/agv_ws/src || true</a:t>
+            </a:r>
+          </a:p>
+          <a:p>
+            <a:pPr algn="l">
+              <a:spcAft>
+                <a:spcPts val="0"/>
+              </a:spcAft>
+              <a:defRPr sz="1400" b="0">
+                <a:solidFill>
+                  <a:srgbClr val="FFFFFF"/>
+                </a:solidFill>
+                <a:latin typeface="DejaVu Sans Mono"/>
+              </a:defRPr>
+            </a:pPr>
+            <a:r>
+              <a:t>cp -a my_agv_ws/src my_agv_ws/src_before_M22</a:t>
+            </a:r>
+          </a:p>
+          <a:p>
+            <a:pPr algn="l">
+              <a:spcAft>
+                <a:spcPts val="0"/>
+              </a:spcAft>
+              <a:defRPr sz="1400" b="0">
+                <a:solidFill>
+                  <a:srgbClr val="FFFFFF"/>
+                </a:solidFill>
+                <a:latin typeface="DejaVu Sans Mono"/>
+              </a:defRPr>
+            </a:pPr>
+            <a:r>
+              <a:t>cp -a blocks/F_integration/M22_final_project/complete/agv_ws/src/. my_agv_ws/src/</a:t>
+            </a:r>
+          </a:p>
+          <a:p>
+            <a:pPr algn="l">
+              <a:spcAft>
+                <a:spcPts val="0"/>
+              </a:spcAft>
+              <a:defRPr sz="1400" b="0">
+                <a:solidFill>
+                  <a:srgbClr val="FFFFFF"/>
+                </a:solidFill>
+                <a:latin typeface="DejaVu Sans Mono"/>
+              </a:defRPr>
+            </a:pPr>
+            <a:r>
+              <a:t>cd my_agv_ws &amp;&amp; colcon build --symlink-install &amp;&amp; source install/setup.bash</a:t>
+            </a:r>
+          </a:p>
+        </p:txBody>
+      </p:sp>
+      <p:sp>
+        <p:nvSpPr>
+          <p:cNvPr id="9" name="TextBox 8"/>
+          <p:cNvSpPr txBox="1"/>
+          <p:nvPr/>
+        </p:nvSpPr>
+        <p:spPr>
+          <a:xfrm>
+            <a:off x="786384" y="5413248"/>
+            <a:ext cx="10424160" cy="429768"/>
+          </a:xfrm>
+          <a:prstGeom prst="rect">
+            <a:avLst/>
+          </a:prstGeom>
+          <a:noFill/>
+        </p:spPr>
+        <p:txBody>
+          <a:bodyPr wrap="square" lIns="73152" rIns="73152" tIns="36576" bIns="36576">
+            <a:spAutoFit/>
+          </a:bodyPr>
           <a:lstStyle/>
           <a:p>
             <a:pPr algn="ctr">
               <a:spcAft>
                 <a:spcPts val="0"/>
               </a:spcAft>
-              <a:defRPr sz="2300" b="1">
-                <a:solidFill>
-                  <a:srgbClr val="122C4E"/>
-                </a:solidFill>
-                <a:latin typeface="Noto Sans CJK KR"/>
-              </a:defRPr>
-            </a:pPr>
-            <a:r>
-              <a:t>완료 증거를 ①Gazebo ②RViz ③ros2 topic ④mission log ⑤rosbag으로 나누어 실제 제출 파일 목록을 작성한다.</a:t>
-            </a:r>
-          </a:p>
-        </p:txBody>
-      </p:sp>
-      <p:sp>
-        <p:nvSpPr>
-          <p:cNvPr id="8" name="TextBox 7"/>
-          <p:cNvSpPr txBox="1"/>
-          <p:nvPr/>
-        </p:nvSpPr>
-        <p:spPr>
-          <a:xfrm>
-            <a:off x="877824" y="4590288"/>
-            <a:ext cx="10241280" cy="594360"/>
-          </a:xfrm>
-          <a:prstGeom prst="rect">
-            <a:avLst/>
-          </a:prstGeom>
-          <a:noFill/>
-        </p:spPr>
-        <p:txBody>
-          <a:bodyPr wrap="square" lIns="73152" rIns="73152" tIns="36576" bIns="36576">
-            <a:spAutoFit/>
-          </a:bodyPr>
-          <a:lstStyle/>
-          <a:p>
-            <a:pPr algn="ctr">
-              <a:spcAft>
-                <a:spcPts val="0"/>
-              </a:spcAft>
-              <a:defRPr sz="1900" b="1">
-                <a:solidFill>
-                  <a:srgbClr val="DB7E22"/>
-                </a:solidFill>
-                <a:latin typeface="Noto Sans CJK KR"/>
-              </a:defRPr>
-            </a:pPr>
-            <a:r>
-              <a:t>기록할 것: 바꾼 값(단위) · 기대한 변화 · 실제 출력/화면 · 원래 값으로 되돌린 결과</a:t>
+              <a:defRPr sz="1700" b="1">
+                <a:solidFill>
+                  <a:srgbClr val="2A8B5A"/>
+                </a:solidFill>
+                <a:latin typeface="Noto Sans CJK KR"/>
+              </a:defRPr>
+            </a:pPr>
+            <a:r>
+              <a:t>복구 뒤에는 끝내지 말고, 내 파일과 Complete의 차이를 한 줄씩 설명한 뒤 다시 직접 입력해 봅니다.</a:t>
             </a:r>
           </a:p>
         </p:txBody>
@@ -48110,7 +51773,7 @@
               </a:defRPr>
             </a:pPr>
             <a:r>
-              <a:t>최종 미션 시나리오</a:t>
+              <a:t>미니 실습: 값 하나를 바꾸고 결과를 비교한다</a:t>
             </a:r>
           </a:p>
         </p:txBody>
@@ -48149,7 +51812,7 @@
               </a:defRPr>
             </a:pPr>
             <a:r>
-              <a:t>통합 단계에서 놓치기 쉬운 실행·운영 조건을 정리합니다.</a:t>
+              <a:t>정상 결과를 만든 뒤에는 한 번에 하나의 값만 바꿉니다.</a:t>
             </a:r>
           </a:p>
         </p:txBody>
@@ -48285,7 +51948,7 @@
               </a:defRPr>
             </a:pPr>
             <a:r>
-              <a:t>현재 단계 통합 보강    |    현재 폴더 ~/ros2_curri/my_agv_ws    |    현재 터미널</a:t>
+              <a:t>현재 단계 미니 실습    |    현재 폴더 ~/ros2_curri/my_agv_ws    |    현재 터미널</a:t>
             </a:r>
           </a:p>
         </p:txBody>
@@ -48298,18 +51961,18 @@
         </p:nvSpPr>
         <p:spPr>
           <a:xfrm>
-            <a:off x="676656" y="1691640"/>
-            <a:ext cx="10972800" cy="4434840"/>
+            <a:off x="749808" y="1874519"/>
+            <a:ext cx="10652760" cy="1993392"/>
           </a:xfrm>
           <a:prstGeom prst="roundRect">
             <a:avLst/>
           </a:prstGeom>
           <a:solidFill>
-            <a:srgbClr val="F4F7FB"/>
+            <a:srgbClr val="FFF8EB"/>
           </a:solidFill>
           <a:ln>
             <a:solidFill>
-              <a:srgbClr val="D2DEEC"/>
+              <a:srgbClr val="ECC680"/>
             </a:solidFill>
           </a:ln>
         </p:spPr>
@@ -48328,10 +51991,23 @@
           </a:fontRef>
         </p:style>
         <p:txBody>
-          <a:bodyPr rtlCol="0" anchor="ctr"/>
-          <a:lstStyle/>
-          <a:p>
-            <a:pPr algn="ctr"/>
+          <a:bodyPr rtlCol="0" anchor="ctr" wrap="square" lIns="73152" rIns="73152" tIns="36576" bIns="36576"/>
+          <a:lstStyle/>
+          <a:p>
+            <a:pPr algn="ctr">
+              <a:spcAft>
+                <a:spcPts val="0"/>
+              </a:spcAft>
+              <a:defRPr sz="2300" b="1">
+                <a:solidFill>
+                  <a:srgbClr val="122C4E"/>
+                </a:solidFill>
+                <a:latin typeface="Noto Sans CJK KR"/>
+              </a:defRPr>
+            </a:pPr>
+            <a:r>
+              <a:t>완료 증거를 ①Gazebo ②RViz ③ros2 topic ④mission log ⑤rosbag으로 나누어 실제 제출 파일 목록을 작성한다.</a:t>
+            </a:r>
           </a:p>
         </p:txBody>
       </p:sp>
@@ -48343,97 +52019,33 @@
         </p:nvSpPr>
         <p:spPr>
           <a:xfrm>
-            <a:off x="914400" y="1993392"/>
-            <a:ext cx="10332720" cy="3749039"/>
-          </a:xfrm>
-          <a:prstGeom prst="rect">
-            <a:avLst/>
-          </a:prstGeom>
-          <a:noFill/>
-        </p:spPr>
-        <p:txBody>
-          <a:bodyPr wrap="square" lIns="109728" rIns="109728">
-            <a:spAutoFit/>
-          </a:bodyPr>
-          <a:lstStyle/>
-          <a:p>
-            <a:pPr>
-              <a:spcAft>
-                <a:spcPts val="800"/>
-              </a:spcAft>
-              <a:defRPr sz="1900">
-                <a:solidFill>
-                  <a:srgbClr val="122C4E"/>
-                </a:solidFill>
-                <a:latin typeface="Noto Sans CJK KR"/>
-              </a:defRPr>
-            </a:pPr>
-            <a:r>
-              <a:t>• 1. START: launch와 sensor topic을 확인한다.</a:t>
-            </a:r>
-          </a:p>
-          <a:p>
-            <a:pPr>
-              <a:spcAft>
-                <a:spcPts val="800"/>
-              </a:spcAft>
-              <a:defRPr sz="1900">
-                <a:solidFill>
-                  <a:srgbClr val="122C4E"/>
-                </a:solidFill>
-                <a:latin typeface="Noto Sans CJK KR"/>
-              </a:defRPr>
-            </a:pPr>
-            <a:r>
-              <a:t>• 2. SEARCH: target이 없을 때 회전 탐색 command를 관찰한다.</a:t>
-            </a:r>
-          </a:p>
-          <a:p>
-            <a:pPr>
-              <a:spcAft>
-                <a:spcPts val="800"/>
-              </a:spcAft>
-              <a:defRPr sz="1900">
-                <a:solidFill>
-                  <a:srgbClr val="122C4E"/>
-                </a:solidFill>
-                <a:latin typeface="Noto Sans CJK KR"/>
-              </a:defRPr>
-            </a:pPr>
-            <a:r>
-              <a:t>• 3. APPROACH: detection 중심 오차가 angular command로 바뀌는지 확인한다.</a:t>
-            </a:r>
-          </a:p>
-          <a:p>
-            <a:pPr>
-              <a:spcAft>
-                <a:spcPts val="800"/>
-              </a:spcAft>
-              <a:defRPr sz="1900">
-                <a:solidFill>
-                  <a:srgbClr val="122C4E"/>
-                </a:solidFill>
-                <a:latin typeface="Noto Sans CJK KR"/>
-              </a:defRPr>
-            </a:pPr>
-            <a:r>
-              <a:t>• 4. AVOID/STOP: LiDAR threshold 안에서는 safety가 우선하는지 확인한다.</a:t>
-            </a:r>
-          </a:p>
-          <a:p>
-            <a:pPr>
-              <a:spcAft>
-                <a:spcPts val="800"/>
-              </a:spcAft>
-              <a:defRPr sz="1900">
-                <a:solidFill>
-                  <a:srgbClr val="122C4E"/>
-                </a:solidFill>
-                <a:latin typeface="Noto Sans CJK KR"/>
-              </a:defRPr>
-            </a:pPr>
-            <a:r>
-              <a:t>• 5. GOAL/STOP: 목표 도달 뒤 forward /cmd_vel이 0인지 확인한다.</a:t>
+            <a:off x="877824" y="4590288"/>
+            <a:ext cx="10241280" cy="594360"/>
+          </a:xfrm>
+          <a:prstGeom prst="rect">
+            <a:avLst/>
+          </a:prstGeom>
+          <a:noFill/>
+        </p:spPr>
+        <p:txBody>
+          <a:bodyPr wrap="square" lIns="73152" rIns="73152" tIns="36576" bIns="36576">
+            <a:spAutoFit/>
+          </a:bodyPr>
+          <a:lstStyle/>
+          <a:p>
+            <a:pPr algn="ctr">
+              <a:spcAft>
+                <a:spcPts val="0"/>
+              </a:spcAft>
+              <a:defRPr sz="1900" b="1">
+                <a:solidFill>
+                  <a:srgbClr val="DB7E22"/>
+                </a:solidFill>
+                <a:latin typeface="Noto Sans CJK KR"/>
+              </a:defRPr>
+            </a:pPr>
+            <a:r>
+              <a:t>기록할 것: 바꾼 값(단위) · 기대한 변화 · 실제 출력/화면 · 원래 값으로 되돌린 결과</a:t>
             </a:r>
           </a:p>
         </p:txBody>
@@ -48490,7 +52102,7 @@
               </a:defRPr>
             </a:pPr>
             <a:r>
-              <a:t>최종 기능 체크표</a:t>
+              <a:t>최종 미션 시나리오</a:t>
             </a:r>
           </a:p>
         </p:txBody>
@@ -48749,7 +52361,7 @@
               </a:defRPr>
             </a:pPr>
             <a:r>
-              <a:t>• Model/Physics: body·wheel·collision·inertia</a:t>
+              <a:t>• 1. START: launch와 sensor topic을 확인한다.</a:t>
             </a:r>
           </a:p>
           <a:p>
@@ -48765,7 +52377,7 @@
               </a:defRPr>
             </a:pPr>
             <a:r>
-              <a:t>• Drive/TF/Odom: /cmd_vel, /odom, frame tree</a:t>
+              <a:t>• 2. SEARCH: target이 없을 때 회전 탐색 command를 관찰한다.</a:t>
             </a:r>
           </a:p>
           <a:p>
@@ -48781,7 +52393,7 @@
               </a:defRPr>
             </a:pPr>
             <a:r>
-              <a:t>• Sensors: /camera/image_raw, /scan, /imu/data</a:t>
+              <a:t>• 3. APPROACH: detection 중심 오차가 angular command로 바뀌는지 확인한다.</a:t>
             </a:r>
           </a:p>
           <a:p>
@@ -48797,7 +52409,7 @@
               </a:defRPr>
             </a:pPr>
             <a:r>
-              <a:t>• Autonomy: detection, safety priority, mission state</a:t>
+              <a:t>• 4. AVOID/STOP: LiDAR threshold 안에서는 safety가 우선하는지 확인한다.</a:t>
             </a:r>
           </a:p>
           <a:p>
@@ -48813,7 +52425,7 @@
               </a:defRPr>
             </a:pPr>
             <a:r>
-              <a:t>• Operations/Data: launch, YAML, rosbag2, README/checkpoint</a:t>
+              <a:t>• 5. GOAL/STOP: 목표 도달 뒤 forward /cmd_vel이 0인지 확인한다.</a:t>
             </a:r>
           </a:p>
         </p:txBody>
@@ -48870,7 +52482,7 @@
               </a:defRPr>
             </a:pPr>
             <a:r>
-              <a:t>Milestone 1~8 제출 증거</a:t>
+              <a:t>최종 기능 체크표</a:t>
             </a:r>
           </a:p>
         </p:txBody>
@@ -49129,7 +52741,7 @@
               </a:defRPr>
             </a:pPr>
             <a:r>
-              <a:t>• 1 모델 TF, 2 World spawn, 3 Differential Drive, 4 bridge/RViz</a:t>
+              <a:t>• Model/Physics: body·wheel·collision·inertia</a:t>
             </a:r>
           </a:p>
           <a:p>
@@ -49145,7 +52757,7 @@
               </a:defRPr>
             </a:pPr>
             <a:r>
-              <a:t>• 5 Camera/LiDAR/IMU, 6 safety/perception, 7 FSM/PID, 8 launch/rosbag</a:t>
+              <a:t>• Drive/TF/Odom: /cmd_vel, /odom, frame tree</a:t>
             </a:r>
           </a:p>
           <a:p>
@@ -49161,7 +52773,39 @@
               </a:defRPr>
             </a:pPr>
             <a:r>
-              <a:t>• 각 milestone마다 command 결과와 정상 화면을 함께 저장한다.</a:t>
+              <a:t>• Sensors: /camera/image_raw, /scan, /imu/data</a:t>
+            </a:r>
+          </a:p>
+          <a:p>
+            <a:pPr>
+              <a:spcAft>
+                <a:spcPts val="800"/>
+              </a:spcAft>
+              <a:defRPr sz="1900">
+                <a:solidFill>
+                  <a:srgbClr val="122C4E"/>
+                </a:solidFill>
+                <a:latin typeface="Noto Sans CJK KR"/>
+              </a:defRPr>
+            </a:pPr>
+            <a:r>
+              <a:t>• Autonomy: detection, safety priority, mission state</a:t>
+            </a:r>
+          </a:p>
+          <a:p>
+            <a:pPr>
+              <a:spcAft>
+                <a:spcPts val="800"/>
+              </a:spcAft>
+              <a:defRPr sz="1900">
+                <a:solidFill>
+                  <a:srgbClr val="122C4E"/>
+                </a:solidFill>
+                <a:latin typeface="Noto Sans CJK KR"/>
+              </a:defRPr>
+            </a:pPr>
+            <a:r>
+              <a:t>• Operations/Data: launch, YAML, rosbag2, README/checkpoint</a:t>
             </a:r>
           </a:p>
         </p:txBody>
@@ -49218,7 +52862,7 @@
               </a:defRPr>
             </a:pPr>
             <a:r>
-              <a:t>실패를 재현 가능하게 기록한다</a:t>
+              <a:t>Milestone 1~8 제출 증거</a:t>
             </a:r>
           </a:p>
         </p:txBody>
@@ -49477,7 +53121,7 @@
               </a:defRPr>
             </a:pPr>
             <a:r>
-              <a:t>• topic: 이름·타입·publisher/subscriber 수</a:t>
+              <a:t>• 1 모델 TF, 2 World spawn, 3 Differential Drive, 4 bridge/RViz</a:t>
             </a:r>
           </a:p>
           <a:p>
@@ -49493,7 +53137,7 @@
               </a:defRPr>
             </a:pPr>
             <a:r>
-              <a:t>• TF: frame_id·parent/child·Fixed Frame</a:t>
+              <a:t>• 5 Camera/LiDAR/IMU, 6 safety/perception, 7 FSM/PID, 8 launch/rosbag</a:t>
             </a:r>
           </a:p>
           <a:p>
@@ -49509,39 +53153,7 @@
               </a:defRPr>
             </a:pPr>
             <a:r>
-              <a:t>• bridge: 방향·Gazebo/ROS type</a:t>
-            </a:r>
-          </a:p>
-          <a:p>
-            <a:pPr>
-              <a:spcAft>
-                <a:spcPts val="800"/>
-              </a:spcAft>
-              <a:defRPr sz="1900">
-                <a:solidFill>
-                  <a:srgbClr val="122C4E"/>
-                </a:solidFill>
-                <a:latin typeface="Noto Sans CJK KR"/>
-              </a:defRPr>
-            </a:pPr>
-            <a:r>
-              <a:t>• physics: collision·friction·inertia</a:t>
-            </a:r>
-          </a:p>
-          <a:p>
-            <a:pPr>
-              <a:spcAft>
-                <a:spcPts val="800"/>
-              </a:spcAft>
-              <a:defRPr sz="1900">
-                <a:solidFill>
-                  <a:srgbClr val="122C4E"/>
-                </a:solidFill>
-                <a:latin typeface="Noto Sans CJK KR"/>
-              </a:defRPr>
-            </a:pPr>
-            <a:r>
-              <a:t>• launch: package share·YAML key·실행 순서</a:t>
+              <a:t>• 각 milestone마다 command 결과와 정상 화면을 함께 저장한다.</a:t>
             </a:r>
           </a:p>
         </p:txBody>
@@ -49598,7 +53210,7 @@
               </a:defRPr>
             </a:pPr>
             <a:r>
-              <a:t>내 프로젝트 체크포인트를 저장하고 다음 모듈로 넘긴다</a:t>
+              <a:t>실패를 재현 가능하게 기록한다</a:t>
             </a:r>
           </a:p>
         </p:txBody>
@@ -49637,7 +53249,7 @@
               </a:defRPr>
             </a:pPr>
             <a:r>
-              <a:t>Complete는 복구용 비교 기준이고, 다음 단계는 내가 직접 만든 workspace에서 계속합니다.</a:t>
+              <a:t>통합 단계에서 놓치기 쉬운 실행·운영 조건을 정리합니다.</a:t>
             </a:r>
           </a:p>
         </p:txBody>
@@ -49773,7 +53385,7 @@
               </a:defRPr>
             </a:pPr>
             <a:r>
-              <a:t>현재 단계 체크포인트    |    현재 폴더 ~/ros2_curri/my_agv_ws    |    현재 터미널</a:t>
+              <a:t>현재 단계 통합 보강    |    현재 폴더 ~/ros2_curri/my_agv_ws    |    현재 터미널</a:t>
             </a:r>
           </a:p>
         </p:txBody>
@@ -49786,8 +53398,8 @@
         </p:nvSpPr>
         <p:spPr>
           <a:xfrm>
-            <a:off x="685800" y="1737360"/>
-            <a:ext cx="10972800" cy="3611880"/>
+            <a:off x="676656" y="1691640"/>
+            <a:ext cx="10972800" cy="4434840"/>
           </a:xfrm>
           <a:prstGeom prst="roundRect">
             <a:avLst/>
@@ -49797,7 +53409,7 @@
           </a:solidFill>
           <a:ln>
             <a:solidFill>
-              <a:srgbClr val="D2DCE8"/>
+              <a:srgbClr val="D2DEEC"/>
             </a:solidFill>
           </a:ln>
         </p:spPr>
@@ -49831,8 +53443,8 @@
         </p:nvSpPr>
         <p:spPr>
           <a:xfrm>
-            <a:off x="896112" y="1993392"/>
-            <a:ext cx="10332720" cy="2971800"/>
+            <a:off x="914400" y="1993392"/>
+            <a:ext cx="10332720" cy="3749039"/>
           </a:xfrm>
           <a:prstGeom prst="rect">
             <a:avLst/>
@@ -49849,7 +53461,7 @@
               <a:spcAft>
                 <a:spcPts val="800"/>
               </a:spcAft>
-              <a:defRPr sz="1800">
+              <a:defRPr sz="1900">
                 <a:solidFill>
                   <a:srgbClr val="122C4E"/>
                 </a:solidFill>
@@ -49857,7 +53469,7 @@
               </a:defRPr>
             </a:pPr>
             <a:r>
-              <a:t>• □ 완료 화면: 한 launch 실행, RViz/Gazebo 확인, mission log, rosbag 기록을 제출 체크리스트로 남긴다.</a:t>
+              <a:t>• topic: 이름·타입·publisher/subscriber 수</a:t>
             </a:r>
           </a:p>
           <a:p>
@@ -49865,7 +53477,7 @@
               <a:spcAft>
                 <a:spcPts val="800"/>
               </a:spcAft>
-              <a:defRPr sz="1800">
+              <a:defRPr sz="1900">
                 <a:solidFill>
                   <a:srgbClr val="122C4E"/>
                 </a:solidFill>
@@ -49873,7 +53485,7 @@
               </a:defRPr>
             </a:pPr>
             <a:r>
-              <a:t>• □ 막혔을 때 비교할 Complete: blocks/F_integration/M22_final_project/complete/</a:t>
+              <a:t>• TF: frame_id·parent/child·Fixed Frame</a:t>
             </a:r>
           </a:p>
           <a:p>
@@ -49881,7 +53493,7 @@
               <a:spcAft>
                 <a:spcPts val="800"/>
               </a:spcAft>
-              <a:defRPr sz="1800">
+              <a:defRPr sz="1900">
                 <a:solidFill>
                   <a:srgbClr val="122C4E"/>
                 </a:solidFill>
@@ -49889,7 +53501,7 @@
               </a:defRPr>
             </a:pPr>
             <a:r>
-              <a:t>• □ 정상 로그·캡처: logs/validation.log, screenshots/validation_terminal.png</a:t>
+              <a:t>• bridge: 방향·Gazebo/ROS type</a:t>
             </a:r>
           </a:p>
           <a:p>
@@ -49897,7 +53509,7 @@
               <a:spcAft>
                 <a:spcPts val="800"/>
               </a:spcAft>
-              <a:defRPr sz="1800">
+              <a:defRPr sz="1900">
                 <a:solidFill>
                   <a:srgbClr val="122C4E"/>
                 </a:solidFill>
@@ -49905,7 +53517,7 @@
               </a:defRPr>
             </a:pPr>
             <a:r>
-              <a:t>• □ 버전 식별: CHECKSUM_or_TAG.txt의 SHA-256 manifest</a:t>
+              <a:t>• physics: collision·friction·inertia</a:t>
             </a:r>
           </a:p>
           <a:p>
@@ -49913,7 +53525,7 @@
               <a:spcAft>
                 <a:spcPts val="800"/>
               </a:spcAft>
-              <a:defRPr sz="1800">
+              <a:defRPr sz="1900">
                 <a:solidFill>
                   <a:srgbClr val="122C4E"/>
                 </a:solidFill>
@@ -49921,46 +53533,7 @@
               </a:defRPr>
             </a:pPr>
             <a:r>
-              <a:t>• □ 다음 시작 조건: 핵심 과정 완료 → SLAM/Nav2 확장</a:t>
-            </a:r>
-          </a:p>
-        </p:txBody>
-      </p:sp>
-      <p:sp>
-        <p:nvSpPr>
-          <p:cNvPr id="9" name="TextBox 8"/>
-          <p:cNvSpPr txBox="1"/>
-          <p:nvPr/>
-        </p:nvSpPr>
-        <p:spPr>
-          <a:xfrm>
-            <a:off x="868680" y="5596128"/>
-            <a:ext cx="10515600" cy="338328"/>
-          </a:xfrm>
-          <a:prstGeom prst="rect">
-            <a:avLst/>
-          </a:prstGeom>
-          <a:noFill/>
-        </p:spPr>
-        <p:txBody>
-          <a:bodyPr wrap="square" lIns="73152" rIns="73152" tIns="36576" bIns="36576">
-            <a:spAutoFit/>
-          </a:bodyPr>
-          <a:lstStyle/>
-          <a:p>
-            <a:pPr algn="ctr">
-              <a:spcAft>
-                <a:spcPts val="0"/>
-              </a:spcAft>
-              <a:defRPr sz="1700" b="1">
-                <a:solidFill>
-                  <a:srgbClr val="2A8B5A"/>
-                </a:solidFill>
-                <a:latin typeface="Noto Sans CJK KR"/>
-              </a:defRPr>
-            </a:pPr>
-            <a:r>
-              <a:t>다음 모듈을 시작하기 전, 내 src의 변경사항을 저장하고 현재 완료 조건을 다시 확인합니다.</a:t>
+              <a:t>• launch: package share·YAML key·실행 순서</a:t>
             </a:r>
           </a:p>
         </p:txBody>
@@ -49974,6 +53547,425 @@
 </file>
 
 <file path=ppt/slides/slide77.xml><?xml version="1.0" encoding="utf-8"?>
+<p:sld xmlns:a="http://schemas.openxmlformats.org/drawingml/2006/main" xmlns:p="http://schemas.openxmlformats.org/presentationml/2006/main" xmlns:r="http://schemas.openxmlformats.org/officeDocument/2006/relationships">
+  <p:cSld>
+    <p:spTree>
+      <p:nvGrpSpPr>
+        <p:cNvPr id="1" name=""/>
+        <p:cNvGrpSpPr/>
+        <p:nvPr/>
+      </p:nvGrpSpPr>
+      <p:grpSpPr/>
+      <p:sp>
+        <p:nvSpPr>
+          <p:cNvPr id="2" name="TextBox 1"/>
+          <p:cNvSpPr txBox="1"/>
+          <p:nvPr/>
+        </p:nvSpPr>
+        <p:spPr>
+          <a:xfrm>
+            <a:off x="566928" y="347472"/>
+            <a:ext cx="10881360" cy="438912"/>
+          </a:xfrm>
+          <a:prstGeom prst="rect">
+            <a:avLst/>
+          </a:prstGeom>
+          <a:noFill/>
+        </p:spPr>
+        <p:txBody>
+          <a:bodyPr wrap="square" lIns="73152" rIns="73152" tIns="36576" bIns="36576">
+            <a:spAutoFit/>
+          </a:bodyPr>
+          <a:lstStyle/>
+          <a:p>
+            <a:pPr algn="l">
+              <a:spcAft>
+                <a:spcPts val="0"/>
+              </a:spcAft>
+              <a:defRPr sz="3200" b="1">
+                <a:solidFill>
+                  <a:srgbClr val="122C4E"/>
+                </a:solidFill>
+                <a:latin typeface="Noto Sans CJK KR"/>
+              </a:defRPr>
+            </a:pPr>
+            <a:r>
+              <a:t>내 프로젝트 체크포인트를 저장하고 다음 모듈로 넘긴다</a:t>
+            </a:r>
+          </a:p>
+        </p:txBody>
+      </p:sp>
+      <p:sp>
+        <p:nvSpPr>
+          <p:cNvPr id="3" name="TextBox 2"/>
+          <p:cNvSpPr txBox="1"/>
+          <p:nvPr/>
+        </p:nvSpPr>
+        <p:spPr>
+          <a:xfrm>
+            <a:off x="603504" y="859536"/>
+            <a:ext cx="10698480" cy="292608"/>
+          </a:xfrm>
+          <a:prstGeom prst="rect">
+            <a:avLst/>
+          </a:prstGeom>
+          <a:noFill/>
+        </p:spPr>
+        <p:txBody>
+          <a:bodyPr wrap="square" lIns="73152" rIns="73152" tIns="36576" bIns="36576">
+            <a:spAutoFit/>
+          </a:bodyPr>
+          <a:lstStyle/>
+          <a:p>
+            <a:pPr algn="l">
+              <a:spcAft>
+                <a:spcPts val="0"/>
+              </a:spcAft>
+              <a:defRPr sz="1700" b="0">
+                <a:solidFill>
+                  <a:srgbClr val="5C6672"/>
+                </a:solidFill>
+                <a:latin typeface="Noto Sans CJK KR"/>
+              </a:defRPr>
+            </a:pPr>
+            <a:r>
+              <a:t>Complete는 복구용 비교 기준이고, 다음 단계는 내가 직접 만든 workspace에서 계속합니다.</a:t>
+            </a:r>
+          </a:p>
+        </p:txBody>
+      </p:sp>
+      <p:sp>
+        <p:nvSpPr>
+          <p:cNvPr id="4" name="TextBox 3"/>
+          <p:cNvSpPr txBox="1"/>
+          <p:nvPr/>
+        </p:nvSpPr>
+        <p:spPr>
+          <a:xfrm>
+            <a:off x="530352" y="6510528"/>
+            <a:ext cx="7772400" cy="201168"/>
+          </a:xfrm>
+          <a:prstGeom prst="rect">
+            <a:avLst/>
+          </a:prstGeom>
+          <a:noFill/>
+        </p:spPr>
+        <p:txBody>
+          <a:bodyPr wrap="square" lIns="73152" rIns="73152" tIns="36576" bIns="36576">
+            <a:spAutoFit/>
+          </a:bodyPr>
+          <a:lstStyle/>
+          <a:p>
+            <a:pPr algn="l">
+              <a:spcAft>
+                <a:spcPts val="0"/>
+              </a:spcAft>
+              <a:defRPr sz="900" b="0">
+                <a:solidFill>
+                  <a:srgbClr val="5C6672"/>
+                </a:solidFill>
+                <a:latin typeface="Noto Sans CJK KR"/>
+              </a:defRPr>
+            </a:pPr>
+            <a:r>
+              <a:t>ROS 2 기반 AGV End-to-End 개발 커리큘럼 · M22 · Block F</a:t>
+            </a:r>
+          </a:p>
+        </p:txBody>
+      </p:sp>
+      <p:sp>
+        <p:nvSpPr>
+          <p:cNvPr id="5" name="TextBox 4"/>
+          <p:cNvSpPr txBox="1"/>
+          <p:nvPr/>
+        </p:nvSpPr>
+        <p:spPr>
+          <a:xfrm>
+            <a:off x="9144000" y="6510528"/>
+            <a:ext cx="2468880" cy="201168"/>
+          </a:xfrm>
+          <a:prstGeom prst="rect">
+            <a:avLst/>
+          </a:prstGeom>
+          <a:noFill/>
+        </p:spPr>
+        <p:txBody>
+          <a:bodyPr wrap="square" lIns="73152" rIns="73152" tIns="36576" bIns="36576">
+            <a:spAutoFit/>
+          </a:bodyPr>
+          <a:lstStyle/>
+          <a:p>
+            <a:pPr algn="r">
+              <a:spcAft>
+                <a:spcPts val="0"/>
+              </a:spcAft>
+              <a:defRPr sz="1000" b="0">
+                <a:solidFill>
+                  <a:srgbClr val="5C6672"/>
+                </a:solidFill>
+                <a:latin typeface="Noto Sans CJK KR"/>
+              </a:defRPr>
+            </a:pPr>
+            <a:r>
+              <a:t>명령·파일 경로는 슬라이드에서 복사 가능</a:t>
+            </a:r>
+          </a:p>
+        </p:txBody>
+      </p:sp>
+      <p:sp>
+        <p:nvSpPr>
+          <p:cNvPr id="6" name="Rectangle 5"/>
+          <p:cNvSpPr/>
+          <p:nvPr/>
+        </p:nvSpPr>
+        <p:spPr>
+          <a:xfrm>
+            <a:off x="566928" y="1188720"/>
+            <a:ext cx="11064240" cy="347472"/>
+          </a:xfrm>
+          <a:prstGeom prst="rect">
+            <a:avLst/>
+          </a:prstGeom>
+          <a:solidFill>
+            <a:srgbClr val="F4F7FB"/>
+          </a:solidFill>
+          <a:ln>
+            <a:solidFill>
+              <a:srgbClr val="F4F7FB"/>
+            </a:solidFill>
+          </a:ln>
+        </p:spPr>
+        <p:style>
+          <a:lnRef idx="1">
+            <a:schemeClr val="accent1"/>
+          </a:lnRef>
+          <a:fillRef idx="3">
+            <a:schemeClr val="accent1"/>
+          </a:fillRef>
+          <a:effectRef idx="2">
+            <a:schemeClr val="accent1"/>
+          </a:effectRef>
+          <a:fontRef idx="minor">
+            <a:schemeClr val="lt1"/>
+          </a:fontRef>
+        </p:style>
+        <p:txBody>
+          <a:bodyPr rtlCol="0" anchor="ctr" wrap="square" lIns="73152" rIns="73152" tIns="36576" bIns="36576"/>
+          <a:lstStyle/>
+          <a:p>
+            <a:pPr algn="l">
+              <a:spcAft>
+                <a:spcPts val="0"/>
+              </a:spcAft>
+              <a:defRPr sz="1300" b="1">
+                <a:solidFill>
+                  <a:srgbClr val="122C4E"/>
+                </a:solidFill>
+                <a:latin typeface="Noto Sans CJK KR"/>
+              </a:defRPr>
+            </a:pPr>
+            <a:r>
+              <a:t>현재 단계 체크포인트    |    현재 폴더 ~/ros2_curri/my_agv_ws    |    현재 터미널</a:t>
+            </a:r>
+          </a:p>
+        </p:txBody>
+      </p:sp>
+      <p:sp>
+        <p:nvSpPr>
+          <p:cNvPr id="7" name="Rounded Rectangle 6"/>
+          <p:cNvSpPr/>
+          <p:nvPr/>
+        </p:nvSpPr>
+        <p:spPr>
+          <a:xfrm>
+            <a:off x="685800" y="1737360"/>
+            <a:ext cx="10972800" cy="3611880"/>
+          </a:xfrm>
+          <a:prstGeom prst="roundRect">
+            <a:avLst/>
+          </a:prstGeom>
+          <a:solidFill>
+            <a:srgbClr val="F4F7FB"/>
+          </a:solidFill>
+          <a:ln>
+            <a:solidFill>
+              <a:srgbClr val="D2DCE8"/>
+            </a:solidFill>
+          </a:ln>
+        </p:spPr>
+        <p:style>
+          <a:lnRef idx="1">
+            <a:schemeClr val="accent1"/>
+          </a:lnRef>
+          <a:fillRef idx="3">
+            <a:schemeClr val="accent1"/>
+          </a:fillRef>
+          <a:effectRef idx="2">
+            <a:schemeClr val="accent1"/>
+          </a:effectRef>
+          <a:fontRef idx="minor">
+            <a:schemeClr val="lt1"/>
+          </a:fontRef>
+        </p:style>
+        <p:txBody>
+          <a:bodyPr rtlCol="0" anchor="ctr"/>
+          <a:lstStyle/>
+          <a:p>
+            <a:pPr algn="ctr"/>
+          </a:p>
+        </p:txBody>
+      </p:sp>
+      <p:sp>
+        <p:nvSpPr>
+          <p:cNvPr id="8" name="TextBox 7"/>
+          <p:cNvSpPr txBox="1"/>
+          <p:nvPr/>
+        </p:nvSpPr>
+        <p:spPr>
+          <a:xfrm>
+            <a:off x="896112" y="1993392"/>
+            <a:ext cx="10332720" cy="2971800"/>
+          </a:xfrm>
+          <a:prstGeom prst="rect">
+            <a:avLst/>
+          </a:prstGeom>
+          <a:noFill/>
+        </p:spPr>
+        <p:txBody>
+          <a:bodyPr wrap="square" lIns="109728" rIns="109728">
+            <a:spAutoFit/>
+          </a:bodyPr>
+          <a:lstStyle/>
+          <a:p>
+            <a:pPr>
+              <a:spcAft>
+                <a:spcPts val="800"/>
+              </a:spcAft>
+              <a:defRPr sz="1800">
+                <a:solidFill>
+                  <a:srgbClr val="122C4E"/>
+                </a:solidFill>
+                <a:latin typeface="Noto Sans CJK KR"/>
+              </a:defRPr>
+            </a:pPr>
+            <a:r>
+              <a:t>• □ 완료 화면: 한 launch 실행, RViz/Gazebo 확인, mission log, rosbag 기록을 제출 체크리스트로 남긴다.</a:t>
+            </a:r>
+          </a:p>
+          <a:p>
+            <a:pPr>
+              <a:spcAft>
+                <a:spcPts val="800"/>
+              </a:spcAft>
+              <a:defRPr sz="1800">
+                <a:solidFill>
+                  <a:srgbClr val="122C4E"/>
+                </a:solidFill>
+                <a:latin typeface="Noto Sans CJK KR"/>
+              </a:defRPr>
+            </a:pPr>
+            <a:r>
+              <a:t>• □ 막혔을 때 비교할 Complete: blocks/F_integration/M22_final_project/complete/</a:t>
+            </a:r>
+          </a:p>
+          <a:p>
+            <a:pPr>
+              <a:spcAft>
+                <a:spcPts val="800"/>
+              </a:spcAft>
+              <a:defRPr sz="1800">
+                <a:solidFill>
+                  <a:srgbClr val="122C4E"/>
+                </a:solidFill>
+                <a:latin typeface="Noto Sans CJK KR"/>
+              </a:defRPr>
+            </a:pPr>
+            <a:r>
+              <a:t>• □ 정상 로그·캡처: logs/validation.log, screenshots/validation_terminal.png</a:t>
+            </a:r>
+          </a:p>
+          <a:p>
+            <a:pPr>
+              <a:spcAft>
+                <a:spcPts val="800"/>
+              </a:spcAft>
+              <a:defRPr sz="1800">
+                <a:solidFill>
+                  <a:srgbClr val="122C4E"/>
+                </a:solidFill>
+                <a:latin typeface="Noto Sans CJK KR"/>
+              </a:defRPr>
+            </a:pPr>
+            <a:r>
+              <a:t>• □ 버전 식별: CHECKSUM_or_TAG.txt의 SHA-256 manifest</a:t>
+            </a:r>
+          </a:p>
+          <a:p>
+            <a:pPr>
+              <a:spcAft>
+                <a:spcPts val="800"/>
+              </a:spcAft>
+              <a:defRPr sz="1800">
+                <a:solidFill>
+                  <a:srgbClr val="122C4E"/>
+                </a:solidFill>
+                <a:latin typeface="Noto Sans CJK KR"/>
+              </a:defRPr>
+            </a:pPr>
+            <a:r>
+              <a:t>• □ 다음 시작 조건: 핵심 과정 완료 → SLAM/Nav2 확장</a:t>
+            </a:r>
+          </a:p>
+        </p:txBody>
+      </p:sp>
+      <p:sp>
+        <p:nvSpPr>
+          <p:cNvPr id="9" name="TextBox 8"/>
+          <p:cNvSpPr txBox="1"/>
+          <p:nvPr/>
+        </p:nvSpPr>
+        <p:spPr>
+          <a:xfrm>
+            <a:off x="868680" y="5596128"/>
+            <a:ext cx="10515600" cy="338328"/>
+          </a:xfrm>
+          <a:prstGeom prst="rect">
+            <a:avLst/>
+          </a:prstGeom>
+          <a:noFill/>
+        </p:spPr>
+        <p:txBody>
+          <a:bodyPr wrap="square" lIns="73152" rIns="73152" tIns="36576" bIns="36576">
+            <a:spAutoFit/>
+          </a:bodyPr>
+          <a:lstStyle/>
+          <a:p>
+            <a:pPr algn="ctr">
+              <a:spcAft>
+                <a:spcPts val="0"/>
+              </a:spcAft>
+              <a:defRPr sz="1700" b="1">
+                <a:solidFill>
+                  <a:srgbClr val="2A8B5A"/>
+                </a:solidFill>
+                <a:latin typeface="Noto Sans CJK KR"/>
+              </a:defRPr>
+            </a:pPr>
+            <a:r>
+              <a:t>다음 모듈을 시작하기 전, 내 src의 변경사항을 저장하고 현재 완료 조건을 다시 확인합니다.</a:t>
+            </a:r>
+          </a:p>
+        </p:txBody>
+      </p:sp>
+    </p:spTree>
+  </p:cSld>
+  <p:clrMapOvr>
+    <a:masterClrMapping/>
+  </p:clrMapOvr>
+</p:sld>
+</file>
+
+<file path=ppt/slides/slide78.xml><?xml version="1.0" encoding="utf-8"?>
 <p:sld xmlns:a="http://schemas.openxmlformats.org/drawingml/2006/main" xmlns:p="http://schemas.openxmlformats.org/presentationml/2006/main" xmlns:r="http://schemas.openxmlformats.org/officeDocument/2006/relationships">
   <p:cSld>
     <p:spTree>
